--- a/Lecture Notes/Section 2 - Introduction to Hadoop Eco System/2-Introduction to Hadoop Eco System.pptx
+++ b/Lecture Notes/Section 2 - Introduction to Hadoop Eco System/2-Introduction to Hadoop Eco System.pptx
@@ -5,7 +5,7 @@
     <p:sldMasterId id="2147483648" r:id="rId1"/>
   </p:sldMasterIdLst>
   <p:notesMasterIdLst>
-    <p:notesMasterId r:id="rId30"/>
+    <p:notesMasterId r:id="rId34"/>
   </p:notesMasterIdLst>
   <p:sldIdLst>
     <p:sldId id="256" r:id="rId2"/>
@@ -24,18 +24,22 @@
     <p:sldId id="329" r:id="rId15"/>
     <p:sldId id="272" r:id="rId16"/>
     <p:sldId id="321" r:id="rId17"/>
-    <p:sldId id="320" r:id="rId18"/>
+    <p:sldId id="335" r:id="rId18"/>
     <p:sldId id="328" r:id="rId19"/>
     <p:sldId id="322" r:id="rId20"/>
     <p:sldId id="274" r:id="rId21"/>
-    <p:sldId id="278" r:id="rId22"/>
-    <p:sldId id="326" r:id="rId23"/>
-    <p:sldId id="280" r:id="rId24"/>
-    <p:sldId id="281" r:id="rId25"/>
-    <p:sldId id="282" r:id="rId26"/>
-    <p:sldId id="325" r:id="rId27"/>
-    <p:sldId id="323" r:id="rId28"/>
-    <p:sldId id="324" r:id="rId29"/>
+    <p:sldId id="330" r:id="rId22"/>
+    <p:sldId id="278" r:id="rId23"/>
+    <p:sldId id="326" r:id="rId24"/>
+    <p:sldId id="280" r:id="rId25"/>
+    <p:sldId id="281" r:id="rId26"/>
+    <p:sldId id="282" r:id="rId27"/>
+    <p:sldId id="325" r:id="rId28"/>
+    <p:sldId id="323" r:id="rId29"/>
+    <p:sldId id="324" r:id="rId30"/>
+    <p:sldId id="334" r:id="rId31"/>
+    <p:sldId id="332" r:id="rId32"/>
+    <p:sldId id="333" r:id="rId33"/>
   </p:sldIdLst>
   <p:sldSz cx="12192000" cy="6858000"/>
   <p:notesSz cx="6858000" cy="9144000"/>
@@ -155,7 +159,9 @@
 <p1510:revInfo xmlns:a="http://schemas.openxmlformats.org/drawingml/2006/main" xmlns:r="http://schemas.openxmlformats.org/officeDocument/2006/relationships" xmlns:p1510="http://schemas.microsoft.com/office/powerpoint/2015/10/main">
   <p1510:revLst>
     <p1510:client id="{048CEBFD-D6A1-FF4F-145A-C5347D00F6D8}" v="1248" dt="2025-03-23T06:04:22.577"/>
+    <p1510:client id="{201C7D42-1F1C-B7C2-DD80-837CD0925F1E}" v="461" dt="2025-03-23T12:36:34.651"/>
     <p1510:client id="{2F52505F-0676-E1F8-3A9C-C74E2F5553F9}" v="50" dt="2025-03-23T06:07:34.188"/>
+    <p1510:client id="{36B9E10C-9544-F05A-23A9-185BAFD9898D}" v="80" dt="2025-03-23T12:04:32.957"/>
     <p1510:client id="{52B7A16F-CAD0-4D4D-9F9C-A24C8678CAD7}" v="140" dt="2025-03-23T08:12:51.874"/>
     <p1510:client id="{90B6B862-2DC7-460D-AAB2-4136282EE665}" v="16" dt="2025-03-22T15:29:43.330"/>
   </p1510:revLst>
@@ -165,313 +171,1666 @@
 <file path=ppt/changesInfos/changesInfo1.xml><?xml version="1.0" encoding="utf-8"?>
 <pc:chgInfo xmlns:a="http://schemas.openxmlformats.org/drawingml/2006/main" xmlns:r="http://schemas.openxmlformats.org/officeDocument/2006/relationships" xmlns:ac="http://schemas.microsoft.com/office/drawing/2013/main/command" xmlns:pc="http://schemas.microsoft.com/office/powerpoint/2013/main/command">
   <pc:docChgLst>
-    <pc:chgData name="Mohammed Fasha" userId="cc64f42d-a1a6-4f08-b97b-0c37f877119f" providerId="ADAL" clId="{52B7A16F-CAD0-4D4D-9F9C-A24C8678CAD7}"/>
-    <pc:docChg chg="undo custSel addSld delSld modSld">
-      <pc:chgData name="Mohammed Fasha" userId="cc64f42d-a1a6-4f08-b97b-0c37f877119f" providerId="ADAL" clId="{52B7A16F-CAD0-4D4D-9F9C-A24C8678CAD7}" dt="2025-03-23T08:12:51.858" v="440" actId="167"/>
+    <pc:chgData name="Mohammed Fasha" userId="S::mohammed.fasha@uop.edu.jo::cc64f42d-a1a6-4f08-b97b-0c37f877119f" providerId="AD" clId="Web-{201C7D42-1F1C-B7C2-DD80-837CD0925F1E}"/>
+    <pc:docChg chg="addSld delSld modSld">
+      <pc:chgData name="Mohammed Fasha" userId="S::mohammed.fasha@uop.edu.jo::cc64f42d-a1a6-4f08-b97b-0c37f877119f" providerId="AD" clId="Web-{201C7D42-1F1C-B7C2-DD80-837CD0925F1E}" dt="2025-03-23T12:36:34.651" v="413" actId="1076"/>
       <pc:docMkLst>
         <pc:docMk/>
       </pc:docMkLst>
-      <pc:sldChg chg="modSp mod">
-        <pc:chgData name="Mohammed Fasha" userId="cc64f42d-a1a6-4f08-b97b-0c37f877119f" providerId="ADAL" clId="{52B7A16F-CAD0-4D4D-9F9C-A24C8678CAD7}" dt="2025-03-23T07:38:06.248" v="0" actId="1076"/>
+      <pc:sldChg chg="addSp modSp">
+        <pc:chgData name="Mohammed Fasha" userId="S::mohammed.fasha@uop.edu.jo::cc64f42d-a1a6-4f08-b97b-0c37f877119f" providerId="AD" clId="Web-{201C7D42-1F1C-B7C2-DD80-837CD0925F1E}" dt="2025-03-23T12:35:02.129" v="388" actId="14100"/>
         <pc:sldMkLst>
           <pc:docMk/>
-          <pc:sldMk cId="0" sldId="260"/>
+          <pc:sldMk cId="0" sldId="272"/>
         </pc:sldMkLst>
+        <pc:spChg chg="mod">
+          <ac:chgData name="Mohammed Fasha" userId="S::mohammed.fasha@uop.edu.jo::cc64f42d-a1a6-4f08-b97b-0c37f877119f" providerId="AD" clId="Web-{201C7D42-1F1C-B7C2-DD80-837CD0925F1E}" dt="2025-03-23T12:32:41.442" v="332" actId="20577"/>
+          <ac:spMkLst>
+            <pc:docMk/>
+            <pc:sldMk cId="0" sldId="272"/>
+            <ac:spMk id="7" creationId="{BD008676-47C8-D88A-CD4A-65BB83D57162}"/>
+          </ac:spMkLst>
+        </pc:spChg>
+        <pc:spChg chg="add mod">
+          <ac:chgData name="Mohammed Fasha" userId="S::mohammed.fasha@uop.edu.jo::cc64f42d-a1a6-4f08-b97b-0c37f877119f" providerId="AD" clId="Web-{201C7D42-1F1C-B7C2-DD80-837CD0925F1E}" dt="2025-03-23T12:35:02.129" v="388" actId="14100"/>
+          <ac:spMkLst>
+            <pc:docMk/>
+            <pc:sldMk cId="0" sldId="272"/>
+            <ac:spMk id="8" creationId="{98B7FB4A-DB0E-01C4-3C0E-032767DA24F4}"/>
+          </ac:spMkLst>
+        </pc:spChg>
+      </pc:sldChg>
+      <pc:sldChg chg="modSp">
+        <pc:chgData name="Mohammed Fasha" userId="S::mohammed.fasha@uop.edu.jo::cc64f42d-a1a6-4f08-b97b-0c37f877119f" providerId="AD" clId="Web-{201C7D42-1F1C-B7C2-DD80-837CD0925F1E}" dt="2025-03-23T12:36:34.651" v="413" actId="1076"/>
+        <pc:sldMkLst>
+          <pc:docMk/>
+          <pc:sldMk cId="0" sldId="274"/>
+        </pc:sldMkLst>
+        <pc:spChg chg="mod">
+          <ac:chgData name="Mohammed Fasha" userId="S::mohammed.fasha@uop.edu.jo::cc64f42d-a1a6-4f08-b97b-0c37f877119f" providerId="AD" clId="Web-{201C7D42-1F1C-B7C2-DD80-837CD0925F1E}" dt="2025-03-23T12:36:31.432" v="411" actId="20577"/>
+          <ac:spMkLst>
+            <pc:docMk/>
+            <pc:sldMk cId="0" sldId="274"/>
+            <ac:spMk id="7" creationId="{CF4277E2-2BAC-D76F-20C6-A50B542D2495}"/>
+          </ac:spMkLst>
+        </pc:spChg>
         <pc:picChg chg="mod">
-          <ac:chgData name="Mohammed Fasha" userId="cc64f42d-a1a6-4f08-b97b-0c37f877119f" providerId="ADAL" clId="{52B7A16F-CAD0-4D4D-9F9C-A24C8678CAD7}" dt="2025-03-23T07:38:06.248" v="0" actId="1076"/>
+          <ac:chgData name="Mohammed Fasha" userId="S::mohammed.fasha@uop.edu.jo::cc64f42d-a1a6-4f08-b97b-0c37f877119f" providerId="AD" clId="Web-{201C7D42-1F1C-B7C2-DD80-837CD0925F1E}" dt="2025-03-23T12:36:34.651" v="413" actId="1076"/>
           <ac:picMkLst>
             <pc:docMk/>
-            <pc:sldMk cId="0" sldId="260"/>
+            <pc:sldMk cId="0" sldId="274"/>
             <ac:picMk id="4" creationId="{00000000-0000-0000-0000-000000000000}"/>
           </ac:picMkLst>
         </pc:picChg>
       </pc:sldChg>
-      <pc:sldChg chg="addSp delSp modSp mod">
-        <pc:chgData name="Mohammed Fasha" userId="cc64f42d-a1a6-4f08-b97b-0c37f877119f" providerId="ADAL" clId="{52B7A16F-CAD0-4D4D-9F9C-A24C8678CAD7}" dt="2025-03-23T07:53:24.379" v="210" actId="1037"/>
+      <pc:sldChg chg="addSp delSp modSp del">
+        <pc:chgData name="Mohammed Fasha" userId="S::mohammed.fasha@uop.edu.jo::cc64f42d-a1a6-4f08-b97b-0c37f877119f" providerId="AD" clId="Web-{201C7D42-1F1C-B7C2-DD80-837CD0925F1E}" dt="2025-03-23T12:33:44.545" v="354"/>
         <pc:sldMkLst>
           <pc:docMk/>
-          <pc:sldMk cId="0" sldId="268"/>
+          <pc:sldMk cId="414281864" sldId="320"/>
         </pc:sldMkLst>
-        <pc:spChg chg="mod">
-          <ac:chgData name="Mohammed Fasha" userId="cc64f42d-a1a6-4f08-b97b-0c37f877119f" providerId="ADAL" clId="{52B7A16F-CAD0-4D4D-9F9C-A24C8678CAD7}" dt="2025-03-23T07:52:27.822" v="194" actId="14100"/>
+        <pc:spChg chg="add mod">
+          <ac:chgData name="Mohammed Fasha" userId="S::mohammed.fasha@uop.edu.jo::cc64f42d-a1a6-4f08-b97b-0c37f877119f" providerId="AD" clId="Web-{201C7D42-1F1C-B7C2-DD80-837CD0925F1E}" dt="2025-03-23T12:32:50.990" v="337" actId="14100"/>
           <ac:spMkLst>
             <pc:docMk/>
-            <pc:sldMk cId="0" sldId="268"/>
-            <ac:spMk id="2" creationId="{00000000-0000-0000-0000-000000000000}"/>
+            <pc:sldMk cId="414281864" sldId="320"/>
+            <ac:spMk id="3" creationId="{6415D2B3-E528-9A48-0846-6D580189DCFF}"/>
+          </ac:spMkLst>
+        </pc:spChg>
+        <pc:spChg chg="add mod">
+          <ac:chgData name="Mohammed Fasha" userId="S::mohammed.fasha@uop.edu.jo::cc64f42d-a1a6-4f08-b97b-0c37f877119f" providerId="AD" clId="Web-{201C7D42-1F1C-B7C2-DD80-837CD0925F1E}" dt="2025-03-23T12:33:40.982" v="353"/>
+          <ac:spMkLst>
+            <pc:docMk/>
+            <pc:sldMk cId="414281864" sldId="320"/>
+            <ac:spMk id="6" creationId="{96CEABA3-6A15-29F4-21A7-2DD59BA75AEF}"/>
           </ac:spMkLst>
         </pc:spChg>
         <pc:picChg chg="del mod">
-          <ac:chgData name="Mohammed Fasha" userId="cc64f42d-a1a6-4f08-b97b-0c37f877119f" providerId="ADAL" clId="{52B7A16F-CAD0-4D4D-9F9C-A24C8678CAD7}" dt="2025-03-23T07:49:10.230" v="99" actId="21"/>
+          <ac:chgData name="Mohammed Fasha" userId="S::mohammed.fasha@uop.edu.jo::cc64f42d-a1a6-4f08-b97b-0c37f877119f" providerId="AD" clId="Web-{201C7D42-1F1C-B7C2-DD80-837CD0925F1E}" dt="2025-03-23T12:33:40.982" v="353"/>
           <ac:picMkLst>
             <pc:docMk/>
-            <pc:sldMk cId="0" sldId="268"/>
-            <ac:picMk id="3" creationId="{80666BF4-16FB-5F6D-681D-CB4B25AF4A97}"/>
-          </ac:picMkLst>
-        </pc:picChg>
-        <pc:picChg chg="add mod">
-          <ac:chgData name="Mohammed Fasha" userId="cc64f42d-a1a6-4f08-b97b-0c37f877119f" providerId="ADAL" clId="{52B7A16F-CAD0-4D4D-9F9C-A24C8678CAD7}" dt="2025-03-23T07:53:24.379" v="210" actId="1037"/>
-          <ac:picMkLst>
-            <pc:docMk/>
-            <pc:sldMk cId="0" sldId="268"/>
-            <ac:picMk id="4" creationId="{8938F170-AA00-1377-3C2D-9C4BA79F0B63}"/>
-          </ac:picMkLst>
-        </pc:picChg>
-        <pc:picChg chg="mod">
-          <ac:chgData name="Mohammed Fasha" userId="cc64f42d-a1a6-4f08-b97b-0c37f877119f" providerId="ADAL" clId="{52B7A16F-CAD0-4D4D-9F9C-A24C8678CAD7}" dt="2025-03-23T07:52:46.951" v="196" actId="1076"/>
-          <ac:picMkLst>
-            <pc:docMk/>
-            <pc:sldMk cId="0" sldId="268"/>
-            <ac:picMk id="1026" creationId="{6F3CBA0F-1E6C-643F-B94A-E0D29A10F4F2}"/>
-          </ac:picMkLst>
-        </pc:picChg>
-        <pc:picChg chg="add mod">
-          <ac:chgData name="Mohammed Fasha" userId="cc64f42d-a1a6-4f08-b97b-0c37f877119f" providerId="ADAL" clId="{52B7A16F-CAD0-4D4D-9F9C-A24C8678CAD7}" dt="2025-03-23T07:52:51.388" v="198" actId="1076"/>
-          <ac:picMkLst>
-            <pc:docMk/>
-            <pc:sldMk cId="0" sldId="268"/>
-            <ac:picMk id="3074" creationId="{CA531F7F-21C5-71FB-D0ED-F868724378F4}"/>
+            <pc:sldMk cId="414281864" sldId="320"/>
+            <ac:picMk id="4" creationId="{2B13B5C8-DB85-2B46-F1E5-328A8246D30B}"/>
           </ac:picMkLst>
         </pc:picChg>
       </pc:sldChg>
-      <pc:sldChg chg="modSp mod">
-        <pc:chgData name="Mohammed Fasha" userId="cc64f42d-a1a6-4f08-b97b-0c37f877119f" providerId="ADAL" clId="{52B7A16F-CAD0-4D4D-9F9C-A24C8678CAD7}" dt="2025-03-23T08:04:37.151" v="351" actId="1076"/>
+      <pc:sldChg chg="addSp delSp modSp">
+        <pc:chgData name="Mohammed Fasha" userId="S::mohammed.fasha@uop.edu.jo::cc64f42d-a1a6-4f08-b97b-0c37f877119f" providerId="AD" clId="Web-{201C7D42-1F1C-B7C2-DD80-837CD0925F1E}" dt="2025-03-23T12:32:06.408" v="330"/>
+        <pc:sldMkLst>
+          <pc:docMk/>
+          <pc:sldMk cId="2158520731" sldId="321"/>
+        </pc:sldMkLst>
+        <pc:spChg chg="mod">
+          <ac:chgData name="Mohammed Fasha" userId="S::mohammed.fasha@uop.edu.jo::cc64f42d-a1a6-4f08-b97b-0c37f877119f" providerId="AD" clId="Web-{201C7D42-1F1C-B7C2-DD80-837CD0925F1E}" dt="2025-03-23T12:29:56.352" v="245" actId="14100"/>
+          <ac:spMkLst>
+            <pc:docMk/>
+            <pc:sldMk cId="2158520731" sldId="321"/>
+            <ac:spMk id="2" creationId="{2CBE9B8D-9BCA-A077-FC54-F37DD1ED5A43}"/>
+          </ac:spMkLst>
+        </pc:spChg>
+        <pc:spChg chg="add del mod">
+          <ac:chgData name="Mohammed Fasha" userId="S::mohammed.fasha@uop.edu.jo::cc64f42d-a1a6-4f08-b97b-0c37f877119f" providerId="AD" clId="Web-{201C7D42-1F1C-B7C2-DD80-837CD0925F1E}" dt="2025-03-23T12:29:46.601" v="242"/>
+          <ac:spMkLst>
+            <pc:docMk/>
+            <pc:sldMk cId="2158520731" sldId="321"/>
+            <ac:spMk id="4" creationId="{D954ED0A-F52E-4186-6506-1DB6C0AD843E}"/>
+          </ac:spMkLst>
+        </pc:spChg>
+        <pc:spChg chg="mod">
+          <ac:chgData name="Mohammed Fasha" userId="S::mohammed.fasha@uop.edu.jo::cc64f42d-a1a6-4f08-b97b-0c37f877119f" providerId="AD" clId="Web-{201C7D42-1F1C-B7C2-DD80-837CD0925F1E}" dt="2025-03-23T12:31:01.716" v="274" actId="14100"/>
+          <ac:spMkLst>
+            <pc:docMk/>
+            <pc:sldMk cId="2158520731" sldId="321"/>
+            <ac:spMk id="6" creationId="{5CB15C33-8731-2AC8-2AA9-CC56BB604532}"/>
+          </ac:spMkLst>
+        </pc:spChg>
+        <pc:spChg chg="add del">
+          <ac:chgData name="Mohammed Fasha" userId="S::mohammed.fasha@uop.edu.jo::cc64f42d-a1a6-4f08-b97b-0c37f877119f" providerId="AD" clId="Web-{201C7D42-1F1C-B7C2-DD80-837CD0925F1E}" dt="2025-03-23T12:30:09.821" v="247"/>
+          <ac:spMkLst>
+            <pc:docMk/>
+            <pc:sldMk cId="2158520731" sldId="321"/>
+            <ac:spMk id="8" creationId="{6524E3C2-695B-BD76-2670-42DE7ED720CF}"/>
+          </ac:spMkLst>
+        </pc:spChg>
+        <pc:graphicFrameChg chg="mod modGraphic">
+          <ac:chgData name="Mohammed Fasha" userId="S::mohammed.fasha@uop.edu.jo::cc64f42d-a1a6-4f08-b97b-0c37f877119f" providerId="AD" clId="Web-{201C7D42-1F1C-B7C2-DD80-837CD0925F1E}" dt="2025-03-23T12:32:06.408" v="330"/>
+          <ac:graphicFrameMkLst>
+            <pc:docMk/>
+            <pc:sldMk cId="2158520731" sldId="321"/>
+            <ac:graphicFrameMk id="14" creationId="{68F65CD9-04AE-694C-CAF9-ABB6912D588B}"/>
+          </ac:graphicFrameMkLst>
+        </pc:graphicFrameChg>
+        <pc:picChg chg="del">
+          <ac:chgData name="Mohammed Fasha" userId="S::mohammed.fasha@uop.edu.jo::cc64f42d-a1a6-4f08-b97b-0c37f877119f" providerId="AD" clId="Web-{201C7D42-1F1C-B7C2-DD80-837CD0925F1E}" dt="2025-03-23T12:29:26.365" v="239"/>
+          <ac:picMkLst>
+            <pc:docMk/>
+            <pc:sldMk cId="2158520731" sldId="321"/>
+            <ac:picMk id="7" creationId="{3309D882-20A5-56F6-889C-7DC7D2DFDA86}"/>
+          </ac:picMkLst>
+        </pc:picChg>
+      </pc:sldChg>
+      <pc:sldChg chg="addSp delSp modSp">
+        <pc:chgData name="Mohammed Fasha" userId="S::mohammed.fasha@uop.edu.jo::cc64f42d-a1a6-4f08-b97b-0c37f877119f" providerId="AD" clId="Web-{201C7D42-1F1C-B7C2-DD80-837CD0925F1E}" dt="2025-03-23T12:20:46.326" v="64"/>
+        <pc:sldMkLst>
+          <pc:docMk/>
+          <pc:sldMk cId="323566195" sldId="323"/>
+        </pc:sldMkLst>
+        <pc:spChg chg="mod">
+          <ac:chgData name="Mohammed Fasha" userId="S::mohammed.fasha@uop.edu.jo::cc64f42d-a1a6-4f08-b97b-0c37f877119f" providerId="AD" clId="Web-{201C7D42-1F1C-B7C2-DD80-837CD0925F1E}" dt="2025-03-23T12:18:05.517" v="7" actId="20577"/>
+          <ac:spMkLst>
+            <pc:docMk/>
+            <pc:sldMk cId="323566195" sldId="323"/>
+            <ac:spMk id="2" creationId="{595498DF-D91B-3039-6A35-B1D5FAB6D692}"/>
+          </ac:spMkLst>
+        </pc:spChg>
+        <pc:spChg chg="add del mod">
+          <ac:chgData name="Mohammed Fasha" userId="S::mohammed.fasha@uop.edu.jo::cc64f42d-a1a6-4f08-b97b-0c37f877119f" providerId="AD" clId="Web-{201C7D42-1F1C-B7C2-DD80-837CD0925F1E}" dt="2025-03-23T12:19:29.492" v="27"/>
+          <ac:spMkLst>
+            <pc:docMk/>
+            <pc:sldMk cId="323566195" sldId="323"/>
+            <ac:spMk id="3" creationId="{CBC340C4-DE14-68A2-50C2-41566FF4A343}"/>
+          </ac:spMkLst>
+        </pc:spChg>
+        <pc:graphicFrameChg chg="mod modGraphic">
+          <ac:chgData name="Mohammed Fasha" userId="S::mohammed.fasha@uop.edu.jo::cc64f42d-a1a6-4f08-b97b-0c37f877119f" providerId="AD" clId="Web-{201C7D42-1F1C-B7C2-DD80-837CD0925F1E}" dt="2025-03-23T12:20:46.326" v="64"/>
+          <ac:graphicFrameMkLst>
+            <pc:docMk/>
+            <pc:sldMk cId="323566195" sldId="323"/>
+            <ac:graphicFrameMk id="82" creationId="{135E2F87-A441-0139-1576-BC186FCA12A1}"/>
+          </ac:graphicFrameMkLst>
+        </pc:graphicFrameChg>
+      </pc:sldChg>
+      <pc:sldChg chg="modSp">
+        <pc:chgData name="Mohammed Fasha" userId="S::mohammed.fasha@uop.edu.jo::cc64f42d-a1a6-4f08-b97b-0c37f877119f" providerId="AD" clId="Web-{201C7D42-1F1C-B7C2-DD80-837CD0925F1E}" dt="2025-03-23T12:19:03.928" v="15" actId="20577"/>
+        <pc:sldMkLst>
+          <pc:docMk/>
+          <pc:sldMk cId="2802975669" sldId="324"/>
+        </pc:sldMkLst>
+        <pc:spChg chg="mod">
+          <ac:chgData name="Mohammed Fasha" userId="S::mohammed.fasha@uop.edu.jo::cc64f42d-a1a6-4f08-b97b-0c37f877119f" providerId="AD" clId="Web-{201C7D42-1F1C-B7C2-DD80-837CD0925F1E}" dt="2025-03-23T12:19:03.928" v="15" actId="20577"/>
+          <ac:spMkLst>
+            <pc:docMk/>
+            <pc:sldMk cId="2802975669" sldId="324"/>
+            <ac:spMk id="2" creationId="{DD28BFAD-F7FC-EB4E-DB73-D0B4611BA46D}"/>
+          </ac:spMkLst>
+        </pc:spChg>
+      </pc:sldChg>
+      <pc:sldChg chg="modSp">
+        <pc:chgData name="Mohammed Fasha" userId="S::mohammed.fasha@uop.edu.jo::cc64f42d-a1a6-4f08-b97b-0c37f877119f" providerId="AD" clId="Web-{201C7D42-1F1C-B7C2-DD80-837CD0925F1E}" dt="2025-03-23T12:27:29.419" v="215" actId="20577"/>
+        <pc:sldMkLst>
+          <pc:docMk/>
+          <pc:sldMk cId="932796301" sldId="328"/>
+        </pc:sldMkLst>
+        <pc:spChg chg="mod">
+          <ac:chgData name="Mohammed Fasha" userId="S::mohammed.fasha@uop.edu.jo::cc64f42d-a1a6-4f08-b97b-0c37f877119f" providerId="AD" clId="Web-{201C7D42-1F1C-B7C2-DD80-837CD0925F1E}" dt="2025-03-23T12:27:29.419" v="215" actId="20577"/>
+          <ac:spMkLst>
+            <pc:docMk/>
+            <pc:sldMk cId="932796301" sldId="328"/>
+            <ac:spMk id="3" creationId="{3C3E019B-0F20-8E05-2053-6E145189E1FD}"/>
+          </ac:spMkLst>
+        </pc:spChg>
+      </pc:sldChg>
+      <pc:sldChg chg="addSp delSp modSp new del">
+        <pc:chgData name="Mohammed Fasha" userId="S::mohammed.fasha@uop.edu.jo::cc64f42d-a1a6-4f08-b97b-0c37f877119f" providerId="AD" clId="Web-{201C7D42-1F1C-B7C2-DD80-837CD0925F1E}" dt="2025-03-23T12:23:37.245" v="125"/>
+        <pc:sldMkLst>
+          <pc:docMk/>
+          <pc:sldMk cId="704117908" sldId="331"/>
+        </pc:sldMkLst>
+        <pc:spChg chg="del">
+          <ac:chgData name="Mohammed Fasha" userId="S::mohammed.fasha@uop.edu.jo::cc64f42d-a1a6-4f08-b97b-0c37f877119f" providerId="AD" clId="Web-{201C7D42-1F1C-B7C2-DD80-837CD0925F1E}" dt="2025-03-23T12:22:16.036" v="66"/>
+          <ac:spMkLst>
+            <pc:docMk/>
+            <pc:sldMk cId="704117908" sldId="331"/>
+            <ac:spMk id="3" creationId="{14888DAD-DF6B-FD8A-47BD-EC0A9BCD3E43}"/>
+          </ac:spMkLst>
+        </pc:spChg>
+        <pc:spChg chg="add mod">
+          <ac:chgData name="Mohammed Fasha" userId="S::mohammed.fasha@uop.edu.jo::cc64f42d-a1a6-4f08-b97b-0c37f877119f" providerId="AD" clId="Web-{201C7D42-1F1C-B7C2-DD80-837CD0925F1E}" dt="2025-03-23T12:22:16.208" v="68"/>
+          <ac:spMkLst>
+            <pc:docMk/>
+            <pc:sldMk cId="704117908" sldId="331"/>
+            <ac:spMk id="6" creationId="{A7AA9564-6E19-4116-86F2-FABD25A1A1A5}"/>
+          </ac:spMkLst>
+        </pc:spChg>
+        <pc:graphicFrameChg chg="add mod ord modGraphic">
+          <ac:chgData name="Mohammed Fasha" userId="S::mohammed.fasha@uop.edu.jo::cc64f42d-a1a6-4f08-b97b-0c37f877119f" providerId="AD" clId="Web-{201C7D42-1F1C-B7C2-DD80-837CD0925F1E}" dt="2025-03-23T12:22:16.036" v="66"/>
+          <ac:graphicFrameMkLst>
+            <pc:docMk/>
+            <pc:sldMk cId="704117908" sldId="331"/>
+            <ac:graphicFrameMk id="5" creationId="{7E69C729-99E5-0971-37B9-0D5E0F7A54F2}"/>
+          </ac:graphicFrameMkLst>
+        </pc:graphicFrameChg>
+      </pc:sldChg>
+      <pc:sldChg chg="modSp new">
+        <pc:chgData name="Mohammed Fasha" userId="S::mohammed.fasha@uop.edu.jo::cc64f42d-a1a6-4f08-b97b-0c37f877119f" providerId="AD" clId="Web-{201C7D42-1F1C-B7C2-DD80-837CD0925F1E}" dt="2025-03-23T12:23:26.354" v="123" actId="20577"/>
+        <pc:sldMkLst>
+          <pc:docMk/>
+          <pc:sldMk cId="2684285518" sldId="332"/>
+        </pc:sldMkLst>
+        <pc:spChg chg="mod">
+          <ac:chgData name="Mohammed Fasha" userId="S::mohammed.fasha@uop.edu.jo::cc64f42d-a1a6-4f08-b97b-0c37f877119f" providerId="AD" clId="Web-{201C7D42-1F1C-B7C2-DD80-837CD0925F1E}" dt="2025-03-23T12:23:26.354" v="123" actId="20577"/>
+          <ac:spMkLst>
+            <pc:docMk/>
+            <pc:sldMk cId="2684285518" sldId="332"/>
+            <ac:spMk id="2" creationId="{7B835121-B141-7218-B42D-1A517809491F}"/>
+          </ac:spMkLst>
+        </pc:spChg>
+        <pc:spChg chg="mod">
+          <ac:chgData name="Mohammed Fasha" userId="S::mohammed.fasha@uop.edu.jo::cc64f42d-a1a6-4f08-b97b-0c37f877119f" providerId="AD" clId="Web-{201C7D42-1F1C-B7C2-DD80-837CD0925F1E}" dt="2025-03-23T12:22:57.508" v="76" actId="20577"/>
+          <ac:spMkLst>
+            <pc:docMk/>
+            <pc:sldMk cId="2684285518" sldId="332"/>
+            <ac:spMk id="3" creationId="{0173D824-DE25-C32C-01F2-97287FB39040}"/>
+          </ac:spMkLst>
+        </pc:spChg>
+      </pc:sldChg>
+      <pc:sldChg chg="addSp delSp modSp new">
+        <pc:chgData name="Mohammed Fasha" userId="S::mohammed.fasha@uop.edu.jo::cc64f42d-a1a6-4f08-b97b-0c37f877119f" providerId="AD" clId="Web-{201C7D42-1F1C-B7C2-DD80-837CD0925F1E}" dt="2025-03-23T12:26:17.070" v="197" actId="20577"/>
+        <pc:sldMkLst>
+          <pc:docMk/>
+          <pc:sldMk cId="2087539751" sldId="333"/>
+        </pc:sldMkLst>
+        <pc:spChg chg="mod">
+          <ac:chgData name="Mohammed Fasha" userId="S::mohammed.fasha@uop.edu.jo::cc64f42d-a1a6-4f08-b97b-0c37f877119f" providerId="AD" clId="Web-{201C7D42-1F1C-B7C2-DD80-837CD0925F1E}" dt="2025-03-23T12:24:12.935" v="170" actId="20577"/>
+          <ac:spMkLst>
+            <pc:docMk/>
+            <pc:sldMk cId="2087539751" sldId="333"/>
+            <ac:spMk id="2" creationId="{32D77BF8-9EB6-EB2A-6FCA-BB3FE543BA98}"/>
+          </ac:spMkLst>
+        </pc:spChg>
+        <pc:spChg chg="del">
+          <ac:chgData name="Mohammed Fasha" userId="S::mohammed.fasha@uop.edu.jo::cc64f42d-a1a6-4f08-b97b-0c37f877119f" providerId="AD" clId="Web-{201C7D42-1F1C-B7C2-DD80-837CD0925F1E}" dt="2025-03-23T12:23:50.105" v="126"/>
+          <ac:spMkLst>
+            <pc:docMk/>
+            <pc:sldMk cId="2087539751" sldId="333"/>
+            <ac:spMk id="3" creationId="{B6C28580-7F8C-8B97-EE29-3277D6BBA93C}"/>
+          </ac:spMkLst>
+        </pc:spChg>
+        <pc:spChg chg="add del mod">
+          <ac:chgData name="Mohammed Fasha" userId="S::mohammed.fasha@uop.edu.jo::cc64f42d-a1a6-4f08-b97b-0c37f877119f" providerId="AD" clId="Web-{201C7D42-1F1C-B7C2-DD80-837CD0925F1E}" dt="2025-03-23T12:23:54.778" v="130"/>
+          <ac:spMkLst>
+            <pc:docMk/>
+            <pc:sldMk cId="2087539751" sldId="333"/>
+            <ac:spMk id="6" creationId="{070B8C86-DCCD-9D1B-BFDD-ECFCB1AF682F}"/>
+          </ac:spMkLst>
+        </pc:spChg>
+        <pc:spChg chg="add mod">
+          <ac:chgData name="Mohammed Fasha" userId="S::mohammed.fasha@uop.edu.jo::cc64f42d-a1a6-4f08-b97b-0c37f877119f" providerId="AD" clId="Web-{201C7D42-1F1C-B7C2-DD80-837CD0925F1E}" dt="2025-03-23T12:26:17.070" v="197" actId="20577"/>
+          <ac:spMkLst>
+            <pc:docMk/>
+            <pc:sldMk cId="2087539751" sldId="333"/>
+            <ac:spMk id="7" creationId="{0A67F442-A4EE-C664-5810-41DD02FE24D6}"/>
+          </ac:spMkLst>
+        </pc:spChg>
+        <pc:graphicFrameChg chg="add mod ord modGraphic">
+          <ac:chgData name="Mohammed Fasha" userId="S::mohammed.fasha@uop.edu.jo::cc64f42d-a1a6-4f08-b97b-0c37f877119f" providerId="AD" clId="Web-{201C7D42-1F1C-B7C2-DD80-837CD0925F1E}" dt="2025-03-23T12:24:34.874" v="183"/>
+          <ac:graphicFrameMkLst>
+            <pc:docMk/>
+            <pc:sldMk cId="2087539751" sldId="333"/>
+            <ac:graphicFrameMk id="5" creationId="{B49131E5-D272-CD58-3F5C-9B41C4487AEC}"/>
+          </ac:graphicFrameMkLst>
+        </pc:graphicFrameChg>
+      </pc:sldChg>
+      <pc:sldChg chg="modSp new mod modClrScheme chgLayout">
+        <pc:chgData name="Mohammed Fasha" userId="S::mohammed.fasha@uop.edu.jo::cc64f42d-a1a6-4f08-b97b-0c37f877119f" providerId="AD" clId="Web-{201C7D42-1F1C-B7C2-DD80-837CD0925F1E}" dt="2025-03-23T12:26:54.182" v="201" actId="20577"/>
+        <pc:sldMkLst>
+          <pc:docMk/>
+          <pc:sldMk cId="2275966120" sldId="334"/>
+        </pc:sldMkLst>
+        <pc:spChg chg="mod ord">
+          <ac:chgData name="Mohammed Fasha" userId="S::mohammed.fasha@uop.edu.jo::cc64f42d-a1a6-4f08-b97b-0c37f877119f" providerId="AD" clId="Web-{201C7D42-1F1C-B7C2-DD80-837CD0925F1E}" dt="2025-03-23T12:26:54.182" v="201" actId="20577"/>
+          <ac:spMkLst>
+            <pc:docMk/>
+            <pc:sldMk cId="2275966120" sldId="334"/>
+            <ac:spMk id="2" creationId="{C1CCCE25-35C5-F8C2-93F3-75E6F478CF44}"/>
+          </ac:spMkLst>
+        </pc:spChg>
+        <pc:spChg chg="mod ord">
+          <ac:chgData name="Mohammed Fasha" userId="S::mohammed.fasha@uop.edu.jo::cc64f42d-a1a6-4f08-b97b-0c37f877119f" providerId="AD" clId="Web-{201C7D42-1F1C-B7C2-DD80-837CD0925F1E}" dt="2025-03-23T12:26:50.010" v="199"/>
+          <ac:spMkLst>
+            <pc:docMk/>
+            <pc:sldMk cId="2275966120" sldId="334"/>
+            <ac:spMk id="3" creationId="{502C69CE-4637-39A9-33A6-B5CFBD5A58A9}"/>
+          </ac:spMkLst>
+        </pc:spChg>
+      </pc:sldChg>
+      <pc:sldChg chg="addSp modSp new">
+        <pc:chgData name="Mohammed Fasha" userId="S::mohammed.fasha@uop.edu.jo::cc64f42d-a1a6-4f08-b97b-0c37f877119f" providerId="AD" clId="Web-{201C7D42-1F1C-B7C2-DD80-837CD0925F1E}" dt="2025-03-23T12:34:23.220" v="365" actId="1076"/>
+        <pc:sldMkLst>
+          <pc:docMk/>
+          <pc:sldMk cId="4251754830" sldId="335"/>
+        </pc:sldMkLst>
+        <pc:spChg chg="mod">
+          <ac:chgData name="Mohammed Fasha" userId="S::mohammed.fasha@uop.edu.jo::cc64f42d-a1a6-4f08-b97b-0c37f877119f" providerId="AD" clId="Web-{201C7D42-1F1C-B7C2-DD80-837CD0925F1E}" dt="2025-03-23T12:34:05.656" v="361" actId="14100"/>
+          <ac:spMkLst>
+            <pc:docMk/>
+            <pc:sldMk cId="4251754830" sldId="335"/>
+            <ac:spMk id="2" creationId="{880BEA05-F32B-B175-AA7B-47CBCB32C4E0}"/>
+          </ac:spMkLst>
+        </pc:spChg>
+        <pc:spChg chg="mod">
+          <ac:chgData name="Mohammed Fasha" userId="S::mohammed.fasha@uop.edu.jo::cc64f42d-a1a6-4f08-b97b-0c37f877119f" providerId="AD" clId="Web-{201C7D42-1F1C-B7C2-DD80-837CD0925F1E}" dt="2025-03-23T12:33:56.639" v="360" actId="14100"/>
+          <ac:spMkLst>
+            <pc:docMk/>
+            <pc:sldMk cId="4251754830" sldId="335"/>
+            <ac:spMk id="3" creationId="{1821722D-3CE7-874F-C927-A9A7BB997821}"/>
+          </ac:spMkLst>
+        </pc:spChg>
+        <pc:picChg chg="add mod">
+          <ac:chgData name="Mohammed Fasha" userId="S::mohammed.fasha@uop.edu.jo::cc64f42d-a1a6-4f08-b97b-0c37f877119f" providerId="AD" clId="Web-{201C7D42-1F1C-B7C2-DD80-837CD0925F1E}" dt="2025-03-23T12:34:23.220" v="365" actId="1076"/>
+          <ac:picMkLst>
+            <pc:docMk/>
+            <pc:sldMk cId="4251754830" sldId="335"/>
+            <ac:picMk id="4" creationId="{24975023-F336-E81B-3410-B0E86A42F3E0}"/>
+          </ac:picMkLst>
+        </pc:picChg>
+      </pc:sldChg>
+    </pc:docChg>
+  </pc:docChgLst>
+  <pc:docChgLst>
+    <pc:chgData name="Mohammed Fasha" userId="S::mohammed.fasha@uop.edu.jo::cc64f42d-a1a6-4f08-b97b-0c37f877119f" providerId="AD" clId="Web-{048CEBFD-D6A1-FF4F-145A-C5347D00F6D8}"/>
+    <pc:docChg chg="addSld delSld modSld">
+      <pc:chgData name="Mohammed Fasha" userId="S::mohammed.fasha@uop.edu.jo::cc64f42d-a1a6-4f08-b97b-0c37f877119f" providerId="AD" clId="Web-{048CEBFD-D6A1-FF4F-145A-C5347D00F6D8}" dt="2025-03-23T06:04:22.577" v="1166" actId="20577"/>
+      <pc:docMkLst>
+        <pc:docMk/>
+      </pc:docMkLst>
+      <pc:sldChg chg="modSp">
+        <pc:chgData name="Mohammed Fasha" userId="S::mohammed.fasha@uop.edu.jo::cc64f42d-a1a6-4f08-b97b-0c37f877119f" providerId="AD" clId="Web-{048CEBFD-D6A1-FF4F-145A-C5347D00F6D8}" dt="2025-03-23T04:07:54.621" v="655" actId="20577"/>
         <pc:sldMkLst>
           <pc:docMk/>
           <pc:sldMk cId="0" sldId="272"/>
         </pc:sldMkLst>
-        <pc:picChg chg="mod">
-          <ac:chgData name="Mohammed Fasha" userId="cc64f42d-a1a6-4f08-b97b-0c37f877119f" providerId="ADAL" clId="{52B7A16F-CAD0-4D4D-9F9C-A24C8678CAD7}" dt="2025-03-23T08:04:37.151" v="351" actId="1076"/>
-          <ac:picMkLst>
+        <pc:spChg chg="mod">
+          <ac:chgData name="Mohammed Fasha" userId="S::mohammed.fasha@uop.edu.jo::cc64f42d-a1a6-4f08-b97b-0c37f877119f" providerId="AD" clId="Web-{048CEBFD-D6A1-FF4F-145A-C5347D00F6D8}" dt="2025-03-23T04:07:54.621" v="655" actId="20577"/>
+          <ac:spMkLst>
             <pc:docMk/>
             <pc:sldMk cId="0" sldId="272"/>
-            <ac:picMk id="3" creationId="{00000000-0000-0000-0000-000000000000}"/>
-          </ac:picMkLst>
-        </pc:picChg>
+            <ac:spMk id="7" creationId="{BD008676-47C8-D88A-CD4A-65BB83D57162}"/>
+          </ac:spMkLst>
+        </pc:spChg>
       </pc:sldChg>
-      <pc:sldChg chg="addSp delSp modSp mod">
-        <pc:chgData name="Mohammed Fasha" userId="cc64f42d-a1a6-4f08-b97b-0c37f877119f" providerId="ADAL" clId="{52B7A16F-CAD0-4D4D-9F9C-A24C8678CAD7}" dt="2025-03-23T07:57:49.782" v="247" actId="113"/>
+      <pc:sldChg chg="del">
+        <pc:chgData name="Mohammed Fasha" userId="S::mohammed.fasha@uop.edu.jo::cc64f42d-a1a6-4f08-b97b-0c37f877119f" providerId="AD" clId="Web-{048CEBFD-D6A1-FF4F-145A-C5347D00F6D8}" dt="2025-03-23T03:16:25.599" v="434"/>
+        <pc:sldMkLst>
+          <pc:docMk/>
+          <pc:sldMk cId="441052949" sldId="309"/>
+        </pc:sldMkLst>
+      </pc:sldChg>
+      <pc:sldChg chg="del">
+        <pc:chgData name="Mohammed Fasha" userId="S::mohammed.fasha@uop.edu.jo::cc64f42d-a1a6-4f08-b97b-0c37f877119f" providerId="AD" clId="Web-{048CEBFD-D6A1-FF4F-145A-C5347D00F6D8}" dt="2025-03-23T03:16:27.646" v="435"/>
+        <pc:sldMkLst>
+          <pc:docMk/>
+          <pc:sldMk cId="4115587381" sldId="311"/>
+        </pc:sldMkLst>
+      </pc:sldChg>
+      <pc:sldChg chg="del">
+        <pc:chgData name="Mohammed Fasha" userId="S::mohammed.fasha@uop.edu.jo::cc64f42d-a1a6-4f08-b97b-0c37f877119f" providerId="AD" clId="Web-{048CEBFD-D6A1-FF4F-145A-C5347D00F6D8}" dt="2025-03-23T03:16:34.240" v="436"/>
+        <pc:sldMkLst>
+          <pc:docMk/>
+          <pc:sldMk cId="1008151712" sldId="313"/>
+        </pc:sldMkLst>
+      </pc:sldChg>
+      <pc:sldChg chg="modSp">
+        <pc:chgData name="Mohammed Fasha" userId="S::mohammed.fasha@uop.edu.jo::cc64f42d-a1a6-4f08-b97b-0c37f877119f" providerId="AD" clId="Web-{048CEBFD-D6A1-FF4F-145A-C5347D00F6D8}" dt="2025-03-23T06:04:22.577" v="1166" actId="20577"/>
         <pc:sldMkLst>
           <pc:docMk/>
           <pc:sldMk cId="1864506158" sldId="314"/>
         </pc:sldMkLst>
         <pc:spChg chg="mod">
-          <ac:chgData name="Mohammed Fasha" userId="cc64f42d-a1a6-4f08-b97b-0c37f877119f" providerId="ADAL" clId="{52B7A16F-CAD0-4D4D-9F9C-A24C8678CAD7}" dt="2025-03-23T07:45:37.830" v="55" actId="27636"/>
-          <ac:spMkLst>
-            <pc:docMk/>
-            <pc:sldMk cId="1864506158" sldId="314"/>
-            <ac:spMk id="2" creationId="{2531B878-DED6-1381-4B52-F683EA36A7F3}"/>
-          </ac:spMkLst>
-        </pc:spChg>
-        <pc:spChg chg="mod">
-          <ac:chgData name="Mohammed Fasha" userId="cc64f42d-a1a6-4f08-b97b-0c37f877119f" providerId="ADAL" clId="{52B7A16F-CAD0-4D4D-9F9C-A24C8678CAD7}" dt="2025-03-23T07:57:49.782" v="247" actId="113"/>
+          <ac:chgData name="Mohammed Fasha" userId="S::mohammed.fasha@uop.edu.jo::cc64f42d-a1a6-4f08-b97b-0c37f877119f" providerId="AD" clId="Web-{048CEBFD-D6A1-FF4F-145A-C5347D00F6D8}" dt="2025-03-23T06:04:22.577" v="1166" actId="20577"/>
           <ac:spMkLst>
             <pc:docMk/>
             <pc:sldMk cId="1864506158" sldId="314"/>
             <ac:spMk id="3" creationId="{4961BB54-A79B-91B6-2B3E-888FA20CC61F}"/>
           </ac:spMkLst>
         </pc:spChg>
+      </pc:sldChg>
+      <pc:sldChg chg="modSp">
+        <pc:chgData name="Mohammed Fasha" userId="S::mohammed.fasha@uop.edu.jo::cc64f42d-a1a6-4f08-b97b-0c37f877119f" providerId="AD" clId="Web-{048CEBFD-D6A1-FF4F-145A-C5347D00F6D8}" dt="2025-03-23T03:13:33.830" v="401" actId="20577"/>
+        <pc:sldMkLst>
+          <pc:docMk/>
+          <pc:sldMk cId="2845841377" sldId="315"/>
+        </pc:sldMkLst>
+        <pc:spChg chg="mod">
+          <ac:chgData name="Mohammed Fasha" userId="S::mohammed.fasha@uop.edu.jo::cc64f42d-a1a6-4f08-b97b-0c37f877119f" providerId="AD" clId="Web-{048CEBFD-D6A1-FF4F-145A-C5347D00F6D8}" dt="2025-03-23T03:13:33.830" v="401" actId="20577"/>
+          <ac:spMkLst>
+            <pc:docMk/>
+            <pc:sldMk cId="2845841377" sldId="315"/>
+            <ac:spMk id="3" creationId="{FFE21ADB-E900-3A47-B3AD-FE93A73B6920}"/>
+          </ac:spMkLst>
+        </pc:spChg>
+      </pc:sldChg>
+      <pc:sldChg chg="del">
+        <pc:chgData name="Mohammed Fasha" userId="S::mohammed.fasha@uop.edu.jo::cc64f42d-a1a6-4f08-b97b-0c37f877119f" providerId="AD" clId="Web-{048CEBFD-D6A1-FF4F-145A-C5347D00F6D8}" dt="2025-03-23T02:57:56.519" v="0"/>
+        <pc:sldMkLst>
+          <pc:docMk/>
+          <pc:sldMk cId="4201170802" sldId="316"/>
+        </pc:sldMkLst>
+      </pc:sldChg>
+      <pc:sldChg chg="del">
+        <pc:chgData name="Mohammed Fasha" userId="S::mohammed.fasha@uop.edu.jo::cc64f42d-a1a6-4f08-b97b-0c37f877119f" providerId="AD" clId="Web-{048CEBFD-D6A1-FF4F-145A-C5347D00F6D8}" dt="2025-03-23T03:16:16.630" v="433"/>
+        <pc:sldMkLst>
+          <pc:docMk/>
+          <pc:sldMk cId="3352190066" sldId="317"/>
+        </pc:sldMkLst>
+      </pc:sldChg>
+      <pc:sldChg chg="modSp new del">
+        <pc:chgData name="Mohammed Fasha" userId="S::mohammed.fasha@uop.edu.jo::cc64f42d-a1a6-4f08-b97b-0c37f877119f" providerId="AD" clId="Web-{048CEBFD-D6A1-FF4F-145A-C5347D00F6D8}" dt="2025-03-23T03:10:23.882" v="393"/>
+        <pc:sldMkLst>
+          <pc:docMk/>
+          <pc:sldMk cId="4008238018" sldId="318"/>
+        </pc:sldMkLst>
+        <pc:spChg chg="mod">
+          <ac:chgData name="Mohammed Fasha" userId="S::mohammed.fasha@uop.edu.jo::cc64f42d-a1a6-4f08-b97b-0c37f877119f" providerId="AD" clId="Web-{048CEBFD-D6A1-FF4F-145A-C5347D00F6D8}" dt="2025-03-23T02:59:07.833" v="41" actId="20577"/>
+          <ac:spMkLst>
+            <pc:docMk/>
+            <pc:sldMk cId="4008238018" sldId="318"/>
+            <ac:spMk id="2" creationId="{D3C7D4FA-5F70-B500-9517-CC645EBDA78B}"/>
+          </ac:spMkLst>
+        </pc:spChg>
+        <pc:spChg chg="mod">
+          <ac:chgData name="Mohammed Fasha" userId="S::mohammed.fasha@uop.edu.jo::cc64f42d-a1a6-4f08-b97b-0c37f877119f" providerId="AD" clId="Web-{048CEBFD-D6A1-FF4F-145A-C5347D00F6D8}" dt="2025-03-23T02:58:49.098" v="10" actId="20577"/>
+          <ac:spMkLst>
+            <pc:docMk/>
+            <pc:sldMk cId="4008238018" sldId="318"/>
+            <ac:spMk id="3" creationId="{1FA43FC1-28CF-9D48-79EA-ADC996ACCB93}"/>
+          </ac:spMkLst>
+        </pc:spChg>
+      </pc:sldChg>
+      <pc:sldChg chg="addSp delSp modSp new del">
+        <pc:chgData name="Mohammed Fasha" userId="S::mohammed.fasha@uop.edu.jo::cc64f42d-a1a6-4f08-b97b-0c37f877119f" providerId="AD" clId="Web-{048CEBFD-D6A1-FF4F-145A-C5347D00F6D8}" dt="2025-03-23T04:04:13.661" v="626"/>
+        <pc:sldMkLst>
+          <pc:docMk/>
+          <pc:sldMk cId="3382703493" sldId="319"/>
+        </pc:sldMkLst>
+        <pc:spChg chg="mod">
+          <ac:chgData name="Mohammed Fasha" userId="S::mohammed.fasha@uop.edu.jo::cc64f42d-a1a6-4f08-b97b-0c37f877119f" providerId="AD" clId="Web-{048CEBFD-D6A1-FF4F-145A-C5347D00F6D8}" dt="2025-03-23T03:15:59.411" v="430" actId="14100"/>
+          <ac:spMkLst>
+            <pc:docMk/>
+            <pc:sldMk cId="3382703493" sldId="319"/>
+            <ac:spMk id="2" creationId="{F1D673AF-4F04-DB12-0F9A-6102FE3ABB44}"/>
+          </ac:spMkLst>
+        </pc:spChg>
+        <pc:spChg chg="mod">
+          <ac:chgData name="Mohammed Fasha" userId="S::mohammed.fasha@uop.edu.jo::cc64f42d-a1a6-4f08-b97b-0c37f877119f" providerId="AD" clId="Web-{048CEBFD-D6A1-FF4F-145A-C5347D00F6D8}" dt="2025-03-23T03:15:36.473" v="423" actId="14100"/>
+          <ac:spMkLst>
+            <pc:docMk/>
+            <pc:sldMk cId="3382703493" sldId="319"/>
+            <ac:spMk id="3" creationId="{A573E5E7-FA1F-82A1-2553-7E408E40D30E}"/>
+          </ac:spMkLst>
+        </pc:spChg>
+        <pc:spChg chg="add mod">
+          <ac:chgData name="Mohammed Fasha" userId="S::mohammed.fasha@uop.edu.jo::cc64f42d-a1a6-4f08-b97b-0c37f877119f" providerId="AD" clId="Web-{048CEBFD-D6A1-FF4F-145A-C5347D00F6D8}" dt="2025-03-23T03:15:45.926" v="425" actId="14100"/>
+          <ac:spMkLst>
+            <pc:docMk/>
+            <pc:sldMk cId="3382703493" sldId="319"/>
+            <ac:spMk id="4" creationId="{4FDB67D6-61D4-ABF8-861E-FC65D126A53D}"/>
+          </ac:spMkLst>
+        </pc:spChg>
+        <pc:graphicFrameChg chg="add mod modGraphic">
+          <ac:chgData name="Mohammed Fasha" userId="S::mohammed.fasha@uop.edu.jo::cc64f42d-a1a6-4f08-b97b-0c37f877119f" providerId="AD" clId="Web-{048CEBFD-D6A1-FF4F-145A-C5347D00F6D8}" dt="2025-03-23T03:16:11.817" v="432" actId="1076"/>
+          <ac:graphicFrameMkLst>
+            <pc:docMk/>
+            <pc:sldMk cId="3382703493" sldId="319"/>
+            <ac:graphicFrameMk id="6" creationId="{89A96ED2-14FC-3A8F-A82A-2677B3E06006}"/>
+          </ac:graphicFrameMkLst>
+        </pc:graphicFrameChg>
         <pc:picChg chg="add del mod">
-          <ac:chgData name="Mohammed Fasha" userId="cc64f42d-a1a6-4f08-b97b-0c37f877119f" providerId="ADAL" clId="{52B7A16F-CAD0-4D4D-9F9C-A24C8678CAD7}" dt="2025-03-23T07:49:26.220" v="103" actId="21"/>
+          <ac:chgData name="Mohammed Fasha" userId="S::mohammed.fasha@uop.edu.jo::cc64f42d-a1a6-4f08-b97b-0c37f877119f" providerId="AD" clId="Web-{048CEBFD-D6A1-FF4F-145A-C5347D00F6D8}" dt="2025-03-23T04:00:49.057" v="516"/>
           <ac:picMkLst>
             <pc:docMk/>
-            <pc:sldMk cId="1864506158" sldId="314"/>
-            <ac:picMk id="4" creationId="{80666BF4-16FB-5F6D-681D-CB4B25AF4A97}"/>
+            <pc:sldMk cId="3382703493" sldId="319"/>
+            <ac:picMk id="7" creationId="{D10277A6-4FF6-D9DA-1AE1-C6C6ECA8F6A7}"/>
+          </ac:picMkLst>
+        </pc:picChg>
+      </pc:sldChg>
+      <pc:sldChg chg="addSp delSp modSp new">
+        <pc:chgData name="Mohammed Fasha" userId="S::mohammed.fasha@uop.edu.jo::cc64f42d-a1a6-4f08-b97b-0c37f877119f" providerId="AD" clId="Web-{048CEBFD-D6A1-FF4F-145A-C5347D00F6D8}" dt="2025-03-23T03:59:21.366" v="441" actId="1076"/>
+        <pc:sldMkLst>
+          <pc:docMk/>
+          <pc:sldMk cId="414281864" sldId="320"/>
+        </pc:sldMkLst>
+        <pc:spChg chg="mod">
+          <ac:chgData name="Mohammed Fasha" userId="S::mohammed.fasha@uop.edu.jo::cc64f42d-a1a6-4f08-b97b-0c37f877119f" providerId="AD" clId="Web-{048CEBFD-D6A1-FF4F-145A-C5347D00F6D8}" dt="2025-03-23T03:59:21.366" v="441" actId="1076"/>
+          <ac:spMkLst>
+            <pc:docMk/>
+            <pc:sldMk cId="414281864" sldId="320"/>
+            <ac:spMk id="2" creationId="{825E0878-CCF5-3464-A19A-DADCC246320F}"/>
+          </ac:spMkLst>
+        </pc:spChg>
+        <pc:spChg chg="del">
+          <ac:chgData name="Mohammed Fasha" userId="S::mohammed.fasha@uop.edu.jo::cc64f42d-a1a6-4f08-b97b-0c37f877119f" providerId="AD" clId="Web-{048CEBFD-D6A1-FF4F-145A-C5347D00F6D8}" dt="2025-03-23T03:04:08.058" v="115"/>
+          <ac:spMkLst>
+            <pc:docMk/>
+            <pc:sldMk cId="414281864" sldId="320"/>
+            <ac:spMk id="3" creationId="{9386E65B-B9D2-8ABC-98FF-5F8E2A8C6674}"/>
+          </ac:spMkLst>
+        </pc:spChg>
+        <pc:picChg chg="add mod ord">
+          <ac:chgData name="Mohammed Fasha" userId="S::mohammed.fasha@uop.edu.jo::cc64f42d-a1a6-4f08-b97b-0c37f877119f" providerId="AD" clId="Web-{048CEBFD-D6A1-FF4F-145A-C5347D00F6D8}" dt="2025-03-23T03:59:15.194" v="439" actId="1076"/>
+          <ac:picMkLst>
+            <pc:docMk/>
+            <pc:sldMk cId="414281864" sldId="320"/>
+            <ac:picMk id="4" creationId="{2B13B5C8-DB85-2B46-F1E5-328A8246D30B}"/>
           </ac:picMkLst>
         </pc:picChg>
         <pc:picChg chg="add del mod">
-          <ac:chgData name="Mohammed Fasha" userId="cc64f42d-a1a6-4f08-b97b-0c37f877119f" providerId="ADAL" clId="{52B7A16F-CAD0-4D4D-9F9C-A24C8678CAD7}" dt="2025-03-23T07:49:16.023" v="100" actId="478"/>
+          <ac:chgData name="Mohammed Fasha" userId="S::mohammed.fasha@uop.edu.jo::cc64f42d-a1a6-4f08-b97b-0c37f877119f" providerId="AD" clId="Web-{048CEBFD-D6A1-FF4F-145A-C5347D00F6D8}" dt="2025-03-23T03:15:09.785" v="412"/>
           <ac:picMkLst>
             <pc:docMk/>
-            <pc:sldMk cId="1864506158" sldId="314"/>
-            <ac:picMk id="1026" creationId="{E295CD06-983D-2746-D9ED-5EC2CEF7FD9D}"/>
+            <pc:sldMk cId="414281864" sldId="320"/>
+            <ac:picMk id="5" creationId="{473A1119-463A-3C36-C42F-2981AC1D2670}"/>
           </ac:picMkLst>
         </pc:picChg>
-        <pc:picChg chg="add mod">
-          <ac:chgData name="Mohammed Fasha" userId="cc64f42d-a1a6-4f08-b97b-0c37f877119f" providerId="ADAL" clId="{52B7A16F-CAD0-4D4D-9F9C-A24C8678CAD7}" dt="2025-03-23T07:50:06.277" v="132" actId="1038"/>
+      </pc:sldChg>
+      <pc:sldChg chg="addSp delSp modSp new">
+        <pc:chgData name="Mohammed Fasha" userId="S::mohammed.fasha@uop.edu.jo::cc64f42d-a1a6-4f08-b97b-0c37f877119f" providerId="AD" clId="Web-{048CEBFD-D6A1-FF4F-145A-C5347D00F6D8}" dt="2025-03-23T04:04:06.582" v="625"/>
+        <pc:sldMkLst>
+          <pc:docMk/>
+          <pc:sldMk cId="2158520731" sldId="321"/>
+        </pc:sldMkLst>
+        <pc:spChg chg="mod">
+          <ac:chgData name="Mohammed Fasha" userId="S::mohammed.fasha@uop.edu.jo::cc64f42d-a1a6-4f08-b97b-0c37f877119f" providerId="AD" clId="Web-{048CEBFD-D6A1-FF4F-145A-C5347D00F6D8}" dt="2025-03-23T03:06:45.017" v="158" actId="20577"/>
+          <ac:spMkLst>
+            <pc:docMk/>
+            <pc:sldMk cId="2158520731" sldId="321"/>
+            <ac:spMk id="2" creationId="{2CBE9B8D-9BCA-A077-FC54-F37DD1ED5A43}"/>
+          </ac:spMkLst>
+        </pc:spChg>
+        <pc:spChg chg="del">
+          <ac:chgData name="Mohammed Fasha" userId="S::mohammed.fasha@uop.edu.jo::cc64f42d-a1a6-4f08-b97b-0c37f877119f" providerId="AD" clId="Web-{048CEBFD-D6A1-FF4F-145A-C5347D00F6D8}" dt="2025-03-23T03:06:26.736" v="140"/>
+          <ac:spMkLst>
+            <pc:docMk/>
+            <pc:sldMk cId="2158520731" sldId="321"/>
+            <ac:spMk id="3" creationId="{87066CB8-BE1C-18F6-0DD8-6FF093CE164E}"/>
+          </ac:spMkLst>
+        </pc:spChg>
+        <pc:spChg chg="add del mod">
+          <ac:chgData name="Mohammed Fasha" userId="S::mohammed.fasha@uop.edu.jo::cc64f42d-a1a6-4f08-b97b-0c37f877119f" providerId="AD" clId="Web-{048CEBFD-D6A1-FF4F-145A-C5347D00F6D8}" dt="2025-03-23T04:00:55.136" v="518"/>
+          <ac:spMkLst>
+            <pc:docMk/>
+            <pc:sldMk cId="2158520731" sldId="321"/>
+            <ac:spMk id="5" creationId="{38C8DE48-D7D7-B155-28C1-8FD9812E5A8A}"/>
+          </ac:spMkLst>
+        </pc:spChg>
+        <pc:spChg chg="add mod">
+          <ac:chgData name="Mohammed Fasha" userId="S::mohammed.fasha@uop.edu.jo::cc64f42d-a1a6-4f08-b97b-0c37f877119f" providerId="AD" clId="Web-{048CEBFD-D6A1-FF4F-145A-C5347D00F6D8}" dt="2025-03-23T04:03:57.144" v="623" actId="20577"/>
+          <ac:spMkLst>
+            <pc:docMk/>
+            <pc:sldMk cId="2158520731" sldId="321"/>
+            <ac:spMk id="6" creationId="{5CB15C33-8731-2AC8-2AA9-CC56BB604532}"/>
+          </ac:spMkLst>
+        </pc:spChg>
+        <pc:spChg chg="add del mod">
+          <ac:chgData name="Mohammed Fasha" userId="S::mohammed.fasha@uop.edu.jo::cc64f42d-a1a6-4f08-b97b-0c37f877119f" providerId="AD" clId="Web-{048CEBFD-D6A1-FF4F-145A-C5347D00F6D8}" dt="2025-03-23T04:02:47.327" v="574"/>
+          <ac:spMkLst>
+            <pc:docMk/>
+            <pc:sldMk cId="2158520731" sldId="321"/>
+            <ac:spMk id="9" creationId="{6C7BA3B8-00C1-BFF1-6AF2-0FD886030DA8}"/>
+          </ac:spMkLst>
+        </pc:spChg>
+        <pc:spChg chg="add del mod">
+          <ac:chgData name="Mohammed Fasha" userId="S::mohammed.fasha@uop.edu.jo::cc64f42d-a1a6-4f08-b97b-0c37f877119f" providerId="AD" clId="Web-{048CEBFD-D6A1-FF4F-145A-C5347D00F6D8}" dt="2025-03-23T04:01:37.246" v="535"/>
+          <ac:spMkLst>
+            <pc:docMk/>
+            <pc:sldMk cId="2158520731" sldId="321"/>
+            <ac:spMk id="11" creationId="{BF3A56A3-CCAA-A37B-CBB1-E12C9356DDDE}"/>
+          </ac:spMkLst>
+        </pc:spChg>
+        <pc:graphicFrameChg chg="add mod modGraphic">
+          <ac:chgData name="Mohammed Fasha" userId="S::mohammed.fasha@uop.edu.jo::cc64f42d-a1a6-4f08-b97b-0c37f877119f" providerId="AD" clId="Web-{048CEBFD-D6A1-FF4F-145A-C5347D00F6D8}" dt="2025-03-23T04:04:06.582" v="625"/>
+          <ac:graphicFrameMkLst>
+            <pc:docMk/>
+            <pc:sldMk cId="2158520731" sldId="321"/>
+            <ac:graphicFrameMk id="13" creationId="{16C5CEE9-CAE7-15B6-CD99-242FA0B68E48}"/>
+          </ac:graphicFrameMkLst>
+        </pc:graphicFrameChg>
+        <pc:graphicFrameChg chg="add mod modGraphic">
+          <ac:chgData name="Mohammed Fasha" userId="S::mohammed.fasha@uop.edu.jo::cc64f42d-a1a6-4f08-b97b-0c37f877119f" providerId="AD" clId="Web-{048CEBFD-D6A1-FF4F-145A-C5347D00F6D8}" dt="2025-03-23T04:03:46.191" v="620" actId="1076"/>
+          <ac:graphicFrameMkLst>
+            <pc:docMk/>
+            <pc:sldMk cId="2158520731" sldId="321"/>
+            <ac:graphicFrameMk id="14" creationId="{68F65CD9-04AE-694C-CAF9-ABB6912D588B}"/>
+          </ac:graphicFrameMkLst>
+        </pc:graphicFrameChg>
+        <pc:picChg chg="add del mod ord">
+          <ac:chgData name="Mohammed Fasha" userId="S::mohammed.fasha@uop.edu.jo::cc64f42d-a1a6-4f08-b97b-0c37f877119f" providerId="AD" clId="Web-{048CEBFD-D6A1-FF4F-145A-C5347D00F6D8}" dt="2025-03-23T04:00:53.854" v="517"/>
           <ac:picMkLst>
             <pc:docMk/>
-            <pc:sldMk cId="1864506158" sldId="314"/>
-            <ac:picMk id="1028" creationId="{A134BD84-5CDB-1185-7A50-8919C0EADE6C}"/>
+            <pc:sldMk cId="2158520731" sldId="321"/>
+            <ac:picMk id="4" creationId="{C31B89CD-6369-1B1F-B3B8-0654BE6BA649}"/>
+          </ac:picMkLst>
+        </pc:picChg>
+        <pc:picChg chg="add mod ord">
+          <ac:chgData name="Mohammed Fasha" userId="S::mohammed.fasha@uop.edu.jo::cc64f42d-a1a6-4f08-b97b-0c37f877119f" providerId="AD" clId="Web-{048CEBFD-D6A1-FF4F-145A-C5347D00F6D8}" dt="2025-03-23T04:01:03.120" v="520" actId="14100"/>
+          <ac:picMkLst>
+            <pc:docMk/>
+            <pc:sldMk cId="2158520731" sldId="321"/>
+            <ac:picMk id="7" creationId="{3309D882-20A5-56F6-889C-7DC7D2DFDA86}"/>
+          </ac:picMkLst>
+        </pc:picChg>
+      </pc:sldChg>
+      <pc:sldChg chg="addSp delSp modSp new">
+        <pc:chgData name="Mohammed Fasha" userId="S::mohammed.fasha@uop.edu.jo::cc64f42d-a1a6-4f08-b97b-0c37f877119f" providerId="AD" clId="Web-{048CEBFD-D6A1-FF4F-145A-C5347D00F6D8}" dt="2025-03-23T04:10:25.939" v="692"/>
+        <pc:sldMkLst>
+          <pc:docMk/>
+          <pc:sldMk cId="3486990666" sldId="322"/>
+        </pc:sldMkLst>
+        <pc:spChg chg="mod">
+          <ac:chgData name="Mohammed Fasha" userId="S::mohammed.fasha@uop.edu.jo::cc64f42d-a1a6-4f08-b97b-0c37f877119f" providerId="AD" clId="Web-{048CEBFD-D6A1-FF4F-145A-C5347D00F6D8}" dt="2025-03-23T04:09:04.561" v="672" actId="20577"/>
+          <ac:spMkLst>
+            <pc:docMk/>
+            <pc:sldMk cId="3486990666" sldId="322"/>
+            <ac:spMk id="2" creationId="{4F569A76-4CE0-A134-527E-6110690A0204}"/>
+          </ac:spMkLst>
+        </pc:spChg>
+        <pc:spChg chg="del">
+          <ac:chgData name="Mohammed Fasha" userId="S::mohammed.fasha@uop.edu.jo::cc64f42d-a1a6-4f08-b97b-0c37f877119f" providerId="AD" clId="Web-{048CEBFD-D6A1-FF4F-145A-C5347D00F6D8}" dt="2025-03-23T04:08:51.795" v="657"/>
+          <ac:spMkLst>
+            <pc:docMk/>
+            <pc:sldMk cId="3486990666" sldId="322"/>
+            <ac:spMk id="3" creationId="{368F07BD-3847-D462-1D91-71F882F9E686}"/>
+          </ac:spMkLst>
+        </pc:spChg>
+        <pc:graphicFrameChg chg="add mod ord modGraphic">
+          <ac:chgData name="Mohammed Fasha" userId="S::mohammed.fasha@uop.edu.jo::cc64f42d-a1a6-4f08-b97b-0c37f877119f" providerId="AD" clId="Web-{048CEBFD-D6A1-FF4F-145A-C5347D00F6D8}" dt="2025-03-23T04:10:25.939" v="692"/>
+          <ac:graphicFrameMkLst>
+            <pc:docMk/>
+            <pc:sldMk cId="3486990666" sldId="322"/>
+            <ac:graphicFrameMk id="5" creationId="{1FA2E83F-BCF2-8811-D9EB-3AB7209F9B26}"/>
+          </ac:graphicFrameMkLst>
+        </pc:graphicFrameChg>
+      </pc:sldChg>
+      <pc:sldChg chg="addSp delSp modSp new">
+        <pc:chgData name="Mohammed Fasha" userId="S::mohammed.fasha@uop.edu.jo::cc64f42d-a1a6-4f08-b97b-0c37f877119f" providerId="AD" clId="Web-{048CEBFD-D6A1-FF4F-145A-C5347D00F6D8}" dt="2025-03-23T06:02:22.542" v="1162"/>
+        <pc:sldMkLst>
+          <pc:docMk/>
+          <pc:sldMk cId="323566195" sldId="323"/>
+        </pc:sldMkLst>
+        <pc:spChg chg="mod">
+          <ac:chgData name="Mohammed Fasha" userId="S::mohammed.fasha@uop.edu.jo::cc64f42d-a1a6-4f08-b97b-0c37f877119f" providerId="AD" clId="Web-{048CEBFD-D6A1-FF4F-145A-C5347D00F6D8}" dt="2025-03-23T05:55:35.003" v="727" actId="20577"/>
+          <ac:spMkLst>
+            <pc:docMk/>
+            <pc:sldMk cId="323566195" sldId="323"/>
+            <ac:spMk id="2" creationId="{595498DF-D91B-3039-6A35-B1D5FAB6D692}"/>
+          </ac:spMkLst>
+        </pc:spChg>
+        <pc:spChg chg="del">
+          <ac:chgData name="Mohammed Fasha" userId="S::mohammed.fasha@uop.edu.jo::cc64f42d-a1a6-4f08-b97b-0c37f877119f" providerId="AD" clId="Web-{048CEBFD-D6A1-FF4F-145A-C5347D00F6D8}" dt="2025-03-23T05:55:38.753" v="728"/>
+          <ac:spMkLst>
+            <pc:docMk/>
+            <pc:sldMk cId="323566195" sldId="323"/>
+            <ac:spMk id="3" creationId="{7C735B19-22D3-E2FD-E630-81FC9AD9A200}"/>
+          </ac:spMkLst>
+        </pc:spChg>
+        <pc:spChg chg="add del mod">
+          <ac:chgData name="Mohammed Fasha" userId="S::mohammed.fasha@uop.edu.jo::cc64f42d-a1a6-4f08-b97b-0c37f877119f" providerId="AD" clId="Web-{048CEBFD-D6A1-FF4F-145A-C5347D00F6D8}" dt="2025-03-23T05:55:49.003" v="732"/>
+          <ac:spMkLst>
+            <pc:docMk/>
+            <pc:sldMk cId="323566195" sldId="323"/>
+            <ac:spMk id="6" creationId="{8D3669D3-C50E-E863-834B-24745A4049BF}"/>
+          </ac:spMkLst>
+        </pc:spChg>
+        <pc:spChg chg="add del mod">
+          <ac:chgData name="Mohammed Fasha" userId="S::mohammed.fasha@uop.edu.jo::cc64f42d-a1a6-4f08-b97b-0c37f877119f" providerId="AD" clId="Web-{048CEBFD-D6A1-FF4F-145A-C5347D00F6D8}" dt="2025-03-23T05:59:22.130" v="1034"/>
+          <ac:spMkLst>
+            <pc:docMk/>
+            <pc:sldMk cId="323566195" sldId="323"/>
+            <ac:spMk id="8" creationId="{2082C506-EF36-1091-B38C-0345C16F14E1}"/>
+          </ac:spMkLst>
+        </pc:spChg>
+        <pc:spChg chg="add del mod">
+          <ac:chgData name="Mohammed Fasha" userId="S::mohammed.fasha@uop.edu.jo::cc64f42d-a1a6-4f08-b97b-0c37f877119f" providerId="AD" clId="Web-{048CEBFD-D6A1-FF4F-145A-C5347D00F6D8}" dt="2025-03-23T05:59:27.614" v="1039"/>
+          <ac:spMkLst>
+            <pc:docMk/>
+            <pc:sldMk cId="323566195" sldId="323"/>
+            <ac:spMk id="83" creationId="{807366CE-6F6E-4CFE-6647-767B9FE5806E}"/>
+          </ac:spMkLst>
+        </pc:spChg>
+        <pc:graphicFrameChg chg="add del mod ord modGraphic">
+          <ac:chgData name="Mohammed Fasha" userId="S::mohammed.fasha@uop.edu.jo::cc64f42d-a1a6-4f08-b97b-0c37f877119f" providerId="AD" clId="Web-{048CEBFD-D6A1-FF4F-145A-C5347D00F6D8}" dt="2025-03-23T05:59:01.988" v="961"/>
+          <ac:graphicFrameMkLst>
+            <pc:docMk/>
+            <pc:sldMk cId="323566195" sldId="323"/>
+            <ac:graphicFrameMk id="5" creationId="{A754B520-EBFE-5B5E-37E1-9C40D7A1FFBE}"/>
+          </ac:graphicFrameMkLst>
+        </pc:graphicFrameChg>
+        <pc:graphicFrameChg chg="add del mod ord modGraphic">
+          <ac:chgData name="Mohammed Fasha" userId="S::mohammed.fasha@uop.edu.jo::cc64f42d-a1a6-4f08-b97b-0c37f877119f" providerId="AD" clId="Web-{048CEBFD-D6A1-FF4F-145A-C5347D00F6D8}" dt="2025-03-23T05:59:07.457" v="1033"/>
+          <ac:graphicFrameMkLst>
+            <pc:docMk/>
+            <pc:sldMk cId="323566195" sldId="323"/>
+            <ac:graphicFrameMk id="10" creationId="{81F22BAF-A7A5-D51F-F048-990BCD7473F1}"/>
+          </ac:graphicFrameMkLst>
+        </pc:graphicFrameChg>
+        <pc:graphicFrameChg chg="add del mod">
+          <ac:chgData name="Mohammed Fasha" userId="S::mohammed.fasha@uop.edu.jo::cc64f42d-a1a6-4f08-b97b-0c37f877119f" providerId="AD" clId="Web-{048CEBFD-D6A1-FF4F-145A-C5347D00F6D8}" dt="2025-03-23T05:59:07.457" v="1032"/>
+          <ac:graphicFrameMkLst>
+            <pc:docMk/>
+            <pc:sldMk cId="323566195" sldId="323"/>
+            <ac:graphicFrameMk id="12" creationId="{31D32C5C-4AB4-10D9-8E65-54C3AA3B73FA}"/>
+          </ac:graphicFrameMkLst>
+        </pc:graphicFrameChg>
+        <pc:graphicFrameChg chg="add del mod">
+          <ac:chgData name="Mohammed Fasha" userId="S::mohammed.fasha@uop.edu.jo::cc64f42d-a1a6-4f08-b97b-0c37f877119f" providerId="AD" clId="Web-{048CEBFD-D6A1-FF4F-145A-C5347D00F6D8}" dt="2025-03-23T05:59:07.457" v="1031"/>
+          <ac:graphicFrameMkLst>
+            <pc:docMk/>
+            <pc:sldMk cId="323566195" sldId="323"/>
+            <ac:graphicFrameMk id="14" creationId="{2B9CFF0A-4FB9-44E3-E79F-5E9C7AF9C6F2}"/>
+          </ac:graphicFrameMkLst>
+        </pc:graphicFrameChg>
+        <pc:graphicFrameChg chg="add del mod">
+          <ac:chgData name="Mohammed Fasha" userId="S::mohammed.fasha@uop.edu.jo::cc64f42d-a1a6-4f08-b97b-0c37f877119f" providerId="AD" clId="Web-{048CEBFD-D6A1-FF4F-145A-C5347D00F6D8}" dt="2025-03-23T05:59:07.457" v="1030"/>
+          <ac:graphicFrameMkLst>
+            <pc:docMk/>
+            <pc:sldMk cId="323566195" sldId="323"/>
+            <ac:graphicFrameMk id="16" creationId="{151D465E-BCAC-C815-C99F-DFCF8008CC41}"/>
+          </ac:graphicFrameMkLst>
+        </pc:graphicFrameChg>
+        <pc:graphicFrameChg chg="add del mod">
+          <ac:chgData name="Mohammed Fasha" userId="S::mohammed.fasha@uop.edu.jo::cc64f42d-a1a6-4f08-b97b-0c37f877119f" providerId="AD" clId="Web-{048CEBFD-D6A1-FF4F-145A-C5347D00F6D8}" dt="2025-03-23T05:59:07.457" v="1029"/>
+          <ac:graphicFrameMkLst>
+            <pc:docMk/>
+            <pc:sldMk cId="323566195" sldId="323"/>
+            <ac:graphicFrameMk id="18" creationId="{6AC48D0B-E2C7-9970-AED5-07A2B3F1FA40}"/>
+          </ac:graphicFrameMkLst>
+        </pc:graphicFrameChg>
+        <pc:graphicFrameChg chg="add del mod">
+          <ac:chgData name="Mohammed Fasha" userId="S::mohammed.fasha@uop.edu.jo::cc64f42d-a1a6-4f08-b97b-0c37f877119f" providerId="AD" clId="Web-{048CEBFD-D6A1-FF4F-145A-C5347D00F6D8}" dt="2025-03-23T05:59:07.457" v="1028"/>
+          <ac:graphicFrameMkLst>
+            <pc:docMk/>
+            <pc:sldMk cId="323566195" sldId="323"/>
+            <ac:graphicFrameMk id="20" creationId="{2A87022A-12C7-E3C9-78A5-B6E3716099CC}"/>
+          </ac:graphicFrameMkLst>
+        </pc:graphicFrameChg>
+        <pc:graphicFrameChg chg="add del mod">
+          <ac:chgData name="Mohammed Fasha" userId="S::mohammed.fasha@uop.edu.jo::cc64f42d-a1a6-4f08-b97b-0c37f877119f" providerId="AD" clId="Web-{048CEBFD-D6A1-FF4F-145A-C5347D00F6D8}" dt="2025-03-23T05:59:07.457" v="1027"/>
+          <ac:graphicFrameMkLst>
+            <pc:docMk/>
+            <pc:sldMk cId="323566195" sldId="323"/>
+            <ac:graphicFrameMk id="22" creationId="{8EF2D05A-5601-2F93-287A-A37D730B4D8E}"/>
+          </ac:graphicFrameMkLst>
+        </pc:graphicFrameChg>
+        <pc:graphicFrameChg chg="add del mod">
+          <ac:chgData name="Mohammed Fasha" userId="S::mohammed.fasha@uop.edu.jo::cc64f42d-a1a6-4f08-b97b-0c37f877119f" providerId="AD" clId="Web-{048CEBFD-D6A1-FF4F-145A-C5347D00F6D8}" dt="2025-03-23T05:59:07.457" v="1026"/>
+          <ac:graphicFrameMkLst>
+            <pc:docMk/>
+            <pc:sldMk cId="323566195" sldId="323"/>
+            <ac:graphicFrameMk id="24" creationId="{6A100409-108D-914C-3A20-14F5A5113ECA}"/>
+          </ac:graphicFrameMkLst>
+        </pc:graphicFrameChg>
+        <pc:graphicFrameChg chg="add del mod">
+          <ac:chgData name="Mohammed Fasha" userId="S::mohammed.fasha@uop.edu.jo::cc64f42d-a1a6-4f08-b97b-0c37f877119f" providerId="AD" clId="Web-{048CEBFD-D6A1-FF4F-145A-C5347D00F6D8}" dt="2025-03-23T05:59:07.457" v="1025"/>
+          <ac:graphicFrameMkLst>
+            <pc:docMk/>
+            <pc:sldMk cId="323566195" sldId="323"/>
+            <ac:graphicFrameMk id="26" creationId="{C6C4A769-1EA7-DFBB-76AA-A6BD4F6972B1}"/>
+          </ac:graphicFrameMkLst>
+        </pc:graphicFrameChg>
+        <pc:graphicFrameChg chg="add del mod">
+          <ac:chgData name="Mohammed Fasha" userId="S::mohammed.fasha@uop.edu.jo::cc64f42d-a1a6-4f08-b97b-0c37f877119f" providerId="AD" clId="Web-{048CEBFD-D6A1-FF4F-145A-C5347D00F6D8}" dt="2025-03-23T05:59:07.457" v="1024"/>
+          <ac:graphicFrameMkLst>
+            <pc:docMk/>
+            <pc:sldMk cId="323566195" sldId="323"/>
+            <ac:graphicFrameMk id="28" creationId="{C40A24BF-5004-D518-7DAD-FC1621E3F304}"/>
+          </ac:graphicFrameMkLst>
+        </pc:graphicFrameChg>
+        <pc:graphicFrameChg chg="add del mod">
+          <ac:chgData name="Mohammed Fasha" userId="S::mohammed.fasha@uop.edu.jo::cc64f42d-a1a6-4f08-b97b-0c37f877119f" providerId="AD" clId="Web-{048CEBFD-D6A1-FF4F-145A-C5347D00F6D8}" dt="2025-03-23T05:59:07.457" v="1023"/>
+          <ac:graphicFrameMkLst>
+            <pc:docMk/>
+            <pc:sldMk cId="323566195" sldId="323"/>
+            <ac:graphicFrameMk id="30" creationId="{BE442F90-15EC-E0E1-9A4C-C04CE58B5245}"/>
+          </ac:graphicFrameMkLst>
+        </pc:graphicFrameChg>
+        <pc:graphicFrameChg chg="add del mod">
+          <ac:chgData name="Mohammed Fasha" userId="S::mohammed.fasha@uop.edu.jo::cc64f42d-a1a6-4f08-b97b-0c37f877119f" providerId="AD" clId="Web-{048CEBFD-D6A1-FF4F-145A-C5347D00F6D8}" dt="2025-03-23T05:59:07.457" v="1022"/>
+          <ac:graphicFrameMkLst>
+            <pc:docMk/>
+            <pc:sldMk cId="323566195" sldId="323"/>
+            <ac:graphicFrameMk id="32" creationId="{9B52DAA3-1DB1-99DF-18E4-9E64C093A4F6}"/>
+          </ac:graphicFrameMkLst>
+        </pc:graphicFrameChg>
+        <pc:graphicFrameChg chg="add del mod">
+          <ac:chgData name="Mohammed Fasha" userId="S::mohammed.fasha@uop.edu.jo::cc64f42d-a1a6-4f08-b97b-0c37f877119f" providerId="AD" clId="Web-{048CEBFD-D6A1-FF4F-145A-C5347D00F6D8}" dt="2025-03-23T05:59:07.457" v="1021"/>
+          <ac:graphicFrameMkLst>
+            <pc:docMk/>
+            <pc:sldMk cId="323566195" sldId="323"/>
+            <ac:graphicFrameMk id="34" creationId="{993470D1-9B7A-17C0-943E-DF7B23EA5B44}"/>
+          </ac:graphicFrameMkLst>
+        </pc:graphicFrameChg>
+        <pc:graphicFrameChg chg="add del mod">
+          <ac:chgData name="Mohammed Fasha" userId="S::mohammed.fasha@uop.edu.jo::cc64f42d-a1a6-4f08-b97b-0c37f877119f" providerId="AD" clId="Web-{048CEBFD-D6A1-FF4F-145A-C5347D00F6D8}" dt="2025-03-23T05:59:07.457" v="1020"/>
+          <ac:graphicFrameMkLst>
+            <pc:docMk/>
+            <pc:sldMk cId="323566195" sldId="323"/>
+            <ac:graphicFrameMk id="36" creationId="{179BE741-A69E-5347-4C57-44E890ACA8B6}"/>
+          </ac:graphicFrameMkLst>
+        </pc:graphicFrameChg>
+        <pc:graphicFrameChg chg="add del mod">
+          <ac:chgData name="Mohammed Fasha" userId="S::mohammed.fasha@uop.edu.jo::cc64f42d-a1a6-4f08-b97b-0c37f877119f" providerId="AD" clId="Web-{048CEBFD-D6A1-FF4F-145A-C5347D00F6D8}" dt="2025-03-23T05:59:07.457" v="1019"/>
+          <ac:graphicFrameMkLst>
+            <pc:docMk/>
+            <pc:sldMk cId="323566195" sldId="323"/>
+            <ac:graphicFrameMk id="38" creationId="{7F6E1717-1F2E-6C4D-1780-6819571BA43C}"/>
+          </ac:graphicFrameMkLst>
+        </pc:graphicFrameChg>
+        <pc:graphicFrameChg chg="add del mod">
+          <ac:chgData name="Mohammed Fasha" userId="S::mohammed.fasha@uop.edu.jo::cc64f42d-a1a6-4f08-b97b-0c37f877119f" providerId="AD" clId="Web-{048CEBFD-D6A1-FF4F-145A-C5347D00F6D8}" dt="2025-03-23T05:59:07.457" v="1018"/>
+          <ac:graphicFrameMkLst>
+            <pc:docMk/>
+            <pc:sldMk cId="323566195" sldId="323"/>
+            <ac:graphicFrameMk id="40" creationId="{2484AF69-B0DC-9E02-8756-50FB72954E82}"/>
+          </ac:graphicFrameMkLst>
+        </pc:graphicFrameChg>
+        <pc:graphicFrameChg chg="add del mod">
+          <ac:chgData name="Mohammed Fasha" userId="S::mohammed.fasha@uop.edu.jo::cc64f42d-a1a6-4f08-b97b-0c37f877119f" providerId="AD" clId="Web-{048CEBFD-D6A1-FF4F-145A-C5347D00F6D8}" dt="2025-03-23T05:59:07.457" v="1017"/>
+          <ac:graphicFrameMkLst>
+            <pc:docMk/>
+            <pc:sldMk cId="323566195" sldId="323"/>
+            <ac:graphicFrameMk id="42" creationId="{B8EE61D1-5177-30CA-E118-E5D3B87242CD}"/>
+          </ac:graphicFrameMkLst>
+        </pc:graphicFrameChg>
+        <pc:graphicFrameChg chg="add del mod">
+          <ac:chgData name="Mohammed Fasha" userId="S::mohammed.fasha@uop.edu.jo::cc64f42d-a1a6-4f08-b97b-0c37f877119f" providerId="AD" clId="Web-{048CEBFD-D6A1-FF4F-145A-C5347D00F6D8}" dt="2025-03-23T05:59:07.457" v="1016"/>
+          <ac:graphicFrameMkLst>
+            <pc:docMk/>
+            <pc:sldMk cId="323566195" sldId="323"/>
+            <ac:graphicFrameMk id="44" creationId="{141A3A5A-4493-80D4-ECBB-45C88C8B4234}"/>
+          </ac:graphicFrameMkLst>
+        </pc:graphicFrameChg>
+        <pc:graphicFrameChg chg="add del mod">
+          <ac:chgData name="Mohammed Fasha" userId="S::mohammed.fasha@uop.edu.jo::cc64f42d-a1a6-4f08-b97b-0c37f877119f" providerId="AD" clId="Web-{048CEBFD-D6A1-FF4F-145A-C5347D00F6D8}" dt="2025-03-23T05:59:07.457" v="1015"/>
+          <ac:graphicFrameMkLst>
+            <pc:docMk/>
+            <pc:sldMk cId="323566195" sldId="323"/>
+            <ac:graphicFrameMk id="46" creationId="{881F753D-C8EB-CC8A-03A1-87CA997234E2}"/>
+          </ac:graphicFrameMkLst>
+        </pc:graphicFrameChg>
+        <pc:graphicFrameChg chg="add del mod">
+          <ac:chgData name="Mohammed Fasha" userId="S::mohammed.fasha@uop.edu.jo::cc64f42d-a1a6-4f08-b97b-0c37f877119f" providerId="AD" clId="Web-{048CEBFD-D6A1-FF4F-145A-C5347D00F6D8}" dt="2025-03-23T05:59:07.457" v="1014"/>
+          <ac:graphicFrameMkLst>
+            <pc:docMk/>
+            <pc:sldMk cId="323566195" sldId="323"/>
+            <ac:graphicFrameMk id="48" creationId="{A3D78DD1-89C1-461E-5B28-18FB43C2FC00}"/>
+          </ac:graphicFrameMkLst>
+        </pc:graphicFrameChg>
+        <pc:graphicFrameChg chg="add del mod">
+          <ac:chgData name="Mohammed Fasha" userId="S::mohammed.fasha@uop.edu.jo::cc64f42d-a1a6-4f08-b97b-0c37f877119f" providerId="AD" clId="Web-{048CEBFD-D6A1-FF4F-145A-C5347D00F6D8}" dt="2025-03-23T05:59:07.457" v="1013"/>
+          <ac:graphicFrameMkLst>
+            <pc:docMk/>
+            <pc:sldMk cId="323566195" sldId="323"/>
+            <ac:graphicFrameMk id="50" creationId="{6340C572-E3F3-16AF-B421-66538320305F}"/>
+          </ac:graphicFrameMkLst>
+        </pc:graphicFrameChg>
+        <pc:graphicFrameChg chg="add del mod">
+          <ac:chgData name="Mohammed Fasha" userId="S::mohammed.fasha@uop.edu.jo::cc64f42d-a1a6-4f08-b97b-0c37f877119f" providerId="AD" clId="Web-{048CEBFD-D6A1-FF4F-145A-C5347D00F6D8}" dt="2025-03-23T05:59:07.457" v="1012"/>
+          <ac:graphicFrameMkLst>
+            <pc:docMk/>
+            <pc:sldMk cId="323566195" sldId="323"/>
+            <ac:graphicFrameMk id="52" creationId="{A2C96DF1-B896-A75F-F9DA-2D2C76F89A78}"/>
+          </ac:graphicFrameMkLst>
+        </pc:graphicFrameChg>
+        <pc:graphicFrameChg chg="add del mod">
+          <ac:chgData name="Mohammed Fasha" userId="S::mohammed.fasha@uop.edu.jo::cc64f42d-a1a6-4f08-b97b-0c37f877119f" providerId="AD" clId="Web-{048CEBFD-D6A1-FF4F-145A-C5347D00F6D8}" dt="2025-03-23T05:59:07.457" v="1011"/>
+          <ac:graphicFrameMkLst>
+            <pc:docMk/>
+            <pc:sldMk cId="323566195" sldId="323"/>
+            <ac:graphicFrameMk id="54" creationId="{E457EF04-D6A8-7B9E-A19F-D4C4AFC18FC5}"/>
+          </ac:graphicFrameMkLst>
+        </pc:graphicFrameChg>
+        <pc:graphicFrameChg chg="add del mod">
+          <ac:chgData name="Mohammed Fasha" userId="S::mohammed.fasha@uop.edu.jo::cc64f42d-a1a6-4f08-b97b-0c37f877119f" providerId="AD" clId="Web-{048CEBFD-D6A1-FF4F-145A-C5347D00F6D8}" dt="2025-03-23T05:59:07.457" v="1010"/>
+          <ac:graphicFrameMkLst>
+            <pc:docMk/>
+            <pc:sldMk cId="323566195" sldId="323"/>
+            <ac:graphicFrameMk id="56" creationId="{B0B7E22B-C771-8134-485E-8D2C20D5FA95}"/>
+          </ac:graphicFrameMkLst>
+        </pc:graphicFrameChg>
+        <pc:graphicFrameChg chg="add del mod">
+          <ac:chgData name="Mohammed Fasha" userId="S::mohammed.fasha@uop.edu.jo::cc64f42d-a1a6-4f08-b97b-0c37f877119f" providerId="AD" clId="Web-{048CEBFD-D6A1-FF4F-145A-C5347D00F6D8}" dt="2025-03-23T05:59:07.457" v="1009"/>
+          <ac:graphicFrameMkLst>
+            <pc:docMk/>
+            <pc:sldMk cId="323566195" sldId="323"/>
+            <ac:graphicFrameMk id="58" creationId="{96E97EA0-26C3-8107-FFD7-A50124666871}"/>
+          </ac:graphicFrameMkLst>
+        </pc:graphicFrameChg>
+        <pc:graphicFrameChg chg="add del mod">
+          <ac:chgData name="Mohammed Fasha" userId="S::mohammed.fasha@uop.edu.jo::cc64f42d-a1a6-4f08-b97b-0c37f877119f" providerId="AD" clId="Web-{048CEBFD-D6A1-FF4F-145A-C5347D00F6D8}" dt="2025-03-23T05:59:07.457" v="1008"/>
+          <ac:graphicFrameMkLst>
+            <pc:docMk/>
+            <pc:sldMk cId="323566195" sldId="323"/>
+            <ac:graphicFrameMk id="60" creationId="{01575609-E88F-517C-939B-2D01FE427CB2}"/>
+          </ac:graphicFrameMkLst>
+        </pc:graphicFrameChg>
+        <pc:graphicFrameChg chg="add del mod">
+          <ac:chgData name="Mohammed Fasha" userId="S::mohammed.fasha@uop.edu.jo::cc64f42d-a1a6-4f08-b97b-0c37f877119f" providerId="AD" clId="Web-{048CEBFD-D6A1-FF4F-145A-C5347D00F6D8}" dt="2025-03-23T05:59:07.457" v="1007"/>
+          <ac:graphicFrameMkLst>
+            <pc:docMk/>
+            <pc:sldMk cId="323566195" sldId="323"/>
+            <ac:graphicFrameMk id="62" creationId="{81F84073-D19D-6E20-4B98-DAADFCCB5891}"/>
+          </ac:graphicFrameMkLst>
+        </pc:graphicFrameChg>
+        <pc:graphicFrameChg chg="add del mod">
+          <ac:chgData name="Mohammed Fasha" userId="S::mohammed.fasha@uop.edu.jo::cc64f42d-a1a6-4f08-b97b-0c37f877119f" providerId="AD" clId="Web-{048CEBFD-D6A1-FF4F-145A-C5347D00F6D8}" dt="2025-03-23T05:59:07.457" v="1006"/>
+          <ac:graphicFrameMkLst>
+            <pc:docMk/>
+            <pc:sldMk cId="323566195" sldId="323"/>
+            <ac:graphicFrameMk id="64" creationId="{E4EC3D09-6063-A529-870D-0C9877AA3053}"/>
+          </ac:graphicFrameMkLst>
+        </pc:graphicFrameChg>
+        <pc:graphicFrameChg chg="add del mod">
+          <ac:chgData name="Mohammed Fasha" userId="S::mohammed.fasha@uop.edu.jo::cc64f42d-a1a6-4f08-b97b-0c37f877119f" providerId="AD" clId="Web-{048CEBFD-D6A1-FF4F-145A-C5347D00F6D8}" dt="2025-03-23T05:59:07.457" v="1005"/>
+          <ac:graphicFrameMkLst>
+            <pc:docMk/>
+            <pc:sldMk cId="323566195" sldId="323"/>
+            <ac:graphicFrameMk id="66" creationId="{D84F5A10-FC27-5729-C73F-848FFFB113FB}"/>
+          </ac:graphicFrameMkLst>
+        </pc:graphicFrameChg>
+        <pc:graphicFrameChg chg="add del mod">
+          <ac:chgData name="Mohammed Fasha" userId="S::mohammed.fasha@uop.edu.jo::cc64f42d-a1a6-4f08-b97b-0c37f877119f" providerId="AD" clId="Web-{048CEBFD-D6A1-FF4F-145A-C5347D00F6D8}" dt="2025-03-23T05:59:07.457" v="1004"/>
+          <ac:graphicFrameMkLst>
+            <pc:docMk/>
+            <pc:sldMk cId="323566195" sldId="323"/>
+            <ac:graphicFrameMk id="68" creationId="{C5294D9E-208C-67A6-D898-A6698BF5388E}"/>
+          </ac:graphicFrameMkLst>
+        </pc:graphicFrameChg>
+        <pc:graphicFrameChg chg="add del mod">
+          <ac:chgData name="Mohammed Fasha" userId="S::mohammed.fasha@uop.edu.jo::cc64f42d-a1a6-4f08-b97b-0c37f877119f" providerId="AD" clId="Web-{048CEBFD-D6A1-FF4F-145A-C5347D00F6D8}" dt="2025-03-23T05:59:07.457" v="1003"/>
+          <ac:graphicFrameMkLst>
+            <pc:docMk/>
+            <pc:sldMk cId="323566195" sldId="323"/>
+            <ac:graphicFrameMk id="70" creationId="{296DED12-ACF6-510A-B5B6-46873E38536E}"/>
+          </ac:graphicFrameMkLst>
+        </pc:graphicFrameChg>
+        <pc:graphicFrameChg chg="add del mod">
+          <ac:chgData name="Mohammed Fasha" userId="S::mohammed.fasha@uop.edu.jo::cc64f42d-a1a6-4f08-b97b-0c37f877119f" providerId="AD" clId="Web-{048CEBFD-D6A1-FF4F-145A-C5347D00F6D8}" dt="2025-03-23T05:59:07.457" v="1002"/>
+          <ac:graphicFrameMkLst>
+            <pc:docMk/>
+            <pc:sldMk cId="323566195" sldId="323"/>
+            <ac:graphicFrameMk id="72" creationId="{95E38546-FB27-65FE-85C4-3F4F8B66A29A}"/>
+          </ac:graphicFrameMkLst>
+        </pc:graphicFrameChg>
+        <pc:graphicFrameChg chg="add del mod">
+          <ac:chgData name="Mohammed Fasha" userId="S::mohammed.fasha@uop.edu.jo::cc64f42d-a1a6-4f08-b97b-0c37f877119f" providerId="AD" clId="Web-{048CEBFD-D6A1-FF4F-145A-C5347D00F6D8}" dt="2025-03-23T05:59:07.457" v="1001"/>
+          <ac:graphicFrameMkLst>
+            <pc:docMk/>
+            <pc:sldMk cId="323566195" sldId="323"/>
+            <ac:graphicFrameMk id="74" creationId="{192A04DF-CA56-492A-1E8D-37F1707F96D3}"/>
+          </ac:graphicFrameMkLst>
+        </pc:graphicFrameChg>
+        <pc:graphicFrameChg chg="add del mod">
+          <ac:chgData name="Mohammed Fasha" userId="S::mohammed.fasha@uop.edu.jo::cc64f42d-a1a6-4f08-b97b-0c37f877119f" providerId="AD" clId="Web-{048CEBFD-D6A1-FF4F-145A-C5347D00F6D8}" dt="2025-03-23T05:59:07.457" v="1000"/>
+          <ac:graphicFrameMkLst>
+            <pc:docMk/>
+            <pc:sldMk cId="323566195" sldId="323"/>
+            <ac:graphicFrameMk id="76" creationId="{2C5FBFF9-1CD2-7200-F956-A5C5DDB1A652}"/>
+          </ac:graphicFrameMkLst>
+        </pc:graphicFrameChg>
+        <pc:graphicFrameChg chg="add del mod">
+          <ac:chgData name="Mohammed Fasha" userId="S::mohammed.fasha@uop.edu.jo::cc64f42d-a1a6-4f08-b97b-0c37f877119f" providerId="AD" clId="Web-{048CEBFD-D6A1-FF4F-145A-C5347D00F6D8}" dt="2025-03-23T05:59:07.457" v="999"/>
+          <ac:graphicFrameMkLst>
+            <pc:docMk/>
+            <pc:sldMk cId="323566195" sldId="323"/>
+            <ac:graphicFrameMk id="78" creationId="{B2E96C8C-06FA-2893-05C3-70BDD14172C9}"/>
+          </ac:graphicFrameMkLst>
+        </pc:graphicFrameChg>
+        <pc:graphicFrameChg chg="add del mod">
+          <ac:chgData name="Mohammed Fasha" userId="S::mohammed.fasha@uop.edu.jo::cc64f42d-a1a6-4f08-b97b-0c37f877119f" providerId="AD" clId="Web-{048CEBFD-D6A1-FF4F-145A-C5347D00F6D8}" dt="2025-03-23T05:59:07.457" v="998"/>
+          <ac:graphicFrameMkLst>
+            <pc:docMk/>
+            <pc:sldMk cId="323566195" sldId="323"/>
+            <ac:graphicFrameMk id="80" creationId="{E10281D6-863B-25CD-E75A-124FDDBAA4BE}"/>
+          </ac:graphicFrameMkLst>
+        </pc:graphicFrameChg>
+        <pc:graphicFrameChg chg="add mod ord modGraphic">
+          <ac:chgData name="Mohammed Fasha" userId="S::mohammed.fasha@uop.edu.jo::cc64f42d-a1a6-4f08-b97b-0c37f877119f" providerId="AD" clId="Web-{048CEBFD-D6A1-FF4F-145A-C5347D00F6D8}" dt="2025-03-23T06:02:22.542" v="1162"/>
+          <ac:graphicFrameMkLst>
+            <pc:docMk/>
+            <pc:sldMk cId="323566195" sldId="323"/>
+            <ac:graphicFrameMk id="82" creationId="{135E2F87-A441-0139-1576-BC186FCA12A1}"/>
+          </ac:graphicFrameMkLst>
+        </pc:graphicFrameChg>
+      </pc:sldChg>
+      <pc:sldChg chg="modSp add replId">
+        <pc:chgData name="Mohammed Fasha" userId="S::mohammed.fasha@uop.edu.jo::cc64f42d-a1a6-4f08-b97b-0c37f877119f" providerId="AD" clId="Web-{048CEBFD-D6A1-FF4F-145A-C5347D00F6D8}" dt="2025-03-23T06:02:28.917" v="1163"/>
+        <pc:sldMkLst>
+          <pc:docMk/>
+          <pc:sldMk cId="2802975669" sldId="324"/>
+        </pc:sldMkLst>
+        <pc:graphicFrameChg chg="modGraphic">
+          <ac:chgData name="Mohammed Fasha" userId="S::mohammed.fasha@uop.edu.jo::cc64f42d-a1a6-4f08-b97b-0c37f877119f" providerId="AD" clId="Web-{048CEBFD-D6A1-FF4F-145A-C5347D00F6D8}" dt="2025-03-23T06:02:28.917" v="1163"/>
+          <ac:graphicFrameMkLst>
+            <pc:docMk/>
+            <pc:sldMk cId="2802975669" sldId="324"/>
+            <ac:graphicFrameMk id="82" creationId="{E61DA268-6635-1C98-1674-A7AD4D8991C6}"/>
+          </ac:graphicFrameMkLst>
+        </pc:graphicFrameChg>
+      </pc:sldChg>
+      <pc:sldChg chg="modSp new mod modClrScheme chgLayout">
+        <pc:chgData name="Mohammed Fasha" userId="S::mohammed.fasha@uop.edu.jo::cc64f42d-a1a6-4f08-b97b-0c37f877119f" providerId="AD" clId="Web-{048CEBFD-D6A1-FF4F-145A-C5347D00F6D8}" dt="2025-03-23T06:01:57.150" v="1158" actId="20577"/>
+        <pc:sldMkLst>
+          <pc:docMk/>
+          <pc:sldMk cId="1195465549" sldId="325"/>
+        </pc:sldMkLst>
+        <pc:spChg chg="mod ord">
+          <ac:chgData name="Mohammed Fasha" userId="S::mohammed.fasha@uop.edu.jo::cc64f42d-a1a6-4f08-b97b-0c37f877119f" providerId="AD" clId="Web-{048CEBFD-D6A1-FF4F-145A-C5347D00F6D8}" dt="2025-03-23T06:01:57.150" v="1158" actId="20577"/>
+          <ac:spMkLst>
+            <pc:docMk/>
+            <pc:sldMk cId="1195465549" sldId="325"/>
+            <ac:spMk id="2" creationId="{C40B076E-5F79-27B6-B774-38C83230BBDD}"/>
+          </ac:spMkLst>
+        </pc:spChg>
+        <pc:spChg chg="mod ord">
+          <ac:chgData name="Mohammed Fasha" userId="S::mohammed.fasha@uop.edu.jo::cc64f42d-a1a6-4f08-b97b-0c37f877119f" providerId="AD" clId="Web-{048CEBFD-D6A1-FF4F-145A-C5347D00F6D8}" dt="2025-03-23T06:01:44.322" v="1142"/>
+          <ac:spMkLst>
+            <pc:docMk/>
+            <pc:sldMk cId="1195465549" sldId="325"/>
+            <ac:spMk id="3" creationId="{82C6206C-8193-A125-EB18-48C260C8432B}"/>
+          </ac:spMkLst>
+        </pc:spChg>
+      </pc:sldChg>
+    </pc:docChg>
+  </pc:docChgLst>
+  <pc:docChgLst>
+    <pc:chgData name="Mohammed Fasha" userId="S::mohammed.fasha@uop.edu.jo::cc64f42d-a1a6-4f08-b97b-0c37f877119f" providerId="AD" clId="Web-{3873209A-CB00-400D-D158-6330B83C4A7A}"/>
+    <pc:docChg chg="addSld delSld modSld">
+      <pc:chgData name="Mohammed Fasha" userId="S::mohammed.fasha@uop.edu.jo::cc64f42d-a1a6-4f08-b97b-0c37f877119f" providerId="AD" clId="Web-{3873209A-CB00-400D-D158-6330B83C4A7A}" dt="2025-03-19T03:11:02.319" v="274" actId="20577"/>
+      <pc:docMkLst>
+        <pc:docMk/>
+      </pc:docMkLst>
+      <pc:sldChg chg="modSp">
+        <pc:chgData name="Mohammed Fasha" userId="S::mohammed.fasha@uop.edu.jo::cc64f42d-a1a6-4f08-b97b-0c37f877119f" providerId="AD" clId="Web-{3873209A-CB00-400D-D158-6330B83C4A7A}" dt="2025-03-19T03:03:32.760" v="103" actId="14100"/>
+        <pc:sldMkLst>
+          <pc:docMk/>
+          <pc:sldMk cId="0" sldId="278"/>
+        </pc:sldMkLst>
+        <pc:spChg chg="mod">
+          <ac:chgData name="Mohammed Fasha" userId="S::mohammed.fasha@uop.edu.jo::cc64f42d-a1a6-4f08-b97b-0c37f877119f" providerId="AD" clId="Web-{3873209A-CB00-400D-D158-6330B83C4A7A}" dt="2025-03-19T03:03:32.760" v="103" actId="14100"/>
+          <ac:spMkLst>
+            <pc:docMk/>
+            <pc:sldMk cId="0" sldId="278"/>
+            <ac:spMk id="2" creationId="{00000000-0000-0000-0000-000000000000}"/>
+          </ac:spMkLst>
+        </pc:spChg>
+        <pc:picChg chg="mod">
+          <ac:chgData name="Mohammed Fasha" userId="S::mohammed.fasha@uop.edu.jo::cc64f42d-a1a6-4f08-b97b-0c37f877119f" providerId="AD" clId="Web-{3873209A-CB00-400D-D158-6330B83C4A7A}" dt="2025-03-19T03:03:17.822" v="100" actId="1076"/>
+          <ac:picMkLst>
+            <pc:docMk/>
+            <pc:sldMk cId="0" sldId="278"/>
+            <ac:picMk id="4" creationId="{00000000-0000-0000-0000-000000000000}"/>
+          </ac:picMkLst>
+        </pc:picChg>
+        <pc:picChg chg="mod">
+          <ac:chgData name="Mohammed Fasha" userId="S::mohammed.fasha@uop.edu.jo::cc64f42d-a1a6-4f08-b97b-0c37f877119f" providerId="AD" clId="Web-{3873209A-CB00-400D-D158-6330B83C4A7A}" dt="2025-03-19T03:03:23.119" v="101" actId="1076"/>
+          <ac:picMkLst>
+            <pc:docMk/>
+            <pc:sldMk cId="0" sldId="278"/>
+            <ac:picMk id="5" creationId="{00000000-0000-0000-0000-000000000000}"/>
+          </ac:picMkLst>
+        </pc:picChg>
+      </pc:sldChg>
+      <pc:sldChg chg="addSp delSp modSp new">
+        <pc:chgData name="Mohammed Fasha" userId="S::mohammed.fasha@uop.edu.jo::cc64f42d-a1a6-4f08-b97b-0c37f877119f" providerId="AD" clId="Web-{3873209A-CB00-400D-D158-6330B83C4A7A}" dt="2025-03-19T03:11:02.319" v="274" actId="20577"/>
+        <pc:sldMkLst>
+          <pc:docMk/>
+          <pc:sldMk cId="441052949" sldId="309"/>
+        </pc:sldMkLst>
+      </pc:sldChg>
+      <pc:sldChg chg="add del replId">
+        <pc:chgData name="Mohammed Fasha" userId="S::mohammed.fasha@uop.edu.jo::cc64f42d-a1a6-4f08-b97b-0c37f877119f" providerId="AD" clId="Web-{3873209A-CB00-400D-D158-6330B83C4A7A}" dt="2025-03-19T03:02:14.461" v="73"/>
+        <pc:sldMkLst>
+          <pc:docMk/>
+          <pc:sldMk cId="3859015806" sldId="310"/>
+        </pc:sldMkLst>
+      </pc:sldChg>
+      <pc:sldChg chg="addSp delSp modSp add replId">
+        <pc:chgData name="Mohammed Fasha" userId="S::mohammed.fasha@uop.edu.jo::cc64f42d-a1a6-4f08-b97b-0c37f877119f" providerId="AD" clId="Web-{3873209A-CB00-400D-D158-6330B83C4A7A}" dt="2025-03-19T03:08:53.628" v="161" actId="20577"/>
+        <pc:sldMkLst>
+          <pc:docMk/>
+          <pc:sldMk cId="4115587381" sldId="311"/>
+        </pc:sldMkLst>
+      </pc:sldChg>
+      <pc:sldChg chg="addSp delSp modSp new del">
+        <pc:chgData name="Mohammed Fasha" userId="S::mohammed.fasha@uop.edu.jo::cc64f42d-a1a6-4f08-b97b-0c37f877119f" providerId="AD" clId="Web-{3873209A-CB00-400D-D158-6330B83C4A7A}" dt="2025-03-19T03:07:33.079" v="142"/>
+        <pc:sldMkLst>
+          <pc:docMk/>
+          <pc:sldMk cId="1952534702" sldId="312"/>
+        </pc:sldMkLst>
+      </pc:sldChg>
+    </pc:docChg>
+  </pc:docChgLst>
+  <pc:docChgLst>
+    <pc:chgData name="Mohammed Fasha" userId="cc64f42d-a1a6-4f08-b97b-0c37f877119f" providerId="ADAL" clId="{12C0646C-DE2C-4492-8B53-5F65EF722386}"/>
+    <pc:docChg chg="undo redo custSel addSld delSld modSld sldOrd">
+      <pc:chgData name="Mohammed Fasha" userId="cc64f42d-a1a6-4f08-b97b-0c37f877119f" providerId="ADAL" clId="{12C0646C-DE2C-4492-8B53-5F65EF722386}" dt="2025-03-19T09:12:33.880" v="390" actId="2696"/>
+      <pc:docMkLst>
+        <pc:docMk/>
+      </pc:docMkLst>
+      <pc:sldChg chg="modSp mod">
+        <pc:chgData name="Mohammed Fasha" userId="cc64f42d-a1a6-4f08-b97b-0c37f877119f" providerId="ADAL" clId="{12C0646C-DE2C-4492-8B53-5F65EF722386}" dt="2025-03-17T10:03:21.731" v="170" actId="1076"/>
+        <pc:sldMkLst>
+          <pc:docMk/>
+          <pc:sldMk cId="0" sldId="263"/>
+        </pc:sldMkLst>
+        <pc:spChg chg="mod">
+          <ac:chgData name="Mohammed Fasha" userId="cc64f42d-a1a6-4f08-b97b-0c37f877119f" providerId="ADAL" clId="{12C0646C-DE2C-4492-8B53-5F65EF722386}" dt="2025-03-17T10:03:20.378" v="169" actId="14100"/>
+          <ac:spMkLst>
+            <pc:docMk/>
+            <pc:sldMk cId="0" sldId="263"/>
+            <ac:spMk id="2" creationId="{00000000-0000-0000-0000-000000000000}"/>
+          </ac:spMkLst>
+        </pc:spChg>
+        <pc:picChg chg="mod">
+          <ac:chgData name="Mohammed Fasha" userId="cc64f42d-a1a6-4f08-b97b-0c37f877119f" providerId="ADAL" clId="{12C0646C-DE2C-4492-8B53-5F65EF722386}" dt="2025-03-17T10:03:21.731" v="170" actId="1076"/>
+          <ac:picMkLst>
+            <pc:docMk/>
+            <pc:sldMk cId="0" sldId="263"/>
+            <ac:picMk id="5" creationId="{00000000-0000-0000-0000-000000000000}"/>
+          </ac:picMkLst>
+        </pc:picChg>
+      </pc:sldChg>
+      <pc:sldChg chg="ord">
+        <pc:chgData name="Mohammed Fasha" userId="cc64f42d-a1a6-4f08-b97b-0c37f877119f" providerId="ADAL" clId="{12C0646C-DE2C-4492-8B53-5F65EF722386}" dt="2025-03-16T08:15:00.148" v="1"/>
+        <pc:sldMkLst>
+          <pc:docMk/>
+          <pc:sldMk cId="0" sldId="264"/>
+        </pc:sldMkLst>
+      </pc:sldChg>
+      <pc:sldChg chg="modSp mod">
+        <pc:chgData name="Mohammed Fasha" userId="cc64f42d-a1a6-4f08-b97b-0c37f877119f" providerId="ADAL" clId="{12C0646C-DE2C-4492-8B53-5F65EF722386}" dt="2025-03-17T10:03:35.983" v="172" actId="1076"/>
+        <pc:sldMkLst>
+          <pc:docMk/>
+          <pc:sldMk cId="0" sldId="265"/>
+        </pc:sldMkLst>
+        <pc:spChg chg="mod">
+          <ac:chgData name="Mohammed Fasha" userId="cc64f42d-a1a6-4f08-b97b-0c37f877119f" providerId="ADAL" clId="{12C0646C-DE2C-4492-8B53-5F65EF722386}" dt="2025-03-17T10:03:33.931" v="171" actId="14100"/>
+          <ac:spMkLst>
+            <pc:docMk/>
+            <pc:sldMk cId="0" sldId="265"/>
+            <ac:spMk id="3" creationId="{00000000-0000-0000-0000-000000000000}"/>
+          </ac:spMkLst>
+        </pc:spChg>
+        <pc:picChg chg="mod">
+          <ac:chgData name="Mohammed Fasha" userId="cc64f42d-a1a6-4f08-b97b-0c37f877119f" providerId="ADAL" clId="{12C0646C-DE2C-4492-8B53-5F65EF722386}" dt="2025-03-17T10:03:35.983" v="172" actId="1076"/>
+          <ac:picMkLst>
+            <pc:docMk/>
+            <pc:sldMk cId="0" sldId="265"/>
+            <ac:picMk id="2" creationId="{00000000-0000-0000-0000-000000000000}"/>
           </ac:picMkLst>
         </pc:picChg>
       </pc:sldChg>
       <pc:sldChg chg="del">
-        <pc:chgData name="Mohammed Fasha" userId="cc64f42d-a1a6-4f08-b97b-0c37f877119f" providerId="ADAL" clId="{52B7A16F-CAD0-4D4D-9F9C-A24C8678CAD7}" dt="2025-03-23T07:50:32.125" v="135" actId="2696"/>
+        <pc:chgData name="Mohammed Fasha" userId="cc64f42d-a1a6-4f08-b97b-0c37f877119f" providerId="ADAL" clId="{12C0646C-DE2C-4492-8B53-5F65EF722386}" dt="2025-03-17T09:03:29.846" v="2" actId="2696"/>
         <pc:sldMkLst>
           <pc:docMk/>
-          <pc:sldMk cId="2845841377" sldId="315"/>
+          <pc:sldMk cId="0" sldId="266"/>
         </pc:sldMkLst>
       </pc:sldChg>
-      <pc:sldChg chg="addSp delSp modSp mod">
-        <pc:chgData name="Mohammed Fasha" userId="cc64f42d-a1a6-4f08-b97b-0c37f877119f" providerId="ADAL" clId="{52B7A16F-CAD0-4D4D-9F9C-A24C8678CAD7}" dt="2025-03-23T08:12:51.858" v="440" actId="167"/>
+      <pc:sldChg chg="add">
+        <pc:chgData name="Mohammed Fasha" userId="cc64f42d-a1a6-4f08-b97b-0c37f877119f" providerId="ADAL" clId="{12C0646C-DE2C-4492-8B53-5F65EF722386}" dt="2025-03-17T09:05:51.748" v="7"/>
         <pc:sldMkLst>
           <pc:docMk/>
-          <pc:sldMk cId="3694445782" sldId="326"/>
+          <pc:sldMk cId="2051082680" sldId="266"/>
+        </pc:sldMkLst>
+      </pc:sldChg>
+      <pc:sldChg chg="modSp mod">
+        <pc:chgData name="Mohammed Fasha" userId="cc64f42d-a1a6-4f08-b97b-0c37f877119f" providerId="ADAL" clId="{12C0646C-DE2C-4492-8B53-5F65EF722386}" dt="2025-03-17T09:09:25.710" v="105" actId="207"/>
+        <pc:sldMkLst>
+          <pc:docMk/>
+          <pc:sldMk cId="0" sldId="268"/>
         </pc:sldMkLst>
         <pc:spChg chg="mod">
-          <ac:chgData name="Mohammed Fasha" userId="cc64f42d-a1a6-4f08-b97b-0c37f877119f" providerId="ADAL" clId="{52B7A16F-CAD0-4D4D-9F9C-A24C8678CAD7}" dt="2025-03-23T08:09:51.129" v="376" actId="27636"/>
+          <ac:chgData name="Mohammed Fasha" userId="cc64f42d-a1a6-4f08-b97b-0c37f877119f" providerId="ADAL" clId="{12C0646C-DE2C-4492-8B53-5F65EF722386}" dt="2025-03-17T09:09:25.710" v="105" actId="207"/>
           <ac:spMkLst>
             <pc:docMk/>
-            <pc:sldMk cId="3694445782" sldId="326"/>
-            <ac:spMk id="2" creationId="{76E77D81-B038-7FB5-2B90-061A90EBF23E}"/>
+            <pc:sldMk cId="0" sldId="268"/>
+            <ac:spMk id="5" creationId="{606C1567-AF39-CAED-E122-5F02B98CB8E2}"/>
           </ac:spMkLst>
         </pc:spChg>
-        <pc:spChg chg="add del mod">
-          <ac:chgData name="Mohammed Fasha" userId="cc64f42d-a1a6-4f08-b97b-0c37f877119f" providerId="ADAL" clId="{52B7A16F-CAD0-4D4D-9F9C-A24C8678CAD7}" dt="2025-03-23T08:12:39.989" v="435" actId="478"/>
+      </pc:sldChg>
+      <pc:sldChg chg="modSp mod">
+        <pc:chgData name="Mohammed Fasha" userId="cc64f42d-a1a6-4f08-b97b-0c37f877119f" providerId="ADAL" clId="{12C0646C-DE2C-4492-8B53-5F65EF722386}" dt="2025-03-17T09:09:14.766" v="104" actId="207"/>
+        <pc:sldMkLst>
+          <pc:docMk/>
+          <pc:sldMk cId="0" sldId="270"/>
+        </pc:sldMkLst>
+        <pc:spChg chg="mod">
+          <ac:chgData name="Mohammed Fasha" userId="cc64f42d-a1a6-4f08-b97b-0c37f877119f" providerId="ADAL" clId="{12C0646C-DE2C-4492-8B53-5F65EF722386}" dt="2025-03-17T09:09:14.766" v="104" actId="207"/>
           <ac:spMkLst>
             <pc:docMk/>
-            <pc:sldMk cId="3694445782" sldId="326"/>
-            <ac:spMk id="3" creationId="{A83CAC7D-42B8-C614-E399-7F41DD29BBE0}"/>
+            <pc:sldMk cId="0" sldId="270"/>
+            <ac:spMk id="3" creationId="{00000000-0000-0000-0000-000000000000}"/>
           </ac:spMkLst>
         </pc:spChg>
-        <pc:spChg chg="add mod">
-          <ac:chgData name="Mohammed Fasha" userId="cc64f42d-a1a6-4f08-b97b-0c37f877119f" providerId="ADAL" clId="{52B7A16F-CAD0-4D4D-9F9C-A24C8678CAD7}" dt="2025-03-23T08:12:38.465" v="433" actId="478"/>
+      </pc:sldChg>
+      <pc:sldChg chg="modSp mod">
+        <pc:chgData name="Mohammed Fasha" userId="cc64f42d-a1a6-4f08-b97b-0c37f877119f" providerId="ADAL" clId="{12C0646C-DE2C-4492-8B53-5F65EF722386}" dt="2025-03-17T09:09:57.093" v="106" actId="207"/>
+        <pc:sldMkLst>
+          <pc:docMk/>
+          <pc:sldMk cId="0" sldId="272"/>
+        </pc:sldMkLst>
+        <pc:spChg chg="mod">
+          <ac:chgData name="Mohammed Fasha" userId="cc64f42d-a1a6-4f08-b97b-0c37f877119f" providerId="ADAL" clId="{12C0646C-DE2C-4492-8B53-5F65EF722386}" dt="2025-03-17T09:09:57.093" v="106" actId="207"/>
           <ac:spMkLst>
             <pc:docMk/>
-            <pc:sldMk cId="3694445782" sldId="326"/>
-            <ac:spMk id="4" creationId="{497167A0-EE78-4968-6D82-0A145C061EA6}"/>
+            <pc:sldMk cId="0" sldId="272"/>
+            <ac:spMk id="7" creationId="{BD008676-47C8-D88A-CD4A-65BB83D57162}"/>
           </ac:spMkLst>
         </pc:spChg>
-        <pc:picChg chg="add del">
-          <ac:chgData name="Mohammed Fasha" userId="cc64f42d-a1a6-4f08-b97b-0c37f877119f" providerId="ADAL" clId="{52B7A16F-CAD0-4D4D-9F9C-A24C8678CAD7}" dt="2025-03-23T08:12:43.175" v="436" actId="478"/>
+      </pc:sldChg>
+      <pc:sldChg chg="modSp mod">
+        <pc:chgData name="Mohammed Fasha" userId="cc64f42d-a1a6-4f08-b97b-0c37f877119f" providerId="ADAL" clId="{12C0646C-DE2C-4492-8B53-5F65EF722386}" dt="2025-03-19T09:06:31.568" v="362" actId="1076"/>
+        <pc:sldMkLst>
+          <pc:docMk/>
+          <pc:sldMk cId="0" sldId="274"/>
+        </pc:sldMkLst>
+        <pc:spChg chg="mod">
+          <ac:chgData name="Mohammed Fasha" userId="cc64f42d-a1a6-4f08-b97b-0c37f877119f" providerId="ADAL" clId="{12C0646C-DE2C-4492-8B53-5F65EF722386}" dt="2025-03-17T09:08:51.041" v="101" actId="207"/>
+          <ac:spMkLst>
+            <pc:docMk/>
+            <pc:sldMk cId="0" sldId="274"/>
+            <ac:spMk id="7" creationId="{CF4277E2-2BAC-D76F-20C6-A50B542D2495}"/>
+          </ac:spMkLst>
+        </pc:spChg>
+        <pc:picChg chg="mod">
+          <ac:chgData name="Mohammed Fasha" userId="cc64f42d-a1a6-4f08-b97b-0c37f877119f" providerId="ADAL" clId="{12C0646C-DE2C-4492-8B53-5F65EF722386}" dt="2025-03-19T09:06:31.568" v="362" actId="1076"/>
           <ac:picMkLst>
             <pc:docMk/>
-            <pc:sldMk cId="3694445782" sldId="326"/>
-            <ac:picMk id="6146" creationId="{4A9D4C98-141F-2BF1-7D48-B551199D39AF}"/>
+            <pc:sldMk cId="0" sldId="274"/>
+            <ac:picMk id="5" creationId="{00000000-0000-0000-0000-000000000000}"/>
           </ac:picMkLst>
         </pc:picChg>
-        <pc:picChg chg="add">
-          <ac:chgData name="Mohammed Fasha" userId="cc64f42d-a1a6-4f08-b97b-0c37f877119f" providerId="ADAL" clId="{52B7A16F-CAD0-4D4D-9F9C-A24C8678CAD7}" dt="2025-03-23T08:12:39.090" v="434"/>
+        <pc:picChg chg="mod">
+          <ac:chgData name="Mohammed Fasha" userId="cc64f42d-a1a6-4f08-b97b-0c37f877119f" providerId="ADAL" clId="{12C0646C-DE2C-4492-8B53-5F65EF722386}" dt="2025-03-19T09:06:31.568" v="362" actId="1076"/>
           <ac:picMkLst>
             <pc:docMk/>
-            <pc:sldMk cId="3694445782" sldId="326"/>
-            <ac:picMk id="6148" creationId="{C8F621CB-8F86-187B-662F-33DBFF5F97F6}"/>
+            <pc:sldMk cId="0" sldId="274"/>
+            <ac:picMk id="6" creationId="{00000000-0000-0000-0000-000000000000}"/>
+          </ac:picMkLst>
+        </pc:picChg>
+      </pc:sldChg>
+      <pc:sldChg chg="modSp mod">
+        <pc:chgData name="Mohammed Fasha" userId="cc64f42d-a1a6-4f08-b97b-0c37f877119f" providerId="ADAL" clId="{12C0646C-DE2C-4492-8B53-5F65EF722386}" dt="2025-03-19T09:05:19.368" v="359" actId="6549"/>
+        <pc:sldMkLst>
+          <pc:docMk/>
+          <pc:sldMk cId="0" sldId="275"/>
+        </pc:sldMkLst>
+      </pc:sldChg>
+      <pc:sldChg chg="addSp modSp mod">
+        <pc:chgData name="Mohammed Fasha" userId="cc64f42d-a1a6-4f08-b97b-0c37f877119f" providerId="ADAL" clId="{12C0646C-DE2C-4492-8B53-5F65EF722386}" dt="2025-03-19T09:00:34.488" v="287" actId="1036"/>
+        <pc:sldMkLst>
+          <pc:docMk/>
+          <pc:sldMk cId="0" sldId="276"/>
+        </pc:sldMkLst>
+      </pc:sldChg>
+      <pc:sldChg chg="modSp mod">
+        <pc:chgData name="Mohammed Fasha" userId="cc64f42d-a1a6-4f08-b97b-0c37f877119f" providerId="ADAL" clId="{12C0646C-DE2C-4492-8B53-5F65EF722386}" dt="2025-03-19T09:03:17.368" v="349" actId="113"/>
+        <pc:sldMkLst>
+          <pc:docMk/>
+          <pc:sldMk cId="0" sldId="277"/>
+        </pc:sldMkLst>
+      </pc:sldChg>
+      <pc:sldChg chg="addSp modSp mod ord">
+        <pc:chgData name="Mohammed Fasha" userId="cc64f42d-a1a6-4f08-b97b-0c37f877119f" providerId="ADAL" clId="{12C0646C-DE2C-4492-8B53-5F65EF722386}" dt="2025-03-19T08:08:27.015" v="232"/>
+        <pc:sldMkLst>
+          <pc:docMk/>
+          <pc:sldMk cId="0" sldId="278"/>
+        </pc:sldMkLst>
+        <pc:spChg chg="mod">
+          <ac:chgData name="Mohammed Fasha" userId="cc64f42d-a1a6-4f08-b97b-0c37f877119f" providerId="ADAL" clId="{12C0646C-DE2C-4492-8B53-5F65EF722386}" dt="2025-03-17T09:13:23.408" v="140" actId="14"/>
+          <ac:spMkLst>
+            <pc:docMk/>
+            <pc:sldMk cId="0" sldId="278"/>
+            <ac:spMk id="6" creationId="{81843AE0-4921-7733-0D3B-33D489EDB8CC}"/>
+          </ac:spMkLst>
+        </pc:spChg>
+        <pc:picChg chg="mod">
+          <ac:chgData name="Mohammed Fasha" userId="cc64f42d-a1a6-4f08-b97b-0c37f877119f" providerId="ADAL" clId="{12C0646C-DE2C-4492-8B53-5F65EF722386}" dt="2025-03-17T09:12:45.807" v="136" actId="1076"/>
+          <ac:picMkLst>
+            <pc:docMk/>
+            <pc:sldMk cId="0" sldId="278"/>
+            <ac:picMk id="5" creationId="{00000000-0000-0000-0000-000000000000}"/>
           </ac:picMkLst>
         </pc:picChg>
         <pc:picChg chg="add mod">
-          <ac:chgData name="Mohammed Fasha" userId="cc64f42d-a1a6-4f08-b97b-0c37f877119f" providerId="ADAL" clId="{52B7A16F-CAD0-4D4D-9F9C-A24C8678CAD7}" dt="2025-03-23T08:12:51.858" v="440" actId="167"/>
+          <ac:chgData name="Mohammed Fasha" userId="cc64f42d-a1a6-4f08-b97b-0c37f877119f" providerId="ADAL" clId="{12C0646C-DE2C-4492-8B53-5F65EF722386}" dt="2025-03-17T09:12:36.594" v="133" actId="1076"/>
           <ac:picMkLst>
             <pc:docMk/>
-            <pc:sldMk cId="3694445782" sldId="326"/>
-            <ac:picMk id="6150" creationId="{DA80B1E5-2888-D735-7520-A47852F7ED1C}"/>
+            <pc:sldMk cId="0" sldId="278"/>
+            <ac:picMk id="2050" creationId="{232D760D-CBEA-0B66-CBCC-A5D70A94C927}"/>
           </ac:picMkLst>
         </pc:picChg>
       </pc:sldChg>
-      <pc:sldChg chg="addSp delSp modSp mod">
-        <pc:chgData name="Mohammed Fasha" userId="cc64f42d-a1a6-4f08-b97b-0c37f877119f" providerId="ADAL" clId="{52B7A16F-CAD0-4D4D-9F9C-A24C8678CAD7}" dt="2025-03-23T07:57:59.284" v="248" actId="113"/>
+      <pc:sldChg chg="modSp mod">
+        <pc:chgData name="Mohammed Fasha" userId="cc64f42d-a1a6-4f08-b97b-0c37f877119f" providerId="ADAL" clId="{12C0646C-DE2C-4492-8B53-5F65EF722386}" dt="2025-03-19T09:11:29.996" v="388" actId="1076"/>
         <pc:sldMkLst>
           <pc:docMk/>
-          <pc:sldMk cId="659685489" sldId="327"/>
+          <pc:sldMk cId="0" sldId="279"/>
+        </pc:sldMkLst>
+      </pc:sldChg>
+      <pc:sldChg chg="modSp mod">
+        <pc:chgData name="Mohammed Fasha" userId="cc64f42d-a1a6-4f08-b97b-0c37f877119f" providerId="ADAL" clId="{12C0646C-DE2C-4492-8B53-5F65EF722386}" dt="2025-03-17T09:14:11.054" v="154" actId="27636"/>
+        <pc:sldMkLst>
+          <pc:docMk/>
+          <pc:sldMk cId="0" sldId="280"/>
         </pc:sldMkLst>
         <pc:spChg chg="mod">
-          <ac:chgData name="Mohammed Fasha" userId="cc64f42d-a1a6-4f08-b97b-0c37f877119f" providerId="ADAL" clId="{52B7A16F-CAD0-4D4D-9F9C-A24C8678CAD7}" dt="2025-03-23T07:45:22.308" v="49" actId="27636"/>
+          <ac:chgData name="Mohammed Fasha" userId="cc64f42d-a1a6-4f08-b97b-0c37f877119f" providerId="ADAL" clId="{12C0646C-DE2C-4492-8B53-5F65EF722386}" dt="2025-03-17T09:14:11.054" v="154" actId="27636"/>
           <ac:spMkLst>
             <pc:docMk/>
-            <pc:sldMk cId="659685489" sldId="327"/>
-            <ac:spMk id="2" creationId="{AB3B982C-02E6-3ED4-9C3C-19BC09ADBB3B}"/>
+            <pc:sldMk cId="0" sldId="280"/>
+            <ac:spMk id="6" creationId="{CC4C1BC0-7E6B-75C8-0965-79DE721E7639}"/>
           </ac:spMkLst>
         </pc:spChg>
+      </pc:sldChg>
+      <pc:sldChg chg="modSp mod">
+        <pc:chgData name="Mohammed Fasha" userId="cc64f42d-a1a6-4f08-b97b-0c37f877119f" providerId="ADAL" clId="{12C0646C-DE2C-4492-8B53-5F65EF722386}" dt="2025-03-19T09:02:40.822" v="343" actId="27636"/>
+        <pc:sldMkLst>
+          <pc:docMk/>
+          <pc:sldMk cId="0" sldId="281"/>
+        </pc:sldMkLst>
         <pc:spChg chg="mod">
-          <ac:chgData name="Mohammed Fasha" userId="cc64f42d-a1a6-4f08-b97b-0c37f877119f" providerId="ADAL" clId="{52B7A16F-CAD0-4D4D-9F9C-A24C8678CAD7}" dt="2025-03-23T07:57:59.284" v="248" actId="113"/>
+          <ac:chgData name="Mohammed Fasha" userId="cc64f42d-a1a6-4f08-b97b-0c37f877119f" providerId="ADAL" clId="{12C0646C-DE2C-4492-8B53-5F65EF722386}" dt="2025-03-19T09:02:40.822" v="343" actId="27636"/>
           <ac:spMkLst>
             <pc:docMk/>
-            <pc:sldMk cId="659685489" sldId="327"/>
-            <ac:spMk id="3" creationId="{2370F989-F40F-8A0B-AC42-50D0E7E07AEB}"/>
+            <pc:sldMk cId="0" sldId="281"/>
+            <ac:spMk id="6" creationId="{EB8485EF-5B2E-B9FA-D743-D618D652D00C}"/>
           </ac:spMkLst>
         </pc:spChg>
-        <pc:picChg chg="add del mod">
-          <ac:chgData name="Mohammed Fasha" userId="cc64f42d-a1a6-4f08-b97b-0c37f877119f" providerId="ADAL" clId="{52B7A16F-CAD0-4D4D-9F9C-A24C8678CAD7}" dt="2025-03-23T07:51:39.530" v="168" actId="478"/>
+      </pc:sldChg>
+      <pc:sldChg chg="modSp mod">
+        <pc:chgData name="Mohammed Fasha" userId="cc64f42d-a1a6-4f08-b97b-0c37f877119f" providerId="ADAL" clId="{12C0646C-DE2C-4492-8B53-5F65EF722386}" dt="2025-03-17T09:15:21.712" v="168" actId="166"/>
+        <pc:sldMkLst>
+          <pc:docMk/>
+          <pc:sldMk cId="0" sldId="282"/>
+        </pc:sldMkLst>
+        <pc:spChg chg="mod">
+          <ac:chgData name="Mohammed Fasha" userId="cc64f42d-a1a6-4f08-b97b-0c37f877119f" providerId="ADAL" clId="{12C0646C-DE2C-4492-8B53-5F65EF722386}" dt="2025-03-17T09:15:12.700" v="166" actId="179"/>
+          <ac:spMkLst>
+            <pc:docMk/>
+            <pc:sldMk cId="0" sldId="282"/>
+            <ac:spMk id="7" creationId="{3951CDAE-FE5A-5CF3-E54D-996CD266DF38}"/>
+          </ac:spMkLst>
+        </pc:spChg>
+        <pc:picChg chg="mod ord">
+          <ac:chgData name="Mohammed Fasha" userId="cc64f42d-a1a6-4f08-b97b-0c37f877119f" providerId="ADAL" clId="{12C0646C-DE2C-4492-8B53-5F65EF722386}" dt="2025-03-17T09:15:21.712" v="168" actId="166"/>
           <ac:picMkLst>
             <pc:docMk/>
-            <pc:sldMk cId="659685489" sldId="327"/>
-            <ac:picMk id="2050" creationId="{70C29FCD-9FF4-7D1E-4036-B4E46065BE85}"/>
-          </ac:picMkLst>
-        </pc:picChg>
-        <pc:picChg chg="add mod">
-          <ac:chgData name="Mohammed Fasha" userId="cc64f42d-a1a6-4f08-b97b-0c37f877119f" providerId="ADAL" clId="{52B7A16F-CAD0-4D4D-9F9C-A24C8678CAD7}" dt="2025-03-23T07:51:53.982" v="181" actId="1036"/>
-          <ac:picMkLst>
-            <pc:docMk/>
-            <pc:sldMk cId="659685489" sldId="327"/>
-            <ac:picMk id="2052" creationId="{69FD89B0-8C2D-9A2A-4508-AE34F8749789}"/>
+            <pc:sldMk cId="0" sldId="282"/>
+            <ac:picMk id="5" creationId="{00000000-0000-0000-0000-000000000000}"/>
           </ac:picMkLst>
         </pc:picChg>
       </pc:sldChg>
-      <pc:sldChg chg="modSp add">
-        <pc:chgData name="Mohammed Fasha" userId="cc64f42d-a1a6-4f08-b97b-0c37f877119f" providerId="ADAL" clId="{52B7A16F-CAD0-4D4D-9F9C-A24C8678CAD7}" dt="2025-03-23T08:06:38.777" v="363" actId="1035"/>
+      <pc:sldChg chg="del">
+        <pc:chgData name="Mohammed Fasha" userId="cc64f42d-a1a6-4f08-b97b-0c37f877119f" providerId="ADAL" clId="{12C0646C-DE2C-4492-8B53-5F65EF722386}" dt="2025-03-19T09:12:27.453" v="389" actId="2696"/>
         <pc:sldMkLst>
           <pc:docMk/>
-          <pc:sldMk cId="932796301" sldId="328"/>
+          <pc:sldMk cId="3590006600" sldId="287"/>
+        </pc:sldMkLst>
+      </pc:sldChg>
+      <pc:sldChg chg="del">
+        <pc:chgData name="Mohammed Fasha" userId="cc64f42d-a1a6-4f08-b97b-0c37f877119f" providerId="ADAL" clId="{12C0646C-DE2C-4492-8B53-5F65EF722386}" dt="2025-03-19T09:12:33.880" v="390" actId="2696"/>
+        <pc:sldMkLst>
+          <pc:docMk/>
+          <pc:sldMk cId="4191150406" sldId="289"/>
+        </pc:sldMkLst>
+      </pc:sldChg>
+      <pc:sldChg chg="modSp mod">
+        <pc:chgData name="Mohammed Fasha" userId="cc64f42d-a1a6-4f08-b97b-0c37f877119f" providerId="ADAL" clId="{12C0646C-DE2C-4492-8B53-5F65EF722386}" dt="2025-03-17T09:06:41.256" v="38" actId="20577"/>
+        <pc:sldMkLst>
+          <pc:docMk/>
+          <pc:sldMk cId="2822153299" sldId="296"/>
+        </pc:sldMkLst>
+      </pc:sldChg>
+      <pc:sldChg chg="modSp mod">
+        <pc:chgData name="Mohammed Fasha" userId="cc64f42d-a1a6-4f08-b97b-0c37f877119f" providerId="ADAL" clId="{12C0646C-DE2C-4492-8B53-5F65EF722386}" dt="2025-03-17T09:06:49.710" v="39" actId="6549"/>
+        <pc:sldMkLst>
+          <pc:docMk/>
+          <pc:sldMk cId="1461366896" sldId="297"/>
+        </pc:sldMkLst>
+      </pc:sldChg>
+      <pc:sldChg chg="modSp mod">
+        <pc:chgData name="Mohammed Fasha" userId="cc64f42d-a1a6-4f08-b97b-0c37f877119f" providerId="ADAL" clId="{12C0646C-DE2C-4492-8B53-5F65EF722386}" dt="2025-03-17T10:04:49.704" v="228" actId="20577"/>
+        <pc:sldMkLst>
+          <pc:docMk/>
+          <pc:sldMk cId="3053666628" sldId="303"/>
+        </pc:sldMkLst>
+      </pc:sldChg>
+      <pc:sldChg chg="ord">
+        <pc:chgData name="Mohammed Fasha" userId="cc64f42d-a1a6-4f08-b97b-0c37f877119f" providerId="ADAL" clId="{12C0646C-DE2C-4492-8B53-5F65EF722386}" dt="2025-03-17T09:08:22.365" v="98"/>
+        <pc:sldMkLst>
+          <pc:docMk/>
+          <pc:sldMk cId="3673227071" sldId="305"/>
+        </pc:sldMkLst>
+      </pc:sldChg>
+      <pc:sldChg chg="addSp delSp modSp new mod modClrScheme chgLayout">
+        <pc:chgData name="Mohammed Fasha" userId="cc64f42d-a1a6-4f08-b97b-0c37f877119f" providerId="ADAL" clId="{12C0646C-DE2C-4492-8B53-5F65EF722386}" dt="2025-03-17T09:07:44.327" v="80" actId="20577"/>
+        <pc:sldMkLst>
+          <pc:docMk/>
+          <pc:sldMk cId="41320333" sldId="306"/>
+        </pc:sldMkLst>
+      </pc:sldChg>
+      <pc:sldChg chg="addSp delSp modSp new mod modClrScheme chgLayout">
+        <pc:chgData name="Mohammed Fasha" userId="cc64f42d-a1a6-4f08-b97b-0c37f877119f" providerId="ADAL" clId="{12C0646C-DE2C-4492-8B53-5F65EF722386}" dt="2025-03-17T09:07:22.274" v="67" actId="20577"/>
+        <pc:sldMkLst>
+          <pc:docMk/>
+          <pc:sldMk cId="4041194208" sldId="307"/>
+        </pc:sldMkLst>
+      </pc:sldChg>
+      <pc:sldChg chg="addSp delSp modSp new mod modClrScheme chgLayout">
+        <pc:chgData name="Mohammed Fasha" userId="cc64f42d-a1a6-4f08-b97b-0c37f877119f" providerId="ADAL" clId="{12C0646C-DE2C-4492-8B53-5F65EF722386}" dt="2025-03-17T09:07:56.222" v="96" actId="20577"/>
+        <pc:sldMkLst>
+          <pc:docMk/>
+          <pc:sldMk cId="3844551123" sldId="308"/>
+        </pc:sldMkLst>
+      </pc:sldChg>
+      <pc:sldChg chg="modSp mod">
+        <pc:chgData name="Mohammed Fasha" userId="cc64f42d-a1a6-4f08-b97b-0c37f877119f" providerId="ADAL" clId="{12C0646C-DE2C-4492-8B53-5F65EF722386}" dt="2025-03-19T09:10:10.713" v="366" actId="207"/>
+        <pc:sldMkLst>
+          <pc:docMk/>
+          <pc:sldMk cId="22495289" sldId="315"/>
+        </pc:sldMkLst>
+      </pc:sldChg>
+      <pc:sldChg chg="addSp delSp modSp new mod modClrScheme chgLayout">
+        <pc:chgData name="Mohammed Fasha" userId="cc64f42d-a1a6-4f08-b97b-0c37f877119f" providerId="ADAL" clId="{12C0646C-DE2C-4492-8B53-5F65EF722386}" dt="2025-03-19T08:09:16.709" v="248" actId="20577"/>
+        <pc:sldMkLst>
+          <pc:docMk/>
+          <pc:sldMk cId="196329700" sldId="316"/>
+        </pc:sldMkLst>
+      </pc:sldChg>
+      <pc:sldChg chg="addSp delSp modSp new mod modClrScheme chgLayout">
+        <pc:chgData name="Mohammed Fasha" userId="cc64f42d-a1a6-4f08-b97b-0c37f877119f" providerId="ADAL" clId="{12C0646C-DE2C-4492-8B53-5F65EF722386}" dt="2025-03-19T08:09:58.074" v="276" actId="20577"/>
+        <pc:sldMkLst>
+          <pc:docMk/>
+          <pc:sldMk cId="3080687933" sldId="317"/>
+        </pc:sldMkLst>
+      </pc:sldChg>
+      <pc:sldChg chg="addSp delSp modSp new mod modClrScheme chgLayout">
+        <pc:chgData name="Mohammed Fasha" userId="cc64f42d-a1a6-4f08-b97b-0c37f877119f" providerId="ADAL" clId="{12C0646C-DE2C-4492-8B53-5F65EF722386}" dt="2025-03-19T09:01:59.435" v="330" actId="20577"/>
+        <pc:sldMkLst>
+          <pc:docMk/>
+          <pc:sldMk cId="3702164412" sldId="318"/>
+        </pc:sldMkLst>
+      </pc:sldChg>
+    </pc:docChg>
+  </pc:docChgLst>
+  <pc:docChgLst>
+    <pc:chgData name="Mohammed Fasha" userId="S::mohammed.fasha@uop.edu.jo::cc64f42d-a1a6-4f08-b97b-0c37f877119f" providerId="AD" clId="Web-{37180445-8C36-3D61-B421-DE7B4B97BDB9}"/>
+    <pc:docChg chg="addSld delSld modSld sldOrd">
+      <pc:chgData name="Mohammed Fasha" userId="S::mohammed.fasha@uop.edu.jo::cc64f42d-a1a6-4f08-b97b-0c37f877119f" providerId="AD" clId="Web-{37180445-8C36-3D61-B421-DE7B4B97BDB9}" dt="2025-03-19T03:36:22.093" v="327" actId="1076"/>
+      <pc:docMkLst>
+        <pc:docMk/>
+      </pc:docMkLst>
+      <pc:sldChg chg="modSp">
+        <pc:chgData name="Mohammed Fasha" userId="S::mohammed.fasha@uop.edu.jo::cc64f42d-a1a6-4f08-b97b-0c37f877119f" providerId="AD" clId="Web-{37180445-8C36-3D61-B421-DE7B4B97BDB9}" dt="2025-03-19T03:30:37.066" v="274" actId="20577"/>
+        <pc:sldMkLst>
+          <pc:docMk/>
+          <pc:sldMk cId="0" sldId="276"/>
+        </pc:sldMkLst>
+      </pc:sldChg>
+      <pc:sldChg chg="modSp ord">
+        <pc:chgData name="Mohammed Fasha" userId="S::mohammed.fasha@uop.edu.jo::cc64f42d-a1a6-4f08-b97b-0c37f877119f" providerId="AD" clId="Web-{37180445-8C36-3D61-B421-DE7B4B97BDB9}" dt="2025-03-19T03:26:50.183" v="239" actId="20577"/>
+        <pc:sldMkLst>
+          <pc:docMk/>
+          <pc:sldMk cId="0" sldId="278"/>
+        </pc:sldMkLst>
+        <pc:spChg chg="mod">
+          <ac:chgData name="Mohammed Fasha" userId="S::mohammed.fasha@uop.edu.jo::cc64f42d-a1a6-4f08-b97b-0c37f877119f" providerId="AD" clId="Web-{37180445-8C36-3D61-B421-DE7B4B97BDB9}" dt="2025-03-19T03:26:50.183" v="239" actId="20577"/>
+          <ac:spMkLst>
+            <pc:docMk/>
+            <pc:sldMk cId="0" sldId="278"/>
+            <ac:spMk id="6" creationId="{81843AE0-4921-7733-0D3B-33D489EDB8CC}"/>
+          </ac:spMkLst>
+        </pc:spChg>
+      </pc:sldChg>
+      <pc:sldChg chg="modSp">
+        <pc:chgData name="Mohammed Fasha" userId="S::mohammed.fasha@uop.edu.jo::cc64f42d-a1a6-4f08-b97b-0c37f877119f" providerId="AD" clId="Web-{37180445-8C36-3D61-B421-DE7B4B97BDB9}" dt="2025-03-19T03:19:09.496" v="127" actId="20577"/>
+        <pc:sldMkLst>
+          <pc:docMk/>
+          <pc:sldMk cId="0" sldId="280"/>
+        </pc:sldMkLst>
+        <pc:spChg chg="mod">
+          <ac:chgData name="Mohammed Fasha" userId="S::mohammed.fasha@uop.edu.jo::cc64f42d-a1a6-4f08-b97b-0c37f877119f" providerId="AD" clId="Web-{37180445-8C36-3D61-B421-DE7B4B97BDB9}" dt="2025-03-19T03:19:09.496" v="127" actId="20577"/>
+          <ac:spMkLst>
+            <pc:docMk/>
+            <pc:sldMk cId="0" sldId="280"/>
+            <ac:spMk id="6" creationId="{CC4C1BC0-7E6B-75C8-0965-79DE721E7639}"/>
+          </ac:spMkLst>
+        </pc:spChg>
+      </pc:sldChg>
+      <pc:sldChg chg="addSp modSp">
+        <pc:chgData name="Mohammed Fasha" userId="S::mohammed.fasha@uop.edu.jo::cc64f42d-a1a6-4f08-b97b-0c37f877119f" providerId="AD" clId="Web-{37180445-8C36-3D61-B421-DE7B4B97BDB9}" dt="2025-03-19T03:21:50.361" v="182" actId="20577"/>
+        <pc:sldMkLst>
+          <pc:docMk/>
+          <pc:sldMk cId="441052949" sldId="309"/>
+        </pc:sldMkLst>
+      </pc:sldChg>
+      <pc:sldChg chg="addSp delSp modSp add del replId">
+        <pc:chgData name="Mohammed Fasha" userId="S::mohammed.fasha@uop.edu.jo::cc64f42d-a1a6-4f08-b97b-0c37f877119f" providerId="AD" clId="Web-{37180445-8C36-3D61-B421-DE7B4B97BDB9}" dt="2025-03-19T03:17:37.368" v="121"/>
+        <pc:sldMkLst>
+          <pc:docMk/>
+          <pc:sldMk cId="1021713399" sldId="312"/>
+        </pc:sldMkLst>
+      </pc:sldChg>
+      <pc:sldChg chg="addSp modSp new">
+        <pc:chgData name="Mohammed Fasha" userId="S::mohammed.fasha@uop.edu.jo::cc64f42d-a1a6-4f08-b97b-0c37f877119f" providerId="AD" clId="Web-{37180445-8C36-3D61-B421-DE7B4B97BDB9}" dt="2025-03-19T03:24:21.850" v="219" actId="20577"/>
+        <pc:sldMkLst>
+          <pc:docMk/>
+          <pc:sldMk cId="1008151712" sldId="313"/>
+        </pc:sldMkLst>
+      </pc:sldChg>
+      <pc:sldChg chg="addSp delSp modSp new">
+        <pc:chgData name="Mohammed Fasha" userId="S::mohammed.fasha@uop.edu.jo::cc64f42d-a1a6-4f08-b97b-0c37f877119f" providerId="AD" clId="Web-{37180445-8C36-3D61-B421-DE7B4B97BDB9}" dt="2025-03-19T03:31:22.739" v="283" actId="20577"/>
+        <pc:sldMkLst>
+          <pc:docMk/>
+          <pc:sldMk cId="618074235" sldId="314"/>
+        </pc:sldMkLst>
+      </pc:sldChg>
+      <pc:sldChg chg="addSp modSp new">
+        <pc:chgData name="Mohammed Fasha" userId="S::mohammed.fasha@uop.edu.jo::cc64f42d-a1a6-4f08-b97b-0c37f877119f" providerId="AD" clId="Web-{37180445-8C36-3D61-B421-DE7B4B97BDB9}" dt="2025-03-19T03:36:22.093" v="327" actId="1076"/>
+        <pc:sldMkLst>
+          <pc:docMk/>
+          <pc:sldMk cId="22495289" sldId="315"/>
+        </pc:sldMkLst>
+      </pc:sldChg>
+    </pc:docChg>
+  </pc:docChgLst>
+  <pc:docChgLst>
+    <pc:chgData name="Mohammed Fasha" userId="cc64f42d-a1a6-4f08-b97b-0c37f877119f" providerId="ADAL" clId="{33A44248-7984-4750-8CBD-503C66D5F8B6}"/>
+    <pc:docChg chg="custSel addSld modSld">
+      <pc:chgData name="Mohammed Fasha" userId="cc64f42d-a1a6-4f08-b97b-0c37f877119f" providerId="ADAL" clId="{33A44248-7984-4750-8CBD-503C66D5F8B6}" dt="2025-03-05T09:13:55.803" v="21" actId="1076"/>
+      <pc:docMkLst>
+        <pc:docMk/>
+      </pc:docMkLst>
+      <pc:sldChg chg="addSp delSp modSp add">
+        <pc:chgData name="Mohammed Fasha" userId="cc64f42d-a1a6-4f08-b97b-0c37f877119f" providerId="ADAL" clId="{33A44248-7984-4750-8CBD-503C66D5F8B6}" dt="2025-03-05T09:13:55.803" v="21" actId="1076"/>
+        <pc:sldMkLst>
+          <pc:docMk/>
+          <pc:sldMk cId="2982934387" sldId="520"/>
+        </pc:sldMkLst>
+      </pc:sldChg>
+    </pc:docChg>
+  </pc:docChgLst>
+  <pc:docChgLst>
+    <pc:chgData name="Mohammed Fasha" userId="S::mohammed.fasha@uop.edu.jo::cc64f42d-a1a6-4f08-b97b-0c37f877119f" providerId="AD" clId="Web-{CFB52BA1-027E-4A5C-51C2-A494885CE8B6}"/>
+    <pc:docChg chg="addSld delSld modSld">
+      <pc:chgData name="Mohammed Fasha" userId="S::mohammed.fasha@uop.edu.jo::cc64f42d-a1a6-4f08-b97b-0c37f877119f" providerId="AD" clId="Web-{CFB52BA1-027E-4A5C-51C2-A494885CE8B6}" dt="2025-03-16T14:45:18.235" v="45" actId="1076"/>
+      <pc:docMkLst>
+        <pc:docMk/>
+      </pc:docMkLst>
+      <pc:sldChg chg="modSp">
+        <pc:chgData name="Mohammed Fasha" userId="S::mohammed.fasha@uop.edu.jo::cc64f42d-a1a6-4f08-b97b-0c37f877119f" providerId="AD" clId="Web-{CFB52BA1-027E-4A5C-51C2-A494885CE8B6}" dt="2025-03-16T14:45:05.391" v="43" actId="1076"/>
+        <pc:sldMkLst>
+          <pc:docMk/>
+          <pc:sldMk cId="0" sldId="269"/>
+        </pc:sldMkLst>
+      </pc:sldChg>
+      <pc:sldChg chg="modSp">
+        <pc:chgData name="Mohammed Fasha" userId="S::mohammed.fasha@uop.edu.jo::cc64f42d-a1a6-4f08-b97b-0c37f877119f" providerId="AD" clId="Web-{CFB52BA1-027E-4A5C-51C2-A494885CE8B6}" dt="2025-03-16T14:45:18.235" v="45" actId="1076"/>
+        <pc:sldMkLst>
+          <pc:docMk/>
+          <pc:sldMk cId="0" sldId="270"/>
         </pc:sldMkLst>
         <pc:picChg chg="mod">
-          <ac:chgData name="Mohammed Fasha" userId="cc64f42d-a1a6-4f08-b97b-0c37f877119f" providerId="ADAL" clId="{52B7A16F-CAD0-4D4D-9F9C-A24C8678CAD7}" dt="2025-03-23T08:06:38.777" v="363" actId="1035"/>
+          <ac:chgData name="Mohammed Fasha" userId="S::mohammed.fasha@uop.edu.jo::cc64f42d-a1a6-4f08-b97b-0c37f877119f" providerId="AD" clId="Web-{CFB52BA1-027E-4A5C-51C2-A494885CE8B6}" dt="2025-03-16T14:45:18.235" v="45" actId="1076"/>
           <ac:picMkLst>
             <pc:docMk/>
-            <pc:sldMk cId="932796301" sldId="328"/>
-            <ac:picMk id="4098" creationId="{0CAA22BE-1351-B1A5-188C-DD41EC29B52D}"/>
+            <pc:sldMk cId="0" sldId="270"/>
+            <ac:picMk id="15" creationId="{4E22367B-B754-648E-0B22-AC55F28E1729}"/>
           </ac:picMkLst>
         </pc:picChg>
       </pc:sldChg>
-      <pc:sldChg chg="addSp modSp del mod">
-        <pc:chgData name="Mohammed Fasha" userId="cc64f42d-a1a6-4f08-b97b-0c37f877119f" providerId="ADAL" clId="{52B7A16F-CAD0-4D4D-9F9C-A24C8678CAD7}" dt="2025-03-23T08:06:20.763" v="361" actId="2696"/>
+      <pc:sldChg chg="modSp">
+        <pc:chgData name="Mohammed Fasha" userId="S::mohammed.fasha@uop.edu.jo::cc64f42d-a1a6-4f08-b97b-0c37f877119f" providerId="AD" clId="Web-{CFB52BA1-027E-4A5C-51C2-A494885CE8B6}" dt="2025-03-16T14:44:57.469" v="42" actId="20577"/>
         <pc:sldMkLst>
           <pc:docMk/>
-          <pc:sldMk cId="4072578661" sldId="328"/>
+          <pc:sldMk cId="0" sldId="272"/>
         </pc:sldMkLst>
         <pc:spChg chg="mod">
-          <ac:chgData name="Mohammed Fasha" userId="cc64f42d-a1a6-4f08-b97b-0c37f877119f" providerId="ADAL" clId="{52B7A16F-CAD0-4D4D-9F9C-A24C8678CAD7}" dt="2025-03-23T07:59:04.676" v="264" actId="20577"/>
+          <ac:chgData name="Mohammed Fasha" userId="S::mohammed.fasha@uop.edu.jo::cc64f42d-a1a6-4f08-b97b-0c37f877119f" providerId="AD" clId="Web-{CFB52BA1-027E-4A5C-51C2-A494885CE8B6}" dt="2025-03-16T14:44:57.469" v="42" actId="20577"/>
           <ac:spMkLst>
             <pc:docMk/>
-            <pc:sldMk cId="4072578661" sldId="328"/>
-            <ac:spMk id="2" creationId="{3AF05E53-A460-BAD5-18F0-BA9643DE6707}"/>
+            <pc:sldMk cId="0" sldId="272"/>
+            <ac:spMk id="2" creationId="{00000000-0000-0000-0000-000000000000}"/>
           </ac:spMkLst>
         </pc:spChg>
+      </pc:sldChg>
+      <pc:sldChg chg="modSp">
+        <pc:chgData name="Mohammed Fasha" userId="S::mohammed.fasha@uop.edu.jo::cc64f42d-a1a6-4f08-b97b-0c37f877119f" providerId="AD" clId="Web-{CFB52BA1-027E-4A5C-51C2-A494885CE8B6}" dt="2025-03-16T14:44:48.500" v="41" actId="14100"/>
+        <pc:sldMkLst>
+          <pc:docMk/>
+          <pc:sldMk cId="0" sldId="274"/>
+        </pc:sldMkLst>
         <pc:spChg chg="mod">
-          <ac:chgData name="Mohammed Fasha" userId="cc64f42d-a1a6-4f08-b97b-0c37f877119f" providerId="ADAL" clId="{52B7A16F-CAD0-4D4D-9F9C-A24C8678CAD7}" dt="2025-03-23T08:06:00.921" v="360" actId="113"/>
+          <ac:chgData name="Mohammed Fasha" userId="S::mohammed.fasha@uop.edu.jo::cc64f42d-a1a6-4f08-b97b-0c37f877119f" providerId="AD" clId="Web-{CFB52BA1-027E-4A5C-51C2-A494885CE8B6}" dt="2025-03-16T14:44:48.500" v="41" actId="14100"/>
           <ac:spMkLst>
             <pc:docMk/>
-            <pc:sldMk cId="4072578661" sldId="328"/>
-            <ac:spMk id="3" creationId="{3C3E019B-0F20-8E05-2053-6E145189E1FD}"/>
+            <pc:sldMk cId="0" sldId="274"/>
+            <ac:spMk id="7" creationId="{CF4277E2-2BAC-D76F-20C6-A50B542D2495}"/>
           </ac:spMkLst>
         </pc:spChg>
-        <pc:picChg chg="add mod">
-          <ac:chgData name="Mohammed Fasha" userId="cc64f42d-a1a6-4f08-b97b-0c37f877119f" providerId="ADAL" clId="{52B7A16F-CAD0-4D4D-9F9C-A24C8678CAD7}" dt="2025-03-23T08:04:28.286" v="350" actId="1035"/>
-          <ac:picMkLst>
-            <pc:docMk/>
-            <pc:sldMk cId="4072578661" sldId="328"/>
-            <ac:picMk id="4098" creationId="{0CAA22BE-1351-B1A5-188C-DD41EC29B52D}"/>
-          </ac:picMkLst>
-        </pc:picChg>
       </pc:sldChg>
-      <pc:sldChg chg="addSp modSp mod">
-        <pc:chgData name="Mohammed Fasha" userId="cc64f42d-a1a6-4f08-b97b-0c37f877119f" providerId="ADAL" clId="{52B7A16F-CAD0-4D4D-9F9C-A24C8678CAD7}" dt="2025-03-23T08:05:29.878" v="358" actId="14100"/>
+      <pc:sldChg chg="addSp delSp modSp del">
+        <pc:chgData name="Mohammed Fasha" userId="S::mohammed.fasha@uop.edu.jo::cc64f42d-a1a6-4f08-b97b-0c37f877119f" providerId="AD" clId="Web-{CFB52BA1-027E-4A5C-51C2-A494885CE8B6}" dt="2025-03-16T14:44:02.201" v="36"/>
         <pc:sldMkLst>
           <pc:docMk/>
-          <pc:sldMk cId="3366111495" sldId="329"/>
+          <pc:sldMk cId="3476611510" sldId="290"/>
         </pc:sldMkLst>
-        <pc:spChg chg="mod">
-          <ac:chgData name="Mohammed Fasha" userId="cc64f42d-a1a6-4f08-b97b-0c37f877119f" providerId="ADAL" clId="{52B7A16F-CAD0-4D4D-9F9C-A24C8678CAD7}" dt="2025-03-23T07:56:54.852" v="238" actId="27636"/>
-          <ac:spMkLst>
-            <pc:docMk/>
-            <pc:sldMk cId="3366111495" sldId="329"/>
-            <ac:spMk id="2" creationId="{A1718324-DE08-4740-D0D9-7603BC5E0162}"/>
-          </ac:spMkLst>
-        </pc:spChg>
-        <pc:spChg chg="mod">
-          <ac:chgData name="Mohammed Fasha" userId="cc64f42d-a1a6-4f08-b97b-0c37f877119f" providerId="ADAL" clId="{52B7A16F-CAD0-4D4D-9F9C-A24C8678CAD7}" dt="2025-03-23T08:04:51.241" v="354" actId="20577"/>
-          <ac:spMkLst>
-            <pc:docMk/>
-            <pc:sldMk cId="3366111495" sldId="329"/>
-            <ac:spMk id="3" creationId="{9D118BE8-48E4-84B1-F7A3-AE58B873B879}"/>
-          </ac:spMkLst>
-        </pc:spChg>
-        <pc:picChg chg="add mod">
-          <ac:chgData name="Mohammed Fasha" userId="cc64f42d-a1a6-4f08-b97b-0c37f877119f" providerId="ADAL" clId="{52B7A16F-CAD0-4D4D-9F9C-A24C8678CAD7}" dt="2025-03-23T08:05:29.878" v="358" actId="14100"/>
-          <ac:picMkLst>
-            <pc:docMk/>
-            <pc:sldMk cId="3366111495" sldId="329"/>
-            <ac:picMk id="5122" creationId="{9029A929-644F-B232-0F2F-8E746CA5A374}"/>
-          </ac:picMkLst>
-        </pc:picChg>
+      </pc:sldChg>
+      <pc:sldChg chg="addSp delSp modSp new">
+        <pc:chgData name="Mohammed Fasha" userId="S::mohammed.fasha@uop.edu.jo::cc64f42d-a1a6-4f08-b97b-0c37f877119f" providerId="AD" clId="Web-{CFB52BA1-027E-4A5C-51C2-A494885CE8B6}" dt="2025-03-16T14:42:40.261" v="8" actId="20577"/>
+        <pc:sldMkLst>
+          <pc:docMk/>
+          <pc:sldMk cId="1663389758" sldId="302"/>
+        </pc:sldMkLst>
+      </pc:sldChg>
+      <pc:sldChg chg="addSp modSp new">
+        <pc:chgData name="Mohammed Fasha" userId="S::mohammed.fasha@uop.edu.jo::cc64f42d-a1a6-4f08-b97b-0c37f877119f" providerId="AD" clId="Web-{CFB52BA1-027E-4A5C-51C2-A494885CE8B6}" dt="2025-03-16T14:44:23.343" v="40" actId="1076"/>
+        <pc:sldMkLst>
+          <pc:docMk/>
+          <pc:sldMk cId="3053666628" sldId="303"/>
+        </pc:sldMkLst>
       </pc:sldChg>
     </pc:docChg>
   </pc:docChgLst>
@@ -1365,1333 +2724,313 @@
     </pc:docChg>
   </pc:docChgLst>
   <pc:docChgLst>
-    <pc:chgData name="Mohammed Fasha" userId="S::mohammed.fasha@uop.edu.jo::cc64f42d-a1a6-4f08-b97b-0c37f877119f" providerId="AD" clId="Web-{37180445-8C36-3D61-B421-DE7B4B97BDB9}"/>
-    <pc:docChg chg="addSld delSld modSld sldOrd">
-      <pc:chgData name="Mohammed Fasha" userId="S::mohammed.fasha@uop.edu.jo::cc64f42d-a1a6-4f08-b97b-0c37f877119f" providerId="AD" clId="Web-{37180445-8C36-3D61-B421-DE7B4B97BDB9}" dt="2025-03-19T03:36:22.093" v="327" actId="1076"/>
+    <pc:chgData name="Mohammed Fasha" userId="cc64f42d-a1a6-4f08-b97b-0c37f877119f" providerId="ADAL" clId="{52B7A16F-CAD0-4D4D-9F9C-A24C8678CAD7}"/>
+    <pc:docChg chg="undo custSel addSld delSld modSld">
+      <pc:chgData name="Mohammed Fasha" userId="cc64f42d-a1a6-4f08-b97b-0c37f877119f" providerId="ADAL" clId="{52B7A16F-CAD0-4D4D-9F9C-A24C8678CAD7}" dt="2025-03-23T08:12:51.858" v="440" actId="167"/>
       <pc:docMkLst>
         <pc:docMk/>
       </pc:docMkLst>
-      <pc:sldChg chg="modSp">
-        <pc:chgData name="Mohammed Fasha" userId="S::mohammed.fasha@uop.edu.jo::cc64f42d-a1a6-4f08-b97b-0c37f877119f" providerId="AD" clId="Web-{37180445-8C36-3D61-B421-DE7B4B97BDB9}" dt="2025-03-19T03:30:37.066" v="274" actId="20577"/>
+      <pc:sldChg chg="modSp mod">
+        <pc:chgData name="Mohammed Fasha" userId="cc64f42d-a1a6-4f08-b97b-0c37f877119f" providerId="ADAL" clId="{52B7A16F-CAD0-4D4D-9F9C-A24C8678CAD7}" dt="2025-03-23T07:38:06.248" v="0" actId="1076"/>
         <pc:sldMkLst>
           <pc:docMk/>
-          <pc:sldMk cId="0" sldId="276"/>
+          <pc:sldMk cId="0" sldId="260"/>
         </pc:sldMkLst>
+        <pc:picChg chg="mod">
+          <ac:chgData name="Mohammed Fasha" userId="cc64f42d-a1a6-4f08-b97b-0c37f877119f" providerId="ADAL" clId="{52B7A16F-CAD0-4D4D-9F9C-A24C8678CAD7}" dt="2025-03-23T07:38:06.248" v="0" actId="1076"/>
+          <ac:picMkLst>
+            <pc:docMk/>
+            <pc:sldMk cId="0" sldId="260"/>
+            <ac:picMk id="4" creationId="{00000000-0000-0000-0000-000000000000}"/>
+          </ac:picMkLst>
+        </pc:picChg>
       </pc:sldChg>
-      <pc:sldChg chg="modSp ord">
-        <pc:chgData name="Mohammed Fasha" userId="S::mohammed.fasha@uop.edu.jo::cc64f42d-a1a6-4f08-b97b-0c37f877119f" providerId="AD" clId="Web-{37180445-8C36-3D61-B421-DE7B4B97BDB9}" dt="2025-03-19T03:26:50.183" v="239" actId="20577"/>
+      <pc:sldChg chg="addSp delSp modSp mod">
+        <pc:chgData name="Mohammed Fasha" userId="cc64f42d-a1a6-4f08-b97b-0c37f877119f" providerId="ADAL" clId="{52B7A16F-CAD0-4D4D-9F9C-A24C8678CAD7}" dt="2025-03-23T07:53:24.379" v="210" actId="1037"/>
         <pc:sldMkLst>
           <pc:docMk/>
-          <pc:sldMk cId="0" sldId="278"/>
+          <pc:sldMk cId="0" sldId="268"/>
         </pc:sldMkLst>
         <pc:spChg chg="mod">
-          <ac:chgData name="Mohammed Fasha" userId="S::mohammed.fasha@uop.edu.jo::cc64f42d-a1a6-4f08-b97b-0c37f877119f" providerId="AD" clId="Web-{37180445-8C36-3D61-B421-DE7B4B97BDB9}" dt="2025-03-19T03:26:50.183" v="239" actId="20577"/>
+          <ac:chgData name="Mohammed Fasha" userId="cc64f42d-a1a6-4f08-b97b-0c37f877119f" providerId="ADAL" clId="{52B7A16F-CAD0-4D4D-9F9C-A24C8678CAD7}" dt="2025-03-23T07:52:27.822" v="194" actId="14100"/>
           <ac:spMkLst>
             <pc:docMk/>
-            <pc:sldMk cId="0" sldId="278"/>
-            <ac:spMk id="6" creationId="{81843AE0-4921-7733-0D3B-33D489EDB8CC}"/>
+            <pc:sldMk cId="0" sldId="268"/>
+            <ac:spMk id="2" creationId="{00000000-0000-0000-0000-000000000000}"/>
           </ac:spMkLst>
         </pc:spChg>
+        <pc:picChg chg="del mod">
+          <ac:chgData name="Mohammed Fasha" userId="cc64f42d-a1a6-4f08-b97b-0c37f877119f" providerId="ADAL" clId="{52B7A16F-CAD0-4D4D-9F9C-A24C8678CAD7}" dt="2025-03-23T07:49:10.230" v="99" actId="21"/>
+          <ac:picMkLst>
+            <pc:docMk/>
+            <pc:sldMk cId="0" sldId="268"/>
+            <ac:picMk id="3" creationId="{80666BF4-16FB-5F6D-681D-CB4B25AF4A97}"/>
+          </ac:picMkLst>
+        </pc:picChg>
+        <pc:picChg chg="add mod">
+          <ac:chgData name="Mohammed Fasha" userId="cc64f42d-a1a6-4f08-b97b-0c37f877119f" providerId="ADAL" clId="{52B7A16F-CAD0-4D4D-9F9C-A24C8678CAD7}" dt="2025-03-23T07:53:24.379" v="210" actId="1037"/>
+          <ac:picMkLst>
+            <pc:docMk/>
+            <pc:sldMk cId="0" sldId="268"/>
+            <ac:picMk id="4" creationId="{8938F170-AA00-1377-3C2D-9C4BA79F0B63}"/>
+          </ac:picMkLst>
+        </pc:picChg>
+        <pc:picChg chg="mod">
+          <ac:chgData name="Mohammed Fasha" userId="cc64f42d-a1a6-4f08-b97b-0c37f877119f" providerId="ADAL" clId="{52B7A16F-CAD0-4D4D-9F9C-A24C8678CAD7}" dt="2025-03-23T07:52:46.951" v="196" actId="1076"/>
+          <ac:picMkLst>
+            <pc:docMk/>
+            <pc:sldMk cId="0" sldId="268"/>
+            <ac:picMk id="1026" creationId="{6F3CBA0F-1E6C-643F-B94A-E0D29A10F4F2}"/>
+          </ac:picMkLst>
+        </pc:picChg>
+        <pc:picChg chg="add mod">
+          <ac:chgData name="Mohammed Fasha" userId="cc64f42d-a1a6-4f08-b97b-0c37f877119f" providerId="ADAL" clId="{52B7A16F-CAD0-4D4D-9F9C-A24C8678CAD7}" dt="2025-03-23T07:52:51.388" v="198" actId="1076"/>
+          <ac:picMkLst>
+            <pc:docMk/>
+            <pc:sldMk cId="0" sldId="268"/>
+            <ac:picMk id="3074" creationId="{CA531F7F-21C5-71FB-D0ED-F868724378F4}"/>
+          </ac:picMkLst>
+        </pc:picChg>
       </pc:sldChg>
-      <pc:sldChg chg="modSp">
-        <pc:chgData name="Mohammed Fasha" userId="S::mohammed.fasha@uop.edu.jo::cc64f42d-a1a6-4f08-b97b-0c37f877119f" providerId="AD" clId="Web-{37180445-8C36-3D61-B421-DE7B4B97BDB9}" dt="2025-03-19T03:19:09.496" v="127" actId="20577"/>
+      <pc:sldChg chg="modSp mod">
+        <pc:chgData name="Mohammed Fasha" userId="cc64f42d-a1a6-4f08-b97b-0c37f877119f" providerId="ADAL" clId="{52B7A16F-CAD0-4D4D-9F9C-A24C8678CAD7}" dt="2025-03-23T08:04:37.151" v="351" actId="1076"/>
         <pc:sldMkLst>
           <pc:docMk/>
-          <pc:sldMk cId="0" sldId="280"/>
+          <pc:sldMk cId="0" sldId="272"/>
         </pc:sldMkLst>
-        <pc:spChg chg="mod">
-          <ac:chgData name="Mohammed Fasha" userId="S::mohammed.fasha@uop.edu.jo::cc64f42d-a1a6-4f08-b97b-0c37f877119f" providerId="AD" clId="Web-{37180445-8C36-3D61-B421-DE7B4B97BDB9}" dt="2025-03-19T03:19:09.496" v="127" actId="20577"/>
-          <ac:spMkLst>
+        <pc:picChg chg="mod">
+          <ac:chgData name="Mohammed Fasha" userId="cc64f42d-a1a6-4f08-b97b-0c37f877119f" providerId="ADAL" clId="{52B7A16F-CAD0-4D4D-9F9C-A24C8678CAD7}" dt="2025-03-23T08:04:37.151" v="351" actId="1076"/>
+          <ac:picMkLst>
             <pc:docMk/>
-            <pc:sldMk cId="0" sldId="280"/>
-            <ac:spMk id="6" creationId="{CC4C1BC0-7E6B-75C8-0965-79DE721E7639}"/>
-          </ac:spMkLst>
-        </pc:spChg>
+            <pc:sldMk cId="0" sldId="272"/>
+            <ac:picMk id="3" creationId="{00000000-0000-0000-0000-000000000000}"/>
+          </ac:picMkLst>
+        </pc:picChg>
       </pc:sldChg>
-      <pc:sldChg chg="addSp modSp">
-        <pc:chgData name="Mohammed Fasha" userId="S::mohammed.fasha@uop.edu.jo::cc64f42d-a1a6-4f08-b97b-0c37f877119f" providerId="AD" clId="Web-{37180445-8C36-3D61-B421-DE7B4B97BDB9}" dt="2025-03-19T03:21:50.361" v="182" actId="20577"/>
-        <pc:sldMkLst>
-          <pc:docMk/>
-          <pc:sldMk cId="441052949" sldId="309"/>
-        </pc:sldMkLst>
-      </pc:sldChg>
-      <pc:sldChg chg="addSp delSp modSp add del replId">
-        <pc:chgData name="Mohammed Fasha" userId="S::mohammed.fasha@uop.edu.jo::cc64f42d-a1a6-4f08-b97b-0c37f877119f" providerId="AD" clId="Web-{37180445-8C36-3D61-B421-DE7B4B97BDB9}" dt="2025-03-19T03:17:37.368" v="121"/>
-        <pc:sldMkLst>
-          <pc:docMk/>
-          <pc:sldMk cId="1021713399" sldId="312"/>
-        </pc:sldMkLst>
-      </pc:sldChg>
-      <pc:sldChg chg="addSp modSp new">
-        <pc:chgData name="Mohammed Fasha" userId="S::mohammed.fasha@uop.edu.jo::cc64f42d-a1a6-4f08-b97b-0c37f877119f" providerId="AD" clId="Web-{37180445-8C36-3D61-B421-DE7B4B97BDB9}" dt="2025-03-19T03:24:21.850" v="219" actId="20577"/>
-        <pc:sldMkLst>
-          <pc:docMk/>
-          <pc:sldMk cId="1008151712" sldId="313"/>
-        </pc:sldMkLst>
-      </pc:sldChg>
-      <pc:sldChg chg="addSp delSp modSp new">
-        <pc:chgData name="Mohammed Fasha" userId="S::mohammed.fasha@uop.edu.jo::cc64f42d-a1a6-4f08-b97b-0c37f877119f" providerId="AD" clId="Web-{37180445-8C36-3D61-B421-DE7B4B97BDB9}" dt="2025-03-19T03:31:22.739" v="283" actId="20577"/>
-        <pc:sldMkLst>
-          <pc:docMk/>
-          <pc:sldMk cId="618074235" sldId="314"/>
-        </pc:sldMkLst>
-      </pc:sldChg>
-      <pc:sldChg chg="addSp modSp new">
-        <pc:chgData name="Mohammed Fasha" userId="S::mohammed.fasha@uop.edu.jo::cc64f42d-a1a6-4f08-b97b-0c37f877119f" providerId="AD" clId="Web-{37180445-8C36-3D61-B421-DE7B4B97BDB9}" dt="2025-03-19T03:36:22.093" v="327" actId="1076"/>
-        <pc:sldMkLst>
-          <pc:docMk/>
-          <pc:sldMk cId="22495289" sldId="315"/>
-        </pc:sldMkLst>
-      </pc:sldChg>
-    </pc:docChg>
-  </pc:docChgLst>
-  <pc:docChgLst>
-    <pc:chgData name="Mohammed Fasha" userId="S::mohammed.fasha@uop.edu.jo::cc64f42d-a1a6-4f08-b97b-0c37f877119f" providerId="AD" clId="Web-{2F52505F-0676-E1F8-3A9C-C74E2F5553F9}"/>
-    <pc:docChg chg="addSld modSld">
-      <pc:chgData name="Mohammed Fasha" userId="S::mohammed.fasha@uop.edu.jo::cc64f42d-a1a6-4f08-b97b-0c37f877119f" providerId="AD" clId="Web-{2F52505F-0676-E1F8-3A9C-C74E2F5553F9}" dt="2025-03-23T06:07:25.672" v="25" actId="20577"/>
-      <pc:docMkLst>
-        <pc:docMk/>
-      </pc:docMkLst>
-      <pc:sldChg chg="modSp">
-        <pc:chgData name="Mohammed Fasha" userId="S::mohammed.fasha@uop.edu.jo::cc64f42d-a1a6-4f08-b97b-0c37f877119f" providerId="AD" clId="Web-{2F52505F-0676-E1F8-3A9C-C74E2F5553F9}" dt="2025-03-23T06:05:34.685" v="4" actId="20577"/>
+      <pc:sldChg chg="addSp delSp modSp mod">
+        <pc:chgData name="Mohammed Fasha" userId="cc64f42d-a1a6-4f08-b97b-0c37f877119f" providerId="ADAL" clId="{52B7A16F-CAD0-4D4D-9F9C-A24C8678CAD7}" dt="2025-03-23T07:57:49.782" v="247" actId="113"/>
         <pc:sldMkLst>
           <pc:docMk/>
           <pc:sldMk cId="1864506158" sldId="314"/>
         </pc:sldMkLst>
         <pc:spChg chg="mod">
-          <ac:chgData name="Mohammed Fasha" userId="S::mohammed.fasha@uop.edu.jo::cc64f42d-a1a6-4f08-b97b-0c37f877119f" providerId="AD" clId="Web-{2F52505F-0676-E1F8-3A9C-C74E2F5553F9}" dt="2025-03-23T06:05:34.685" v="4" actId="20577"/>
+          <ac:chgData name="Mohammed Fasha" userId="cc64f42d-a1a6-4f08-b97b-0c37f877119f" providerId="ADAL" clId="{52B7A16F-CAD0-4D4D-9F9C-A24C8678CAD7}" dt="2025-03-23T07:45:37.830" v="55" actId="27636"/>
+          <ac:spMkLst>
+            <pc:docMk/>
+            <pc:sldMk cId="1864506158" sldId="314"/>
+            <ac:spMk id="2" creationId="{2531B878-DED6-1381-4B52-F683EA36A7F3}"/>
+          </ac:spMkLst>
+        </pc:spChg>
+        <pc:spChg chg="mod">
+          <ac:chgData name="Mohammed Fasha" userId="cc64f42d-a1a6-4f08-b97b-0c37f877119f" providerId="ADAL" clId="{52B7A16F-CAD0-4D4D-9F9C-A24C8678CAD7}" dt="2025-03-23T07:57:49.782" v="247" actId="113"/>
           <ac:spMkLst>
             <pc:docMk/>
             <pc:sldMk cId="1864506158" sldId="314"/>
             <ac:spMk id="3" creationId="{4961BB54-A79B-91B6-2B3E-888FA20CC61F}"/>
           </ac:spMkLst>
         </pc:spChg>
+        <pc:picChg chg="add del mod">
+          <ac:chgData name="Mohammed Fasha" userId="cc64f42d-a1a6-4f08-b97b-0c37f877119f" providerId="ADAL" clId="{52B7A16F-CAD0-4D4D-9F9C-A24C8678CAD7}" dt="2025-03-23T07:49:26.220" v="103" actId="21"/>
+          <ac:picMkLst>
+            <pc:docMk/>
+            <pc:sldMk cId="1864506158" sldId="314"/>
+            <ac:picMk id="4" creationId="{80666BF4-16FB-5F6D-681D-CB4B25AF4A97}"/>
+          </ac:picMkLst>
+        </pc:picChg>
+        <pc:picChg chg="add del mod">
+          <ac:chgData name="Mohammed Fasha" userId="cc64f42d-a1a6-4f08-b97b-0c37f877119f" providerId="ADAL" clId="{52B7A16F-CAD0-4D4D-9F9C-A24C8678CAD7}" dt="2025-03-23T07:49:16.023" v="100" actId="478"/>
+          <ac:picMkLst>
+            <pc:docMk/>
+            <pc:sldMk cId="1864506158" sldId="314"/>
+            <ac:picMk id="1026" creationId="{E295CD06-983D-2746-D9ED-5EC2CEF7FD9D}"/>
+          </ac:picMkLst>
+        </pc:picChg>
+        <pc:picChg chg="add mod">
+          <ac:chgData name="Mohammed Fasha" userId="cc64f42d-a1a6-4f08-b97b-0c37f877119f" providerId="ADAL" clId="{52B7A16F-CAD0-4D4D-9F9C-A24C8678CAD7}" dt="2025-03-23T07:50:06.277" v="132" actId="1038"/>
+          <ac:picMkLst>
+            <pc:docMk/>
+            <pc:sldMk cId="1864506158" sldId="314"/>
+            <ac:picMk id="1028" creationId="{A134BD84-5CDB-1185-7A50-8919C0EADE6C}"/>
+          </ac:picMkLst>
+        </pc:picChg>
       </pc:sldChg>
-      <pc:sldChg chg="modSp new">
-        <pc:chgData name="Mohammed Fasha" userId="S::mohammed.fasha@uop.edu.jo::cc64f42d-a1a6-4f08-b97b-0c37f877119f" providerId="AD" clId="Web-{2F52505F-0676-E1F8-3A9C-C74E2F5553F9}" dt="2025-03-23T06:06:23.139" v="13" actId="20577"/>
+      <pc:sldChg chg="del">
+        <pc:chgData name="Mohammed Fasha" userId="cc64f42d-a1a6-4f08-b97b-0c37f877119f" providerId="ADAL" clId="{52B7A16F-CAD0-4D4D-9F9C-A24C8678CAD7}" dt="2025-03-23T07:50:32.125" v="135" actId="2696"/>
+        <pc:sldMkLst>
+          <pc:docMk/>
+          <pc:sldMk cId="2845841377" sldId="315"/>
+        </pc:sldMkLst>
+      </pc:sldChg>
+      <pc:sldChg chg="addSp delSp modSp mod">
+        <pc:chgData name="Mohammed Fasha" userId="cc64f42d-a1a6-4f08-b97b-0c37f877119f" providerId="ADAL" clId="{52B7A16F-CAD0-4D4D-9F9C-A24C8678CAD7}" dt="2025-03-23T08:12:51.858" v="440" actId="167"/>
         <pc:sldMkLst>
           <pc:docMk/>
           <pc:sldMk cId="3694445782" sldId="326"/>
         </pc:sldMkLst>
         <pc:spChg chg="mod">
-          <ac:chgData name="Mohammed Fasha" userId="S::mohammed.fasha@uop.edu.jo::cc64f42d-a1a6-4f08-b97b-0c37f877119f" providerId="AD" clId="Web-{2F52505F-0676-E1F8-3A9C-C74E2F5553F9}" dt="2025-03-23T06:05:53.435" v="10" actId="20577"/>
+          <ac:chgData name="Mohammed Fasha" userId="cc64f42d-a1a6-4f08-b97b-0c37f877119f" providerId="ADAL" clId="{52B7A16F-CAD0-4D4D-9F9C-A24C8678CAD7}" dt="2025-03-23T08:09:51.129" v="376" actId="27636"/>
           <ac:spMkLst>
             <pc:docMk/>
             <pc:sldMk cId="3694445782" sldId="326"/>
             <ac:spMk id="2" creationId="{76E77D81-B038-7FB5-2B90-061A90EBF23E}"/>
           </ac:spMkLst>
         </pc:spChg>
-        <pc:spChg chg="mod">
-          <ac:chgData name="Mohammed Fasha" userId="S::mohammed.fasha@uop.edu.jo::cc64f42d-a1a6-4f08-b97b-0c37f877119f" providerId="AD" clId="Web-{2F52505F-0676-E1F8-3A9C-C74E2F5553F9}" dt="2025-03-23T06:06:23.139" v="13" actId="20577"/>
+        <pc:spChg chg="add del mod">
+          <ac:chgData name="Mohammed Fasha" userId="cc64f42d-a1a6-4f08-b97b-0c37f877119f" providerId="ADAL" clId="{52B7A16F-CAD0-4D4D-9F9C-A24C8678CAD7}" dt="2025-03-23T08:12:39.989" v="435" actId="478"/>
           <ac:spMkLst>
             <pc:docMk/>
             <pc:sldMk cId="3694445782" sldId="326"/>
             <ac:spMk id="3" creationId="{A83CAC7D-42B8-C614-E399-7F41DD29BBE0}"/>
           </ac:spMkLst>
         </pc:spChg>
+        <pc:spChg chg="add mod">
+          <ac:chgData name="Mohammed Fasha" userId="cc64f42d-a1a6-4f08-b97b-0c37f877119f" providerId="ADAL" clId="{52B7A16F-CAD0-4D4D-9F9C-A24C8678CAD7}" dt="2025-03-23T08:12:38.465" v="433" actId="478"/>
+          <ac:spMkLst>
+            <pc:docMk/>
+            <pc:sldMk cId="3694445782" sldId="326"/>
+            <ac:spMk id="4" creationId="{497167A0-EE78-4968-6D82-0A145C061EA6}"/>
+          </ac:spMkLst>
+        </pc:spChg>
+        <pc:picChg chg="add del">
+          <ac:chgData name="Mohammed Fasha" userId="cc64f42d-a1a6-4f08-b97b-0c37f877119f" providerId="ADAL" clId="{52B7A16F-CAD0-4D4D-9F9C-A24C8678CAD7}" dt="2025-03-23T08:12:43.175" v="436" actId="478"/>
+          <ac:picMkLst>
+            <pc:docMk/>
+            <pc:sldMk cId="3694445782" sldId="326"/>
+            <ac:picMk id="6146" creationId="{4A9D4C98-141F-2BF1-7D48-B551199D39AF}"/>
+          </ac:picMkLst>
+        </pc:picChg>
+        <pc:picChg chg="add">
+          <ac:chgData name="Mohammed Fasha" userId="cc64f42d-a1a6-4f08-b97b-0c37f877119f" providerId="ADAL" clId="{52B7A16F-CAD0-4D4D-9F9C-A24C8678CAD7}" dt="2025-03-23T08:12:39.090" v="434"/>
+          <ac:picMkLst>
+            <pc:docMk/>
+            <pc:sldMk cId="3694445782" sldId="326"/>
+            <ac:picMk id="6148" creationId="{C8F621CB-8F86-187B-662F-33DBFF5F97F6}"/>
+          </ac:picMkLst>
+        </pc:picChg>
+        <pc:picChg chg="add mod">
+          <ac:chgData name="Mohammed Fasha" userId="cc64f42d-a1a6-4f08-b97b-0c37f877119f" providerId="ADAL" clId="{52B7A16F-CAD0-4D4D-9F9C-A24C8678CAD7}" dt="2025-03-23T08:12:51.858" v="440" actId="167"/>
+          <ac:picMkLst>
+            <pc:docMk/>
+            <pc:sldMk cId="3694445782" sldId="326"/>
+            <ac:picMk id="6150" creationId="{DA80B1E5-2888-D735-7520-A47852F7ED1C}"/>
+          </ac:picMkLst>
+        </pc:picChg>
       </pc:sldChg>
-      <pc:sldChg chg="modSp new">
-        <pc:chgData name="Mohammed Fasha" userId="S::mohammed.fasha@uop.edu.jo::cc64f42d-a1a6-4f08-b97b-0c37f877119f" providerId="AD" clId="Web-{2F52505F-0676-E1F8-3A9C-C74E2F5553F9}" dt="2025-03-23T06:06:39.452" v="17" actId="20577"/>
+      <pc:sldChg chg="addSp delSp modSp mod">
+        <pc:chgData name="Mohammed Fasha" userId="cc64f42d-a1a6-4f08-b97b-0c37f877119f" providerId="ADAL" clId="{52B7A16F-CAD0-4D4D-9F9C-A24C8678CAD7}" dt="2025-03-23T07:57:59.284" v="248" actId="113"/>
         <pc:sldMkLst>
           <pc:docMk/>
           <pc:sldMk cId="659685489" sldId="327"/>
         </pc:sldMkLst>
         <pc:spChg chg="mod">
-          <ac:chgData name="Mohammed Fasha" userId="S::mohammed.fasha@uop.edu.jo::cc64f42d-a1a6-4f08-b97b-0c37f877119f" providerId="AD" clId="Web-{2F52505F-0676-E1F8-3A9C-C74E2F5553F9}" dt="2025-03-23T06:06:39.452" v="17" actId="20577"/>
+          <ac:chgData name="Mohammed Fasha" userId="cc64f42d-a1a6-4f08-b97b-0c37f877119f" providerId="ADAL" clId="{52B7A16F-CAD0-4D4D-9F9C-A24C8678CAD7}" dt="2025-03-23T07:45:22.308" v="49" actId="27636"/>
+          <ac:spMkLst>
+            <pc:docMk/>
+            <pc:sldMk cId="659685489" sldId="327"/>
+            <ac:spMk id="2" creationId="{AB3B982C-02E6-3ED4-9C3C-19BC09ADBB3B}"/>
+          </ac:spMkLst>
+        </pc:spChg>
+        <pc:spChg chg="mod">
+          <ac:chgData name="Mohammed Fasha" userId="cc64f42d-a1a6-4f08-b97b-0c37f877119f" providerId="ADAL" clId="{52B7A16F-CAD0-4D4D-9F9C-A24C8678CAD7}" dt="2025-03-23T07:57:59.284" v="248" actId="113"/>
           <ac:spMkLst>
             <pc:docMk/>
             <pc:sldMk cId="659685489" sldId="327"/>
             <ac:spMk id="3" creationId="{2370F989-F40F-8A0B-AC42-50D0E7E07AEB}"/>
           </ac:spMkLst>
         </pc:spChg>
+        <pc:picChg chg="add del mod">
+          <ac:chgData name="Mohammed Fasha" userId="cc64f42d-a1a6-4f08-b97b-0c37f877119f" providerId="ADAL" clId="{52B7A16F-CAD0-4D4D-9F9C-A24C8678CAD7}" dt="2025-03-23T07:51:39.530" v="168" actId="478"/>
+          <ac:picMkLst>
+            <pc:docMk/>
+            <pc:sldMk cId="659685489" sldId="327"/>
+            <ac:picMk id="2050" creationId="{70C29FCD-9FF4-7D1E-4036-B4E46065BE85}"/>
+          </ac:picMkLst>
+        </pc:picChg>
+        <pc:picChg chg="add mod">
+          <ac:chgData name="Mohammed Fasha" userId="cc64f42d-a1a6-4f08-b97b-0c37f877119f" providerId="ADAL" clId="{52B7A16F-CAD0-4D4D-9F9C-A24C8678CAD7}" dt="2025-03-23T07:51:53.982" v="181" actId="1036"/>
+          <ac:picMkLst>
+            <pc:docMk/>
+            <pc:sldMk cId="659685489" sldId="327"/>
+            <ac:picMk id="2052" creationId="{69FD89B0-8C2D-9A2A-4508-AE34F8749789}"/>
+          </ac:picMkLst>
+        </pc:picChg>
       </pc:sldChg>
-      <pc:sldChg chg="modSp new">
-        <pc:chgData name="Mohammed Fasha" userId="S::mohammed.fasha@uop.edu.jo::cc64f42d-a1a6-4f08-b97b-0c37f877119f" providerId="AD" clId="Web-{2F52505F-0676-E1F8-3A9C-C74E2F5553F9}" dt="2025-03-23T06:07:22.532" v="22" actId="20577"/>
+      <pc:sldChg chg="modSp add">
+        <pc:chgData name="Mohammed Fasha" userId="cc64f42d-a1a6-4f08-b97b-0c37f877119f" providerId="ADAL" clId="{52B7A16F-CAD0-4D4D-9F9C-A24C8678CAD7}" dt="2025-03-23T08:06:38.777" v="363" actId="1035"/>
+        <pc:sldMkLst>
+          <pc:docMk/>
+          <pc:sldMk cId="932796301" sldId="328"/>
+        </pc:sldMkLst>
+        <pc:picChg chg="mod">
+          <ac:chgData name="Mohammed Fasha" userId="cc64f42d-a1a6-4f08-b97b-0c37f877119f" providerId="ADAL" clId="{52B7A16F-CAD0-4D4D-9F9C-A24C8678CAD7}" dt="2025-03-23T08:06:38.777" v="363" actId="1035"/>
+          <ac:picMkLst>
+            <pc:docMk/>
+            <pc:sldMk cId="932796301" sldId="328"/>
+            <ac:picMk id="4098" creationId="{0CAA22BE-1351-B1A5-188C-DD41EC29B52D}"/>
+          </ac:picMkLst>
+        </pc:picChg>
+      </pc:sldChg>
+      <pc:sldChg chg="addSp modSp del mod">
+        <pc:chgData name="Mohammed Fasha" userId="cc64f42d-a1a6-4f08-b97b-0c37f877119f" providerId="ADAL" clId="{52B7A16F-CAD0-4D4D-9F9C-A24C8678CAD7}" dt="2025-03-23T08:06:20.763" v="361" actId="2696"/>
         <pc:sldMkLst>
           <pc:docMk/>
           <pc:sldMk cId="4072578661" sldId="328"/>
         </pc:sldMkLst>
         <pc:spChg chg="mod">
-          <ac:chgData name="Mohammed Fasha" userId="S::mohammed.fasha@uop.edu.jo::cc64f42d-a1a6-4f08-b97b-0c37f877119f" providerId="AD" clId="Web-{2F52505F-0676-E1F8-3A9C-C74E2F5553F9}" dt="2025-03-23T06:07:22.532" v="22" actId="20577"/>
+          <ac:chgData name="Mohammed Fasha" userId="cc64f42d-a1a6-4f08-b97b-0c37f877119f" providerId="ADAL" clId="{52B7A16F-CAD0-4D4D-9F9C-A24C8678CAD7}" dt="2025-03-23T07:59:04.676" v="264" actId="20577"/>
+          <ac:spMkLst>
+            <pc:docMk/>
+            <pc:sldMk cId="4072578661" sldId="328"/>
+            <ac:spMk id="2" creationId="{3AF05E53-A460-BAD5-18F0-BA9643DE6707}"/>
+          </ac:spMkLst>
+        </pc:spChg>
+        <pc:spChg chg="mod">
+          <ac:chgData name="Mohammed Fasha" userId="cc64f42d-a1a6-4f08-b97b-0c37f877119f" providerId="ADAL" clId="{52B7A16F-CAD0-4D4D-9F9C-A24C8678CAD7}" dt="2025-03-23T08:06:00.921" v="360" actId="113"/>
           <ac:spMkLst>
             <pc:docMk/>
             <pc:sldMk cId="4072578661" sldId="328"/>
             <ac:spMk id="3" creationId="{3C3E019B-0F20-8E05-2053-6E145189E1FD}"/>
           </ac:spMkLst>
         </pc:spChg>
+        <pc:picChg chg="add mod">
+          <ac:chgData name="Mohammed Fasha" userId="cc64f42d-a1a6-4f08-b97b-0c37f877119f" providerId="ADAL" clId="{52B7A16F-CAD0-4D4D-9F9C-A24C8678CAD7}" dt="2025-03-23T08:04:28.286" v="350" actId="1035"/>
+          <ac:picMkLst>
+            <pc:docMk/>
+            <pc:sldMk cId="4072578661" sldId="328"/>
+            <ac:picMk id="4098" creationId="{0CAA22BE-1351-B1A5-188C-DD41EC29B52D}"/>
+          </ac:picMkLst>
+        </pc:picChg>
       </pc:sldChg>
-      <pc:sldChg chg="modSp new">
-        <pc:chgData name="Mohammed Fasha" userId="S::mohammed.fasha@uop.edu.jo::cc64f42d-a1a6-4f08-b97b-0c37f877119f" providerId="AD" clId="Web-{2F52505F-0676-E1F8-3A9C-C74E2F5553F9}" dt="2025-03-23T06:07:25.672" v="25" actId="20577"/>
+      <pc:sldChg chg="addSp modSp mod">
+        <pc:chgData name="Mohammed Fasha" userId="cc64f42d-a1a6-4f08-b97b-0c37f877119f" providerId="ADAL" clId="{52B7A16F-CAD0-4D4D-9F9C-A24C8678CAD7}" dt="2025-03-23T08:05:29.878" v="358" actId="14100"/>
         <pc:sldMkLst>
           <pc:docMk/>
           <pc:sldMk cId="3366111495" sldId="329"/>
         </pc:sldMkLst>
         <pc:spChg chg="mod">
-          <ac:chgData name="Mohammed Fasha" userId="S::mohammed.fasha@uop.edu.jo::cc64f42d-a1a6-4f08-b97b-0c37f877119f" providerId="AD" clId="Web-{2F52505F-0676-E1F8-3A9C-C74E2F5553F9}" dt="2025-03-23T06:07:25.672" v="25" actId="20577"/>
+          <ac:chgData name="Mohammed Fasha" userId="cc64f42d-a1a6-4f08-b97b-0c37f877119f" providerId="ADAL" clId="{52B7A16F-CAD0-4D4D-9F9C-A24C8678CAD7}" dt="2025-03-23T07:56:54.852" v="238" actId="27636"/>
+          <ac:spMkLst>
+            <pc:docMk/>
+            <pc:sldMk cId="3366111495" sldId="329"/>
+            <ac:spMk id="2" creationId="{A1718324-DE08-4740-D0D9-7603BC5E0162}"/>
+          </ac:spMkLst>
+        </pc:spChg>
+        <pc:spChg chg="mod">
+          <ac:chgData name="Mohammed Fasha" userId="cc64f42d-a1a6-4f08-b97b-0c37f877119f" providerId="ADAL" clId="{52B7A16F-CAD0-4D4D-9F9C-A24C8678CAD7}" dt="2025-03-23T08:04:51.241" v="354" actId="20577"/>
           <ac:spMkLst>
             <pc:docMk/>
             <pc:sldMk cId="3366111495" sldId="329"/>
             <ac:spMk id="3" creationId="{9D118BE8-48E4-84B1-F7A3-AE58B873B879}"/>
           </ac:spMkLst>
         </pc:spChg>
-      </pc:sldChg>
-    </pc:docChg>
-  </pc:docChgLst>
-  <pc:docChgLst>
-    <pc:chgData name="Mohammed Fasha" userId="cc64f42d-a1a6-4f08-b97b-0c37f877119f" providerId="ADAL" clId="{33A44248-7984-4750-8CBD-503C66D5F8B6}"/>
-    <pc:docChg chg="custSel addSld modSld">
-      <pc:chgData name="Mohammed Fasha" userId="cc64f42d-a1a6-4f08-b97b-0c37f877119f" providerId="ADAL" clId="{33A44248-7984-4750-8CBD-503C66D5F8B6}" dt="2025-03-05T09:13:55.803" v="21" actId="1076"/>
-      <pc:docMkLst>
-        <pc:docMk/>
-      </pc:docMkLst>
-      <pc:sldChg chg="addSp delSp modSp add">
-        <pc:chgData name="Mohammed Fasha" userId="cc64f42d-a1a6-4f08-b97b-0c37f877119f" providerId="ADAL" clId="{33A44248-7984-4750-8CBD-503C66D5F8B6}" dt="2025-03-05T09:13:55.803" v="21" actId="1076"/>
-        <pc:sldMkLst>
-          <pc:docMk/>
-          <pc:sldMk cId="2982934387" sldId="520"/>
-        </pc:sldMkLst>
-      </pc:sldChg>
-    </pc:docChg>
-  </pc:docChgLst>
-  <pc:docChgLst>
-    <pc:chgData name="Mohammed Fasha" userId="S::mohammed.fasha@uop.edu.jo::cc64f42d-a1a6-4f08-b97b-0c37f877119f" providerId="AD" clId="Web-{048CEBFD-D6A1-FF4F-145A-C5347D00F6D8}"/>
-    <pc:docChg chg="addSld delSld modSld">
-      <pc:chgData name="Mohammed Fasha" userId="S::mohammed.fasha@uop.edu.jo::cc64f42d-a1a6-4f08-b97b-0c37f877119f" providerId="AD" clId="Web-{048CEBFD-D6A1-FF4F-145A-C5347D00F6D8}" dt="2025-03-23T06:04:22.577" v="1166" actId="20577"/>
-      <pc:docMkLst>
-        <pc:docMk/>
-      </pc:docMkLst>
-      <pc:sldChg chg="modSp">
-        <pc:chgData name="Mohammed Fasha" userId="S::mohammed.fasha@uop.edu.jo::cc64f42d-a1a6-4f08-b97b-0c37f877119f" providerId="AD" clId="Web-{048CEBFD-D6A1-FF4F-145A-C5347D00F6D8}" dt="2025-03-23T04:07:54.621" v="655" actId="20577"/>
-        <pc:sldMkLst>
-          <pc:docMk/>
-          <pc:sldMk cId="0" sldId="272"/>
-        </pc:sldMkLst>
-        <pc:spChg chg="mod">
-          <ac:chgData name="Mohammed Fasha" userId="S::mohammed.fasha@uop.edu.jo::cc64f42d-a1a6-4f08-b97b-0c37f877119f" providerId="AD" clId="Web-{048CEBFD-D6A1-FF4F-145A-C5347D00F6D8}" dt="2025-03-23T04:07:54.621" v="655" actId="20577"/>
-          <ac:spMkLst>
-            <pc:docMk/>
-            <pc:sldMk cId="0" sldId="272"/>
-            <ac:spMk id="7" creationId="{BD008676-47C8-D88A-CD4A-65BB83D57162}"/>
-          </ac:spMkLst>
-        </pc:spChg>
-      </pc:sldChg>
-      <pc:sldChg chg="del">
-        <pc:chgData name="Mohammed Fasha" userId="S::mohammed.fasha@uop.edu.jo::cc64f42d-a1a6-4f08-b97b-0c37f877119f" providerId="AD" clId="Web-{048CEBFD-D6A1-FF4F-145A-C5347D00F6D8}" dt="2025-03-23T03:16:25.599" v="434"/>
-        <pc:sldMkLst>
-          <pc:docMk/>
-          <pc:sldMk cId="441052949" sldId="309"/>
-        </pc:sldMkLst>
-      </pc:sldChg>
-      <pc:sldChg chg="del">
-        <pc:chgData name="Mohammed Fasha" userId="S::mohammed.fasha@uop.edu.jo::cc64f42d-a1a6-4f08-b97b-0c37f877119f" providerId="AD" clId="Web-{048CEBFD-D6A1-FF4F-145A-C5347D00F6D8}" dt="2025-03-23T03:16:27.646" v="435"/>
-        <pc:sldMkLst>
-          <pc:docMk/>
-          <pc:sldMk cId="4115587381" sldId="311"/>
-        </pc:sldMkLst>
-      </pc:sldChg>
-      <pc:sldChg chg="del">
-        <pc:chgData name="Mohammed Fasha" userId="S::mohammed.fasha@uop.edu.jo::cc64f42d-a1a6-4f08-b97b-0c37f877119f" providerId="AD" clId="Web-{048CEBFD-D6A1-FF4F-145A-C5347D00F6D8}" dt="2025-03-23T03:16:34.240" v="436"/>
-        <pc:sldMkLst>
-          <pc:docMk/>
-          <pc:sldMk cId="1008151712" sldId="313"/>
-        </pc:sldMkLst>
-      </pc:sldChg>
-      <pc:sldChg chg="modSp">
-        <pc:chgData name="Mohammed Fasha" userId="S::mohammed.fasha@uop.edu.jo::cc64f42d-a1a6-4f08-b97b-0c37f877119f" providerId="AD" clId="Web-{048CEBFD-D6A1-FF4F-145A-C5347D00F6D8}" dt="2025-03-23T06:04:22.577" v="1166" actId="20577"/>
-        <pc:sldMkLst>
-          <pc:docMk/>
-          <pc:sldMk cId="1864506158" sldId="314"/>
-        </pc:sldMkLst>
-        <pc:spChg chg="mod">
-          <ac:chgData name="Mohammed Fasha" userId="S::mohammed.fasha@uop.edu.jo::cc64f42d-a1a6-4f08-b97b-0c37f877119f" providerId="AD" clId="Web-{048CEBFD-D6A1-FF4F-145A-C5347D00F6D8}" dt="2025-03-23T06:04:22.577" v="1166" actId="20577"/>
-          <ac:spMkLst>
-            <pc:docMk/>
-            <pc:sldMk cId="1864506158" sldId="314"/>
-            <ac:spMk id="3" creationId="{4961BB54-A79B-91B6-2B3E-888FA20CC61F}"/>
-          </ac:spMkLst>
-        </pc:spChg>
-      </pc:sldChg>
-      <pc:sldChg chg="modSp">
-        <pc:chgData name="Mohammed Fasha" userId="S::mohammed.fasha@uop.edu.jo::cc64f42d-a1a6-4f08-b97b-0c37f877119f" providerId="AD" clId="Web-{048CEBFD-D6A1-FF4F-145A-C5347D00F6D8}" dt="2025-03-23T03:13:33.830" v="401" actId="20577"/>
-        <pc:sldMkLst>
-          <pc:docMk/>
-          <pc:sldMk cId="2845841377" sldId="315"/>
-        </pc:sldMkLst>
-        <pc:spChg chg="mod">
-          <ac:chgData name="Mohammed Fasha" userId="S::mohammed.fasha@uop.edu.jo::cc64f42d-a1a6-4f08-b97b-0c37f877119f" providerId="AD" clId="Web-{048CEBFD-D6A1-FF4F-145A-C5347D00F6D8}" dt="2025-03-23T03:13:33.830" v="401" actId="20577"/>
-          <ac:spMkLst>
-            <pc:docMk/>
-            <pc:sldMk cId="2845841377" sldId="315"/>
-            <ac:spMk id="3" creationId="{FFE21ADB-E900-3A47-B3AD-FE93A73B6920}"/>
-          </ac:spMkLst>
-        </pc:spChg>
-      </pc:sldChg>
-      <pc:sldChg chg="del">
-        <pc:chgData name="Mohammed Fasha" userId="S::mohammed.fasha@uop.edu.jo::cc64f42d-a1a6-4f08-b97b-0c37f877119f" providerId="AD" clId="Web-{048CEBFD-D6A1-FF4F-145A-C5347D00F6D8}" dt="2025-03-23T02:57:56.519" v="0"/>
-        <pc:sldMkLst>
-          <pc:docMk/>
-          <pc:sldMk cId="4201170802" sldId="316"/>
-        </pc:sldMkLst>
-      </pc:sldChg>
-      <pc:sldChg chg="del">
-        <pc:chgData name="Mohammed Fasha" userId="S::mohammed.fasha@uop.edu.jo::cc64f42d-a1a6-4f08-b97b-0c37f877119f" providerId="AD" clId="Web-{048CEBFD-D6A1-FF4F-145A-C5347D00F6D8}" dt="2025-03-23T03:16:16.630" v="433"/>
-        <pc:sldMkLst>
-          <pc:docMk/>
-          <pc:sldMk cId="3352190066" sldId="317"/>
-        </pc:sldMkLst>
-      </pc:sldChg>
-      <pc:sldChg chg="modSp new del">
-        <pc:chgData name="Mohammed Fasha" userId="S::mohammed.fasha@uop.edu.jo::cc64f42d-a1a6-4f08-b97b-0c37f877119f" providerId="AD" clId="Web-{048CEBFD-D6A1-FF4F-145A-C5347D00F6D8}" dt="2025-03-23T03:10:23.882" v="393"/>
-        <pc:sldMkLst>
-          <pc:docMk/>
-          <pc:sldMk cId="4008238018" sldId="318"/>
-        </pc:sldMkLst>
-        <pc:spChg chg="mod">
-          <ac:chgData name="Mohammed Fasha" userId="S::mohammed.fasha@uop.edu.jo::cc64f42d-a1a6-4f08-b97b-0c37f877119f" providerId="AD" clId="Web-{048CEBFD-D6A1-FF4F-145A-C5347D00F6D8}" dt="2025-03-23T02:59:07.833" v="41" actId="20577"/>
-          <ac:spMkLst>
-            <pc:docMk/>
-            <pc:sldMk cId="4008238018" sldId="318"/>
-            <ac:spMk id="2" creationId="{D3C7D4FA-5F70-B500-9517-CC645EBDA78B}"/>
-          </ac:spMkLst>
-        </pc:spChg>
-        <pc:spChg chg="mod">
-          <ac:chgData name="Mohammed Fasha" userId="S::mohammed.fasha@uop.edu.jo::cc64f42d-a1a6-4f08-b97b-0c37f877119f" providerId="AD" clId="Web-{048CEBFD-D6A1-FF4F-145A-C5347D00F6D8}" dt="2025-03-23T02:58:49.098" v="10" actId="20577"/>
-          <ac:spMkLst>
-            <pc:docMk/>
-            <pc:sldMk cId="4008238018" sldId="318"/>
-            <ac:spMk id="3" creationId="{1FA43FC1-28CF-9D48-79EA-ADC996ACCB93}"/>
-          </ac:spMkLst>
-        </pc:spChg>
-      </pc:sldChg>
-      <pc:sldChg chg="addSp delSp modSp new del">
-        <pc:chgData name="Mohammed Fasha" userId="S::mohammed.fasha@uop.edu.jo::cc64f42d-a1a6-4f08-b97b-0c37f877119f" providerId="AD" clId="Web-{048CEBFD-D6A1-FF4F-145A-C5347D00F6D8}" dt="2025-03-23T04:04:13.661" v="626"/>
-        <pc:sldMkLst>
-          <pc:docMk/>
-          <pc:sldMk cId="3382703493" sldId="319"/>
-        </pc:sldMkLst>
-        <pc:spChg chg="mod">
-          <ac:chgData name="Mohammed Fasha" userId="S::mohammed.fasha@uop.edu.jo::cc64f42d-a1a6-4f08-b97b-0c37f877119f" providerId="AD" clId="Web-{048CEBFD-D6A1-FF4F-145A-C5347D00F6D8}" dt="2025-03-23T03:15:59.411" v="430" actId="14100"/>
-          <ac:spMkLst>
-            <pc:docMk/>
-            <pc:sldMk cId="3382703493" sldId="319"/>
-            <ac:spMk id="2" creationId="{F1D673AF-4F04-DB12-0F9A-6102FE3ABB44}"/>
-          </ac:spMkLst>
-        </pc:spChg>
-        <pc:spChg chg="mod">
-          <ac:chgData name="Mohammed Fasha" userId="S::mohammed.fasha@uop.edu.jo::cc64f42d-a1a6-4f08-b97b-0c37f877119f" providerId="AD" clId="Web-{048CEBFD-D6A1-FF4F-145A-C5347D00F6D8}" dt="2025-03-23T03:15:36.473" v="423" actId="14100"/>
-          <ac:spMkLst>
-            <pc:docMk/>
-            <pc:sldMk cId="3382703493" sldId="319"/>
-            <ac:spMk id="3" creationId="{A573E5E7-FA1F-82A1-2553-7E408E40D30E}"/>
-          </ac:spMkLst>
-        </pc:spChg>
-        <pc:spChg chg="add mod">
-          <ac:chgData name="Mohammed Fasha" userId="S::mohammed.fasha@uop.edu.jo::cc64f42d-a1a6-4f08-b97b-0c37f877119f" providerId="AD" clId="Web-{048CEBFD-D6A1-FF4F-145A-C5347D00F6D8}" dt="2025-03-23T03:15:45.926" v="425" actId="14100"/>
-          <ac:spMkLst>
-            <pc:docMk/>
-            <pc:sldMk cId="3382703493" sldId="319"/>
-            <ac:spMk id="4" creationId="{4FDB67D6-61D4-ABF8-861E-FC65D126A53D}"/>
-          </ac:spMkLst>
-        </pc:spChg>
-        <pc:graphicFrameChg chg="add mod modGraphic">
-          <ac:chgData name="Mohammed Fasha" userId="S::mohammed.fasha@uop.edu.jo::cc64f42d-a1a6-4f08-b97b-0c37f877119f" providerId="AD" clId="Web-{048CEBFD-D6A1-FF4F-145A-C5347D00F6D8}" dt="2025-03-23T03:16:11.817" v="432" actId="1076"/>
-          <ac:graphicFrameMkLst>
-            <pc:docMk/>
-            <pc:sldMk cId="3382703493" sldId="319"/>
-            <ac:graphicFrameMk id="6" creationId="{89A96ED2-14FC-3A8F-A82A-2677B3E06006}"/>
-          </ac:graphicFrameMkLst>
-        </pc:graphicFrameChg>
-        <pc:picChg chg="add del mod">
-          <ac:chgData name="Mohammed Fasha" userId="S::mohammed.fasha@uop.edu.jo::cc64f42d-a1a6-4f08-b97b-0c37f877119f" providerId="AD" clId="Web-{048CEBFD-D6A1-FF4F-145A-C5347D00F6D8}" dt="2025-03-23T04:00:49.057" v="516"/>
+        <pc:picChg chg="add mod">
+          <ac:chgData name="Mohammed Fasha" userId="cc64f42d-a1a6-4f08-b97b-0c37f877119f" providerId="ADAL" clId="{52B7A16F-CAD0-4D4D-9F9C-A24C8678CAD7}" dt="2025-03-23T08:05:29.878" v="358" actId="14100"/>
           <ac:picMkLst>
             <pc:docMk/>
-            <pc:sldMk cId="3382703493" sldId="319"/>
-            <ac:picMk id="7" creationId="{D10277A6-4FF6-D9DA-1AE1-C6C6ECA8F6A7}"/>
+            <pc:sldMk cId="3366111495" sldId="329"/>
+            <ac:picMk id="5122" creationId="{9029A929-644F-B232-0F2F-8E746CA5A374}"/>
           </ac:picMkLst>
         </pc:picChg>
-      </pc:sldChg>
-      <pc:sldChg chg="addSp delSp modSp new">
-        <pc:chgData name="Mohammed Fasha" userId="S::mohammed.fasha@uop.edu.jo::cc64f42d-a1a6-4f08-b97b-0c37f877119f" providerId="AD" clId="Web-{048CEBFD-D6A1-FF4F-145A-C5347D00F6D8}" dt="2025-03-23T03:59:21.366" v="441" actId="1076"/>
-        <pc:sldMkLst>
-          <pc:docMk/>
-          <pc:sldMk cId="414281864" sldId="320"/>
-        </pc:sldMkLst>
-        <pc:spChg chg="mod">
-          <ac:chgData name="Mohammed Fasha" userId="S::mohammed.fasha@uop.edu.jo::cc64f42d-a1a6-4f08-b97b-0c37f877119f" providerId="AD" clId="Web-{048CEBFD-D6A1-FF4F-145A-C5347D00F6D8}" dt="2025-03-23T03:59:21.366" v="441" actId="1076"/>
-          <ac:spMkLst>
-            <pc:docMk/>
-            <pc:sldMk cId="414281864" sldId="320"/>
-            <ac:spMk id="2" creationId="{825E0878-CCF5-3464-A19A-DADCC246320F}"/>
-          </ac:spMkLst>
-        </pc:spChg>
-        <pc:spChg chg="del">
-          <ac:chgData name="Mohammed Fasha" userId="S::mohammed.fasha@uop.edu.jo::cc64f42d-a1a6-4f08-b97b-0c37f877119f" providerId="AD" clId="Web-{048CEBFD-D6A1-FF4F-145A-C5347D00F6D8}" dt="2025-03-23T03:04:08.058" v="115"/>
-          <ac:spMkLst>
-            <pc:docMk/>
-            <pc:sldMk cId="414281864" sldId="320"/>
-            <ac:spMk id="3" creationId="{9386E65B-B9D2-8ABC-98FF-5F8E2A8C6674}"/>
-          </ac:spMkLst>
-        </pc:spChg>
-        <pc:picChg chg="add mod ord">
-          <ac:chgData name="Mohammed Fasha" userId="S::mohammed.fasha@uop.edu.jo::cc64f42d-a1a6-4f08-b97b-0c37f877119f" providerId="AD" clId="Web-{048CEBFD-D6A1-FF4F-145A-C5347D00F6D8}" dt="2025-03-23T03:59:15.194" v="439" actId="1076"/>
-          <ac:picMkLst>
-            <pc:docMk/>
-            <pc:sldMk cId="414281864" sldId="320"/>
-            <ac:picMk id="4" creationId="{2B13B5C8-DB85-2B46-F1E5-328A8246D30B}"/>
-          </ac:picMkLst>
-        </pc:picChg>
-        <pc:picChg chg="add del mod">
-          <ac:chgData name="Mohammed Fasha" userId="S::mohammed.fasha@uop.edu.jo::cc64f42d-a1a6-4f08-b97b-0c37f877119f" providerId="AD" clId="Web-{048CEBFD-D6A1-FF4F-145A-C5347D00F6D8}" dt="2025-03-23T03:15:09.785" v="412"/>
-          <ac:picMkLst>
-            <pc:docMk/>
-            <pc:sldMk cId="414281864" sldId="320"/>
-            <ac:picMk id="5" creationId="{473A1119-463A-3C36-C42F-2981AC1D2670}"/>
-          </ac:picMkLst>
-        </pc:picChg>
-      </pc:sldChg>
-      <pc:sldChg chg="addSp delSp modSp new">
-        <pc:chgData name="Mohammed Fasha" userId="S::mohammed.fasha@uop.edu.jo::cc64f42d-a1a6-4f08-b97b-0c37f877119f" providerId="AD" clId="Web-{048CEBFD-D6A1-FF4F-145A-C5347D00F6D8}" dt="2025-03-23T04:04:06.582" v="625"/>
-        <pc:sldMkLst>
-          <pc:docMk/>
-          <pc:sldMk cId="2158520731" sldId="321"/>
-        </pc:sldMkLst>
-        <pc:spChg chg="mod">
-          <ac:chgData name="Mohammed Fasha" userId="S::mohammed.fasha@uop.edu.jo::cc64f42d-a1a6-4f08-b97b-0c37f877119f" providerId="AD" clId="Web-{048CEBFD-D6A1-FF4F-145A-C5347D00F6D8}" dt="2025-03-23T03:06:45.017" v="158" actId="20577"/>
-          <ac:spMkLst>
-            <pc:docMk/>
-            <pc:sldMk cId="2158520731" sldId="321"/>
-            <ac:spMk id="2" creationId="{2CBE9B8D-9BCA-A077-FC54-F37DD1ED5A43}"/>
-          </ac:spMkLst>
-        </pc:spChg>
-        <pc:spChg chg="del">
-          <ac:chgData name="Mohammed Fasha" userId="S::mohammed.fasha@uop.edu.jo::cc64f42d-a1a6-4f08-b97b-0c37f877119f" providerId="AD" clId="Web-{048CEBFD-D6A1-FF4F-145A-C5347D00F6D8}" dt="2025-03-23T03:06:26.736" v="140"/>
-          <ac:spMkLst>
-            <pc:docMk/>
-            <pc:sldMk cId="2158520731" sldId="321"/>
-            <ac:spMk id="3" creationId="{87066CB8-BE1C-18F6-0DD8-6FF093CE164E}"/>
-          </ac:spMkLst>
-        </pc:spChg>
-        <pc:spChg chg="add del mod">
-          <ac:chgData name="Mohammed Fasha" userId="S::mohammed.fasha@uop.edu.jo::cc64f42d-a1a6-4f08-b97b-0c37f877119f" providerId="AD" clId="Web-{048CEBFD-D6A1-FF4F-145A-C5347D00F6D8}" dt="2025-03-23T04:00:55.136" v="518"/>
-          <ac:spMkLst>
-            <pc:docMk/>
-            <pc:sldMk cId="2158520731" sldId="321"/>
-            <ac:spMk id="5" creationId="{38C8DE48-D7D7-B155-28C1-8FD9812E5A8A}"/>
-          </ac:spMkLst>
-        </pc:spChg>
-        <pc:spChg chg="add mod">
-          <ac:chgData name="Mohammed Fasha" userId="S::mohammed.fasha@uop.edu.jo::cc64f42d-a1a6-4f08-b97b-0c37f877119f" providerId="AD" clId="Web-{048CEBFD-D6A1-FF4F-145A-C5347D00F6D8}" dt="2025-03-23T04:03:57.144" v="623" actId="20577"/>
-          <ac:spMkLst>
-            <pc:docMk/>
-            <pc:sldMk cId="2158520731" sldId="321"/>
-            <ac:spMk id="6" creationId="{5CB15C33-8731-2AC8-2AA9-CC56BB604532}"/>
-          </ac:spMkLst>
-        </pc:spChg>
-        <pc:spChg chg="add del mod">
-          <ac:chgData name="Mohammed Fasha" userId="S::mohammed.fasha@uop.edu.jo::cc64f42d-a1a6-4f08-b97b-0c37f877119f" providerId="AD" clId="Web-{048CEBFD-D6A1-FF4F-145A-C5347D00F6D8}" dt="2025-03-23T04:02:47.327" v="574"/>
-          <ac:spMkLst>
-            <pc:docMk/>
-            <pc:sldMk cId="2158520731" sldId="321"/>
-            <ac:spMk id="9" creationId="{6C7BA3B8-00C1-BFF1-6AF2-0FD886030DA8}"/>
-          </ac:spMkLst>
-        </pc:spChg>
-        <pc:spChg chg="add del mod">
-          <ac:chgData name="Mohammed Fasha" userId="S::mohammed.fasha@uop.edu.jo::cc64f42d-a1a6-4f08-b97b-0c37f877119f" providerId="AD" clId="Web-{048CEBFD-D6A1-FF4F-145A-C5347D00F6D8}" dt="2025-03-23T04:01:37.246" v="535"/>
-          <ac:spMkLst>
-            <pc:docMk/>
-            <pc:sldMk cId="2158520731" sldId="321"/>
-            <ac:spMk id="11" creationId="{BF3A56A3-CCAA-A37B-CBB1-E12C9356DDDE}"/>
-          </ac:spMkLst>
-        </pc:spChg>
-        <pc:graphicFrameChg chg="add mod modGraphic">
-          <ac:chgData name="Mohammed Fasha" userId="S::mohammed.fasha@uop.edu.jo::cc64f42d-a1a6-4f08-b97b-0c37f877119f" providerId="AD" clId="Web-{048CEBFD-D6A1-FF4F-145A-C5347D00F6D8}" dt="2025-03-23T04:04:06.582" v="625"/>
-          <ac:graphicFrameMkLst>
-            <pc:docMk/>
-            <pc:sldMk cId="2158520731" sldId="321"/>
-            <ac:graphicFrameMk id="13" creationId="{16C5CEE9-CAE7-15B6-CD99-242FA0B68E48}"/>
-          </ac:graphicFrameMkLst>
-        </pc:graphicFrameChg>
-        <pc:graphicFrameChg chg="add mod modGraphic">
-          <ac:chgData name="Mohammed Fasha" userId="S::mohammed.fasha@uop.edu.jo::cc64f42d-a1a6-4f08-b97b-0c37f877119f" providerId="AD" clId="Web-{048CEBFD-D6A1-FF4F-145A-C5347D00F6D8}" dt="2025-03-23T04:03:46.191" v="620" actId="1076"/>
-          <ac:graphicFrameMkLst>
-            <pc:docMk/>
-            <pc:sldMk cId="2158520731" sldId="321"/>
-            <ac:graphicFrameMk id="14" creationId="{68F65CD9-04AE-694C-CAF9-ABB6912D588B}"/>
-          </ac:graphicFrameMkLst>
-        </pc:graphicFrameChg>
-        <pc:picChg chg="add del mod ord">
-          <ac:chgData name="Mohammed Fasha" userId="S::mohammed.fasha@uop.edu.jo::cc64f42d-a1a6-4f08-b97b-0c37f877119f" providerId="AD" clId="Web-{048CEBFD-D6A1-FF4F-145A-C5347D00F6D8}" dt="2025-03-23T04:00:53.854" v="517"/>
-          <ac:picMkLst>
-            <pc:docMk/>
-            <pc:sldMk cId="2158520731" sldId="321"/>
-            <ac:picMk id="4" creationId="{C31B89CD-6369-1B1F-B3B8-0654BE6BA649}"/>
-          </ac:picMkLst>
-        </pc:picChg>
-        <pc:picChg chg="add mod ord">
-          <ac:chgData name="Mohammed Fasha" userId="S::mohammed.fasha@uop.edu.jo::cc64f42d-a1a6-4f08-b97b-0c37f877119f" providerId="AD" clId="Web-{048CEBFD-D6A1-FF4F-145A-C5347D00F6D8}" dt="2025-03-23T04:01:03.120" v="520" actId="14100"/>
-          <ac:picMkLst>
-            <pc:docMk/>
-            <pc:sldMk cId="2158520731" sldId="321"/>
-            <ac:picMk id="7" creationId="{3309D882-20A5-56F6-889C-7DC7D2DFDA86}"/>
-          </ac:picMkLst>
-        </pc:picChg>
-      </pc:sldChg>
-      <pc:sldChg chg="addSp delSp modSp new">
-        <pc:chgData name="Mohammed Fasha" userId="S::mohammed.fasha@uop.edu.jo::cc64f42d-a1a6-4f08-b97b-0c37f877119f" providerId="AD" clId="Web-{048CEBFD-D6A1-FF4F-145A-C5347D00F6D8}" dt="2025-03-23T04:10:25.939" v="692"/>
-        <pc:sldMkLst>
-          <pc:docMk/>
-          <pc:sldMk cId="3486990666" sldId="322"/>
-        </pc:sldMkLst>
-        <pc:spChg chg="mod">
-          <ac:chgData name="Mohammed Fasha" userId="S::mohammed.fasha@uop.edu.jo::cc64f42d-a1a6-4f08-b97b-0c37f877119f" providerId="AD" clId="Web-{048CEBFD-D6A1-FF4F-145A-C5347D00F6D8}" dt="2025-03-23T04:09:04.561" v="672" actId="20577"/>
-          <ac:spMkLst>
-            <pc:docMk/>
-            <pc:sldMk cId="3486990666" sldId="322"/>
-            <ac:spMk id="2" creationId="{4F569A76-4CE0-A134-527E-6110690A0204}"/>
-          </ac:spMkLst>
-        </pc:spChg>
-        <pc:spChg chg="del">
-          <ac:chgData name="Mohammed Fasha" userId="S::mohammed.fasha@uop.edu.jo::cc64f42d-a1a6-4f08-b97b-0c37f877119f" providerId="AD" clId="Web-{048CEBFD-D6A1-FF4F-145A-C5347D00F6D8}" dt="2025-03-23T04:08:51.795" v="657"/>
-          <ac:spMkLst>
-            <pc:docMk/>
-            <pc:sldMk cId="3486990666" sldId="322"/>
-            <ac:spMk id="3" creationId="{368F07BD-3847-D462-1D91-71F882F9E686}"/>
-          </ac:spMkLst>
-        </pc:spChg>
-        <pc:graphicFrameChg chg="add mod ord modGraphic">
-          <ac:chgData name="Mohammed Fasha" userId="S::mohammed.fasha@uop.edu.jo::cc64f42d-a1a6-4f08-b97b-0c37f877119f" providerId="AD" clId="Web-{048CEBFD-D6A1-FF4F-145A-C5347D00F6D8}" dt="2025-03-23T04:10:25.939" v="692"/>
-          <ac:graphicFrameMkLst>
-            <pc:docMk/>
-            <pc:sldMk cId="3486990666" sldId="322"/>
-            <ac:graphicFrameMk id="5" creationId="{1FA2E83F-BCF2-8811-D9EB-3AB7209F9B26}"/>
-          </ac:graphicFrameMkLst>
-        </pc:graphicFrameChg>
-      </pc:sldChg>
-      <pc:sldChg chg="addSp delSp modSp new">
-        <pc:chgData name="Mohammed Fasha" userId="S::mohammed.fasha@uop.edu.jo::cc64f42d-a1a6-4f08-b97b-0c37f877119f" providerId="AD" clId="Web-{048CEBFD-D6A1-FF4F-145A-C5347D00F6D8}" dt="2025-03-23T06:02:22.542" v="1162"/>
-        <pc:sldMkLst>
-          <pc:docMk/>
-          <pc:sldMk cId="323566195" sldId="323"/>
-        </pc:sldMkLst>
-        <pc:spChg chg="mod">
-          <ac:chgData name="Mohammed Fasha" userId="S::mohammed.fasha@uop.edu.jo::cc64f42d-a1a6-4f08-b97b-0c37f877119f" providerId="AD" clId="Web-{048CEBFD-D6A1-FF4F-145A-C5347D00F6D8}" dt="2025-03-23T05:55:35.003" v="727" actId="20577"/>
-          <ac:spMkLst>
-            <pc:docMk/>
-            <pc:sldMk cId="323566195" sldId="323"/>
-            <ac:spMk id="2" creationId="{595498DF-D91B-3039-6A35-B1D5FAB6D692}"/>
-          </ac:spMkLst>
-        </pc:spChg>
-        <pc:spChg chg="del">
-          <ac:chgData name="Mohammed Fasha" userId="S::mohammed.fasha@uop.edu.jo::cc64f42d-a1a6-4f08-b97b-0c37f877119f" providerId="AD" clId="Web-{048CEBFD-D6A1-FF4F-145A-C5347D00F6D8}" dt="2025-03-23T05:55:38.753" v="728"/>
-          <ac:spMkLst>
-            <pc:docMk/>
-            <pc:sldMk cId="323566195" sldId="323"/>
-            <ac:spMk id="3" creationId="{7C735B19-22D3-E2FD-E630-81FC9AD9A200}"/>
-          </ac:spMkLst>
-        </pc:spChg>
-        <pc:spChg chg="add del mod">
-          <ac:chgData name="Mohammed Fasha" userId="S::mohammed.fasha@uop.edu.jo::cc64f42d-a1a6-4f08-b97b-0c37f877119f" providerId="AD" clId="Web-{048CEBFD-D6A1-FF4F-145A-C5347D00F6D8}" dt="2025-03-23T05:55:49.003" v="732"/>
-          <ac:spMkLst>
-            <pc:docMk/>
-            <pc:sldMk cId="323566195" sldId="323"/>
-            <ac:spMk id="6" creationId="{8D3669D3-C50E-E863-834B-24745A4049BF}"/>
-          </ac:spMkLst>
-        </pc:spChg>
-        <pc:spChg chg="add del mod">
-          <ac:chgData name="Mohammed Fasha" userId="S::mohammed.fasha@uop.edu.jo::cc64f42d-a1a6-4f08-b97b-0c37f877119f" providerId="AD" clId="Web-{048CEBFD-D6A1-FF4F-145A-C5347D00F6D8}" dt="2025-03-23T05:59:22.130" v="1034"/>
-          <ac:spMkLst>
-            <pc:docMk/>
-            <pc:sldMk cId="323566195" sldId="323"/>
-            <ac:spMk id="8" creationId="{2082C506-EF36-1091-B38C-0345C16F14E1}"/>
-          </ac:spMkLst>
-        </pc:spChg>
-        <pc:spChg chg="add del mod">
-          <ac:chgData name="Mohammed Fasha" userId="S::mohammed.fasha@uop.edu.jo::cc64f42d-a1a6-4f08-b97b-0c37f877119f" providerId="AD" clId="Web-{048CEBFD-D6A1-FF4F-145A-C5347D00F6D8}" dt="2025-03-23T05:59:27.614" v="1039"/>
-          <ac:spMkLst>
-            <pc:docMk/>
-            <pc:sldMk cId="323566195" sldId="323"/>
-            <ac:spMk id="83" creationId="{807366CE-6F6E-4CFE-6647-767B9FE5806E}"/>
-          </ac:spMkLst>
-        </pc:spChg>
-        <pc:graphicFrameChg chg="add del mod ord modGraphic">
-          <ac:chgData name="Mohammed Fasha" userId="S::mohammed.fasha@uop.edu.jo::cc64f42d-a1a6-4f08-b97b-0c37f877119f" providerId="AD" clId="Web-{048CEBFD-D6A1-FF4F-145A-C5347D00F6D8}" dt="2025-03-23T05:59:01.988" v="961"/>
-          <ac:graphicFrameMkLst>
-            <pc:docMk/>
-            <pc:sldMk cId="323566195" sldId="323"/>
-            <ac:graphicFrameMk id="5" creationId="{A754B520-EBFE-5B5E-37E1-9C40D7A1FFBE}"/>
-          </ac:graphicFrameMkLst>
-        </pc:graphicFrameChg>
-        <pc:graphicFrameChg chg="add del mod ord modGraphic">
-          <ac:chgData name="Mohammed Fasha" userId="S::mohammed.fasha@uop.edu.jo::cc64f42d-a1a6-4f08-b97b-0c37f877119f" providerId="AD" clId="Web-{048CEBFD-D6A1-FF4F-145A-C5347D00F6D8}" dt="2025-03-23T05:59:07.457" v="1033"/>
-          <ac:graphicFrameMkLst>
-            <pc:docMk/>
-            <pc:sldMk cId="323566195" sldId="323"/>
-            <ac:graphicFrameMk id="10" creationId="{81F22BAF-A7A5-D51F-F048-990BCD7473F1}"/>
-          </ac:graphicFrameMkLst>
-        </pc:graphicFrameChg>
-        <pc:graphicFrameChg chg="add del mod">
-          <ac:chgData name="Mohammed Fasha" userId="S::mohammed.fasha@uop.edu.jo::cc64f42d-a1a6-4f08-b97b-0c37f877119f" providerId="AD" clId="Web-{048CEBFD-D6A1-FF4F-145A-C5347D00F6D8}" dt="2025-03-23T05:59:07.457" v="1032"/>
-          <ac:graphicFrameMkLst>
-            <pc:docMk/>
-            <pc:sldMk cId="323566195" sldId="323"/>
-            <ac:graphicFrameMk id="12" creationId="{31D32C5C-4AB4-10D9-8E65-54C3AA3B73FA}"/>
-          </ac:graphicFrameMkLst>
-        </pc:graphicFrameChg>
-        <pc:graphicFrameChg chg="add del mod">
-          <ac:chgData name="Mohammed Fasha" userId="S::mohammed.fasha@uop.edu.jo::cc64f42d-a1a6-4f08-b97b-0c37f877119f" providerId="AD" clId="Web-{048CEBFD-D6A1-FF4F-145A-C5347D00F6D8}" dt="2025-03-23T05:59:07.457" v="1031"/>
-          <ac:graphicFrameMkLst>
-            <pc:docMk/>
-            <pc:sldMk cId="323566195" sldId="323"/>
-            <ac:graphicFrameMk id="14" creationId="{2B9CFF0A-4FB9-44E3-E79F-5E9C7AF9C6F2}"/>
-          </ac:graphicFrameMkLst>
-        </pc:graphicFrameChg>
-        <pc:graphicFrameChg chg="add del mod">
-          <ac:chgData name="Mohammed Fasha" userId="S::mohammed.fasha@uop.edu.jo::cc64f42d-a1a6-4f08-b97b-0c37f877119f" providerId="AD" clId="Web-{048CEBFD-D6A1-FF4F-145A-C5347D00F6D8}" dt="2025-03-23T05:59:07.457" v="1030"/>
-          <ac:graphicFrameMkLst>
-            <pc:docMk/>
-            <pc:sldMk cId="323566195" sldId="323"/>
-            <ac:graphicFrameMk id="16" creationId="{151D465E-BCAC-C815-C99F-DFCF8008CC41}"/>
-          </ac:graphicFrameMkLst>
-        </pc:graphicFrameChg>
-        <pc:graphicFrameChg chg="add del mod">
-          <ac:chgData name="Mohammed Fasha" userId="S::mohammed.fasha@uop.edu.jo::cc64f42d-a1a6-4f08-b97b-0c37f877119f" providerId="AD" clId="Web-{048CEBFD-D6A1-FF4F-145A-C5347D00F6D8}" dt="2025-03-23T05:59:07.457" v="1029"/>
-          <ac:graphicFrameMkLst>
-            <pc:docMk/>
-            <pc:sldMk cId="323566195" sldId="323"/>
-            <ac:graphicFrameMk id="18" creationId="{6AC48D0B-E2C7-9970-AED5-07A2B3F1FA40}"/>
-          </ac:graphicFrameMkLst>
-        </pc:graphicFrameChg>
-        <pc:graphicFrameChg chg="add del mod">
-          <ac:chgData name="Mohammed Fasha" userId="S::mohammed.fasha@uop.edu.jo::cc64f42d-a1a6-4f08-b97b-0c37f877119f" providerId="AD" clId="Web-{048CEBFD-D6A1-FF4F-145A-C5347D00F6D8}" dt="2025-03-23T05:59:07.457" v="1028"/>
-          <ac:graphicFrameMkLst>
-            <pc:docMk/>
-            <pc:sldMk cId="323566195" sldId="323"/>
-            <ac:graphicFrameMk id="20" creationId="{2A87022A-12C7-E3C9-78A5-B6E3716099CC}"/>
-          </ac:graphicFrameMkLst>
-        </pc:graphicFrameChg>
-        <pc:graphicFrameChg chg="add del mod">
-          <ac:chgData name="Mohammed Fasha" userId="S::mohammed.fasha@uop.edu.jo::cc64f42d-a1a6-4f08-b97b-0c37f877119f" providerId="AD" clId="Web-{048CEBFD-D6A1-FF4F-145A-C5347D00F6D8}" dt="2025-03-23T05:59:07.457" v="1027"/>
-          <ac:graphicFrameMkLst>
-            <pc:docMk/>
-            <pc:sldMk cId="323566195" sldId="323"/>
-            <ac:graphicFrameMk id="22" creationId="{8EF2D05A-5601-2F93-287A-A37D730B4D8E}"/>
-          </ac:graphicFrameMkLst>
-        </pc:graphicFrameChg>
-        <pc:graphicFrameChg chg="add del mod">
-          <ac:chgData name="Mohammed Fasha" userId="S::mohammed.fasha@uop.edu.jo::cc64f42d-a1a6-4f08-b97b-0c37f877119f" providerId="AD" clId="Web-{048CEBFD-D6A1-FF4F-145A-C5347D00F6D8}" dt="2025-03-23T05:59:07.457" v="1026"/>
-          <ac:graphicFrameMkLst>
-            <pc:docMk/>
-            <pc:sldMk cId="323566195" sldId="323"/>
-            <ac:graphicFrameMk id="24" creationId="{6A100409-108D-914C-3A20-14F5A5113ECA}"/>
-          </ac:graphicFrameMkLst>
-        </pc:graphicFrameChg>
-        <pc:graphicFrameChg chg="add del mod">
-          <ac:chgData name="Mohammed Fasha" userId="S::mohammed.fasha@uop.edu.jo::cc64f42d-a1a6-4f08-b97b-0c37f877119f" providerId="AD" clId="Web-{048CEBFD-D6A1-FF4F-145A-C5347D00F6D8}" dt="2025-03-23T05:59:07.457" v="1025"/>
-          <ac:graphicFrameMkLst>
-            <pc:docMk/>
-            <pc:sldMk cId="323566195" sldId="323"/>
-            <ac:graphicFrameMk id="26" creationId="{C6C4A769-1EA7-DFBB-76AA-A6BD4F6972B1}"/>
-          </ac:graphicFrameMkLst>
-        </pc:graphicFrameChg>
-        <pc:graphicFrameChg chg="add del mod">
-          <ac:chgData name="Mohammed Fasha" userId="S::mohammed.fasha@uop.edu.jo::cc64f42d-a1a6-4f08-b97b-0c37f877119f" providerId="AD" clId="Web-{048CEBFD-D6A1-FF4F-145A-C5347D00F6D8}" dt="2025-03-23T05:59:07.457" v="1024"/>
-          <ac:graphicFrameMkLst>
-            <pc:docMk/>
-            <pc:sldMk cId="323566195" sldId="323"/>
-            <ac:graphicFrameMk id="28" creationId="{C40A24BF-5004-D518-7DAD-FC1621E3F304}"/>
-          </ac:graphicFrameMkLst>
-        </pc:graphicFrameChg>
-        <pc:graphicFrameChg chg="add del mod">
-          <ac:chgData name="Mohammed Fasha" userId="S::mohammed.fasha@uop.edu.jo::cc64f42d-a1a6-4f08-b97b-0c37f877119f" providerId="AD" clId="Web-{048CEBFD-D6A1-FF4F-145A-C5347D00F6D8}" dt="2025-03-23T05:59:07.457" v="1023"/>
-          <ac:graphicFrameMkLst>
-            <pc:docMk/>
-            <pc:sldMk cId="323566195" sldId="323"/>
-            <ac:graphicFrameMk id="30" creationId="{BE442F90-15EC-E0E1-9A4C-C04CE58B5245}"/>
-          </ac:graphicFrameMkLst>
-        </pc:graphicFrameChg>
-        <pc:graphicFrameChg chg="add del mod">
-          <ac:chgData name="Mohammed Fasha" userId="S::mohammed.fasha@uop.edu.jo::cc64f42d-a1a6-4f08-b97b-0c37f877119f" providerId="AD" clId="Web-{048CEBFD-D6A1-FF4F-145A-C5347D00F6D8}" dt="2025-03-23T05:59:07.457" v="1022"/>
-          <ac:graphicFrameMkLst>
-            <pc:docMk/>
-            <pc:sldMk cId="323566195" sldId="323"/>
-            <ac:graphicFrameMk id="32" creationId="{9B52DAA3-1DB1-99DF-18E4-9E64C093A4F6}"/>
-          </ac:graphicFrameMkLst>
-        </pc:graphicFrameChg>
-        <pc:graphicFrameChg chg="add del mod">
-          <ac:chgData name="Mohammed Fasha" userId="S::mohammed.fasha@uop.edu.jo::cc64f42d-a1a6-4f08-b97b-0c37f877119f" providerId="AD" clId="Web-{048CEBFD-D6A1-FF4F-145A-C5347D00F6D8}" dt="2025-03-23T05:59:07.457" v="1021"/>
-          <ac:graphicFrameMkLst>
-            <pc:docMk/>
-            <pc:sldMk cId="323566195" sldId="323"/>
-            <ac:graphicFrameMk id="34" creationId="{993470D1-9B7A-17C0-943E-DF7B23EA5B44}"/>
-          </ac:graphicFrameMkLst>
-        </pc:graphicFrameChg>
-        <pc:graphicFrameChg chg="add del mod">
-          <ac:chgData name="Mohammed Fasha" userId="S::mohammed.fasha@uop.edu.jo::cc64f42d-a1a6-4f08-b97b-0c37f877119f" providerId="AD" clId="Web-{048CEBFD-D6A1-FF4F-145A-C5347D00F6D8}" dt="2025-03-23T05:59:07.457" v="1020"/>
-          <ac:graphicFrameMkLst>
-            <pc:docMk/>
-            <pc:sldMk cId="323566195" sldId="323"/>
-            <ac:graphicFrameMk id="36" creationId="{179BE741-A69E-5347-4C57-44E890ACA8B6}"/>
-          </ac:graphicFrameMkLst>
-        </pc:graphicFrameChg>
-        <pc:graphicFrameChg chg="add del mod">
-          <ac:chgData name="Mohammed Fasha" userId="S::mohammed.fasha@uop.edu.jo::cc64f42d-a1a6-4f08-b97b-0c37f877119f" providerId="AD" clId="Web-{048CEBFD-D6A1-FF4F-145A-C5347D00F6D8}" dt="2025-03-23T05:59:07.457" v="1019"/>
-          <ac:graphicFrameMkLst>
-            <pc:docMk/>
-            <pc:sldMk cId="323566195" sldId="323"/>
-            <ac:graphicFrameMk id="38" creationId="{7F6E1717-1F2E-6C4D-1780-6819571BA43C}"/>
-          </ac:graphicFrameMkLst>
-        </pc:graphicFrameChg>
-        <pc:graphicFrameChg chg="add del mod">
-          <ac:chgData name="Mohammed Fasha" userId="S::mohammed.fasha@uop.edu.jo::cc64f42d-a1a6-4f08-b97b-0c37f877119f" providerId="AD" clId="Web-{048CEBFD-D6A1-FF4F-145A-C5347D00F6D8}" dt="2025-03-23T05:59:07.457" v="1018"/>
-          <ac:graphicFrameMkLst>
-            <pc:docMk/>
-            <pc:sldMk cId="323566195" sldId="323"/>
-            <ac:graphicFrameMk id="40" creationId="{2484AF69-B0DC-9E02-8756-50FB72954E82}"/>
-          </ac:graphicFrameMkLst>
-        </pc:graphicFrameChg>
-        <pc:graphicFrameChg chg="add del mod">
-          <ac:chgData name="Mohammed Fasha" userId="S::mohammed.fasha@uop.edu.jo::cc64f42d-a1a6-4f08-b97b-0c37f877119f" providerId="AD" clId="Web-{048CEBFD-D6A1-FF4F-145A-C5347D00F6D8}" dt="2025-03-23T05:59:07.457" v="1017"/>
-          <ac:graphicFrameMkLst>
-            <pc:docMk/>
-            <pc:sldMk cId="323566195" sldId="323"/>
-            <ac:graphicFrameMk id="42" creationId="{B8EE61D1-5177-30CA-E118-E5D3B87242CD}"/>
-          </ac:graphicFrameMkLst>
-        </pc:graphicFrameChg>
-        <pc:graphicFrameChg chg="add del mod">
-          <ac:chgData name="Mohammed Fasha" userId="S::mohammed.fasha@uop.edu.jo::cc64f42d-a1a6-4f08-b97b-0c37f877119f" providerId="AD" clId="Web-{048CEBFD-D6A1-FF4F-145A-C5347D00F6D8}" dt="2025-03-23T05:59:07.457" v="1016"/>
-          <ac:graphicFrameMkLst>
-            <pc:docMk/>
-            <pc:sldMk cId="323566195" sldId="323"/>
-            <ac:graphicFrameMk id="44" creationId="{141A3A5A-4493-80D4-ECBB-45C88C8B4234}"/>
-          </ac:graphicFrameMkLst>
-        </pc:graphicFrameChg>
-        <pc:graphicFrameChg chg="add del mod">
-          <ac:chgData name="Mohammed Fasha" userId="S::mohammed.fasha@uop.edu.jo::cc64f42d-a1a6-4f08-b97b-0c37f877119f" providerId="AD" clId="Web-{048CEBFD-D6A1-FF4F-145A-C5347D00F6D8}" dt="2025-03-23T05:59:07.457" v="1015"/>
-          <ac:graphicFrameMkLst>
-            <pc:docMk/>
-            <pc:sldMk cId="323566195" sldId="323"/>
-            <ac:graphicFrameMk id="46" creationId="{881F753D-C8EB-CC8A-03A1-87CA997234E2}"/>
-          </ac:graphicFrameMkLst>
-        </pc:graphicFrameChg>
-        <pc:graphicFrameChg chg="add del mod">
-          <ac:chgData name="Mohammed Fasha" userId="S::mohammed.fasha@uop.edu.jo::cc64f42d-a1a6-4f08-b97b-0c37f877119f" providerId="AD" clId="Web-{048CEBFD-D6A1-FF4F-145A-C5347D00F6D8}" dt="2025-03-23T05:59:07.457" v="1014"/>
-          <ac:graphicFrameMkLst>
-            <pc:docMk/>
-            <pc:sldMk cId="323566195" sldId="323"/>
-            <ac:graphicFrameMk id="48" creationId="{A3D78DD1-89C1-461E-5B28-18FB43C2FC00}"/>
-          </ac:graphicFrameMkLst>
-        </pc:graphicFrameChg>
-        <pc:graphicFrameChg chg="add del mod">
-          <ac:chgData name="Mohammed Fasha" userId="S::mohammed.fasha@uop.edu.jo::cc64f42d-a1a6-4f08-b97b-0c37f877119f" providerId="AD" clId="Web-{048CEBFD-D6A1-FF4F-145A-C5347D00F6D8}" dt="2025-03-23T05:59:07.457" v="1013"/>
-          <ac:graphicFrameMkLst>
-            <pc:docMk/>
-            <pc:sldMk cId="323566195" sldId="323"/>
-            <ac:graphicFrameMk id="50" creationId="{6340C572-E3F3-16AF-B421-66538320305F}"/>
-          </ac:graphicFrameMkLst>
-        </pc:graphicFrameChg>
-        <pc:graphicFrameChg chg="add del mod">
-          <ac:chgData name="Mohammed Fasha" userId="S::mohammed.fasha@uop.edu.jo::cc64f42d-a1a6-4f08-b97b-0c37f877119f" providerId="AD" clId="Web-{048CEBFD-D6A1-FF4F-145A-C5347D00F6D8}" dt="2025-03-23T05:59:07.457" v="1012"/>
-          <ac:graphicFrameMkLst>
-            <pc:docMk/>
-            <pc:sldMk cId="323566195" sldId="323"/>
-            <ac:graphicFrameMk id="52" creationId="{A2C96DF1-B896-A75F-F9DA-2D2C76F89A78}"/>
-          </ac:graphicFrameMkLst>
-        </pc:graphicFrameChg>
-        <pc:graphicFrameChg chg="add del mod">
-          <ac:chgData name="Mohammed Fasha" userId="S::mohammed.fasha@uop.edu.jo::cc64f42d-a1a6-4f08-b97b-0c37f877119f" providerId="AD" clId="Web-{048CEBFD-D6A1-FF4F-145A-C5347D00F6D8}" dt="2025-03-23T05:59:07.457" v="1011"/>
-          <ac:graphicFrameMkLst>
-            <pc:docMk/>
-            <pc:sldMk cId="323566195" sldId="323"/>
-            <ac:graphicFrameMk id="54" creationId="{E457EF04-D6A8-7B9E-A19F-D4C4AFC18FC5}"/>
-          </ac:graphicFrameMkLst>
-        </pc:graphicFrameChg>
-        <pc:graphicFrameChg chg="add del mod">
-          <ac:chgData name="Mohammed Fasha" userId="S::mohammed.fasha@uop.edu.jo::cc64f42d-a1a6-4f08-b97b-0c37f877119f" providerId="AD" clId="Web-{048CEBFD-D6A1-FF4F-145A-C5347D00F6D8}" dt="2025-03-23T05:59:07.457" v="1010"/>
-          <ac:graphicFrameMkLst>
-            <pc:docMk/>
-            <pc:sldMk cId="323566195" sldId="323"/>
-            <ac:graphicFrameMk id="56" creationId="{B0B7E22B-C771-8134-485E-8D2C20D5FA95}"/>
-          </ac:graphicFrameMkLst>
-        </pc:graphicFrameChg>
-        <pc:graphicFrameChg chg="add del mod">
-          <ac:chgData name="Mohammed Fasha" userId="S::mohammed.fasha@uop.edu.jo::cc64f42d-a1a6-4f08-b97b-0c37f877119f" providerId="AD" clId="Web-{048CEBFD-D6A1-FF4F-145A-C5347D00F6D8}" dt="2025-03-23T05:59:07.457" v="1009"/>
-          <ac:graphicFrameMkLst>
-            <pc:docMk/>
-            <pc:sldMk cId="323566195" sldId="323"/>
-            <ac:graphicFrameMk id="58" creationId="{96E97EA0-26C3-8107-FFD7-A50124666871}"/>
-          </ac:graphicFrameMkLst>
-        </pc:graphicFrameChg>
-        <pc:graphicFrameChg chg="add del mod">
-          <ac:chgData name="Mohammed Fasha" userId="S::mohammed.fasha@uop.edu.jo::cc64f42d-a1a6-4f08-b97b-0c37f877119f" providerId="AD" clId="Web-{048CEBFD-D6A1-FF4F-145A-C5347D00F6D8}" dt="2025-03-23T05:59:07.457" v="1008"/>
-          <ac:graphicFrameMkLst>
-            <pc:docMk/>
-            <pc:sldMk cId="323566195" sldId="323"/>
-            <ac:graphicFrameMk id="60" creationId="{01575609-E88F-517C-939B-2D01FE427CB2}"/>
-          </ac:graphicFrameMkLst>
-        </pc:graphicFrameChg>
-        <pc:graphicFrameChg chg="add del mod">
-          <ac:chgData name="Mohammed Fasha" userId="S::mohammed.fasha@uop.edu.jo::cc64f42d-a1a6-4f08-b97b-0c37f877119f" providerId="AD" clId="Web-{048CEBFD-D6A1-FF4F-145A-C5347D00F6D8}" dt="2025-03-23T05:59:07.457" v="1007"/>
-          <ac:graphicFrameMkLst>
-            <pc:docMk/>
-            <pc:sldMk cId="323566195" sldId="323"/>
-            <ac:graphicFrameMk id="62" creationId="{81F84073-D19D-6E20-4B98-DAADFCCB5891}"/>
-          </ac:graphicFrameMkLst>
-        </pc:graphicFrameChg>
-        <pc:graphicFrameChg chg="add del mod">
-          <ac:chgData name="Mohammed Fasha" userId="S::mohammed.fasha@uop.edu.jo::cc64f42d-a1a6-4f08-b97b-0c37f877119f" providerId="AD" clId="Web-{048CEBFD-D6A1-FF4F-145A-C5347D00F6D8}" dt="2025-03-23T05:59:07.457" v="1006"/>
-          <ac:graphicFrameMkLst>
-            <pc:docMk/>
-            <pc:sldMk cId="323566195" sldId="323"/>
-            <ac:graphicFrameMk id="64" creationId="{E4EC3D09-6063-A529-870D-0C9877AA3053}"/>
-          </ac:graphicFrameMkLst>
-        </pc:graphicFrameChg>
-        <pc:graphicFrameChg chg="add del mod">
-          <ac:chgData name="Mohammed Fasha" userId="S::mohammed.fasha@uop.edu.jo::cc64f42d-a1a6-4f08-b97b-0c37f877119f" providerId="AD" clId="Web-{048CEBFD-D6A1-FF4F-145A-C5347D00F6D8}" dt="2025-03-23T05:59:07.457" v="1005"/>
-          <ac:graphicFrameMkLst>
-            <pc:docMk/>
-            <pc:sldMk cId="323566195" sldId="323"/>
-            <ac:graphicFrameMk id="66" creationId="{D84F5A10-FC27-5729-C73F-848FFFB113FB}"/>
-          </ac:graphicFrameMkLst>
-        </pc:graphicFrameChg>
-        <pc:graphicFrameChg chg="add del mod">
-          <ac:chgData name="Mohammed Fasha" userId="S::mohammed.fasha@uop.edu.jo::cc64f42d-a1a6-4f08-b97b-0c37f877119f" providerId="AD" clId="Web-{048CEBFD-D6A1-FF4F-145A-C5347D00F6D8}" dt="2025-03-23T05:59:07.457" v="1004"/>
-          <ac:graphicFrameMkLst>
-            <pc:docMk/>
-            <pc:sldMk cId="323566195" sldId="323"/>
-            <ac:graphicFrameMk id="68" creationId="{C5294D9E-208C-67A6-D898-A6698BF5388E}"/>
-          </ac:graphicFrameMkLst>
-        </pc:graphicFrameChg>
-        <pc:graphicFrameChg chg="add del mod">
-          <ac:chgData name="Mohammed Fasha" userId="S::mohammed.fasha@uop.edu.jo::cc64f42d-a1a6-4f08-b97b-0c37f877119f" providerId="AD" clId="Web-{048CEBFD-D6A1-FF4F-145A-C5347D00F6D8}" dt="2025-03-23T05:59:07.457" v="1003"/>
-          <ac:graphicFrameMkLst>
-            <pc:docMk/>
-            <pc:sldMk cId="323566195" sldId="323"/>
-            <ac:graphicFrameMk id="70" creationId="{296DED12-ACF6-510A-B5B6-46873E38536E}"/>
-          </ac:graphicFrameMkLst>
-        </pc:graphicFrameChg>
-        <pc:graphicFrameChg chg="add del mod">
-          <ac:chgData name="Mohammed Fasha" userId="S::mohammed.fasha@uop.edu.jo::cc64f42d-a1a6-4f08-b97b-0c37f877119f" providerId="AD" clId="Web-{048CEBFD-D6A1-FF4F-145A-C5347D00F6D8}" dt="2025-03-23T05:59:07.457" v="1002"/>
-          <ac:graphicFrameMkLst>
-            <pc:docMk/>
-            <pc:sldMk cId="323566195" sldId="323"/>
-            <ac:graphicFrameMk id="72" creationId="{95E38546-FB27-65FE-85C4-3F4F8B66A29A}"/>
-          </ac:graphicFrameMkLst>
-        </pc:graphicFrameChg>
-        <pc:graphicFrameChg chg="add del mod">
-          <ac:chgData name="Mohammed Fasha" userId="S::mohammed.fasha@uop.edu.jo::cc64f42d-a1a6-4f08-b97b-0c37f877119f" providerId="AD" clId="Web-{048CEBFD-D6A1-FF4F-145A-C5347D00F6D8}" dt="2025-03-23T05:59:07.457" v="1001"/>
-          <ac:graphicFrameMkLst>
-            <pc:docMk/>
-            <pc:sldMk cId="323566195" sldId="323"/>
-            <ac:graphicFrameMk id="74" creationId="{192A04DF-CA56-492A-1E8D-37F1707F96D3}"/>
-          </ac:graphicFrameMkLst>
-        </pc:graphicFrameChg>
-        <pc:graphicFrameChg chg="add del mod">
-          <ac:chgData name="Mohammed Fasha" userId="S::mohammed.fasha@uop.edu.jo::cc64f42d-a1a6-4f08-b97b-0c37f877119f" providerId="AD" clId="Web-{048CEBFD-D6A1-FF4F-145A-C5347D00F6D8}" dt="2025-03-23T05:59:07.457" v="1000"/>
-          <ac:graphicFrameMkLst>
-            <pc:docMk/>
-            <pc:sldMk cId="323566195" sldId="323"/>
-            <ac:graphicFrameMk id="76" creationId="{2C5FBFF9-1CD2-7200-F956-A5C5DDB1A652}"/>
-          </ac:graphicFrameMkLst>
-        </pc:graphicFrameChg>
-        <pc:graphicFrameChg chg="add del mod">
-          <ac:chgData name="Mohammed Fasha" userId="S::mohammed.fasha@uop.edu.jo::cc64f42d-a1a6-4f08-b97b-0c37f877119f" providerId="AD" clId="Web-{048CEBFD-D6A1-FF4F-145A-C5347D00F6D8}" dt="2025-03-23T05:59:07.457" v="999"/>
-          <ac:graphicFrameMkLst>
-            <pc:docMk/>
-            <pc:sldMk cId="323566195" sldId="323"/>
-            <ac:graphicFrameMk id="78" creationId="{B2E96C8C-06FA-2893-05C3-70BDD14172C9}"/>
-          </ac:graphicFrameMkLst>
-        </pc:graphicFrameChg>
-        <pc:graphicFrameChg chg="add del mod">
-          <ac:chgData name="Mohammed Fasha" userId="S::mohammed.fasha@uop.edu.jo::cc64f42d-a1a6-4f08-b97b-0c37f877119f" providerId="AD" clId="Web-{048CEBFD-D6A1-FF4F-145A-C5347D00F6D8}" dt="2025-03-23T05:59:07.457" v="998"/>
-          <ac:graphicFrameMkLst>
-            <pc:docMk/>
-            <pc:sldMk cId="323566195" sldId="323"/>
-            <ac:graphicFrameMk id="80" creationId="{E10281D6-863B-25CD-E75A-124FDDBAA4BE}"/>
-          </ac:graphicFrameMkLst>
-        </pc:graphicFrameChg>
-        <pc:graphicFrameChg chg="add mod ord modGraphic">
-          <ac:chgData name="Mohammed Fasha" userId="S::mohammed.fasha@uop.edu.jo::cc64f42d-a1a6-4f08-b97b-0c37f877119f" providerId="AD" clId="Web-{048CEBFD-D6A1-FF4F-145A-C5347D00F6D8}" dt="2025-03-23T06:02:22.542" v="1162"/>
-          <ac:graphicFrameMkLst>
-            <pc:docMk/>
-            <pc:sldMk cId="323566195" sldId="323"/>
-            <ac:graphicFrameMk id="82" creationId="{135E2F87-A441-0139-1576-BC186FCA12A1}"/>
-          </ac:graphicFrameMkLst>
-        </pc:graphicFrameChg>
-      </pc:sldChg>
-      <pc:sldChg chg="modSp add replId">
-        <pc:chgData name="Mohammed Fasha" userId="S::mohammed.fasha@uop.edu.jo::cc64f42d-a1a6-4f08-b97b-0c37f877119f" providerId="AD" clId="Web-{048CEBFD-D6A1-FF4F-145A-C5347D00F6D8}" dt="2025-03-23T06:02:28.917" v="1163"/>
-        <pc:sldMkLst>
-          <pc:docMk/>
-          <pc:sldMk cId="2802975669" sldId="324"/>
-        </pc:sldMkLst>
-        <pc:graphicFrameChg chg="modGraphic">
-          <ac:chgData name="Mohammed Fasha" userId="S::mohammed.fasha@uop.edu.jo::cc64f42d-a1a6-4f08-b97b-0c37f877119f" providerId="AD" clId="Web-{048CEBFD-D6A1-FF4F-145A-C5347D00F6D8}" dt="2025-03-23T06:02:28.917" v="1163"/>
-          <ac:graphicFrameMkLst>
-            <pc:docMk/>
-            <pc:sldMk cId="2802975669" sldId="324"/>
-            <ac:graphicFrameMk id="82" creationId="{E61DA268-6635-1C98-1674-A7AD4D8991C6}"/>
-          </ac:graphicFrameMkLst>
-        </pc:graphicFrameChg>
-      </pc:sldChg>
-      <pc:sldChg chg="modSp new mod modClrScheme chgLayout">
-        <pc:chgData name="Mohammed Fasha" userId="S::mohammed.fasha@uop.edu.jo::cc64f42d-a1a6-4f08-b97b-0c37f877119f" providerId="AD" clId="Web-{048CEBFD-D6A1-FF4F-145A-C5347D00F6D8}" dt="2025-03-23T06:01:57.150" v="1158" actId="20577"/>
-        <pc:sldMkLst>
-          <pc:docMk/>
-          <pc:sldMk cId="1195465549" sldId="325"/>
-        </pc:sldMkLst>
-        <pc:spChg chg="mod ord">
-          <ac:chgData name="Mohammed Fasha" userId="S::mohammed.fasha@uop.edu.jo::cc64f42d-a1a6-4f08-b97b-0c37f877119f" providerId="AD" clId="Web-{048CEBFD-D6A1-FF4F-145A-C5347D00F6D8}" dt="2025-03-23T06:01:57.150" v="1158" actId="20577"/>
-          <ac:spMkLst>
-            <pc:docMk/>
-            <pc:sldMk cId="1195465549" sldId="325"/>
-            <ac:spMk id="2" creationId="{C40B076E-5F79-27B6-B774-38C83230BBDD}"/>
-          </ac:spMkLst>
-        </pc:spChg>
-        <pc:spChg chg="mod ord">
-          <ac:chgData name="Mohammed Fasha" userId="S::mohammed.fasha@uop.edu.jo::cc64f42d-a1a6-4f08-b97b-0c37f877119f" providerId="AD" clId="Web-{048CEBFD-D6A1-FF4F-145A-C5347D00F6D8}" dt="2025-03-23T06:01:44.322" v="1142"/>
-          <ac:spMkLst>
-            <pc:docMk/>
-            <pc:sldMk cId="1195465549" sldId="325"/>
-            <ac:spMk id="3" creationId="{82C6206C-8193-A125-EB18-48C260C8432B}"/>
-          </ac:spMkLst>
-        </pc:spChg>
-      </pc:sldChg>
-    </pc:docChg>
-  </pc:docChgLst>
-  <pc:docChgLst>
-    <pc:chgData name="Mohammed Fasha" userId="cc64f42d-a1a6-4f08-b97b-0c37f877119f" providerId="ADAL" clId="{12C0646C-DE2C-4492-8B53-5F65EF722386}"/>
-    <pc:docChg chg="undo redo custSel addSld delSld modSld sldOrd">
-      <pc:chgData name="Mohammed Fasha" userId="cc64f42d-a1a6-4f08-b97b-0c37f877119f" providerId="ADAL" clId="{12C0646C-DE2C-4492-8B53-5F65EF722386}" dt="2025-03-19T09:12:33.880" v="390" actId="2696"/>
-      <pc:docMkLst>
-        <pc:docMk/>
-      </pc:docMkLst>
-      <pc:sldChg chg="modSp mod">
-        <pc:chgData name="Mohammed Fasha" userId="cc64f42d-a1a6-4f08-b97b-0c37f877119f" providerId="ADAL" clId="{12C0646C-DE2C-4492-8B53-5F65EF722386}" dt="2025-03-17T10:03:21.731" v="170" actId="1076"/>
-        <pc:sldMkLst>
-          <pc:docMk/>
-          <pc:sldMk cId="0" sldId="263"/>
-        </pc:sldMkLst>
-        <pc:spChg chg="mod">
-          <ac:chgData name="Mohammed Fasha" userId="cc64f42d-a1a6-4f08-b97b-0c37f877119f" providerId="ADAL" clId="{12C0646C-DE2C-4492-8B53-5F65EF722386}" dt="2025-03-17T10:03:20.378" v="169" actId="14100"/>
-          <ac:spMkLst>
-            <pc:docMk/>
-            <pc:sldMk cId="0" sldId="263"/>
-            <ac:spMk id="2" creationId="{00000000-0000-0000-0000-000000000000}"/>
-          </ac:spMkLst>
-        </pc:spChg>
-        <pc:picChg chg="mod">
-          <ac:chgData name="Mohammed Fasha" userId="cc64f42d-a1a6-4f08-b97b-0c37f877119f" providerId="ADAL" clId="{12C0646C-DE2C-4492-8B53-5F65EF722386}" dt="2025-03-17T10:03:21.731" v="170" actId="1076"/>
-          <ac:picMkLst>
-            <pc:docMk/>
-            <pc:sldMk cId="0" sldId="263"/>
-            <ac:picMk id="5" creationId="{00000000-0000-0000-0000-000000000000}"/>
-          </ac:picMkLst>
-        </pc:picChg>
-      </pc:sldChg>
-      <pc:sldChg chg="ord">
-        <pc:chgData name="Mohammed Fasha" userId="cc64f42d-a1a6-4f08-b97b-0c37f877119f" providerId="ADAL" clId="{12C0646C-DE2C-4492-8B53-5F65EF722386}" dt="2025-03-16T08:15:00.148" v="1"/>
-        <pc:sldMkLst>
-          <pc:docMk/>
-          <pc:sldMk cId="0" sldId="264"/>
-        </pc:sldMkLst>
-      </pc:sldChg>
-      <pc:sldChg chg="modSp mod">
-        <pc:chgData name="Mohammed Fasha" userId="cc64f42d-a1a6-4f08-b97b-0c37f877119f" providerId="ADAL" clId="{12C0646C-DE2C-4492-8B53-5F65EF722386}" dt="2025-03-17T10:03:35.983" v="172" actId="1076"/>
-        <pc:sldMkLst>
-          <pc:docMk/>
-          <pc:sldMk cId="0" sldId="265"/>
-        </pc:sldMkLst>
-        <pc:spChg chg="mod">
-          <ac:chgData name="Mohammed Fasha" userId="cc64f42d-a1a6-4f08-b97b-0c37f877119f" providerId="ADAL" clId="{12C0646C-DE2C-4492-8B53-5F65EF722386}" dt="2025-03-17T10:03:33.931" v="171" actId="14100"/>
-          <ac:spMkLst>
-            <pc:docMk/>
-            <pc:sldMk cId="0" sldId="265"/>
-            <ac:spMk id="3" creationId="{00000000-0000-0000-0000-000000000000}"/>
-          </ac:spMkLst>
-        </pc:spChg>
-        <pc:picChg chg="mod">
-          <ac:chgData name="Mohammed Fasha" userId="cc64f42d-a1a6-4f08-b97b-0c37f877119f" providerId="ADAL" clId="{12C0646C-DE2C-4492-8B53-5F65EF722386}" dt="2025-03-17T10:03:35.983" v="172" actId="1076"/>
-          <ac:picMkLst>
-            <pc:docMk/>
-            <pc:sldMk cId="0" sldId="265"/>
-            <ac:picMk id="2" creationId="{00000000-0000-0000-0000-000000000000}"/>
-          </ac:picMkLst>
-        </pc:picChg>
-      </pc:sldChg>
-      <pc:sldChg chg="del">
-        <pc:chgData name="Mohammed Fasha" userId="cc64f42d-a1a6-4f08-b97b-0c37f877119f" providerId="ADAL" clId="{12C0646C-DE2C-4492-8B53-5F65EF722386}" dt="2025-03-17T09:03:29.846" v="2" actId="2696"/>
-        <pc:sldMkLst>
-          <pc:docMk/>
-          <pc:sldMk cId="0" sldId="266"/>
-        </pc:sldMkLst>
-      </pc:sldChg>
-      <pc:sldChg chg="add">
-        <pc:chgData name="Mohammed Fasha" userId="cc64f42d-a1a6-4f08-b97b-0c37f877119f" providerId="ADAL" clId="{12C0646C-DE2C-4492-8B53-5F65EF722386}" dt="2025-03-17T09:05:51.748" v="7"/>
-        <pc:sldMkLst>
-          <pc:docMk/>
-          <pc:sldMk cId="2051082680" sldId="266"/>
-        </pc:sldMkLst>
-      </pc:sldChg>
-      <pc:sldChg chg="modSp mod">
-        <pc:chgData name="Mohammed Fasha" userId="cc64f42d-a1a6-4f08-b97b-0c37f877119f" providerId="ADAL" clId="{12C0646C-DE2C-4492-8B53-5F65EF722386}" dt="2025-03-17T09:09:25.710" v="105" actId="207"/>
-        <pc:sldMkLst>
-          <pc:docMk/>
-          <pc:sldMk cId="0" sldId="268"/>
-        </pc:sldMkLst>
-        <pc:spChg chg="mod">
-          <ac:chgData name="Mohammed Fasha" userId="cc64f42d-a1a6-4f08-b97b-0c37f877119f" providerId="ADAL" clId="{12C0646C-DE2C-4492-8B53-5F65EF722386}" dt="2025-03-17T09:09:25.710" v="105" actId="207"/>
-          <ac:spMkLst>
-            <pc:docMk/>
-            <pc:sldMk cId="0" sldId="268"/>
-            <ac:spMk id="5" creationId="{606C1567-AF39-CAED-E122-5F02B98CB8E2}"/>
-          </ac:spMkLst>
-        </pc:spChg>
-      </pc:sldChg>
-      <pc:sldChg chg="modSp mod">
-        <pc:chgData name="Mohammed Fasha" userId="cc64f42d-a1a6-4f08-b97b-0c37f877119f" providerId="ADAL" clId="{12C0646C-DE2C-4492-8B53-5F65EF722386}" dt="2025-03-17T09:09:14.766" v="104" actId="207"/>
-        <pc:sldMkLst>
-          <pc:docMk/>
-          <pc:sldMk cId="0" sldId="270"/>
-        </pc:sldMkLst>
-        <pc:spChg chg="mod">
-          <ac:chgData name="Mohammed Fasha" userId="cc64f42d-a1a6-4f08-b97b-0c37f877119f" providerId="ADAL" clId="{12C0646C-DE2C-4492-8B53-5F65EF722386}" dt="2025-03-17T09:09:14.766" v="104" actId="207"/>
-          <ac:spMkLst>
-            <pc:docMk/>
-            <pc:sldMk cId="0" sldId="270"/>
-            <ac:spMk id="3" creationId="{00000000-0000-0000-0000-000000000000}"/>
-          </ac:spMkLst>
-        </pc:spChg>
-      </pc:sldChg>
-      <pc:sldChg chg="modSp mod">
-        <pc:chgData name="Mohammed Fasha" userId="cc64f42d-a1a6-4f08-b97b-0c37f877119f" providerId="ADAL" clId="{12C0646C-DE2C-4492-8B53-5F65EF722386}" dt="2025-03-17T09:09:57.093" v="106" actId="207"/>
-        <pc:sldMkLst>
-          <pc:docMk/>
-          <pc:sldMk cId="0" sldId="272"/>
-        </pc:sldMkLst>
-        <pc:spChg chg="mod">
-          <ac:chgData name="Mohammed Fasha" userId="cc64f42d-a1a6-4f08-b97b-0c37f877119f" providerId="ADAL" clId="{12C0646C-DE2C-4492-8B53-5F65EF722386}" dt="2025-03-17T09:09:57.093" v="106" actId="207"/>
-          <ac:spMkLst>
-            <pc:docMk/>
-            <pc:sldMk cId="0" sldId="272"/>
-            <ac:spMk id="7" creationId="{BD008676-47C8-D88A-CD4A-65BB83D57162}"/>
-          </ac:spMkLst>
-        </pc:spChg>
-      </pc:sldChg>
-      <pc:sldChg chg="modSp mod">
-        <pc:chgData name="Mohammed Fasha" userId="cc64f42d-a1a6-4f08-b97b-0c37f877119f" providerId="ADAL" clId="{12C0646C-DE2C-4492-8B53-5F65EF722386}" dt="2025-03-19T09:06:31.568" v="362" actId="1076"/>
-        <pc:sldMkLst>
-          <pc:docMk/>
-          <pc:sldMk cId="0" sldId="274"/>
-        </pc:sldMkLst>
-        <pc:spChg chg="mod">
-          <ac:chgData name="Mohammed Fasha" userId="cc64f42d-a1a6-4f08-b97b-0c37f877119f" providerId="ADAL" clId="{12C0646C-DE2C-4492-8B53-5F65EF722386}" dt="2025-03-17T09:08:51.041" v="101" actId="207"/>
-          <ac:spMkLst>
-            <pc:docMk/>
-            <pc:sldMk cId="0" sldId="274"/>
-            <ac:spMk id="7" creationId="{CF4277E2-2BAC-D76F-20C6-A50B542D2495}"/>
-          </ac:spMkLst>
-        </pc:spChg>
-        <pc:picChg chg="mod">
-          <ac:chgData name="Mohammed Fasha" userId="cc64f42d-a1a6-4f08-b97b-0c37f877119f" providerId="ADAL" clId="{12C0646C-DE2C-4492-8B53-5F65EF722386}" dt="2025-03-19T09:06:31.568" v="362" actId="1076"/>
-          <ac:picMkLst>
-            <pc:docMk/>
-            <pc:sldMk cId="0" sldId="274"/>
-            <ac:picMk id="5" creationId="{00000000-0000-0000-0000-000000000000}"/>
-          </ac:picMkLst>
-        </pc:picChg>
-        <pc:picChg chg="mod">
-          <ac:chgData name="Mohammed Fasha" userId="cc64f42d-a1a6-4f08-b97b-0c37f877119f" providerId="ADAL" clId="{12C0646C-DE2C-4492-8B53-5F65EF722386}" dt="2025-03-19T09:06:31.568" v="362" actId="1076"/>
-          <ac:picMkLst>
-            <pc:docMk/>
-            <pc:sldMk cId="0" sldId="274"/>
-            <ac:picMk id="6" creationId="{00000000-0000-0000-0000-000000000000}"/>
-          </ac:picMkLst>
-        </pc:picChg>
-      </pc:sldChg>
-      <pc:sldChg chg="modSp mod">
-        <pc:chgData name="Mohammed Fasha" userId="cc64f42d-a1a6-4f08-b97b-0c37f877119f" providerId="ADAL" clId="{12C0646C-DE2C-4492-8B53-5F65EF722386}" dt="2025-03-19T09:05:19.368" v="359" actId="6549"/>
-        <pc:sldMkLst>
-          <pc:docMk/>
-          <pc:sldMk cId="0" sldId="275"/>
-        </pc:sldMkLst>
-      </pc:sldChg>
-      <pc:sldChg chg="addSp modSp mod">
-        <pc:chgData name="Mohammed Fasha" userId="cc64f42d-a1a6-4f08-b97b-0c37f877119f" providerId="ADAL" clId="{12C0646C-DE2C-4492-8B53-5F65EF722386}" dt="2025-03-19T09:00:34.488" v="287" actId="1036"/>
-        <pc:sldMkLst>
-          <pc:docMk/>
-          <pc:sldMk cId="0" sldId="276"/>
-        </pc:sldMkLst>
-      </pc:sldChg>
-      <pc:sldChg chg="modSp mod">
-        <pc:chgData name="Mohammed Fasha" userId="cc64f42d-a1a6-4f08-b97b-0c37f877119f" providerId="ADAL" clId="{12C0646C-DE2C-4492-8B53-5F65EF722386}" dt="2025-03-19T09:03:17.368" v="349" actId="113"/>
-        <pc:sldMkLst>
-          <pc:docMk/>
-          <pc:sldMk cId="0" sldId="277"/>
-        </pc:sldMkLst>
-      </pc:sldChg>
-      <pc:sldChg chg="addSp modSp mod ord">
-        <pc:chgData name="Mohammed Fasha" userId="cc64f42d-a1a6-4f08-b97b-0c37f877119f" providerId="ADAL" clId="{12C0646C-DE2C-4492-8B53-5F65EF722386}" dt="2025-03-19T08:08:27.015" v="232"/>
-        <pc:sldMkLst>
-          <pc:docMk/>
-          <pc:sldMk cId="0" sldId="278"/>
-        </pc:sldMkLst>
-        <pc:spChg chg="mod">
-          <ac:chgData name="Mohammed Fasha" userId="cc64f42d-a1a6-4f08-b97b-0c37f877119f" providerId="ADAL" clId="{12C0646C-DE2C-4492-8B53-5F65EF722386}" dt="2025-03-17T09:13:23.408" v="140" actId="14"/>
-          <ac:spMkLst>
-            <pc:docMk/>
-            <pc:sldMk cId="0" sldId="278"/>
-            <ac:spMk id="6" creationId="{81843AE0-4921-7733-0D3B-33D489EDB8CC}"/>
-          </ac:spMkLst>
-        </pc:spChg>
-        <pc:picChg chg="mod">
-          <ac:chgData name="Mohammed Fasha" userId="cc64f42d-a1a6-4f08-b97b-0c37f877119f" providerId="ADAL" clId="{12C0646C-DE2C-4492-8B53-5F65EF722386}" dt="2025-03-17T09:12:45.807" v="136" actId="1076"/>
-          <ac:picMkLst>
-            <pc:docMk/>
-            <pc:sldMk cId="0" sldId="278"/>
-            <ac:picMk id="5" creationId="{00000000-0000-0000-0000-000000000000}"/>
-          </ac:picMkLst>
-        </pc:picChg>
-        <pc:picChg chg="add mod">
-          <ac:chgData name="Mohammed Fasha" userId="cc64f42d-a1a6-4f08-b97b-0c37f877119f" providerId="ADAL" clId="{12C0646C-DE2C-4492-8B53-5F65EF722386}" dt="2025-03-17T09:12:36.594" v="133" actId="1076"/>
-          <ac:picMkLst>
-            <pc:docMk/>
-            <pc:sldMk cId="0" sldId="278"/>
-            <ac:picMk id="2050" creationId="{232D760D-CBEA-0B66-CBCC-A5D70A94C927}"/>
-          </ac:picMkLst>
-        </pc:picChg>
-      </pc:sldChg>
-      <pc:sldChg chg="modSp mod">
-        <pc:chgData name="Mohammed Fasha" userId="cc64f42d-a1a6-4f08-b97b-0c37f877119f" providerId="ADAL" clId="{12C0646C-DE2C-4492-8B53-5F65EF722386}" dt="2025-03-19T09:11:29.996" v="388" actId="1076"/>
-        <pc:sldMkLst>
-          <pc:docMk/>
-          <pc:sldMk cId="0" sldId="279"/>
-        </pc:sldMkLst>
-      </pc:sldChg>
-      <pc:sldChg chg="modSp mod">
-        <pc:chgData name="Mohammed Fasha" userId="cc64f42d-a1a6-4f08-b97b-0c37f877119f" providerId="ADAL" clId="{12C0646C-DE2C-4492-8B53-5F65EF722386}" dt="2025-03-17T09:14:11.054" v="154" actId="27636"/>
-        <pc:sldMkLst>
-          <pc:docMk/>
-          <pc:sldMk cId="0" sldId="280"/>
-        </pc:sldMkLst>
-        <pc:spChg chg="mod">
-          <ac:chgData name="Mohammed Fasha" userId="cc64f42d-a1a6-4f08-b97b-0c37f877119f" providerId="ADAL" clId="{12C0646C-DE2C-4492-8B53-5F65EF722386}" dt="2025-03-17T09:14:11.054" v="154" actId="27636"/>
-          <ac:spMkLst>
-            <pc:docMk/>
-            <pc:sldMk cId="0" sldId="280"/>
-            <ac:spMk id="6" creationId="{CC4C1BC0-7E6B-75C8-0965-79DE721E7639}"/>
-          </ac:spMkLst>
-        </pc:spChg>
-      </pc:sldChg>
-      <pc:sldChg chg="modSp mod">
-        <pc:chgData name="Mohammed Fasha" userId="cc64f42d-a1a6-4f08-b97b-0c37f877119f" providerId="ADAL" clId="{12C0646C-DE2C-4492-8B53-5F65EF722386}" dt="2025-03-19T09:02:40.822" v="343" actId="27636"/>
-        <pc:sldMkLst>
-          <pc:docMk/>
-          <pc:sldMk cId="0" sldId="281"/>
-        </pc:sldMkLst>
-        <pc:spChg chg="mod">
-          <ac:chgData name="Mohammed Fasha" userId="cc64f42d-a1a6-4f08-b97b-0c37f877119f" providerId="ADAL" clId="{12C0646C-DE2C-4492-8B53-5F65EF722386}" dt="2025-03-19T09:02:40.822" v="343" actId="27636"/>
-          <ac:spMkLst>
-            <pc:docMk/>
-            <pc:sldMk cId="0" sldId="281"/>
-            <ac:spMk id="6" creationId="{EB8485EF-5B2E-B9FA-D743-D618D652D00C}"/>
-          </ac:spMkLst>
-        </pc:spChg>
-      </pc:sldChg>
-      <pc:sldChg chg="modSp mod">
-        <pc:chgData name="Mohammed Fasha" userId="cc64f42d-a1a6-4f08-b97b-0c37f877119f" providerId="ADAL" clId="{12C0646C-DE2C-4492-8B53-5F65EF722386}" dt="2025-03-17T09:15:21.712" v="168" actId="166"/>
-        <pc:sldMkLst>
-          <pc:docMk/>
-          <pc:sldMk cId="0" sldId="282"/>
-        </pc:sldMkLst>
-        <pc:spChg chg="mod">
-          <ac:chgData name="Mohammed Fasha" userId="cc64f42d-a1a6-4f08-b97b-0c37f877119f" providerId="ADAL" clId="{12C0646C-DE2C-4492-8B53-5F65EF722386}" dt="2025-03-17T09:15:12.700" v="166" actId="179"/>
-          <ac:spMkLst>
-            <pc:docMk/>
-            <pc:sldMk cId="0" sldId="282"/>
-            <ac:spMk id="7" creationId="{3951CDAE-FE5A-5CF3-E54D-996CD266DF38}"/>
-          </ac:spMkLst>
-        </pc:spChg>
-        <pc:picChg chg="mod ord">
-          <ac:chgData name="Mohammed Fasha" userId="cc64f42d-a1a6-4f08-b97b-0c37f877119f" providerId="ADAL" clId="{12C0646C-DE2C-4492-8B53-5F65EF722386}" dt="2025-03-17T09:15:21.712" v="168" actId="166"/>
-          <ac:picMkLst>
-            <pc:docMk/>
-            <pc:sldMk cId="0" sldId="282"/>
-            <ac:picMk id="5" creationId="{00000000-0000-0000-0000-000000000000}"/>
-          </ac:picMkLst>
-        </pc:picChg>
-      </pc:sldChg>
-      <pc:sldChg chg="del">
-        <pc:chgData name="Mohammed Fasha" userId="cc64f42d-a1a6-4f08-b97b-0c37f877119f" providerId="ADAL" clId="{12C0646C-DE2C-4492-8B53-5F65EF722386}" dt="2025-03-19T09:12:27.453" v="389" actId="2696"/>
-        <pc:sldMkLst>
-          <pc:docMk/>
-          <pc:sldMk cId="3590006600" sldId="287"/>
-        </pc:sldMkLst>
-      </pc:sldChg>
-      <pc:sldChg chg="del">
-        <pc:chgData name="Mohammed Fasha" userId="cc64f42d-a1a6-4f08-b97b-0c37f877119f" providerId="ADAL" clId="{12C0646C-DE2C-4492-8B53-5F65EF722386}" dt="2025-03-19T09:12:33.880" v="390" actId="2696"/>
-        <pc:sldMkLst>
-          <pc:docMk/>
-          <pc:sldMk cId="4191150406" sldId="289"/>
-        </pc:sldMkLst>
-      </pc:sldChg>
-      <pc:sldChg chg="modSp mod">
-        <pc:chgData name="Mohammed Fasha" userId="cc64f42d-a1a6-4f08-b97b-0c37f877119f" providerId="ADAL" clId="{12C0646C-DE2C-4492-8B53-5F65EF722386}" dt="2025-03-17T09:06:41.256" v="38" actId="20577"/>
-        <pc:sldMkLst>
-          <pc:docMk/>
-          <pc:sldMk cId="2822153299" sldId="296"/>
-        </pc:sldMkLst>
-      </pc:sldChg>
-      <pc:sldChg chg="modSp mod">
-        <pc:chgData name="Mohammed Fasha" userId="cc64f42d-a1a6-4f08-b97b-0c37f877119f" providerId="ADAL" clId="{12C0646C-DE2C-4492-8B53-5F65EF722386}" dt="2025-03-17T09:06:49.710" v="39" actId="6549"/>
-        <pc:sldMkLst>
-          <pc:docMk/>
-          <pc:sldMk cId="1461366896" sldId="297"/>
-        </pc:sldMkLst>
-      </pc:sldChg>
-      <pc:sldChg chg="modSp mod">
-        <pc:chgData name="Mohammed Fasha" userId="cc64f42d-a1a6-4f08-b97b-0c37f877119f" providerId="ADAL" clId="{12C0646C-DE2C-4492-8B53-5F65EF722386}" dt="2025-03-17T10:04:49.704" v="228" actId="20577"/>
-        <pc:sldMkLst>
-          <pc:docMk/>
-          <pc:sldMk cId="3053666628" sldId="303"/>
-        </pc:sldMkLst>
-      </pc:sldChg>
-      <pc:sldChg chg="ord">
-        <pc:chgData name="Mohammed Fasha" userId="cc64f42d-a1a6-4f08-b97b-0c37f877119f" providerId="ADAL" clId="{12C0646C-DE2C-4492-8B53-5F65EF722386}" dt="2025-03-17T09:08:22.365" v="98"/>
-        <pc:sldMkLst>
-          <pc:docMk/>
-          <pc:sldMk cId="3673227071" sldId="305"/>
-        </pc:sldMkLst>
-      </pc:sldChg>
-      <pc:sldChg chg="addSp delSp modSp new mod modClrScheme chgLayout">
-        <pc:chgData name="Mohammed Fasha" userId="cc64f42d-a1a6-4f08-b97b-0c37f877119f" providerId="ADAL" clId="{12C0646C-DE2C-4492-8B53-5F65EF722386}" dt="2025-03-17T09:07:44.327" v="80" actId="20577"/>
-        <pc:sldMkLst>
-          <pc:docMk/>
-          <pc:sldMk cId="41320333" sldId="306"/>
-        </pc:sldMkLst>
-      </pc:sldChg>
-      <pc:sldChg chg="addSp delSp modSp new mod modClrScheme chgLayout">
-        <pc:chgData name="Mohammed Fasha" userId="cc64f42d-a1a6-4f08-b97b-0c37f877119f" providerId="ADAL" clId="{12C0646C-DE2C-4492-8B53-5F65EF722386}" dt="2025-03-17T09:07:22.274" v="67" actId="20577"/>
-        <pc:sldMkLst>
-          <pc:docMk/>
-          <pc:sldMk cId="4041194208" sldId="307"/>
-        </pc:sldMkLst>
-      </pc:sldChg>
-      <pc:sldChg chg="addSp delSp modSp new mod modClrScheme chgLayout">
-        <pc:chgData name="Mohammed Fasha" userId="cc64f42d-a1a6-4f08-b97b-0c37f877119f" providerId="ADAL" clId="{12C0646C-DE2C-4492-8B53-5F65EF722386}" dt="2025-03-17T09:07:56.222" v="96" actId="20577"/>
-        <pc:sldMkLst>
-          <pc:docMk/>
-          <pc:sldMk cId="3844551123" sldId="308"/>
-        </pc:sldMkLst>
-      </pc:sldChg>
-      <pc:sldChg chg="modSp mod">
-        <pc:chgData name="Mohammed Fasha" userId="cc64f42d-a1a6-4f08-b97b-0c37f877119f" providerId="ADAL" clId="{12C0646C-DE2C-4492-8B53-5F65EF722386}" dt="2025-03-19T09:10:10.713" v="366" actId="207"/>
-        <pc:sldMkLst>
-          <pc:docMk/>
-          <pc:sldMk cId="22495289" sldId="315"/>
-        </pc:sldMkLst>
-      </pc:sldChg>
-      <pc:sldChg chg="addSp delSp modSp new mod modClrScheme chgLayout">
-        <pc:chgData name="Mohammed Fasha" userId="cc64f42d-a1a6-4f08-b97b-0c37f877119f" providerId="ADAL" clId="{12C0646C-DE2C-4492-8B53-5F65EF722386}" dt="2025-03-19T08:09:16.709" v="248" actId="20577"/>
-        <pc:sldMkLst>
-          <pc:docMk/>
-          <pc:sldMk cId="196329700" sldId="316"/>
-        </pc:sldMkLst>
-      </pc:sldChg>
-      <pc:sldChg chg="addSp delSp modSp new mod modClrScheme chgLayout">
-        <pc:chgData name="Mohammed Fasha" userId="cc64f42d-a1a6-4f08-b97b-0c37f877119f" providerId="ADAL" clId="{12C0646C-DE2C-4492-8B53-5F65EF722386}" dt="2025-03-19T08:09:58.074" v="276" actId="20577"/>
-        <pc:sldMkLst>
-          <pc:docMk/>
-          <pc:sldMk cId="3080687933" sldId="317"/>
-        </pc:sldMkLst>
-      </pc:sldChg>
-      <pc:sldChg chg="addSp delSp modSp new mod modClrScheme chgLayout">
-        <pc:chgData name="Mohammed Fasha" userId="cc64f42d-a1a6-4f08-b97b-0c37f877119f" providerId="ADAL" clId="{12C0646C-DE2C-4492-8B53-5F65EF722386}" dt="2025-03-19T09:01:59.435" v="330" actId="20577"/>
-        <pc:sldMkLst>
-          <pc:docMk/>
-          <pc:sldMk cId="3702164412" sldId="318"/>
-        </pc:sldMkLst>
-      </pc:sldChg>
-    </pc:docChg>
-  </pc:docChgLst>
-  <pc:docChgLst>
-    <pc:chgData name="Mohammed Fasha" userId="S::mohammed.fasha@uop.edu.jo::cc64f42d-a1a6-4f08-b97b-0c37f877119f" providerId="AD" clId="Web-{CFB52BA1-027E-4A5C-51C2-A494885CE8B6}"/>
-    <pc:docChg chg="addSld delSld modSld">
-      <pc:chgData name="Mohammed Fasha" userId="S::mohammed.fasha@uop.edu.jo::cc64f42d-a1a6-4f08-b97b-0c37f877119f" providerId="AD" clId="Web-{CFB52BA1-027E-4A5C-51C2-A494885CE8B6}" dt="2025-03-16T14:45:18.235" v="45" actId="1076"/>
-      <pc:docMkLst>
-        <pc:docMk/>
-      </pc:docMkLst>
-      <pc:sldChg chg="modSp">
-        <pc:chgData name="Mohammed Fasha" userId="S::mohammed.fasha@uop.edu.jo::cc64f42d-a1a6-4f08-b97b-0c37f877119f" providerId="AD" clId="Web-{CFB52BA1-027E-4A5C-51C2-A494885CE8B6}" dt="2025-03-16T14:45:05.391" v="43" actId="1076"/>
-        <pc:sldMkLst>
-          <pc:docMk/>
-          <pc:sldMk cId="0" sldId="269"/>
-        </pc:sldMkLst>
-      </pc:sldChg>
-      <pc:sldChg chg="modSp">
-        <pc:chgData name="Mohammed Fasha" userId="S::mohammed.fasha@uop.edu.jo::cc64f42d-a1a6-4f08-b97b-0c37f877119f" providerId="AD" clId="Web-{CFB52BA1-027E-4A5C-51C2-A494885CE8B6}" dt="2025-03-16T14:45:18.235" v="45" actId="1076"/>
-        <pc:sldMkLst>
-          <pc:docMk/>
-          <pc:sldMk cId="0" sldId="270"/>
-        </pc:sldMkLst>
-        <pc:picChg chg="mod">
-          <ac:chgData name="Mohammed Fasha" userId="S::mohammed.fasha@uop.edu.jo::cc64f42d-a1a6-4f08-b97b-0c37f877119f" providerId="AD" clId="Web-{CFB52BA1-027E-4A5C-51C2-A494885CE8B6}" dt="2025-03-16T14:45:18.235" v="45" actId="1076"/>
-          <ac:picMkLst>
-            <pc:docMk/>
-            <pc:sldMk cId="0" sldId="270"/>
-            <ac:picMk id="15" creationId="{4E22367B-B754-648E-0B22-AC55F28E1729}"/>
-          </ac:picMkLst>
-        </pc:picChg>
-      </pc:sldChg>
-      <pc:sldChg chg="modSp">
-        <pc:chgData name="Mohammed Fasha" userId="S::mohammed.fasha@uop.edu.jo::cc64f42d-a1a6-4f08-b97b-0c37f877119f" providerId="AD" clId="Web-{CFB52BA1-027E-4A5C-51C2-A494885CE8B6}" dt="2025-03-16T14:44:57.469" v="42" actId="20577"/>
-        <pc:sldMkLst>
-          <pc:docMk/>
-          <pc:sldMk cId="0" sldId="272"/>
-        </pc:sldMkLst>
-        <pc:spChg chg="mod">
-          <ac:chgData name="Mohammed Fasha" userId="S::mohammed.fasha@uop.edu.jo::cc64f42d-a1a6-4f08-b97b-0c37f877119f" providerId="AD" clId="Web-{CFB52BA1-027E-4A5C-51C2-A494885CE8B6}" dt="2025-03-16T14:44:57.469" v="42" actId="20577"/>
-          <ac:spMkLst>
-            <pc:docMk/>
-            <pc:sldMk cId="0" sldId="272"/>
-            <ac:spMk id="2" creationId="{00000000-0000-0000-0000-000000000000}"/>
-          </ac:spMkLst>
-        </pc:spChg>
-      </pc:sldChg>
-      <pc:sldChg chg="modSp">
-        <pc:chgData name="Mohammed Fasha" userId="S::mohammed.fasha@uop.edu.jo::cc64f42d-a1a6-4f08-b97b-0c37f877119f" providerId="AD" clId="Web-{CFB52BA1-027E-4A5C-51C2-A494885CE8B6}" dt="2025-03-16T14:44:48.500" v="41" actId="14100"/>
-        <pc:sldMkLst>
-          <pc:docMk/>
-          <pc:sldMk cId="0" sldId="274"/>
-        </pc:sldMkLst>
-        <pc:spChg chg="mod">
-          <ac:chgData name="Mohammed Fasha" userId="S::mohammed.fasha@uop.edu.jo::cc64f42d-a1a6-4f08-b97b-0c37f877119f" providerId="AD" clId="Web-{CFB52BA1-027E-4A5C-51C2-A494885CE8B6}" dt="2025-03-16T14:44:48.500" v="41" actId="14100"/>
-          <ac:spMkLst>
-            <pc:docMk/>
-            <pc:sldMk cId="0" sldId="274"/>
-            <ac:spMk id="7" creationId="{CF4277E2-2BAC-D76F-20C6-A50B542D2495}"/>
-          </ac:spMkLst>
-        </pc:spChg>
-      </pc:sldChg>
-      <pc:sldChg chg="addSp delSp modSp del">
-        <pc:chgData name="Mohammed Fasha" userId="S::mohammed.fasha@uop.edu.jo::cc64f42d-a1a6-4f08-b97b-0c37f877119f" providerId="AD" clId="Web-{CFB52BA1-027E-4A5C-51C2-A494885CE8B6}" dt="2025-03-16T14:44:02.201" v="36"/>
-        <pc:sldMkLst>
-          <pc:docMk/>
-          <pc:sldMk cId="3476611510" sldId="290"/>
-        </pc:sldMkLst>
-      </pc:sldChg>
-      <pc:sldChg chg="addSp delSp modSp new">
-        <pc:chgData name="Mohammed Fasha" userId="S::mohammed.fasha@uop.edu.jo::cc64f42d-a1a6-4f08-b97b-0c37f877119f" providerId="AD" clId="Web-{CFB52BA1-027E-4A5C-51C2-A494885CE8B6}" dt="2025-03-16T14:42:40.261" v="8" actId="20577"/>
-        <pc:sldMkLst>
-          <pc:docMk/>
-          <pc:sldMk cId="1663389758" sldId="302"/>
-        </pc:sldMkLst>
-      </pc:sldChg>
-      <pc:sldChg chg="addSp modSp new">
-        <pc:chgData name="Mohammed Fasha" userId="S::mohammed.fasha@uop.edu.jo::cc64f42d-a1a6-4f08-b97b-0c37f877119f" providerId="AD" clId="Web-{CFB52BA1-027E-4A5C-51C2-A494885CE8B6}" dt="2025-03-16T14:44:23.343" v="40" actId="1076"/>
-        <pc:sldMkLst>
-          <pc:docMk/>
-          <pc:sldMk cId="3053666628" sldId="303"/>
-        </pc:sldMkLst>
       </pc:sldChg>
     </pc:docChg>
   </pc:docChgLst>
@@ -3262,70 +3601,94 @@
     </pc:docChg>
   </pc:docChgLst>
   <pc:docChgLst>
-    <pc:chgData name="Mohammed Fasha" userId="S::mohammed.fasha@uop.edu.jo::cc64f42d-a1a6-4f08-b97b-0c37f877119f" providerId="AD" clId="Web-{3873209A-CB00-400D-D158-6330B83C4A7A}"/>
-    <pc:docChg chg="addSld delSld modSld">
-      <pc:chgData name="Mohammed Fasha" userId="S::mohammed.fasha@uop.edu.jo::cc64f42d-a1a6-4f08-b97b-0c37f877119f" providerId="AD" clId="Web-{3873209A-CB00-400D-D158-6330B83C4A7A}" dt="2025-03-19T03:11:02.319" v="274" actId="20577"/>
+    <pc:chgData name="Mohammed Fasha" userId="S::mohammed.fasha@uop.edu.jo::cc64f42d-a1a6-4f08-b97b-0c37f877119f" providerId="AD" clId="Web-{2F52505F-0676-E1F8-3A9C-C74E2F5553F9}"/>
+    <pc:docChg chg="addSld modSld">
+      <pc:chgData name="Mohammed Fasha" userId="S::mohammed.fasha@uop.edu.jo::cc64f42d-a1a6-4f08-b97b-0c37f877119f" providerId="AD" clId="Web-{2F52505F-0676-E1F8-3A9C-C74E2F5553F9}" dt="2025-03-23T06:07:25.672" v="25" actId="20577"/>
       <pc:docMkLst>
         <pc:docMk/>
       </pc:docMkLst>
       <pc:sldChg chg="modSp">
-        <pc:chgData name="Mohammed Fasha" userId="S::mohammed.fasha@uop.edu.jo::cc64f42d-a1a6-4f08-b97b-0c37f877119f" providerId="AD" clId="Web-{3873209A-CB00-400D-D158-6330B83C4A7A}" dt="2025-03-19T03:03:32.760" v="103" actId="14100"/>
+        <pc:chgData name="Mohammed Fasha" userId="S::mohammed.fasha@uop.edu.jo::cc64f42d-a1a6-4f08-b97b-0c37f877119f" providerId="AD" clId="Web-{2F52505F-0676-E1F8-3A9C-C74E2F5553F9}" dt="2025-03-23T06:05:34.685" v="4" actId="20577"/>
         <pc:sldMkLst>
           <pc:docMk/>
-          <pc:sldMk cId="0" sldId="278"/>
+          <pc:sldMk cId="1864506158" sldId="314"/>
         </pc:sldMkLst>
         <pc:spChg chg="mod">
-          <ac:chgData name="Mohammed Fasha" userId="S::mohammed.fasha@uop.edu.jo::cc64f42d-a1a6-4f08-b97b-0c37f877119f" providerId="AD" clId="Web-{3873209A-CB00-400D-D158-6330B83C4A7A}" dt="2025-03-19T03:03:32.760" v="103" actId="14100"/>
+          <ac:chgData name="Mohammed Fasha" userId="S::mohammed.fasha@uop.edu.jo::cc64f42d-a1a6-4f08-b97b-0c37f877119f" providerId="AD" clId="Web-{2F52505F-0676-E1F8-3A9C-C74E2F5553F9}" dt="2025-03-23T06:05:34.685" v="4" actId="20577"/>
           <ac:spMkLst>
             <pc:docMk/>
-            <pc:sldMk cId="0" sldId="278"/>
-            <ac:spMk id="2" creationId="{00000000-0000-0000-0000-000000000000}"/>
+            <pc:sldMk cId="1864506158" sldId="314"/>
+            <ac:spMk id="3" creationId="{4961BB54-A79B-91B6-2B3E-888FA20CC61F}"/>
           </ac:spMkLst>
         </pc:spChg>
-        <pc:picChg chg="mod">
-          <ac:chgData name="Mohammed Fasha" userId="S::mohammed.fasha@uop.edu.jo::cc64f42d-a1a6-4f08-b97b-0c37f877119f" providerId="AD" clId="Web-{3873209A-CB00-400D-D158-6330B83C4A7A}" dt="2025-03-19T03:03:17.822" v="100" actId="1076"/>
-          <ac:picMkLst>
-            <pc:docMk/>
-            <pc:sldMk cId="0" sldId="278"/>
-            <ac:picMk id="4" creationId="{00000000-0000-0000-0000-000000000000}"/>
-          </ac:picMkLst>
-        </pc:picChg>
-        <pc:picChg chg="mod">
-          <ac:chgData name="Mohammed Fasha" userId="S::mohammed.fasha@uop.edu.jo::cc64f42d-a1a6-4f08-b97b-0c37f877119f" providerId="AD" clId="Web-{3873209A-CB00-400D-D158-6330B83C4A7A}" dt="2025-03-19T03:03:23.119" v="101" actId="1076"/>
-          <ac:picMkLst>
-            <pc:docMk/>
-            <pc:sldMk cId="0" sldId="278"/>
-            <ac:picMk id="5" creationId="{00000000-0000-0000-0000-000000000000}"/>
-          </ac:picMkLst>
-        </pc:picChg>
       </pc:sldChg>
-      <pc:sldChg chg="addSp delSp modSp new">
-        <pc:chgData name="Mohammed Fasha" userId="S::mohammed.fasha@uop.edu.jo::cc64f42d-a1a6-4f08-b97b-0c37f877119f" providerId="AD" clId="Web-{3873209A-CB00-400D-D158-6330B83C4A7A}" dt="2025-03-19T03:11:02.319" v="274" actId="20577"/>
+      <pc:sldChg chg="modSp new">
+        <pc:chgData name="Mohammed Fasha" userId="S::mohammed.fasha@uop.edu.jo::cc64f42d-a1a6-4f08-b97b-0c37f877119f" providerId="AD" clId="Web-{2F52505F-0676-E1F8-3A9C-C74E2F5553F9}" dt="2025-03-23T06:06:23.139" v="13" actId="20577"/>
         <pc:sldMkLst>
           <pc:docMk/>
-          <pc:sldMk cId="441052949" sldId="309"/>
+          <pc:sldMk cId="3694445782" sldId="326"/>
         </pc:sldMkLst>
+        <pc:spChg chg="mod">
+          <ac:chgData name="Mohammed Fasha" userId="S::mohammed.fasha@uop.edu.jo::cc64f42d-a1a6-4f08-b97b-0c37f877119f" providerId="AD" clId="Web-{2F52505F-0676-E1F8-3A9C-C74E2F5553F9}" dt="2025-03-23T06:05:53.435" v="10" actId="20577"/>
+          <ac:spMkLst>
+            <pc:docMk/>
+            <pc:sldMk cId="3694445782" sldId="326"/>
+            <ac:spMk id="2" creationId="{76E77D81-B038-7FB5-2B90-061A90EBF23E}"/>
+          </ac:spMkLst>
+        </pc:spChg>
+        <pc:spChg chg="mod">
+          <ac:chgData name="Mohammed Fasha" userId="S::mohammed.fasha@uop.edu.jo::cc64f42d-a1a6-4f08-b97b-0c37f877119f" providerId="AD" clId="Web-{2F52505F-0676-E1F8-3A9C-C74E2F5553F9}" dt="2025-03-23T06:06:23.139" v="13" actId="20577"/>
+          <ac:spMkLst>
+            <pc:docMk/>
+            <pc:sldMk cId="3694445782" sldId="326"/>
+            <ac:spMk id="3" creationId="{A83CAC7D-42B8-C614-E399-7F41DD29BBE0}"/>
+          </ac:spMkLst>
+        </pc:spChg>
       </pc:sldChg>
-      <pc:sldChg chg="add del replId">
-        <pc:chgData name="Mohammed Fasha" userId="S::mohammed.fasha@uop.edu.jo::cc64f42d-a1a6-4f08-b97b-0c37f877119f" providerId="AD" clId="Web-{3873209A-CB00-400D-D158-6330B83C4A7A}" dt="2025-03-19T03:02:14.461" v="73"/>
+      <pc:sldChg chg="modSp new">
+        <pc:chgData name="Mohammed Fasha" userId="S::mohammed.fasha@uop.edu.jo::cc64f42d-a1a6-4f08-b97b-0c37f877119f" providerId="AD" clId="Web-{2F52505F-0676-E1F8-3A9C-C74E2F5553F9}" dt="2025-03-23T06:06:39.452" v="17" actId="20577"/>
         <pc:sldMkLst>
           <pc:docMk/>
-          <pc:sldMk cId="3859015806" sldId="310"/>
+          <pc:sldMk cId="659685489" sldId="327"/>
         </pc:sldMkLst>
+        <pc:spChg chg="mod">
+          <ac:chgData name="Mohammed Fasha" userId="S::mohammed.fasha@uop.edu.jo::cc64f42d-a1a6-4f08-b97b-0c37f877119f" providerId="AD" clId="Web-{2F52505F-0676-E1F8-3A9C-C74E2F5553F9}" dt="2025-03-23T06:06:39.452" v="17" actId="20577"/>
+          <ac:spMkLst>
+            <pc:docMk/>
+            <pc:sldMk cId="659685489" sldId="327"/>
+            <ac:spMk id="3" creationId="{2370F989-F40F-8A0B-AC42-50D0E7E07AEB}"/>
+          </ac:spMkLst>
+        </pc:spChg>
       </pc:sldChg>
-      <pc:sldChg chg="addSp delSp modSp add replId">
-        <pc:chgData name="Mohammed Fasha" userId="S::mohammed.fasha@uop.edu.jo::cc64f42d-a1a6-4f08-b97b-0c37f877119f" providerId="AD" clId="Web-{3873209A-CB00-400D-D158-6330B83C4A7A}" dt="2025-03-19T03:08:53.628" v="161" actId="20577"/>
+      <pc:sldChg chg="modSp new">
+        <pc:chgData name="Mohammed Fasha" userId="S::mohammed.fasha@uop.edu.jo::cc64f42d-a1a6-4f08-b97b-0c37f877119f" providerId="AD" clId="Web-{2F52505F-0676-E1F8-3A9C-C74E2F5553F9}" dt="2025-03-23T06:07:22.532" v="22" actId="20577"/>
         <pc:sldMkLst>
           <pc:docMk/>
-          <pc:sldMk cId="4115587381" sldId="311"/>
+          <pc:sldMk cId="4072578661" sldId="328"/>
         </pc:sldMkLst>
+        <pc:spChg chg="mod">
+          <ac:chgData name="Mohammed Fasha" userId="S::mohammed.fasha@uop.edu.jo::cc64f42d-a1a6-4f08-b97b-0c37f877119f" providerId="AD" clId="Web-{2F52505F-0676-E1F8-3A9C-C74E2F5553F9}" dt="2025-03-23T06:07:22.532" v="22" actId="20577"/>
+          <ac:spMkLst>
+            <pc:docMk/>
+            <pc:sldMk cId="4072578661" sldId="328"/>
+            <ac:spMk id="3" creationId="{3C3E019B-0F20-8E05-2053-6E145189E1FD}"/>
+          </ac:spMkLst>
+        </pc:spChg>
       </pc:sldChg>
-      <pc:sldChg chg="addSp delSp modSp new del">
-        <pc:chgData name="Mohammed Fasha" userId="S::mohammed.fasha@uop.edu.jo::cc64f42d-a1a6-4f08-b97b-0c37f877119f" providerId="AD" clId="Web-{3873209A-CB00-400D-D158-6330B83C4A7A}" dt="2025-03-19T03:07:33.079" v="142"/>
+      <pc:sldChg chg="modSp new">
+        <pc:chgData name="Mohammed Fasha" userId="S::mohammed.fasha@uop.edu.jo::cc64f42d-a1a6-4f08-b97b-0c37f877119f" providerId="AD" clId="Web-{2F52505F-0676-E1F8-3A9C-C74E2F5553F9}" dt="2025-03-23T06:07:25.672" v="25" actId="20577"/>
         <pc:sldMkLst>
           <pc:docMk/>
-          <pc:sldMk cId="1952534702" sldId="312"/>
+          <pc:sldMk cId="3366111495" sldId="329"/>
         </pc:sldMkLst>
+        <pc:spChg chg="mod">
+          <ac:chgData name="Mohammed Fasha" userId="S::mohammed.fasha@uop.edu.jo::cc64f42d-a1a6-4f08-b97b-0c37f877119f" providerId="AD" clId="Web-{2F52505F-0676-E1F8-3A9C-C74E2F5553F9}" dt="2025-03-23T06:07:25.672" v="25" actId="20577"/>
+          <ac:spMkLst>
+            <pc:docMk/>
+            <pc:sldMk cId="3366111495" sldId="329"/>
+            <ac:spMk id="3" creationId="{9D118BE8-48E4-84B1-F7A3-AE58B873B879}"/>
+          </ac:spMkLst>
+        </pc:spChg>
       </pc:sldChg>
     </pc:docChg>
   </pc:docChgLst>
@@ -3356,6 +3719,77 @@
           <pc:docMk/>
           <pc:sldMk cId="3673227071" sldId="305"/>
         </pc:sldMkLst>
+      </pc:sldChg>
+    </pc:docChg>
+  </pc:docChgLst>
+  <pc:docChgLst>
+    <pc:chgData name="Mohammed Fasha" userId="S::mohammed.fasha@uop.edu.jo::cc64f42d-a1a6-4f08-b97b-0c37f877119f" providerId="AD" clId="Web-{36B9E10C-9544-F05A-23A9-185BAFD9898D}"/>
+    <pc:docChg chg="addSld modSld">
+      <pc:chgData name="Mohammed Fasha" userId="S::mohammed.fasha@uop.edu.jo::cc64f42d-a1a6-4f08-b97b-0c37f877119f" providerId="AD" clId="Web-{36B9E10C-9544-F05A-23A9-185BAFD9898D}" dt="2025-03-23T12:04:32.957" v="76"/>
+      <pc:docMkLst>
+        <pc:docMk/>
+      </pc:docMkLst>
+      <pc:sldChg chg="addSp delSp modSp">
+        <pc:chgData name="Mohammed Fasha" userId="S::mohammed.fasha@uop.edu.jo::cc64f42d-a1a6-4f08-b97b-0c37f877119f" providerId="AD" clId="Web-{36B9E10C-9544-F05A-23A9-185BAFD9898D}" dt="2025-03-23T12:04:32.957" v="76"/>
+        <pc:sldMkLst>
+          <pc:docMk/>
+          <pc:sldMk cId="0" sldId="274"/>
+        </pc:sldMkLst>
+        <pc:picChg chg="add del mod">
+          <ac:chgData name="Mohammed Fasha" userId="S::mohammed.fasha@uop.edu.jo::cc64f42d-a1a6-4f08-b97b-0c37f877119f" providerId="AD" clId="Web-{36B9E10C-9544-F05A-23A9-185BAFD9898D}" dt="2025-03-23T12:04:30.175" v="75"/>
+          <ac:picMkLst>
+            <pc:docMk/>
+            <pc:sldMk cId="0" sldId="274"/>
+            <ac:picMk id="3" creationId="{3A2BDE6D-2370-007D-DFBC-E92DCE7454F3}"/>
+          </ac:picMkLst>
+        </pc:picChg>
+        <pc:picChg chg="add del">
+          <ac:chgData name="Mohammed Fasha" userId="S::mohammed.fasha@uop.edu.jo::cc64f42d-a1a6-4f08-b97b-0c37f877119f" providerId="AD" clId="Web-{36B9E10C-9544-F05A-23A9-185BAFD9898D}" dt="2025-03-23T12:04:32.957" v="76"/>
+          <ac:picMkLst>
+            <pc:docMk/>
+            <pc:sldMk cId="0" sldId="274"/>
+            <ac:picMk id="6" creationId="{00000000-0000-0000-0000-000000000000}"/>
+          </ac:picMkLst>
+        </pc:picChg>
+      </pc:sldChg>
+      <pc:sldChg chg="addSp modSp new">
+        <pc:chgData name="Mohammed Fasha" userId="S::mohammed.fasha@uop.edu.jo::cc64f42d-a1a6-4f08-b97b-0c37f877119f" providerId="AD" clId="Web-{36B9E10C-9544-F05A-23A9-185BAFD9898D}" dt="2025-03-23T12:02:36.938" v="60" actId="1076"/>
+        <pc:sldMkLst>
+          <pc:docMk/>
+          <pc:sldMk cId="2059959534" sldId="330"/>
+        </pc:sldMkLst>
+        <pc:spChg chg="mod">
+          <ac:chgData name="Mohammed Fasha" userId="S::mohammed.fasha@uop.edu.jo::cc64f42d-a1a6-4f08-b97b-0c37f877119f" providerId="AD" clId="Web-{36B9E10C-9544-F05A-23A9-185BAFD9898D}" dt="2025-03-23T12:01:21.983" v="40" actId="20577"/>
+          <ac:spMkLst>
+            <pc:docMk/>
+            <pc:sldMk cId="2059959534" sldId="330"/>
+            <ac:spMk id="3" creationId="{CAE29CE7-34A3-D84A-09F7-F1FE82DFE999}"/>
+          </ac:spMkLst>
+        </pc:spChg>
+        <pc:spChg chg="add mod">
+          <ac:chgData name="Mohammed Fasha" userId="S::mohammed.fasha@uop.edu.jo::cc64f42d-a1a6-4f08-b97b-0c37f877119f" providerId="AD" clId="Web-{36B9E10C-9544-F05A-23A9-185BAFD9898D}" dt="2025-03-23T12:02:36.938" v="60" actId="1076"/>
+          <ac:spMkLst>
+            <pc:docMk/>
+            <pc:sldMk cId="2059959534" sldId="330"/>
+            <ac:spMk id="6" creationId="{DF962A98-4E4C-ECF1-BFA0-EDDF016A1D0C}"/>
+          </ac:spMkLst>
+        </pc:spChg>
+        <pc:picChg chg="add mod">
+          <ac:chgData name="Mohammed Fasha" userId="S::mohammed.fasha@uop.edu.jo::cc64f42d-a1a6-4f08-b97b-0c37f877119f" providerId="AD" clId="Web-{36B9E10C-9544-F05A-23A9-185BAFD9898D}" dt="2025-03-23T12:01:27.639" v="41" actId="1076"/>
+          <ac:picMkLst>
+            <pc:docMk/>
+            <pc:sldMk cId="2059959534" sldId="330"/>
+            <ac:picMk id="4" creationId="{78519047-ADEA-92C2-247C-84D5B7034606}"/>
+          </ac:picMkLst>
+        </pc:picChg>
+        <pc:picChg chg="add mod">
+          <ac:chgData name="Mohammed Fasha" userId="S::mohammed.fasha@uop.edu.jo::cc64f42d-a1a6-4f08-b97b-0c37f877119f" providerId="AD" clId="Web-{36B9E10C-9544-F05A-23A9-185BAFD9898D}" dt="2025-03-23T12:01:45.280" v="46" actId="1076"/>
+          <ac:picMkLst>
+            <pc:docMk/>
+            <pc:sldMk cId="2059959534" sldId="330"/>
+            <ac:picMk id="5" creationId="{8F67E074-5434-08BD-8BD1-BAAB11107FC6}"/>
+          </ac:picMkLst>
+        </pc:picChg>
       </pc:sldChg>
     </pc:docChg>
   </pc:docChgLst>
@@ -12814,12 +13248,12 @@
         <p:spPr>
           <a:xfrm>
             <a:off x="284086" y="1712750"/>
-            <a:ext cx="7981731" cy="4957323"/>
+            <a:ext cx="5682245" cy="4957323"/>
           </a:xfrm>
         </p:spPr>
         <p:txBody>
           <a:bodyPr vert="horz" lIns="91440" tIns="45720" rIns="91440" bIns="45720" rtlCol="0" anchor="t">
-            <a:normAutofit fontScale="85000" lnSpcReduction="20000"/>
+            <a:normAutofit/>
           </a:bodyPr>
           <a:lstStyle/>
           <a:p>
@@ -12950,102 +13384,13 @@
                 <a:tab pos="241300" algn="l"/>
               </a:tabLst>
             </a:pPr>
-            <a:r>
-              <a:rPr lang="en-US" b="1" dirty="0">
-                <a:ea typeface="+mn-lt"/>
-                <a:cs typeface="+mn-lt"/>
-              </a:rPr>
-              <a:t>Key Concepts</a:t>
-            </a:r>
             <a:endParaRPr lang="en-US" b="1" dirty="0">
-              <a:ea typeface="Calibri" panose="020F0502020204030204"/>
-              <a:cs typeface="Calibri" panose="020F0502020204030204"/>
+              <a:solidFill>
+                <a:srgbClr val="000000"/>
+              </a:solidFill>
+              <a:ea typeface="Calibri"/>
+              <a:cs typeface="Calibri"/>
             </a:endParaRPr>
-          </a:p>
-          <a:p>
-            <a:pPr>
-              <a:buFont typeface="Arial"/>
-              <a:buChar char="•"/>
-              <a:tabLst>
-                <a:tab pos="241300" algn="l"/>
-              </a:tabLst>
-            </a:pPr>
-            <a:r>
-              <a:rPr lang="en-US" dirty="0">
-                <a:ea typeface="+mn-lt"/>
-                <a:cs typeface="+mn-lt"/>
-              </a:rPr>
-              <a:t>Row Key: Unique identifier for each row (like a primary key).</a:t>
-            </a:r>
-            <a:endParaRPr lang="en-US" dirty="0"/>
-          </a:p>
-          <a:p>
-            <a:pPr>
-              <a:buFont typeface="Arial"/>
-              <a:buChar char="•"/>
-              <a:tabLst>
-                <a:tab pos="241300" algn="l"/>
-              </a:tabLst>
-            </a:pPr>
-            <a:r>
-              <a:rPr lang="en-US" dirty="0">
-                <a:ea typeface="+mn-lt"/>
-                <a:cs typeface="+mn-lt"/>
-              </a:rPr>
-              <a:t>Column Family: Logical group of columns stored together on disk.</a:t>
-            </a:r>
-            <a:endParaRPr lang="en-US" dirty="0"/>
-          </a:p>
-          <a:p>
-            <a:pPr>
-              <a:buFont typeface="Arial"/>
-              <a:buChar char="•"/>
-              <a:tabLst>
-                <a:tab pos="241300" algn="l"/>
-              </a:tabLst>
-            </a:pPr>
-            <a:r>
-              <a:rPr lang="en-US" dirty="0">
-                <a:ea typeface="+mn-lt"/>
-                <a:cs typeface="+mn-lt"/>
-              </a:rPr>
-              <a:t>Column Qualifier: Actual field name inside a column family.</a:t>
-            </a:r>
-            <a:endParaRPr lang="en-US" dirty="0"/>
-          </a:p>
-          <a:p>
-            <a:pPr>
-              <a:buFont typeface="Arial"/>
-              <a:buChar char="•"/>
-              <a:tabLst>
-                <a:tab pos="241300" algn="l"/>
-              </a:tabLst>
-            </a:pPr>
-            <a:r>
-              <a:rPr lang="en-US" dirty="0">
-                <a:ea typeface="+mn-lt"/>
-                <a:cs typeface="+mn-lt"/>
-              </a:rPr>
-              <a:t>Cell: Combination of Row Key + Column Family + Qualifier + Timestamp → Value.</a:t>
-            </a:r>
-            <a:endParaRPr lang="en-US" dirty="0"/>
-          </a:p>
-          <a:p>
-            <a:pPr>
-              <a:buFont typeface="Arial"/>
-              <a:buChar char="•"/>
-              <a:tabLst>
-                <a:tab pos="241300" algn="l"/>
-              </a:tabLst>
-            </a:pPr>
-            <a:r>
-              <a:rPr lang="en-US" dirty="0">
-                <a:ea typeface="+mn-lt"/>
-                <a:cs typeface="+mn-lt"/>
-              </a:rPr>
-              <a:t>Timestamp: Each cell value is versioned by time.</a:t>
-            </a:r>
-            <a:endParaRPr lang="en-US" dirty="0"/>
           </a:p>
           <a:p>
             <a:pPr marL="241300" marR="447675" indent="-229235">
@@ -13077,312 +13422,10 @@
                 <a:tab pos="241300" algn="l"/>
               </a:tabLst>
             </a:pPr>
-            <a:r>
-              <a:rPr lang="en-US" sz="2000" b="1" spc="-10" dirty="0">
-                <a:latin typeface="Calibri"/>
-                <a:cs typeface="Calibri"/>
-              </a:rPr>
-              <a:t>Architecture</a:t>
-            </a:r>
-            <a:r>
-              <a:rPr lang="en-US" sz="2000" spc="-10" dirty="0">
-                <a:latin typeface="Calibri"/>
-                <a:cs typeface="Calibri"/>
-              </a:rPr>
-              <a:t>:</a:t>
-            </a:r>
-            <a:endParaRPr lang="en-US" dirty="0">
-              <a:latin typeface="Calibri"/>
-              <a:cs typeface="Calibri"/>
-            </a:endParaRPr>
-          </a:p>
-          <a:p>
-            <a:pPr marL="355600" indent="-342900">
-              <a:lnSpc>
-                <a:spcPct val="100000"/>
-              </a:lnSpc>
-              <a:spcBef>
-                <a:spcPts val="735"/>
-              </a:spcBef>
-              <a:tabLst>
-                <a:tab pos="241300" algn="l"/>
-              </a:tabLst>
-            </a:pPr>
-            <a:r>
-              <a:rPr lang="en-US" b="1" dirty="0" err="1">
-                <a:latin typeface="Calibri"/>
-                <a:cs typeface="Calibri"/>
-              </a:rPr>
-              <a:t>HMaster</a:t>
-            </a:r>
-            <a:r>
-              <a:rPr lang="en-US" dirty="0">
-                <a:latin typeface="Calibri"/>
-                <a:cs typeface="Calibri"/>
-              </a:rPr>
-              <a:t>:</a:t>
-            </a:r>
-            <a:r>
-              <a:rPr lang="en-US" spc="-60" dirty="0">
-                <a:latin typeface="Calibri"/>
-                <a:cs typeface="Calibri"/>
-              </a:rPr>
-              <a:t> </a:t>
-            </a:r>
-            <a:r>
-              <a:rPr lang="en-US" dirty="0">
-                <a:latin typeface="Calibri"/>
-                <a:cs typeface="Calibri"/>
-              </a:rPr>
-              <a:t>Manages</a:t>
-            </a:r>
-            <a:r>
-              <a:rPr lang="en-US" spc="-60" dirty="0">
-                <a:latin typeface="Calibri"/>
-                <a:cs typeface="Calibri"/>
-              </a:rPr>
-              <a:t> </a:t>
-            </a:r>
-            <a:r>
-              <a:rPr lang="en-US" dirty="0">
-                <a:latin typeface="Calibri"/>
-                <a:cs typeface="Calibri"/>
-              </a:rPr>
-              <a:t>the</a:t>
-            </a:r>
-            <a:r>
-              <a:rPr lang="en-US" spc="-45" dirty="0">
-                <a:latin typeface="Calibri"/>
-                <a:cs typeface="Calibri"/>
-              </a:rPr>
-              <a:t> </a:t>
-            </a:r>
-            <a:r>
-              <a:rPr lang="en-US" spc="-10" dirty="0">
-                <a:latin typeface="Calibri"/>
-                <a:cs typeface="Calibri"/>
-              </a:rPr>
-              <a:t>cluster.</a:t>
-            </a:r>
-            <a:endParaRPr lang="en-US" dirty="0">
-              <a:latin typeface="Calibri"/>
+            <a:endParaRPr lang="en-US" spc="-10" dirty="0">
               <a:ea typeface="Calibri"/>
               <a:cs typeface="Calibri"/>
             </a:endParaRPr>
-          </a:p>
-          <a:p>
-            <a:pPr marL="355600" indent="-342900">
-              <a:lnSpc>
-                <a:spcPct val="100000"/>
-              </a:lnSpc>
-              <a:spcBef>
-                <a:spcPts val="735"/>
-              </a:spcBef>
-              <a:tabLst>
-                <a:tab pos="241300" algn="l"/>
-              </a:tabLst>
-            </a:pPr>
-            <a:r>
-              <a:rPr lang="en-US" b="1" dirty="0" err="1">
-                <a:latin typeface="Calibri"/>
-                <a:cs typeface="Calibri"/>
-              </a:rPr>
-              <a:t>RegionServer</a:t>
-            </a:r>
-            <a:r>
-              <a:rPr lang="en-US" dirty="0">
-                <a:latin typeface="Calibri"/>
-                <a:cs typeface="Calibri"/>
-              </a:rPr>
-              <a:t>:</a:t>
-            </a:r>
-            <a:r>
-              <a:rPr lang="en-US" spc="-85" dirty="0">
-                <a:latin typeface="Calibri"/>
-                <a:cs typeface="Calibri"/>
-              </a:rPr>
-              <a:t> </a:t>
-            </a:r>
-            <a:r>
-              <a:rPr lang="en-US" dirty="0">
-                <a:latin typeface="Calibri"/>
-                <a:cs typeface="Calibri"/>
-              </a:rPr>
-              <a:t>Handles</a:t>
-            </a:r>
-            <a:r>
-              <a:rPr lang="en-US" spc="-50" dirty="0">
-                <a:latin typeface="Calibri"/>
-                <a:cs typeface="Calibri"/>
-              </a:rPr>
-              <a:t> </a:t>
-            </a:r>
-            <a:r>
-              <a:rPr lang="en-US" spc="-10" dirty="0">
-                <a:latin typeface="Calibri"/>
-                <a:cs typeface="Calibri"/>
-              </a:rPr>
-              <a:t>read/write</a:t>
-            </a:r>
-            <a:r>
-              <a:rPr lang="en-US" spc="-40" dirty="0">
-                <a:latin typeface="Calibri"/>
-                <a:cs typeface="Calibri"/>
-              </a:rPr>
-              <a:t> </a:t>
-            </a:r>
-            <a:r>
-              <a:rPr lang="en-US" dirty="0">
-                <a:latin typeface="Calibri"/>
-                <a:cs typeface="Calibri"/>
-              </a:rPr>
-              <a:t>requests</a:t>
-            </a:r>
-            <a:r>
-              <a:rPr lang="en-US" spc="-65" dirty="0">
-                <a:latin typeface="Calibri"/>
-                <a:cs typeface="Calibri"/>
-              </a:rPr>
-              <a:t> </a:t>
-            </a:r>
-            <a:r>
-              <a:rPr lang="en-US" dirty="0">
-                <a:latin typeface="Calibri"/>
-                <a:cs typeface="Calibri"/>
-              </a:rPr>
-              <a:t>for</a:t>
-            </a:r>
-            <a:r>
-              <a:rPr lang="en-US" spc="-65" dirty="0">
-                <a:latin typeface="Calibri"/>
-                <a:cs typeface="Calibri"/>
-              </a:rPr>
-              <a:t> </a:t>
-            </a:r>
-            <a:r>
-              <a:rPr lang="en-US" dirty="0">
-                <a:latin typeface="Calibri"/>
-                <a:cs typeface="Calibri"/>
-              </a:rPr>
-              <a:t>regions</a:t>
-            </a:r>
-            <a:r>
-              <a:rPr lang="en-US" spc="-55" dirty="0">
-                <a:latin typeface="Calibri"/>
-                <a:cs typeface="Calibri"/>
-              </a:rPr>
-              <a:t> </a:t>
-            </a:r>
-            <a:r>
-              <a:rPr lang="en-US" dirty="0">
-                <a:latin typeface="Calibri"/>
-                <a:cs typeface="Calibri"/>
-              </a:rPr>
-              <a:t>of</a:t>
-            </a:r>
-            <a:r>
-              <a:rPr lang="en-US" spc="-55" dirty="0">
-                <a:latin typeface="Calibri"/>
-                <a:cs typeface="Calibri"/>
-              </a:rPr>
-              <a:t> </a:t>
-            </a:r>
-            <a:r>
-              <a:rPr lang="en-US" spc="-25" dirty="0">
-                <a:latin typeface="Calibri"/>
-                <a:cs typeface="Calibri"/>
-              </a:rPr>
-              <a:t>the </a:t>
-            </a:r>
-            <a:r>
-              <a:rPr lang="en-US" spc="-10" dirty="0">
-                <a:latin typeface="Calibri"/>
-                <a:cs typeface="Calibri"/>
-              </a:rPr>
-              <a:t>database.</a:t>
-            </a:r>
-            <a:endParaRPr lang="en-US" dirty="0">
-              <a:latin typeface="Calibri"/>
-              <a:ea typeface="Calibri"/>
-              <a:cs typeface="Calibri"/>
-            </a:endParaRPr>
-          </a:p>
-          <a:p>
-            <a:pPr marL="355600" indent="-342900">
-              <a:lnSpc>
-                <a:spcPct val="100000"/>
-              </a:lnSpc>
-              <a:spcBef>
-                <a:spcPts val="735"/>
-              </a:spcBef>
-              <a:tabLst>
-                <a:tab pos="241300" algn="l"/>
-              </a:tabLst>
-            </a:pPr>
-            <a:r>
-              <a:rPr lang="en-US" b="1" spc="-10" dirty="0" err="1">
-                <a:latin typeface="Calibri"/>
-                <a:cs typeface="Calibri"/>
-              </a:rPr>
-              <a:t>ZooKeeper</a:t>
-            </a:r>
-            <a:r>
-              <a:rPr lang="en-US" spc="-10" dirty="0">
-                <a:latin typeface="Calibri"/>
-                <a:cs typeface="Calibri"/>
-              </a:rPr>
-              <a:t>:</a:t>
-            </a:r>
-            <a:r>
-              <a:rPr lang="en-US" spc="-95" dirty="0">
-                <a:latin typeface="Calibri"/>
-                <a:cs typeface="Calibri"/>
-              </a:rPr>
-              <a:t> </a:t>
-            </a:r>
-            <a:r>
-              <a:rPr lang="en-US" dirty="0">
-                <a:latin typeface="Calibri"/>
-                <a:cs typeface="Calibri"/>
-              </a:rPr>
-              <a:t>Manages</a:t>
-            </a:r>
-            <a:r>
-              <a:rPr lang="en-US" spc="-85" dirty="0">
-                <a:latin typeface="Calibri"/>
-                <a:cs typeface="Calibri"/>
-              </a:rPr>
-              <a:t> </a:t>
-            </a:r>
-            <a:r>
-              <a:rPr lang="en-US" dirty="0">
-                <a:latin typeface="Calibri"/>
-                <a:cs typeface="Calibri"/>
-              </a:rPr>
-              <a:t>distributed</a:t>
-            </a:r>
-            <a:r>
-              <a:rPr lang="en-US" spc="-60" dirty="0">
-                <a:latin typeface="Calibri"/>
-                <a:cs typeface="Calibri"/>
-              </a:rPr>
-              <a:t> </a:t>
-            </a:r>
-            <a:r>
-              <a:rPr lang="en-US" spc="-10" dirty="0">
-                <a:latin typeface="Calibri"/>
-                <a:cs typeface="Calibri"/>
-              </a:rPr>
-              <a:t>coordination.</a:t>
-            </a:r>
-            <a:endParaRPr lang="en-US">
-              <a:latin typeface="Calibri"/>
-              <a:ea typeface="Calibri"/>
-              <a:cs typeface="Calibri"/>
-            </a:endParaRPr>
-          </a:p>
-          <a:p>
-            <a:endParaRPr lang="en-US"/>
           </a:p>
         </p:txBody>
       </p:sp>
@@ -13523,6 +13566,137 @@
           </a:p>
         </p:txBody>
       </p:sp>
+      <p:sp>
+        <p:nvSpPr>
+          <p:cNvPr id="8" name="TextBox 7">
+            <a:extLst>
+              <a:ext uri="{FF2B5EF4-FFF2-40B4-BE49-F238E27FC236}">
+                <a16:creationId xmlns:a16="http://schemas.microsoft.com/office/drawing/2014/main" id="{98B7FB4A-DB0E-01C4-3C0E-032767DA24F4}"/>
+              </a:ext>
+            </a:extLst>
+          </p:cNvPr>
+          <p:cNvSpPr txBox="1"/>
+          <p:nvPr/>
+        </p:nvSpPr>
+        <p:spPr>
+          <a:xfrm>
+            <a:off x="287268" y="4785091"/>
+            <a:ext cx="7261252" cy="1241365"/>
+          </a:xfrm>
+          <a:prstGeom prst="rect">
+            <a:avLst/>
+          </a:prstGeom>
+          <a:noFill/>
+        </p:spPr>
+        <p:txBody>
+          <a:bodyPr rot="0" spcFirstLastPara="0" vertOverflow="overflow" horzOverflow="overflow" vert="horz" wrap="square" lIns="91440" tIns="45720" rIns="91440" bIns="45720" numCol="1" spcCol="0" rtlCol="0" fromWordArt="0" anchor="t" anchorCtr="0" forceAA="0" compatLnSpc="1">
+            <a:prstTxWarp prst="textNoShape">
+              <a:avLst/>
+            </a:prstTxWarp>
+            <a:spAutoFit/>
+          </a:bodyPr>
+          <a:lstStyle/>
+          <a:p>
+            <a:pPr marL="12700">
+              <a:lnSpc>
+                <a:spcPts val="1725"/>
+              </a:lnSpc>
+            </a:pPr>
+            <a:r>
+              <a:rPr lang="en-US" sz="1400" b="1" dirty="0">
+                <a:ea typeface="Calibri" panose="020F0502020204030204"/>
+                <a:cs typeface="Arial"/>
+              </a:rPr>
+              <a:t>Apache HBase Architecture</a:t>
+            </a:r>
+          </a:p>
+          <a:p>
+            <a:pPr marL="355600" indent="-342900">
+              <a:lnSpc>
+                <a:spcPts val="1725"/>
+              </a:lnSpc>
+              <a:buFont typeface=""/>
+              <a:buChar char="•"/>
+            </a:pPr>
+            <a:r>
+              <a:rPr lang="en-US" sz="1400" b="1" dirty="0" err="1">
+                <a:cs typeface="Arial"/>
+              </a:rPr>
+              <a:t>HMaster</a:t>
+            </a:r>
+            <a:r>
+              <a:rPr lang="en-US" sz="1400" dirty="0">
+                <a:cs typeface="Arial"/>
+              </a:rPr>
+              <a:t>: Manages the cluster.​</a:t>
+            </a:r>
+            <a:endParaRPr lang="en-US" dirty="0">
+              <a:ea typeface="Calibri"/>
+              <a:cs typeface="Calibri"/>
+            </a:endParaRPr>
+          </a:p>
+          <a:p>
+            <a:pPr marL="355600" indent="-342900">
+              <a:lnSpc>
+                <a:spcPts val="1725"/>
+              </a:lnSpc>
+              <a:buFont typeface=""/>
+              <a:buChar char="•"/>
+            </a:pPr>
+            <a:r>
+              <a:rPr lang="en-US" sz="1400" b="1" dirty="0" err="1">
+                <a:cs typeface="Arial"/>
+              </a:rPr>
+              <a:t>RegionServer</a:t>
+            </a:r>
+            <a:r>
+              <a:rPr lang="en-US" sz="1400" dirty="0">
+                <a:cs typeface="Arial"/>
+              </a:rPr>
+              <a:t>: Handles read/write requests for regions of the database.​</a:t>
+            </a:r>
+            <a:endParaRPr lang="en-US" sz="1400" dirty="0">
+              <a:ea typeface="Calibri"/>
+              <a:cs typeface="Arial"/>
+            </a:endParaRPr>
+          </a:p>
+          <a:p>
+            <a:pPr marL="355600" indent="-342900">
+              <a:lnSpc>
+                <a:spcPts val="1725"/>
+              </a:lnSpc>
+              <a:buFont typeface=""/>
+              <a:buChar char="•"/>
+            </a:pPr>
+            <a:r>
+              <a:rPr lang="en-US" sz="1400" b="1" dirty="0" err="1">
+                <a:cs typeface="Arial"/>
+              </a:rPr>
+              <a:t>ZooKeeper</a:t>
+            </a:r>
+            <a:r>
+              <a:rPr lang="en-US" sz="1400" dirty="0">
+                <a:cs typeface="Arial"/>
+              </a:rPr>
+              <a:t>: Manages distributed coordination.​</a:t>
+            </a:r>
+            <a:endParaRPr lang="en-US" sz="1400" dirty="0">
+              <a:ea typeface="Calibri"/>
+              <a:cs typeface="Arial"/>
+            </a:endParaRPr>
+          </a:p>
+          <a:p>
+            <a:pPr marL="228600" indent="-228600">
+              <a:buFont typeface=""/>
+              <a:buChar char="•"/>
+            </a:pPr>
+            <a:endParaRPr lang="en-US">
+              <a:latin typeface="Arial"/>
+              <a:cs typeface="Arial"/>
+            </a:endParaRPr>
+          </a:p>
+        </p:txBody>
+      </p:sp>
     </p:spTree>
   </p:cSld>
   <p:clrMapOvr>
@@ -13567,7 +13741,7 @@
         <p:spPr>
           <a:xfrm>
             <a:off x="284085" y="797523"/>
-            <a:ext cx="5938017" cy="748208"/>
+            <a:ext cx="11002281" cy="748208"/>
           </a:xfrm>
         </p:spPr>
         <p:txBody>
@@ -13602,7 +13776,7 @@
         <p:spPr>
           <a:xfrm>
             <a:off x="284085" y="1712750"/>
-            <a:ext cx="5938016" cy="1828403"/>
+            <a:ext cx="11002281" cy="1828403"/>
           </a:xfrm>
           <a:prstGeom prst="rect">
             <a:avLst/>
@@ -13610,7 +13784,7 @@
         </p:spPr>
         <p:txBody>
           <a:bodyPr vert="horz" lIns="91440" tIns="45720" rIns="91440" bIns="45720" rtlCol="0" anchor="t">
-            <a:normAutofit fontScale="85000" lnSpcReduction="20000"/>
+            <a:normAutofit/>
           </a:bodyPr>
           <a:lstStyle>
             <a:lvl1pPr marL="228600" indent="-228600" algn="l" defTabSz="914400" rtl="0" eaLnBrk="1" latinLnBrk="0" hangingPunct="1">
@@ -13865,35 +14039,6 @@
           </a:p>
         </p:txBody>
       </p:sp>
-      <p:pic>
-        <p:nvPicPr>
-          <p:cNvPr id="7" name="Content Placeholder 6" descr="A screenshot of a computer&#10;&#10;AI-generated content may be incorrect.">
-            <a:extLst>
-              <a:ext uri="{FF2B5EF4-FFF2-40B4-BE49-F238E27FC236}">
-                <a16:creationId xmlns:a16="http://schemas.microsoft.com/office/drawing/2014/main" id="{3309D882-20A5-56F6-889C-7DC7D2DFDA86}"/>
-              </a:ext>
-            </a:extLst>
-          </p:cNvPr>
-          <p:cNvPicPr>
-            <a:picLocks noGrp="1" noChangeAspect="1"/>
-          </p:cNvPicPr>
-          <p:nvPr>
-            <p:ph idx="1"/>
-          </p:nvPr>
-        </p:nvPicPr>
-        <p:blipFill>
-          <a:blip r:embed="rId2"/>
-          <a:stretch>
-            <a:fillRect/>
-          </a:stretch>
-        </p:blipFill>
-        <p:spPr>
-          <a:xfrm>
-            <a:off x="6303211" y="795653"/>
-            <a:ext cx="5215127" cy="5989056"/>
-          </a:xfrm>
-        </p:spPr>
-      </p:pic>
       <p:graphicFrame>
         <p:nvGraphicFramePr>
           <p:cNvPr id="13" name="Table 12">
@@ -14107,14 +14252,14 @@
           <p:nvPr>
             <p:extLst>
               <p:ext uri="{D42A27DB-BD31-4B8C-83A1-F6EECF244321}">
-                <p14:modId xmlns:p14="http://schemas.microsoft.com/office/powerpoint/2010/main" val="894819806"/>
+                <p14:modId xmlns:p14="http://schemas.microsoft.com/office/powerpoint/2010/main" val="977089729"/>
               </p:ext>
             </p:extLst>
           </p:nvPr>
         </p:nvGraphicFramePr>
         <p:xfrm>
           <a:off x="217946" y="3885013"/>
-          <a:ext cx="6009619" cy="1371600"/>
+          <a:ext cx="9730040" cy="1371600"/>
         </p:xfrm>
         <a:graphic>
           <a:graphicData uri="http://schemas.openxmlformats.org/drawingml/2006/table">
@@ -14123,14 +14268,14 @@
                 <a:tableStyleId>{8799B23B-EC83-4686-B30A-512413B5E67A}</a:tableStyleId>
               </a:tblPr>
               <a:tblGrid>
-                <a:gridCol w="3634426">
+                <a:gridCol w="3914588">
                   <a:extLst>
                     <a:ext uri="{9D8B030D-6E8A-4147-A177-3AD203B41FA5}">
                       <a16:colId xmlns:a16="http://schemas.microsoft.com/office/drawing/2014/main" val="2529012356"/>
                     </a:ext>
                   </a:extLst>
                 </a:gridCol>
-                <a:gridCol w="2375193">
+                <a:gridCol w="5815452">
                   <a:extLst>
                     <a:ext uri="{9D8B030D-6E8A-4147-A177-3AD203B41FA5}">
                       <a16:colId xmlns:a16="http://schemas.microsoft.com/office/drawing/2014/main" val="2118937829"/>
@@ -14173,7 +14318,7 @@
                         <a:t>'</a:t>
                       </a:r>
                       <a:r>
-                        <a:rPr lang="en-US" sz="1200" u="none" strike="noStrike" noProof="0" dirty="0" err="1">
+                        <a:rPr lang="en-US" sz="1200" u="none" strike="noStrike" noProof="0" err="1">
                           <a:solidFill>
                             <a:srgbClr val="FF0000"/>
                           </a:solidFill>
@@ -14181,12 +14326,28 @@
                         <a:t>personal</a:t>
                       </a:r>
                       <a:r>
-                        <a:rPr lang="en-US" sz="1200" u="none" strike="noStrike" noProof="0" dirty="0" err="1">
+                        <a:rPr lang="en-US" sz="1200" u="none" strike="noStrike" noProof="0" err="1">
                           <a:solidFill>
                             <a:srgbClr val="000000"/>
                           </a:solidFill>
                         </a:rPr>
-                        <a:t>:name</a:t>
+                        <a:t>:</a:t>
+                      </a:r>
+                      <a:r>
+                        <a:rPr lang="en-US" sz="1200" u="none" strike="noStrike" noProof="0" err="1">
+                          <a:solidFill>
+                            <a:srgbClr val="0070C0"/>
+                          </a:solidFill>
+                        </a:rPr>
+                        <a:t>name</a:t>
+                      </a:r>
+                      <a:r>
+                        <a:rPr lang="en-US" sz="1200" u="none" strike="noStrike" noProof="0" dirty="0">
+                          <a:solidFill>
+                            <a:srgbClr val="0070C0"/>
+                          </a:solidFill>
+                        </a:rPr>
+                        <a:t>'</a:t>
                       </a:r>
                       <a:r>
                         <a:rPr lang="en-US" sz="1200" u="none" strike="noStrike" noProof="0" dirty="0">
@@ -14194,7 +14355,7 @@
                             <a:srgbClr val="000000"/>
                           </a:solidFill>
                         </a:rPr>
-                        <a:t>', 'Alice'</a:t>
+                        <a:t>, 'Alice'</a:t>
                       </a:r>
                     </a:p>
                   </a:txBody>
@@ -14218,7 +14379,7 @@
                         <a:buNone/>
                       </a:pPr>
                       <a:r>
-                        <a:rPr lang="en-US" sz="1200" u="none" strike="noStrike" noProof="0" dirty="0">
+                        <a:rPr lang="en-US" sz="1200" b="0" u="none" strike="noStrike" noProof="0" dirty="0">
                           <a:solidFill>
                             <a:srgbClr val="000000"/>
                           </a:solidFill>
@@ -14268,7 +14429,7 @@
                         <a:t>put 'employees', 'emp2', </a:t>
                       </a:r>
                       <a:r>
-                        <a:rPr lang="en-US" sz="1200" u="none" strike="noStrike" noProof="0" dirty="0">
+                        <a:rPr lang="en-US" sz="1200" b="1" u="none" strike="noStrike" noProof="0" dirty="0">
                           <a:solidFill>
                             <a:srgbClr val="FF0000"/>
                           </a:solidFill>
@@ -14276,7 +14437,7 @@
                         <a:t>'</a:t>
                       </a:r>
                       <a:r>
-                        <a:rPr lang="en-US" sz="1200" u="none" strike="noStrike" noProof="0" dirty="0" err="1">
+                        <a:rPr lang="en-US" sz="1200" b="1" u="none" strike="noStrike" noProof="0" err="1">
                           <a:solidFill>
                             <a:srgbClr val="FF0000"/>
                           </a:solidFill>
@@ -14284,12 +14445,28 @@
                         <a:t>personal</a:t>
                       </a:r>
                       <a:r>
-                        <a:rPr lang="en-US" sz="1200" u="none" strike="noStrike" noProof="0" dirty="0" err="1">
+                        <a:rPr lang="en-US" sz="1200" u="none" strike="noStrike" noProof="0" err="1">
                           <a:solidFill>
                             <a:srgbClr val="000000"/>
                           </a:solidFill>
                         </a:rPr>
-                        <a:t>:phone</a:t>
+                        <a:t>:</a:t>
+                      </a:r>
+                      <a:r>
+                        <a:rPr lang="en-US" sz="1200" b="1" u="none" strike="noStrike" noProof="0" err="1">
+                          <a:solidFill>
+                            <a:srgbClr val="0070C0"/>
+                          </a:solidFill>
+                        </a:rPr>
+                        <a:t>phone</a:t>
+                      </a:r>
+                      <a:r>
+                        <a:rPr lang="en-US" sz="1200" b="1" u="none" strike="noStrike" noProof="0" dirty="0">
+                          <a:solidFill>
+                            <a:srgbClr val="0070C0"/>
+                          </a:solidFill>
+                        </a:rPr>
+                        <a:t>'</a:t>
                       </a:r>
                       <a:r>
                         <a:rPr lang="en-US" sz="1200" u="none" strike="noStrike" noProof="0" dirty="0">
@@ -14297,7 +14474,7 @@
                             <a:srgbClr val="000000"/>
                           </a:solidFill>
                         </a:rPr>
-                        <a:t>', '123456789'</a:t>
+                        <a:t>, '123456789'</a:t>
                       </a:r>
                     </a:p>
                     <a:p>
@@ -14385,7 +14562,7 @@
                         <a:t>'</a:t>
                       </a:r>
                       <a:r>
-                        <a:rPr lang="en-US" sz="1200" u="none" strike="noStrike" noProof="0" dirty="0" err="1">
+                        <a:rPr lang="en-US" sz="1200" b="1" u="none" strike="noStrike" noProof="0" err="1">
                           <a:solidFill>
                             <a:srgbClr val="00B050"/>
                           </a:solidFill>
@@ -14393,7 +14570,7 @@
                         <a:t>job</a:t>
                       </a:r>
                       <a:r>
-                        <a:rPr lang="en-US" sz="1200" u="none" strike="noStrike" noProof="0" dirty="0" err="1">
+                        <a:rPr lang="en-US" sz="1200" b="1" u="none" strike="noStrike" noProof="0" err="1">
                           <a:solidFill>
                             <a:srgbClr val="000000"/>
                           </a:solidFill>
@@ -14441,7 +14618,7 @@
                             <a:srgbClr val="000000"/>
                           </a:solidFill>
                         </a:rPr>
-                        <a:t>emp3 has only salary in job</a:t>
+                        <a:t>emp3 has only salary in job, no personal column family</a:t>
                       </a:r>
                     </a:p>
                     <a:p>
@@ -14498,7 +14675,7 @@
           <p:cNvPr id="2" name="Title 1">
             <a:extLst>
               <a:ext uri="{FF2B5EF4-FFF2-40B4-BE49-F238E27FC236}">
-                <a16:creationId xmlns:a16="http://schemas.microsoft.com/office/drawing/2014/main" id="{825E0878-CCF5-3464-A19A-DADCC246320F}"/>
+                <a16:creationId xmlns:a16="http://schemas.microsoft.com/office/drawing/2014/main" id="{880BEA05-F32B-B175-AA7B-47CBCB32C4E0}"/>
               </a:ext>
             </a:extLst>
           </p:cNvPr>
@@ -14511,40 +14688,126 @@
         </p:nvSpPr>
         <p:spPr>
           <a:xfrm>
-            <a:off x="3439979" y="1806"/>
-            <a:ext cx="5304140" cy="748208"/>
+            <a:off x="284085" y="797523"/>
+            <a:ext cx="6106600" cy="748208"/>
           </a:xfrm>
         </p:spPr>
         <p:txBody>
           <a:bodyPr/>
           <a:lstStyle/>
           <a:p>
-            <a:r>
-              <a:rPr lang="en-US">
-                <a:ea typeface="Calibri Light"/>
-                <a:cs typeface="Calibri Light"/>
-              </a:rPr>
-              <a:t>HBase Internal Row Data Shape </a:t>
-            </a:r>
             <a:endParaRPr lang="en-US"/>
+          </a:p>
+        </p:txBody>
+      </p:sp>
+      <p:sp>
+        <p:nvSpPr>
+          <p:cNvPr id="3" name="Content Placeholder 2">
+            <a:extLst>
+              <a:ext uri="{FF2B5EF4-FFF2-40B4-BE49-F238E27FC236}">
+                <a16:creationId xmlns:a16="http://schemas.microsoft.com/office/drawing/2014/main" id="{1821722D-3CE7-874F-C927-A9A7BB997821}"/>
+              </a:ext>
+            </a:extLst>
+          </p:cNvPr>
+          <p:cNvSpPr>
+            <a:spLocks noGrp="1"/>
+          </p:cNvSpPr>
+          <p:nvPr>
+            <p:ph idx="1"/>
+          </p:nvPr>
+        </p:nvSpPr>
+        <p:spPr>
+          <a:xfrm>
+            <a:off x="284085" y="1712750"/>
+            <a:ext cx="6106601" cy="4984296"/>
+          </a:xfrm>
+        </p:spPr>
+        <p:txBody>
+          <a:bodyPr vert="horz" lIns="91440" tIns="45720" rIns="91440" bIns="45720" rtlCol="0" anchor="t">
+            <a:normAutofit/>
+          </a:bodyPr>
+          <a:lstStyle/>
+          <a:p>
+            <a:pPr marL="0" indent="0">
+              <a:buNone/>
+            </a:pPr>
+            <a:r>
+              <a:rPr lang="en-US" b="1" dirty="0">
+                <a:ea typeface="Calibri"/>
+                <a:cs typeface="Calibri"/>
+              </a:rPr>
+              <a:t>Key Concepts:</a:t>
+            </a:r>
+          </a:p>
+          <a:p>
+            <a:r>
+              <a:rPr lang="en-US" dirty="0">
+                <a:ea typeface="Calibri" panose="020F0502020204030204"/>
+                <a:cs typeface="Calibri" panose="020F0502020204030204"/>
+              </a:rPr>
+              <a:t>Row Key: Unique identifier for each row (like a primary key). </a:t>
+            </a:r>
+          </a:p>
+          <a:p>
+            <a:r>
+              <a:rPr lang="en-US" dirty="0">
+                <a:ea typeface="Calibri" panose="020F0502020204030204"/>
+                <a:cs typeface="Calibri" panose="020F0502020204030204"/>
+              </a:rPr>
+              <a:t>Column Family: Logical group of columns stored together on disk. </a:t>
+            </a:r>
+          </a:p>
+          <a:p>
+            <a:r>
+              <a:rPr lang="en-US" dirty="0">
+                <a:ea typeface="Calibri" panose="020F0502020204030204"/>
+                <a:cs typeface="Calibri" panose="020F0502020204030204"/>
+              </a:rPr>
+              <a:t>Column Qualifier: Actual field name inside a column family. </a:t>
+            </a:r>
+          </a:p>
+          <a:p>
+            <a:r>
+              <a:rPr lang="en-US" dirty="0">
+                <a:ea typeface="Calibri" panose="020F0502020204030204"/>
+                <a:cs typeface="Calibri" panose="020F0502020204030204"/>
+              </a:rPr>
+              <a:t>Timestamp: Each cell value is versioned by time. </a:t>
+            </a:r>
+          </a:p>
+          <a:p>
+            <a:r>
+              <a:rPr lang="en-US" dirty="0">
+                <a:solidFill>
+                  <a:srgbClr val="00B050"/>
+                </a:solidFill>
+                <a:ea typeface="Calibri" panose="020F0502020204030204"/>
+                <a:cs typeface="Calibri" panose="020F0502020204030204"/>
+              </a:rPr>
+              <a:t>Cell: Combination of Row Key + Column Family + Qualifier + Timestamp → Value.</a:t>
+            </a:r>
+          </a:p>
+          <a:p>
+            <a:endParaRPr lang="en-US" dirty="0">
+              <a:ea typeface="Calibri" panose="020F0502020204030204"/>
+              <a:cs typeface="Calibri" panose="020F0502020204030204"/>
+            </a:endParaRPr>
           </a:p>
         </p:txBody>
       </p:sp>
       <p:pic>
         <p:nvPicPr>
-          <p:cNvPr id="4" name="Content Placeholder 3" descr="A screenshot of a computer&#10;&#10;AI-generated content may be incorrect.">
+          <p:cNvPr id="4" name="Picture 3" descr="A screenshot of a computer&#10;&#10;AI-generated content may be incorrect.">
             <a:extLst>
               <a:ext uri="{FF2B5EF4-FFF2-40B4-BE49-F238E27FC236}">
-                <a16:creationId xmlns:a16="http://schemas.microsoft.com/office/drawing/2014/main" id="{2B13B5C8-DB85-2B46-F1E5-328A8246D30B}"/>
+                <a16:creationId xmlns:a16="http://schemas.microsoft.com/office/drawing/2014/main" id="{24975023-F336-E81B-3410-B0E86A42F3E0}"/>
               </a:ext>
             </a:extLst>
           </p:cNvPr>
           <p:cNvPicPr>
-            <a:picLocks noGrp="1" noChangeAspect="1"/>
+            <a:picLocks noChangeAspect="1"/>
           </p:cNvPicPr>
-          <p:nvPr>
-            <p:ph idx="1"/>
-          </p:nvPr>
+          <p:nvPr/>
         </p:nvPicPr>
         <p:blipFill>
           <a:blip r:embed="rId2"/>
@@ -14554,15 +14817,18 @@
         </p:blipFill>
         <p:spPr>
           <a:xfrm>
-            <a:off x="2748599" y="1024927"/>
-            <a:ext cx="6558777" cy="5833959"/>
+            <a:off x="6456054" y="799552"/>
+            <a:ext cx="5638884" cy="4995905"/>
           </a:xfrm>
+          <a:prstGeom prst="rect">
+            <a:avLst/>
+          </a:prstGeom>
         </p:spPr>
       </p:pic>
     </p:spTree>
     <p:extLst>
       <p:ext uri="{BB962C8B-B14F-4D97-AF65-F5344CB8AC3E}">
-        <p14:creationId xmlns:p14="http://schemas.microsoft.com/office/powerpoint/2010/main" val="414281864"/>
+        <p14:creationId xmlns:p14="http://schemas.microsoft.com/office/powerpoint/2010/main" val="4251754830"/>
       </p:ext>
     </p:extLst>
   </p:cSld>
@@ -14977,7 +15243,7 @@
                 </a:solidFill>
                 <a:effectLst/>
                 <a:ea typeface="Aptos" panose="020B0004020202020204" pitchFamily="34" charset="0"/>
-                <a:cs typeface="Arial" panose="020B0604020202020204" pitchFamily="34" charset="0"/>
+                <a:cs typeface="Arial"/>
               </a:rPr>
               <a:t>content: </a:t>
             </a:r>
@@ -14988,9 +15254,19 @@
                 </a:solidFill>
                 <a:effectLst/>
                 <a:ea typeface="Aptos" panose="020B0004020202020204" pitchFamily="34" charset="0"/>
-                <a:cs typeface="Arial" panose="020B0604020202020204" pitchFamily="34" charset="0"/>
-              </a:rPr>
-              <a:t>message_text</a:t>
+                <a:cs typeface="Arial"/>
+              </a:rPr>
+              <a:t>message_</a:t>
+            </a:r>
+            <a:r>
+              <a:rPr lang="en-US" sz="1800" b="1" kern="100" dirty="0" err="1">
+                <a:solidFill>
+                  <a:srgbClr val="00B050"/>
+                </a:solidFill>
+                <a:ea typeface="Aptos" panose="020B0004020202020204" pitchFamily="34" charset="0"/>
+                <a:cs typeface="Arial"/>
+              </a:rPr>
+              <a:t>type</a:t>
             </a:r>
             <a:r>
               <a:rPr lang="en-US" sz="1800" b="1" kern="100" dirty="0">
@@ -14999,7 +15275,7 @@
                 </a:solidFill>
                 <a:effectLst/>
                 <a:ea typeface="Aptos" panose="020B0004020202020204" pitchFamily="34" charset="0"/>
-                <a:cs typeface="Arial" panose="020B0604020202020204" pitchFamily="34" charset="0"/>
+                <a:cs typeface="Arial"/>
               </a:rPr>
               <a:t>, attachments</a:t>
             </a:r>
@@ -15067,6 +15343,194 @@
             </a:r>
           </a:p>
           <a:p>
+            <a:pPr marL="0" indent="0">
+              <a:lnSpc>
+                <a:spcPct val="110000"/>
+              </a:lnSpc>
+              <a:spcBef>
+                <a:spcPts val="0"/>
+              </a:spcBef>
+              <a:buNone/>
+            </a:pPr>
+            <a:r>
+              <a:rPr lang="en-US" sz="1800" b="1" kern="100" dirty="0">
+                <a:solidFill>
+                  <a:srgbClr val="00B050"/>
+                </a:solidFill>
+                <a:effectLst/>
+                <a:ea typeface="Aptos" panose="020B0004020202020204" pitchFamily="34" charset="0"/>
+                <a:cs typeface="Arial"/>
+              </a:rPr>
+              <a:t>Row Key: user123|2025-03-22T14:33:21Z</a:t>
+            </a:r>
+            <a:br>
+              <a:rPr lang="en-US" sz="1800" b="1" kern="100" dirty="0">
+                <a:effectLst/>
+                <a:ea typeface="Aptos" panose="020B0004020202020204" pitchFamily="34" charset="0"/>
+                <a:cs typeface="Arial" panose="020B0604020202020204" pitchFamily="34" charset="0"/>
+              </a:rPr>
+            </a:br>
+            <a:r>
+              <a:rPr lang="en-US" sz="1800" b="1" kern="100" dirty="0">
+                <a:solidFill>
+                  <a:srgbClr val="00B050"/>
+                </a:solidFill>
+                <a:effectLst/>
+                <a:ea typeface="Aptos" panose="020B0004020202020204" pitchFamily="34" charset="0"/>
+                <a:cs typeface="Arial"/>
+              </a:rPr>
+              <a:t>Column Family: meta</a:t>
+            </a:r>
+            <a:br>
+              <a:rPr lang="en-US" sz="1800" b="1" kern="100" dirty="0">
+                <a:effectLst/>
+                <a:ea typeface="Aptos" panose="020B0004020202020204" pitchFamily="34" charset="0"/>
+                <a:cs typeface="Arial" panose="020B0604020202020204" pitchFamily="34" charset="0"/>
+              </a:rPr>
+            </a:br>
+            <a:r>
+              <a:rPr lang="en-US" sz="1800" b="1" kern="100" dirty="0">
+                <a:solidFill>
+                  <a:srgbClr val="00B050"/>
+                </a:solidFill>
+                <a:effectLst/>
+                <a:ea typeface="Aptos" panose="020B0004020202020204" pitchFamily="34" charset="0"/>
+                <a:cs typeface="Arial"/>
+              </a:rPr>
+              <a:t>  - </a:t>
+            </a:r>
+            <a:r>
+              <a:rPr lang="en-US" sz="1800" b="1" kern="100" dirty="0" err="1">
+                <a:solidFill>
+                  <a:srgbClr val="00B050"/>
+                </a:solidFill>
+                <a:effectLst/>
+                <a:ea typeface="Aptos" panose="020B0004020202020204" pitchFamily="34" charset="0"/>
+                <a:cs typeface="Arial"/>
+              </a:rPr>
+              <a:t>sender_id</a:t>
+            </a:r>
+            <a:r>
+              <a:rPr lang="en-US" sz="1800" b="1" kern="100" dirty="0">
+                <a:solidFill>
+                  <a:srgbClr val="00B050"/>
+                </a:solidFill>
+                <a:effectLst/>
+                <a:ea typeface="Aptos" panose="020B0004020202020204" pitchFamily="34" charset="0"/>
+                <a:cs typeface="Arial"/>
+              </a:rPr>
+              <a:t>: user123</a:t>
+            </a:r>
+            <a:br>
+              <a:rPr lang="en-US" sz="1800" b="1" kern="100" dirty="0">
+                <a:effectLst/>
+                <a:ea typeface="Aptos" panose="020B0004020202020204" pitchFamily="34" charset="0"/>
+                <a:cs typeface="Arial" panose="020B0604020202020204" pitchFamily="34" charset="0"/>
+              </a:rPr>
+            </a:br>
+            <a:r>
+              <a:rPr lang="en-US" sz="1800" b="1" kern="100" dirty="0">
+                <a:solidFill>
+                  <a:srgbClr val="00B050"/>
+                </a:solidFill>
+                <a:effectLst/>
+                <a:ea typeface="Aptos" panose="020B0004020202020204" pitchFamily="34" charset="0"/>
+                <a:cs typeface="Arial"/>
+              </a:rPr>
+              <a:t>  - </a:t>
+            </a:r>
+            <a:r>
+              <a:rPr lang="en-US" sz="1800" b="1" kern="100" dirty="0" err="1">
+                <a:solidFill>
+                  <a:srgbClr val="00B050"/>
+                </a:solidFill>
+                <a:effectLst/>
+                <a:ea typeface="Aptos" panose="020B0004020202020204" pitchFamily="34" charset="0"/>
+                <a:cs typeface="Arial"/>
+              </a:rPr>
+              <a:t>receiver_id</a:t>
+            </a:r>
+            <a:r>
+              <a:rPr lang="en-US" sz="1800" b="1" kern="100" dirty="0">
+                <a:solidFill>
+                  <a:srgbClr val="00B050"/>
+                </a:solidFill>
+                <a:effectLst/>
+                <a:ea typeface="Aptos" panose="020B0004020202020204" pitchFamily="34" charset="0"/>
+                <a:cs typeface="Arial"/>
+              </a:rPr>
+              <a:t>: user456</a:t>
+            </a:r>
+            <a:br>
+              <a:rPr lang="en-US" sz="1800" b="1" kern="100" dirty="0">
+                <a:effectLst/>
+                <a:ea typeface="Aptos" panose="020B0004020202020204" pitchFamily="34" charset="0"/>
+                <a:cs typeface="Arial" panose="020B0604020202020204" pitchFamily="34" charset="0"/>
+              </a:rPr>
+            </a:br>
+            <a:r>
+              <a:rPr lang="en-US" sz="1800" b="1" kern="100" dirty="0">
+                <a:solidFill>
+                  <a:srgbClr val="00B050"/>
+                </a:solidFill>
+                <a:effectLst/>
+                <a:ea typeface="Aptos" panose="020B0004020202020204" pitchFamily="34" charset="0"/>
+                <a:cs typeface="Arial"/>
+              </a:rPr>
+              <a:t>Column Family: content</a:t>
+            </a:r>
+            <a:br>
+              <a:rPr lang="en-US" sz="1800" b="1" kern="100" dirty="0">
+                <a:effectLst/>
+                <a:ea typeface="Aptos" panose="020B0004020202020204" pitchFamily="34" charset="0"/>
+                <a:cs typeface="Arial" panose="020B0604020202020204" pitchFamily="34" charset="0"/>
+              </a:rPr>
+            </a:br>
+            <a:r>
+              <a:rPr lang="en-US" sz="1800" b="1" kern="100" dirty="0">
+                <a:solidFill>
+                  <a:srgbClr val="00B050"/>
+                </a:solidFill>
+                <a:effectLst/>
+                <a:ea typeface="Aptos" panose="020B0004020202020204" pitchFamily="34" charset="0"/>
+                <a:cs typeface="Arial"/>
+              </a:rPr>
+              <a:t>  - </a:t>
+            </a:r>
+            <a:r>
+              <a:rPr lang="en-US" sz="1800" b="1" kern="100" dirty="0" err="1">
+                <a:solidFill>
+                  <a:srgbClr val="00B050"/>
+                </a:solidFill>
+                <a:effectLst/>
+                <a:ea typeface="Aptos" panose="020B0004020202020204" pitchFamily="34" charset="0"/>
+                <a:cs typeface="Arial"/>
+              </a:rPr>
+              <a:t>message_text</a:t>
+            </a:r>
+            <a:r>
+              <a:rPr lang="en-US" sz="1800" b="1" kern="100" dirty="0">
+                <a:solidFill>
+                  <a:srgbClr val="00B050"/>
+                </a:solidFill>
+                <a:effectLst/>
+                <a:ea typeface="Aptos" panose="020B0004020202020204" pitchFamily="34" charset="0"/>
+                <a:cs typeface="Arial"/>
+              </a:rPr>
+              <a:t>: </a:t>
+            </a:r>
+            <a:r>
+              <a:rPr lang="en-US" sz="1800" b="1" kern="100" dirty="0">
+                <a:solidFill>
+                  <a:srgbClr val="00B050"/>
+                </a:solidFill>
+                <a:ea typeface="Aptos" panose="020B0004020202020204" pitchFamily="34" charset="0"/>
+                <a:cs typeface="Arial"/>
+              </a:rPr>
+              <a:t>individual</a:t>
+            </a:r>
+          </a:p>
+          <a:p>
             <a:pPr marL="0" marR="0" indent="0">
               <a:lnSpc>
                 <a:spcPct val="110000"/>
@@ -15081,17 +15545,42 @@
                 <a:solidFill>
                   <a:srgbClr val="00B050"/>
                 </a:solidFill>
+                <a:ea typeface="Aptos" panose="020B0004020202020204" pitchFamily="34" charset="0"/>
+                <a:cs typeface="Arial"/>
+              </a:rPr>
+              <a:t>Column</a:t>
+            </a:r>
+            <a:r>
+              <a:rPr lang="en-US" sz="1800" b="1" kern="100" dirty="0">
+                <a:solidFill>
+                  <a:srgbClr val="00B050"/>
+                </a:solidFill>
+                <a:effectLst/>
+                <a:ea typeface="Aptos" panose="020B0004020202020204" pitchFamily="34" charset="0"/>
+                <a:cs typeface="Arial"/>
+              </a:rPr>
+              <a:t> Family: status</a:t>
+            </a:r>
+            <a:br>
+              <a:rPr lang="en-US" sz="1800" b="1" kern="100" dirty="0">
                 <a:effectLst/>
                 <a:ea typeface="Aptos" panose="020B0004020202020204" pitchFamily="34" charset="0"/>
                 <a:cs typeface="Arial" panose="020B0604020202020204" pitchFamily="34" charset="0"/>
               </a:rPr>
-              <a:t>Row Key: user123|2025-03-22T14:33:21Z</a:t>
+            </a:br>
+            <a:r>
+              <a:rPr lang="en-US" sz="1800" b="1" kern="100" dirty="0">
+                <a:solidFill>
+                  <a:srgbClr val="00B050"/>
+                </a:solidFill>
+                <a:effectLst/>
+                <a:ea typeface="Aptos" panose="020B0004020202020204" pitchFamily="34" charset="0"/>
+                <a:cs typeface="Arial"/>
+              </a:rPr>
+              <a:t>  - delivered: true</a:t>
             </a:r>
             <a:br>
               <a:rPr lang="en-US" sz="1800" b="1" kern="100" dirty="0">
-                <a:solidFill>
-                  <a:srgbClr val="00B050"/>
-                </a:solidFill>
                 <a:effectLst/>
                 <a:ea typeface="Aptos" panose="020B0004020202020204" pitchFamily="34" charset="0"/>
                 <a:cs typeface="Arial" panose="020B0604020202020204" pitchFamily="34" charset="0"/>
@@ -15104,220 +15593,7 @@
                 </a:solidFill>
                 <a:effectLst/>
                 <a:ea typeface="Aptos" panose="020B0004020202020204" pitchFamily="34" charset="0"/>
-                <a:cs typeface="Arial" panose="020B0604020202020204" pitchFamily="34" charset="0"/>
-              </a:rPr>
-              <a:t>Column Family: meta</a:t>
-            </a:r>
-            <a:br>
-              <a:rPr lang="en-US" sz="1800" b="1" kern="100" dirty="0">
-                <a:solidFill>
-                  <a:srgbClr val="00B050"/>
-                </a:solidFill>
-                <a:effectLst/>
-                <a:ea typeface="Aptos" panose="020B0004020202020204" pitchFamily="34" charset="0"/>
-                <a:cs typeface="Arial" panose="020B0604020202020204" pitchFamily="34" charset="0"/>
-              </a:rPr>
-            </a:br>
-            <a:r>
-              <a:rPr lang="en-US" sz="1800" b="1" kern="100" dirty="0">
-                <a:solidFill>
-                  <a:srgbClr val="00B050"/>
-                </a:solidFill>
-                <a:effectLst/>
-                <a:ea typeface="Aptos" panose="020B0004020202020204" pitchFamily="34" charset="0"/>
-                <a:cs typeface="Arial" panose="020B0604020202020204" pitchFamily="34" charset="0"/>
-              </a:rPr>
-              <a:t>  - </a:t>
-            </a:r>
-            <a:r>
-              <a:rPr lang="en-US" sz="1800" b="1" kern="100" dirty="0" err="1">
-                <a:solidFill>
-                  <a:srgbClr val="00B050"/>
-                </a:solidFill>
-                <a:effectLst/>
-                <a:ea typeface="Aptos" panose="020B0004020202020204" pitchFamily="34" charset="0"/>
-                <a:cs typeface="Arial" panose="020B0604020202020204" pitchFamily="34" charset="0"/>
-              </a:rPr>
-              <a:t>sender_id</a:t>
-            </a:r>
-            <a:r>
-              <a:rPr lang="en-US" sz="1800" b="1" kern="100" dirty="0">
-                <a:solidFill>
-                  <a:srgbClr val="00B050"/>
-                </a:solidFill>
-                <a:effectLst/>
-                <a:ea typeface="Aptos" panose="020B0004020202020204" pitchFamily="34" charset="0"/>
-                <a:cs typeface="Arial" panose="020B0604020202020204" pitchFamily="34" charset="0"/>
-              </a:rPr>
-              <a:t>: user123</a:t>
-            </a:r>
-            <a:br>
-              <a:rPr lang="en-US" sz="1800" b="1" kern="100" dirty="0">
-                <a:solidFill>
-                  <a:srgbClr val="00B050"/>
-                </a:solidFill>
-                <a:effectLst/>
-                <a:ea typeface="Aptos" panose="020B0004020202020204" pitchFamily="34" charset="0"/>
-                <a:cs typeface="Arial" panose="020B0604020202020204" pitchFamily="34" charset="0"/>
-              </a:rPr>
-            </a:br>
-            <a:r>
-              <a:rPr lang="en-US" sz="1800" b="1" kern="100" dirty="0">
-                <a:solidFill>
-                  <a:srgbClr val="00B050"/>
-                </a:solidFill>
-                <a:effectLst/>
-                <a:ea typeface="Aptos" panose="020B0004020202020204" pitchFamily="34" charset="0"/>
-                <a:cs typeface="Arial" panose="020B0604020202020204" pitchFamily="34" charset="0"/>
-              </a:rPr>
-              <a:t>  - </a:t>
-            </a:r>
-            <a:r>
-              <a:rPr lang="en-US" sz="1800" b="1" kern="100" dirty="0" err="1">
-                <a:solidFill>
-                  <a:srgbClr val="00B050"/>
-                </a:solidFill>
-                <a:effectLst/>
-                <a:ea typeface="Aptos" panose="020B0004020202020204" pitchFamily="34" charset="0"/>
-                <a:cs typeface="Arial" panose="020B0604020202020204" pitchFamily="34" charset="0"/>
-              </a:rPr>
-              <a:t>receiver_id</a:t>
-            </a:r>
-            <a:r>
-              <a:rPr lang="en-US" sz="1800" b="1" kern="100" dirty="0">
-                <a:solidFill>
-                  <a:srgbClr val="00B050"/>
-                </a:solidFill>
-                <a:effectLst/>
-                <a:ea typeface="Aptos" panose="020B0004020202020204" pitchFamily="34" charset="0"/>
-                <a:cs typeface="Arial" panose="020B0604020202020204" pitchFamily="34" charset="0"/>
-              </a:rPr>
-              <a:t>: user456</a:t>
-            </a:r>
-            <a:br>
-              <a:rPr lang="en-US" sz="1800" b="1" kern="100" dirty="0">
-                <a:solidFill>
-                  <a:srgbClr val="00B050"/>
-                </a:solidFill>
-                <a:effectLst/>
-                <a:ea typeface="Aptos" panose="020B0004020202020204" pitchFamily="34" charset="0"/>
-                <a:cs typeface="Arial" panose="020B0604020202020204" pitchFamily="34" charset="0"/>
-              </a:rPr>
-            </a:br>
-            <a:r>
-              <a:rPr lang="en-US" sz="1800" b="1" kern="100" dirty="0">
-                <a:solidFill>
-                  <a:srgbClr val="00B050"/>
-                </a:solidFill>
-                <a:effectLst/>
-                <a:ea typeface="Aptos" panose="020B0004020202020204" pitchFamily="34" charset="0"/>
-                <a:cs typeface="Arial" panose="020B0604020202020204" pitchFamily="34" charset="0"/>
-              </a:rPr>
-              <a:t>Column Family: content</a:t>
-            </a:r>
-            <a:br>
-              <a:rPr lang="en-US" sz="1800" b="1" kern="100" dirty="0">
-                <a:solidFill>
-                  <a:srgbClr val="00B050"/>
-                </a:solidFill>
-                <a:effectLst/>
-                <a:ea typeface="Aptos" panose="020B0004020202020204" pitchFamily="34" charset="0"/>
-                <a:cs typeface="Arial" panose="020B0604020202020204" pitchFamily="34" charset="0"/>
-              </a:rPr>
-            </a:br>
-            <a:r>
-              <a:rPr lang="en-US" sz="1800" b="1" kern="100" dirty="0">
-                <a:solidFill>
-                  <a:srgbClr val="00B050"/>
-                </a:solidFill>
-                <a:effectLst/>
-                <a:ea typeface="Aptos" panose="020B0004020202020204" pitchFamily="34" charset="0"/>
-                <a:cs typeface="Arial" panose="020B0604020202020204" pitchFamily="34" charset="0"/>
-              </a:rPr>
-              <a:t>  - </a:t>
-            </a:r>
-            <a:r>
-              <a:rPr lang="en-US" sz="1800" b="1" kern="100" dirty="0" err="1">
-                <a:solidFill>
-                  <a:srgbClr val="00B050"/>
-                </a:solidFill>
-                <a:effectLst/>
-                <a:ea typeface="Aptos" panose="020B0004020202020204" pitchFamily="34" charset="0"/>
-                <a:cs typeface="Arial" panose="020B0604020202020204" pitchFamily="34" charset="0"/>
-              </a:rPr>
-              <a:t>message_text</a:t>
-            </a:r>
-            <a:r>
-              <a:rPr lang="en-US" sz="1800" b="1" kern="100" dirty="0">
-                <a:solidFill>
-                  <a:srgbClr val="00B050"/>
-                </a:solidFill>
-                <a:effectLst/>
-                <a:ea typeface="Aptos" panose="020B0004020202020204" pitchFamily="34" charset="0"/>
-                <a:cs typeface="Arial" panose="020B0604020202020204" pitchFamily="34" charset="0"/>
-              </a:rPr>
-              <a:t>: "Hey, are we still meeting today?"</a:t>
-            </a:r>
-            <a:br>
-              <a:rPr lang="en-US" sz="1800" b="1" kern="100" dirty="0">
-                <a:solidFill>
-                  <a:srgbClr val="00B050"/>
-                </a:solidFill>
-                <a:effectLst/>
-                <a:ea typeface="Aptos" panose="020B0004020202020204" pitchFamily="34" charset="0"/>
-                <a:cs typeface="Arial" panose="020B0604020202020204" pitchFamily="34" charset="0"/>
-              </a:rPr>
-            </a:br>
-            <a:r>
-              <a:rPr lang="en-US" sz="1800" b="1" kern="100" dirty="0">
-                <a:solidFill>
-                  <a:srgbClr val="00B050"/>
-                </a:solidFill>
-                <a:effectLst/>
-                <a:ea typeface="Aptos" panose="020B0004020202020204" pitchFamily="34" charset="0"/>
-                <a:cs typeface="Arial" panose="020B0604020202020204" pitchFamily="34" charset="0"/>
-              </a:rPr>
-              <a:t>Column Family: status</a:t>
-            </a:r>
-            <a:br>
-              <a:rPr lang="en-US" sz="1800" b="1" kern="100" dirty="0">
-                <a:solidFill>
-                  <a:srgbClr val="00B050"/>
-                </a:solidFill>
-                <a:effectLst/>
-                <a:ea typeface="Aptos" panose="020B0004020202020204" pitchFamily="34" charset="0"/>
-                <a:cs typeface="Arial" panose="020B0604020202020204" pitchFamily="34" charset="0"/>
-              </a:rPr>
-            </a:br>
-            <a:r>
-              <a:rPr lang="en-US" sz="1800" b="1" kern="100" dirty="0">
-                <a:solidFill>
-                  <a:srgbClr val="00B050"/>
-                </a:solidFill>
-                <a:effectLst/>
-                <a:ea typeface="Aptos" panose="020B0004020202020204" pitchFamily="34" charset="0"/>
-                <a:cs typeface="Arial" panose="020B0604020202020204" pitchFamily="34" charset="0"/>
-              </a:rPr>
-              <a:t>  - delivered: true</a:t>
-            </a:r>
-            <a:br>
-              <a:rPr lang="en-US" sz="1800" b="1" kern="100" dirty="0">
-                <a:solidFill>
-                  <a:srgbClr val="00B050"/>
-                </a:solidFill>
-                <a:effectLst/>
-                <a:ea typeface="Aptos" panose="020B0004020202020204" pitchFamily="34" charset="0"/>
-                <a:cs typeface="Arial" panose="020B0604020202020204" pitchFamily="34" charset="0"/>
-              </a:rPr>
-            </a:br>
-            <a:r>
-              <a:rPr lang="en-US" sz="1800" b="1" kern="100" dirty="0">
-                <a:solidFill>
-                  <a:srgbClr val="00B050"/>
-                </a:solidFill>
-                <a:effectLst/>
-                <a:ea typeface="Aptos" panose="020B0004020202020204" pitchFamily="34" charset="0"/>
-                <a:cs typeface="Arial" panose="020B0604020202020204" pitchFamily="34" charset="0"/>
+                <a:cs typeface="Arial"/>
               </a:rPr>
               <a:t>  - read: false</a:t>
             </a:r>
@@ -15332,10 +15608,11 @@
               <a:rPr lang="en-US" sz="1800" kern="100" dirty="0">
                 <a:effectLst/>
                 <a:ea typeface="Aptos" panose="020B0004020202020204" pitchFamily="34" charset="0"/>
-                <a:cs typeface="Arial" panose="020B0604020202020204" pitchFamily="34" charset="0"/>
-              </a:rPr>
-              <a:t> </a:t>
-            </a:r>
+                <a:cs typeface="Arial"/>
+              </a:rPr>
+              <a:t> </a:t>
+            </a:r>
+            <a:endParaRPr lang="en-US"/>
           </a:p>
           <a:p>
             <a:pPr marL="0" marR="0" indent="0">
@@ -16197,10 +16474,32 @@
           </a:xfrm>
         </p:spPr>
         <p:txBody>
-          <a:bodyPr>
+          <a:bodyPr vert="horz" lIns="91440" tIns="45720" rIns="91440" bIns="45720" rtlCol="0" anchor="t">
             <a:normAutofit/>
           </a:bodyPr>
           <a:lstStyle/>
+          <a:p>
+            <a:pPr marL="12065" marR="306070" indent="0">
+              <a:lnSpc>
+                <a:spcPct val="70000"/>
+              </a:lnSpc>
+              <a:spcBef>
+                <a:spcPts val="715"/>
+              </a:spcBef>
+              <a:buNone/>
+              <a:tabLst>
+                <a:tab pos="241300" algn="l"/>
+              </a:tabLst>
+            </a:pPr>
+            <a:r>
+              <a:rPr lang="en-US" sz="1600" b="1" dirty="0">
+                <a:latin typeface="Calibri"/>
+                <a:ea typeface="Calibri"/>
+                <a:cs typeface="Calibri"/>
+              </a:rPr>
+              <a:t>Definition:</a:t>
+            </a:r>
+          </a:p>
           <a:p>
             <a:pPr marL="241300" marR="306070" indent="-229235">
               <a:lnSpc>
@@ -16216,203 +16515,204 @@
               </a:tabLst>
             </a:pPr>
             <a:r>
-              <a:rPr lang="en-US" sz="1600">
+              <a:rPr lang="en-US" sz="1600" dirty="0">
                 <a:latin typeface="Calibri"/>
                 <a:cs typeface="Calibri"/>
               </a:rPr>
               <a:t>Apache</a:t>
             </a:r>
             <a:r>
-              <a:rPr lang="en-US" sz="1600" spc="-45">
-                <a:latin typeface="Calibri"/>
-                <a:cs typeface="Calibri"/>
-              </a:rPr>
-              <a:t> </a:t>
-            </a:r>
-            <a:r>
-              <a:rPr lang="en-US" sz="1600">
+              <a:rPr lang="en-US" sz="1600" spc="-45" dirty="0">
+                <a:latin typeface="Calibri"/>
+                <a:cs typeface="Calibri"/>
+              </a:rPr>
+              <a:t> </a:t>
+            </a:r>
+            <a:r>
+              <a:rPr lang="en-US" sz="1600" dirty="0">
                 <a:latin typeface="Calibri"/>
                 <a:cs typeface="Calibri"/>
               </a:rPr>
               <a:t>Spark</a:t>
             </a:r>
             <a:r>
-              <a:rPr lang="en-US" sz="1600" spc="-35">
-                <a:latin typeface="Calibri"/>
-                <a:cs typeface="Calibri"/>
-              </a:rPr>
-              <a:t> </a:t>
-            </a:r>
-            <a:r>
-              <a:rPr lang="en-US" sz="1600">
+              <a:rPr lang="en-US" sz="1600" spc="-35" dirty="0">
+                <a:latin typeface="Calibri"/>
+                <a:cs typeface="Calibri"/>
+              </a:rPr>
+              <a:t> </a:t>
+            </a:r>
+            <a:r>
+              <a:rPr lang="en-US" sz="1600" dirty="0">
                 <a:latin typeface="Calibri"/>
                 <a:cs typeface="Calibri"/>
               </a:rPr>
               <a:t>is</a:t>
             </a:r>
             <a:r>
-              <a:rPr lang="en-US" sz="1600" spc="-35">
-                <a:latin typeface="Calibri"/>
-                <a:cs typeface="Calibri"/>
-              </a:rPr>
-              <a:t> </a:t>
-            </a:r>
-            <a:r>
-              <a:rPr lang="en-US" sz="1600">
+              <a:rPr lang="en-US" sz="1600" spc="-35" dirty="0">
+                <a:latin typeface="Calibri"/>
+                <a:cs typeface="Calibri"/>
+              </a:rPr>
+              <a:t> </a:t>
+            </a:r>
+            <a:r>
+              <a:rPr lang="en-US" sz="1600" dirty="0">
                 <a:latin typeface="Calibri"/>
                 <a:cs typeface="Calibri"/>
               </a:rPr>
               <a:t>an</a:t>
             </a:r>
             <a:r>
-              <a:rPr lang="en-US" sz="1600" spc="-25">
-                <a:latin typeface="Calibri"/>
-                <a:cs typeface="Calibri"/>
-              </a:rPr>
-              <a:t> </a:t>
-            </a:r>
-            <a:r>
-              <a:rPr lang="en-US" sz="1600" spc="-10">
+              <a:rPr lang="en-US" sz="1600" spc="-25" dirty="0">
+                <a:latin typeface="Calibri"/>
+                <a:cs typeface="Calibri"/>
+              </a:rPr>
+              <a:t> </a:t>
+            </a:r>
+            <a:r>
+              <a:rPr lang="en-US" sz="1600" spc="-10" dirty="0">
                 <a:latin typeface="Calibri"/>
                 <a:cs typeface="Calibri"/>
               </a:rPr>
               <a:t>open-</a:t>
             </a:r>
             <a:r>
-              <a:rPr lang="en-US" sz="1600">
+              <a:rPr lang="en-US" sz="1600" dirty="0">
                 <a:latin typeface="Calibri"/>
                 <a:cs typeface="Calibri"/>
               </a:rPr>
               <a:t>source</a:t>
             </a:r>
             <a:r>
-              <a:rPr lang="en-US" sz="1600" spc="-50">
-                <a:latin typeface="Calibri"/>
-                <a:cs typeface="Calibri"/>
-              </a:rPr>
-              <a:t> </a:t>
-            </a:r>
-            <a:r>
-              <a:rPr lang="en-US" sz="1600">
+              <a:rPr lang="en-US" sz="1600" spc="-50" dirty="0">
+                <a:latin typeface="Calibri"/>
+                <a:cs typeface="Calibri"/>
+              </a:rPr>
+              <a:t> </a:t>
+            </a:r>
+            <a:r>
+              <a:rPr lang="en-US" sz="1600" dirty="0">
                 <a:latin typeface="Calibri"/>
                 <a:cs typeface="Calibri"/>
               </a:rPr>
               <a:t>distributed</a:t>
             </a:r>
             <a:r>
-              <a:rPr lang="en-US" sz="1600" spc="-45">
-                <a:latin typeface="Calibri"/>
-                <a:cs typeface="Calibri"/>
-              </a:rPr>
-              <a:t> </a:t>
-            </a:r>
-            <a:r>
-              <a:rPr lang="en-US" sz="1600">
+              <a:rPr lang="en-US" sz="1600" spc="-45" dirty="0">
+                <a:latin typeface="Calibri"/>
+                <a:cs typeface="Calibri"/>
+              </a:rPr>
+              <a:t> </a:t>
+            </a:r>
+            <a:r>
+              <a:rPr lang="en-US" sz="1600" dirty="0">
                 <a:latin typeface="Calibri"/>
                 <a:cs typeface="Calibri"/>
               </a:rPr>
               <a:t>data</a:t>
             </a:r>
             <a:r>
-              <a:rPr lang="en-US" sz="1600" spc="-45">
-                <a:latin typeface="Calibri"/>
-                <a:cs typeface="Calibri"/>
-              </a:rPr>
-              <a:t> </a:t>
-            </a:r>
-            <a:r>
-              <a:rPr lang="en-US" sz="1600">
+              <a:rPr lang="en-US" sz="1600" spc="-45" dirty="0">
+                <a:latin typeface="Calibri"/>
+                <a:cs typeface="Calibri"/>
+              </a:rPr>
+              <a:t> </a:t>
+            </a:r>
+            <a:r>
+              <a:rPr lang="en-US" sz="1600" dirty="0">
                 <a:latin typeface="Calibri"/>
                 <a:cs typeface="Calibri"/>
               </a:rPr>
               <a:t>processing</a:t>
             </a:r>
             <a:r>
-              <a:rPr lang="en-US" sz="1600" spc="-50">
-                <a:latin typeface="Calibri"/>
-                <a:cs typeface="Calibri"/>
-              </a:rPr>
-              <a:t> </a:t>
-            </a:r>
-            <a:r>
-              <a:rPr lang="en-US" sz="1600" spc="-10">
+              <a:rPr lang="en-US" sz="1600" spc="-50" dirty="0">
+                <a:latin typeface="Calibri"/>
+                <a:cs typeface="Calibri"/>
+              </a:rPr>
+              <a:t> </a:t>
+            </a:r>
+            <a:r>
+              <a:rPr lang="en-US" sz="1600" spc="-10" dirty="0">
                 <a:latin typeface="Calibri"/>
                 <a:cs typeface="Calibri"/>
               </a:rPr>
               <a:t>engine </a:t>
             </a:r>
             <a:r>
-              <a:rPr lang="en-US" sz="1600">
+              <a:rPr lang="en-US" sz="1600" dirty="0">
                 <a:latin typeface="Calibri"/>
                 <a:cs typeface="Calibri"/>
               </a:rPr>
               <a:t>optimized</a:t>
             </a:r>
             <a:r>
-              <a:rPr lang="en-US" sz="1600" spc="-65">
-                <a:latin typeface="Calibri"/>
-                <a:cs typeface="Calibri"/>
-              </a:rPr>
-              <a:t> </a:t>
-            </a:r>
-            <a:r>
-              <a:rPr lang="en-US" sz="1600">
+              <a:rPr lang="en-US" sz="1600" spc="-65" dirty="0">
+                <a:latin typeface="Calibri"/>
+                <a:cs typeface="Calibri"/>
+              </a:rPr>
+              <a:t> </a:t>
+            </a:r>
+            <a:r>
+              <a:rPr lang="en-US" sz="1600" dirty="0">
                 <a:latin typeface="Calibri"/>
                 <a:cs typeface="Calibri"/>
               </a:rPr>
               <a:t>for</a:t>
             </a:r>
             <a:r>
-              <a:rPr lang="en-US" sz="1600" spc="-40">
-                <a:latin typeface="Calibri"/>
-                <a:cs typeface="Calibri"/>
-              </a:rPr>
-              <a:t> </a:t>
-            </a:r>
-            <a:r>
-              <a:rPr lang="en-US" sz="1600" spc="-10">
+              <a:rPr lang="en-US" sz="1600" spc="-40" dirty="0">
+                <a:latin typeface="Calibri"/>
+                <a:cs typeface="Calibri"/>
+              </a:rPr>
+              <a:t> </a:t>
+            </a:r>
+            <a:r>
+              <a:rPr lang="en-US" sz="1600" spc="-10" dirty="0">
                 <a:latin typeface="Calibri"/>
                 <a:cs typeface="Calibri"/>
               </a:rPr>
               <a:t>large-</a:t>
             </a:r>
             <a:r>
-              <a:rPr lang="en-US" sz="1600">
+              <a:rPr lang="en-US" sz="1600" dirty="0">
                 <a:latin typeface="Calibri"/>
                 <a:cs typeface="Calibri"/>
               </a:rPr>
               <a:t>scale</a:t>
             </a:r>
             <a:r>
-              <a:rPr lang="en-US" sz="1600" spc="-75">
-                <a:latin typeface="Calibri"/>
-                <a:cs typeface="Calibri"/>
-              </a:rPr>
-              <a:t> </a:t>
-            </a:r>
-            <a:r>
-              <a:rPr lang="en-US" sz="1600">
+              <a:rPr lang="en-US" sz="1600" spc="-75" dirty="0">
+                <a:latin typeface="Calibri"/>
+                <a:cs typeface="Calibri"/>
+              </a:rPr>
+              <a:t> </a:t>
+            </a:r>
+            <a:r>
+              <a:rPr lang="en-US" sz="1600" dirty="0">
                 <a:latin typeface="Calibri"/>
                 <a:cs typeface="Calibri"/>
               </a:rPr>
               <a:t>data</a:t>
             </a:r>
             <a:r>
-              <a:rPr lang="en-US" sz="1600" spc="-60">
-                <a:latin typeface="Calibri"/>
-                <a:cs typeface="Calibri"/>
-              </a:rPr>
-              <a:t> </a:t>
-            </a:r>
-            <a:r>
-              <a:rPr lang="en-US" sz="1600" spc="-10">
+              <a:rPr lang="en-US" sz="1600" spc="-60" dirty="0">
+                <a:latin typeface="Calibri"/>
+                <a:cs typeface="Calibri"/>
+              </a:rPr>
+              <a:t> </a:t>
+            </a:r>
+            <a:r>
+              <a:rPr lang="en-US" sz="1600" spc="-10" dirty="0">
                 <a:latin typeface="Calibri"/>
                 <a:cs typeface="Calibri"/>
               </a:rPr>
               <a:t>processing.</a:t>
             </a:r>
-            <a:endParaRPr lang="en-US" sz="1600">
+            <a:endParaRPr lang="en-US" sz="1600" dirty="0">
               <a:latin typeface="Calibri"/>
+              <a:ea typeface="Calibri"/>
               <a:cs typeface="Calibri"/>
             </a:endParaRPr>
           </a:p>
@@ -16431,243 +16731,243 @@
               </a:tabLst>
             </a:pPr>
             <a:r>
-              <a:rPr lang="en-US" sz="1600" spc="-10">
+              <a:rPr lang="en-US" sz="1600" spc="-10" dirty="0">
                 <a:latin typeface="Calibri"/>
                 <a:cs typeface="Calibri"/>
               </a:rPr>
               <a:t>In-</a:t>
             </a:r>
             <a:r>
-              <a:rPr lang="en-US" sz="1600">
+              <a:rPr lang="en-US" sz="1600" dirty="0">
                 <a:latin typeface="Calibri"/>
                 <a:cs typeface="Calibri"/>
               </a:rPr>
               <a:t>Memory</a:t>
             </a:r>
             <a:r>
-              <a:rPr lang="en-US" sz="1600" spc="-50">
-                <a:latin typeface="Calibri"/>
-                <a:cs typeface="Calibri"/>
-              </a:rPr>
-              <a:t> </a:t>
-            </a:r>
-            <a:r>
-              <a:rPr lang="en-US" sz="1600">
+              <a:rPr lang="en-US" sz="1600" spc="-50" dirty="0">
+                <a:latin typeface="Calibri"/>
+                <a:cs typeface="Calibri"/>
+              </a:rPr>
+              <a:t> </a:t>
+            </a:r>
+            <a:r>
+              <a:rPr lang="en-US" sz="1600" dirty="0">
                 <a:latin typeface="Calibri"/>
                 <a:cs typeface="Calibri"/>
               </a:rPr>
               <a:t>Processing:</a:t>
             </a:r>
             <a:r>
-              <a:rPr lang="en-US" sz="1600" spc="-70">
-                <a:latin typeface="Calibri"/>
-                <a:cs typeface="Calibri"/>
-              </a:rPr>
-              <a:t> </a:t>
-            </a:r>
-            <a:r>
-              <a:rPr lang="en-US" sz="1600">
+              <a:rPr lang="en-US" sz="1600" spc="-70" dirty="0">
+                <a:latin typeface="Calibri"/>
+                <a:cs typeface="Calibri"/>
+              </a:rPr>
+              <a:t> </a:t>
+            </a:r>
+            <a:r>
+              <a:rPr lang="en-US" sz="1600" dirty="0">
                 <a:latin typeface="Calibri"/>
                 <a:cs typeface="Calibri"/>
               </a:rPr>
               <a:t>Spark</a:t>
             </a:r>
             <a:r>
-              <a:rPr lang="en-US" sz="1600" spc="-65">
-                <a:latin typeface="Calibri"/>
-                <a:cs typeface="Calibri"/>
-              </a:rPr>
-              <a:t> </a:t>
-            </a:r>
-            <a:r>
-              <a:rPr lang="en-US" sz="1600">
+              <a:rPr lang="en-US" sz="1600" spc="-65" dirty="0">
+                <a:latin typeface="Calibri"/>
+                <a:cs typeface="Calibri"/>
+              </a:rPr>
+              <a:t> </a:t>
+            </a:r>
+            <a:r>
+              <a:rPr lang="en-US" sz="1600" dirty="0">
                 <a:latin typeface="Calibri"/>
                 <a:cs typeface="Calibri"/>
               </a:rPr>
               <a:t>keeps</a:t>
             </a:r>
             <a:r>
-              <a:rPr lang="en-US" sz="1600" spc="-40">
-                <a:latin typeface="Calibri"/>
-                <a:cs typeface="Calibri"/>
-              </a:rPr>
-              <a:t> </a:t>
-            </a:r>
-            <a:r>
-              <a:rPr lang="en-US" sz="1600">
+              <a:rPr lang="en-US" sz="1600" spc="-40" dirty="0">
+                <a:latin typeface="Calibri"/>
+                <a:cs typeface="Calibri"/>
+              </a:rPr>
+              <a:t> </a:t>
+            </a:r>
+            <a:r>
+              <a:rPr lang="en-US" sz="1600" dirty="0">
                 <a:latin typeface="Calibri"/>
                 <a:cs typeface="Calibri"/>
               </a:rPr>
               <a:t>data</a:t>
             </a:r>
             <a:r>
-              <a:rPr lang="en-US" sz="1600" spc="-55">
-                <a:latin typeface="Calibri"/>
-                <a:cs typeface="Calibri"/>
-              </a:rPr>
-              <a:t> </a:t>
-            </a:r>
-            <a:r>
-              <a:rPr lang="en-US" sz="1600">
+              <a:rPr lang="en-US" sz="1600" spc="-55" dirty="0">
+                <a:latin typeface="Calibri"/>
+                <a:cs typeface="Calibri"/>
+              </a:rPr>
+              <a:t> </a:t>
+            </a:r>
+            <a:r>
+              <a:rPr lang="en-US" sz="1600" dirty="0">
                 <a:latin typeface="Calibri"/>
                 <a:cs typeface="Calibri"/>
               </a:rPr>
               <a:t>in</a:t>
             </a:r>
             <a:r>
-              <a:rPr lang="en-US" sz="1600" spc="-40">
-                <a:latin typeface="Calibri"/>
-                <a:cs typeface="Calibri"/>
-              </a:rPr>
-              <a:t> </a:t>
-            </a:r>
-            <a:r>
-              <a:rPr lang="en-US" sz="1600">
+              <a:rPr lang="en-US" sz="1600" spc="-40" dirty="0">
+                <a:latin typeface="Calibri"/>
+                <a:cs typeface="Calibri"/>
+              </a:rPr>
+              <a:t> </a:t>
+            </a:r>
+            <a:r>
+              <a:rPr lang="en-US" sz="1600" dirty="0">
                 <a:latin typeface="Calibri"/>
                 <a:cs typeface="Calibri"/>
               </a:rPr>
               <a:t>memory</a:t>
             </a:r>
             <a:r>
-              <a:rPr lang="en-US" sz="1600" spc="-30">
-                <a:latin typeface="Calibri"/>
-                <a:cs typeface="Calibri"/>
-              </a:rPr>
-              <a:t> </a:t>
-            </a:r>
-            <a:r>
-              <a:rPr lang="en-US" sz="1600" spc="-10">
+              <a:rPr lang="en-US" sz="1600" spc="-30" dirty="0">
+                <a:latin typeface="Calibri"/>
+                <a:cs typeface="Calibri"/>
+              </a:rPr>
+              <a:t> </a:t>
+            </a:r>
+            <a:r>
+              <a:rPr lang="en-US" sz="1600" spc="-10" dirty="0">
                 <a:latin typeface="Calibri"/>
                 <a:cs typeface="Calibri"/>
               </a:rPr>
               <a:t>between transformations,</a:t>
             </a:r>
             <a:r>
-              <a:rPr lang="en-US" sz="1600" spc="-45">
-                <a:latin typeface="Calibri"/>
-                <a:cs typeface="Calibri"/>
-              </a:rPr>
-              <a:t> </a:t>
-            </a:r>
-            <a:r>
-              <a:rPr lang="en-US" sz="1600">
+              <a:rPr lang="en-US" sz="1600" spc="-45" dirty="0">
+                <a:latin typeface="Calibri"/>
+                <a:cs typeface="Calibri"/>
+              </a:rPr>
+              <a:t> </a:t>
+            </a:r>
+            <a:r>
+              <a:rPr lang="en-US" sz="1600" dirty="0">
                 <a:latin typeface="Calibri"/>
                 <a:cs typeface="Calibri"/>
               </a:rPr>
               <a:t>speeding</a:t>
             </a:r>
             <a:r>
-              <a:rPr lang="en-US" sz="1600" spc="-30">
-                <a:latin typeface="Calibri"/>
-                <a:cs typeface="Calibri"/>
-              </a:rPr>
-              <a:t> </a:t>
-            </a:r>
-            <a:r>
-              <a:rPr lang="en-US" sz="1600">
+              <a:rPr lang="en-US" sz="1600" spc="-30" dirty="0">
+                <a:latin typeface="Calibri"/>
+                <a:cs typeface="Calibri"/>
+              </a:rPr>
+              <a:t> </a:t>
+            </a:r>
+            <a:r>
+              <a:rPr lang="en-US" sz="1600" dirty="0">
                 <a:latin typeface="Calibri"/>
                 <a:cs typeface="Calibri"/>
               </a:rPr>
               <a:t>up</a:t>
             </a:r>
             <a:r>
-              <a:rPr lang="en-US" sz="1600" spc="-20">
-                <a:latin typeface="Calibri"/>
-                <a:cs typeface="Calibri"/>
-              </a:rPr>
-              <a:t> </a:t>
-            </a:r>
-            <a:r>
-              <a:rPr lang="en-US" sz="1600" spc="-10">
+              <a:rPr lang="en-US" sz="1600" spc="-20" dirty="0">
+                <a:latin typeface="Calibri"/>
+                <a:cs typeface="Calibri"/>
+              </a:rPr>
+              <a:t> </a:t>
+            </a:r>
+            <a:r>
+              <a:rPr lang="en-US" sz="1600" spc="-10" dirty="0">
                 <a:latin typeface="Calibri"/>
                 <a:cs typeface="Calibri"/>
               </a:rPr>
               <a:t>processing</a:t>
             </a:r>
             <a:r>
-              <a:rPr lang="en-US" sz="1600" spc="-30">
-                <a:latin typeface="Calibri"/>
-                <a:cs typeface="Calibri"/>
-              </a:rPr>
-              <a:t> </a:t>
-            </a:r>
-            <a:r>
-              <a:rPr lang="en-US" sz="1600">
+              <a:rPr lang="en-US" sz="1600" spc="-30" dirty="0">
+                <a:latin typeface="Calibri"/>
+                <a:cs typeface="Calibri"/>
+              </a:rPr>
+              <a:t> </a:t>
+            </a:r>
+            <a:r>
+              <a:rPr lang="en-US" sz="1600" dirty="0">
                 <a:latin typeface="Calibri"/>
                 <a:cs typeface="Calibri"/>
               </a:rPr>
               <a:t>times</a:t>
             </a:r>
             <a:r>
-              <a:rPr lang="en-US" sz="1600" spc="-5">
-                <a:latin typeface="Calibri"/>
-                <a:cs typeface="Calibri"/>
-              </a:rPr>
-              <a:t> </a:t>
-            </a:r>
-            <a:r>
-              <a:rPr lang="en-US" sz="1600" spc="-10">
+              <a:rPr lang="en-US" sz="1600" spc="-5" dirty="0">
+                <a:latin typeface="Calibri"/>
+                <a:cs typeface="Calibri"/>
+              </a:rPr>
+              <a:t> </a:t>
+            </a:r>
+            <a:r>
+              <a:rPr lang="en-US" sz="1600" spc="-10" dirty="0">
                 <a:latin typeface="Calibri"/>
                 <a:cs typeface="Calibri"/>
               </a:rPr>
               <a:t>significantly</a:t>
             </a:r>
             <a:r>
-              <a:rPr lang="en-US" sz="1600" spc="-25">
-                <a:latin typeface="Calibri"/>
-                <a:cs typeface="Calibri"/>
-              </a:rPr>
-              <a:t> </a:t>
-            </a:r>
-            <a:r>
-              <a:rPr lang="en-US" sz="1600" spc="-10">
+              <a:rPr lang="en-US" sz="1600" spc="-25" dirty="0">
+                <a:latin typeface="Calibri"/>
+                <a:cs typeface="Calibri"/>
+              </a:rPr>
+              <a:t> </a:t>
+            </a:r>
+            <a:r>
+              <a:rPr lang="en-US" sz="1600" spc="-10" dirty="0">
                 <a:latin typeface="Calibri"/>
                 <a:cs typeface="Calibri"/>
               </a:rPr>
               <a:t>compared </a:t>
             </a:r>
             <a:r>
-              <a:rPr lang="en-US" sz="1600">
+              <a:rPr lang="en-US" sz="1600" dirty="0">
                 <a:latin typeface="Calibri"/>
                 <a:cs typeface="Calibri"/>
               </a:rPr>
               <a:t>to</a:t>
             </a:r>
             <a:r>
-              <a:rPr lang="en-US" sz="1600" spc="-15">
-                <a:latin typeface="Calibri"/>
-                <a:cs typeface="Calibri"/>
-              </a:rPr>
-              <a:t> </a:t>
-            </a:r>
-            <a:r>
-              <a:rPr lang="en-US" sz="1600" spc="-10">
+              <a:rPr lang="en-US" sz="1600" spc="-15" dirty="0">
+                <a:latin typeface="Calibri"/>
+                <a:cs typeface="Calibri"/>
+              </a:rPr>
+              <a:t> </a:t>
+            </a:r>
+            <a:r>
+              <a:rPr lang="en-US" sz="1600" spc="-10" dirty="0">
                 <a:latin typeface="Calibri"/>
                 <a:cs typeface="Calibri"/>
               </a:rPr>
               <a:t>disk-</a:t>
             </a:r>
             <a:r>
-              <a:rPr lang="en-US" sz="1600">
+              <a:rPr lang="en-US" sz="1600" dirty="0">
                 <a:latin typeface="Calibri"/>
                 <a:cs typeface="Calibri"/>
               </a:rPr>
               <a:t>based</a:t>
             </a:r>
             <a:r>
-              <a:rPr lang="en-US" sz="1600" spc="-10">
+              <a:rPr lang="en-US" sz="1600" spc="-10" dirty="0">
                 <a:latin typeface="Calibri"/>
                 <a:cs typeface="Calibri"/>
               </a:rPr>
               <a:t> MapReduce.</a:t>
             </a:r>
-            <a:endParaRPr lang="en-US" sz="1600">
+            <a:endParaRPr lang="en-US" sz="1600" dirty="0">
               <a:latin typeface="Calibri"/>
               <a:cs typeface="Calibri"/>
             </a:endParaRPr>
           </a:p>
           <a:p>
-            <a:pPr marL="241300" marR="104139" indent="-229235">
+            <a:pPr marL="241300" marR="103505" indent="-229235">
               <a:lnSpc>
                 <a:spcPct val="70000"/>
               </a:lnSpc>
@@ -16681,84 +16981,85 @@
               </a:tabLst>
             </a:pPr>
             <a:r>
-              <a:rPr lang="en-US" sz="1600">
+              <a:rPr lang="en-US" sz="1600" dirty="0">
                 <a:latin typeface="Calibri"/>
                 <a:cs typeface="Calibri"/>
               </a:rPr>
               <a:t>Spark</a:t>
             </a:r>
             <a:r>
-              <a:rPr lang="en-US" sz="1600" spc="-60">
-                <a:latin typeface="Calibri"/>
-                <a:cs typeface="Calibri"/>
-              </a:rPr>
-              <a:t> </a:t>
-            </a:r>
-            <a:r>
-              <a:rPr lang="en-US" sz="1600">
+              <a:rPr lang="en-US" sz="1600" spc="-60" dirty="0">
+                <a:latin typeface="Calibri"/>
+                <a:cs typeface="Calibri"/>
+              </a:rPr>
+              <a:t> </a:t>
+            </a:r>
+            <a:r>
+              <a:rPr lang="en-US" sz="1600" dirty="0">
                 <a:latin typeface="Calibri"/>
                 <a:cs typeface="Calibri"/>
               </a:rPr>
               <a:t>can handle both</a:t>
             </a:r>
             <a:r>
-              <a:rPr lang="en-US" sz="1600" spc="-60">
-                <a:latin typeface="Calibri"/>
-                <a:cs typeface="Calibri"/>
-              </a:rPr>
-              <a:t> </a:t>
-            </a:r>
-            <a:r>
-              <a:rPr lang="en-US" sz="1600">
+              <a:rPr lang="en-US" sz="1600" spc="-60" dirty="0">
+                <a:latin typeface="Calibri"/>
+                <a:cs typeface="Calibri"/>
+              </a:rPr>
+              <a:t> </a:t>
+            </a:r>
+            <a:r>
+              <a:rPr lang="en-US" sz="1600" dirty="0">
                 <a:latin typeface="Calibri"/>
                 <a:cs typeface="Calibri"/>
               </a:rPr>
               <a:t>batch</a:t>
             </a:r>
             <a:r>
-              <a:rPr lang="en-US" sz="1600" spc="-45">
-                <a:latin typeface="Calibri"/>
-                <a:cs typeface="Calibri"/>
-              </a:rPr>
-              <a:t> </a:t>
-            </a:r>
-            <a:r>
-              <a:rPr lang="en-US" sz="1600">
+              <a:rPr lang="en-US" sz="1600" spc="-45" dirty="0">
+                <a:latin typeface="Calibri"/>
+                <a:cs typeface="Calibri"/>
+              </a:rPr>
+              <a:t> </a:t>
+            </a:r>
+            <a:r>
+              <a:rPr lang="en-US" sz="1600" dirty="0">
                 <a:latin typeface="Calibri"/>
                 <a:cs typeface="Calibri"/>
               </a:rPr>
               <a:t>and</a:t>
             </a:r>
             <a:r>
-              <a:rPr lang="en-US" sz="1600" spc="-45">
-                <a:latin typeface="Calibri"/>
-                <a:cs typeface="Calibri"/>
-              </a:rPr>
-              <a:t> </a:t>
-            </a:r>
-            <a:r>
-              <a:rPr lang="en-US" sz="1600">
+              <a:rPr lang="en-US" sz="1600" spc="-45" dirty="0">
+                <a:latin typeface="Calibri"/>
+                <a:cs typeface="Calibri"/>
+              </a:rPr>
+              <a:t> </a:t>
+            </a:r>
+            <a:r>
+              <a:rPr lang="en-US" sz="1600" dirty="0">
                 <a:latin typeface="Calibri"/>
                 <a:cs typeface="Calibri"/>
               </a:rPr>
               <a:t>real-time</a:t>
             </a:r>
             <a:r>
-              <a:rPr lang="en-US" sz="1600" spc="-35">
-                <a:latin typeface="Calibri"/>
-                <a:cs typeface="Calibri"/>
-              </a:rPr>
-              <a:t> </a:t>
-            </a:r>
-            <a:r>
-              <a:rPr lang="en-US" sz="1600" spc="-10">
+              <a:rPr lang="en-US" sz="1600" spc="-35" dirty="0">
+                <a:latin typeface="Calibri"/>
+                <a:cs typeface="Calibri"/>
+              </a:rPr>
+              <a:t> </a:t>
+            </a:r>
+            <a:r>
+              <a:rPr lang="en-US" sz="1600" spc="-10" dirty="0">
                 <a:latin typeface="Calibri"/>
                 <a:cs typeface="Calibri"/>
               </a:rPr>
               <a:t>processing.</a:t>
             </a:r>
-            <a:endParaRPr lang="en-US" sz="1600">
+            <a:endParaRPr lang="en-US" sz="1600" dirty="0">
               <a:latin typeface="Calibri"/>
+              <a:ea typeface="Calibri"/>
               <a:cs typeface="Calibri"/>
             </a:endParaRPr>
           </a:p>
@@ -16777,146 +17078,146 @@
               </a:tabLst>
             </a:pPr>
             <a:r>
-              <a:rPr lang="en-US" sz="1600">
+              <a:rPr lang="en-US" sz="1600" dirty="0">
                 <a:latin typeface="Calibri"/>
                 <a:cs typeface="Calibri"/>
               </a:rPr>
               <a:t>Spark</a:t>
             </a:r>
             <a:r>
-              <a:rPr lang="en-US" sz="1600" spc="-60">
-                <a:latin typeface="Calibri"/>
-                <a:cs typeface="Calibri"/>
-              </a:rPr>
-              <a:t> </a:t>
-            </a:r>
-            <a:r>
-              <a:rPr lang="en-US" sz="1600" spc="-10">
+              <a:rPr lang="en-US" sz="1600" spc="-60" dirty="0">
+                <a:latin typeface="Calibri"/>
+                <a:cs typeface="Calibri"/>
+              </a:rPr>
+              <a:t> </a:t>
+            </a:r>
+            <a:r>
+              <a:rPr lang="en-US" sz="1600" spc="-10" dirty="0">
                 <a:latin typeface="Calibri"/>
                 <a:cs typeface="Calibri"/>
               </a:rPr>
               <a:t>offers</a:t>
             </a:r>
             <a:r>
-              <a:rPr lang="en-US" sz="1600" spc="-25">
-                <a:latin typeface="Calibri"/>
-                <a:cs typeface="Calibri"/>
-              </a:rPr>
-              <a:t> </a:t>
-            </a:r>
-            <a:r>
-              <a:rPr lang="en-US" sz="1600">
+              <a:rPr lang="en-US" sz="1600" spc="-25" dirty="0">
+                <a:latin typeface="Calibri"/>
+                <a:cs typeface="Calibri"/>
+              </a:rPr>
+              <a:t> </a:t>
+            </a:r>
+            <a:r>
+              <a:rPr lang="en-US" sz="1600" dirty="0">
                 <a:latin typeface="Calibri"/>
                 <a:cs typeface="Calibri"/>
               </a:rPr>
               <a:t>APIs</a:t>
             </a:r>
             <a:r>
-              <a:rPr lang="en-US" sz="1600" spc="-35">
-                <a:latin typeface="Calibri"/>
-                <a:cs typeface="Calibri"/>
-              </a:rPr>
-              <a:t> </a:t>
-            </a:r>
-            <a:r>
-              <a:rPr lang="en-US" sz="1600">
+              <a:rPr lang="en-US" sz="1600" spc="-35" dirty="0">
+                <a:latin typeface="Calibri"/>
+                <a:cs typeface="Calibri"/>
+              </a:rPr>
+              <a:t> </a:t>
+            </a:r>
+            <a:r>
+              <a:rPr lang="en-US" sz="1600" dirty="0">
                 <a:latin typeface="Calibri"/>
                 <a:cs typeface="Calibri"/>
               </a:rPr>
               <a:t>for</a:t>
             </a:r>
             <a:r>
-              <a:rPr lang="en-US" sz="1600" spc="-20">
-                <a:latin typeface="Calibri"/>
-                <a:cs typeface="Calibri"/>
-              </a:rPr>
-              <a:t> </a:t>
-            </a:r>
-            <a:r>
-              <a:rPr lang="en-US" sz="1600">
+              <a:rPr lang="en-US" sz="1600" spc="-20" dirty="0">
+                <a:latin typeface="Calibri"/>
+                <a:cs typeface="Calibri"/>
+              </a:rPr>
+              <a:t> </a:t>
+            </a:r>
+            <a:r>
+              <a:rPr lang="en-US" sz="1600" dirty="0">
                 <a:latin typeface="Calibri"/>
                 <a:cs typeface="Calibri"/>
               </a:rPr>
               <a:t>various</a:t>
             </a:r>
             <a:r>
-              <a:rPr lang="en-US" sz="1600" spc="-35">
-                <a:latin typeface="Calibri"/>
-                <a:cs typeface="Calibri"/>
-              </a:rPr>
-              <a:t> </a:t>
-            </a:r>
-            <a:r>
-              <a:rPr lang="en-US" sz="1600">
+              <a:rPr lang="en-US" sz="1600" spc="-35" dirty="0">
+                <a:latin typeface="Calibri"/>
+                <a:cs typeface="Calibri"/>
+              </a:rPr>
+              <a:t> </a:t>
+            </a:r>
+            <a:r>
+              <a:rPr lang="en-US" sz="1600" dirty="0">
                 <a:latin typeface="Calibri"/>
                 <a:cs typeface="Calibri"/>
               </a:rPr>
               <a:t>languages</a:t>
             </a:r>
             <a:r>
-              <a:rPr lang="en-US" sz="1600" spc="-35">
-                <a:latin typeface="Calibri"/>
-                <a:cs typeface="Calibri"/>
-              </a:rPr>
-              <a:t> </a:t>
-            </a:r>
-            <a:r>
-              <a:rPr lang="en-US" sz="1600" spc="-10">
+              <a:rPr lang="en-US" sz="1600" spc="-35" dirty="0">
+                <a:latin typeface="Calibri"/>
+                <a:cs typeface="Calibri"/>
+              </a:rPr>
+              <a:t> </a:t>
+            </a:r>
+            <a:r>
+              <a:rPr lang="en-US" sz="1600" spc="-10" dirty="0">
                 <a:latin typeface="Calibri"/>
                 <a:cs typeface="Calibri"/>
               </a:rPr>
               <a:t>(Java,</a:t>
             </a:r>
             <a:r>
-              <a:rPr lang="en-US" sz="1600" spc="-65">
-                <a:latin typeface="Calibri"/>
-                <a:cs typeface="Calibri"/>
-              </a:rPr>
-              <a:t> </a:t>
-            </a:r>
-            <a:r>
-              <a:rPr lang="en-US" sz="1600">
+              <a:rPr lang="en-US" sz="1600" spc="-65" dirty="0">
+                <a:latin typeface="Calibri"/>
+                <a:cs typeface="Calibri"/>
+              </a:rPr>
+              <a:t> </a:t>
+            </a:r>
+            <a:r>
+              <a:rPr lang="en-US" sz="1600" dirty="0">
                 <a:latin typeface="Calibri"/>
                 <a:cs typeface="Calibri"/>
               </a:rPr>
               <a:t>Scala,</a:t>
             </a:r>
             <a:r>
-              <a:rPr lang="en-US" sz="1600" spc="-30">
-                <a:latin typeface="Calibri"/>
-                <a:cs typeface="Calibri"/>
-              </a:rPr>
-              <a:t> </a:t>
-            </a:r>
-            <a:r>
-              <a:rPr lang="en-US" sz="1600">
+              <a:rPr lang="en-US" sz="1600" spc="-30" dirty="0">
+                <a:latin typeface="Calibri"/>
+                <a:cs typeface="Calibri"/>
+              </a:rPr>
+              <a:t> </a:t>
+            </a:r>
+            <a:r>
+              <a:rPr lang="en-US" sz="1600" dirty="0">
                 <a:latin typeface="Calibri"/>
                 <a:cs typeface="Calibri"/>
               </a:rPr>
               <a:t>Python,</a:t>
             </a:r>
             <a:r>
-              <a:rPr lang="en-US" sz="1600" spc="-55">
-                <a:latin typeface="Calibri"/>
-                <a:cs typeface="Calibri"/>
-              </a:rPr>
-              <a:t> </a:t>
-            </a:r>
-            <a:r>
-              <a:rPr lang="en-US" sz="1600">
+              <a:rPr lang="en-US" sz="1600" spc="-55" dirty="0">
+                <a:latin typeface="Calibri"/>
+                <a:cs typeface="Calibri"/>
+              </a:rPr>
+              <a:t> </a:t>
+            </a:r>
+            <a:r>
+              <a:rPr lang="en-US" sz="1600" dirty="0">
                 <a:latin typeface="Calibri"/>
                 <a:cs typeface="Calibri"/>
               </a:rPr>
               <a:t>R)</a:t>
             </a:r>
             <a:r>
-              <a:rPr lang="en-US" sz="1600" spc="-30">
+              <a:rPr lang="en-US" sz="1600" spc="-30" dirty="0">
                 <a:latin typeface="Calibri"/>
                 <a:cs typeface="Calibri"/>
               </a:rPr>
               <a:t>.</a:t>
             </a:r>
-            <a:endParaRPr lang="en-US" sz="1600">
+            <a:endParaRPr lang="en-US" sz="1600" dirty="0">
               <a:latin typeface="Calibri"/>
               <a:cs typeface="Calibri"/>
             </a:endParaRPr>
@@ -16935,33 +17236,33 @@
               </a:tabLst>
             </a:pPr>
             <a:r>
-              <a:rPr lang="en-US" sz="1600" b="1">
+              <a:rPr lang="en-US" sz="1600" b="1" dirty="0">
                 <a:latin typeface="Calibri"/>
                 <a:cs typeface="Calibri"/>
               </a:rPr>
               <a:t>Core</a:t>
             </a:r>
             <a:r>
-              <a:rPr lang="en-US" sz="1600" b="1" spc="-60">
-                <a:latin typeface="Calibri"/>
-                <a:cs typeface="Calibri"/>
-              </a:rPr>
-              <a:t> </a:t>
-            </a:r>
-            <a:r>
-              <a:rPr lang="en-US" sz="1600" b="1" spc="-10">
+              <a:rPr lang="en-US" sz="1600" b="1" spc="-60" dirty="0">
+                <a:latin typeface="Calibri"/>
+                <a:cs typeface="Calibri"/>
+              </a:rPr>
+              <a:t> </a:t>
+            </a:r>
+            <a:r>
+              <a:rPr lang="en-US" sz="1600" b="1" spc="-10" dirty="0">
                 <a:latin typeface="Calibri"/>
                 <a:cs typeface="Calibri"/>
               </a:rPr>
               <a:t>Components:</a:t>
             </a:r>
-            <a:endParaRPr lang="en-US" sz="1600" b="1">
+            <a:endParaRPr lang="en-US" sz="1600" b="1" dirty="0">
               <a:latin typeface="Calibri"/>
               <a:cs typeface="Calibri"/>
             </a:endParaRPr>
           </a:p>
           <a:p>
-            <a:pPr marL="512763" lvl="1" indent="-342900">
+            <a:pPr marL="512445" lvl="1" indent="-342900">
               <a:lnSpc>
                 <a:spcPts val="1510"/>
               </a:lnSpc>
@@ -16978,7 +17279,7 @@
               <a:t>Spark</a:t>
             </a:r>
             <a:r>
-              <a:rPr lang="en-US" sz="1600" b="1" spc="-25">
+              <a:rPr lang="en-US" sz="1600" b="1" spc="-25" dirty="0">
                 <a:latin typeface="Calibri"/>
                 <a:cs typeface="Calibri"/>
               </a:rPr>
@@ -16992,7 +17293,7 @@
               <a:t>Core:</a:t>
             </a:r>
             <a:r>
-              <a:rPr lang="en-US" sz="1600" b="1" spc="-5">
+              <a:rPr lang="en-US" sz="1600" b="1" spc="-5" dirty="0">
                 <a:latin typeface="Calibri"/>
                 <a:cs typeface="Calibri"/>
               </a:rPr>
@@ -17006,7 +17307,7 @@
               <a:t>The</a:t>
             </a:r>
             <a:r>
-              <a:rPr lang="en-US" sz="1600" spc="-45">
+              <a:rPr lang="en-US" sz="1600" spc="-45" dirty="0">
                 <a:latin typeface="Calibri"/>
                 <a:cs typeface="Calibri"/>
               </a:rPr>
@@ -17020,7 +17321,7 @@
               <a:t>foundation</a:t>
             </a:r>
             <a:r>
-              <a:rPr lang="en-US" sz="1600" spc="-50">
+              <a:rPr lang="en-US" sz="1600" spc="-50" dirty="0">
                 <a:latin typeface="Calibri"/>
                 <a:cs typeface="Calibri"/>
               </a:rPr>
@@ -17034,7 +17335,7 @@
               <a:t>for</a:t>
             </a:r>
             <a:r>
-              <a:rPr lang="en-US" sz="1600" spc="-15">
+              <a:rPr lang="en-US" sz="1600" spc="-15" dirty="0">
                 <a:latin typeface="Calibri"/>
                 <a:cs typeface="Calibri"/>
               </a:rPr>
@@ -17048,7 +17349,7 @@
               <a:t>Spark’s</a:t>
             </a:r>
             <a:r>
-              <a:rPr lang="en-US" sz="1600" spc="-30">
+              <a:rPr lang="en-US" sz="1600" spc="-30" dirty="0">
                 <a:latin typeface="Calibri"/>
                 <a:cs typeface="Calibri"/>
               </a:rPr>
@@ -17062,7 +17363,7 @@
               <a:t>API,</a:t>
             </a:r>
             <a:r>
-              <a:rPr lang="en-US" sz="1600" spc="-45">
+              <a:rPr lang="en-US" sz="1600" spc="-45" dirty="0">
                 <a:latin typeface="Calibri"/>
                 <a:cs typeface="Calibri"/>
               </a:rPr>
@@ -17076,7 +17377,7 @@
               <a:t>handling</a:t>
             </a:r>
             <a:r>
-              <a:rPr lang="en-US" sz="1600" spc="-65">
+              <a:rPr lang="en-US" sz="1600" spc="-65" dirty="0">
                 <a:latin typeface="Calibri"/>
                 <a:cs typeface="Calibri"/>
               </a:rPr>
@@ -17090,7 +17391,7 @@
               <a:t>basic</a:t>
             </a:r>
             <a:r>
-              <a:rPr lang="en-US" sz="1600" spc="-25">
+              <a:rPr lang="en-US" sz="1600" spc="-25" dirty="0">
                 <a:latin typeface="Calibri"/>
                 <a:cs typeface="Calibri"/>
               </a:rPr>
@@ -17111,7 +17412,7 @@
               <a:t>rocessing</a:t>
             </a:r>
             <a:r>
-              <a:rPr lang="en-US" sz="1600" spc="-50">
+              <a:rPr lang="en-US" sz="1600" spc="-50" dirty="0">
                 <a:latin typeface="Calibri"/>
                 <a:cs typeface="Calibri"/>
               </a:rPr>
@@ -17125,7 +17426,7 @@
               <a:t>and</a:t>
             </a:r>
             <a:r>
-              <a:rPr lang="en-US" sz="1600" spc="-50">
+              <a:rPr lang="en-US" sz="1600" spc="-50" dirty="0">
                 <a:latin typeface="Calibri"/>
                 <a:cs typeface="Calibri"/>
               </a:rPr>
@@ -17139,7 +17440,7 @@
               <a:t>distributing</a:t>
             </a:r>
             <a:r>
-              <a:rPr lang="en-US" sz="1600" spc="-75">
+              <a:rPr lang="en-US" sz="1600" spc="-75" dirty="0">
                 <a:latin typeface="Calibri"/>
                 <a:cs typeface="Calibri"/>
               </a:rPr>
@@ -17153,7 +17454,7 @@
               <a:t>tasks</a:t>
             </a:r>
             <a:r>
-              <a:rPr lang="en-US" sz="1600" spc="-50">
+              <a:rPr lang="en-US" sz="1600" spc="-50" dirty="0">
                 <a:latin typeface="Calibri"/>
                 <a:cs typeface="Calibri"/>
               </a:rPr>
@@ -17167,7 +17468,7 @@
               <a:t>across</a:t>
             </a:r>
             <a:r>
-              <a:rPr lang="en-US" sz="1600" spc="-45">
+              <a:rPr lang="en-US" sz="1600" spc="-45" dirty="0">
                 <a:latin typeface="Calibri"/>
                 <a:cs typeface="Calibri"/>
               </a:rPr>
@@ -17181,7 +17482,7 @@
               <a:t>the</a:t>
             </a:r>
             <a:r>
-              <a:rPr lang="en-US" sz="1600" spc="-45">
+              <a:rPr lang="en-US" sz="1600" spc="-45" dirty="0">
                 <a:latin typeface="Calibri"/>
                 <a:cs typeface="Calibri"/>
               </a:rPr>
@@ -17196,11 +17497,12 @@
             </a:r>
             <a:endParaRPr lang="en-US" sz="1600">
               <a:latin typeface="Calibri"/>
+              <a:ea typeface="Calibri"/>
               <a:cs typeface="Calibri"/>
             </a:endParaRPr>
           </a:p>
           <a:p>
-            <a:pPr marL="512763" marR="585470" lvl="1" indent="-342900">
+            <a:pPr marL="512445" marR="585470" lvl="1" indent="-342900">
               <a:lnSpc>
                 <a:spcPct val="70000"/>
               </a:lnSpc>
@@ -17220,7 +17522,7 @@
               <a:t>Spark</a:t>
             </a:r>
             <a:r>
-              <a:rPr lang="en-US" sz="1600" b="1" spc="-30">
+              <a:rPr lang="en-US" sz="1600" b="1" spc="-30" dirty="0">
                 <a:latin typeface="Calibri"/>
                 <a:cs typeface="Calibri"/>
               </a:rPr>
@@ -17234,7 +17536,7 @@
               <a:t>SQL:</a:t>
             </a:r>
             <a:r>
-              <a:rPr lang="en-US" sz="1600" b="1" spc="-35">
+              <a:rPr lang="en-US" sz="1600" b="1" spc="-35" dirty="0">
                 <a:latin typeface="Calibri"/>
                 <a:cs typeface="Calibri"/>
               </a:rPr>
@@ -17248,7 +17550,7 @@
               <a:t>Enables</a:t>
             </a:r>
             <a:r>
-              <a:rPr lang="en-US" sz="1600" spc="-40">
+              <a:rPr lang="en-US" sz="1600" spc="-40" dirty="0">
                 <a:latin typeface="Calibri"/>
                 <a:cs typeface="Calibri"/>
               </a:rPr>
@@ -17269,7 +17571,7 @@
               <a:t>like</a:t>
             </a:r>
             <a:r>
-              <a:rPr lang="en-US" sz="1600" spc="-20">
+              <a:rPr lang="en-US" sz="1600" spc="-20" dirty="0">
                 <a:latin typeface="Calibri"/>
                 <a:cs typeface="Calibri"/>
               </a:rPr>
@@ -17283,7 +17585,7 @@
               <a:t>queries</a:t>
             </a:r>
             <a:r>
-              <a:rPr lang="en-US" sz="1600" spc="-35">
+              <a:rPr lang="en-US" sz="1600" spc="-35" dirty="0">
                 <a:latin typeface="Calibri"/>
                 <a:cs typeface="Calibri"/>
               </a:rPr>
@@ -17297,7 +17599,7 @@
               <a:t>on</a:t>
             </a:r>
             <a:r>
-              <a:rPr lang="en-US" sz="1600" spc="-45">
+              <a:rPr lang="en-US" sz="1600" spc="-45" dirty="0">
                 <a:latin typeface="Calibri"/>
                 <a:cs typeface="Calibri"/>
               </a:rPr>
@@ -17311,7 +17613,7 @@
               <a:t>data</a:t>
             </a:r>
             <a:r>
-              <a:rPr lang="en-US" sz="1600" spc="-45">
+              <a:rPr lang="en-US" sz="1600" spc="-45" dirty="0">
                 <a:latin typeface="Calibri"/>
                 <a:cs typeface="Calibri"/>
               </a:rPr>
@@ -17325,7 +17627,7 @@
               <a:t>stored</a:t>
             </a:r>
             <a:r>
-              <a:rPr lang="en-US" sz="1600" spc="-45">
+              <a:rPr lang="en-US" sz="1600" spc="-45" dirty="0">
                 <a:latin typeface="Calibri"/>
                 <a:cs typeface="Calibri"/>
               </a:rPr>
@@ -17339,7 +17641,7 @@
               <a:t>in</a:t>
             </a:r>
             <a:r>
-              <a:rPr lang="en-US" sz="1600" spc="-30">
+              <a:rPr lang="en-US" sz="1600" spc="-30" dirty="0">
                 <a:latin typeface="Calibri"/>
                 <a:cs typeface="Calibri"/>
               </a:rPr>
@@ -17360,7 +17662,7 @@
               <a:t>datasets</a:t>
             </a:r>
             <a:r>
-              <a:rPr lang="en-US" sz="1600" spc="-40">
+              <a:rPr lang="en-US" sz="1600" spc="-40" dirty="0">
                 <a:latin typeface="Calibri"/>
                 <a:cs typeface="Calibri"/>
               </a:rPr>
@@ -17381,7 +17683,7 @@
               <a:t>DataFrames</a:t>
             </a:r>
             <a:r>
-              <a:rPr lang="en-US" sz="1600" spc="-40">
+              <a:rPr lang="en-US" sz="1600" spc="-40" dirty="0">
                 <a:latin typeface="Calibri"/>
                 <a:cs typeface="Calibri"/>
               </a:rPr>
@@ -17395,7 +17697,7 @@
               <a:t>and</a:t>
             </a:r>
             <a:r>
-              <a:rPr lang="en-US" sz="1600" spc="-45">
+              <a:rPr lang="en-US" sz="1600" spc="-45" dirty="0">
                 <a:latin typeface="Calibri"/>
                 <a:cs typeface="Calibri"/>
               </a:rPr>
@@ -17410,11 +17712,12 @@
             </a:r>
             <a:endParaRPr lang="en-US" sz="1600">
               <a:latin typeface="Calibri"/>
+              <a:ea typeface="Calibri"/>
               <a:cs typeface="Calibri"/>
             </a:endParaRPr>
           </a:p>
           <a:p>
-            <a:pPr marL="512763" marR="83820" lvl="1" indent="-342900">
+            <a:pPr marL="512445" marR="83820" lvl="1" indent="-342900">
               <a:lnSpc>
                 <a:spcPct val="70000"/>
               </a:lnSpc>
@@ -17434,7 +17737,7 @@
               <a:t>Spark</a:t>
             </a:r>
             <a:r>
-              <a:rPr lang="en-US" sz="1600" b="1" spc="-25">
+              <a:rPr lang="en-US" sz="1600" b="1" spc="-25" dirty="0">
                 <a:latin typeface="Calibri"/>
                 <a:cs typeface="Calibri"/>
               </a:rPr>
@@ -17448,7 +17751,7 @@
               <a:t>Streaming:</a:t>
             </a:r>
             <a:r>
-              <a:rPr lang="en-US" sz="1600" b="1" spc="-35">
+              <a:rPr lang="en-US" sz="1600" b="1" spc="-35" dirty="0">
                 <a:latin typeface="Calibri"/>
                 <a:cs typeface="Calibri"/>
               </a:rPr>
@@ -17462,7 +17765,7 @@
               <a:t>Allows</a:t>
             </a:r>
             <a:r>
-              <a:rPr lang="en-US" sz="1600" spc="-35">
+              <a:rPr lang="en-US" sz="1600" spc="-35" dirty="0">
                 <a:latin typeface="Calibri"/>
                 <a:cs typeface="Calibri"/>
               </a:rPr>
@@ -17476,7 +17779,7 @@
               <a:t>processing</a:t>
             </a:r>
             <a:r>
-              <a:rPr lang="en-US" sz="1600" spc="-40">
+              <a:rPr lang="en-US" sz="1600" spc="-40" dirty="0">
                 <a:latin typeface="Calibri"/>
                 <a:cs typeface="Calibri"/>
               </a:rPr>
@@ -17490,7 +17793,7 @@
               <a:t>of</a:t>
             </a:r>
             <a:r>
-              <a:rPr lang="en-US" sz="1600" spc="-35">
+              <a:rPr lang="en-US" sz="1600" spc="-35" dirty="0">
                 <a:latin typeface="Calibri"/>
                 <a:cs typeface="Calibri"/>
               </a:rPr>
@@ -17511,7 +17814,7 @@
               <a:t>time</a:t>
             </a:r>
             <a:r>
-              <a:rPr lang="en-US" sz="1600" spc="-25">
+              <a:rPr lang="en-US" sz="1600" spc="-25" dirty="0">
                 <a:latin typeface="Calibri"/>
                 <a:cs typeface="Calibri"/>
               </a:rPr>
@@ -17525,7 +17828,7 @@
               <a:t>data</a:t>
             </a:r>
             <a:r>
-              <a:rPr lang="en-US" sz="1600" spc="-40">
+              <a:rPr lang="en-US" sz="1600" spc="-40" dirty="0">
                 <a:latin typeface="Calibri"/>
                 <a:cs typeface="Calibri"/>
               </a:rPr>
@@ -17539,7 +17842,7 @@
               <a:t>streams,</a:t>
             </a:r>
             <a:r>
-              <a:rPr lang="en-US" sz="1600" spc="-50">
+              <a:rPr lang="en-US" sz="1600" spc="-50" dirty="0">
                 <a:latin typeface="Calibri"/>
                 <a:cs typeface="Calibri"/>
               </a:rPr>
@@ -17560,7 +17863,7 @@
               <a:t>near</a:t>
             </a:r>
             <a:r>
-              <a:rPr lang="en-US" sz="1600" spc="-10">
+              <a:rPr lang="en-US" sz="1600" spc="-10" dirty="0">
                 <a:latin typeface="Calibri"/>
                 <a:cs typeface="Calibri"/>
               </a:rPr>
@@ -17581,7 +17884,7 @@
               <a:t>time</a:t>
             </a:r>
             <a:r>
-              <a:rPr lang="en-US" sz="1600" spc="15">
+              <a:rPr lang="en-US" sz="1600" spc="15" dirty="0">
                 <a:latin typeface="Calibri"/>
                 <a:cs typeface="Calibri"/>
               </a:rPr>
@@ -17596,11 +17899,12 @@
             </a:r>
             <a:endParaRPr lang="en-US" sz="1600">
               <a:latin typeface="Calibri"/>
+              <a:ea typeface="Calibri"/>
               <a:cs typeface="Calibri"/>
             </a:endParaRPr>
           </a:p>
           <a:p>
-            <a:pPr marL="512763" lvl="1" indent="-342900">
+            <a:pPr marL="512445" lvl="1" indent="-342900">
               <a:lnSpc>
                 <a:spcPts val="1495"/>
               </a:lnSpc>
@@ -17624,7 +17928,7 @@
               <a:t>:</a:t>
             </a:r>
             <a:r>
-              <a:rPr lang="en-US" sz="1600" b="1" spc="-45">
+              <a:rPr lang="en-US" sz="1600" b="1" spc="-45" dirty="0">
                 <a:latin typeface="Calibri"/>
                 <a:cs typeface="Calibri"/>
               </a:rPr>
@@ -17638,7 +17942,7 @@
               <a:t>Spark’s</a:t>
             </a:r>
             <a:r>
-              <a:rPr lang="en-US" sz="1600" spc="-30">
+              <a:rPr lang="en-US" sz="1600" spc="-30" dirty="0">
                 <a:latin typeface="Calibri"/>
                 <a:cs typeface="Calibri"/>
               </a:rPr>
@@ -17652,7 +17956,7 @@
               <a:t>machine</a:t>
             </a:r>
             <a:r>
-              <a:rPr lang="en-US" sz="1600" spc="-30">
+              <a:rPr lang="en-US" sz="1600" spc="-30" dirty="0">
                 <a:latin typeface="Calibri"/>
                 <a:cs typeface="Calibri"/>
               </a:rPr>
@@ -17666,7 +17970,7 @@
               <a:t>learning</a:t>
             </a:r>
             <a:r>
-              <a:rPr lang="en-US" sz="1600" spc="-55">
+              <a:rPr lang="en-US" sz="1600" spc="-55" dirty="0">
                 <a:latin typeface="Calibri"/>
                 <a:cs typeface="Calibri"/>
               </a:rPr>
@@ -17680,7 +17984,7 @@
               <a:t>library,</a:t>
             </a:r>
             <a:r>
-              <a:rPr lang="en-US" sz="1600" spc="-40">
+              <a:rPr lang="en-US" sz="1600" spc="-40" dirty="0">
                 <a:latin typeface="Calibri"/>
                 <a:cs typeface="Calibri"/>
               </a:rPr>
@@ -17694,7 +17998,7 @@
               <a:t>offering</a:t>
             </a:r>
             <a:r>
-              <a:rPr lang="en-US" sz="1600" spc="-25">
+              <a:rPr lang="en-US" sz="1600" spc="-25" dirty="0">
                 <a:latin typeface="Calibri"/>
                 <a:cs typeface="Calibri"/>
               </a:rPr>
@@ -17708,7 +18012,7 @@
               <a:t>tools</a:t>
             </a:r>
             <a:r>
-              <a:rPr lang="en-US" sz="1600" spc="-40">
+              <a:rPr lang="en-US" sz="1600" spc="-40" dirty="0">
                 <a:latin typeface="Calibri"/>
                 <a:cs typeface="Calibri"/>
               </a:rPr>
@@ -17722,7 +18026,7 @@
               <a:t>for</a:t>
             </a:r>
             <a:r>
-              <a:rPr lang="en-US" sz="1600" spc="-20">
+              <a:rPr lang="en-US" sz="1600" spc="-20" dirty="0">
                 <a:latin typeface="Calibri"/>
                 <a:cs typeface="Calibri"/>
               </a:rPr>
@@ -17743,7 +18047,7 @@
               <a:t>machine</a:t>
             </a:r>
             <a:r>
-              <a:rPr lang="en-US" sz="1600" spc="-30">
+              <a:rPr lang="en-US" sz="1600" spc="-30" dirty="0">
                 <a:latin typeface="Calibri"/>
                 <a:cs typeface="Calibri"/>
               </a:rPr>
@@ -17758,11 +18062,12 @@
             </a:r>
             <a:endParaRPr lang="en-US" sz="1600">
               <a:latin typeface="Calibri"/>
+              <a:ea typeface="Calibri"/>
               <a:cs typeface="Calibri"/>
             </a:endParaRPr>
           </a:p>
           <a:p>
-            <a:pPr marL="512763" lvl="1" indent="-342900">
+            <a:pPr marL="512445" lvl="1" indent="-342900">
               <a:lnSpc>
                 <a:spcPts val="1775"/>
               </a:lnSpc>
@@ -17786,7 +18091,7 @@
               <a:t>:</a:t>
             </a:r>
             <a:r>
-              <a:rPr lang="en-US" sz="1600" b="1" spc="-55">
+              <a:rPr lang="en-US" sz="1600" b="1" spc="-55" dirty="0">
                 <a:latin typeface="Calibri"/>
                 <a:cs typeface="Calibri"/>
               </a:rPr>
@@ -17800,7 +18105,7 @@
               <a:t>A</a:t>
             </a:r>
             <a:r>
-              <a:rPr lang="en-US" sz="1600" spc="-35">
+              <a:rPr lang="en-US" sz="1600" spc="-35" dirty="0">
                 <a:latin typeface="Calibri"/>
                 <a:cs typeface="Calibri"/>
               </a:rPr>
@@ -17814,7 +18119,7 @@
               <a:t>graph</a:t>
             </a:r>
             <a:r>
-              <a:rPr lang="en-US" sz="1600" spc="-55">
+              <a:rPr lang="en-US" sz="1600" spc="-55" dirty="0">
                 <a:latin typeface="Calibri"/>
                 <a:cs typeface="Calibri"/>
               </a:rPr>
@@ -17828,7 +18133,7 @@
               <a:t>processing</a:t>
             </a:r>
             <a:r>
-              <a:rPr lang="en-US" sz="1600" spc="-45">
+              <a:rPr lang="en-US" sz="1600" spc="-45" dirty="0">
                 <a:latin typeface="Calibri"/>
                 <a:cs typeface="Calibri"/>
               </a:rPr>
@@ -17842,7 +18147,7 @@
               <a:t>library</a:t>
             </a:r>
             <a:r>
-              <a:rPr lang="en-US" sz="1600" spc="-45">
+              <a:rPr lang="en-US" sz="1600" spc="-45" dirty="0">
                 <a:latin typeface="Calibri"/>
                 <a:cs typeface="Calibri"/>
               </a:rPr>
@@ -17856,7 +18161,7 @@
               <a:t>for</a:t>
             </a:r>
             <a:r>
-              <a:rPr lang="en-US" sz="1600" spc="-30">
+              <a:rPr lang="en-US" sz="1600" spc="-30" dirty="0">
                 <a:latin typeface="Calibri"/>
                 <a:cs typeface="Calibri"/>
               </a:rPr>
@@ -17877,7 +18182,7 @@
               <a:t>scale</a:t>
             </a:r>
             <a:r>
-              <a:rPr lang="en-US" sz="1600" spc="-40">
+              <a:rPr lang="en-US" sz="1600" spc="-40" dirty="0">
                 <a:latin typeface="Calibri"/>
                 <a:cs typeface="Calibri"/>
               </a:rPr>
@@ -17891,7 +18196,7 @@
               <a:t>graph</a:t>
             </a:r>
             <a:r>
-              <a:rPr lang="en-US" sz="1600" spc="-55">
+              <a:rPr lang="en-US" sz="1600" spc="-55" dirty="0">
                 <a:latin typeface="Calibri"/>
                 <a:cs typeface="Calibri"/>
               </a:rPr>
@@ -17906,6 +18211,7 @@
             </a:r>
             <a:endParaRPr lang="en-US" sz="1600">
               <a:latin typeface="Calibri"/>
+              <a:ea typeface="Calibri"/>
               <a:cs typeface="Calibri"/>
             </a:endParaRPr>
           </a:p>
@@ -17925,8 +18231,8 @@
         </p:blipFill>
         <p:spPr>
           <a:xfrm>
-            <a:off x="9197734" y="1122111"/>
-            <a:ext cx="1106272" cy="583896"/>
+            <a:off x="9056123" y="1088394"/>
+            <a:ext cx="1389493" cy="813170"/>
           </a:xfrm>
           <a:prstGeom prst="rect">
             <a:avLst/>
@@ -17986,6 +18292,273 @@
 </file>
 
 <file path=ppt/slides/slide21.xml><?xml version="1.0" encoding="utf-8"?>
+<p:sld xmlns:a="http://schemas.openxmlformats.org/drawingml/2006/main" xmlns:r="http://schemas.openxmlformats.org/officeDocument/2006/relationships" xmlns:p="http://schemas.openxmlformats.org/presentationml/2006/main">
+  <p:cSld>
+    <p:spTree>
+      <p:nvGrpSpPr>
+        <p:cNvPr id="1" name=""/>
+        <p:cNvGrpSpPr/>
+        <p:nvPr/>
+      </p:nvGrpSpPr>
+      <p:grpSpPr>
+        <a:xfrm>
+          <a:off x="0" y="0"/>
+          <a:ext cx="0" cy="0"/>
+          <a:chOff x="0" y="0"/>
+          <a:chExt cx="0" cy="0"/>
+        </a:xfrm>
+      </p:grpSpPr>
+      <p:sp>
+        <p:nvSpPr>
+          <p:cNvPr id="2" name="Title 1">
+            <a:extLst>
+              <a:ext uri="{FF2B5EF4-FFF2-40B4-BE49-F238E27FC236}">
+                <a16:creationId xmlns:a16="http://schemas.microsoft.com/office/drawing/2014/main" id="{10F94810-6956-B8FE-E0F1-548F2181FEA5}"/>
+              </a:ext>
+            </a:extLst>
+          </p:cNvPr>
+          <p:cNvSpPr>
+            <a:spLocks noGrp="1"/>
+          </p:cNvSpPr>
+          <p:nvPr>
+            <p:ph type="title"/>
+          </p:nvPr>
+        </p:nvSpPr>
+        <p:spPr/>
+        <p:txBody>
+          <a:bodyPr/>
+          <a:lstStyle/>
+          <a:p>
+            <a:endParaRPr lang="en-US"/>
+          </a:p>
+        </p:txBody>
+      </p:sp>
+      <p:sp>
+        <p:nvSpPr>
+          <p:cNvPr id="3" name="Content Placeholder 2">
+            <a:extLst>
+              <a:ext uri="{FF2B5EF4-FFF2-40B4-BE49-F238E27FC236}">
+                <a16:creationId xmlns:a16="http://schemas.microsoft.com/office/drawing/2014/main" id="{CAE29CE7-34A3-D84A-09F7-F1FE82DFE999}"/>
+              </a:ext>
+            </a:extLst>
+          </p:cNvPr>
+          <p:cNvSpPr>
+            <a:spLocks noGrp="1"/>
+          </p:cNvSpPr>
+          <p:nvPr>
+            <p:ph idx="1"/>
+          </p:nvPr>
+        </p:nvSpPr>
+        <p:spPr/>
+        <p:txBody>
+          <a:bodyPr vert="horz" lIns="91440" tIns="45720" rIns="91440" bIns="45720" rtlCol="0" anchor="t">
+            <a:normAutofit/>
+          </a:bodyPr>
+          <a:lstStyle/>
+          <a:p>
+            <a:pPr marL="285750" indent="-285750"/>
+            <a:r>
+              <a:rPr lang="en-US" sz="1600" dirty="0">
+                <a:ea typeface="+mn-lt"/>
+                <a:cs typeface="+mn-lt"/>
+              </a:rPr>
+              <a:t>MapReduce is a first-generation distributed data processing system. It processes data that is parallelizable and performs computation on a distributed, horizontally scalable infrastructure. </a:t>
+            </a:r>
+            <a:endParaRPr lang="en-US" sz="1600">
+              <a:ea typeface="+mn-lt"/>
+              <a:cs typeface="+mn-lt"/>
+            </a:endParaRPr>
+          </a:p>
+          <a:p>
+            <a:pPr marL="285750" indent="-285750"/>
+            <a:r>
+              <a:rPr lang="en-US" sz="1600" dirty="0">
+                <a:ea typeface="+mn-lt"/>
+                <a:cs typeface="+mn-lt"/>
+              </a:rPr>
+              <a:t>As a distributed system, MapReduce applies a particular linear data flow structure, which consists of MapReduce programs that read input from a disk, map a function across the data, reduce the resulting data of the map, and store it on the disk again.</a:t>
+            </a:r>
+            <a:endParaRPr lang="en-US" sz="1600">
+              <a:ea typeface="Calibri"/>
+              <a:cs typeface="Calibri"/>
+            </a:endParaRPr>
+          </a:p>
+          <a:p>
+            <a:pPr marL="285750" indent="-285750"/>
+            <a:endParaRPr lang="en-US" sz="1600" dirty="0">
+              <a:ea typeface="+mn-lt"/>
+              <a:cs typeface="+mn-lt"/>
+            </a:endParaRPr>
+          </a:p>
+          <a:p>
+            <a:pPr marL="285750" indent="-285750"/>
+            <a:endParaRPr lang="en-US" sz="1600" dirty="0">
+              <a:ea typeface="+mn-lt"/>
+              <a:cs typeface="+mn-lt"/>
+            </a:endParaRPr>
+          </a:p>
+          <a:p>
+            <a:pPr marL="285750" indent="-285750"/>
+            <a:endParaRPr lang="en-US" sz="1600" dirty="0">
+              <a:ea typeface="+mn-lt"/>
+              <a:cs typeface="+mn-lt"/>
+            </a:endParaRPr>
+          </a:p>
+          <a:p>
+            <a:pPr marL="285750" indent="-285750"/>
+            <a:r>
+              <a:rPr lang="en-US" sz="1600" dirty="0">
+                <a:ea typeface="+mn-lt"/>
+                <a:cs typeface="+mn-lt"/>
+              </a:rPr>
+              <a:t>Spark is a third-generation data processing framework that enhances MapReduce’s performance by processing data in memory instead of writing them to the disk in each step. </a:t>
+            </a:r>
+            <a:endParaRPr lang="en-US" sz="1600">
+              <a:ea typeface="Calibri"/>
+              <a:cs typeface="Calibri"/>
+            </a:endParaRPr>
+          </a:p>
+          <a:p>
+            <a:pPr marL="285750" indent="-285750"/>
+            <a:r>
+              <a:rPr lang="en-US" sz="1600" dirty="0">
+                <a:ea typeface="+mn-lt"/>
+                <a:cs typeface="+mn-lt"/>
+              </a:rPr>
+              <a:t>Spark distributes the in-memory data in a logically partitioned way on many machines and calls these Resilient Distributed Datasets (RDDs), which are then used as an abstraction layer to manage the logically distributed data.</a:t>
+            </a:r>
+            <a:endParaRPr lang="en-US" sz="1600">
+              <a:ea typeface="Calibri"/>
+              <a:cs typeface="Calibri"/>
+            </a:endParaRPr>
+          </a:p>
+          <a:p>
+            <a:pPr marL="285750" indent="-285750"/>
+            <a:endParaRPr lang="en-US" sz="1600" dirty="0">
+              <a:ea typeface="Calibri" panose="020F0502020204030204"/>
+              <a:cs typeface="Calibri" panose="020F0502020204030204"/>
+            </a:endParaRPr>
+          </a:p>
+        </p:txBody>
+      </p:sp>
+      <p:pic>
+        <p:nvPicPr>
+          <p:cNvPr id="4" name="Picture 3" descr="A diagram of a cylinder&#10;&#10;AI-generated content may be incorrect.">
+            <a:extLst>
+              <a:ext uri="{FF2B5EF4-FFF2-40B4-BE49-F238E27FC236}">
+                <a16:creationId xmlns:a16="http://schemas.microsoft.com/office/drawing/2014/main" id="{78519047-ADEA-92C2-247C-84D5B7034606}"/>
+              </a:ext>
+            </a:extLst>
+          </p:cNvPr>
+          <p:cNvPicPr>
+            <a:picLocks noChangeAspect="1"/>
+          </p:cNvPicPr>
+          <p:nvPr/>
+        </p:nvPicPr>
+        <p:blipFill>
+          <a:blip r:embed="rId2"/>
+          <a:stretch>
+            <a:fillRect/>
+          </a:stretch>
+        </p:blipFill>
+        <p:spPr>
+          <a:xfrm>
+            <a:off x="3506549" y="2831977"/>
+            <a:ext cx="5556532" cy="1200789"/>
+          </a:xfrm>
+          <a:prstGeom prst="rect">
+            <a:avLst/>
+          </a:prstGeom>
+        </p:spPr>
+      </p:pic>
+      <p:pic>
+        <p:nvPicPr>
+          <p:cNvPr id="5" name="Picture 4" descr="A computer screen shot of a computer&#10;&#10;AI-generated content may be incorrect.">
+            <a:extLst>
+              <a:ext uri="{FF2B5EF4-FFF2-40B4-BE49-F238E27FC236}">
+                <a16:creationId xmlns:a16="http://schemas.microsoft.com/office/drawing/2014/main" id="{8F67E074-5434-08BD-8BD1-BAAB11107FC6}"/>
+              </a:ext>
+            </a:extLst>
+          </p:cNvPr>
+          <p:cNvPicPr>
+            <a:picLocks noChangeAspect="1"/>
+          </p:cNvPicPr>
+          <p:nvPr/>
+        </p:nvPicPr>
+        <p:blipFill>
+          <a:blip r:embed="rId3"/>
+          <a:stretch>
+            <a:fillRect/>
+          </a:stretch>
+        </p:blipFill>
+        <p:spPr>
+          <a:xfrm>
+            <a:off x="3331221" y="5156804"/>
+            <a:ext cx="6541063" cy="1386126"/>
+          </a:xfrm>
+          <a:prstGeom prst="rect">
+            <a:avLst/>
+          </a:prstGeom>
+        </p:spPr>
+      </p:pic>
+      <p:sp>
+        <p:nvSpPr>
+          <p:cNvPr id="6" name="TextBox 5">
+            <a:extLst>
+              <a:ext uri="{FF2B5EF4-FFF2-40B4-BE49-F238E27FC236}">
+                <a16:creationId xmlns:a16="http://schemas.microsoft.com/office/drawing/2014/main" id="{DF962A98-4E4C-ECF1-BFA0-EDDF016A1D0C}"/>
+              </a:ext>
+            </a:extLst>
+          </p:cNvPr>
+          <p:cNvSpPr txBox="1"/>
+          <p:nvPr/>
+        </p:nvSpPr>
+        <p:spPr>
+          <a:xfrm>
+            <a:off x="4205161" y="6612541"/>
+            <a:ext cx="4166050" cy="246221"/>
+          </a:xfrm>
+          <a:prstGeom prst="rect">
+            <a:avLst/>
+          </a:prstGeom>
+          <a:noFill/>
+        </p:spPr>
+        <p:txBody>
+          <a:bodyPr rot="0" spcFirstLastPara="0" vertOverflow="overflow" horzOverflow="overflow" vert="horz" wrap="square" lIns="91440" tIns="45720" rIns="91440" bIns="45720" numCol="1" spcCol="0" rtlCol="0" fromWordArt="0" anchor="t" anchorCtr="0" forceAA="0" compatLnSpc="1">
+            <a:prstTxWarp prst="textNoShape">
+              <a:avLst/>
+            </a:prstTxWarp>
+            <a:spAutoFit/>
+          </a:bodyPr>
+          <a:lstStyle/>
+          <a:p>
+            <a:r>
+              <a:rPr lang="en-US" sz="1000" dirty="0">
+                <a:hlinkClick r:id="rId4"/>
+              </a:rPr>
+              <a:t>https://www.redpanda.com/blog/data-stream-processing-spark-flink-ksqldb</a:t>
+            </a:r>
+            <a:endParaRPr lang="en-US" sz="1000">
+              <a:ea typeface="Calibri"/>
+              <a:cs typeface="Calibri"/>
+            </a:endParaRPr>
+          </a:p>
+        </p:txBody>
+      </p:sp>
+    </p:spTree>
+    <p:extLst>
+      <p:ext uri="{BB962C8B-B14F-4D97-AF65-F5344CB8AC3E}">
+        <p14:creationId xmlns:p14="http://schemas.microsoft.com/office/powerpoint/2010/main" val="2059959534"/>
+      </p:ext>
+    </p:extLst>
+  </p:cSld>
+  <p:clrMapOvr>
+    <a:masterClrMapping/>
+  </p:clrMapOvr>
+</p:sld>
+</file>
+
+<file path=ppt/slides/slide22.xml><?xml version="1.0" encoding="utf-8"?>
 <p:sld xmlns:a="http://schemas.openxmlformats.org/drawingml/2006/main" xmlns:r="http://schemas.openxmlformats.org/officeDocument/2006/relationships" xmlns:p="http://schemas.openxmlformats.org/presentationml/2006/main">
   <p:cSld>
     <p:spTree>
@@ -20056,7 +20629,7 @@
 </p:sld>
 </file>
 
-<file path=ppt/slides/slide22.xml><?xml version="1.0" encoding="utf-8"?>
+<file path=ppt/slides/slide23.xml><?xml version="1.0" encoding="utf-8"?>
 <p:sld xmlns:a="http://schemas.openxmlformats.org/drawingml/2006/main" xmlns:r="http://schemas.openxmlformats.org/officeDocument/2006/relationships" xmlns:p="http://schemas.openxmlformats.org/presentationml/2006/main">
   <p:cSld>
     <p:spTree>
@@ -20864,7 +21437,7 @@
 </p:sld>
 </file>
 
-<file path=ppt/slides/slide23.xml><?xml version="1.0" encoding="utf-8"?>
+<file path=ppt/slides/slide24.xml><?xml version="1.0" encoding="utf-8"?>
 <p:sld xmlns:a="http://schemas.openxmlformats.org/drawingml/2006/main" xmlns:r="http://schemas.openxmlformats.org/officeDocument/2006/relationships" xmlns:p="http://schemas.openxmlformats.org/presentationml/2006/main">
   <p:cSld>
     <p:spTree>
@@ -22892,7 +23465,7 @@
 </p:sld>
 </file>
 
-<file path=ppt/slides/slide24.xml><?xml version="1.0" encoding="utf-8"?>
+<file path=ppt/slides/slide25.xml><?xml version="1.0" encoding="utf-8"?>
 <p:sld xmlns:a="http://schemas.openxmlformats.org/drawingml/2006/main" xmlns:r="http://schemas.openxmlformats.org/officeDocument/2006/relationships" xmlns:p="http://schemas.openxmlformats.org/presentationml/2006/main">
   <p:cSld>
     <p:spTree>
@@ -25044,7 +25617,7 @@
 </p:sld>
 </file>
 
-<file path=ppt/slides/slide25.xml><?xml version="1.0" encoding="utf-8"?>
+<file path=ppt/slides/slide26.xml><?xml version="1.0" encoding="utf-8"?>
 <p:sld xmlns:a="http://schemas.openxmlformats.org/drawingml/2006/main" xmlns:r="http://schemas.openxmlformats.org/officeDocument/2006/relationships" xmlns:p="http://schemas.openxmlformats.org/presentationml/2006/main">
   <p:cSld>
     <p:spTree>
@@ -27889,7 +28462,7 @@
 </p:sld>
 </file>
 
-<file path=ppt/slides/slide26.xml><?xml version="1.0" encoding="utf-8"?>
+<file path=ppt/slides/slide27.xml><?xml version="1.0" encoding="utf-8"?>
 <p:sld xmlns:a="http://schemas.openxmlformats.org/drawingml/2006/main" xmlns:r="http://schemas.openxmlformats.org/officeDocument/2006/relationships" xmlns:p="http://schemas.openxmlformats.org/presentationml/2006/main">
   <p:cSld>
     <p:spTree>
@@ -27976,7 +28549,7 @@
 </p:sld>
 </file>
 
-<file path=ppt/slides/slide27.xml><?xml version="1.0" encoding="utf-8"?>
+<file path=ppt/slides/slide28.xml><?xml version="1.0" encoding="utf-8"?>
 <p:sld xmlns:a="http://schemas.openxmlformats.org/drawingml/2006/main" xmlns:r="http://schemas.openxmlformats.org/officeDocument/2006/relationships" xmlns:p="http://schemas.openxmlformats.org/presentationml/2006/main">
   <p:cSld>
     <p:spTree>
@@ -28017,11 +28590,18 @@
           <a:lstStyle/>
           <a:p>
             <a:r>
+              <a:rPr lang="en-US" dirty="0" err="1">
+                <a:ea typeface="Calibri Light"/>
+                <a:cs typeface="Calibri Light"/>
+              </a:rPr>
+              <a:t>MainHadoop</a:t>
+            </a:r>
+            <a:r>
               <a:rPr lang="en-US" dirty="0">
                 <a:ea typeface="Calibri Light"/>
                 <a:cs typeface="Calibri Light"/>
               </a:rPr>
-              <a:t>Other Hadoop Components</a:t>
+              <a:t> Components</a:t>
             </a:r>
             <a:endParaRPr lang="en-US" dirty="0" err="1"/>
           </a:p>
@@ -28043,14 +28623,14 @@
             <p:ph idx="1"/>
             <p:extLst>
               <p:ext uri="{D42A27DB-BD31-4B8C-83A1-F6EECF244321}">
-                <p14:modId xmlns:p14="http://schemas.microsoft.com/office/powerpoint/2010/main" val="305476034"/>
+                <p14:modId xmlns:p14="http://schemas.microsoft.com/office/powerpoint/2010/main" val="1842959723"/>
               </p:ext>
             </p:extLst>
           </p:nvPr>
         </p:nvGraphicFramePr>
         <p:xfrm>
           <a:off x="284163" y="1706563"/>
-          <a:ext cx="11069634" cy="4145280"/>
+          <a:ext cx="11069634" cy="4389120"/>
         </p:xfrm>
         <a:graphic>
           <a:graphicData uri="http://schemas.openxmlformats.org/drawingml/2006/table">
@@ -28440,6 +29020,57 @@
                     <a:bodyPr/>
                     <a:lstStyle/>
                     <a:p>
+                      <a:pPr lvl="0">
+                        <a:buNone/>
+                      </a:pPr>
+                      <a:r>
+                        <a:rPr lang="en-US" sz="1000" kern="1200" dirty="0">
+                          <a:solidFill>
+                            <a:schemeClr val="tx1"/>
+                          </a:solidFill>
+                          <a:latin typeface="+mn-lt"/>
+                          <a:ea typeface="+mn-ea"/>
+                          <a:cs typeface="+mn-cs"/>
+                        </a:rPr>
+                        <a:t>Impala</a:t>
+                      </a:r>
+                    </a:p>
+                  </a:txBody>
+                  <a:tcPr anchor="ctr"/>
+                </a:tc>
+                <a:tc>
+                  <a:txBody>
+                    <a:bodyPr/>
+                    <a:lstStyle/>
+                    <a:p>
+                      <a:pPr lvl="0">
+                        <a:buNone/>
+                      </a:pPr>
+                      <a:r>
+                        <a:rPr lang="en-US" sz="1000" b="0" i="0" u="none" strike="noStrike" kern="1200" noProof="0" dirty="0">
+                          <a:solidFill>
+                            <a:schemeClr val="tx1"/>
+                          </a:solidFill>
+                        </a:rPr>
+                        <a:t>MPP (Massively Parallel Processing) SQL query engine for real-time, interactive querying on Hadoop data.</a:t>
+                      </a:r>
+                      <a:endParaRPr lang="en-US" b="0" i="0" u="none" strike="noStrike" dirty="0"/>
+                    </a:p>
+                  </a:txBody>
+                  <a:tcPr anchor="ctr"/>
+                </a:tc>
+                <a:extLst>
+                  <a:ext uri="{0D108BD9-81ED-4DB2-BD59-A6C34878D82A}">
+                    <a16:rowId xmlns:a16="http://schemas.microsoft.com/office/drawing/2014/main" val="2182731711"/>
+                  </a:ext>
+                </a:extLst>
+              </a:tr>
+              <a:tr h="0">
+                <a:tc>
+                  <a:txBody>
+                    <a:bodyPr/>
+                    <a:lstStyle/>
+                    <a:p>
                       <a:r>
                         <a:rPr lang="en-US" sz="1000" dirty="0"/>
                         <a:t>Real-Time / Stream Processing</a:t>
@@ -28700,7 +29331,7 @@
 </p:sld>
 </file>
 
-<file path=ppt/slides/slide28.xml><?xml version="1.0" encoding="utf-8"?>
+<file path=ppt/slides/slide29.xml><?xml version="1.0" encoding="utf-8"?>
 <p:sld xmlns:a="http://schemas.openxmlformats.org/drawingml/2006/main" xmlns:r="http://schemas.openxmlformats.org/officeDocument/2006/relationships" xmlns:p="http://schemas.openxmlformats.org/presentationml/2006/main">
   <p:cSld>
     <p:spTree>
@@ -28751,7 +29382,7 @@
                 <a:ea typeface="Calibri Light"/>
                 <a:cs typeface="Calibri Light"/>
               </a:rPr>
-              <a:t>Other Hadoop Components</a:t>
+              <a:t>Main Hadoop Components</a:t>
             </a:r>
             <a:endParaRPr lang="en-US" dirty="0" err="1"/>
           </a:p>
@@ -29625,6 +30256,841 @@
 </p:sld>
 </file>
 
+<file path=ppt/slides/slide30.xml><?xml version="1.0" encoding="utf-8"?>
+<p:sld xmlns:a="http://schemas.openxmlformats.org/drawingml/2006/main" xmlns:r="http://schemas.openxmlformats.org/officeDocument/2006/relationships" xmlns:p="http://schemas.openxmlformats.org/presentationml/2006/main">
+  <p:cSld>
+    <p:spTree>
+      <p:nvGrpSpPr>
+        <p:cNvPr id="1" name=""/>
+        <p:cNvGrpSpPr/>
+        <p:nvPr/>
+      </p:nvGrpSpPr>
+      <p:grpSpPr>
+        <a:xfrm>
+          <a:off x="0" y="0"/>
+          <a:ext cx="0" cy="0"/>
+          <a:chOff x="0" y="0"/>
+          <a:chExt cx="0" cy="0"/>
+        </a:xfrm>
+      </p:grpSpPr>
+      <p:sp>
+        <p:nvSpPr>
+          <p:cNvPr id="2" name="Title 1">
+            <a:extLst>
+              <a:ext uri="{FF2B5EF4-FFF2-40B4-BE49-F238E27FC236}">
+                <a16:creationId xmlns:a16="http://schemas.microsoft.com/office/drawing/2014/main" id="{C1CCCE25-35C5-F8C2-93F3-75E6F478CF44}"/>
+              </a:ext>
+            </a:extLst>
+          </p:cNvPr>
+          <p:cNvSpPr>
+            <a:spLocks noGrp="1"/>
+          </p:cNvSpPr>
+          <p:nvPr>
+            <p:ph type="title"/>
+          </p:nvPr>
+        </p:nvSpPr>
+        <p:spPr/>
+        <p:txBody>
+          <a:bodyPr/>
+          <a:lstStyle/>
+          <a:p>
+            <a:r>
+              <a:rPr lang="en-US" dirty="0">
+                <a:ea typeface="Calibri Light"/>
+                <a:cs typeface="Calibri Light"/>
+              </a:rPr>
+              <a:t>Final Notes</a:t>
+            </a:r>
+            <a:endParaRPr lang="en-US" dirty="0"/>
+          </a:p>
+        </p:txBody>
+      </p:sp>
+      <p:sp>
+        <p:nvSpPr>
+          <p:cNvPr id="3" name="Content Placeholder 2">
+            <a:extLst>
+              <a:ext uri="{FF2B5EF4-FFF2-40B4-BE49-F238E27FC236}">
+                <a16:creationId xmlns:a16="http://schemas.microsoft.com/office/drawing/2014/main" id="{502C69CE-4637-39A9-33A6-B5CFBD5A58A9}"/>
+              </a:ext>
+            </a:extLst>
+          </p:cNvPr>
+          <p:cNvSpPr>
+            <a:spLocks noGrp="1"/>
+          </p:cNvSpPr>
+          <p:nvPr>
+            <p:ph type="body" idx="1"/>
+          </p:nvPr>
+        </p:nvSpPr>
+        <p:spPr/>
+        <p:txBody>
+          <a:bodyPr/>
+          <a:lstStyle/>
+          <a:p>
+            <a:endParaRPr lang="en-US"/>
+          </a:p>
+        </p:txBody>
+      </p:sp>
+    </p:spTree>
+    <p:extLst>
+      <p:ext uri="{BB962C8B-B14F-4D97-AF65-F5344CB8AC3E}">
+        <p14:creationId xmlns:p14="http://schemas.microsoft.com/office/powerpoint/2010/main" val="2275966120"/>
+      </p:ext>
+    </p:extLst>
+  </p:cSld>
+  <p:clrMapOvr>
+    <a:masterClrMapping/>
+  </p:clrMapOvr>
+</p:sld>
+</file>
+
+<file path=ppt/slides/slide31.xml><?xml version="1.0" encoding="utf-8"?>
+<p:sld xmlns:a="http://schemas.openxmlformats.org/drawingml/2006/main" xmlns:r="http://schemas.openxmlformats.org/officeDocument/2006/relationships" xmlns:p="http://schemas.openxmlformats.org/presentationml/2006/main">
+  <p:cSld>
+    <p:spTree>
+      <p:nvGrpSpPr>
+        <p:cNvPr id="1" name=""/>
+        <p:cNvGrpSpPr/>
+        <p:nvPr/>
+      </p:nvGrpSpPr>
+      <p:grpSpPr>
+        <a:xfrm>
+          <a:off x="0" y="0"/>
+          <a:ext cx="0" cy="0"/>
+          <a:chOff x="0" y="0"/>
+          <a:chExt cx="0" cy="0"/>
+        </a:xfrm>
+      </p:grpSpPr>
+      <p:sp>
+        <p:nvSpPr>
+          <p:cNvPr id="2" name="Title 1">
+            <a:extLst>
+              <a:ext uri="{FF2B5EF4-FFF2-40B4-BE49-F238E27FC236}">
+                <a16:creationId xmlns:a16="http://schemas.microsoft.com/office/drawing/2014/main" id="{7B835121-B141-7218-B42D-1A517809491F}"/>
+              </a:ext>
+            </a:extLst>
+          </p:cNvPr>
+          <p:cNvSpPr>
+            <a:spLocks noGrp="1"/>
+          </p:cNvSpPr>
+          <p:nvPr>
+            <p:ph type="title"/>
+          </p:nvPr>
+        </p:nvSpPr>
+        <p:spPr/>
+        <p:txBody>
+          <a:bodyPr/>
+          <a:lstStyle/>
+          <a:p>
+            <a:r>
+              <a:rPr lang="en-US" dirty="0">
+                <a:ea typeface="Calibri Light"/>
+                <a:cs typeface="Calibri Light"/>
+              </a:rPr>
+              <a:t>Distributed Processing vs. Massive Parallel Processing (MPP)</a:t>
+            </a:r>
+          </a:p>
+        </p:txBody>
+      </p:sp>
+      <p:sp>
+        <p:nvSpPr>
+          <p:cNvPr id="3" name="Content Placeholder 2">
+            <a:extLst>
+              <a:ext uri="{FF2B5EF4-FFF2-40B4-BE49-F238E27FC236}">
+                <a16:creationId xmlns:a16="http://schemas.microsoft.com/office/drawing/2014/main" id="{0173D824-DE25-C32C-01F2-97287FB39040}"/>
+              </a:ext>
+            </a:extLst>
+          </p:cNvPr>
+          <p:cNvSpPr>
+            <a:spLocks noGrp="1"/>
+          </p:cNvSpPr>
+          <p:nvPr>
+            <p:ph idx="1"/>
+          </p:nvPr>
+        </p:nvSpPr>
+        <p:spPr/>
+        <p:txBody>
+          <a:bodyPr vert="horz" lIns="91440" tIns="45720" rIns="91440" bIns="45720" rtlCol="0" anchor="t">
+            <a:normAutofit/>
+          </a:bodyPr>
+          <a:lstStyle/>
+          <a:p>
+            <a:pPr marL="0" indent="0">
+              <a:buNone/>
+            </a:pPr>
+            <a:r>
+              <a:rPr lang="en-US" b="1" dirty="0"/>
+              <a:t>Distributed Processing</a:t>
+            </a:r>
+            <a:endParaRPr lang="en-US" dirty="0">
+              <a:ea typeface="Calibri" panose="020F0502020204030204"/>
+              <a:cs typeface="Calibri" panose="020F0502020204030204"/>
+            </a:endParaRPr>
+          </a:p>
+          <a:p>
+            <a:r>
+              <a:rPr lang="en-US" b="1" dirty="0">
+                <a:ea typeface="+mn-lt"/>
+                <a:cs typeface="+mn-lt"/>
+              </a:rPr>
+              <a:t>General Concept</a:t>
+            </a:r>
+            <a:r>
+              <a:rPr lang="en-US" dirty="0">
+                <a:ea typeface="+mn-lt"/>
+                <a:cs typeface="+mn-lt"/>
+              </a:rPr>
+              <a:t>: Any system where multiple computers (or nodes) work together to process data.</a:t>
+            </a:r>
+            <a:endParaRPr lang="en-US" dirty="0"/>
+          </a:p>
+          <a:p>
+            <a:r>
+              <a:rPr lang="en-US" b="1" dirty="0">
+                <a:ea typeface="+mn-lt"/>
+                <a:cs typeface="+mn-lt"/>
+              </a:rPr>
+              <a:t>Used in</a:t>
+            </a:r>
+            <a:r>
+              <a:rPr lang="en-US" dirty="0">
+                <a:ea typeface="+mn-lt"/>
+                <a:cs typeface="+mn-lt"/>
+              </a:rPr>
+              <a:t>: Hadoop (MapReduce), Spark, Flink, Storm, etc.</a:t>
+            </a:r>
+            <a:endParaRPr lang="en-US" dirty="0"/>
+          </a:p>
+          <a:p>
+            <a:r>
+              <a:rPr lang="en-US" b="1" dirty="0">
+                <a:ea typeface="+mn-lt"/>
+                <a:cs typeface="+mn-lt"/>
+              </a:rPr>
+              <a:t>How it works</a:t>
+            </a:r>
+            <a:r>
+              <a:rPr lang="en-US" dirty="0">
+                <a:ea typeface="+mn-lt"/>
+                <a:cs typeface="+mn-lt"/>
+              </a:rPr>
+              <a:t>: The workload is split into chunks and processed in parallel across multiple machines, each with its own memory and CPU.</a:t>
+            </a:r>
+            <a:endParaRPr lang="en-US" dirty="0"/>
+          </a:p>
+          <a:p>
+            <a:r>
+              <a:rPr lang="en-US" b="1" dirty="0">
+                <a:ea typeface="+mn-lt"/>
+                <a:cs typeface="+mn-lt"/>
+              </a:rPr>
+              <a:t>Flexible</a:t>
+            </a:r>
+            <a:r>
+              <a:rPr lang="en-US" dirty="0">
+                <a:ea typeface="+mn-lt"/>
+                <a:cs typeface="+mn-lt"/>
+              </a:rPr>
+              <a:t>: Can handle a wide range of tasks, not just databases—can be for file processing, stream processing, ML, etc.</a:t>
+            </a:r>
+            <a:endParaRPr lang="en-US" dirty="0"/>
+          </a:p>
+          <a:p>
+            <a:pPr marL="0" indent="0">
+              <a:buNone/>
+            </a:pPr>
+            <a:r>
+              <a:rPr lang="en-US" b="1" dirty="0"/>
+              <a:t>MPP (Massively Parallel Processing)</a:t>
+            </a:r>
+            <a:endParaRPr lang="en-US" dirty="0">
+              <a:ea typeface="Calibri"/>
+              <a:cs typeface="Calibri"/>
+            </a:endParaRPr>
+          </a:p>
+          <a:p>
+            <a:r>
+              <a:rPr lang="en-US" b="1" dirty="0">
+                <a:ea typeface="+mn-lt"/>
+                <a:cs typeface="+mn-lt"/>
+              </a:rPr>
+              <a:t>Specific Type of Distributed Processing</a:t>
+            </a:r>
+            <a:r>
+              <a:rPr lang="en-US" dirty="0">
+                <a:ea typeface="+mn-lt"/>
+                <a:cs typeface="+mn-lt"/>
+              </a:rPr>
+              <a:t>: Tailored for </a:t>
+            </a:r>
+            <a:r>
+              <a:rPr lang="en-US" b="1" dirty="0">
+                <a:ea typeface="+mn-lt"/>
+                <a:cs typeface="+mn-lt"/>
+              </a:rPr>
+              <a:t>databases</a:t>
+            </a:r>
+            <a:r>
+              <a:rPr lang="en-US" dirty="0">
+                <a:ea typeface="+mn-lt"/>
+                <a:cs typeface="+mn-lt"/>
+              </a:rPr>
+              <a:t> and </a:t>
+            </a:r>
+            <a:r>
+              <a:rPr lang="en-US" b="1" dirty="0">
+                <a:ea typeface="+mn-lt"/>
+                <a:cs typeface="+mn-lt"/>
+              </a:rPr>
+              <a:t>query execution</a:t>
+            </a:r>
+            <a:r>
+              <a:rPr lang="en-US" dirty="0">
+                <a:ea typeface="+mn-lt"/>
+                <a:cs typeface="+mn-lt"/>
+              </a:rPr>
+              <a:t>.</a:t>
+            </a:r>
+            <a:endParaRPr lang="en-US" dirty="0"/>
+          </a:p>
+          <a:p>
+            <a:r>
+              <a:rPr lang="en-US" b="1" dirty="0">
+                <a:ea typeface="+mn-lt"/>
+                <a:cs typeface="+mn-lt"/>
+              </a:rPr>
+              <a:t>Used in</a:t>
+            </a:r>
+            <a:r>
+              <a:rPr lang="en-US" dirty="0">
+                <a:ea typeface="+mn-lt"/>
+                <a:cs typeface="+mn-lt"/>
+              </a:rPr>
+              <a:t>: Impala, Amazon Redshift, Google </a:t>
+            </a:r>
+            <a:r>
+              <a:rPr lang="en-US" dirty="0" err="1">
+                <a:ea typeface="+mn-lt"/>
+                <a:cs typeface="+mn-lt"/>
+              </a:rPr>
+              <a:t>BigQuery</a:t>
+            </a:r>
+            <a:r>
+              <a:rPr lang="en-US" dirty="0">
+                <a:ea typeface="+mn-lt"/>
+                <a:cs typeface="+mn-lt"/>
+              </a:rPr>
+              <a:t>, Greenplum, etc.</a:t>
+            </a:r>
+            <a:endParaRPr lang="en-US" dirty="0"/>
+          </a:p>
+          <a:p>
+            <a:r>
+              <a:rPr lang="en-US" b="1" dirty="0">
+                <a:ea typeface="+mn-lt"/>
+                <a:cs typeface="+mn-lt"/>
+              </a:rPr>
+              <a:t>How it works</a:t>
+            </a:r>
+            <a:r>
+              <a:rPr lang="en-US" dirty="0">
+                <a:ea typeface="+mn-lt"/>
+                <a:cs typeface="+mn-lt"/>
+              </a:rPr>
+              <a:t>: Tables are split into partitions and distributed across nodes. Each node processes its chunk </a:t>
+            </a:r>
+            <a:r>
+              <a:rPr lang="en-US" b="1" dirty="0">
+                <a:ea typeface="+mn-lt"/>
+                <a:cs typeface="+mn-lt"/>
+              </a:rPr>
+              <a:t>independently and simultaneously</a:t>
+            </a:r>
+            <a:r>
+              <a:rPr lang="en-US" dirty="0">
+                <a:ea typeface="+mn-lt"/>
+                <a:cs typeface="+mn-lt"/>
+              </a:rPr>
+              <a:t>, then results are combined.</a:t>
+            </a:r>
+            <a:endParaRPr lang="en-US" dirty="0"/>
+          </a:p>
+          <a:p>
+            <a:r>
+              <a:rPr lang="en-US" b="1" dirty="0">
+                <a:ea typeface="+mn-lt"/>
+                <a:cs typeface="+mn-lt"/>
+              </a:rPr>
+              <a:t>Optimized for</a:t>
+            </a:r>
+            <a:r>
+              <a:rPr lang="en-US" dirty="0">
+                <a:ea typeface="+mn-lt"/>
+                <a:cs typeface="+mn-lt"/>
+              </a:rPr>
+              <a:t>: High-speed SQL queries on big data. Think of it like a turbocharged SQL engine.</a:t>
+            </a:r>
+            <a:endParaRPr lang="en-US" dirty="0"/>
+          </a:p>
+          <a:p>
+            <a:endParaRPr lang="en-US" dirty="0">
+              <a:ea typeface="Calibri"/>
+              <a:cs typeface="Calibri"/>
+            </a:endParaRPr>
+          </a:p>
+        </p:txBody>
+      </p:sp>
+    </p:spTree>
+    <p:extLst>
+      <p:ext uri="{BB962C8B-B14F-4D97-AF65-F5344CB8AC3E}">
+        <p14:creationId xmlns:p14="http://schemas.microsoft.com/office/powerpoint/2010/main" val="2684285518"/>
+      </p:ext>
+    </p:extLst>
+  </p:cSld>
+  <p:clrMapOvr>
+    <a:masterClrMapping/>
+  </p:clrMapOvr>
+</p:sld>
+</file>
+
+<file path=ppt/slides/slide32.xml><?xml version="1.0" encoding="utf-8"?>
+<p:sld xmlns:a="http://schemas.openxmlformats.org/drawingml/2006/main" xmlns:r="http://schemas.openxmlformats.org/officeDocument/2006/relationships" xmlns:p="http://schemas.openxmlformats.org/presentationml/2006/main">
+  <p:cSld>
+    <p:spTree>
+      <p:nvGrpSpPr>
+        <p:cNvPr id="1" name=""/>
+        <p:cNvGrpSpPr/>
+        <p:nvPr/>
+      </p:nvGrpSpPr>
+      <p:grpSpPr>
+        <a:xfrm>
+          <a:off x="0" y="0"/>
+          <a:ext cx="0" cy="0"/>
+          <a:chOff x="0" y="0"/>
+          <a:chExt cx="0" cy="0"/>
+        </a:xfrm>
+      </p:grpSpPr>
+      <p:sp>
+        <p:nvSpPr>
+          <p:cNvPr id="2" name="Title 1">
+            <a:extLst>
+              <a:ext uri="{FF2B5EF4-FFF2-40B4-BE49-F238E27FC236}">
+                <a16:creationId xmlns:a16="http://schemas.microsoft.com/office/drawing/2014/main" id="{32D77BF8-9EB6-EB2A-6FCA-BB3FE543BA98}"/>
+              </a:ext>
+            </a:extLst>
+          </p:cNvPr>
+          <p:cNvSpPr>
+            <a:spLocks noGrp="1"/>
+          </p:cNvSpPr>
+          <p:nvPr>
+            <p:ph type="title"/>
+          </p:nvPr>
+        </p:nvSpPr>
+        <p:spPr/>
+        <p:txBody>
+          <a:bodyPr/>
+          <a:lstStyle/>
+          <a:p>
+            <a:r>
+              <a:rPr lang="en-US" dirty="0">
+                <a:ea typeface="Calibri Light"/>
+                <a:cs typeface="Calibri Light"/>
+              </a:rPr>
+              <a:t>Key Differences (Distributed Processing vs. MPP)</a:t>
+            </a:r>
+            <a:endParaRPr lang="en-US" dirty="0"/>
+          </a:p>
+        </p:txBody>
+      </p:sp>
+      <p:graphicFrame>
+        <p:nvGraphicFramePr>
+          <p:cNvPr id="5" name="Content Placeholder 4">
+            <a:extLst>
+              <a:ext uri="{FF2B5EF4-FFF2-40B4-BE49-F238E27FC236}">
+                <a16:creationId xmlns:a16="http://schemas.microsoft.com/office/drawing/2014/main" id="{B49131E5-D272-CD58-3F5C-9B41C4487AEC}"/>
+              </a:ext>
+            </a:extLst>
+          </p:cNvPr>
+          <p:cNvGraphicFramePr>
+            <a:graphicFrameLocks noGrp="1"/>
+          </p:cNvGraphicFramePr>
+          <p:nvPr>
+            <p:ph idx="1"/>
+            <p:extLst>
+              <p:ext uri="{D42A27DB-BD31-4B8C-83A1-F6EECF244321}">
+                <p14:modId xmlns:p14="http://schemas.microsoft.com/office/powerpoint/2010/main" val="2726580622"/>
+              </p:ext>
+            </p:extLst>
+          </p:nvPr>
+        </p:nvGraphicFramePr>
+        <p:xfrm>
+          <a:off x="284163" y="1706563"/>
+          <a:ext cx="11069637" cy="2377440"/>
+        </p:xfrm>
+        <a:graphic>
+          <a:graphicData uri="http://schemas.openxmlformats.org/drawingml/2006/table">
+            <a:tbl>
+              <a:tblPr bandRow="1">
+                <a:tableStyleId>{5940675A-B579-460E-94D1-54222C63F5DA}</a:tableStyleId>
+              </a:tblPr>
+              <a:tblGrid>
+                <a:gridCol w="3689879">
+                  <a:extLst>
+                    <a:ext uri="{9D8B030D-6E8A-4147-A177-3AD203B41FA5}">
+                      <a16:colId xmlns:a16="http://schemas.microsoft.com/office/drawing/2014/main" val="2650493554"/>
+                    </a:ext>
+                  </a:extLst>
+                </a:gridCol>
+                <a:gridCol w="3689879">
+                  <a:extLst>
+                    <a:ext uri="{9D8B030D-6E8A-4147-A177-3AD203B41FA5}">
+                      <a16:colId xmlns:a16="http://schemas.microsoft.com/office/drawing/2014/main" val="707909215"/>
+                    </a:ext>
+                  </a:extLst>
+                </a:gridCol>
+                <a:gridCol w="3689879">
+                  <a:extLst>
+                    <a:ext uri="{9D8B030D-6E8A-4147-A177-3AD203B41FA5}">
+                      <a16:colId xmlns:a16="http://schemas.microsoft.com/office/drawing/2014/main" val="555260404"/>
+                    </a:ext>
+                  </a:extLst>
+                </a:gridCol>
+              </a:tblGrid>
+              <a:tr h="0">
+                <a:tc>
+                  <a:txBody>
+                    <a:bodyPr/>
+                    <a:lstStyle/>
+                    <a:p>
+                      <a:pPr algn="ctr"/>
+                      <a:r>
+                        <a:rPr lang="en-US" b="1" dirty="0"/>
+                        <a:t>Feature</a:t>
+                      </a:r>
+                    </a:p>
+                  </a:txBody>
+                  <a:tcPr anchor="ctr">
+                    <a:solidFill>
+                      <a:schemeClr val="bg1">
+                        <a:lumMod val="75000"/>
+                      </a:schemeClr>
+                    </a:solidFill>
+                  </a:tcPr>
+                </a:tc>
+                <a:tc>
+                  <a:txBody>
+                    <a:bodyPr/>
+                    <a:lstStyle/>
+                    <a:p>
+                      <a:pPr algn="ctr"/>
+                      <a:r>
+                        <a:rPr lang="en-US" b="1" dirty="0"/>
+                        <a:t>MPP</a:t>
+                      </a:r>
+                    </a:p>
+                  </a:txBody>
+                  <a:tcPr anchor="ctr">
+                    <a:solidFill>
+                      <a:schemeClr val="bg1">
+                        <a:lumMod val="75000"/>
+                      </a:schemeClr>
+                    </a:solidFill>
+                  </a:tcPr>
+                </a:tc>
+                <a:tc>
+                  <a:txBody>
+                    <a:bodyPr/>
+                    <a:lstStyle/>
+                    <a:p>
+                      <a:pPr algn="ctr"/>
+                      <a:r>
+                        <a:rPr lang="en-US" b="1" dirty="0"/>
+                        <a:t>Distributed Processing</a:t>
+                      </a:r>
+                    </a:p>
+                  </a:txBody>
+                  <a:tcPr anchor="ctr">
+                    <a:solidFill>
+                      <a:schemeClr val="bg1">
+                        <a:lumMod val="75000"/>
+                      </a:schemeClr>
+                    </a:solidFill>
+                  </a:tcPr>
+                </a:tc>
+                <a:extLst>
+                  <a:ext uri="{0D108BD9-81ED-4DB2-BD59-A6C34878D82A}">
+                    <a16:rowId xmlns:a16="http://schemas.microsoft.com/office/drawing/2014/main" val="1125689872"/>
+                  </a:ext>
+                </a:extLst>
+              </a:tr>
+              <a:tr h="0">
+                <a:tc>
+                  <a:txBody>
+                    <a:bodyPr/>
+                    <a:lstStyle/>
+                    <a:p>
+                      <a:r>
+                        <a:rPr lang="en-US" dirty="0"/>
+                        <a:t>Primary Use</a:t>
+                      </a:r>
+                    </a:p>
+                  </a:txBody>
+                  <a:tcPr anchor="ctr"/>
+                </a:tc>
+                <a:tc>
+                  <a:txBody>
+                    <a:bodyPr/>
+                    <a:lstStyle/>
+                    <a:p>
+                      <a:r>
+                        <a:rPr lang="en-US" dirty="0"/>
+                        <a:t>SQL query engines</a:t>
+                      </a:r>
+                    </a:p>
+                  </a:txBody>
+                  <a:tcPr anchor="ctr"/>
+                </a:tc>
+                <a:tc>
+                  <a:txBody>
+                    <a:bodyPr/>
+                    <a:lstStyle/>
+                    <a:p>
+                      <a:r>
+                        <a:rPr lang="en-US" dirty="0"/>
+                        <a:t>General data processing</a:t>
+                      </a:r>
+                    </a:p>
+                  </a:txBody>
+                  <a:tcPr anchor="ctr"/>
+                </a:tc>
+                <a:extLst>
+                  <a:ext uri="{0D108BD9-81ED-4DB2-BD59-A6C34878D82A}">
+                    <a16:rowId xmlns:a16="http://schemas.microsoft.com/office/drawing/2014/main" val="2347816243"/>
+                  </a:ext>
+                </a:extLst>
+              </a:tr>
+              <a:tr h="0">
+                <a:tc>
+                  <a:txBody>
+                    <a:bodyPr/>
+                    <a:lstStyle/>
+                    <a:p>
+                      <a:r>
+                        <a:rPr lang="en-US" dirty="0"/>
+                        <a:t>Optimization</a:t>
+                      </a:r>
+                    </a:p>
+                  </a:txBody>
+                  <a:tcPr anchor="ctr"/>
+                </a:tc>
+                <a:tc>
+                  <a:txBody>
+                    <a:bodyPr/>
+                    <a:lstStyle/>
+                    <a:p>
+                      <a:r>
+                        <a:rPr lang="en-US" dirty="0"/>
+                        <a:t>Analytical queries (OLAP)</a:t>
+                      </a:r>
+                    </a:p>
+                  </a:txBody>
+                  <a:tcPr anchor="ctr"/>
+                </a:tc>
+                <a:tc>
+                  <a:txBody>
+                    <a:bodyPr/>
+                    <a:lstStyle/>
+                    <a:p>
+                      <a:r>
+                        <a:rPr lang="en-US" dirty="0"/>
+                        <a:t>Broader workloads (ETL, ML, streaming)</a:t>
+                      </a:r>
+                    </a:p>
+                  </a:txBody>
+                  <a:tcPr anchor="ctr"/>
+                </a:tc>
+                <a:extLst>
+                  <a:ext uri="{0D108BD9-81ED-4DB2-BD59-A6C34878D82A}">
+                    <a16:rowId xmlns:a16="http://schemas.microsoft.com/office/drawing/2014/main" val="3274843884"/>
+                  </a:ext>
+                </a:extLst>
+              </a:tr>
+              <a:tr h="0">
+                <a:tc>
+                  <a:txBody>
+                    <a:bodyPr/>
+                    <a:lstStyle/>
+                    <a:p>
+                      <a:r>
+                        <a:rPr lang="en-US" dirty="0"/>
+                        <a:t>Examples</a:t>
+                      </a:r>
+                    </a:p>
+                  </a:txBody>
+                  <a:tcPr anchor="ctr"/>
+                </a:tc>
+                <a:tc>
+                  <a:txBody>
+                    <a:bodyPr/>
+                    <a:lstStyle/>
+                    <a:p>
+                      <a:r>
+                        <a:rPr lang="en-US" dirty="0"/>
+                        <a:t>Impala, Redshift</a:t>
+                      </a:r>
+                    </a:p>
+                  </a:txBody>
+                  <a:tcPr anchor="ctr"/>
+                </a:tc>
+                <a:tc>
+                  <a:txBody>
+                    <a:bodyPr/>
+                    <a:lstStyle/>
+                    <a:p>
+                      <a:r>
+                        <a:rPr lang="en-US" dirty="0"/>
+                        <a:t>Spark, MapReduce, Flink</a:t>
+                      </a:r>
+                    </a:p>
+                  </a:txBody>
+                  <a:tcPr anchor="ctr"/>
+                </a:tc>
+                <a:extLst>
+                  <a:ext uri="{0D108BD9-81ED-4DB2-BD59-A6C34878D82A}">
+                    <a16:rowId xmlns:a16="http://schemas.microsoft.com/office/drawing/2014/main" val="3271840921"/>
+                  </a:ext>
+                </a:extLst>
+              </a:tr>
+              <a:tr h="0">
+                <a:tc>
+                  <a:txBody>
+                    <a:bodyPr/>
+                    <a:lstStyle/>
+                    <a:p>
+                      <a:r>
+                        <a:rPr lang="en-US" dirty="0"/>
+                        <a:t>Independence</a:t>
+                      </a:r>
+                    </a:p>
+                  </a:txBody>
+                  <a:tcPr anchor="ctr"/>
+                </a:tc>
+                <a:tc>
+                  <a:txBody>
+                    <a:bodyPr/>
+                    <a:lstStyle/>
+                    <a:p>
+                      <a:r>
+                        <a:rPr lang="en-US" dirty="0"/>
+                        <a:t>Nodes work mostly independently</a:t>
+                      </a:r>
+                    </a:p>
+                  </a:txBody>
+                  <a:tcPr anchor="ctr"/>
+                </a:tc>
+                <a:tc>
+                  <a:txBody>
+                    <a:bodyPr/>
+                    <a:lstStyle/>
+                    <a:p>
+                      <a:r>
+                        <a:rPr lang="en-US" dirty="0"/>
+                        <a:t>Often requires coordination or intermediate shuffling</a:t>
+                      </a:r>
+                    </a:p>
+                  </a:txBody>
+                  <a:tcPr anchor="ctr"/>
+                </a:tc>
+                <a:extLst>
+                  <a:ext uri="{0D108BD9-81ED-4DB2-BD59-A6C34878D82A}">
+                    <a16:rowId xmlns:a16="http://schemas.microsoft.com/office/drawing/2014/main" val="1905537230"/>
+                  </a:ext>
+                </a:extLst>
+              </a:tr>
+            </a:tbl>
+          </a:graphicData>
+        </a:graphic>
+      </p:graphicFrame>
+      <p:sp>
+        <p:nvSpPr>
+          <p:cNvPr id="7" name="TextBox 6">
+            <a:extLst>
+              <a:ext uri="{FF2B5EF4-FFF2-40B4-BE49-F238E27FC236}">
+                <a16:creationId xmlns:a16="http://schemas.microsoft.com/office/drawing/2014/main" id="{0A67F442-A4EE-C664-5810-41DD02FE24D6}"/>
+              </a:ext>
+            </a:extLst>
+          </p:cNvPr>
+          <p:cNvSpPr txBox="1"/>
+          <p:nvPr/>
+        </p:nvSpPr>
+        <p:spPr>
+          <a:xfrm>
+            <a:off x="287268" y="4387232"/>
+            <a:ext cx="11077997" cy="923330"/>
+          </a:xfrm>
+          <a:prstGeom prst="rect">
+            <a:avLst/>
+          </a:prstGeom>
+          <a:noFill/>
+        </p:spPr>
+        <p:txBody>
+          <a:bodyPr rot="0" spcFirstLastPara="0" vertOverflow="overflow" horzOverflow="overflow" vert="horz" wrap="square" lIns="91440" tIns="45720" rIns="91440" bIns="45720" numCol="1" spcCol="0" rtlCol="0" fromWordArt="0" anchor="t" anchorCtr="0" forceAA="0" compatLnSpc="1">
+            <a:prstTxWarp prst="textNoShape">
+              <a:avLst/>
+            </a:prstTxWarp>
+            <a:spAutoFit/>
+          </a:bodyPr>
+          <a:lstStyle/>
+          <a:p>
+            <a:r>
+              <a:rPr lang="en-US" b="1" dirty="0"/>
+              <a:t>TL;DR</a:t>
+            </a:r>
+            <a:r>
+              <a:rPr lang="en-US" dirty="0"/>
+              <a:t>:</a:t>
+            </a:r>
+          </a:p>
+          <a:p>
+            <a:r>
+              <a:rPr lang="en-US" b="1" dirty="0"/>
+              <a:t>All MPP systems are distributed</a:t>
+            </a:r>
+            <a:r>
+              <a:rPr lang="en-US" dirty="0"/>
+              <a:t>, but not all distributed systems are MPP.</a:t>
+            </a:r>
+            <a:br>
+              <a:rPr lang="en-US" dirty="0"/>
+            </a:br>
+            <a:r>
+              <a:rPr lang="en-US" dirty="0"/>
+              <a:t>MPP is a specialized, high-performance </a:t>
+            </a:r>
+            <a:r>
+              <a:rPr lang="en-US" b="1" dirty="0"/>
+              <a:t>subset</a:t>
+            </a:r>
+            <a:r>
+              <a:rPr lang="en-US" dirty="0"/>
+              <a:t> of distributed processing focused on SQL analytics.</a:t>
+            </a:r>
+            <a:endParaRPr lang="en-US"/>
+          </a:p>
+        </p:txBody>
+      </p:sp>
+    </p:spTree>
+    <p:extLst>
+      <p:ext uri="{BB962C8B-B14F-4D97-AF65-F5344CB8AC3E}">
+        <p14:creationId xmlns:p14="http://schemas.microsoft.com/office/powerpoint/2010/main" val="2087539751"/>
+      </p:ext>
+    </p:extLst>
+  </p:cSld>
+  <p:clrMapOvr>
+    <a:masterClrMapping/>
+  </p:clrMapOvr>
+</p:sld>
+</file>
+
 <file path=ppt/slides/slide4.xml><?xml version="1.0" encoding="utf-8"?>
 <p:sld xmlns:a="http://schemas.openxmlformats.org/drawingml/2006/main" xmlns:r="http://schemas.openxmlformats.org/officeDocument/2006/relationships" xmlns:p="http://schemas.openxmlformats.org/presentationml/2006/main">
   <p:cSld>

--- a/Lecture Notes/Section 2 - Introduction to Hadoop Eco System/2-Introduction to Hadoop Eco System.pptx
+++ b/Lecture Notes/Section 2 - Introduction to Hadoop Eco System/2-Introduction to Hadoop Eco System.pptx
@@ -5,7 +5,7 @@
     <p:sldMasterId id="2147483648" r:id="rId1"/>
   </p:sldMasterIdLst>
   <p:notesMasterIdLst>
-    <p:notesMasterId r:id="rId34"/>
+    <p:notesMasterId r:id="rId40"/>
   </p:notesMasterIdLst>
   <p:sldIdLst>
     <p:sldId id="256" r:id="rId2"/>
@@ -30,16 +30,22 @@
     <p:sldId id="274" r:id="rId21"/>
     <p:sldId id="330" r:id="rId22"/>
     <p:sldId id="278" r:id="rId23"/>
-    <p:sldId id="326" r:id="rId24"/>
-    <p:sldId id="280" r:id="rId25"/>
-    <p:sldId id="281" r:id="rId26"/>
-    <p:sldId id="282" r:id="rId27"/>
-    <p:sldId id="325" r:id="rId28"/>
-    <p:sldId id="323" r:id="rId29"/>
-    <p:sldId id="324" r:id="rId30"/>
-    <p:sldId id="334" r:id="rId31"/>
-    <p:sldId id="332" r:id="rId32"/>
-    <p:sldId id="333" r:id="rId33"/>
+    <p:sldId id="336" r:id="rId24"/>
+    <p:sldId id="337" r:id="rId25"/>
+    <p:sldId id="338" r:id="rId26"/>
+    <p:sldId id="339" r:id="rId27"/>
+    <p:sldId id="340" r:id="rId28"/>
+    <p:sldId id="341" r:id="rId29"/>
+    <p:sldId id="342" r:id="rId30"/>
+    <p:sldId id="280" r:id="rId31"/>
+    <p:sldId id="281" r:id="rId32"/>
+    <p:sldId id="282" r:id="rId33"/>
+    <p:sldId id="325" r:id="rId34"/>
+    <p:sldId id="323" r:id="rId35"/>
+    <p:sldId id="324" r:id="rId36"/>
+    <p:sldId id="334" r:id="rId37"/>
+    <p:sldId id="332" r:id="rId38"/>
+    <p:sldId id="333" r:id="rId39"/>
   </p:sldIdLst>
   <p:sldSz cx="12192000" cy="6858000"/>
   <p:notesSz cx="6858000" cy="9144000"/>
@@ -155,1151 +161,8 @@
 </p:cmAuthorLst>
 </file>
 
-<file path=ppt/revisionInfo.xml><?xml version="1.0" encoding="utf-8"?>
-<p1510:revInfo xmlns:a="http://schemas.openxmlformats.org/drawingml/2006/main" xmlns:r="http://schemas.openxmlformats.org/officeDocument/2006/relationships" xmlns:p1510="http://schemas.microsoft.com/office/powerpoint/2015/10/main">
-  <p1510:revLst>
-    <p1510:client id="{048CEBFD-D6A1-FF4F-145A-C5347D00F6D8}" v="1248" dt="2025-03-23T06:04:22.577"/>
-    <p1510:client id="{201C7D42-1F1C-B7C2-DD80-837CD0925F1E}" v="461" dt="2025-03-23T12:36:34.651"/>
-    <p1510:client id="{2F52505F-0676-E1F8-3A9C-C74E2F5553F9}" v="50" dt="2025-03-23T06:07:34.188"/>
-    <p1510:client id="{36B9E10C-9544-F05A-23A9-185BAFD9898D}" v="80" dt="2025-03-23T12:04:32.957"/>
-    <p1510:client id="{52B7A16F-CAD0-4D4D-9F9C-A24C8678CAD7}" v="140" dt="2025-03-23T08:12:51.874"/>
-    <p1510:client id="{90B6B862-2DC7-460D-AAB2-4136282EE665}" v="16" dt="2025-03-22T15:29:43.330"/>
-  </p1510:revLst>
-</p1510:revInfo>
-</file>
-
 <file path=ppt/changesInfos/changesInfo1.xml><?xml version="1.0" encoding="utf-8"?>
 <pc:chgInfo xmlns:a="http://schemas.openxmlformats.org/drawingml/2006/main" xmlns:r="http://schemas.openxmlformats.org/officeDocument/2006/relationships" xmlns:ac="http://schemas.microsoft.com/office/drawing/2013/main/command" xmlns:pc="http://schemas.microsoft.com/office/powerpoint/2013/main/command">
-  <pc:docChgLst>
-    <pc:chgData name="Mohammed Fasha" userId="S::mohammed.fasha@uop.edu.jo::cc64f42d-a1a6-4f08-b97b-0c37f877119f" providerId="AD" clId="Web-{201C7D42-1F1C-B7C2-DD80-837CD0925F1E}"/>
-    <pc:docChg chg="addSld delSld modSld">
-      <pc:chgData name="Mohammed Fasha" userId="S::mohammed.fasha@uop.edu.jo::cc64f42d-a1a6-4f08-b97b-0c37f877119f" providerId="AD" clId="Web-{201C7D42-1F1C-B7C2-DD80-837CD0925F1E}" dt="2025-03-23T12:36:34.651" v="413" actId="1076"/>
-      <pc:docMkLst>
-        <pc:docMk/>
-      </pc:docMkLst>
-      <pc:sldChg chg="addSp modSp">
-        <pc:chgData name="Mohammed Fasha" userId="S::mohammed.fasha@uop.edu.jo::cc64f42d-a1a6-4f08-b97b-0c37f877119f" providerId="AD" clId="Web-{201C7D42-1F1C-B7C2-DD80-837CD0925F1E}" dt="2025-03-23T12:35:02.129" v="388" actId="14100"/>
-        <pc:sldMkLst>
-          <pc:docMk/>
-          <pc:sldMk cId="0" sldId="272"/>
-        </pc:sldMkLst>
-        <pc:spChg chg="mod">
-          <ac:chgData name="Mohammed Fasha" userId="S::mohammed.fasha@uop.edu.jo::cc64f42d-a1a6-4f08-b97b-0c37f877119f" providerId="AD" clId="Web-{201C7D42-1F1C-B7C2-DD80-837CD0925F1E}" dt="2025-03-23T12:32:41.442" v="332" actId="20577"/>
-          <ac:spMkLst>
-            <pc:docMk/>
-            <pc:sldMk cId="0" sldId="272"/>
-            <ac:spMk id="7" creationId="{BD008676-47C8-D88A-CD4A-65BB83D57162}"/>
-          </ac:spMkLst>
-        </pc:spChg>
-        <pc:spChg chg="add mod">
-          <ac:chgData name="Mohammed Fasha" userId="S::mohammed.fasha@uop.edu.jo::cc64f42d-a1a6-4f08-b97b-0c37f877119f" providerId="AD" clId="Web-{201C7D42-1F1C-B7C2-DD80-837CD0925F1E}" dt="2025-03-23T12:35:02.129" v="388" actId="14100"/>
-          <ac:spMkLst>
-            <pc:docMk/>
-            <pc:sldMk cId="0" sldId="272"/>
-            <ac:spMk id="8" creationId="{98B7FB4A-DB0E-01C4-3C0E-032767DA24F4}"/>
-          </ac:spMkLst>
-        </pc:spChg>
-      </pc:sldChg>
-      <pc:sldChg chg="modSp">
-        <pc:chgData name="Mohammed Fasha" userId="S::mohammed.fasha@uop.edu.jo::cc64f42d-a1a6-4f08-b97b-0c37f877119f" providerId="AD" clId="Web-{201C7D42-1F1C-B7C2-DD80-837CD0925F1E}" dt="2025-03-23T12:36:34.651" v="413" actId="1076"/>
-        <pc:sldMkLst>
-          <pc:docMk/>
-          <pc:sldMk cId="0" sldId="274"/>
-        </pc:sldMkLst>
-        <pc:spChg chg="mod">
-          <ac:chgData name="Mohammed Fasha" userId="S::mohammed.fasha@uop.edu.jo::cc64f42d-a1a6-4f08-b97b-0c37f877119f" providerId="AD" clId="Web-{201C7D42-1F1C-B7C2-DD80-837CD0925F1E}" dt="2025-03-23T12:36:31.432" v="411" actId="20577"/>
-          <ac:spMkLst>
-            <pc:docMk/>
-            <pc:sldMk cId="0" sldId="274"/>
-            <ac:spMk id="7" creationId="{CF4277E2-2BAC-D76F-20C6-A50B542D2495}"/>
-          </ac:spMkLst>
-        </pc:spChg>
-        <pc:picChg chg="mod">
-          <ac:chgData name="Mohammed Fasha" userId="S::mohammed.fasha@uop.edu.jo::cc64f42d-a1a6-4f08-b97b-0c37f877119f" providerId="AD" clId="Web-{201C7D42-1F1C-B7C2-DD80-837CD0925F1E}" dt="2025-03-23T12:36:34.651" v="413" actId="1076"/>
-          <ac:picMkLst>
-            <pc:docMk/>
-            <pc:sldMk cId="0" sldId="274"/>
-            <ac:picMk id="4" creationId="{00000000-0000-0000-0000-000000000000}"/>
-          </ac:picMkLst>
-        </pc:picChg>
-      </pc:sldChg>
-      <pc:sldChg chg="addSp delSp modSp del">
-        <pc:chgData name="Mohammed Fasha" userId="S::mohammed.fasha@uop.edu.jo::cc64f42d-a1a6-4f08-b97b-0c37f877119f" providerId="AD" clId="Web-{201C7D42-1F1C-B7C2-DD80-837CD0925F1E}" dt="2025-03-23T12:33:44.545" v="354"/>
-        <pc:sldMkLst>
-          <pc:docMk/>
-          <pc:sldMk cId="414281864" sldId="320"/>
-        </pc:sldMkLst>
-        <pc:spChg chg="add mod">
-          <ac:chgData name="Mohammed Fasha" userId="S::mohammed.fasha@uop.edu.jo::cc64f42d-a1a6-4f08-b97b-0c37f877119f" providerId="AD" clId="Web-{201C7D42-1F1C-B7C2-DD80-837CD0925F1E}" dt="2025-03-23T12:32:50.990" v="337" actId="14100"/>
-          <ac:spMkLst>
-            <pc:docMk/>
-            <pc:sldMk cId="414281864" sldId="320"/>
-            <ac:spMk id="3" creationId="{6415D2B3-E528-9A48-0846-6D580189DCFF}"/>
-          </ac:spMkLst>
-        </pc:spChg>
-        <pc:spChg chg="add mod">
-          <ac:chgData name="Mohammed Fasha" userId="S::mohammed.fasha@uop.edu.jo::cc64f42d-a1a6-4f08-b97b-0c37f877119f" providerId="AD" clId="Web-{201C7D42-1F1C-B7C2-DD80-837CD0925F1E}" dt="2025-03-23T12:33:40.982" v="353"/>
-          <ac:spMkLst>
-            <pc:docMk/>
-            <pc:sldMk cId="414281864" sldId="320"/>
-            <ac:spMk id="6" creationId="{96CEABA3-6A15-29F4-21A7-2DD59BA75AEF}"/>
-          </ac:spMkLst>
-        </pc:spChg>
-        <pc:picChg chg="del mod">
-          <ac:chgData name="Mohammed Fasha" userId="S::mohammed.fasha@uop.edu.jo::cc64f42d-a1a6-4f08-b97b-0c37f877119f" providerId="AD" clId="Web-{201C7D42-1F1C-B7C2-DD80-837CD0925F1E}" dt="2025-03-23T12:33:40.982" v="353"/>
-          <ac:picMkLst>
-            <pc:docMk/>
-            <pc:sldMk cId="414281864" sldId="320"/>
-            <ac:picMk id="4" creationId="{2B13B5C8-DB85-2B46-F1E5-328A8246D30B}"/>
-          </ac:picMkLst>
-        </pc:picChg>
-      </pc:sldChg>
-      <pc:sldChg chg="addSp delSp modSp">
-        <pc:chgData name="Mohammed Fasha" userId="S::mohammed.fasha@uop.edu.jo::cc64f42d-a1a6-4f08-b97b-0c37f877119f" providerId="AD" clId="Web-{201C7D42-1F1C-B7C2-DD80-837CD0925F1E}" dt="2025-03-23T12:32:06.408" v="330"/>
-        <pc:sldMkLst>
-          <pc:docMk/>
-          <pc:sldMk cId="2158520731" sldId="321"/>
-        </pc:sldMkLst>
-        <pc:spChg chg="mod">
-          <ac:chgData name="Mohammed Fasha" userId="S::mohammed.fasha@uop.edu.jo::cc64f42d-a1a6-4f08-b97b-0c37f877119f" providerId="AD" clId="Web-{201C7D42-1F1C-B7C2-DD80-837CD0925F1E}" dt="2025-03-23T12:29:56.352" v="245" actId="14100"/>
-          <ac:spMkLst>
-            <pc:docMk/>
-            <pc:sldMk cId="2158520731" sldId="321"/>
-            <ac:spMk id="2" creationId="{2CBE9B8D-9BCA-A077-FC54-F37DD1ED5A43}"/>
-          </ac:spMkLst>
-        </pc:spChg>
-        <pc:spChg chg="add del mod">
-          <ac:chgData name="Mohammed Fasha" userId="S::mohammed.fasha@uop.edu.jo::cc64f42d-a1a6-4f08-b97b-0c37f877119f" providerId="AD" clId="Web-{201C7D42-1F1C-B7C2-DD80-837CD0925F1E}" dt="2025-03-23T12:29:46.601" v="242"/>
-          <ac:spMkLst>
-            <pc:docMk/>
-            <pc:sldMk cId="2158520731" sldId="321"/>
-            <ac:spMk id="4" creationId="{D954ED0A-F52E-4186-6506-1DB6C0AD843E}"/>
-          </ac:spMkLst>
-        </pc:spChg>
-        <pc:spChg chg="mod">
-          <ac:chgData name="Mohammed Fasha" userId="S::mohammed.fasha@uop.edu.jo::cc64f42d-a1a6-4f08-b97b-0c37f877119f" providerId="AD" clId="Web-{201C7D42-1F1C-B7C2-DD80-837CD0925F1E}" dt="2025-03-23T12:31:01.716" v="274" actId="14100"/>
-          <ac:spMkLst>
-            <pc:docMk/>
-            <pc:sldMk cId="2158520731" sldId="321"/>
-            <ac:spMk id="6" creationId="{5CB15C33-8731-2AC8-2AA9-CC56BB604532}"/>
-          </ac:spMkLst>
-        </pc:spChg>
-        <pc:spChg chg="add del">
-          <ac:chgData name="Mohammed Fasha" userId="S::mohammed.fasha@uop.edu.jo::cc64f42d-a1a6-4f08-b97b-0c37f877119f" providerId="AD" clId="Web-{201C7D42-1F1C-B7C2-DD80-837CD0925F1E}" dt="2025-03-23T12:30:09.821" v="247"/>
-          <ac:spMkLst>
-            <pc:docMk/>
-            <pc:sldMk cId="2158520731" sldId="321"/>
-            <ac:spMk id="8" creationId="{6524E3C2-695B-BD76-2670-42DE7ED720CF}"/>
-          </ac:spMkLst>
-        </pc:spChg>
-        <pc:graphicFrameChg chg="mod modGraphic">
-          <ac:chgData name="Mohammed Fasha" userId="S::mohammed.fasha@uop.edu.jo::cc64f42d-a1a6-4f08-b97b-0c37f877119f" providerId="AD" clId="Web-{201C7D42-1F1C-B7C2-DD80-837CD0925F1E}" dt="2025-03-23T12:32:06.408" v="330"/>
-          <ac:graphicFrameMkLst>
-            <pc:docMk/>
-            <pc:sldMk cId="2158520731" sldId="321"/>
-            <ac:graphicFrameMk id="14" creationId="{68F65CD9-04AE-694C-CAF9-ABB6912D588B}"/>
-          </ac:graphicFrameMkLst>
-        </pc:graphicFrameChg>
-        <pc:picChg chg="del">
-          <ac:chgData name="Mohammed Fasha" userId="S::mohammed.fasha@uop.edu.jo::cc64f42d-a1a6-4f08-b97b-0c37f877119f" providerId="AD" clId="Web-{201C7D42-1F1C-B7C2-DD80-837CD0925F1E}" dt="2025-03-23T12:29:26.365" v="239"/>
-          <ac:picMkLst>
-            <pc:docMk/>
-            <pc:sldMk cId="2158520731" sldId="321"/>
-            <ac:picMk id="7" creationId="{3309D882-20A5-56F6-889C-7DC7D2DFDA86}"/>
-          </ac:picMkLst>
-        </pc:picChg>
-      </pc:sldChg>
-      <pc:sldChg chg="addSp delSp modSp">
-        <pc:chgData name="Mohammed Fasha" userId="S::mohammed.fasha@uop.edu.jo::cc64f42d-a1a6-4f08-b97b-0c37f877119f" providerId="AD" clId="Web-{201C7D42-1F1C-B7C2-DD80-837CD0925F1E}" dt="2025-03-23T12:20:46.326" v="64"/>
-        <pc:sldMkLst>
-          <pc:docMk/>
-          <pc:sldMk cId="323566195" sldId="323"/>
-        </pc:sldMkLst>
-        <pc:spChg chg="mod">
-          <ac:chgData name="Mohammed Fasha" userId="S::mohammed.fasha@uop.edu.jo::cc64f42d-a1a6-4f08-b97b-0c37f877119f" providerId="AD" clId="Web-{201C7D42-1F1C-B7C2-DD80-837CD0925F1E}" dt="2025-03-23T12:18:05.517" v="7" actId="20577"/>
-          <ac:spMkLst>
-            <pc:docMk/>
-            <pc:sldMk cId="323566195" sldId="323"/>
-            <ac:spMk id="2" creationId="{595498DF-D91B-3039-6A35-B1D5FAB6D692}"/>
-          </ac:spMkLst>
-        </pc:spChg>
-        <pc:spChg chg="add del mod">
-          <ac:chgData name="Mohammed Fasha" userId="S::mohammed.fasha@uop.edu.jo::cc64f42d-a1a6-4f08-b97b-0c37f877119f" providerId="AD" clId="Web-{201C7D42-1F1C-B7C2-DD80-837CD0925F1E}" dt="2025-03-23T12:19:29.492" v="27"/>
-          <ac:spMkLst>
-            <pc:docMk/>
-            <pc:sldMk cId="323566195" sldId="323"/>
-            <ac:spMk id="3" creationId="{CBC340C4-DE14-68A2-50C2-41566FF4A343}"/>
-          </ac:spMkLst>
-        </pc:spChg>
-        <pc:graphicFrameChg chg="mod modGraphic">
-          <ac:chgData name="Mohammed Fasha" userId="S::mohammed.fasha@uop.edu.jo::cc64f42d-a1a6-4f08-b97b-0c37f877119f" providerId="AD" clId="Web-{201C7D42-1F1C-B7C2-DD80-837CD0925F1E}" dt="2025-03-23T12:20:46.326" v="64"/>
-          <ac:graphicFrameMkLst>
-            <pc:docMk/>
-            <pc:sldMk cId="323566195" sldId="323"/>
-            <ac:graphicFrameMk id="82" creationId="{135E2F87-A441-0139-1576-BC186FCA12A1}"/>
-          </ac:graphicFrameMkLst>
-        </pc:graphicFrameChg>
-      </pc:sldChg>
-      <pc:sldChg chg="modSp">
-        <pc:chgData name="Mohammed Fasha" userId="S::mohammed.fasha@uop.edu.jo::cc64f42d-a1a6-4f08-b97b-0c37f877119f" providerId="AD" clId="Web-{201C7D42-1F1C-B7C2-DD80-837CD0925F1E}" dt="2025-03-23T12:19:03.928" v="15" actId="20577"/>
-        <pc:sldMkLst>
-          <pc:docMk/>
-          <pc:sldMk cId="2802975669" sldId="324"/>
-        </pc:sldMkLst>
-        <pc:spChg chg="mod">
-          <ac:chgData name="Mohammed Fasha" userId="S::mohammed.fasha@uop.edu.jo::cc64f42d-a1a6-4f08-b97b-0c37f877119f" providerId="AD" clId="Web-{201C7D42-1F1C-B7C2-DD80-837CD0925F1E}" dt="2025-03-23T12:19:03.928" v="15" actId="20577"/>
-          <ac:spMkLst>
-            <pc:docMk/>
-            <pc:sldMk cId="2802975669" sldId="324"/>
-            <ac:spMk id="2" creationId="{DD28BFAD-F7FC-EB4E-DB73-D0B4611BA46D}"/>
-          </ac:spMkLst>
-        </pc:spChg>
-      </pc:sldChg>
-      <pc:sldChg chg="modSp">
-        <pc:chgData name="Mohammed Fasha" userId="S::mohammed.fasha@uop.edu.jo::cc64f42d-a1a6-4f08-b97b-0c37f877119f" providerId="AD" clId="Web-{201C7D42-1F1C-B7C2-DD80-837CD0925F1E}" dt="2025-03-23T12:27:29.419" v="215" actId="20577"/>
-        <pc:sldMkLst>
-          <pc:docMk/>
-          <pc:sldMk cId="932796301" sldId="328"/>
-        </pc:sldMkLst>
-        <pc:spChg chg="mod">
-          <ac:chgData name="Mohammed Fasha" userId="S::mohammed.fasha@uop.edu.jo::cc64f42d-a1a6-4f08-b97b-0c37f877119f" providerId="AD" clId="Web-{201C7D42-1F1C-B7C2-DD80-837CD0925F1E}" dt="2025-03-23T12:27:29.419" v="215" actId="20577"/>
-          <ac:spMkLst>
-            <pc:docMk/>
-            <pc:sldMk cId="932796301" sldId="328"/>
-            <ac:spMk id="3" creationId="{3C3E019B-0F20-8E05-2053-6E145189E1FD}"/>
-          </ac:spMkLst>
-        </pc:spChg>
-      </pc:sldChg>
-      <pc:sldChg chg="addSp delSp modSp new del">
-        <pc:chgData name="Mohammed Fasha" userId="S::mohammed.fasha@uop.edu.jo::cc64f42d-a1a6-4f08-b97b-0c37f877119f" providerId="AD" clId="Web-{201C7D42-1F1C-B7C2-DD80-837CD0925F1E}" dt="2025-03-23T12:23:37.245" v="125"/>
-        <pc:sldMkLst>
-          <pc:docMk/>
-          <pc:sldMk cId="704117908" sldId="331"/>
-        </pc:sldMkLst>
-        <pc:spChg chg="del">
-          <ac:chgData name="Mohammed Fasha" userId="S::mohammed.fasha@uop.edu.jo::cc64f42d-a1a6-4f08-b97b-0c37f877119f" providerId="AD" clId="Web-{201C7D42-1F1C-B7C2-DD80-837CD0925F1E}" dt="2025-03-23T12:22:16.036" v="66"/>
-          <ac:spMkLst>
-            <pc:docMk/>
-            <pc:sldMk cId="704117908" sldId="331"/>
-            <ac:spMk id="3" creationId="{14888DAD-DF6B-FD8A-47BD-EC0A9BCD3E43}"/>
-          </ac:spMkLst>
-        </pc:spChg>
-        <pc:spChg chg="add mod">
-          <ac:chgData name="Mohammed Fasha" userId="S::mohammed.fasha@uop.edu.jo::cc64f42d-a1a6-4f08-b97b-0c37f877119f" providerId="AD" clId="Web-{201C7D42-1F1C-B7C2-DD80-837CD0925F1E}" dt="2025-03-23T12:22:16.208" v="68"/>
-          <ac:spMkLst>
-            <pc:docMk/>
-            <pc:sldMk cId="704117908" sldId="331"/>
-            <ac:spMk id="6" creationId="{A7AA9564-6E19-4116-86F2-FABD25A1A1A5}"/>
-          </ac:spMkLst>
-        </pc:spChg>
-        <pc:graphicFrameChg chg="add mod ord modGraphic">
-          <ac:chgData name="Mohammed Fasha" userId="S::mohammed.fasha@uop.edu.jo::cc64f42d-a1a6-4f08-b97b-0c37f877119f" providerId="AD" clId="Web-{201C7D42-1F1C-B7C2-DD80-837CD0925F1E}" dt="2025-03-23T12:22:16.036" v="66"/>
-          <ac:graphicFrameMkLst>
-            <pc:docMk/>
-            <pc:sldMk cId="704117908" sldId="331"/>
-            <ac:graphicFrameMk id="5" creationId="{7E69C729-99E5-0971-37B9-0D5E0F7A54F2}"/>
-          </ac:graphicFrameMkLst>
-        </pc:graphicFrameChg>
-      </pc:sldChg>
-      <pc:sldChg chg="modSp new">
-        <pc:chgData name="Mohammed Fasha" userId="S::mohammed.fasha@uop.edu.jo::cc64f42d-a1a6-4f08-b97b-0c37f877119f" providerId="AD" clId="Web-{201C7D42-1F1C-B7C2-DD80-837CD0925F1E}" dt="2025-03-23T12:23:26.354" v="123" actId="20577"/>
-        <pc:sldMkLst>
-          <pc:docMk/>
-          <pc:sldMk cId="2684285518" sldId="332"/>
-        </pc:sldMkLst>
-        <pc:spChg chg="mod">
-          <ac:chgData name="Mohammed Fasha" userId="S::mohammed.fasha@uop.edu.jo::cc64f42d-a1a6-4f08-b97b-0c37f877119f" providerId="AD" clId="Web-{201C7D42-1F1C-B7C2-DD80-837CD0925F1E}" dt="2025-03-23T12:23:26.354" v="123" actId="20577"/>
-          <ac:spMkLst>
-            <pc:docMk/>
-            <pc:sldMk cId="2684285518" sldId="332"/>
-            <ac:spMk id="2" creationId="{7B835121-B141-7218-B42D-1A517809491F}"/>
-          </ac:spMkLst>
-        </pc:spChg>
-        <pc:spChg chg="mod">
-          <ac:chgData name="Mohammed Fasha" userId="S::mohammed.fasha@uop.edu.jo::cc64f42d-a1a6-4f08-b97b-0c37f877119f" providerId="AD" clId="Web-{201C7D42-1F1C-B7C2-DD80-837CD0925F1E}" dt="2025-03-23T12:22:57.508" v="76" actId="20577"/>
-          <ac:spMkLst>
-            <pc:docMk/>
-            <pc:sldMk cId="2684285518" sldId="332"/>
-            <ac:spMk id="3" creationId="{0173D824-DE25-C32C-01F2-97287FB39040}"/>
-          </ac:spMkLst>
-        </pc:spChg>
-      </pc:sldChg>
-      <pc:sldChg chg="addSp delSp modSp new">
-        <pc:chgData name="Mohammed Fasha" userId="S::mohammed.fasha@uop.edu.jo::cc64f42d-a1a6-4f08-b97b-0c37f877119f" providerId="AD" clId="Web-{201C7D42-1F1C-B7C2-DD80-837CD0925F1E}" dt="2025-03-23T12:26:17.070" v="197" actId="20577"/>
-        <pc:sldMkLst>
-          <pc:docMk/>
-          <pc:sldMk cId="2087539751" sldId="333"/>
-        </pc:sldMkLst>
-        <pc:spChg chg="mod">
-          <ac:chgData name="Mohammed Fasha" userId="S::mohammed.fasha@uop.edu.jo::cc64f42d-a1a6-4f08-b97b-0c37f877119f" providerId="AD" clId="Web-{201C7D42-1F1C-B7C2-DD80-837CD0925F1E}" dt="2025-03-23T12:24:12.935" v="170" actId="20577"/>
-          <ac:spMkLst>
-            <pc:docMk/>
-            <pc:sldMk cId="2087539751" sldId="333"/>
-            <ac:spMk id="2" creationId="{32D77BF8-9EB6-EB2A-6FCA-BB3FE543BA98}"/>
-          </ac:spMkLst>
-        </pc:spChg>
-        <pc:spChg chg="del">
-          <ac:chgData name="Mohammed Fasha" userId="S::mohammed.fasha@uop.edu.jo::cc64f42d-a1a6-4f08-b97b-0c37f877119f" providerId="AD" clId="Web-{201C7D42-1F1C-B7C2-DD80-837CD0925F1E}" dt="2025-03-23T12:23:50.105" v="126"/>
-          <ac:spMkLst>
-            <pc:docMk/>
-            <pc:sldMk cId="2087539751" sldId="333"/>
-            <ac:spMk id="3" creationId="{B6C28580-7F8C-8B97-EE29-3277D6BBA93C}"/>
-          </ac:spMkLst>
-        </pc:spChg>
-        <pc:spChg chg="add del mod">
-          <ac:chgData name="Mohammed Fasha" userId="S::mohammed.fasha@uop.edu.jo::cc64f42d-a1a6-4f08-b97b-0c37f877119f" providerId="AD" clId="Web-{201C7D42-1F1C-B7C2-DD80-837CD0925F1E}" dt="2025-03-23T12:23:54.778" v="130"/>
-          <ac:spMkLst>
-            <pc:docMk/>
-            <pc:sldMk cId="2087539751" sldId="333"/>
-            <ac:spMk id="6" creationId="{070B8C86-DCCD-9D1B-BFDD-ECFCB1AF682F}"/>
-          </ac:spMkLst>
-        </pc:spChg>
-        <pc:spChg chg="add mod">
-          <ac:chgData name="Mohammed Fasha" userId="S::mohammed.fasha@uop.edu.jo::cc64f42d-a1a6-4f08-b97b-0c37f877119f" providerId="AD" clId="Web-{201C7D42-1F1C-B7C2-DD80-837CD0925F1E}" dt="2025-03-23T12:26:17.070" v="197" actId="20577"/>
-          <ac:spMkLst>
-            <pc:docMk/>
-            <pc:sldMk cId="2087539751" sldId="333"/>
-            <ac:spMk id="7" creationId="{0A67F442-A4EE-C664-5810-41DD02FE24D6}"/>
-          </ac:spMkLst>
-        </pc:spChg>
-        <pc:graphicFrameChg chg="add mod ord modGraphic">
-          <ac:chgData name="Mohammed Fasha" userId="S::mohammed.fasha@uop.edu.jo::cc64f42d-a1a6-4f08-b97b-0c37f877119f" providerId="AD" clId="Web-{201C7D42-1F1C-B7C2-DD80-837CD0925F1E}" dt="2025-03-23T12:24:34.874" v="183"/>
-          <ac:graphicFrameMkLst>
-            <pc:docMk/>
-            <pc:sldMk cId="2087539751" sldId="333"/>
-            <ac:graphicFrameMk id="5" creationId="{B49131E5-D272-CD58-3F5C-9B41C4487AEC}"/>
-          </ac:graphicFrameMkLst>
-        </pc:graphicFrameChg>
-      </pc:sldChg>
-      <pc:sldChg chg="modSp new mod modClrScheme chgLayout">
-        <pc:chgData name="Mohammed Fasha" userId="S::mohammed.fasha@uop.edu.jo::cc64f42d-a1a6-4f08-b97b-0c37f877119f" providerId="AD" clId="Web-{201C7D42-1F1C-B7C2-DD80-837CD0925F1E}" dt="2025-03-23T12:26:54.182" v="201" actId="20577"/>
-        <pc:sldMkLst>
-          <pc:docMk/>
-          <pc:sldMk cId="2275966120" sldId="334"/>
-        </pc:sldMkLst>
-        <pc:spChg chg="mod ord">
-          <ac:chgData name="Mohammed Fasha" userId="S::mohammed.fasha@uop.edu.jo::cc64f42d-a1a6-4f08-b97b-0c37f877119f" providerId="AD" clId="Web-{201C7D42-1F1C-B7C2-DD80-837CD0925F1E}" dt="2025-03-23T12:26:54.182" v="201" actId="20577"/>
-          <ac:spMkLst>
-            <pc:docMk/>
-            <pc:sldMk cId="2275966120" sldId="334"/>
-            <ac:spMk id="2" creationId="{C1CCCE25-35C5-F8C2-93F3-75E6F478CF44}"/>
-          </ac:spMkLst>
-        </pc:spChg>
-        <pc:spChg chg="mod ord">
-          <ac:chgData name="Mohammed Fasha" userId="S::mohammed.fasha@uop.edu.jo::cc64f42d-a1a6-4f08-b97b-0c37f877119f" providerId="AD" clId="Web-{201C7D42-1F1C-B7C2-DD80-837CD0925F1E}" dt="2025-03-23T12:26:50.010" v="199"/>
-          <ac:spMkLst>
-            <pc:docMk/>
-            <pc:sldMk cId="2275966120" sldId="334"/>
-            <ac:spMk id="3" creationId="{502C69CE-4637-39A9-33A6-B5CFBD5A58A9}"/>
-          </ac:spMkLst>
-        </pc:spChg>
-      </pc:sldChg>
-      <pc:sldChg chg="addSp modSp new">
-        <pc:chgData name="Mohammed Fasha" userId="S::mohammed.fasha@uop.edu.jo::cc64f42d-a1a6-4f08-b97b-0c37f877119f" providerId="AD" clId="Web-{201C7D42-1F1C-B7C2-DD80-837CD0925F1E}" dt="2025-03-23T12:34:23.220" v="365" actId="1076"/>
-        <pc:sldMkLst>
-          <pc:docMk/>
-          <pc:sldMk cId="4251754830" sldId="335"/>
-        </pc:sldMkLst>
-        <pc:spChg chg="mod">
-          <ac:chgData name="Mohammed Fasha" userId="S::mohammed.fasha@uop.edu.jo::cc64f42d-a1a6-4f08-b97b-0c37f877119f" providerId="AD" clId="Web-{201C7D42-1F1C-B7C2-DD80-837CD0925F1E}" dt="2025-03-23T12:34:05.656" v="361" actId="14100"/>
-          <ac:spMkLst>
-            <pc:docMk/>
-            <pc:sldMk cId="4251754830" sldId="335"/>
-            <ac:spMk id="2" creationId="{880BEA05-F32B-B175-AA7B-47CBCB32C4E0}"/>
-          </ac:spMkLst>
-        </pc:spChg>
-        <pc:spChg chg="mod">
-          <ac:chgData name="Mohammed Fasha" userId="S::mohammed.fasha@uop.edu.jo::cc64f42d-a1a6-4f08-b97b-0c37f877119f" providerId="AD" clId="Web-{201C7D42-1F1C-B7C2-DD80-837CD0925F1E}" dt="2025-03-23T12:33:56.639" v="360" actId="14100"/>
-          <ac:spMkLst>
-            <pc:docMk/>
-            <pc:sldMk cId="4251754830" sldId="335"/>
-            <ac:spMk id="3" creationId="{1821722D-3CE7-874F-C927-A9A7BB997821}"/>
-          </ac:spMkLst>
-        </pc:spChg>
-        <pc:picChg chg="add mod">
-          <ac:chgData name="Mohammed Fasha" userId="S::mohammed.fasha@uop.edu.jo::cc64f42d-a1a6-4f08-b97b-0c37f877119f" providerId="AD" clId="Web-{201C7D42-1F1C-B7C2-DD80-837CD0925F1E}" dt="2025-03-23T12:34:23.220" v="365" actId="1076"/>
-          <ac:picMkLst>
-            <pc:docMk/>
-            <pc:sldMk cId="4251754830" sldId="335"/>
-            <ac:picMk id="4" creationId="{24975023-F336-E81B-3410-B0E86A42F3E0}"/>
-          </ac:picMkLst>
-        </pc:picChg>
-      </pc:sldChg>
-    </pc:docChg>
-  </pc:docChgLst>
-  <pc:docChgLst>
-    <pc:chgData name="Mohammed Fasha" userId="S::mohammed.fasha@uop.edu.jo::cc64f42d-a1a6-4f08-b97b-0c37f877119f" providerId="AD" clId="Web-{048CEBFD-D6A1-FF4F-145A-C5347D00F6D8}"/>
-    <pc:docChg chg="addSld delSld modSld">
-      <pc:chgData name="Mohammed Fasha" userId="S::mohammed.fasha@uop.edu.jo::cc64f42d-a1a6-4f08-b97b-0c37f877119f" providerId="AD" clId="Web-{048CEBFD-D6A1-FF4F-145A-C5347D00F6D8}" dt="2025-03-23T06:04:22.577" v="1166" actId="20577"/>
-      <pc:docMkLst>
-        <pc:docMk/>
-      </pc:docMkLst>
-      <pc:sldChg chg="modSp">
-        <pc:chgData name="Mohammed Fasha" userId="S::mohammed.fasha@uop.edu.jo::cc64f42d-a1a6-4f08-b97b-0c37f877119f" providerId="AD" clId="Web-{048CEBFD-D6A1-FF4F-145A-C5347D00F6D8}" dt="2025-03-23T04:07:54.621" v="655" actId="20577"/>
-        <pc:sldMkLst>
-          <pc:docMk/>
-          <pc:sldMk cId="0" sldId="272"/>
-        </pc:sldMkLst>
-        <pc:spChg chg="mod">
-          <ac:chgData name="Mohammed Fasha" userId="S::mohammed.fasha@uop.edu.jo::cc64f42d-a1a6-4f08-b97b-0c37f877119f" providerId="AD" clId="Web-{048CEBFD-D6A1-FF4F-145A-C5347D00F6D8}" dt="2025-03-23T04:07:54.621" v="655" actId="20577"/>
-          <ac:spMkLst>
-            <pc:docMk/>
-            <pc:sldMk cId="0" sldId="272"/>
-            <ac:spMk id="7" creationId="{BD008676-47C8-D88A-CD4A-65BB83D57162}"/>
-          </ac:spMkLst>
-        </pc:spChg>
-      </pc:sldChg>
-      <pc:sldChg chg="del">
-        <pc:chgData name="Mohammed Fasha" userId="S::mohammed.fasha@uop.edu.jo::cc64f42d-a1a6-4f08-b97b-0c37f877119f" providerId="AD" clId="Web-{048CEBFD-D6A1-FF4F-145A-C5347D00F6D8}" dt="2025-03-23T03:16:25.599" v="434"/>
-        <pc:sldMkLst>
-          <pc:docMk/>
-          <pc:sldMk cId="441052949" sldId="309"/>
-        </pc:sldMkLst>
-      </pc:sldChg>
-      <pc:sldChg chg="del">
-        <pc:chgData name="Mohammed Fasha" userId="S::mohammed.fasha@uop.edu.jo::cc64f42d-a1a6-4f08-b97b-0c37f877119f" providerId="AD" clId="Web-{048CEBFD-D6A1-FF4F-145A-C5347D00F6D8}" dt="2025-03-23T03:16:27.646" v="435"/>
-        <pc:sldMkLst>
-          <pc:docMk/>
-          <pc:sldMk cId="4115587381" sldId="311"/>
-        </pc:sldMkLst>
-      </pc:sldChg>
-      <pc:sldChg chg="del">
-        <pc:chgData name="Mohammed Fasha" userId="S::mohammed.fasha@uop.edu.jo::cc64f42d-a1a6-4f08-b97b-0c37f877119f" providerId="AD" clId="Web-{048CEBFD-D6A1-FF4F-145A-C5347D00F6D8}" dt="2025-03-23T03:16:34.240" v="436"/>
-        <pc:sldMkLst>
-          <pc:docMk/>
-          <pc:sldMk cId="1008151712" sldId="313"/>
-        </pc:sldMkLst>
-      </pc:sldChg>
-      <pc:sldChg chg="modSp">
-        <pc:chgData name="Mohammed Fasha" userId="S::mohammed.fasha@uop.edu.jo::cc64f42d-a1a6-4f08-b97b-0c37f877119f" providerId="AD" clId="Web-{048CEBFD-D6A1-FF4F-145A-C5347D00F6D8}" dt="2025-03-23T06:04:22.577" v="1166" actId="20577"/>
-        <pc:sldMkLst>
-          <pc:docMk/>
-          <pc:sldMk cId="1864506158" sldId="314"/>
-        </pc:sldMkLst>
-        <pc:spChg chg="mod">
-          <ac:chgData name="Mohammed Fasha" userId="S::mohammed.fasha@uop.edu.jo::cc64f42d-a1a6-4f08-b97b-0c37f877119f" providerId="AD" clId="Web-{048CEBFD-D6A1-FF4F-145A-C5347D00F6D8}" dt="2025-03-23T06:04:22.577" v="1166" actId="20577"/>
-          <ac:spMkLst>
-            <pc:docMk/>
-            <pc:sldMk cId="1864506158" sldId="314"/>
-            <ac:spMk id="3" creationId="{4961BB54-A79B-91B6-2B3E-888FA20CC61F}"/>
-          </ac:spMkLst>
-        </pc:spChg>
-      </pc:sldChg>
-      <pc:sldChg chg="modSp">
-        <pc:chgData name="Mohammed Fasha" userId="S::mohammed.fasha@uop.edu.jo::cc64f42d-a1a6-4f08-b97b-0c37f877119f" providerId="AD" clId="Web-{048CEBFD-D6A1-FF4F-145A-C5347D00F6D8}" dt="2025-03-23T03:13:33.830" v="401" actId="20577"/>
-        <pc:sldMkLst>
-          <pc:docMk/>
-          <pc:sldMk cId="2845841377" sldId="315"/>
-        </pc:sldMkLst>
-        <pc:spChg chg="mod">
-          <ac:chgData name="Mohammed Fasha" userId="S::mohammed.fasha@uop.edu.jo::cc64f42d-a1a6-4f08-b97b-0c37f877119f" providerId="AD" clId="Web-{048CEBFD-D6A1-FF4F-145A-C5347D00F6D8}" dt="2025-03-23T03:13:33.830" v="401" actId="20577"/>
-          <ac:spMkLst>
-            <pc:docMk/>
-            <pc:sldMk cId="2845841377" sldId="315"/>
-            <ac:spMk id="3" creationId="{FFE21ADB-E900-3A47-B3AD-FE93A73B6920}"/>
-          </ac:spMkLst>
-        </pc:spChg>
-      </pc:sldChg>
-      <pc:sldChg chg="del">
-        <pc:chgData name="Mohammed Fasha" userId="S::mohammed.fasha@uop.edu.jo::cc64f42d-a1a6-4f08-b97b-0c37f877119f" providerId="AD" clId="Web-{048CEBFD-D6A1-FF4F-145A-C5347D00F6D8}" dt="2025-03-23T02:57:56.519" v="0"/>
-        <pc:sldMkLst>
-          <pc:docMk/>
-          <pc:sldMk cId="4201170802" sldId="316"/>
-        </pc:sldMkLst>
-      </pc:sldChg>
-      <pc:sldChg chg="del">
-        <pc:chgData name="Mohammed Fasha" userId="S::mohammed.fasha@uop.edu.jo::cc64f42d-a1a6-4f08-b97b-0c37f877119f" providerId="AD" clId="Web-{048CEBFD-D6A1-FF4F-145A-C5347D00F6D8}" dt="2025-03-23T03:16:16.630" v="433"/>
-        <pc:sldMkLst>
-          <pc:docMk/>
-          <pc:sldMk cId="3352190066" sldId="317"/>
-        </pc:sldMkLst>
-      </pc:sldChg>
-      <pc:sldChg chg="modSp new del">
-        <pc:chgData name="Mohammed Fasha" userId="S::mohammed.fasha@uop.edu.jo::cc64f42d-a1a6-4f08-b97b-0c37f877119f" providerId="AD" clId="Web-{048CEBFD-D6A1-FF4F-145A-C5347D00F6D8}" dt="2025-03-23T03:10:23.882" v="393"/>
-        <pc:sldMkLst>
-          <pc:docMk/>
-          <pc:sldMk cId="4008238018" sldId="318"/>
-        </pc:sldMkLst>
-        <pc:spChg chg="mod">
-          <ac:chgData name="Mohammed Fasha" userId="S::mohammed.fasha@uop.edu.jo::cc64f42d-a1a6-4f08-b97b-0c37f877119f" providerId="AD" clId="Web-{048CEBFD-D6A1-FF4F-145A-C5347D00F6D8}" dt="2025-03-23T02:59:07.833" v="41" actId="20577"/>
-          <ac:spMkLst>
-            <pc:docMk/>
-            <pc:sldMk cId="4008238018" sldId="318"/>
-            <ac:spMk id="2" creationId="{D3C7D4FA-5F70-B500-9517-CC645EBDA78B}"/>
-          </ac:spMkLst>
-        </pc:spChg>
-        <pc:spChg chg="mod">
-          <ac:chgData name="Mohammed Fasha" userId="S::mohammed.fasha@uop.edu.jo::cc64f42d-a1a6-4f08-b97b-0c37f877119f" providerId="AD" clId="Web-{048CEBFD-D6A1-FF4F-145A-C5347D00F6D8}" dt="2025-03-23T02:58:49.098" v="10" actId="20577"/>
-          <ac:spMkLst>
-            <pc:docMk/>
-            <pc:sldMk cId="4008238018" sldId="318"/>
-            <ac:spMk id="3" creationId="{1FA43FC1-28CF-9D48-79EA-ADC996ACCB93}"/>
-          </ac:spMkLst>
-        </pc:spChg>
-      </pc:sldChg>
-      <pc:sldChg chg="addSp delSp modSp new del">
-        <pc:chgData name="Mohammed Fasha" userId="S::mohammed.fasha@uop.edu.jo::cc64f42d-a1a6-4f08-b97b-0c37f877119f" providerId="AD" clId="Web-{048CEBFD-D6A1-FF4F-145A-C5347D00F6D8}" dt="2025-03-23T04:04:13.661" v="626"/>
-        <pc:sldMkLst>
-          <pc:docMk/>
-          <pc:sldMk cId="3382703493" sldId="319"/>
-        </pc:sldMkLst>
-        <pc:spChg chg="mod">
-          <ac:chgData name="Mohammed Fasha" userId="S::mohammed.fasha@uop.edu.jo::cc64f42d-a1a6-4f08-b97b-0c37f877119f" providerId="AD" clId="Web-{048CEBFD-D6A1-FF4F-145A-C5347D00F6D8}" dt="2025-03-23T03:15:59.411" v="430" actId="14100"/>
-          <ac:spMkLst>
-            <pc:docMk/>
-            <pc:sldMk cId="3382703493" sldId="319"/>
-            <ac:spMk id="2" creationId="{F1D673AF-4F04-DB12-0F9A-6102FE3ABB44}"/>
-          </ac:spMkLst>
-        </pc:spChg>
-        <pc:spChg chg="mod">
-          <ac:chgData name="Mohammed Fasha" userId="S::mohammed.fasha@uop.edu.jo::cc64f42d-a1a6-4f08-b97b-0c37f877119f" providerId="AD" clId="Web-{048CEBFD-D6A1-FF4F-145A-C5347D00F6D8}" dt="2025-03-23T03:15:36.473" v="423" actId="14100"/>
-          <ac:spMkLst>
-            <pc:docMk/>
-            <pc:sldMk cId="3382703493" sldId="319"/>
-            <ac:spMk id="3" creationId="{A573E5E7-FA1F-82A1-2553-7E408E40D30E}"/>
-          </ac:spMkLst>
-        </pc:spChg>
-        <pc:spChg chg="add mod">
-          <ac:chgData name="Mohammed Fasha" userId="S::mohammed.fasha@uop.edu.jo::cc64f42d-a1a6-4f08-b97b-0c37f877119f" providerId="AD" clId="Web-{048CEBFD-D6A1-FF4F-145A-C5347D00F6D8}" dt="2025-03-23T03:15:45.926" v="425" actId="14100"/>
-          <ac:spMkLst>
-            <pc:docMk/>
-            <pc:sldMk cId="3382703493" sldId="319"/>
-            <ac:spMk id="4" creationId="{4FDB67D6-61D4-ABF8-861E-FC65D126A53D}"/>
-          </ac:spMkLst>
-        </pc:spChg>
-        <pc:graphicFrameChg chg="add mod modGraphic">
-          <ac:chgData name="Mohammed Fasha" userId="S::mohammed.fasha@uop.edu.jo::cc64f42d-a1a6-4f08-b97b-0c37f877119f" providerId="AD" clId="Web-{048CEBFD-D6A1-FF4F-145A-C5347D00F6D8}" dt="2025-03-23T03:16:11.817" v="432" actId="1076"/>
-          <ac:graphicFrameMkLst>
-            <pc:docMk/>
-            <pc:sldMk cId="3382703493" sldId="319"/>
-            <ac:graphicFrameMk id="6" creationId="{89A96ED2-14FC-3A8F-A82A-2677B3E06006}"/>
-          </ac:graphicFrameMkLst>
-        </pc:graphicFrameChg>
-        <pc:picChg chg="add del mod">
-          <ac:chgData name="Mohammed Fasha" userId="S::mohammed.fasha@uop.edu.jo::cc64f42d-a1a6-4f08-b97b-0c37f877119f" providerId="AD" clId="Web-{048CEBFD-D6A1-FF4F-145A-C5347D00F6D8}" dt="2025-03-23T04:00:49.057" v="516"/>
-          <ac:picMkLst>
-            <pc:docMk/>
-            <pc:sldMk cId="3382703493" sldId="319"/>
-            <ac:picMk id="7" creationId="{D10277A6-4FF6-D9DA-1AE1-C6C6ECA8F6A7}"/>
-          </ac:picMkLst>
-        </pc:picChg>
-      </pc:sldChg>
-      <pc:sldChg chg="addSp delSp modSp new">
-        <pc:chgData name="Mohammed Fasha" userId="S::mohammed.fasha@uop.edu.jo::cc64f42d-a1a6-4f08-b97b-0c37f877119f" providerId="AD" clId="Web-{048CEBFD-D6A1-FF4F-145A-C5347D00F6D8}" dt="2025-03-23T03:59:21.366" v="441" actId="1076"/>
-        <pc:sldMkLst>
-          <pc:docMk/>
-          <pc:sldMk cId="414281864" sldId="320"/>
-        </pc:sldMkLst>
-        <pc:spChg chg="mod">
-          <ac:chgData name="Mohammed Fasha" userId="S::mohammed.fasha@uop.edu.jo::cc64f42d-a1a6-4f08-b97b-0c37f877119f" providerId="AD" clId="Web-{048CEBFD-D6A1-FF4F-145A-C5347D00F6D8}" dt="2025-03-23T03:59:21.366" v="441" actId="1076"/>
-          <ac:spMkLst>
-            <pc:docMk/>
-            <pc:sldMk cId="414281864" sldId="320"/>
-            <ac:spMk id="2" creationId="{825E0878-CCF5-3464-A19A-DADCC246320F}"/>
-          </ac:spMkLst>
-        </pc:spChg>
-        <pc:spChg chg="del">
-          <ac:chgData name="Mohammed Fasha" userId="S::mohammed.fasha@uop.edu.jo::cc64f42d-a1a6-4f08-b97b-0c37f877119f" providerId="AD" clId="Web-{048CEBFD-D6A1-FF4F-145A-C5347D00F6D8}" dt="2025-03-23T03:04:08.058" v="115"/>
-          <ac:spMkLst>
-            <pc:docMk/>
-            <pc:sldMk cId="414281864" sldId="320"/>
-            <ac:spMk id="3" creationId="{9386E65B-B9D2-8ABC-98FF-5F8E2A8C6674}"/>
-          </ac:spMkLst>
-        </pc:spChg>
-        <pc:picChg chg="add mod ord">
-          <ac:chgData name="Mohammed Fasha" userId="S::mohammed.fasha@uop.edu.jo::cc64f42d-a1a6-4f08-b97b-0c37f877119f" providerId="AD" clId="Web-{048CEBFD-D6A1-FF4F-145A-C5347D00F6D8}" dt="2025-03-23T03:59:15.194" v="439" actId="1076"/>
-          <ac:picMkLst>
-            <pc:docMk/>
-            <pc:sldMk cId="414281864" sldId="320"/>
-            <ac:picMk id="4" creationId="{2B13B5C8-DB85-2B46-F1E5-328A8246D30B}"/>
-          </ac:picMkLst>
-        </pc:picChg>
-        <pc:picChg chg="add del mod">
-          <ac:chgData name="Mohammed Fasha" userId="S::mohammed.fasha@uop.edu.jo::cc64f42d-a1a6-4f08-b97b-0c37f877119f" providerId="AD" clId="Web-{048CEBFD-D6A1-FF4F-145A-C5347D00F6D8}" dt="2025-03-23T03:15:09.785" v="412"/>
-          <ac:picMkLst>
-            <pc:docMk/>
-            <pc:sldMk cId="414281864" sldId="320"/>
-            <ac:picMk id="5" creationId="{473A1119-463A-3C36-C42F-2981AC1D2670}"/>
-          </ac:picMkLst>
-        </pc:picChg>
-      </pc:sldChg>
-      <pc:sldChg chg="addSp delSp modSp new">
-        <pc:chgData name="Mohammed Fasha" userId="S::mohammed.fasha@uop.edu.jo::cc64f42d-a1a6-4f08-b97b-0c37f877119f" providerId="AD" clId="Web-{048CEBFD-D6A1-FF4F-145A-C5347D00F6D8}" dt="2025-03-23T04:04:06.582" v="625"/>
-        <pc:sldMkLst>
-          <pc:docMk/>
-          <pc:sldMk cId="2158520731" sldId="321"/>
-        </pc:sldMkLst>
-        <pc:spChg chg="mod">
-          <ac:chgData name="Mohammed Fasha" userId="S::mohammed.fasha@uop.edu.jo::cc64f42d-a1a6-4f08-b97b-0c37f877119f" providerId="AD" clId="Web-{048CEBFD-D6A1-FF4F-145A-C5347D00F6D8}" dt="2025-03-23T03:06:45.017" v="158" actId="20577"/>
-          <ac:spMkLst>
-            <pc:docMk/>
-            <pc:sldMk cId="2158520731" sldId="321"/>
-            <ac:spMk id="2" creationId="{2CBE9B8D-9BCA-A077-FC54-F37DD1ED5A43}"/>
-          </ac:spMkLst>
-        </pc:spChg>
-        <pc:spChg chg="del">
-          <ac:chgData name="Mohammed Fasha" userId="S::mohammed.fasha@uop.edu.jo::cc64f42d-a1a6-4f08-b97b-0c37f877119f" providerId="AD" clId="Web-{048CEBFD-D6A1-FF4F-145A-C5347D00F6D8}" dt="2025-03-23T03:06:26.736" v="140"/>
-          <ac:spMkLst>
-            <pc:docMk/>
-            <pc:sldMk cId="2158520731" sldId="321"/>
-            <ac:spMk id="3" creationId="{87066CB8-BE1C-18F6-0DD8-6FF093CE164E}"/>
-          </ac:spMkLst>
-        </pc:spChg>
-        <pc:spChg chg="add del mod">
-          <ac:chgData name="Mohammed Fasha" userId="S::mohammed.fasha@uop.edu.jo::cc64f42d-a1a6-4f08-b97b-0c37f877119f" providerId="AD" clId="Web-{048CEBFD-D6A1-FF4F-145A-C5347D00F6D8}" dt="2025-03-23T04:00:55.136" v="518"/>
-          <ac:spMkLst>
-            <pc:docMk/>
-            <pc:sldMk cId="2158520731" sldId="321"/>
-            <ac:spMk id="5" creationId="{38C8DE48-D7D7-B155-28C1-8FD9812E5A8A}"/>
-          </ac:spMkLst>
-        </pc:spChg>
-        <pc:spChg chg="add mod">
-          <ac:chgData name="Mohammed Fasha" userId="S::mohammed.fasha@uop.edu.jo::cc64f42d-a1a6-4f08-b97b-0c37f877119f" providerId="AD" clId="Web-{048CEBFD-D6A1-FF4F-145A-C5347D00F6D8}" dt="2025-03-23T04:03:57.144" v="623" actId="20577"/>
-          <ac:spMkLst>
-            <pc:docMk/>
-            <pc:sldMk cId="2158520731" sldId="321"/>
-            <ac:spMk id="6" creationId="{5CB15C33-8731-2AC8-2AA9-CC56BB604532}"/>
-          </ac:spMkLst>
-        </pc:spChg>
-        <pc:spChg chg="add del mod">
-          <ac:chgData name="Mohammed Fasha" userId="S::mohammed.fasha@uop.edu.jo::cc64f42d-a1a6-4f08-b97b-0c37f877119f" providerId="AD" clId="Web-{048CEBFD-D6A1-FF4F-145A-C5347D00F6D8}" dt="2025-03-23T04:02:47.327" v="574"/>
-          <ac:spMkLst>
-            <pc:docMk/>
-            <pc:sldMk cId="2158520731" sldId="321"/>
-            <ac:spMk id="9" creationId="{6C7BA3B8-00C1-BFF1-6AF2-0FD886030DA8}"/>
-          </ac:spMkLst>
-        </pc:spChg>
-        <pc:spChg chg="add del mod">
-          <ac:chgData name="Mohammed Fasha" userId="S::mohammed.fasha@uop.edu.jo::cc64f42d-a1a6-4f08-b97b-0c37f877119f" providerId="AD" clId="Web-{048CEBFD-D6A1-FF4F-145A-C5347D00F6D8}" dt="2025-03-23T04:01:37.246" v="535"/>
-          <ac:spMkLst>
-            <pc:docMk/>
-            <pc:sldMk cId="2158520731" sldId="321"/>
-            <ac:spMk id="11" creationId="{BF3A56A3-CCAA-A37B-CBB1-E12C9356DDDE}"/>
-          </ac:spMkLst>
-        </pc:spChg>
-        <pc:graphicFrameChg chg="add mod modGraphic">
-          <ac:chgData name="Mohammed Fasha" userId="S::mohammed.fasha@uop.edu.jo::cc64f42d-a1a6-4f08-b97b-0c37f877119f" providerId="AD" clId="Web-{048CEBFD-D6A1-FF4F-145A-C5347D00F6D8}" dt="2025-03-23T04:04:06.582" v="625"/>
-          <ac:graphicFrameMkLst>
-            <pc:docMk/>
-            <pc:sldMk cId="2158520731" sldId="321"/>
-            <ac:graphicFrameMk id="13" creationId="{16C5CEE9-CAE7-15B6-CD99-242FA0B68E48}"/>
-          </ac:graphicFrameMkLst>
-        </pc:graphicFrameChg>
-        <pc:graphicFrameChg chg="add mod modGraphic">
-          <ac:chgData name="Mohammed Fasha" userId="S::mohammed.fasha@uop.edu.jo::cc64f42d-a1a6-4f08-b97b-0c37f877119f" providerId="AD" clId="Web-{048CEBFD-D6A1-FF4F-145A-C5347D00F6D8}" dt="2025-03-23T04:03:46.191" v="620" actId="1076"/>
-          <ac:graphicFrameMkLst>
-            <pc:docMk/>
-            <pc:sldMk cId="2158520731" sldId="321"/>
-            <ac:graphicFrameMk id="14" creationId="{68F65CD9-04AE-694C-CAF9-ABB6912D588B}"/>
-          </ac:graphicFrameMkLst>
-        </pc:graphicFrameChg>
-        <pc:picChg chg="add del mod ord">
-          <ac:chgData name="Mohammed Fasha" userId="S::mohammed.fasha@uop.edu.jo::cc64f42d-a1a6-4f08-b97b-0c37f877119f" providerId="AD" clId="Web-{048CEBFD-D6A1-FF4F-145A-C5347D00F6D8}" dt="2025-03-23T04:00:53.854" v="517"/>
-          <ac:picMkLst>
-            <pc:docMk/>
-            <pc:sldMk cId="2158520731" sldId="321"/>
-            <ac:picMk id="4" creationId="{C31B89CD-6369-1B1F-B3B8-0654BE6BA649}"/>
-          </ac:picMkLst>
-        </pc:picChg>
-        <pc:picChg chg="add mod ord">
-          <ac:chgData name="Mohammed Fasha" userId="S::mohammed.fasha@uop.edu.jo::cc64f42d-a1a6-4f08-b97b-0c37f877119f" providerId="AD" clId="Web-{048CEBFD-D6A1-FF4F-145A-C5347D00F6D8}" dt="2025-03-23T04:01:03.120" v="520" actId="14100"/>
-          <ac:picMkLst>
-            <pc:docMk/>
-            <pc:sldMk cId="2158520731" sldId="321"/>
-            <ac:picMk id="7" creationId="{3309D882-20A5-56F6-889C-7DC7D2DFDA86}"/>
-          </ac:picMkLst>
-        </pc:picChg>
-      </pc:sldChg>
-      <pc:sldChg chg="addSp delSp modSp new">
-        <pc:chgData name="Mohammed Fasha" userId="S::mohammed.fasha@uop.edu.jo::cc64f42d-a1a6-4f08-b97b-0c37f877119f" providerId="AD" clId="Web-{048CEBFD-D6A1-FF4F-145A-C5347D00F6D8}" dt="2025-03-23T04:10:25.939" v="692"/>
-        <pc:sldMkLst>
-          <pc:docMk/>
-          <pc:sldMk cId="3486990666" sldId="322"/>
-        </pc:sldMkLst>
-        <pc:spChg chg="mod">
-          <ac:chgData name="Mohammed Fasha" userId="S::mohammed.fasha@uop.edu.jo::cc64f42d-a1a6-4f08-b97b-0c37f877119f" providerId="AD" clId="Web-{048CEBFD-D6A1-FF4F-145A-C5347D00F6D8}" dt="2025-03-23T04:09:04.561" v="672" actId="20577"/>
-          <ac:spMkLst>
-            <pc:docMk/>
-            <pc:sldMk cId="3486990666" sldId="322"/>
-            <ac:spMk id="2" creationId="{4F569A76-4CE0-A134-527E-6110690A0204}"/>
-          </ac:spMkLst>
-        </pc:spChg>
-        <pc:spChg chg="del">
-          <ac:chgData name="Mohammed Fasha" userId="S::mohammed.fasha@uop.edu.jo::cc64f42d-a1a6-4f08-b97b-0c37f877119f" providerId="AD" clId="Web-{048CEBFD-D6A1-FF4F-145A-C5347D00F6D8}" dt="2025-03-23T04:08:51.795" v="657"/>
-          <ac:spMkLst>
-            <pc:docMk/>
-            <pc:sldMk cId="3486990666" sldId="322"/>
-            <ac:spMk id="3" creationId="{368F07BD-3847-D462-1D91-71F882F9E686}"/>
-          </ac:spMkLst>
-        </pc:spChg>
-        <pc:graphicFrameChg chg="add mod ord modGraphic">
-          <ac:chgData name="Mohammed Fasha" userId="S::mohammed.fasha@uop.edu.jo::cc64f42d-a1a6-4f08-b97b-0c37f877119f" providerId="AD" clId="Web-{048CEBFD-D6A1-FF4F-145A-C5347D00F6D8}" dt="2025-03-23T04:10:25.939" v="692"/>
-          <ac:graphicFrameMkLst>
-            <pc:docMk/>
-            <pc:sldMk cId="3486990666" sldId="322"/>
-            <ac:graphicFrameMk id="5" creationId="{1FA2E83F-BCF2-8811-D9EB-3AB7209F9B26}"/>
-          </ac:graphicFrameMkLst>
-        </pc:graphicFrameChg>
-      </pc:sldChg>
-      <pc:sldChg chg="addSp delSp modSp new">
-        <pc:chgData name="Mohammed Fasha" userId="S::mohammed.fasha@uop.edu.jo::cc64f42d-a1a6-4f08-b97b-0c37f877119f" providerId="AD" clId="Web-{048CEBFD-D6A1-FF4F-145A-C5347D00F6D8}" dt="2025-03-23T06:02:22.542" v="1162"/>
-        <pc:sldMkLst>
-          <pc:docMk/>
-          <pc:sldMk cId="323566195" sldId="323"/>
-        </pc:sldMkLst>
-        <pc:spChg chg="mod">
-          <ac:chgData name="Mohammed Fasha" userId="S::mohammed.fasha@uop.edu.jo::cc64f42d-a1a6-4f08-b97b-0c37f877119f" providerId="AD" clId="Web-{048CEBFD-D6A1-FF4F-145A-C5347D00F6D8}" dt="2025-03-23T05:55:35.003" v="727" actId="20577"/>
-          <ac:spMkLst>
-            <pc:docMk/>
-            <pc:sldMk cId="323566195" sldId="323"/>
-            <ac:spMk id="2" creationId="{595498DF-D91B-3039-6A35-B1D5FAB6D692}"/>
-          </ac:spMkLst>
-        </pc:spChg>
-        <pc:spChg chg="del">
-          <ac:chgData name="Mohammed Fasha" userId="S::mohammed.fasha@uop.edu.jo::cc64f42d-a1a6-4f08-b97b-0c37f877119f" providerId="AD" clId="Web-{048CEBFD-D6A1-FF4F-145A-C5347D00F6D8}" dt="2025-03-23T05:55:38.753" v="728"/>
-          <ac:spMkLst>
-            <pc:docMk/>
-            <pc:sldMk cId="323566195" sldId="323"/>
-            <ac:spMk id="3" creationId="{7C735B19-22D3-E2FD-E630-81FC9AD9A200}"/>
-          </ac:spMkLst>
-        </pc:spChg>
-        <pc:spChg chg="add del mod">
-          <ac:chgData name="Mohammed Fasha" userId="S::mohammed.fasha@uop.edu.jo::cc64f42d-a1a6-4f08-b97b-0c37f877119f" providerId="AD" clId="Web-{048CEBFD-D6A1-FF4F-145A-C5347D00F6D8}" dt="2025-03-23T05:55:49.003" v="732"/>
-          <ac:spMkLst>
-            <pc:docMk/>
-            <pc:sldMk cId="323566195" sldId="323"/>
-            <ac:spMk id="6" creationId="{8D3669D3-C50E-E863-834B-24745A4049BF}"/>
-          </ac:spMkLst>
-        </pc:spChg>
-        <pc:spChg chg="add del mod">
-          <ac:chgData name="Mohammed Fasha" userId="S::mohammed.fasha@uop.edu.jo::cc64f42d-a1a6-4f08-b97b-0c37f877119f" providerId="AD" clId="Web-{048CEBFD-D6A1-FF4F-145A-C5347D00F6D8}" dt="2025-03-23T05:59:22.130" v="1034"/>
-          <ac:spMkLst>
-            <pc:docMk/>
-            <pc:sldMk cId="323566195" sldId="323"/>
-            <ac:spMk id="8" creationId="{2082C506-EF36-1091-B38C-0345C16F14E1}"/>
-          </ac:spMkLst>
-        </pc:spChg>
-        <pc:spChg chg="add del mod">
-          <ac:chgData name="Mohammed Fasha" userId="S::mohammed.fasha@uop.edu.jo::cc64f42d-a1a6-4f08-b97b-0c37f877119f" providerId="AD" clId="Web-{048CEBFD-D6A1-FF4F-145A-C5347D00F6D8}" dt="2025-03-23T05:59:27.614" v="1039"/>
-          <ac:spMkLst>
-            <pc:docMk/>
-            <pc:sldMk cId="323566195" sldId="323"/>
-            <ac:spMk id="83" creationId="{807366CE-6F6E-4CFE-6647-767B9FE5806E}"/>
-          </ac:spMkLst>
-        </pc:spChg>
-        <pc:graphicFrameChg chg="add del mod ord modGraphic">
-          <ac:chgData name="Mohammed Fasha" userId="S::mohammed.fasha@uop.edu.jo::cc64f42d-a1a6-4f08-b97b-0c37f877119f" providerId="AD" clId="Web-{048CEBFD-D6A1-FF4F-145A-C5347D00F6D8}" dt="2025-03-23T05:59:01.988" v="961"/>
-          <ac:graphicFrameMkLst>
-            <pc:docMk/>
-            <pc:sldMk cId="323566195" sldId="323"/>
-            <ac:graphicFrameMk id="5" creationId="{A754B520-EBFE-5B5E-37E1-9C40D7A1FFBE}"/>
-          </ac:graphicFrameMkLst>
-        </pc:graphicFrameChg>
-        <pc:graphicFrameChg chg="add del mod ord modGraphic">
-          <ac:chgData name="Mohammed Fasha" userId="S::mohammed.fasha@uop.edu.jo::cc64f42d-a1a6-4f08-b97b-0c37f877119f" providerId="AD" clId="Web-{048CEBFD-D6A1-FF4F-145A-C5347D00F6D8}" dt="2025-03-23T05:59:07.457" v="1033"/>
-          <ac:graphicFrameMkLst>
-            <pc:docMk/>
-            <pc:sldMk cId="323566195" sldId="323"/>
-            <ac:graphicFrameMk id="10" creationId="{81F22BAF-A7A5-D51F-F048-990BCD7473F1}"/>
-          </ac:graphicFrameMkLst>
-        </pc:graphicFrameChg>
-        <pc:graphicFrameChg chg="add del mod">
-          <ac:chgData name="Mohammed Fasha" userId="S::mohammed.fasha@uop.edu.jo::cc64f42d-a1a6-4f08-b97b-0c37f877119f" providerId="AD" clId="Web-{048CEBFD-D6A1-FF4F-145A-C5347D00F6D8}" dt="2025-03-23T05:59:07.457" v="1032"/>
-          <ac:graphicFrameMkLst>
-            <pc:docMk/>
-            <pc:sldMk cId="323566195" sldId="323"/>
-            <ac:graphicFrameMk id="12" creationId="{31D32C5C-4AB4-10D9-8E65-54C3AA3B73FA}"/>
-          </ac:graphicFrameMkLst>
-        </pc:graphicFrameChg>
-        <pc:graphicFrameChg chg="add del mod">
-          <ac:chgData name="Mohammed Fasha" userId="S::mohammed.fasha@uop.edu.jo::cc64f42d-a1a6-4f08-b97b-0c37f877119f" providerId="AD" clId="Web-{048CEBFD-D6A1-FF4F-145A-C5347D00F6D8}" dt="2025-03-23T05:59:07.457" v="1031"/>
-          <ac:graphicFrameMkLst>
-            <pc:docMk/>
-            <pc:sldMk cId="323566195" sldId="323"/>
-            <ac:graphicFrameMk id="14" creationId="{2B9CFF0A-4FB9-44E3-E79F-5E9C7AF9C6F2}"/>
-          </ac:graphicFrameMkLst>
-        </pc:graphicFrameChg>
-        <pc:graphicFrameChg chg="add del mod">
-          <ac:chgData name="Mohammed Fasha" userId="S::mohammed.fasha@uop.edu.jo::cc64f42d-a1a6-4f08-b97b-0c37f877119f" providerId="AD" clId="Web-{048CEBFD-D6A1-FF4F-145A-C5347D00F6D8}" dt="2025-03-23T05:59:07.457" v="1030"/>
-          <ac:graphicFrameMkLst>
-            <pc:docMk/>
-            <pc:sldMk cId="323566195" sldId="323"/>
-            <ac:graphicFrameMk id="16" creationId="{151D465E-BCAC-C815-C99F-DFCF8008CC41}"/>
-          </ac:graphicFrameMkLst>
-        </pc:graphicFrameChg>
-        <pc:graphicFrameChg chg="add del mod">
-          <ac:chgData name="Mohammed Fasha" userId="S::mohammed.fasha@uop.edu.jo::cc64f42d-a1a6-4f08-b97b-0c37f877119f" providerId="AD" clId="Web-{048CEBFD-D6A1-FF4F-145A-C5347D00F6D8}" dt="2025-03-23T05:59:07.457" v="1029"/>
-          <ac:graphicFrameMkLst>
-            <pc:docMk/>
-            <pc:sldMk cId="323566195" sldId="323"/>
-            <ac:graphicFrameMk id="18" creationId="{6AC48D0B-E2C7-9970-AED5-07A2B3F1FA40}"/>
-          </ac:graphicFrameMkLst>
-        </pc:graphicFrameChg>
-        <pc:graphicFrameChg chg="add del mod">
-          <ac:chgData name="Mohammed Fasha" userId="S::mohammed.fasha@uop.edu.jo::cc64f42d-a1a6-4f08-b97b-0c37f877119f" providerId="AD" clId="Web-{048CEBFD-D6A1-FF4F-145A-C5347D00F6D8}" dt="2025-03-23T05:59:07.457" v="1028"/>
-          <ac:graphicFrameMkLst>
-            <pc:docMk/>
-            <pc:sldMk cId="323566195" sldId="323"/>
-            <ac:graphicFrameMk id="20" creationId="{2A87022A-12C7-E3C9-78A5-B6E3716099CC}"/>
-          </ac:graphicFrameMkLst>
-        </pc:graphicFrameChg>
-        <pc:graphicFrameChg chg="add del mod">
-          <ac:chgData name="Mohammed Fasha" userId="S::mohammed.fasha@uop.edu.jo::cc64f42d-a1a6-4f08-b97b-0c37f877119f" providerId="AD" clId="Web-{048CEBFD-D6A1-FF4F-145A-C5347D00F6D8}" dt="2025-03-23T05:59:07.457" v="1027"/>
-          <ac:graphicFrameMkLst>
-            <pc:docMk/>
-            <pc:sldMk cId="323566195" sldId="323"/>
-            <ac:graphicFrameMk id="22" creationId="{8EF2D05A-5601-2F93-287A-A37D730B4D8E}"/>
-          </ac:graphicFrameMkLst>
-        </pc:graphicFrameChg>
-        <pc:graphicFrameChg chg="add del mod">
-          <ac:chgData name="Mohammed Fasha" userId="S::mohammed.fasha@uop.edu.jo::cc64f42d-a1a6-4f08-b97b-0c37f877119f" providerId="AD" clId="Web-{048CEBFD-D6A1-FF4F-145A-C5347D00F6D8}" dt="2025-03-23T05:59:07.457" v="1026"/>
-          <ac:graphicFrameMkLst>
-            <pc:docMk/>
-            <pc:sldMk cId="323566195" sldId="323"/>
-            <ac:graphicFrameMk id="24" creationId="{6A100409-108D-914C-3A20-14F5A5113ECA}"/>
-          </ac:graphicFrameMkLst>
-        </pc:graphicFrameChg>
-        <pc:graphicFrameChg chg="add del mod">
-          <ac:chgData name="Mohammed Fasha" userId="S::mohammed.fasha@uop.edu.jo::cc64f42d-a1a6-4f08-b97b-0c37f877119f" providerId="AD" clId="Web-{048CEBFD-D6A1-FF4F-145A-C5347D00F6D8}" dt="2025-03-23T05:59:07.457" v="1025"/>
-          <ac:graphicFrameMkLst>
-            <pc:docMk/>
-            <pc:sldMk cId="323566195" sldId="323"/>
-            <ac:graphicFrameMk id="26" creationId="{C6C4A769-1EA7-DFBB-76AA-A6BD4F6972B1}"/>
-          </ac:graphicFrameMkLst>
-        </pc:graphicFrameChg>
-        <pc:graphicFrameChg chg="add del mod">
-          <ac:chgData name="Mohammed Fasha" userId="S::mohammed.fasha@uop.edu.jo::cc64f42d-a1a6-4f08-b97b-0c37f877119f" providerId="AD" clId="Web-{048CEBFD-D6A1-FF4F-145A-C5347D00F6D8}" dt="2025-03-23T05:59:07.457" v="1024"/>
-          <ac:graphicFrameMkLst>
-            <pc:docMk/>
-            <pc:sldMk cId="323566195" sldId="323"/>
-            <ac:graphicFrameMk id="28" creationId="{C40A24BF-5004-D518-7DAD-FC1621E3F304}"/>
-          </ac:graphicFrameMkLst>
-        </pc:graphicFrameChg>
-        <pc:graphicFrameChg chg="add del mod">
-          <ac:chgData name="Mohammed Fasha" userId="S::mohammed.fasha@uop.edu.jo::cc64f42d-a1a6-4f08-b97b-0c37f877119f" providerId="AD" clId="Web-{048CEBFD-D6A1-FF4F-145A-C5347D00F6D8}" dt="2025-03-23T05:59:07.457" v="1023"/>
-          <ac:graphicFrameMkLst>
-            <pc:docMk/>
-            <pc:sldMk cId="323566195" sldId="323"/>
-            <ac:graphicFrameMk id="30" creationId="{BE442F90-15EC-E0E1-9A4C-C04CE58B5245}"/>
-          </ac:graphicFrameMkLst>
-        </pc:graphicFrameChg>
-        <pc:graphicFrameChg chg="add del mod">
-          <ac:chgData name="Mohammed Fasha" userId="S::mohammed.fasha@uop.edu.jo::cc64f42d-a1a6-4f08-b97b-0c37f877119f" providerId="AD" clId="Web-{048CEBFD-D6A1-FF4F-145A-C5347D00F6D8}" dt="2025-03-23T05:59:07.457" v="1022"/>
-          <ac:graphicFrameMkLst>
-            <pc:docMk/>
-            <pc:sldMk cId="323566195" sldId="323"/>
-            <ac:graphicFrameMk id="32" creationId="{9B52DAA3-1DB1-99DF-18E4-9E64C093A4F6}"/>
-          </ac:graphicFrameMkLst>
-        </pc:graphicFrameChg>
-        <pc:graphicFrameChg chg="add del mod">
-          <ac:chgData name="Mohammed Fasha" userId="S::mohammed.fasha@uop.edu.jo::cc64f42d-a1a6-4f08-b97b-0c37f877119f" providerId="AD" clId="Web-{048CEBFD-D6A1-FF4F-145A-C5347D00F6D8}" dt="2025-03-23T05:59:07.457" v="1021"/>
-          <ac:graphicFrameMkLst>
-            <pc:docMk/>
-            <pc:sldMk cId="323566195" sldId="323"/>
-            <ac:graphicFrameMk id="34" creationId="{993470D1-9B7A-17C0-943E-DF7B23EA5B44}"/>
-          </ac:graphicFrameMkLst>
-        </pc:graphicFrameChg>
-        <pc:graphicFrameChg chg="add del mod">
-          <ac:chgData name="Mohammed Fasha" userId="S::mohammed.fasha@uop.edu.jo::cc64f42d-a1a6-4f08-b97b-0c37f877119f" providerId="AD" clId="Web-{048CEBFD-D6A1-FF4F-145A-C5347D00F6D8}" dt="2025-03-23T05:59:07.457" v="1020"/>
-          <ac:graphicFrameMkLst>
-            <pc:docMk/>
-            <pc:sldMk cId="323566195" sldId="323"/>
-            <ac:graphicFrameMk id="36" creationId="{179BE741-A69E-5347-4C57-44E890ACA8B6}"/>
-          </ac:graphicFrameMkLst>
-        </pc:graphicFrameChg>
-        <pc:graphicFrameChg chg="add del mod">
-          <ac:chgData name="Mohammed Fasha" userId="S::mohammed.fasha@uop.edu.jo::cc64f42d-a1a6-4f08-b97b-0c37f877119f" providerId="AD" clId="Web-{048CEBFD-D6A1-FF4F-145A-C5347D00F6D8}" dt="2025-03-23T05:59:07.457" v="1019"/>
-          <ac:graphicFrameMkLst>
-            <pc:docMk/>
-            <pc:sldMk cId="323566195" sldId="323"/>
-            <ac:graphicFrameMk id="38" creationId="{7F6E1717-1F2E-6C4D-1780-6819571BA43C}"/>
-          </ac:graphicFrameMkLst>
-        </pc:graphicFrameChg>
-        <pc:graphicFrameChg chg="add del mod">
-          <ac:chgData name="Mohammed Fasha" userId="S::mohammed.fasha@uop.edu.jo::cc64f42d-a1a6-4f08-b97b-0c37f877119f" providerId="AD" clId="Web-{048CEBFD-D6A1-FF4F-145A-C5347D00F6D8}" dt="2025-03-23T05:59:07.457" v="1018"/>
-          <ac:graphicFrameMkLst>
-            <pc:docMk/>
-            <pc:sldMk cId="323566195" sldId="323"/>
-            <ac:graphicFrameMk id="40" creationId="{2484AF69-B0DC-9E02-8756-50FB72954E82}"/>
-          </ac:graphicFrameMkLst>
-        </pc:graphicFrameChg>
-        <pc:graphicFrameChg chg="add del mod">
-          <ac:chgData name="Mohammed Fasha" userId="S::mohammed.fasha@uop.edu.jo::cc64f42d-a1a6-4f08-b97b-0c37f877119f" providerId="AD" clId="Web-{048CEBFD-D6A1-FF4F-145A-C5347D00F6D8}" dt="2025-03-23T05:59:07.457" v="1017"/>
-          <ac:graphicFrameMkLst>
-            <pc:docMk/>
-            <pc:sldMk cId="323566195" sldId="323"/>
-            <ac:graphicFrameMk id="42" creationId="{B8EE61D1-5177-30CA-E118-E5D3B87242CD}"/>
-          </ac:graphicFrameMkLst>
-        </pc:graphicFrameChg>
-        <pc:graphicFrameChg chg="add del mod">
-          <ac:chgData name="Mohammed Fasha" userId="S::mohammed.fasha@uop.edu.jo::cc64f42d-a1a6-4f08-b97b-0c37f877119f" providerId="AD" clId="Web-{048CEBFD-D6A1-FF4F-145A-C5347D00F6D8}" dt="2025-03-23T05:59:07.457" v="1016"/>
-          <ac:graphicFrameMkLst>
-            <pc:docMk/>
-            <pc:sldMk cId="323566195" sldId="323"/>
-            <ac:graphicFrameMk id="44" creationId="{141A3A5A-4493-80D4-ECBB-45C88C8B4234}"/>
-          </ac:graphicFrameMkLst>
-        </pc:graphicFrameChg>
-        <pc:graphicFrameChg chg="add del mod">
-          <ac:chgData name="Mohammed Fasha" userId="S::mohammed.fasha@uop.edu.jo::cc64f42d-a1a6-4f08-b97b-0c37f877119f" providerId="AD" clId="Web-{048CEBFD-D6A1-FF4F-145A-C5347D00F6D8}" dt="2025-03-23T05:59:07.457" v="1015"/>
-          <ac:graphicFrameMkLst>
-            <pc:docMk/>
-            <pc:sldMk cId="323566195" sldId="323"/>
-            <ac:graphicFrameMk id="46" creationId="{881F753D-C8EB-CC8A-03A1-87CA997234E2}"/>
-          </ac:graphicFrameMkLst>
-        </pc:graphicFrameChg>
-        <pc:graphicFrameChg chg="add del mod">
-          <ac:chgData name="Mohammed Fasha" userId="S::mohammed.fasha@uop.edu.jo::cc64f42d-a1a6-4f08-b97b-0c37f877119f" providerId="AD" clId="Web-{048CEBFD-D6A1-FF4F-145A-C5347D00F6D8}" dt="2025-03-23T05:59:07.457" v="1014"/>
-          <ac:graphicFrameMkLst>
-            <pc:docMk/>
-            <pc:sldMk cId="323566195" sldId="323"/>
-            <ac:graphicFrameMk id="48" creationId="{A3D78DD1-89C1-461E-5B28-18FB43C2FC00}"/>
-          </ac:graphicFrameMkLst>
-        </pc:graphicFrameChg>
-        <pc:graphicFrameChg chg="add del mod">
-          <ac:chgData name="Mohammed Fasha" userId="S::mohammed.fasha@uop.edu.jo::cc64f42d-a1a6-4f08-b97b-0c37f877119f" providerId="AD" clId="Web-{048CEBFD-D6A1-FF4F-145A-C5347D00F6D8}" dt="2025-03-23T05:59:07.457" v="1013"/>
-          <ac:graphicFrameMkLst>
-            <pc:docMk/>
-            <pc:sldMk cId="323566195" sldId="323"/>
-            <ac:graphicFrameMk id="50" creationId="{6340C572-E3F3-16AF-B421-66538320305F}"/>
-          </ac:graphicFrameMkLst>
-        </pc:graphicFrameChg>
-        <pc:graphicFrameChg chg="add del mod">
-          <ac:chgData name="Mohammed Fasha" userId="S::mohammed.fasha@uop.edu.jo::cc64f42d-a1a6-4f08-b97b-0c37f877119f" providerId="AD" clId="Web-{048CEBFD-D6A1-FF4F-145A-C5347D00F6D8}" dt="2025-03-23T05:59:07.457" v="1012"/>
-          <ac:graphicFrameMkLst>
-            <pc:docMk/>
-            <pc:sldMk cId="323566195" sldId="323"/>
-            <ac:graphicFrameMk id="52" creationId="{A2C96DF1-B896-A75F-F9DA-2D2C76F89A78}"/>
-          </ac:graphicFrameMkLst>
-        </pc:graphicFrameChg>
-        <pc:graphicFrameChg chg="add del mod">
-          <ac:chgData name="Mohammed Fasha" userId="S::mohammed.fasha@uop.edu.jo::cc64f42d-a1a6-4f08-b97b-0c37f877119f" providerId="AD" clId="Web-{048CEBFD-D6A1-FF4F-145A-C5347D00F6D8}" dt="2025-03-23T05:59:07.457" v="1011"/>
-          <ac:graphicFrameMkLst>
-            <pc:docMk/>
-            <pc:sldMk cId="323566195" sldId="323"/>
-            <ac:graphicFrameMk id="54" creationId="{E457EF04-D6A8-7B9E-A19F-D4C4AFC18FC5}"/>
-          </ac:graphicFrameMkLst>
-        </pc:graphicFrameChg>
-        <pc:graphicFrameChg chg="add del mod">
-          <ac:chgData name="Mohammed Fasha" userId="S::mohammed.fasha@uop.edu.jo::cc64f42d-a1a6-4f08-b97b-0c37f877119f" providerId="AD" clId="Web-{048CEBFD-D6A1-FF4F-145A-C5347D00F6D8}" dt="2025-03-23T05:59:07.457" v="1010"/>
-          <ac:graphicFrameMkLst>
-            <pc:docMk/>
-            <pc:sldMk cId="323566195" sldId="323"/>
-            <ac:graphicFrameMk id="56" creationId="{B0B7E22B-C771-8134-485E-8D2C20D5FA95}"/>
-          </ac:graphicFrameMkLst>
-        </pc:graphicFrameChg>
-        <pc:graphicFrameChg chg="add del mod">
-          <ac:chgData name="Mohammed Fasha" userId="S::mohammed.fasha@uop.edu.jo::cc64f42d-a1a6-4f08-b97b-0c37f877119f" providerId="AD" clId="Web-{048CEBFD-D6A1-FF4F-145A-C5347D00F6D8}" dt="2025-03-23T05:59:07.457" v="1009"/>
-          <ac:graphicFrameMkLst>
-            <pc:docMk/>
-            <pc:sldMk cId="323566195" sldId="323"/>
-            <ac:graphicFrameMk id="58" creationId="{96E97EA0-26C3-8107-FFD7-A50124666871}"/>
-          </ac:graphicFrameMkLst>
-        </pc:graphicFrameChg>
-        <pc:graphicFrameChg chg="add del mod">
-          <ac:chgData name="Mohammed Fasha" userId="S::mohammed.fasha@uop.edu.jo::cc64f42d-a1a6-4f08-b97b-0c37f877119f" providerId="AD" clId="Web-{048CEBFD-D6A1-FF4F-145A-C5347D00F6D8}" dt="2025-03-23T05:59:07.457" v="1008"/>
-          <ac:graphicFrameMkLst>
-            <pc:docMk/>
-            <pc:sldMk cId="323566195" sldId="323"/>
-            <ac:graphicFrameMk id="60" creationId="{01575609-E88F-517C-939B-2D01FE427CB2}"/>
-          </ac:graphicFrameMkLst>
-        </pc:graphicFrameChg>
-        <pc:graphicFrameChg chg="add del mod">
-          <ac:chgData name="Mohammed Fasha" userId="S::mohammed.fasha@uop.edu.jo::cc64f42d-a1a6-4f08-b97b-0c37f877119f" providerId="AD" clId="Web-{048CEBFD-D6A1-FF4F-145A-C5347D00F6D8}" dt="2025-03-23T05:59:07.457" v="1007"/>
-          <ac:graphicFrameMkLst>
-            <pc:docMk/>
-            <pc:sldMk cId="323566195" sldId="323"/>
-            <ac:graphicFrameMk id="62" creationId="{81F84073-D19D-6E20-4B98-DAADFCCB5891}"/>
-          </ac:graphicFrameMkLst>
-        </pc:graphicFrameChg>
-        <pc:graphicFrameChg chg="add del mod">
-          <ac:chgData name="Mohammed Fasha" userId="S::mohammed.fasha@uop.edu.jo::cc64f42d-a1a6-4f08-b97b-0c37f877119f" providerId="AD" clId="Web-{048CEBFD-D6A1-FF4F-145A-C5347D00F6D8}" dt="2025-03-23T05:59:07.457" v="1006"/>
-          <ac:graphicFrameMkLst>
-            <pc:docMk/>
-            <pc:sldMk cId="323566195" sldId="323"/>
-            <ac:graphicFrameMk id="64" creationId="{E4EC3D09-6063-A529-870D-0C9877AA3053}"/>
-          </ac:graphicFrameMkLst>
-        </pc:graphicFrameChg>
-        <pc:graphicFrameChg chg="add del mod">
-          <ac:chgData name="Mohammed Fasha" userId="S::mohammed.fasha@uop.edu.jo::cc64f42d-a1a6-4f08-b97b-0c37f877119f" providerId="AD" clId="Web-{048CEBFD-D6A1-FF4F-145A-C5347D00F6D8}" dt="2025-03-23T05:59:07.457" v="1005"/>
-          <ac:graphicFrameMkLst>
-            <pc:docMk/>
-            <pc:sldMk cId="323566195" sldId="323"/>
-            <ac:graphicFrameMk id="66" creationId="{D84F5A10-FC27-5729-C73F-848FFFB113FB}"/>
-          </ac:graphicFrameMkLst>
-        </pc:graphicFrameChg>
-        <pc:graphicFrameChg chg="add del mod">
-          <ac:chgData name="Mohammed Fasha" userId="S::mohammed.fasha@uop.edu.jo::cc64f42d-a1a6-4f08-b97b-0c37f877119f" providerId="AD" clId="Web-{048CEBFD-D6A1-FF4F-145A-C5347D00F6D8}" dt="2025-03-23T05:59:07.457" v="1004"/>
-          <ac:graphicFrameMkLst>
-            <pc:docMk/>
-            <pc:sldMk cId="323566195" sldId="323"/>
-            <ac:graphicFrameMk id="68" creationId="{C5294D9E-208C-67A6-D898-A6698BF5388E}"/>
-          </ac:graphicFrameMkLst>
-        </pc:graphicFrameChg>
-        <pc:graphicFrameChg chg="add del mod">
-          <ac:chgData name="Mohammed Fasha" userId="S::mohammed.fasha@uop.edu.jo::cc64f42d-a1a6-4f08-b97b-0c37f877119f" providerId="AD" clId="Web-{048CEBFD-D6A1-FF4F-145A-C5347D00F6D8}" dt="2025-03-23T05:59:07.457" v="1003"/>
-          <ac:graphicFrameMkLst>
-            <pc:docMk/>
-            <pc:sldMk cId="323566195" sldId="323"/>
-            <ac:graphicFrameMk id="70" creationId="{296DED12-ACF6-510A-B5B6-46873E38536E}"/>
-          </ac:graphicFrameMkLst>
-        </pc:graphicFrameChg>
-        <pc:graphicFrameChg chg="add del mod">
-          <ac:chgData name="Mohammed Fasha" userId="S::mohammed.fasha@uop.edu.jo::cc64f42d-a1a6-4f08-b97b-0c37f877119f" providerId="AD" clId="Web-{048CEBFD-D6A1-FF4F-145A-C5347D00F6D8}" dt="2025-03-23T05:59:07.457" v="1002"/>
-          <ac:graphicFrameMkLst>
-            <pc:docMk/>
-            <pc:sldMk cId="323566195" sldId="323"/>
-            <ac:graphicFrameMk id="72" creationId="{95E38546-FB27-65FE-85C4-3F4F8B66A29A}"/>
-          </ac:graphicFrameMkLst>
-        </pc:graphicFrameChg>
-        <pc:graphicFrameChg chg="add del mod">
-          <ac:chgData name="Mohammed Fasha" userId="S::mohammed.fasha@uop.edu.jo::cc64f42d-a1a6-4f08-b97b-0c37f877119f" providerId="AD" clId="Web-{048CEBFD-D6A1-FF4F-145A-C5347D00F6D8}" dt="2025-03-23T05:59:07.457" v="1001"/>
-          <ac:graphicFrameMkLst>
-            <pc:docMk/>
-            <pc:sldMk cId="323566195" sldId="323"/>
-            <ac:graphicFrameMk id="74" creationId="{192A04DF-CA56-492A-1E8D-37F1707F96D3}"/>
-          </ac:graphicFrameMkLst>
-        </pc:graphicFrameChg>
-        <pc:graphicFrameChg chg="add del mod">
-          <ac:chgData name="Mohammed Fasha" userId="S::mohammed.fasha@uop.edu.jo::cc64f42d-a1a6-4f08-b97b-0c37f877119f" providerId="AD" clId="Web-{048CEBFD-D6A1-FF4F-145A-C5347D00F6D8}" dt="2025-03-23T05:59:07.457" v="1000"/>
-          <ac:graphicFrameMkLst>
-            <pc:docMk/>
-            <pc:sldMk cId="323566195" sldId="323"/>
-            <ac:graphicFrameMk id="76" creationId="{2C5FBFF9-1CD2-7200-F956-A5C5DDB1A652}"/>
-          </ac:graphicFrameMkLst>
-        </pc:graphicFrameChg>
-        <pc:graphicFrameChg chg="add del mod">
-          <ac:chgData name="Mohammed Fasha" userId="S::mohammed.fasha@uop.edu.jo::cc64f42d-a1a6-4f08-b97b-0c37f877119f" providerId="AD" clId="Web-{048CEBFD-D6A1-FF4F-145A-C5347D00F6D8}" dt="2025-03-23T05:59:07.457" v="999"/>
-          <ac:graphicFrameMkLst>
-            <pc:docMk/>
-            <pc:sldMk cId="323566195" sldId="323"/>
-            <ac:graphicFrameMk id="78" creationId="{B2E96C8C-06FA-2893-05C3-70BDD14172C9}"/>
-          </ac:graphicFrameMkLst>
-        </pc:graphicFrameChg>
-        <pc:graphicFrameChg chg="add del mod">
-          <ac:chgData name="Mohammed Fasha" userId="S::mohammed.fasha@uop.edu.jo::cc64f42d-a1a6-4f08-b97b-0c37f877119f" providerId="AD" clId="Web-{048CEBFD-D6A1-FF4F-145A-C5347D00F6D8}" dt="2025-03-23T05:59:07.457" v="998"/>
-          <ac:graphicFrameMkLst>
-            <pc:docMk/>
-            <pc:sldMk cId="323566195" sldId="323"/>
-            <ac:graphicFrameMk id="80" creationId="{E10281D6-863B-25CD-E75A-124FDDBAA4BE}"/>
-          </ac:graphicFrameMkLst>
-        </pc:graphicFrameChg>
-        <pc:graphicFrameChg chg="add mod ord modGraphic">
-          <ac:chgData name="Mohammed Fasha" userId="S::mohammed.fasha@uop.edu.jo::cc64f42d-a1a6-4f08-b97b-0c37f877119f" providerId="AD" clId="Web-{048CEBFD-D6A1-FF4F-145A-C5347D00F6D8}" dt="2025-03-23T06:02:22.542" v="1162"/>
-          <ac:graphicFrameMkLst>
-            <pc:docMk/>
-            <pc:sldMk cId="323566195" sldId="323"/>
-            <ac:graphicFrameMk id="82" creationId="{135E2F87-A441-0139-1576-BC186FCA12A1}"/>
-          </ac:graphicFrameMkLst>
-        </pc:graphicFrameChg>
-      </pc:sldChg>
-      <pc:sldChg chg="modSp add replId">
-        <pc:chgData name="Mohammed Fasha" userId="S::mohammed.fasha@uop.edu.jo::cc64f42d-a1a6-4f08-b97b-0c37f877119f" providerId="AD" clId="Web-{048CEBFD-D6A1-FF4F-145A-C5347D00F6D8}" dt="2025-03-23T06:02:28.917" v="1163"/>
-        <pc:sldMkLst>
-          <pc:docMk/>
-          <pc:sldMk cId="2802975669" sldId="324"/>
-        </pc:sldMkLst>
-        <pc:graphicFrameChg chg="modGraphic">
-          <ac:chgData name="Mohammed Fasha" userId="S::mohammed.fasha@uop.edu.jo::cc64f42d-a1a6-4f08-b97b-0c37f877119f" providerId="AD" clId="Web-{048CEBFD-D6A1-FF4F-145A-C5347D00F6D8}" dt="2025-03-23T06:02:28.917" v="1163"/>
-          <ac:graphicFrameMkLst>
-            <pc:docMk/>
-            <pc:sldMk cId="2802975669" sldId="324"/>
-            <ac:graphicFrameMk id="82" creationId="{E61DA268-6635-1C98-1674-A7AD4D8991C6}"/>
-          </ac:graphicFrameMkLst>
-        </pc:graphicFrameChg>
-      </pc:sldChg>
-      <pc:sldChg chg="modSp new mod modClrScheme chgLayout">
-        <pc:chgData name="Mohammed Fasha" userId="S::mohammed.fasha@uop.edu.jo::cc64f42d-a1a6-4f08-b97b-0c37f877119f" providerId="AD" clId="Web-{048CEBFD-D6A1-FF4F-145A-C5347D00F6D8}" dt="2025-03-23T06:01:57.150" v="1158" actId="20577"/>
-        <pc:sldMkLst>
-          <pc:docMk/>
-          <pc:sldMk cId="1195465549" sldId="325"/>
-        </pc:sldMkLst>
-        <pc:spChg chg="mod ord">
-          <ac:chgData name="Mohammed Fasha" userId="S::mohammed.fasha@uop.edu.jo::cc64f42d-a1a6-4f08-b97b-0c37f877119f" providerId="AD" clId="Web-{048CEBFD-D6A1-FF4F-145A-C5347D00F6D8}" dt="2025-03-23T06:01:57.150" v="1158" actId="20577"/>
-          <ac:spMkLst>
-            <pc:docMk/>
-            <pc:sldMk cId="1195465549" sldId="325"/>
-            <ac:spMk id="2" creationId="{C40B076E-5F79-27B6-B774-38C83230BBDD}"/>
-          </ac:spMkLst>
-        </pc:spChg>
-        <pc:spChg chg="mod ord">
-          <ac:chgData name="Mohammed Fasha" userId="S::mohammed.fasha@uop.edu.jo::cc64f42d-a1a6-4f08-b97b-0c37f877119f" providerId="AD" clId="Web-{048CEBFD-D6A1-FF4F-145A-C5347D00F6D8}" dt="2025-03-23T06:01:44.322" v="1142"/>
-          <ac:spMkLst>
-            <pc:docMk/>
-            <pc:sldMk cId="1195465549" sldId="325"/>
-            <ac:spMk id="3" creationId="{82C6206C-8193-A125-EB18-48C260C8432B}"/>
-          </ac:spMkLst>
-        </pc:spChg>
-      </pc:sldChg>
-    </pc:docChg>
-  </pc:docChgLst>
-  <pc:docChgLst>
-    <pc:chgData name="Mohammed Fasha" userId="S::mohammed.fasha@uop.edu.jo::cc64f42d-a1a6-4f08-b97b-0c37f877119f" providerId="AD" clId="Web-{3873209A-CB00-400D-D158-6330B83C4A7A}"/>
-    <pc:docChg chg="addSld delSld modSld">
-      <pc:chgData name="Mohammed Fasha" userId="S::mohammed.fasha@uop.edu.jo::cc64f42d-a1a6-4f08-b97b-0c37f877119f" providerId="AD" clId="Web-{3873209A-CB00-400D-D158-6330B83C4A7A}" dt="2025-03-19T03:11:02.319" v="274" actId="20577"/>
-      <pc:docMkLst>
-        <pc:docMk/>
-      </pc:docMkLst>
-      <pc:sldChg chg="modSp">
-        <pc:chgData name="Mohammed Fasha" userId="S::mohammed.fasha@uop.edu.jo::cc64f42d-a1a6-4f08-b97b-0c37f877119f" providerId="AD" clId="Web-{3873209A-CB00-400D-D158-6330B83C4A7A}" dt="2025-03-19T03:03:32.760" v="103" actId="14100"/>
-        <pc:sldMkLst>
-          <pc:docMk/>
-          <pc:sldMk cId="0" sldId="278"/>
-        </pc:sldMkLst>
-        <pc:spChg chg="mod">
-          <ac:chgData name="Mohammed Fasha" userId="S::mohammed.fasha@uop.edu.jo::cc64f42d-a1a6-4f08-b97b-0c37f877119f" providerId="AD" clId="Web-{3873209A-CB00-400D-D158-6330B83C4A7A}" dt="2025-03-19T03:03:32.760" v="103" actId="14100"/>
-          <ac:spMkLst>
-            <pc:docMk/>
-            <pc:sldMk cId="0" sldId="278"/>
-            <ac:spMk id="2" creationId="{00000000-0000-0000-0000-000000000000}"/>
-          </ac:spMkLst>
-        </pc:spChg>
-        <pc:picChg chg="mod">
-          <ac:chgData name="Mohammed Fasha" userId="S::mohammed.fasha@uop.edu.jo::cc64f42d-a1a6-4f08-b97b-0c37f877119f" providerId="AD" clId="Web-{3873209A-CB00-400D-D158-6330B83C4A7A}" dt="2025-03-19T03:03:17.822" v="100" actId="1076"/>
-          <ac:picMkLst>
-            <pc:docMk/>
-            <pc:sldMk cId="0" sldId="278"/>
-            <ac:picMk id="4" creationId="{00000000-0000-0000-0000-000000000000}"/>
-          </ac:picMkLst>
-        </pc:picChg>
-        <pc:picChg chg="mod">
-          <ac:chgData name="Mohammed Fasha" userId="S::mohammed.fasha@uop.edu.jo::cc64f42d-a1a6-4f08-b97b-0c37f877119f" providerId="AD" clId="Web-{3873209A-CB00-400D-D158-6330B83C4A7A}" dt="2025-03-19T03:03:23.119" v="101" actId="1076"/>
-          <ac:picMkLst>
-            <pc:docMk/>
-            <pc:sldMk cId="0" sldId="278"/>
-            <ac:picMk id="5" creationId="{00000000-0000-0000-0000-000000000000}"/>
-          </ac:picMkLst>
-        </pc:picChg>
-      </pc:sldChg>
-      <pc:sldChg chg="addSp delSp modSp new">
-        <pc:chgData name="Mohammed Fasha" userId="S::mohammed.fasha@uop.edu.jo::cc64f42d-a1a6-4f08-b97b-0c37f877119f" providerId="AD" clId="Web-{3873209A-CB00-400D-D158-6330B83C4A7A}" dt="2025-03-19T03:11:02.319" v="274" actId="20577"/>
-        <pc:sldMkLst>
-          <pc:docMk/>
-          <pc:sldMk cId="441052949" sldId="309"/>
-        </pc:sldMkLst>
-      </pc:sldChg>
-      <pc:sldChg chg="add del replId">
-        <pc:chgData name="Mohammed Fasha" userId="S::mohammed.fasha@uop.edu.jo::cc64f42d-a1a6-4f08-b97b-0c37f877119f" providerId="AD" clId="Web-{3873209A-CB00-400D-D158-6330B83C4A7A}" dt="2025-03-19T03:02:14.461" v="73"/>
-        <pc:sldMkLst>
-          <pc:docMk/>
-          <pc:sldMk cId="3859015806" sldId="310"/>
-        </pc:sldMkLst>
-      </pc:sldChg>
-      <pc:sldChg chg="addSp delSp modSp add replId">
-        <pc:chgData name="Mohammed Fasha" userId="S::mohammed.fasha@uop.edu.jo::cc64f42d-a1a6-4f08-b97b-0c37f877119f" providerId="AD" clId="Web-{3873209A-CB00-400D-D158-6330B83C4A7A}" dt="2025-03-19T03:08:53.628" v="161" actId="20577"/>
-        <pc:sldMkLst>
-          <pc:docMk/>
-          <pc:sldMk cId="4115587381" sldId="311"/>
-        </pc:sldMkLst>
-      </pc:sldChg>
-      <pc:sldChg chg="addSp delSp modSp new del">
-        <pc:chgData name="Mohammed Fasha" userId="S::mohammed.fasha@uop.edu.jo::cc64f42d-a1a6-4f08-b97b-0c37f877119f" providerId="AD" clId="Web-{3873209A-CB00-400D-D158-6330B83C4A7A}" dt="2025-03-19T03:07:33.079" v="142"/>
-        <pc:sldMkLst>
-          <pc:docMk/>
-          <pc:sldMk cId="1952534702" sldId="312"/>
-        </pc:sldMkLst>
-      </pc:sldChg>
-    </pc:docChg>
-  </pc:docChgLst>
   <pc:docChgLst>
     <pc:chgData name="Mohammed Fasha" userId="cc64f42d-a1a6-4f08-b97b-0c37f877119f" providerId="ADAL" clId="{12C0646C-DE2C-4492-8B53-5F65EF722386}"/>
     <pc:docChg chg="undo redo custSel addSld delSld modSld sldOrd">
@@ -1651,185 +514,6 @@
         <pc:sldMkLst>
           <pc:docMk/>
           <pc:sldMk cId="3702164412" sldId="318"/>
-        </pc:sldMkLst>
-      </pc:sldChg>
-    </pc:docChg>
-  </pc:docChgLst>
-  <pc:docChgLst>
-    <pc:chgData name="Mohammed Fasha" userId="S::mohammed.fasha@uop.edu.jo::cc64f42d-a1a6-4f08-b97b-0c37f877119f" providerId="AD" clId="Web-{37180445-8C36-3D61-B421-DE7B4B97BDB9}"/>
-    <pc:docChg chg="addSld delSld modSld sldOrd">
-      <pc:chgData name="Mohammed Fasha" userId="S::mohammed.fasha@uop.edu.jo::cc64f42d-a1a6-4f08-b97b-0c37f877119f" providerId="AD" clId="Web-{37180445-8C36-3D61-B421-DE7B4B97BDB9}" dt="2025-03-19T03:36:22.093" v="327" actId="1076"/>
-      <pc:docMkLst>
-        <pc:docMk/>
-      </pc:docMkLst>
-      <pc:sldChg chg="modSp">
-        <pc:chgData name="Mohammed Fasha" userId="S::mohammed.fasha@uop.edu.jo::cc64f42d-a1a6-4f08-b97b-0c37f877119f" providerId="AD" clId="Web-{37180445-8C36-3D61-B421-DE7B4B97BDB9}" dt="2025-03-19T03:30:37.066" v="274" actId="20577"/>
-        <pc:sldMkLst>
-          <pc:docMk/>
-          <pc:sldMk cId="0" sldId="276"/>
-        </pc:sldMkLst>
-      </pc:sldChg>
-      <pc:sldChg chg="modSp ord">
-        <pc:chgData name="Mohammed Fasha" userId="S::mohammed.fasha@uop.edu.jo::cc64f42d-a1a6-4f08-b97b-0c37f877119f" providerId="AD" clId="Web-{37180445-8C36-3D61-B421-DE7B4B97BDB9}" dt="2025-03-19T03:26:50.183" v="239" actId="20577"/>
-        <pc:sldMkLst>
-          <pc:docMk/>
-          <pc:sldMk cId="0" sldId="278"/>
-        </pc:sldMkLst>
-        <pc:spChg chg="mod">
-          <ac:chgData name="Mohammed Fasha" userId="S::mohammed.fasha@uop.edu.jo::cc64f42d-a1a6-4f08-b97b-0c37f877119f" providerId="AD" clId="Web-{37180445-8C36-3D61-B421-DE7B4B97BDB9}" dt="2025-03-19T03:26:50.183" v="239" actId="20577"/>
-          <ac:spMkLst>
-            <pc:docMk/>
-            <pc:sldMk cId="0" sldId="278"/>
-            <ac:spMk id="6" creationId="{81843AE0-4921-7733-0D3B-33D489EDB8CC}"/>
-          </ac:spMkLst>
-        </pc:spChg>
-      </pc:sldChg>
-      <pc:sldChg chg="modSp">
-        <pc:chgData name="Mohammed Fasha" userId="S::mohammed.fasha@uop.edu.jo::cc64f42d-a1a6-4f08-b97b-0c37f877119f" providerId="AD" clId="Web-{37180445-8C36-3D61-B421-DE7B4B97BDB9}" dt="2025-03-19T03:19:09.496" v="127" actId="20577"/>
-        <pc:sldMkLst>
-          <pc:docMk/>
-          <pc:sldMk cId="0" sldId="280"/>
-        </pc:sldMkLst>
-        <pc:spChg chg="mod">
-          <ac:chgData name="Mohammed Fasha" userId="S::mohammed.fasha@uop.edu.jo::cc64f42d-a1a6-4f08-b97b-0c37f877119f" providerId="AD" clId="Web-{37180445-8C36-3D61-B421-DE7B4B97BDB9}" dt="2025-03-19T03:19:09.496" v="127" actId="20577"/>
-          <ac:spMkLst>
-            <pc:docMk/>
-            <pc:sldMk cId="0" sldId="280"/>
-            <ac:spMk id="6" creationId="{CC4C1BC0-7E6B-75C8-0965-79DE721E7639}"/>
-          </ac:spMkLst>
-        </pc:spChg>
-      </pc:sldChg>
-      <pc:sldChg chg="addSp modSp">
-        <pc:chgData name="Mohammed Fasha" userId="S::mohammed.fasha@uop.edu.jo::cc64f42d-a1a6-4f08-b97b-0c37f877119f" providerId="AD" clId="Web-{37180445-8C36-3D61-B421-DE7B4B97BDB9}" dt="2025-03-19T03:21:50.361" v="182" actId="20577"/>
-        <pc:sldMkLst>
-          <pc:docMk/>
-          <pc:sldMk cId="441052949" sldId="309"/>
-        </pc:sldMkLst>
-      </pc:sldChg>
-      <pc:sldChg chg="addSp delSp modSp add del replId">
-        <pc:chgData name="Mohammed Fasha" userId="S::mohammed.fasha@uop.edu.jo::cc64f42d-a1a6-4f08-b97b-0c37f877119f" providerId="AD" clId="Web-{37180445-8C36-3D61-B421-DE7B4B97BDB9}" dt="2025-03-19T03:17:37.368" v="121"/>
-        <pc:sldMkLst>
-          <pc:docMk/>
-          <pc:sldMk cId="1021713399" sldId="312"/>
-        </pc:sldMkLst>
-      </pc:sldChg>
-      <pc:sldChg chg="addSp modSp new">
-        <pc:chgData name="Mohammed Fasha" userId="S::mohammed.fasha@uop.edu.jo::cc64f42d-a1a6-4f08-b97b-0c37f877119f" providerId="AD" clId="Web-{37180445-8C36-3D61-B421-DE7B4B97BDB9}" dt="2025-03-19T03:24:21.850" v="219" actId="20577"/>
-        <pc:sldMkLst>
-          <pc:docMk/>
-          <pc:sldMk cId="1008151712" sldId="313"/>
-        </pc:sldMkLst>
-      </pc:sldChg>
-      <pc:sldChg chg="addSp delSp modSp new">
-        <pc:chgData name="Mohammed Fasha" userId="S::mohammed.fasha@uop.edu.jo::cc64f42d-a1a6-4f08-b97b-0c37f877119f" providerId="AD" clId="Web-{37180445-8C36-3D61-B421-DE7B4B97BDB9}" dt="2025-03-19T03:31:22.739" v="283" actId="20577"/>
-        <pc:sldMkLst>
-          <pc:docMk/>
-          <pc:sldMk cId="618074235" sldId="314"/>
-        </pc:sldMkLst>
-      </pc:sldChg>
-      <pc:sldChg chg="addSp modSp new">
-        <pc:chgData name="Mohammed Fasha" userId="S::mohammed.fasha@uop.edu.jo::cc64f42d-a1a6-4f08-b97b-0c37f877119f" providerId="AD" clId="Web-{37180445-8C36-3D61-B421-DE7B4B97BDB9}" dt="2025-03-19T03:36:22.093" v="327" actId="1076"/>
-        <pc:sldMkLst>
-          <pc:docMk/>
-          <pc:sldMk cId="22495289" sldId="315"/>
-        </pc:sldMkLst>
-      </pc:sldChg>
-    </pc:docChg>
-  </pc:docChgLst>
-  <pc:docChgLst>
-    <pc:chgData name="Mohammed Fasha" userId="cc64f42d-a1a6-4f08-b97b-0c37f877119f" providerId="ADAL" clId="{33A44248-7984-4750-8CBD-503C66D5F8B6}"/>
-    <pc:docChg chg="custSel addSld modSld">
-      <pc:chgData name="Mohammed Fasha" userId="cc64f42d-a1a6-4f08-b97b-0c37f877119f" providerId="ADAL" clId="{33A44248-7984-4750-8CBD-503C66D5F8B6}" dt="2025-03-05T09:13:55.803" v="21" actId="1076"/>
-      <pc:docMkLst>
-        <pc:docMk/>
-      </pc:docMkLst>
-      <pc:sldChg chg="addSp delSp modSp add">
-        <pc:chgData name="Mohammed Fasha" userId="cc64f42d-a1a6-4f08-b97b-0c37f877119f" providerId="ADAL" clId="{33A44248-7984-4750-8CBD-503C66D5F8B6}" dt="2025-03-05T09:13:55.803" v="21" actId="1076"/>
-        <pc:sldMkLst>
-          <pc:docMk/>
-          <pc:sldMk cId="2982934387" sldId="520"/>
-        </pc:sldMkLst>
-      </pc:sldChg>
-    </pc:docChg>
-  </pc:docChgLst>
-  <pc:docChgLst>
-    <pc:chgData name="Mohammed Fasha" userId="S::mohammed.fasha@uop.edu.jo::cc64f42d-a1a6-4f08-b97b-0c37f877119f" providerId="AD" clId="Web-{CFB52BA1-027E-4A5C-51C2-A494885CE8B6}"/>
-    <pc:docChg chg="addSld delSld modSld">
-      <pc:chgData name="Mohammed Fasha" userId="S::mohammed.fasha@uop.edu.jo::cc64f42d-a1a6-4f08-b97b-0c37f877119f" providerId="AD" clId="Web-{CFB52BA1-027E-4A5C-51C2-A494885CE8B6}" dt="2025-03-16T14:45:18.235" v="45" actId="1076"/>
-      <pc:docMkLst>
-        <pc:docMk/>
-      </pc:docMkLst>
-      <pc:sldChg chg="modSp">
-        <pc:chgData name="Mohammed Fasha" userId="S::mohammed.fasha@uop.edu.jo::cc64f42d-a1a6-4f08-b97b-0c37f877119f" providerId="AD" clId="Web-{CFB52BA1-027E-4A5C-51C2-A494885CE8B6}" dt="2025-03-16T14:45:05.391" v="43" actId="1076"/>
-        <pc:sldMkLst>
-          <pc:docMk/>
-          <pc:sldMk cId="0" sldId="269"/>
-        </pc:sldMkLst>
-      </pc:sldChg>
-      <pc:sldChg chg="modSp">
-        <pc:chgData name="Mohammed Fasha" userId="S::mohammed.fasha@uop.edu.jo::cc64f42d-a1a6-4f08-b97b-0c37f877119f" providerId="AD" clId="Web-{CFB52BA1-027E-4A5C-51C2-A494885CE8B6}" dt="2025-03-16T14:45:18.235" v="45" actId="1076"/>
-        <pc:sldMkLst>
-          <pc:docMk/>
-          <pc:sldMk cId="0" sldId="270"/>
-        </pc:sldMkLst>
-        <pc:picChg chg="mod">
-          <ac:chgData name="Mohammed Fasha" userId="S::mohammed.fasha@uop.edu.jo::cc64f42d-a1a6-4f08-b97b-0c37f877119f" providerId="AD" clId="Web-{CFB52BA1-027E-4A5C-51C2-A494885CE8B6}" dt="2025-03-16T14:45:18.235" v="45" actId="1076"/>
-          <ac:picMkLst>
-            <pc:docMk/>
-            <pc:sldMk cId="0" sldId="270"/>
-            <ac:picMk id="15" creationId="{4E22367B-B754-648E-0B22-AC55F28E1729}"/>
-          </ac:picMkLst>
-        </pc:picChg>
-      </pc:sldChg>
-      <pc:sldChg chg="modSp">
-        <pc:chgData name="Mohammed Fasha" userId="S::mohammed.fasha@uop.edu.jo::cc64f42d-a1a6-4f08-b97b-0c37f877119f" providerId="AD" clId="Web-{CFB52BA1-027E-4A5C-51C2-A494885CE8B6}" dt="2025-03-16T14:44:57.469" v="42" actId="20577"/>
-        <pc:sldMkLst>
-          <pc:docMk/>
-          <pc:sldMk cId="0" sldId="272"/>
-        </pc:sldMkLst>
-        <pc:spChg chg="mod">
-          <ac:chgData name="Mohammed Fasha" userId="S::mohammed.fasha@uop.edu.jo::cc64f42d-a1a6-4f08-b97b-0c37f877119f" providerId="AD" clId="Web-{CFB52BA1-027E-4A5C-51C2-A494885CE8B6}" dt="2025-03-16T14:44:57.469" v="42" actId="20577"/>
-          <ac:spMkLst>
-            <pc:docMk/>
-            <pc:sldMk cId="0" sldId="272"/>
-            <ac:spMk id="2" creationId="{00000000-0000-0000-0000-000000000000}"/>
-          </ac:spMkLst>
-        </pc:spChg>
-      </pc:sldChg>
-      <pc:sldChg chg="modSp">
-        <pc:chgData name="Mohammed Fasha" userId="S::mohammed.fasha@uop.edu.jo::cc64f42d-a1a6-4f08-b97b-0c37f877119f" providerId="AD" clId="Web-{CFB52BA1-027E-4A5C-51C2-A494885CE8B6}" dt="2025-03-16T14:44:48.500" v="41" actId="14100"/>
-        <pc:sldMkLst>
-          <pc:docMk/>
-          <pc:sldMk cId="0" sldId="274"/>
-        </pc:sldMkLst>
-        <pc:spChg chg="mod">
-          <ac:chgData name="Mohammed Fasha" userId="S::mohammed.fasha@uop.edu.jo::cc64f42d-a1a6-4f08-b97b-0c37f877119f" providerId="AD" clId="Web-{CFB52BA1-027E-4A5C-51C2-A494885CE8B6}" dt="2025-03-16T14:44:48.500" v="41" actId="14100"/>
-          <ac:spMkLst>
-            <pc:docMk/>
-            <pc:sldMk cId="0" sldId="274"/>
-            <ac:spMk id="7" creationId="{CF4277E2-2BAC-D76F-20C6-A50B542D2495}"/>
-          </ac:spMkLst>
-        </pc:spChg>
-      </pc:sldChg>
-      <pc:sldChg chg="addSp delSp modSp del">
-        <pc:chgData name="Mohammed Fasha" userId="S::mohammed.fasha@uop.edu.jo::cc64f42d-a1a6-4f08-b97b-0c37f877119f" providerId="AD" clId="Web-{CFB52BA1-027E-4A5C-51C2-A494885CE8B6}" dt="2025-03-16T14:44:02.201" v="36"/>
-        <pc:sldMkLst>
-          <pc:docMk/>
-          <pc:sldMk cId="3476611510" sldId="290"/>
-        </pc:sldMkLst>
-      </pc:sldChg>
-      <pc:sldChg chg="addSp delSp modSp new">
-        <pc:chgData name="Mohammed Fasha" userId="S::mohammed.fasha@uop.edu.jo::cc64f42d-a1a6-4f08-b97b-0c37f877119f" providerId="AD" clId="Web-{CFB52BA1-027E-4A5C-51C2-A494885CE8B6}" dt="2025-03-16T14:42:40.261" v="8" actId="20577"/>
-        <pc:sldMkLst>
-          <pc:docMk/>
-          <pc:sldMk cId="1663389758" sldId="302"/>
-        </pc:sldMkLst>
-      </pc:sldChg>
-      <pc:sldChg chg="addSp modSp new">
-        <pc:chgData name="Mohammed Fasha" userId="S::mohammed.fasha@uop.edu.jo::cc64f42d-a1a6-4f08-b97b-0c37f877119f" providerId="AD" clId="Web-{CFB52BA1-027E-4A5C-51C2-A494885CE8B6}" dt="2025-03-16T14:44:23.343" v="40" actId="1076"/>
-        <pc:sldMkLst>
-          <pc:docMk/>
-          <pc:sldMk cId="3053666628" sldId="303"/>
         </pc:sldMkLst>
       </pc:sldChg>
     </pc:docChg>
@@ -2327,13 +1011,6 @@
           </ac:picMkLst>
         </pc:picChg>
       </pc:sldChg>
-      <pc:sldChg chg="del">
-        <pc:chgData name="Mohammed Fasha" userId="cc64f42d-a1a6-4f08-b97b-0c37f877119f" providerId="ADAL" clId="{E8D62E87-A939-4BEA-B882-7E8D1ACA2800}" dt="2025-03-11T17:36:25.500" v="0" actId="2696"/>
-        <pc:sldMkLst>
-          <pc:docMk/>
-          <pc:sldMk cId="0" sldId="283"/>
-        </pc:sldMkLst>
-      </pc:sldChg>
       <pc:sldChg chg="addSp delSp modSp new mod ord">
         <pc:chgData name="Mohammed Fasha" userId="cc64f42d-a1a6-4f08-b97b-0c37f877119f" providerId="ADAL" clId="{E8D62E87-A939-4BEA-B882-7E8D1ACA2800}" dt="2025-03-12T05:20:32.571" v="266"/>
         <pc:sldMkLst>
@@ -2724,311 +1401,704 @@
     </pc:docChg>
   </pc:docChgLst>
   <pc:docChgLst>
-    <pc:chgData name="Mohammed Fasha" userId="cc64f42d-a1a6-4f08-b97b-0c37f877119f" providerId="ADAL" clId="{52B7A16F-CAD0-4D4D-9F9C-A24C8678CAD7}"/>
-    <pc:docChg chg="undo custSel addSld delSld modSld">
-      <pc:chgData name="Mohammed Fasha" userId="cc64f42d-a1a6-4f08-b97b-0c37f877119f" providerId="ADAL" clId="{52B7A16F-CAD0-4D4D-9F9C-A24C8678CAD7}" dt="2025-03-23T08:12:51.858" v="440" actId="167"/>
+    <pc:chgData name="Mohammed Fasha" userId="cc64f42d-a1a6-4f08-b97b-0c37f877119f" providerId="ADAL" clId="{F2AA505E-0DD7-FD47-806A-FB027185E6B5}"/>
+    <pc:docChg chg="undo custSel modSld">
+      <pc:chgData name="Mohammed Fasha" userId="cc64f42d-a1a6-4f08-b97b-0c37f877119f" providerId="ADAL" clId="{F2AA505E-0DD7-FD47-806A-FB027185E6B5}" dt="2025-03-26T07:36:02.604" v="147" actId="478"/>
       <pc:docMkLst>
         <pc:docMk/>
       </pc:docMkLst>
-      <pc:sldChg chg="modSp mod">
-        <pc:chgData name="Mohammed Fasha" userId="cc64f42d-a1a6-4f08-b97b-0c37f877119f" providerId="ADAL" clId="{52B7A16F-CAD0-4D4D-9F9C-A24C8678CAD7}" dt="2025-03-23T07:38:06.248" v="0" actId="1076"/>
-        <pc:sldMkLst>
-          <pc:docMk/>
-          <pc:sldMk cId="0" sldId="260"/>
-        </pc:sldMkLst>
-        <pc:picChg chg="mod">
-          <ac:chgData name="Mohammed Fasha" userId="cc64f42d-a1a6-4f08-b97b-0c37f877119f" providerId="ADAL" clId="{52B7A16F-CAD0-4D4D-9F9C-A24C8678CAD7}" dt="2025-03-23T07:38:06.248" v="0" actId="1076"/>
-          <ac:picMkLst>
-            <pc:docMk/>
-            <pc:sldMk cId="0" sldId="260"/>
-            <ac:picMk id="4" creationId="{00000000-0000-0000-0000-000000000000}"/>
-          </ac:picMkLst>
-        </pc:picChg>
-      </pc:sldChg>
-      <pc:sldChg chg="addSp delSp modSp mod">
-        <pc:chgData name="Mohammed Fasha" userId="cc64f42d-a1a6-4f08-b97b-0c37f877119f" providerId="ADAL" clId="{52B7A16F-CAD0-4D4D-9F9C-A24C8678CAD7}" dt="2025-03-23T07:53:24.379" v="210" actId="1037"/>
-        <pc:sldMkLst>
-          <pc:docMk/>
-          <pc:sldMk cId="0" sldId="268"/>
-        </pc:sldMkLst>
-        <pc:spChg chg="mod">
-          <ac:chgData name="Mohammed Fasha" userId="cc64f42d-a1a6-4f08-b97b-0c37f877119f" providerId="ADAL" clId="{52B7A16F-CAD0-4D4D-9F9C-A24C8678CAD7}" dt="2025-03-23T07:52:27.822" v="194" actId="14100"/>
-          <ac:spMkLst>
-            <pc:docMk/>
-            <pc:sldMk cId="0" sldId="268"/>
-            <ac:spMk id="2" creationId="{00000000-0000-0000-0000-000000000000}"/>
-          </ac:spMkLst>
-        </pc:spChg>
-        <pc:picChg chg="del mod">
-          <ac:chgData name="Mohammed Fasha" userId="cc64f42d-a1a6-4f08-b97b-0c37f877119f" providerId="ADAL" clId="{52B7A16F-CAD0-4D4D-9F9C-A24C8678CAD7}" dt="2025-03-23T07:49:10.230" v="99" actId="21"/>
-          <ac:picMkLst>
-            <pc:docMk/>
-            <pc:sldMk cId="0" sldId="268"/>
-            <ac:picMk id="3" creationId="{80666BF4-16FB-5F6D-681D-CB4B25AF4A97}"/>
-          </ac:picMkLst>
-        </pc:picChg>
-        <pc:picChg chg="add mod">
-          <ac:chgData name="Mohammed Fasha" userId="cc64f42d-a1a6-4f08-b97b-0c37f877119f" providerId="ADAL" clId="{52B7A16F-CAD0-4D4D-9F9C-A24C8678CAD7}" dt="2025-03-23T07:53:24.379" v="210" actId="1037"/>
-          <ac:picMkLst>
-            <pc:docMk/>
-            <pc:sldMk cId="0" sldId="268"/>
-            <ac:picMk id="4" creationId="{8938F170-AA00-1377-3C2D-9C4BA79F0B63}"/>
-          </ac:picMkLst>
-        </pc:picChg>
-        <pc:picChg chg="mod">
-          <ac:chgData name="Mohammed Fasha" userId="cc64f42d-a1a6-4f08-b97b-0c37f877119f" providerId="ADAL" clId="{52B7A16F-CAD0-4D4D-9F9C-A24C8678CAD7}" dt="2025-03-23T07:52:46.951" v="196" actId="1076"/>
-          <ac:picMkLst>
-            <pc:docMk/>
-            <pc:sldMk cId="0" sldId="268"/>
-            <ac:picMk id="1026" creationId="{6F3CBA0F-1E6C-643F-B94A-E0D29A10F4F2}"/>
-          </ac:picMkLst>
-        </pc:picChg>
-        <pc:picChg chg="add mod">
-          <ac:chgData name="Mohammed Fasha" userId="cc64f42d-a1a6-4f08-b97b-0c37f877119f" providerId="ADAL" clId="{52B7A16F-CAD0-4D4D-9F9C-A24C8678CAD7}" dt="2025-03-23T07:52:51.388" v="198" actId="1076"/>
-          <ac:picMkLst>
-            <pc:docMk/>
-            <pc:sldMk cId="0" sldId="268"/>
-            <ac:picMk id="3074" creationId="{CA531F7F-21C5-71FB-D0ED-F868724378F4}"/>
-          </ac:picMkLst>
-        </pc:picChg>
-      </pc:sldChg>
-      <pc:sldChg chg="modSp mod">
-        <pc:chgData name="Mohammed Fasha" userId="cc64f42d-a1a6-4f08-b97b-0c37f877119f" providerId="ADAL" clId="{52B7A16F-CAD0-4D4D-9F9C-A24C8678CAD7}" dt="2025-03-23T08:04:37.151" v="351" actId="1076"/>
+      <pc:sldChg chg="addSp delSp modSp">
+        <pc:chgData name="Mohammed Fasha" userId="cc64f42d-a1a6-4f08-b97b-0c37f877119f" providerId="ADAL" clId="{F2AA505E-0DD7-FD47-806A-FB027185E6B5}" dt="2025-03-26T07:36:02.604" v="147" actId="478"/>
         <pc:sldMkLst>
           <pc:docMk/>
           <pc:sldMk cId="0" sldId="272"/>
         </pc:sldMkLst>
-        <pc:picChg chg="mod">
-          <ac:chgData name="Mohammed Fasha" userId="cc64f42d-a1a6-4f08-b97b-0c37f877119f" providerId="ADAL" clId="{52B7A16F-CAD0-4D4D-9F9C-A24C8678CAD7}" dt="2025-03-23T08:04:37.151" v="351" actId="1076"/>
+        <pc:spChg chg="mod">
+          <ac:chgData name="Mohammed Fasha" userId="cc64f42d-a1a6-4f08-b97b-0c37f877119f" providerId="ADAL" clId="{F2AA505E-0DD7-FD47-806A-FB027185E6B5}" dt="2025-03-26T07:30:26.806" v="17" actId="1038"/>
+          <ac:spMkLst>
+            <pc:docMk/>
+            <pc:sldMk cId="0" sldId="272"/>
+            <ac:spMk id="8" creationId="{98B7FB4A-DB0E-01C4-3C0E-032767DA24F4}"/>
+          </ac:spMkLst>
+        </pc:spChg>
+        <pc:graphicFrameChg chg="add del mod">
+          <ac:chgData name="Mohammed Fasha" userId="cc64f42d-a1a6-4f08-b97b-0c37f877119f" providerId="ADAL" clId="{F2AA505E-0DD7-FD47-806A-FB027185E6B5}" dt="2025-03-26T07:35:08.665" v="142" actId="478"/>
+          <ac:graphicFrameMkLst>
+            <pc:docMk/>
+            <pc:sldMk cId="0" sldId="272"/>
+            <ac:graphicFrameMk id="10" creationId="{C48732C4-EF16-66B4-7CF2-21EC276FA081}"/>
+          </ac:graphicFrameMkLst>
+        </pc:graphicFrameChg>
+        <pc:graphicFrameChg chg="add del">
+          <ac:chgData name="Mohammed Fasha" userId="cc64f42d-a1a6-4f08-b97b-0c37f877119f" providerId="ADAL" clId="{F2AA505E-0DD7-FD47-806A-FB027185E6B5}" dt="2025-03-26T07:35:40.631" v="144" actId="21"/>
+          <ac:graphicFrameMkLst>
+            <pc:docMk/>
+            <pc:sldMk cId="0" sldId="272"/>
+            <ac:graphicFrameMk id="12" creationId="{6C6626B1-9CAF-B902-BF8C-C60B0B7898FE}"/>
+          </ac:graphicFrameMkLst>
+        </pc:graphicFrameChg>
+        <pc:picChg chg="add del mod">
+          <ac:chgData name="Mohammed Fasha" userId="cc64f42d-a1a6-4f08-b97b-0c37f877119f" providerId="ADAL" clId="{F2AA505E-0DD7-FD47-806A-FB027185E6B5}" dt="2025-03-26T07:36:02.604" v="147" actId="478"/>
           <ac:picMkLst>
             <pc:docMk/>
             <pc:sldMk cId="0" sldId="272"/>
-            <ac:picMk id="3" creationId="{00000000-0000-0000-0000-000000000000}"/>
+            <ac:picMk id="15" creationId="{5D4653C2-C83D-F965-57EF-F0D8453DBEED}"/>
           </ac:picMkLst>
         </pc:picChg>
       </pc:sldChg>
-      <pc:sldChg chg="addSp delSp modSp mod">
-        <pc:chgData name="Mohammed Fasha" userId="cc64f42d-a1a6-4f08-b97b-0c37f877119f" providerId="ADAL" clId="{52B7A16F-CAD0-4D4D-9F9C-A24C8678CAD7}" dt="2025-03-23T07:57:49.782" v="247" actId="113"/>
+      <pc:sldChg chg="addSp delSp modSp">
+        <pc:chgData name="Mohammed Fasha" userId="cc64f42d-a1a6-4f08-b97b-0c37f877119f" providerId="ADAL" clId="{F2AA505E-0DD7-FD47-806A-FB027185E6B5}" dt="2025-03-26T07:34:07.487" v="139" actId="20577"/>
+        <pc:sldMkLst>
+          <pc:docMk/>
+          <pc:sldMk cId="2158520731" sldId="321"/>
+        </pc:sldMkLst>
+        <pc:spChg chg="add mod">
+          <ac:chgData name="Mohammed Fasha" userId="cc64f42d-a1a6-4f08-b97b-0c37f877119f" providerId="ADAL" clId="{F2AA505E-0DD7-FD47-806A-FB027185E6B5}" dt="2025-03-26T07:33:20.273" v="39" actId="1076"/>
+          <ac:spMkLst>
+            <pc:docMk/>
+            <pc:sldMk cId="2158520731" sldId="321"/>
+            <ac:spMk id="4" creationId="{962C54D2-6C6B-4D18-91FD-386C4A4E72B9}"/>
+          </ac:spMkLst>
+        </pc:spChg>
+        <pc:spChg chg="mod">
+          <ac:chgData name="Mohammed Fasha" userId="cc64f42d-a1a6-4f08-b97b-0c37f877119f" providerId="ADAL" clId="{F2AA505E-0DD7-FD47-806A-FB027185E6B5}" dt="2025-03-26T07:33:17.164" v="38" actId="14100"/>
+          <ac:spMkLst>
+            <pc:docMk/>
+            <pc:sldMk cId="2158520731" sldId="321"/>
+            <ac:spMk id="6" creationId="{5CB15C33-8731-2AC8-2AA9-CC56BB604532}"/>
+          </ac:spMkLst>
+        </pc:spChg>
+        <pc:spChg chg="add del">
+          <ac:chgData name="Mohammed Fasha" userId="cc64f42d-a1a6-4f08-b97b-0c37f877119f" providerId="ADAL" clId="{F2AA505E-0DD7-FD47-806A-FB027185E6B5}" dt="2025-03-26T07:33:25.856" v="41" actId="22"/>
+          <ac:spMkLst>
+            <pc:docMk/>
+            <pc:sldMk cId="2158520731" sldId="321"/>
+            <ac:spMk id="7" creationId="{92B75328-A5FD-1DE3-7B1F-FF0F0B1C188B}"/>
+          </ac:spMkLst>
+        </pc:spChg>
+        <pc:graphicFrameChg chg="add mod modGraphic">
+          <ac:chgData name="Mohammed Fasha" userId="cc64f42d-a1a6-4f08-b97b-0c37f877119f" providerId="ADAL" clId="{F2AA505E-0DD7-FD47-806A-FB027185E6B5}" dt="2025-03-26T07:34:07.487" v="139" actId="20577"/>
+          <ac:graphicFrameMkLst>
+            <pc:docMk/>
+            <pc:sldMk cId="2158520731" sldId="321"/>
+            <ac:graphicFrameMk id="9" creationId="{2DD0168C-4AA5-A3AD-EC68-9F3DAD099B7C}"/>
+          </ac:graphicFrameMkLst>
+        </pc:graphicFrameChg>
+        <pc:graphicFrameChg chg="mod modGraphic">
+          <ac:chgData name="Mohammed Fasha" userId="cc64f42d-a1a6-4f08-b97b-0c37f877119f" providerId="ADAL" clId="{F2AA505E-0DD7-FD47-806A-FB027185E6B5}" dt="2025-03-26T07:32:48.937" v="32" actId="1036"/>
+          <ac:graphicFrameMkLst>
+            <pc:docMk/>
+            <pc:sldMk cId="2158520731" sldId="321"/>
+            <ac:graphicFrameMk id="13" creationId="{16C5CEE9-CAE7-15B6-CD99-242FA0B68E48}"/>
+          </ac:graphicFrameMkLst>
+        </pc:graphicFrameChg>
+        <pc:graphicFrameChg chg="mod">
+          <ac:chgData name="Mohammed Fasha" userId="cc64f42d-a1a6-4f08-b97b-0c37f877119f" providerId="ADAL" clId="{F2AA505E-0DD7-FD47-806A-FB027185E6B5}" dt="2025-03-26T07:32:54.322" v="33" actId="1076"/>
+          <ac:graphicFrameMkLst>
+            <pc:docMk/>
+            <pc:sldMk cId="2158520731" sldId="321"/>
+            <ac:graphicFrameMk id="14" creationId="{68F65CD9-04AE-694C-CAF9-ABB6912D588B}"/>
+          </ac:graphicFrameMkLst>
+        </pc:graphicFrameChg>
+      </pc:sldChg>
+    </pc:docChg>
+  </pc:docChgLst>
+  <pc:docChgLst>
+    <pc:chgData name="Mohammed Fasha" userId="S::mohammed.fasha@uop.edu.jo::cc64f42d-a1a6-4f08-b97b-0c37f877119f" providerId="AD" clId="Web-{2F52505F-0676-E1F8-3A9C-C74E2F5553F9}"/>
+    <pc:docChg chg="addSld modSld">
+      <pc:chgData name="Mohammed Fasha" userId="S::mohammed.fasha@uop.edu.jo::cc64f42d-a1a6-4f08-b97b-0c37f877119f" providerId="AD" clId="Web-{2F52505F-0676-E1F8-3A9C-C74E2F5553F9}" dt="2025-03-23T06:07:25.672" v="25" actId="20577"/>
+      <pc:docMkLst>
+        <pc:docMk/>
+      </pc:docMkLst>
+      <pc:sldChg chg="modSp">
+        <pc:chgData name="Mohammed Fasha" userId="S::mohammed.fasha@uop.edu.jo::cc64f42d-a1a6-4f08-b97b-0c37f877119f" providerId="AD" clId="Web-{2F52505F-0676-E1F8-3A9C-C74E2F5553F9}" dt="2025-03-23T06:05:34.685" v="4" actId="20577"/>
         <pc:sldMkLst>
           <pc:docMk/>
           <pc:sldMk cId="1864506158" sldId="314"/>
         </pc:sldMkLst>
         <pc:spChg chg="mod">
-          <ac:chgData name="Mohammed Fasha" userId="cc64f42d-a1a6-4f08-b97b-0c37f877119f" providerId="ADAL" clId="{52B7A16F-CAD0-4D4D-9F9C-A24C8678CAD7}" dt="2025-03-23T07:45:37.830" v="55" actId="27636"/>
-          <ac:spMkLst>
-            <pc:docMk/>
-            <pc:sldMk cId="1864506158" sldId="314"/>
-            <ac:spMk id="2" creationId="{2531B878-DED6-1381-4B52-F683EA36A7F3}"/>
-          </ac:spMkLst>
-        </pc:spChg>
-        <pc:spChg chg="mod">
-          <ac:chgData name="Mohammed Fasha" userId="cc64f42d-a1a6-4f08-b97b-0c37f877119f" providerId="ADAL" clId="{52B7A16F-CAD0-4D4D-9F9C-A24C8678CAD7}" dt="2025-03-23T07:57:49.782" v="247" actId="113"/>
+          <ac:chgData name="Mohammed Fasha" userId="S::mohammed.fasha@uop.edu.jo::cc64f42d-a1a6-4f08-b97b-0c37f877119f" providerId="AD" clId="Web-{2F52505F-0676-E1F8-3A9C-C74E2F5553F9}" dt="2025-03-23T06:05:34.685" v="4" actId="20577"/>
           <ac:spMkLst>
             <pc:docMk/>
             <pc:sldMk cId="1864506158" sldId="314"/>
             <ac:spMk id="3" creationId="{4961BB54-A79B-91B6-2B3E-888FA20CC61F}"/>
           </ac:spMkLst>
         </pc:spChg>
-        <pc:picChg chg="add del mod">
-          <ac:chgData name="Mohammed Fasha" userId="cc64f42d-a1a6-4f08-b97b-0c37f877119f" providerId="ADAL" clId="{52B7A16F-CAD0-4D4D-9F9C-A24C8678CAD7}" dt="2025-03-23T07:49:26.220" v="103" actId="21"/>
-          <ac:picMkLst>
-            <pc:docMk/>
-            <pc:sldMk cId="1864506158" sldId="314"/>
-            <ac:picMk id="4" creationId="{80666BF4-16FB-5F6D-681D-CB4B25AF4A97}"/>
-          </ac:picMkLst>
-        </pc:picChg>
-        <pc:picChg chg="add del mod">
-          <ac:chgData name="Mohammed Fasha" userId="cc64f42d-a1a6-4f08-b97b-0c37f877119f" providerId="ADAL" clId="{52B7A16F-CAD0-4D4D-9F9C-A24C8678CAD7}" dt="2025-03-23T07:49:16.023" v="100" actId="478"/>
-          <ac:picMkLst>
-            <pc:docMk/>
-            <pc:sldMk cId="1864506158" sldId="314"/>
-            <ac:picMk id="1026" creationId="{E295CD06-983D-2746-D9ED-5EC2CEF7FD9D}"/>
-          </ac:picMkLst>
-        </pc:picChg>
-        <pc:picChg chg="add mod">
-          <ac:chgData name="Mohammed Fasha" userId="cc64f42d-a1a6-4f08-b97b-0c37f877119f" providerId="ADAL" clId="{52B7A16F-CAD0-4D4D-9F9C-A24C8678CAD7}" dt="2025-03-23T07:50:06.277" v="132" actId="1038"/>
-          <ac:picMkLst>
-            <pc:docMk/>
-            <pc:sldMk cId="1864506158" sldId="314"/>
-            <ac:picMk id="1028" creationId="{A134BD84-5CDB-1185-7A50-8919C0EADE6C}"/>
-          </ac:picMkLst>
-        </pc:picChg>
       </pc:sldChg>
-      <pc:sldChg chg="del">
-        <pc:chgData name="Mohammed Fasha" userId="cc64f42d-a1a6-4f08-b97b-0c37f877119f" providerId="ADAL" clId="{52B7A16F-CAD0-4D4D-9F9C-A24C8678CAD7}" dt="2025-03-23T07:50:32.125" v="135" actId="2696"/>
-        <pc:sldMkLst>
-          <pc:docMk/>
-          <pc:sldMk cId="2845841377" sldId="315"/>
-        </pc:sldMkLst>
-      </pc:sldChg>
-      <pc:sldChg chg="addSp delSp modSp mod">
-        <pc:chgData name="Mohammed Fasha" userId="cc64f42d-a1a6-4f08-b97b-0c37f877119f" providerId="ADAL" clId="{52B7A16F-CAD0-4D4D-9F9C-A24C8678CAD7}" dt="2025-03-23T08:12:51.858" v="440" actId="167"/>
+      <pc:sldChg chg="modSp new">
+        <pc:chgData name="Mohammed Fasha" userId="S::mohammed.fasha@uop.edu.jo::cc64f42d-a1a6-4f08-b97b-0c37f877119f" providerId="AD" clId="Web-{2F52505F-0676-E1F8-3A9C-C74E2F5553F9}" dt="2025-03-23T06:06:23.139" v="13" actId="20577"/>
         <pc:sldMkLst>
           <pc:docMk/>
           <pc:sldMk cId="3694445782" sldId="326"/>
         </pc:sldMkLst>
-        <pc:spChg chg="mod">
-          <ac:chgData name="Mohammed Fasha" userId="cc64f42d-a1a6-4f08-b97b-0c37f877119f" providerId="ADAL" clId="{52B7A16F-CAD0-4D4D-9F9C-A24C8678CAD7}" dt="2025-03-23T08:09:51.129" v="376" actId="27636"/>
-          <ac:spMkLst>
-            <pc:docMk/>
-            <pc:sldMk cId="3694445782" sldId="326"/>
-            <ac:spMk id="2" creationId="{76E77D81-B038-7FB5-2B90-061A90EBF23E}"/>
-          </ac:spMkLst>
-        </pc:spChg>
-        <pc:spChg chg="add del mod">
-          <ac:chgData name="Mohammed Fasha" userId="cc64f42d-a1a6-4f08-b97b-0c37f877119f" providerId="ADAL" clId="{52B7A16F-CAD0-4D4D-9F9C-A24C8678CAD7}" dt="2025-03-23T08:12:39.989" v="435" actId="478"/>
-          <ac:spMkLst>
-            <pc:docMk/>
-            <pc:sldMk cId="3694445782" sldId="326"/>
-            <ac:spMk id="3" creationId="{A83CAC7D-42B8-C614-E399-7F41DD29BBE0}"/>
-          </ac:spMkLst>
-        </pc:spChg>
-        <pc:spChg chg="add mod">
-          <ac:chgData name="Mohammed Fasha" userId="cc64f42d-a1a6-4f08-b97b-0c37f877119f" providerId="ADAL" clId="{52B7A16F-CAD0-4D4D-9F9C-A24C8678CAD7}" dt="2025-03-23T08:12:38.465" v="433" actId="478"/>
-          <ac:spMkLst>
-            <pc:docMk/>
-            <pc:sldMk cId="3694445782" sldId="326"/>
-            <ac:spMk id="4" creationId="{497167A0-EE78-4968-6D82-0A145C061EA6}"/>
-          </ac:spMkLst>
-        </pc:spChg>
-        <pc:picChg chg="add del">
-          <ac:chgData name="Mohammed Fasha" userId="cc64f42d-a1a6-4f08-b97b-0c37f877119f" providerId="ADAL" clId="{52B7A16F-CAD0-4D4D-9F9C-A24C8678CAD7}" dt="2025-03-23T08:12:43.175" v="436" actId="478"/>
-          <ac:picMkLst>
-            <pc:docMk/>
-            <pc:sldMk cId="3694445782" sldId="326"/>
-            <ac:picMk id="6146" creationId="{4A9D4C98-141F-2BF1-7D48-B551199D39AF}"/>
-          </ac:picMkLst>
-        </pc:picChg>
-        <pc:picChg chg="add">
-          <ac:chgData name="Mohammed Fasha" userId="cc64f42d-a1a6-4f08-b97b-0c37f877119f" providerId="ADAL" clId="{52B7A16F-CAD0-4D4D-9F9C-A24C8678CAD7}" dt="2025-03-23T08:12:39.090" v="434"/>
-          <ac:picMkLst>
-            <pc:docMk/>
-            <pc:sldMk cId="3694445782" sldId="326"/>
-            <ac:picMk id="6148" creationId="{C8F621CB-8F86-187B-662F-33DBFF5F97F6}"/>
-          </ac:picMkLst>
-        </pc:picChg>
-        <pc:picChg chg="add mod">
-          <ac:chgData name="Mohammed Fasha" userId="cc64f42d-a1a6-4f08-b97b-0c37f877119f" providerId="ADAL" clId="{52B7A16F-CAD0-4D4D-9F9C-A24C8678CAD7}" dt="2025-03-23T08:12:51.858" v="440" actId="167"/>
-          <ac:picMkLst>
-            <pc:docMk/>
-            <pc:sldMk cId="3694445782" sldId="326"/>
-            <ac:picMk id="6150" creationId="{DA80B1E5-2888-D735-7520-A47852F7ED1C}"/>
-          </ac:picMkLst>
-        </pc:picChg>
       </pc:sldChg>
-      <pc:sldChg chg="addSp delSp modSp mod">
-        <pc:chgData name="Mohammed Fasha" userId="cc64f42d-a1a6-4f08-b97b-0c37f877119f" providerId="ADAL" clId="{52B7A16F-CAD0-4D4D-9F9C-A24C8678CAD7}" dt="2025-03-23T07:57:59.284" v="248" actId="113"/>
+      <pc:sldChg chg="modSp new">
+        <pc:chgData name="Mohammed Fasha" userId="S::mohammed.fasha@uop.edu.jo::cc64f42d-a1a6-4f08-b97b-0c37f877119f" providerId="AD" clId="Web-{2F52505F-0676-E1F8-3A9C-C74E2F5553F9}" dt="2025-03-23T06:06:39.452" v="17" actId="20577"/>
         <pc:sldMkLst>
           <pc:docMk/>
           <pc:sldMk cId="659685489" sldId="327"/>
         </pc:sldMkLst>
         <pc:spChg chg="mod">
-          <ac:chgData name="Mohammed Fasha" userId="cc64f42d-a1a6-4f08-b97b-0c37f877119f" providerId="ADAL" clId="{52B7A16F-CAD0-4D4D-9F9C-A24C8678CAD7}" dt="2025-03-23T07:45:22.308" v="49" actId="27636"/>
-          <ac:spMkLst>
-            <pc:docMk/>
-            <pc:sldMk cId="659685489" sldId="327"/>
-            <ac:spMk id="2" creationId="{AB3B982C-02E6-3ED4-9C3C-19BC09ADBB3B}"/>
-          </ac:spMkLst>
-        </pc:spChg>
-        <pc:spChg chg="mod">
-          <ac:chgData name="Mohammed Fasha" userId="cc64f42d-a1a6-4f08-b97b-0c37f877119f" providerId="ADAL" clId="{52B7A16F-CAD0-4D4D-9F9C-A24C8678CAD7}" dt="2025-03-23T07:57:59.284" v="248" actId="113"/>
+          <ac:chgData name="Mohammed Fasha" userId="S::mohammed.fasha@uop.edu.jo::cc64f42d-a1a6-4f08-b97b-0c37f877119f" providerId="AD" clId="Web-{2F52505F-0676-E1F8-3A9C-C74E2F5553F9}" dt="2025-03-23T06:06:39.452" v="17" actId="20577"/>
           <ac:spMkLst>
             <pc:docMk/>
             <pc:sldMk cId="659685489" sldId="327"/>
             <ac:spMk id="3" creationId="{2370F989-F40F-8A0B-AC42-50D0E7E07AEB}"/>
           </ac:spMkLst>
         </pc:spChg>
-        <pc:picChg chg="add del mod">
-          <ac:chgData name="Mohammed Fasha" userId="cc64f42d-a1a6-4f08-b97b-0c37f877119f" providerId="ADAL" clId="{52B7A16F-CAD0-4D4D-9F9C-A24C8678CAD7}" dt="2025-03-23T07:51:39.530" v="168" actId="478"/>
-          <ac:picMkLst>
-            <pc:docMk/>
-            <pc:sldMk cId="659685489" sldId="327"/>
-            <ac:picMk id="2050" creationId="{70C29FCD-9FF4-7D1E-4036-B4E46065BE85}"/>
-          </ac:picMkLst>
-        </pc:picChg>
-        <pc:picChg chg="add mod">
-          <ac:chgData name="Mohammed Fasha" userId="cc64f42d-a1a6-4f08-b97b-0c37f877119f" providerId="ADAL" clId="{52B7A16F-CAD0-4D4D-9F9C-A24C8678CAD7}" dt="2025-03-23T07:51:53.982" v="181" actId="1036"/>
-          <ac:picMkLst>
-            <pc:docMk/>
-            <pc:sldMk cId="659685489" sldId="327"/>
-            <ac:picMk id="2052" creationId="{69FD89B0-8C2D-9A2A-4508-AE34F8749789}"/>
-          </ac:picMkLst>
-        </pc:picChg>
       </pc:sldChg>
-      <pc:sldChg chg="modSp add">
-        <pc:chgData name="Mohammed Fasha" userId="cc64f42d-a1a6-4f08-b97b-0c37f877119f" providerId="ADAL" clId="{52B7A16F-CAD0-4D4D-9F9C-A24C8678CAD7}" dt="2025-03-23T08:06:38.777" v="363" actId="1035"/>
-        <pc:sldMkLst>
-          <pc:docMk/>
-          <pc:sldMk cId="932796301" sldId="328"/>
-        </pc:sldMkLst>
-        <pc:picChg chg="mod">
-          <ac:chgData name="Mohammed Fasha" userId="cc64f42d-a1a6-4f08-b97b-0c37f877119f" providerId="ADAL" clId="{52B7A16F-CAD0-4D4D-9F9C-A24C8678CAD7}" dt="2025-03-23T08:06:38.777" v="363" actId="1035"/>
-          <ac:picMkLst>
-            <pc:docMk/>
-            <pc:sldMk cId="932796301" sldId="328"/>
-            <ac:picMk id="4098" creationId="{0CAA22BE-1351-B1A5-188C-DD41EC29B52D}"/>
-          </ac:picMkLst>
-        </pc:picChg>
-      </pc:sldChg>
-      <pc:sldChg chg="addSp modSp del mod">
-        <pc:chgData name="Mohammed Fasha" userId="cc64f42d-a1a6-4f08-b97b-0c37f877119f" providerId="ADAL" clId="{52B7A16F-CAD0-4D4D-9F9C-A24C8678CAD7}" dt="2025-03-23T08:06:20.763" v="361" actId="2696"/>
+      <pc:sldChg chg="modSp new">
+        <pc:chgData name="Mohammed Fasha" userId="S::mohammed.fasha@uop.edu.jo::cc64f42d-a1a6-4f08-b97b-0c37f877119f" providerId="AD" clId="Web-{2F52505F-0676-E1F8-3A9C-C74E2F5553F9}" dt="2025-03-23T06:07:22.532" v="22" actId="20577"/>
         <pc:sldMkLst>
           <pc:docMk/>
           <pc:sldMk cId="4072578661" sldId="328"/>
         </pc:sldMkLst>
-        <pc:spChg chg="mod">
-          <ac:chgData name="Mohammed Fasha" userId="cc64f42d-a1a6-4f08-b97b-0c37f877119f" providerId="ADAL" clId="{52B7A16F-CAD0-4D4D-9F9C-A24C8678CAD7}" dt="2025-03-23T07:59:04.676" v="264" actId="20577"/>
-          <ac:spMkLst>
-            <pc:docMk/>
-            <pc:sldMk cId="4072578661" sldId="328"/>
-            <ac:spMk id="2" creationId="{3AF05E53-A460-BAD5-18F0-BA9643DE6707}"/>
-          </ac:spMkLst>
-        </pc:spChg>
-        <pc:spChg chg="mod">
-          <ac:chgData name="Mohammed Fasha" userId="cc64f42d-a1a6-4f08-b97b-0c37f877119f" providerId="ADAL" clId="{52B7A16F-CAD0-4D4D-9F9C-A24C8678CAD7}" dt="2025-03-23T08:06:00.921" v="360" actId="113"/>
-          <ac:spMkLst>
-            <pc:docMk/>
-            <pc:sldMk cId="4072578661" sldId="328"/>
-            <ac:spMk id="3" creationId="{3C3E019B-0F20-8E05-2053-6E145189E1FD}"/>
-          </ac:spMkLst>
-        </pc:spChg>
-        <pc:picChg chg="add mod">
-          <ac:chgData name="Mohammed Fasha" userId="cc64f42d-a1a6-4f08-b97b-0c37f877119f" providerId="ADAL" clId="{52B7A16F-CAD0-4D4D-9F9C-A24C8678CAD7}" dt="2025-03-23T08:04:28.286" v="350" actId="1035"/>
-          <ac:picMkLst>
-            <pc:docMk/>
-            <pc:sldMk cId="4072578661" sldId="328"/>
-            <ac:picMk id="4098" creationId="{0CAA22BE-1351-B1A5-188C-DD41EC29B52D}"/>
-          </ac:picMkLst>
-        </pc:picChg>
       </pc:sldChg>
-      <pc:sldChg chg="addSp modSp mod">
-        <pc:chgData name="Mohammed Fasha" userId="cc64f42d-a1a6-4f08-b97b-0c37f877119f" providerId="ADAL" clId="{52B7A16F-CAD0-4D4D-9F9C-A24C8678CAD7}" dt="2025-03-23T08:05:29.878" v="358" actId="14100"/>
+      <pc:sldChg chg="modSp new">
+        <pc:chgData name="Mohammed Fasha" userId="S::mohammed.fasha@uop.edu.jo::cc64f42d-a1a6-4f08-b97b-0c37f877119f" providerId="AD" clId="Web-{2F52505F-0676-E1F8-3A9C-C74E2F5553F9}" dt="2025-03-23T06:07:25.672" v="25" actId="20577"/>
         <pc:sldMkLst>
           <pc:docMk/>
           <pc:sldMk cId="3366111495" sldId="329"/>
         </pc:sldMkLst>
         <pc:spChg chg="mod">
-          <ac:chgData name="Mohammed Fasha" userId="cc64f42d-a1a6-4f08-b97b-0c37f877119f" providerId="ADAL" clId="{52B7A16F-CAD0-4D4D-9F9C-A24C8678CAD7}" dt="2025-03-23T07:56:54.852" v="238" actId="27636"/>
-          <ac:spMkLst>
-            <pc:docMk/>
-            <pc:sldMk cId="3366111495" sldId="329"/>
-            <ac:spMk id="2" creationId="{A1718324-DE08-4740-D0D9-7603BC5E0162}"/>
-          </ac:spMkLst>
-        </pc:spChg>
-        <pc:spChg chg="mod">
-          <ac:chgData name="Mohammed Fasha" userId="cc64f42d-a1a6-4f08-b97b-0c37f877119f" providerId="ADAL" clId="{52B7A16F-CAD0-4D4D-9F9C-A24C8678CAD7}" dt="2025-03-23T08:04:51.241" v="354" actId="20577"/>
+          <ac:chgData name="Mohammed Fasha" userId="S::mohammed.fasha@uop.edu.jo::cc64f42d-a1a6-4f08-b97b-0c37f877119f" providerId="AD" clId="Web-{2F52505F-0676-E1F8-3A9C-C74E2F5553F9}" dt="2025-03-23T06:07:25.672" v="25" actId="20577"/>
           <ac:spMkLst>
             <pc:docMk/>
             <pc:sldMk cId="3366111495" sldId="329"/>
             <ac:spMk id="3" creationId="{9D118BE8-48E4-84B1-F7A3-AE58B873B879}"/>
           </ac:spMkLst>
         </pc:spChg>
-        <pc:picChg chg="add mod">
-          <ac:chgData name="Mohammed Fasha" userId="cc64f42d-a1a6-4f08-b97b-0c37f877119f" providerId="ADAL" clId="{52B7A16F-CAD0-4D4D-9F9C-A24C8678CAD7}" dt="2025-03-23T08:05:29.878" v="358" actId="14100"/>
+      </pc:sldChg>
+    </pc:docChg>
+  </pc:docChgLst>
+  <pc:docChgLst>
+    <pc:chgData name="Mohammed Fasha" userId="S::mohammed.fasha@uop.edu.jo::cc64f42d-a1a6-4f08-b97b-0c37f877119f" providerId="AD" clId="Web-{411F16AF-03A3-6BA1-B79B-E9FB6FBED36A}"/>
+    <pc:docChg chg="addSld delSld modSld">
+      <pc:chgData name="Mohammed Fasha" userId="S::mohammed.fasha@uop.edu.jo::cc64f42d-a1a6-4f08-b97b-0c37f877119f" providerId="AD" clId="Web-{411F16AF-03A3-6BA1-B79B-E9FB6FBED36A}" dt="2025-03-17T05:47:39.406" v="102"/>
+      <pc:docMkLst>
+        <pc:docMk/>
+      </pc:docMkLst>
+      <pc:sldChg chg="add del">
+        <pc:chgData name="Mohammed Fasha" userId="S::mohammed.fasha@uop.edu.jo::cc64f42d-a1a6-4f08-b97b-0c37f877119f" providerId="AD" clId="Web-{411F16AF-03A3-6BA1-B79B-E9FB6FBED36A}" dt="2025-03-17T05:47:39.406" v="102"/>
+        <pc:sldMkLst>
+          <pc:docMk/>
+          <pc:sldMk cId="3262872071" sldId="267"/>
+        </pc:sldMkLst>
+      </pc:sldChg>
+      <pc:sldChg chg="addSp delSp modSp new add del">
+        <pc:chgData name="Mohammed Fasha" userId="S::mohammed.fasha@uop.edu.jo::cc64f42d-a1a6-4f08-b97b-0c37f877119f" providerId="AD" clId="Web-{411F16AF-03A3-6BA1-B79B-E9FB6FBED36A}" dt="2025-03-17T05:47:39.406" v="101"/>
+        <pc:sldMkLst>
+          <pc:docMk/>
+          <pc:sldMk cId="3133918167" sldId="304"/>
+        </pc:sldMkLst>
+      </pc:sldChg>
+      <pc:sldChg chg="addSp delSp modSp new add del">
+        <pc:chgData name="Mohammed Fasha" userId="S::mohammed.fasha@uop.edu.jo::cc64f42d-a1a6-4f08-b97b-0c37f877119f" providerId="AD" clId="Web-{411F16AF-03A3-6BA1-B79B-E9FB6FBED36A}" dt="2025-03-17T05:47:39.406" v="100"/>
+        <pc:sldMkLst>
+          <pc:docMk/>
+          <pc:sldMk cId="3673227071" sldId="305"/>
+        </pc:sldMkLst>
+      </pc:sldChg>
+    </pc:docChg>
+  </pc:docChgLst>
+  <pc:docChgLst>
+    <pc:chgData name="Mohammed Fasha" userId="S::mohammed.fasha@uop.edu.jo::cc64f42d-a1a6-4f08-b97b-0c37f877119f" providerId="AD" clId="Web-{CFB52BA1-027E-4A5C-51C2-A494885CE8B6}"/>
+    <pc:docChg chg="addSld delSld modSld">
+      <pc:chgData name="Mohammed Fasha" userId="S::mohammed.fasha@uop.edu.jo::cc64f42d-a1a6-4f08-b97b-0c37f877119f" providerId="AD" clId="Web-{CFB52BA1-027E-4A5C-51C2-A494885CE8B6}" dt="2025-03-16T14:45:18.235" v="45" actId="1076"/>
+      <pc:docMkLst>
+        <pc:docMk/>
+      </pc:docMkLst>
+      <pc:sldChg chg="modSp">
+        <pc:chgData name="Mohammed Fasha" userId="S::mohammed.fasha@uop.edu.jo::cc64f42d-a1a6-4f08-b97b-0c37f877119f" providerId="AD" clId="Web-{CFB52BA1-027E-4A5C-51C2-A494885CE8B6}" dt="2025-03-16T14:45:05.391" v="43" actId="1076"/>
+        <pc:sldMkLst>
+          <pc:docMk/>
+          <pc:sldMk cId="0" sldId="269"/>
+        </pc:sldMkLst>
+      </pc:sldChg>
+      <pc:sldChg chg="modSp">
+        <pc:chgData name="Mohammed Fasha" userId="S::mohammed.fasha@uop.edu.jo::cc64f42d-a1a6-4f08-b97b-0c37f877119f" providerId="AD" clId="Web-{CFB52BA1-027E-4A5C-51C2-A494885CE8B6}" dt="2025-03-16T14:45:18.235" v="45" actId="1076"/>
+        <pc:sldMkLst>
+          <pc:docMk/>
+          <pc:sldMk cId="0" sldId="270"/>
+        </pc:sldMkLst>
+        <pc:picChg chg="mod">
+          <ac:chgData name="Mohammed Fasha" userId="S::mohammed.fasha@uop.edu.jo::cc64f42d-a1a6-4f08-b97b-0c37f877119f" providerId="AD" clId="Web-{CFB52BA1-027E-4A5C-51C2-A494885CE8B6}" dt="2025-03-16T14:45:18.235" v="45" actId="1076"/>
           <ac:picMkLst>
             <pc:docMk/>
-            <pc:sldMk cId="3366111495" sldId="329"/>
-            <ac:picMk id="5122" creationId="{9029A929-644F-B232-0F2F-8E746CA5A374}"/>
+            <pc:sldMk cId="0" sldId="270"/>
+            <ac:picMk id="15" creationId="{4E22367B-B754-648E-0B22-AC55F28E1729}"/>
+          </ac:picMkLst>
+        </pc:picChg>
+      </pc:sldChg>
+      <pc:sldChg chg="modSp">
+        <pc:chgData name="Mohammed Fasha" userId="S::mohammed.fasha@uop.edu.jo::cc64f42d-a1a6-4f08-b97b-0c37f877119f" providerId="AD" clId="Web-{CFB52BA1-027E-4A5C-51C2-A494885CE8B6}" dt="2025-03-16T14:44:57.469" v="42" actId="20577"/>
+        <pc:sldMkLst>
+          <pc:docMk/>
+          <pc:sldMk cId="0" sldId="272"/>
+        </pc:sldMkLst>
+        <pc:spChg chg="mod">
+          <ac:chgData name="Mohammed Fasha" userId="S::mohammed.fasha@uop.edu.jo::cc64f42d-a1a6-4f08-b97b-0c37f877119f" providerId="AD" clId="Web-{CFB52BA1-027E-4A5C-51C2-A494885CE8B6}" dt="2025-03-16T14:44:57.469" v="42" actId="20577"/>
+          <ac:spMkLst>
+            <pc:docMk/>
+            <pc:sldMk cId="0" sldId="272"/>
+            <ac:spMk id="2" creationId="{00000000-0000-0000-0000-000000000000}"/>
+          </ac:spMkLst>
+        </pc:spChg>
+      </pc:sldChg>
+      <pc:sldChg chg="modSp">
+        <pc:chgData name="Mohammed Fasha" userId="S::mohammed.fasha@uop.edu.jo::cc64f42d-a1a6-4f08-b97b-0c37f877119f" providerId="AD" clId="Web-{CFB52BA1-027E-4A5C-51C2-A494885CE8B6}" dt="2025-03-16T14:44:48.500" v="41" actId="14100"/>
+        <pc:sldMkLst>
+          <pc:docMk/>
+          <pc:sldMk cId="0" sldId="274"/>
+        </pc:sldMkLst>
+        <pc:spChg chg="mod">
+          <ac:chgData name="Mohammed Fasha" userId="S::mohammed.fasha@uop.edu.jo::cc64f42d-a1a6-4f08-b97b-0c37f877119f" providerId="AD" clId="Web-{CFB52BA1-027E-4A5C-51C2-A494885CE8B6}" dt="2025-03-16T14:44:48.500" v="41" actId="14100"/>
+          <ac:spMkLst>
+            <pc:docMk/>
+            <pc:sldMk cId="0" sldId="274"/>
+            <ac:spMk id="7" creationId="{CF4277E2-2BAC-D76F-20C6-A50B542D2495}"/>
+          </ac:spMkLst>
+        </pc:spChg>
+      </pc:sldChg>
+      <pc:sldChg chg="addSp delSp modSp del">
+        <pc:chgData name="Mohammed Fasha" userId="S::mohammed.fasha@uop.edu.jo::cc64f42d-a1a6-4f08-b97b-0c37f877119f" providerId="AD" clId="Web-{CFB52BA1-027E-4A5C-51C2-A494885CE8B6}" dt="2025-03-16T14:44:02.201" v="36"/>
+        <pc:sldMkLst>
+          <pc:docMk/>
+          <pc:sldMk cId="3476611510" sldId="290"/>
+        </pc:sldMkLst>
+      </pc:sldChg>
+      <pc:sldChg chg="addSp delSp modSp new">
+        <pc:chgData name="Mohammed Fasha" userId="S::mohammed.fasha@uop.edu.jo::cc64f42d-a1a6-4f08-b97b-0c37f877119f" providerId="AD" clId="Web-{CFB52BA1-027E-4A5C-51C2-A494885CE8B6}" dt="2025-03-16T14:42:40.261" v="8" actId="20577"/>
+        <pc:sldMkLst>
+          <pc:docMk/>
+          <pc:sldMk cId="1663389758" sldId="302"/>
+        </pc:sldMkLst>
+      </pc:sldChg>
+      <pc:sldChg chg="addSp modSp new">
+        <pc:chgData name="Mohammed Fasha" userId="S::mohammed.fasha@uop.edu.jo::cc64f42d-a1a6-4f08-b97b-0c37f877119f" providerId="AD" clId="Web-{CFB52BA1-027E-4A5C-51C2-A494885CE8B6}" dt="2025-03-16T14:44:23.343" v="40" actId="1076"/>
+        <pc:sldMkLst>
+          <pc:docMk/>
+          <pc:sldMk cId="3053666628" sldId="303"/>
+        </pc:sldMkLst>
+      </pc:sldChg>
+    </pc:docChg>
+  </pc:docChgLst>
+  <pc:docChgLst>
+    <pc:chgData name="Mohammed Fasha" userId="cc64f42d-a1a6-4f08-b97b-0c37f877119f" providerId="ADAL" clId="{33A44248-7984-4750-8CBD-503C66D5F8B6}"/>
+    <pc:docChg chg="custSel addSld modSld">
+      <pc:chgData name="Mohammed Fasha" userId="cc64f42d-a1a6-4f08-b97b-0c37f877119f" providerId="ADAL" clId="{33A44248-7984-4750-8CBD-503C66D5F8B6}" dt="2025-03-05T09:13:55.803" v="21" actId="1076"/>
+      <pc:docMkLst>
+        <pc:docMk/>
+      </pc:docMkLst>
+      <pc:sldChg chg="addSp delSp modSp add">
+        <pc:chgData name="Mohammed Fasha" userId="cc64f42d-a1a6-4f08-b97b-0c37f877119f" providerId="ADAL" clId="{33A44248-7984-4750-8CBD-503C66D5F8B6}" dt="2025-03-05T09:13:55.803" v="21" actId="1076"/>
+        <pc:sldMkLst>
+          <pc:docMk/>
+          <pc:sldMk cId="2982934387" sldId="520"/>
+        </pc:sldMkLst>
+      </pc:sldChg>
+    </pc:docChg>
+  </pc:docChgLst>
+  <pc:docChgLst>
+    <pc:chgData name="Mohammed Fasha" userId="S::mohammed.fasha@uop.edu.jo::cc64f42d-a1a6-4f08-b97b-0c37f877119f" providerId="AD" clId="Web-{37180445-8C36-3D61-B421-DE7B4B97BDB9}"/>
+    <pc:docChg chg="addSld delSld modSld sldOrd">
+      <pc:chgData name="Mohammed Fasha" userId="S::mohammed.fasha@uop.edu.jo::cc64f42d-a1a6-4f08-b97b-0c37f877119f" providerId="AD" clId="Web-{37180445-8C36-3D61-B421-DE7B4B97BDB9}" dt="2025-03-19T03:36:22.093" v="327" actId="1076"/>
+      <pc:docMkLst>
+        <pc:docMk/>
+      </pc:docMkLst>
+      <pc:sldChg chg="modSp">
+        <pc:chgData name="Mohammed Fasha" userId="S::mohammed.fasha@uop.edu.jo::cc64f42d-a1a6-4f08-b97b-0c37f877119f" providerId="AD" clId="Web-{37180445-8C36-3D61-B421-DE7B4B97BDB9}" dt="2025-03-19T03:30:37.066" v="274" actId="20577"/>
+        <pc:sldMkLst>
+          <pc:docMk/>
+          <pc:sldMk cId="0" sldId="276"/>
+        </pc:sldMkLst>
+      </pc:sldChg>
+      <pc:sldChg chg="modSp ord">
+        <pc:chgData name="Mohammed Fasha" userId="S::mohammed.fasha@uop.edu.jo::cc64f42d-a1a6-4f08-b97b-0c37f877119f" providerId="AD" clId="Web-{37180445-8C36-3D61-B421-DE7B4B97BDB9}" dt="2025-03-19T03:26:50.183" v="239" actId="20577"/>
+        <pc:sldMkLst>
+          <pc:docMk/>
+          <pc:sldMk cId="0" sldId="278"/>
+        </pc:sldMkLst>
+        <pc:spChg chg="mod">
+          <ac:chgData name="Mohammed Fasha" userId="S::mohammed.fasha@uop.edu.jo::cc64f42d-a1a6-4f08-b97b-0c37f877119f" providerId="AD" clId="Web-{37180445-8C36-3D61-B421-DE7B4B97BDB9}" dt="2025-03-19T03:26:50.183" v="239" actId="20577"/>
+          <ac:spMkLst>
+            <pc:docMk/>
+            <pc:sldMk cId="0" sldId="278"/>
+            <ac:spMk id="6" creationId="{81843AE0-4921-7733-0D3B-33D489EDB8CC}"/>
+          </ac:spMkLst>
+        </pc:spChg>
+      </pc:sldChg>
+      <pc:sldChg chg="modSp">
+        <pc:chgData name="Mohammed Fasha" userId="S::mohammed.fasha@uop.edu.jo::cc64f42d-a1a6-4f08-b97b-0c37f877119f" providerId="AD" clId="Web-{37180445-8C36-3D61-B421-DE7B4B97BDB9}" dt="2025-03-19T03:19:09.496" v="127" actId="20577"/>
+        <pc:sldMkLst>
+          <pc:docMk/>
+          <pc:sldMk cId="0" sldId="280"/>
+        </pc:sldMkLst>
+        <pc:spChg chg="mod">
+          <ac:chgData name="Mohammed Fasha" userId="S::mohammed.fasha@uop.edu.jo::cc64f42d-a1a6-4f08-b97b-0c37f877119f" providerId="AD" clId="Web-{37180445-8C36-3D61-B421-DE7B4B97BDB9}" dt="2025-03-19T03:19:09.496" v="127" actId="20577"/>
+          <ac:spMkLst>
+            <pc:docMk/>
+            <pc:sldMk cId="0" sldId="280"/>
+            <ac:spMk id="6" creationId="{CC4C1BC0-7E6B-75C8-0965-79DE721E7639}"/>
+          </ac:spMkLst>
+        </pc:spChg>
+      </pc:sldChg>
+      <pc:sldChg chg="addSp modSp">
+        <pc:chgData name="Mohammed Fasha" userId="S::mohammed.fasha@uop.edu.jo::cc64f42d-a1a6-4f08-b97b-0c37f877119f" providerId="AD" clId="Web-{37180445-8C36-3D61-B421-DE7B4B97BDB9}" dt="2025-03-19T03:21:50.361" v="182" actId="20577"/>
+        <pc:sldMkLst>
+          <pc:docMk/>
+          <pc:sldMk cId="441052949" sldId="309"/>
+        </pc:sldMkLst>
+      </pc:sldChg>
+      <pc:sldChg chg="addSp delSp modSp add del replId">
+        <pc:chgData name="Mohammed Fasha" userId="S::mohammed.fasha@uop.edu.jo::cc64f42d-a1a6-4f08-b97b-0c37f877119f" providerId="AD" clId="Web-{37180445-8C36-3D61-B421-DE7B4B97BDB9}" dt="2025-03-19T03:17:37.368" v="121"/>
+        <pc:sldMkLst>
+          <pc:docMk/>
+          <pc:sldMk cId="1021713399" sldId="312"/>
+        </pc:sldMkLst>
+      </pc:sldChg>
+      <pc:sldChg chg="addSp modSp new">
+        <pc:chgData name="Mohammed Fasha" userId="S::mohammed.fasha@uop.edu.jo::cc64f42d-a1a6-4f08-b97b-0c37f877119f" providerId="AD" clId="Web-{37180445-8C36-3D61-B421-DE7B4B97BDB9}" dt="2025-03-19T03:24:21.850" v="219" actId="20577"/>
+        <pc:sldMkLst>
+          <pc:docMk/>
+          <pc:sldMk cId="1008151712" sldId="313"/>
+        </pc:sldMkLst>
+      </pc:sldChg>
+      <pc:sldChg chg="addSp delSp modSp new">
+        <pc:chgData name="Mohammed Fasha" userId="S::mohammed.fasha@uop.edu.jo::cc64f42d-a1a6-4f08-b97b-0c37f877119f" providerId="AD" clId="Web-{37180445-8C36-3D61-B421-DE7B4B97BDB9}" dt="2025-03-19T03:31:22.739" v="283" actId="20577"/>
+        <pc:sldMkLst>
+          <pc:docMk/>
+          <pc:sldMk cId="618074235" sldId="314"/>
+        </pc:sldMkLst>
+      </pc:sldChg>
+      <pc:sldChg chg="addSp modSp new">
+        <pc:chgData name="Mohammed Fasha" userId="S::mohammed.fasha@uop.edu.jo::cc64f42d-a1a6-4f08-b97b-0c37f877119f" providerId="AD" clId="Web-{37180445-8C36-3D61-B421-DE7B4B97BDB9}" dt="2025-03-19T03:36:22.093" v="327" actId="1076"/>
+        <pc:sldMkLst>
+          <pc:docMk/>
+          <pc:sldMk cId="22495289" sldId="315"/>
+        </pc:sldMkLst>
+      </pc:sldChg>
+    </pc:docChg>
+  </pc:docChgLst>
+  <pc:docChgLst>
+    <pc:chgData name="Mohammed Fasha" userId="S::mohammed.fasha@uop.edu.jo::cc64f42d-a1a6-4f08-b97b-0c37f877119f" providerId="AD" clId="Web-{201C7D42-1F1C-B7C2-DD80-837CD0925F1E}"/>
+    <pc:docChg chg="addSld delSld modSld">
+      <pc:chgData name="Mohammed Fasha" userId="S::mohammed.fasha@uop.edu.jo::cc64f42d-a1a6-4f08-b97b-0c37f877119f" providerId="AD" clId="Web-{201C7D42-1F1C-B7C2-DD80-837CD0925F1E}" dt="2025-03-23T12:36:34.651" v="413" actId="1076"/>
+      <pc:docMkLst>
+        <pc:docMk/>
+      </pc:docMkLst>
+      <pc:sldChg chg="addSp modSp">
+        <pc:chgData name="Mohammed Fasha" userId="S::mohammed.fasha@uop.edu.jo::cc64f42d-a1a6-4f08-b97b-0c37f877119f" providerId="AD" clId="Web-{201C7D42-1F1C-B7C2-DD80-837CD0925F1E}" dt="2025-03-23T12:35:02.129" v="388" actId="14100"/>
+        <pc:sldMkLst>
+          <pc:docMk/>
+          <pc:sldMk cId="0" sldId="272"/>
+        </pc:sldMkLst>
+        <pc:spChg chg="mod">
+          <ac:chgData name="Mohammed Fasha" userId="S::mohammed.fasha@uop.edu.jo::cc64f42d-a1a6-4f08-b97b-0c37f877119f" providerId="AD" clId="Web-{201C7D42-1F1C-B7C2-DD80-837CD0925F1E}" dt="2025-03-23T12:32:41.442" v="332" actId="20577"/>
+          <ac:spMkLst>
+            <pc:docMk/>
+            <pc:sldMk cId="0" sldId="272"/>
+            <ac:spMk id="7" creationId="{BD008676-47C8-D88A-CD4A-65BB83D57162}"/>
+          </ac:spMkLst>
+        </pc:spChg>
+        <pc:spChg chg="add mod">
+          <ac:chgData name="Mohammed Fasha" userId="S::mohammed.fasha@uop.edu.jo::cc64f42d-a1a6-4f08-b97b-0c37f877119f" providerId="AD" clId="Web-{201C7D42-1F1C-B7C2-DD80-837CD0925F1E}" dt="2025-03-23T12:35:02.129" v="388" actId="14100"/>
+          <ac:spMkLst>
+            <pc:docMk/>
+            <pc:sldMk cId="0" sldId="272"/>
+            <ac:spMk id="8" creationId="{98B7FB4A-DB0E-01C4-3C0E-032767DA24F4}"/>
+          </ac:spMkLst>
+        </pc:spChg>
+      </pc:sldChg>
+      <pc:sldChg chg="modSp">
+        <pc:chgData name="Mohammed Fasha" userId="S::mohammed.fasha@uop.edu.jo::cc64f42d-a1a6-4f08-b97b-0c37f877119f" providerId="AD" clId="Web-{201C7D42-1F1C-B7C2-DD80-837CD0925F1E}" dt="2025-03-23T12:36:34.651" v="413" actId="1076"/>
+        <pc:sldMkLst>
+          <pc:docMk/>
+          <pc:sldMk cId="0" sldId="274"/>
+        </pc:sldMkLst>
+        <pc:spChg chg="mod">
+          <ac:chgData name="Mohammed Fasha" userId="S::mohammed.fasha@uop.edu.jo::cc64f42d-a1a6-4f08-b97b-0c37f877119f" providerId="AD" clId="Web-{201C7D42-1F1C-B7C2-DD80-837CD0925F1E}" dt="2025-03-23T12:36:31.432" v="411" actId="20577"/>
+          <ac:spMkLst>
+            <pc:docMk/>
+            <pc:sldMk cId="0" sldId="274"/>
+            <ac:spMk id="7" creationId="{CF4277E2-2BAC-D76F-20C6-A50B542D2495}"/>
+          </ac:spMkLst>
+        </pc:spChg>
+        <pc:picChg chg="mod">
+          <ac:chgData name="Mohammed Fasha" userId="S::mohammed.fasha@uop.edu.jo::cc64f42d-a1a6-4f08-b97b-0c37f877119f" providerId="AD" clId="Web-{201C7D42-1F1C-B7C2-DD80-837CD0925F1E}" dt="2025-03-23T12:36:34.651" v="413" actId="1076"/>
+          <ac:picMkLst>
+            <pc:docMk/>
+            <pc:sldMk cId="0" sldId="274"/>
+            <ac:picMk id="4" creationId="{00000000-0000-0000-0000-000000000000}"/>
+          </ac:picMkLst>
+        </pc:picChg>
+      </pc:sldChg>
+      <pc:sldChg chg="addSp delSp modSp del">
+        <pc:chgData name="Mohammed Fasha" userId="S::mohammed.fasha@uop.edu.jo::cc64f42d-a1a6-4f08-b97b-0c37f877119f" providerId="AD" clId="Web-{201C7D42-1F1C-B7C2-DD80-837CD0925F1E}" dt="2025-03-23T12:33:44.545" v="354"/>
+        <pc:sldMkLst>
+          <pc:docMk/>
+          <pc:sldMk cId="414281864" sldId="320"/>
+        </pc:sldMkLst>
+      </pc:sldChg>
+      <pc:sldChg chg="addSp delSp modSp">
+        <pc:chgData name="Mohammed Fasha" userId="S::mohammed.fasha@uop.edu.jo::cc64f42d-a1a6-4f08-b97b-0c37f877119f" providerId="AD" clId="Web-{201C7D42-1F1C-B7C2-DD80-837CD0925F1E}" dt="2025-03-23T12:32:06.408" v="330"/>
+        <pc:sldMkLst>
+          <pc:docMk/>
+          <pc:sldMk cId="2158520731" sldId="321"/>
+        </pc:sldMkLst>
+        <pc:spChg chg="mod">
+          <ac:chgData name="Mohammed Fasha" userId="S::mohammed.fasha@uop.edu.jo::cc64f42d-a1a6-4f08-b97b-0c37f877119f" providerId="AD" clId="Web-{201C7D42-1F1C-B7C2-DD80-837CD0925F1E}" dt="2025-03-23T12:29:56.352" v="245" actId="14100"/>
+          <ac:spMkLst>
+            <pc:docMk/>
+            <pc:sldMk cId="2158520731" sldId="321"/>
+            <ac:spMk id="2" creationId="{2CBE9B8D-9BCA-A077-FC54-F37DD1ED5A43}"/>
+          </ac:spMkLst>
+        </pc:spChg>
+        <pc:spChg chg="mod">
+          <ac:chgData name="Mohammed Fasha" userId="S::mohammed.fasha@uop.edu.jo::cc64f42d-a1a6-4f08-b97b-0c37f877119f" providerId="AD" clId="Web-{201C7D42-1F1C-B7C2-DD80-837CD0925F1E}" dt="2025-03-23T12:31:01.716" v="274" actId="14100"/>
+          <ac:spMkLst>
+            <pc:docMk/>
+            <pc:sldMk cId="2158520731" sldId="321"/>
+            <ac:spMk id="6" creationId="{5CB15C33-8731-2AC8-2AA9-CC56BB604532}"/>
+          </ac:spMkLst>
+        </pc:spChg>
+        <pc:graphicFrameChg chg="mod modGraphic">
+          <ac:chgData name="Mohammed Fasha" userId="S::mohammed.fasha@uop.edu.jo::cc64f42d-a1a6-4f08-b97b-0c37f877119f" providerId="AD" clId="Web-{201C7D42-1F1C-B7C2-DD80-837CD0925F1E}" dt="2025-03-23T12:32:06.408" v="330"/>
+          <ac:graphicFrameMkLst>
+            <pc:docMk/>
+            <pc:sldMk cId="2158520731" sldId="321"/>
+            <ac:graphicFrameMk id="14" creationId="{68F65CD9-04AE-694C-CAF9-ABB6912D588B}"/>
+          </ac:graphicFrameMkLst>
+        </pc:graphicFrameChg>
+      </pc:sldChg>
+      <pc:sldChg chg="addSp delSp modSp">
+        <pc:chgData name="Mohammed Fasha" userId="S::mohammed.fasha@uop.edu.jo::cc64f42d-a1a6-4f08-b97b-0c37f877119f" providerId="AD" clId="Web-{201C7D42-1F1C-B7C2-DD80-837CD0925F1E}" dt="2025-03-23T12:20:46.326" v="64"/>
+        <pc:sldMkLst>
+          <pc:docMk/>
+          <pc:sldMk cId="323566195" sldId="323"/>
+        </pc:sldMkLst>
+        <pc:spChg chg="mod">
+          <ac:chgData name="Mohammed Fasha" userId="S::mohammed.fasha@uop.edu.jo::cc64f42d-a1a6-4f08-b97b-0c37f877119f" providerId="AD" clId="Web-{201C7D42-1F1C-B7C2-DD80-837CD0925F1E}" dt="2025-03-23T12:18:05.517" v="7" actId="20577"/>
+          <ac:spMkLst>
+            <pc:docMk/>
+            <pc:sldMk cId="323566195" sldId="323"/>
+            <ac:spMk id="2" creationId="{595498DF-D91B-3039-6A35-B1D5FAB6D692}"/>
+          </ac:spMkLst>
+        </pc:spChg>
+        <pc:graphicFrameChg chg="mod modGraphic">
+          <ac:chgData name="Mohammed Fasha" userId="S::mohammed.fasha@uop.edu.jo::cc64f42d-a1a6-4f08-b97b-0c37f877119f" providerId="AD" clId="Web-{201C7D42-1F1C-B7C2-DD80-837CD0925F1E}" dt="2025-03-23T12:20:46.326" v="64"/>
+          <ac:graphicFrameMkLst>
+            <pc:docMk/>
+            <pc:sldMk cId="323566195" sldId="323"/>
+            <ac:graphicFrameMk id="82" creationId="{135E2F87-A441-0139-1576-BC186FCA12A1}"/>
+          </ac:graphicFrameMkLst>
+        </pc:graphicFrameChg>
+      </pc:sldChg>
+      <pc:sldChg chg="modSp">
+        <pc:chgData name="Mohammed Fasha" userId="S::mohammed.fasha@uop.edu.jo::cc64f42d-a1a6-4f08-b97b-0c37f877119f" providerId="AD" clId="Web-{201C7D42-1F1C-B7C2-DD80-837CD0925F1E}" dt="2025-03-23T12:19:03.928" v="15" actId="20577"/>
+        <pc:sldMkLst>
+          <pc:docMk/>
+          <pc:sldMk cId="2802975669" sldId="324"/>
+        </pc:sldMkLst>
+        <pc:spChg chg="mod">
+          <ac:chgData name="Mohammed Fasha" userId="S::mohammed.fasha@uop.edu.jo::cc64f42d-a1a6-4f08-b97b-0c37f877119f" providerId="AD" clId="Web-{201C7D42-1F1C-B7C2-DD80-837CD0925F1E}" dt="2025-03-23T12:19:03.928" v="15" actId="20577"/>
+          <ac:spMkLst>
+            <pc:docMk/>
+            <pc:sldMk cId="2802975669" sldId="324"/>
+            <ac:spMk id="2" creationId="{DD28BFAD-F7FC-EB4E-DB73-D0B4611BA46D}"/>
+          </ac:spMkLst>
+        </pc:spChg>
+      </pc:sldChg>
+      <pc:sldChg chg="modSp">
+        <pc:chgData name="Mohammed Fasha" userId="S::mohammed.fasha@uop.edu.jo::cc64f42d-a1a6-4f08-b97b-0c37f877119f" providerId="AD" clId="Web-{201C7D42-1F1C-B7C2-DD80-837CD0925F1E}" dt="2025-03-23T12:27:29.419" v="215" actId="20577"/>
+        <pc:sldMkLst>
+          <pc:docMk/>
+          <pc:sldMk cId="932796301" sldId="328"/>
+        </pc:sldMkLst>
+        <pc:spChg chg="mod">
+          <ac:chgData name="Mohammed Fasha" userId="S::mohammed.fasha@uop.edu.jo::cc64f42d-a1a6-4f08-b97b-0c37f877119f" providerId="AD" clId="Web-{201C7D42-1F1C-B7C2-DD80-837CD0925F1E}" dt="2025-03-23T12:27:29.419" v="215" actId="20577"/>
+          <ac:spMkLst>
+            <pc:docMk/>
+            <pc:sldMk cId="932796301" sldId="328"/>
+            <ac:spMk id="3" creationId="{3C3E019B-0F20-8E05-2053-6E145189E1FD}"/>
+          </ac:spMkLst>
+        </pc:spChg>
+      </pc:sldChg>
+      <pc:sldChg chg="addSp delSp modSp new del">
+        <pc:chgData name="Mohammed Fasha" userId="S::mohammed.fasha@uop.edu.jo::cc64f42d-a1a6-4f08-b97b-0c37f877119f" providerId="AD" clId="Web-{201C7D42-1F1C-B7C2-DD80-837CD0925F1E}" dt="2025-03-23T12:23:37.245" v="125"/>
+        <pc:sldMkLst>
+          <pc:docMk/>
+          <pc:sldMk cId="704117908" sldId="331"/>
+        </pc:sldMkLst>
+      </pc:sldChg>
+      <pc:sldChg chg="modSp new">
+        <pc:chgData name="Mohammed Fasha" userId="S::mohammed.fasha@uop.edu.jo::cc64f42d-a1a6-4f08-b97b-0c37f877119f" providerId="AD" clId="Web-{201C7D42-1F1C-B7C2-DD80-837CD0925F1E}" dt="2025-03-23T12:23:26.354" v="123" actId="20577"/>
+        <pc:sldMkLst>
+          <pc:docMk/>
+          <pc:sldMk cId="2684285518" sldId="332"/>
+        </pc:sldMkLst>
+        <pc:spChg chg="mod">
+          <ac:chgData name="Mohammed Fasha" userId="S::mohammed.fasha@uop.edu.jo::cc64f42d-a1a6-4f08-b97b-0c37f877119f" providerId="AD" clId="Web-{201C7D42-1F1C-B7C2-DD80-837CD0925F1E}" dt="2025-03-23T12:23:26.354" v="123" actId="20577"/>
+          <ac:spMkLst>
+            <pc:docMk/>
+            <pc:sldMk cId="2684285518" sldId="332"/>
+            <ac:spMk id="2" creationId="{7B835121-B141-7218-B42D-1A517809491F}"/>
+          </ac:spMkLst>
+        </pc:spChg>
+        <pc:spChg chg="mod">
+          <ac:chgData name="Mohammed Fasha" userId="S::mohammed.fasha@uop.edu.jo::cc64f42d-a1a6-4f08-b97b-0c37f877119f" providerId="AD" clId="Web-{201C7D42-1F1C-B7C2-DD80-837CD0925F1E}" dt="2025-03-23T12:22:57.508" v="76" actId="20577"/>
+          <ac:spMkLst>
+            <pc:docMk/>
+            <pc:sldMk cId="2684285518" sldId="332"/>
+            <ac:spMk id="3" creationId="{0173D824-DE25-C32C-01F2-97287FB39040}"/>
+          </ac:spMkLst>
+        </pc:spChg>
+      </pc:sldChg>
+      <pc:sldChg chg="addSp delSp modSp new">
+        <pc:chgData name="Mohammed Fasha" userId="S::mohammed.fasha@uop.edu.jo::cc64f42d-a1a6-4f08-b97b-0c37f877119f" providerId="AD" clId="Web-{201C7D42-1F1C-B7C2-DD80-837CD0925F1E}" dt="2025-03-23T12:26:17.070" v="197" actId="20577"/>
+        <pc:sldMkLst>
+          <pc:docMk/>
+          <pc:sldMk cId="2087539751" sldId="333"/>
+        </pc:sldMkLst>
+        <pc:spChg chg="mod">
+          <ac:chgData name="Mohammed Fasha" userId="S::mohammed.fasha@uop.edu.jo::cc64f42d-a1a6-4f08-b97b-0c37f877119f" providerId="AD" clId="Web-{201C7D42-1F1C-B7C2-DD80-837CD0925F1E}" dt="2025-03-23T12:24:12.935" v="170" actId="20577"/>
+          <ac:spMkLst>
+            <pc:docMk/>
+            <pc:sldMk cId="2087539751" sldId="333"/>
+            <ac:spMk id="2" creationId="{32D77BF8-9EB6-EB2A-6FCA-BB3FE543BA98}"/>
+          </ac:spMkLst>
+        </pc:spChg>
+        <pc:spChg chg="add mod">
+          <ac:chgData name="Mohammed Fasha" userId="S::mohammed.fasha@uop.edu.jo::cc64f42d-a1a6-4f08-b97b-0c37f877119f" providerId="AD" clId="Web-{201C7D42-1F1C-B7C2-DD80-837CD0925F1E}" dt="2025-03-23T12:26:17.070" v="197" actId="20577"/>
+          <ac:spMkLst>
+            <pc:docMk/>
+            <pc:sldMk cId="2087539751" sldId="333"/>
+            <ac:spMk id="7" creationId="{0A67F442-A4EE-C664-5810-41DD02FE24D6}"/>
+          </ac:spMkLst>
+        </pc:spChg>
+        <pc:graphicFrameChg chg="add mod ord modGraphic">
+          <ac:chgData name="Mohammed Fasha" userId="S::mohammed.fasha@uop.edu.jo::cc64f42d-a1a6-4f08-b97b-0c37f877119f" providerId="AD" clId="Web-{201C7D42-1F1C-B7C2-DD80-837CD0925F1E}" dt="2025-03-23T12:24:34.874" v="183"/>
+          <ac:graphicFrameMkLst>
+            <pc:docMk/>
+            <pc:sldMk cId="2087539751" sldId="333"/>
+            <ac:graphicFrameMk id="5" creationId="{B49131E5-D272-CD58-3F5C-9B41C4487AEC}"/>
+          </ac:graphicFrameMkLst>
+        </pc:graphicFrameChg>
+      </pc:sldChg>
+      <pc:sldChg chg="modSp new mod modClrScheme chgLayout">
+        <pc:chgData name="Mohammed Fasha" userId="S::mohammed.fasha@uop.edu.jo::cc64f42d-a1a6-4f08-b97b-0c37f877119f" providerId="AD" clId="Web-{201C7D42-1F1C-B7C2-DD80-837CD0925F1E}" dt="2025-03-23T12:26:54.182" v="201" actId="20577"/>
+        <pc:sldMkLst>
+          <pc:docMk/>
+          <pc:sldMk cId="2275966120" sldId="334"/>
+        </pc:sldMkLst>
+        <pc:spChg chg="mod ord">
+          <ac:chgData name="Mohammed Fasha" userId="S::mohammed.fasha@uop.edu.jo::cc64f42d-a1a6-4f08-b97b-0c37f877119f" providerId="AD" clId="Web-{201C7D42-1F1C-B7C2-DD80-837CD0925F1E}" dt="2025-03-23T12:26:54.182" v="201" actId="20577"/>
+          <ac:spMkLst>
+            <pc:docMk/>
+            <pc:sldMk cId="2275966120" sldId="334"/>
+            <ac:spMk id="2" creationId="{C1CCCE25-35C5-F8C2-93F3-75E6F478CF44}"/>
+          </ac:spMkLst>
+        </pc:spChg>
+        <pc:spChg chg="mod ord">
+          <ac:chgData name="Mohammed Fasha" userId="S::mohammed.fasha@uop.edu.jo::cc64f42d-a1a6-4f08-b97b-0c37f877119f" providerId="AD" clId="Web-{201C7D42-1F1C-B7C2-DD80-837CD0925F1E}" dt="2025-03-23T12:26:50.010" v="199"/>
+          <ac:spMkLst>
+            <pc:docMk/>
+            <pc:sldMk cId="2275966120" sldId="334"/>
+            <ac:spMk id="3" creationId="{502C69CE-4637-39A9-33A6-B5CFBD5A58A9}"/>
+          </ac:spMkLst>
+        </pc:spChg>
+      </pc:sldChg>
+      <pc:sldChg chg="addSp modSp new">
+        <pc:chgData name="Mohammed Fasha" userId="S::mohammed.fasha@uop.edu.jo::cc64f42d-a1a6-4f08-b97b-0c37f877119f" providerId="AD" clId="Web-{201C7D42-1F1C-B7C2-DD80-837CD0925F1E}" dt="2025-03-23T12:34:23.220" v="365" actId="1076"/>
+        <pc:sldMkLst>
+          <pc:docMk/>
+          <pc:sldMk cId="4251754830" sldId="335"/>
+        </pc:sldMkLst>
+        <pc:spChg chg="mod">
+          <ac:chgData name="Mohammed Fasha" userId="S::mohammed.fasha@uop.edu.jo::cc64f42d-a1a6-4f08-b97b-0c37f877119f" providerId="AD" clId="Web-{201C7D42-1F1C-B7C2-DD80-837CD0925F1E}" dt="2025-03-23T12:34:05.656" v="361" actId="14100"/>
+          <ac:spMkLst>
+            <pc:docMk/>
+            <pc:sldMk cId="4251754830" sldId="335"/>
+            <ac:spMk id="2" creationId="{880BEA05-F32B-B175-AA7B-47CBCB32C4E0}"/>
+          </ac:spMkLst>
+        </pc:spChg>
+        <pc:spChg chg="mod">
+          <ac:chgData name="Mohammed Fasha" userId="S::mohammed.fasha@uop.edu.jo::cc64f42d-a1a6-4f08-b97b-0c37f877119f" providerId="AD" clId="Web-{201C7D42-1F1C-B7C2-DD80-837CD0925F1E}" dt="2025-03-23T12:33:56.639" v="360" actId="14100"/>
+          <ac:spMkLst>
+            <pc:docMk/>
+            <pc:sldMk cId="4251754830" sldId="335"/>
+            <ac:spMk id="3" creationId="{1821722D-3CE7-874F-C927-A9A7BB997821}"/>
+          </ac:spMkLst>
+        </pc:spChg>
+        <pc:picChg chg="add mod">
+          <ac:chgData name="Mohammed Fasha" userId="S::mohammed.fasha@uop.edu.jo::cc64f42d-a1a6-4f08-b97b-0c37f877119f" providerId="AD" clId="Web-{201C7D42-1F1C-B7C2-DD80-837CD0925F1E}" dt="2025-03-23T12:34:23.220" v="365" actId="1076"/>
+          <ac:picMkLst>
+            <pc:docMk/>
+            <pc:sldMk cId="4251754830" sldId="335"/>
+            <ac:picMk id="4" creationId="{24975023-F336-E81B-3410-B0E86A42F3E0}"/>
+          </ac:picMkLst>
+        </pc:picChg>
+      </pc:sldChg>
+    </pc:docChg>
+  </pc:docChgLst>
+  <pc:docChgLst>
+    <pc:chgData name="Mohammed Fasha" userId="S::mohammed.fasha@uop.edu.jo::cc64f42d-a1a6-4f08-b97b-0c37f877119f" providerId="AD" clId="Web-{36B9E10C-9544-F05A-23A9-185BAFD9898D}"/>
+    <pc:docChg chg="addSld modSld">
+      <pc:chgData name="Mohammed Fasha" userId="S::mohammed.fasha@uop.edu.jo::cc64f42d-a1a6-4f08-b97b-0c37f877119f" providerId="AD" clId="Web-{36B9E10C-9544-F05A-23A9-185BAFD9898D}" dt="2025-03-23T12:04:32.957" v="76"/>
+      <pc:docMkLst>
+        <pc:docMk/>
+      </pc:docMkLst>
+      <pc:sldChg chg="addSp delSp modSp">
+        <pc:chgData name="Mohammed Fasha" userId="S::mohammed.fasha@uop.edu.jo::cc64f42d-a1a6-4f08-b97b-0c37f877119f" providerId="AD" clId="Web-{36B9E10C-9544-F05A-23A9-185BAFD9898D}" dt="2025-03-23T12:04:32.957" v="76"/>
+        <pc:sldMkLst>
+          <pc:docMk/>
+          <pc:sldMk cId="0" sldId="274"/>
+        </pc:sldMkLst>
+        <pc:picChg chg="add del">
+          <ac:chgData name="Mohammed Fasha" userId="S::mohammed.fasha@uop.edu.jo::cc64f42d-a1a6-4f08-b97b-0c37f877119f" providerId="AD" clId="Web-{36B9E10C-9544-F05A-23A9-185BAFD9898D}" dt="2025-03-23T12:04:32.957" v="76"/>
+          <ac:picMkLst>
+            <pc:docMk/>
+            <pc:sldMk cId="0" sldId="274"/>
+            <ac:picMk id="6" creationId="{00000000-0000-0000-0000-000000000000}"/>
+          </ac:picMkLst>
+        </pc:picChg>
+      </pc:sldChg>
+      <pc:sldChg chg="addSp modSp new">
+        <pc:chgData name="Mohammed Fasha" userId="S::mohammed.fasha@uop.edu.jo::cc64f42d-a1a6-4f08-b97b-0c37f877119f" providerId="AD" clId="Web-{36B9E10C-9544-F05A-23A9-185BAFD9898D}" dt="2025-03-23T12:02:36.938" v="60" actId="1076"/>
+        <pc:sldMkLst>
+          <pc:docMk/>
+          <pc:sldMk cId="2059959534" sldId="330"/>
+        </pc:sldMkLst>
+        <pc:spChg chg="mod">
+          <ac:chgData name="Mohammed Fasha" userId="S::mohammed.fasha@uop.edu.jo::cc64f42d-a1a6-4f08-b97b-0c37f877119f" providerId="AD" clId="Web-{36B9E10C-9544-F05A-23A9-185BAFD9898D}" dt="2025-03-23T12:01:21.983" v="40" actId="20577"/>
+          <ac:spMkLst>
+            <pc:docMk/>
+            <pc:sldMk cId="2059959534" sldId="330"/>
+            <ac:spMk id="3" creationId="{CAE29CE7-34A3-D84A-09F7-F1FE82DFE999}"/>
+          </ac:spMkLst>
+        </pc:spChg>
+        <pc:spChg chg="add mod">
+          <ac:chgData name="Mohammed Fasha" userId="S::mohammed.fasha@uop.edu.jo::cc64f42d-a1a6-4f08-b97b-0c37f877119f" providerId="AD" clId="Web-{36B9E10C-9544-F05A-23A9-185BAFD9898D}" dt="2025-03-23T12:02:36.938" v="60" actId="1076"/>
+          <ac:spMkLst>
+            <pc:docMk/>
+            <pc:sldMk cId="2059959534" sldId="330"/>
+            <ac:spMk id="6" creationId="{DF962A98-4E4C-ECF1-BFA0-EDDF016A1D0C}"/>
+          </ac:spMkLst>
+        </pc:spChg>
+        <pc:picChg chg="add mod">
+          <ac:chgData name="Mohammed Fasha" userId="S::mohammed.fasha@uop.edu.jo::cc64f42d-a1a6-4f08-b97b-0c37f877119f" providerId="AD" clId="Web-{36B9E10C-9544-F05A-23A9-185BAFD9898D}" dt="2025-03-23T12:01:27.639" v="41" actId="1076"/>
+          <ac:picMkLst>
+            <pc:docMk/>
+            <pc:sldMk cId="2059959534" sldId="330"/>
+            <ac:picMk id="4" creationId="{78519047-ADEA-92C2-247C-84D5B7034606}"/>
+          </ac:picMkLst>
+        </pc:picChg>
+        <pc:picChg chg="add mod">
+          <ac:chgData name="Mohammed Fasha" userId="S::mohammed.fasha@uop.edu.jo::cc64f42d-a1a6-4f08-b97b-0c37f877119f" providerId="AD" clId="Web-{36B9E10C-9544-F05A-23A9-185BAFD9898D}" dt="2025-03-23T12:01:45.280" v="46" actId="1076"/>
+          <ac:picMkLst>
+            <pc:docMk/>
+            <pc:sldMk cId="2059959534" sldId="330"/>
+            <ac:picMk id="5" creationId="{8F67E074-5434-08BD-8BD1-BAAB11107FC6}"/>
           </ac:picMkLst>
         </pc:picChg>
       </pc:sldChg>
@@ -3084,102 +2154,6 @@
             <ac:spMk id="5" creationId="{606C1567-AF39-CAED-E122-5F02B98CB8E2}"/>
           </ac:spMkLst>
         </pc:spChg>
-        <pc:spChg chg="add">
-          <ac:chgData name="Mohammed Fasha" userId="cc64f42d-a1a6-4f08-b97b-0c37f877119f" providerId="ADAL" clId="{90B6B862-2DC7-460D-AAB2-4136282EE665}" dt="2025-03-22T15:23:14.738" v="64"/>
-          <ac:spMkLst>
-            <pc:docMk/>
-            <pc:sldMk cId="0" sldId="268"/>
-            <ac:spMk id="6" creationId="{F6224642-58DD-938D-6712-167E04632C0A}"/>
-          </ac:spMkLst>
-        </pc:spChg>
-        <pc:spChg chg="add">
-          <ac:chgData name="Mohammed Fasha" userId="cc64f42d-a1a6-4f08-b97b-0c37f877119f" providerId="ADAL" clId="{90B6B862-2DC7-460D-AAB2-4136282EE665}" dt="2025-03-22T15:23:14.738" v="64"/>
-          <ac:spMkLst>
-            <pc:docMk/>
-            <pc:sldMk cId="0" sldId="268"/>
-            <ac:spMk id="7" creationId="{53D96F0C-87A9-9B94-734A-B33DDA63BD0B}"/>
-          </ac:spMkLst>
-        </pc:spChg>
-        <pc:spChg chg="add">
-          <ac:chgData name="Mohammed Fasha" userId="cc64f42d-a1a6-4f08-b97b-0c37f877119f" providerId="ADAL" clId="{90B6B862-2DC7-460D-AAB2-4136282EE665}" dt="2025-03-22T15:23:14.738" v="64"/>
-          <ac:spMkLst>
-            <pc:docMk/>
-            <pc:sldMk cId="0" sldId="268"/>
-            <ac:spMk id="8" creationId="{9F16C1D2-6116-5B34-079C-1974892EDAE9}"/>
-          </ac:spMkLst>
-        </pc:spChg>
-        <pc:spChg chg="add">
-          <ac:chgData name="Mohammed Fasha" userId="cc64f42d-a1a6-4f08-b97b-0c37f877119f" providerId="ADAL" clId="{90B6B862-2DC7-460D-AAB2-4136282EE665}" dt="2025-03-22T15:23:14.738" v="64"/>
-          <ac:spMkLst>
-            <pc:docMk/>
-            <pc:sldMk cId="0" sldId="268"/>
-            <ac:spMk id="9" creationId="{E796816A-40D7-15B6-4D4C-555B79F184A6}"/>
-          </ac:spMkLst>
-        </pc:spChg>
-        <pc:spChg chg="add">
-          <ac:chgData name="Mohammed Fasha" userId="cc64f42d-a1a6-4f08-b97b-0c37f877119f" providerId="ADAL" clId="{90B6B862-2DC7-460D-AAB2-4136282EE665}" dt="2025-03-22T15:23:14.738" v="64"/>
-          <ac:spMkLst>
-            <pc:docMk/>
-            <pc:sldMk cId="0" sldId="268"/>
-            <ac:spMk id="10" creationId="{6284FC0F-881C-0CC7-3B76-A3B277B82E24}"/>
-          </ac:spMkLst>
-        </pc:spChg>
-        <pc:spChg chg="add">
-          <ac:chgData name="Mohammed Fasha" userId="cc64f42d-a1a6-4f08-b97b-0c37f877119f" providerId="ADAL" clId="{90B6B862-2DC7-460D-AAB2-4136282EE665}" dt="2025-03-22T15:23:26.221" v="65"/>
-          <ac:spMkLst>
-            <pc:docMk/>
-            <pc:sldMk cId="0" sldId="268"/>
-            <ac:spMk id="11" creationId="{7E6C0AF8-8BF8-B663-7A7C-BBD03BE0226E}"/>
-          </ac:spMkLst>
-        </pc:spChg>
-        <pc:spChg chg="add">
-          <ac:chgData name="Mohammed Fasha" userId="cc64f42d-a1a6-4f08-b97b-0c37f877119f" providerId="ADAL" clId="{90B6B862-2DC7-460D-AAB2-4136282EE665}" dt="2025-03-22T15:23:26.221" v="65"/>
-          <ac:spMkLst>
-            <pc:docMk/>
-            <pc:sldMk cId="0" sldId="268"/>
-            <ac:spMk id="12" creationId="{6DC88130-F2E2-8772-7011-C4DC1894FF8B}"/>
-          </ac:spMkLst>
-        </pc:spChg>
-        <pc:spChg chg="add">
-          <ac:chgData name="Mohammed Fasha" userId="cc64f42d-a1a6-4f08-b97b-0c37f877119f" providerId="ADAL" clId="{90B6B862-2DC7-460D-AAB2-4136282EE665}" dt="2025-03-22T15:23:26.221" v="65"/>
-          <ac:spMkLst>
-            <pc:docMk/>
-            <pc:sldMk cId="0" sldId="268"/>
-            <ac:spMk id="13" creationId="{9C2B0F94-2C4E-1E8C-A233-09FDA9A2F1A7}"/>
-          </ac:spMkLst>
-        </pc:spChg>
-        <pc:spChg chg="add">
-          <ac:chgData name="Mohammed Fasha" userId="cc64f42d-a1a6-4f08-b97b-0c37f877119f" providerId="ADAL" clId="{90B6B862-2DC7-460D-AAB2-4136282EE665}" dt="2025-03-22T15:23:26.221" v="65"/>
-          <ac:spMkLst>
-            <pc:docMk/>
-            <pc:sldMk cId="0" sldId="268"/>
-            <ac:spMk id="14" creationId="{B057EE86-814B-BDD0-AEFE-D19F9FB2FE35}"/>
-          </ac:spMkLst>
-        </pc:spChg>
-        <pc:spChg chg="add">
-          <ac:chgData name="Mohammed Fasha" userId="cc64f42d-a1a6-4f08-b97b-0c37f877119f" providerId="ADAL" clId="{90B6B862-2DC7-460D-AAB2-4136282EE665}" dt="2025-03-22T15:23:26.221" v="65"/>
-          <ac:spMkLst>
-            <pc:docMk/>
-            <pc:sldMk cId="0" sldId="268"/>
-            <ac:spMk id="15" creationId="{A206D375-E404-6AC3-8F33-8737435956B9}"/>
-          </ac:spMkLst>
-        </pc:spChg>
-        <pc:picChg chg="mod">
-          <ac:chgData name="Mohammed Fasha" userId="cc64f42d-a1a6-4f08-b97b-0c37f877119f" providerId="ADAL" clId="{90B6B862-2DC7-460D-AAB2-4136282EE665}" dt="2025-03-22T15:25:34.965" v="119" actId="1076"/>
-          <ac:picMkLst>
-            <pc:docMk/>
-            <pc:sldMk cId="0" sldId="268"/>
-            <ac:picMk id="3" creationId="{80666BF4-16FB-5F6D-681D-CB4B25AF4A97}"/>
-          </ac:picMkLst>
-        </pc:picChg>
-        <pc:picChg chg="del">
-          <ac:chgData name="Mohammed Fasha" userId="cc64f42d-a1a6-4f08-b97b-0c37f877119f" providerId="ADAL" clId="{90B6B862-2DC7-460D-AAB2-4136282EE665}" dt="2025-03-22T15:22:53.595" v="61" actId="478"/>
-          <ac:picMkLst>
-            <pc:docMk/>
-            <pc:sldMk cId="0" sldId="268"/>
-            <ac:picMk id="4" creationId="{00000000-0000-0000-0000-000000000000}"/>
-          </ac:picMkLst>
-        </pc:picChg>
         <pc:picChg chg="add mod">
           <ac:chgData name="Mohammed Fasha" userId="cc64f42d-a1a6-4f08-b97b-0c37f877119f" providerId="ADAL" clId="{90B6B862-2DC7-460D-AAB2-4136282EE665}" dt="2025-03-22T15:25:56.335" v="120" actId="14100"/>
           <ac:picMkLst>
@@ -3474,78 +2448,6 @@
           <pc:docMk/>
           <pc:sldMk cId="2845841377" sldId="315"/>
         </pc:sldMkLst>
-        <pc:spChg chg="mod">
-          <ac:chgData name="Mohammed Fasha" userId="cc64f42d-a1a6-4f08-b97b-0c37f877119f" providerId="ADAL" clId="{90B6B862-2DC7-460D-AAB2-4136282EE665}" dt="2025-03-22T15:30:57.316" v="159" actId="20577"/>
-          <ac:spMkLst>
-            <pc:docMk/>
-            <pc:sldMk cId="2845841377" sldId="315"/>
-            <ac:spMk id="2" creationId="{DD49F588-EB9D-62E1-F32A-D7137B482D6E}"/>
-          </ac:spMkLst>
-        </pc:spChg>
-        <pc:spChg chg="mod">
-          <ac:chgData name="Mohammed Fasha" userId="cc64f42d-a1a6-4f08-b97b-0c37f877119f" providerId="ADAL" clId="{90B6B862-2DC7-460D-AAB2-4136282EE665}" dt="2025-03-22T15:30:07.893" v="133" actId="27636"/>
-          <ac:spMkLst>
-            <pc:docMk/>
-            <pc:sldMk cId="2845841377" sldId="315"/>
-            <ac:spMk id="3" creationId="{FFE21ADB-E900-3A47-B3AD-FE93A73B6920}"/>
-          </ac:spMkLst>
-        </pc:spChg>
-        <pc:spChg chg="add">
-          <ac:chgData name="Mohammed Fasha" userId="cc64f42d-a1a6-4f08-b97b-0c37f877119f" providerId="ADAL" clId="{90B6B862-2DC7-460D-AAB2-4136282EE665}" dt="2025-03-22T15:29:41.929" v="122"/>
-          <ac:spMkLst>
-            <pc:docMk/>
-            <pc:sldMk cId="2845841377" sldId="315"/>
-            <ac:spMk id="4" creationId="{88CF4449-44E1-A22D-CCB0-2C25A1DBF17B}"/>
-          </ac:spMkLst>
-        </pc:spChg>
-        <pc:spChg chg="add">
-          <ac:chgData name="Mohammed Fasha" userId="cc64f42d-a1a6-4f08-b97b-0c37f877119f" providerId="ADAL" clId="{90B6B862-2DC7-460D-AAB2-4136282EE665}" dt="2025-03-22T15:29:41.929" v="122"/>
-          <ac:spMkLst>
-            <pc:docMk/>
-            <pc:sldMk cId="2845841377" sldId="315"/>
-            <ac:spMk id="5" creationId="{31EEA326-D027-9578-BAA1-7620707830FA}"/>
-          </ac:spMkLst>
-        </pc:spChg>
-        <pc:spChg chg="add">
-          <ac:chgData name="Mohammed Fasha" userId="cc64f42d-a1a6-4f08-b97b-0c37f877119f" providerId="ADAL" clId="{90B6B862-2DC7-460D-AAB2-4136282EE665}" dt="2025-03-22T15:29:41.929" v="122"/>
-          <ac:spMkLst>
-            <pc:docMk/>
-            <pc:sldMk cId="2845841377" sldId="315"/>
-            <ac:spMk id="6" creationId="{8C84AFCD-FAF6-1990-1C0C-57B9DEF6260B}"/>
-          </ac:spMkLst>
-        </pc:spChg>
-        <pc:spChg chg="add">
-          <ac:chgData name="Mohammed Fasha" userId="cc64f42d-a1a6-4f08-b97b-0c37f877119f" providerId="ADAL" clId="{90B6B862-2DC7-460D-AAB2-4136282EE665}" dt="2025-03-22T15:29:41.929" v="122"/>
-          <ac:spMkLst>
-            <pc:docMk/>
-            <pc:sldMk cId="2845841377" sldId="315"/>
-            <ac:spMk id="7" creationId="{0826772A-1F95-85D3-E7B9-95F0109C2F14}"/>
-          </ac:spMkLst>
-        </pc:spChg>
-        <pc:spChg chg="add">
-          <ac:chgData name="Mohammed Fasha" userId="cc64f42d-a1a6-4f08-b97b-0c37f877119f" providerId="ADAL" clId="{90B6B862-2DC7-460D-AAB2-4136282EE665}" dt="2025-03-22T15:29:41.929" v="122"/>
-          <ac:spMkLst>
-            <pc:docMk/>
-            <pc:sldMk cId="2845841377" sldId="315"/>
-            <ac:spMk id="8" creationId="{DBD0D508-51E9-4028-3A26-C3C45E96F82C}"/>
-          </ac:spMkLst>
-        </pc:spChg>
-        <pc:spChg chg="add">
-          <ac:chgData name="Mohammed Fasha" userId="cc64f42d-a1a6-4f08-b97b-0c37f877119f" providerId="ADAL" clId="{90B6B862-2DC7-460D-AAB2-4136282EE665}" dt="2025-03-22T15:29:41.929" v="122"/>
-          <ac:spMkLst>
-            <pc:docMk/>
-            <pc:sldMk cId="2845841377" sldId="315"/>
-            <ac:spMk id="9" creationId="{E4316DF0-3165-B24F-D1A8-83B320E45DA6}"/>
-          </ac:spMkLst>
-        </pc:spChg>
-        <pc:spChg chg="add">
-          <ac:chgData name="Mohammed Fasha" userId="cc64f42d-a1a6-4f08-b97b-0c37f877119f" providerId="ADAL" clId="{90B6B862-2DC7-460D-AAB2-4136282EE665}" dt="2025-03-22T15:29:41.929" v="122"/>
-          <ac:spMkLst>
-            <pc:docMk/>
-            <pc:sldMk cId="2845841377" sldId="315"/>
-            <ac:spMk id="10" creationId="{E0320297-1BF9-438A-C211-1097005A7165}"/>
-          </ac:spMkLst>
-        </pc:spChg>
       </pc:sldChg>
       <pc:sldChg chg="del">
         <pc:chgData name="Mohammed Fasha" userId="cc64f42d-a1a6-4f08-b97b-0c37f877119f" providerId="ADAL" clId="{90B6B862-2DC7-460D-AAB2-4136282EE665}" dt="2025-03-21T12:22:41.191" v="18" actId="47"/>
@@ -3560,22 +2462,6 @@
           <pc:docMk/>
           <pc:sldMk cId="4201170802" sldId="316"/>
         </pc:sldMkLst>
-        <pc:spChg chg="mod">
-          <ac:chgData name="Mohammed Fasha" userId="cc64f42d-a1a6-4f08-b97b-0c37f877119f" providerId="ADAL" clId="{90B6B862-2DC7-460D-AAB2-4136282EE665}" dt="2025-03-22T15:40:41.987" v="311" actId="113"/>
-          <ac:spMkLst>
-            <pc:docMk/>
-            <pc:sldMk cId="4201170802" sldId="316"/>
-            <ac:spMk id="2" creationId="{766C8B50-325A-D2C3-96E8-81B8593B2200}"/>
-          </ac:spMkLst>
-        </pc:spChg>
-        <pc:spChg chg="mod">
-          <ac:chgData name="Mohammed Fasha" userId="cc64f42d-a1a6-4f08-b97b-0c37f877119f" providerId="ADAL" clId="{90B6B862-2DC7-460D-AAB2-4136282EE665}" dt="2025-03-22T15:41:03.063" v="315"/>
-          <ac:spMkLst>
-            <pc:docMk/>
-            <pc:sldMk cId="4201170802" sldId="316"/>
-            <ac:spMk id="3" creationId="{3BD8F7C4-4A90-86CB-EC61-A69E468CE15B}"/>
-          </ac:spMkLst>
-        </pc:spChg>
       </pc:sldChg>
       <pc:sldChg chg="add del">
         <pc:chgData name="Mohammed Fasha" userId="cc64f42d-a1a6-4f08-b97b-0c37f877119f" providerId="ADAL" clId="{90B6B862-2DC7-460D-AAB2-4136282EE665}" dt="2025-03-21T12:22:35.158" v="13" actId="47"/>
@@ -3601,20 +2487,638 @@
     </pc:docChg>
   </pc:docChgLst>
   <pc:docChgLst>
-    <pc:chgData name="Mohammed Fasha" userId="S::mohammed.fasha@uop.edu.jo::cc64f42d-a1a6-4f08-b97b-0c37f877119f" providerId="AD" clId="Web-{2F52505F-0676-E1F8-3A9C-C74E2F5553F9}"/>
-    <pc:docChg chg="addSld modSld">
-      <pc:chgData name="Mohammed Fasha" userId="S::mohammed.fasha@uop.edu.jo::cc64f42d-a1a6-4f08-b97b-0c37f877119f" providerId="AD" clId="Web-{2F52505F-0676-E1F8-3A9C-C74E2F5553F9}" dt="2025-03-23T06:07:25.672" v="25" actId="20577"/>
+    <pc:chgData name="Mohammed Fasha" userId="cc64f42d-a1a6-4f08-b97b-0c37f877119f" providerId="ADAL" clId="{E3189476-60BF-4BD3-A575-175D5A28A69C}"/>
+    <pc:docChg chg="undo custSel addSld delSld modSld">
+      <pc:chgData name="Mohammed Fasha" userId="cc64f42d-a1a6-4f08-b97b-0c37f877119f" providerId="ADAL" clId="{E3189476-60BF-4BD3-A575-175D5A28A69C}" dt="2025-03-25T08:19:09.380" v="122" actId="113"/>
       <pc:docMkLst>
         <pc:docMk/>
       </pc:docMkLst>
-      <pc:sldChg chg="modSp">
-        <pc:chgData name="Mohammed Fasha" userId="S::mohammed.fasha@uop.edu.jo::cc64f42d-a1a6-4f08-b97b-0c37f877119f" providerId="AD" clId="Web-{2F52505F-0676-E1F8-3A9C-C74E2F5553F9}" dt="2025-03-23T06:05:34.685" v="4" actId="20577"/>
+      <pc:sldChg chg="modSp del mod">
+        <pc:chgData name="Mohammed Fasha" userId="cc64f42d-a1a6-4f08-b97b-0c37f877119f" providerId="ADAL" clId="{E3189476-60BF-4BD3-A575-175D5A28A69C}" dt="2025-03-25T08:17:30.655" v="70" actId="2696"/>
+        <pc:sldMkLst>
+          <pc:docMk/>
+          <pc:sldMk cId="3694445782" sldId="326"/>
+        </pc:sldMkLst>
+        <pc:spChg chg="mod">
+          <ac:chgData name="Mohammed Fasha" userId="cc64f42d-a1a6-4f08-b97b-0c37f877119f" providerId="ADAL" clId="{E3189476-60BF-4BD3-A575-175D5A28A69C}" dt="2025-03-25T08:16:02.909" v="53" actId="6549"/>
+          <ac:spMkLst>
+            <pc:docMk/>
+            <pc:sldMk cId="3694445782" sldId="326"/>
+            <ac:spMk id="3" creationId="{A83CAC7D-42B8-C614-E399-7F41DD29BBE0}"/>
+          </ac:spMkLst>
+        </pc:spChg>
+      </pc:sldChg>
+      <pc:sldChg chg="modSp mod">
+        <pc:chgData name="Mohammed Fasha" userId="cc64f42d-a1a6-4f08-b97b-0c37f877119f" providerId="ADAL" clId="{E3189476-60BF-4BD3-A575-175D5A28A69C}" dt="2025-03-25T08:07:23.645" v="28" actId="20577"/>
+        <pc:sldMkLst>
+          <pc:docMk/>
+          <pc:sldMk cId="2059959534" sldId="330"/>
+        </pc:sldMkLst>
+        <pc:spChg chg="mod">
+          <ac:chgData name="Mohammed Fasha" userId="cc64f42d-a1a6-4f08-b97b-0c37f877119f" providerId="ADAL" clId="{E3189476-60BF-4BD3-A575-175D5A28A69C}" dt="2025-03-25T08:07:23.645" v="28" actId="20577"/>
+          <ac:spMkLst>
+            <pc:docMk/>
+            <pc:sldMk cId="2059959534" sldId="330"/>
+            <ac:spMk id="2" creationId="{10F94810-6956-B8FE-E0F1-548F2181FEA5}"/>
+          </ac:spMkLst>
+        </pc:spChg>
+      </pc:sldChg>
+      <pc:sldChg chg="addSp delSp modSp new del mod">
+        <pc:chgData name="Mohammed Fasha" userId="cc64f42d-a1a6-4f08-b97b-0c37f877119f" providerId="ADAL" clId="{E3189476-60BF-4BD3-A575-175D5A28A69C}" dt="2025-03-25T08:16:02.768" v="51" actId="680"/>
+        <pc:sldMkLst>
+          <pc:docMk/>
+          <pc:sldMk cId="991667372" sldId="336"/>
+        </pc:sldMkLst>
+        <pc:spChg chg="mod">
+          <ac:chgData name="Mohammed Fasha" userId="cc64f42d-a1a6-4f08-b97b-0c37f877119f" providerId="ADAL" clId="{E3189476-60BF-4BD3-A575-175D5A28A69C}" dt="2025-03-25T08:16:02.721" v="50"/>
+          <ac:spMkLst>
+            <pc:docMk/>
+            <pc:sldMk cId="991667372" sldId="336"/>
+            <ac:spMk id="3" creationId="{0EC78685-8E0C-43F8-BB0C-2C0E578AA6EA}"/>
+          </ac:spMkLst>
+        </pc:spChg>
+        <pc:spChg chg="add del">
+          <ac:chgData name="Mohammed Fasha" userId="cc64f42d-a1a6-4f08-b97b-0c37f877119f" providerId="ADAL" clId="{E3189476-60BF-4BD3-A575-175D5A28A69C}" dt="2025-03-25T08:15:41.862" v="35"/>
+          <ac:spMkLst>
+            <pc:docMk/>
+            <pc:sldMk cId="991667372" sldId="336"/>
+            <ac:spMk id="4" creationId="{6C83B503-DDD2-4107-92A2-E385D150AFFE}"/>
+          </ac:spMkLst>
+        </pc:spChg>
+        <pc:spChg chg="add del">
+          <ac:chgData name="Mohammed Fasha" userId="cc64f42d-a1a6-4f08-b97b-0c37f877119f" providerId="ADAL" clId="{E3189476-60BF-4BD3-A575-175D5A28A69C}" dt="2025-03-25T08:15:41.862" v="35"/>
+          <ac:spMkLst>
+            <pc:docMk/>
+            <pc:sldMk cId="991667372" sldId="336"/>
+            <ac:spMk id="5" creationId="{5A3F9D97-BE75-4953-B2CC-06D6A021571B}"/>
+          </ac:spMkLst>
+        </pc:spChg>
+        <pc:spChg chg="add del">
+          <ac:chgData name="Mohammed Fasha" userId="cc64f42d-a1a6-4f08-b97b-0c37f877119f" providerId="ADAL" clId="{E3189476-60BF-4BD3-A575-175D5A28A69C}" dt="2025-03-25T08:15:41.862" v="35"/>
+          <ac:spMkLst>
+            <pc:docMk/>
+            <pc:sldMk cId="991667372" sldId="336"/>
+            <ac:spMk id="6" creationId="{795C1574-B4E3-40F3-8F7F-04810B77921E}"/>
+          </ac:spMkLst>
+        </pc:spChg>
+        <pc:spChg chg="add del">
+          <ac:chgData name="Mohammed Fasha" userId="cc64f42d-a1a6-4f08-b97b-0c37f877119f" providerId="ADAL" clId="{E3189476-60BF-4BD3-A575-175D5A28A69C}" dt="2025-03-25T08:15:41.862" v="35"/>
+          <ac:spMkLst>
+            <pc:docMk/>
+            <pc:sldMk cId="991667372" sldId="336"/>
+            <ac:spMk id="7" creationId="{F400DAA2-F79D-41BB-8759-243AA9D8E8F5}"/>
+          </ac:spMkLst>
+        </pc:spChg>
+        <pc:spChg chg="add del">
+          <ac:chgData name="Mohammed Fasha" userId="cc64f42d-a1a6-4f08-b97b-0c37f877119f" providerId="ADAL" clId="{E3189476-60BF-4BD3-A575-175D5A28A69C}" dt="2025-03-25T08:15:41.862" v="35"/>
+          <ac:spMkLst>
+            <pc:docMk/>
+            <pc:sldMk cId="991667372" sldId="336"/>
+            <ac:spMk id="8" creationId="{F9963C7C-ED0B-4CC1-BF63-716015531238}"/>
+          </ac:spMkLst>
+        </pc:spChg>
+        <pc:spChg chg="add del">
+          <ac:chgData name="Mohammed Fasha" userId="cc64f42d-a1a6-4f08-b97b-0c37f877119f" providerId="ADAL" clId="{E3189476-60BF-4BD3-A575-175D5A28A69C}" dt="2025-03-25T08:15:41.862" v="35"/>
+          <ac:spMkLst>
+            <pc:docMk/>
+            <pc:sldMk cId="991667372" sldId="336"/>
+            <ac:spMk id="9" creationId="{B62C1FD5-B712-4554-A618-4A150E915C50}"/>
+          </ac:spMkLst>
+        </pc:spChg>
+        <pc:spChg chg="add del">
+          <ac:chgData name="Mohammed Fasha" userId="cc64f42d-a1a6-4f08-b97b-0c37f877119f" providerId="ADAL" clId="{E3189476-60BF-4BD3-A575-175D5A28A69C}" dt="2025-03-25T08:15:41.862" v="35"/>
+          <ac:spMkLst>
+            <pc:docMk/>
+            <pc:sldMk cId="991667372" sldId="336"/>
+            <ac:spMk id="10" creationId="{92E96B7B-C4A4-4BA5-B945-CFE93C245D52}"/>
+          </ac:spMkLst>
+        </pc:spChg>
+        <pc:spChg chg="add del">
+          <ac:chgData name="Mohammed Fasha" userId="cc64f42d-a1a6-4f08-b97b-0c37f877119f" providerId="ADAL" clId="{E3189476-60BF-4BD3-A575-175D5A28A69C}" dt="2025-03-25T08:15:41.862" v="35"/>
+          <ac:spMkLst>
+            <pc:docMk/>
+            <pc:sldMk cId="991667372" sldId="336"/>
+            <ac:spMk id="11" creationId="{4CD8698D-81D2-4128-9C6E-E2CFEF24AB1F}"/>
+          </ac:spMkLst>
+        </pc:spChg>
+        <pc:spChg chg="add del">
+          <ac:chgData name="Mohammed Fasha" userId="cc64f42d-a1a6-4f08-b97b-0c37f877119f" providerId="ADAL" clId="{E3189476-60BF-4BD3-A575-175D5A28A69C}" dt="2025-03-25T08:15:41.862" v="35"/>
+          <ac:spMkLst>
+            <pc:docMk/>
+            <pc:sldMk cId="991667372" sldId="336"/>
+            <ac:spMk id="12" creationId="{161A4F5E-A702-4A3A-AA9B-0B46FC9123BF}"/>
+          </ac:spMkLst>
+        </pc:spChg>
+        <pc:spChg chg="add del">
+          <ac:chgData name="Mohammed Fasha" userId="cc64f42d-a1a6-4f08-b97b-0c37f877119f" providerId="ADAL" clId="{E3189476-60BF-4BD3-A575-175D5A28A69C}" dt="2025-03-25T08:15:41.862" v="35"/>
+          <ac:spMkLst>
+            <pc:docMk/>
+            <pc:sldMk cId="991667372" sldId="336"/>
+            <ac:spMk id="13" creationId="{C5E31194-67EB-44AD-ABDF-C6763831A605}"/>
+          </ac:spMkLst>
+        </pc:spChg>
+        <pc:spChg chg="add del">
+          <ac:chgData name="Mohammed Fasha" userId="cc64f42d-a1a6-4f08-b97b-0c37f877119f" providerId="ADAL" clId="{E3189476-60BF-4BD3-A575-175D5A28A69C}" dt="2025-03-25T08:15:41.862" v="35"/>
+          <ac:spMkLst>
+            <pc:docMk/>
+            <pc:sldMk cId="991667372" sldId="336"/>
+            <ac:spMk id="14" creationId="{9C7436FF-7202-4348-9AF9-D97DCD5D426A}"/>
+          </ac:spMkLst>
+        </pc:spChg>
+        <pc:spChg chg="add del">
+          <ac:chgData name="Mohammed Fasha" userId="cc64f42d-a1a6-4f08-b97b-0c37f877119f" providerId="ADAL" clId="{E3189476-60BF-4BD3-A575-175D5A28A69C}" dt="2025-03-25T08:15:41.862" v="35"/>
+          <ac:spMkLst>
+            <pc:docMk/>
+            <pc:sldMk cId="991667372" sldId="336"/>
+            <ac:spMk id="15" creationId="{CE23B68A-00A8-40F1-A6C3-3A0A533B09A2}"/>
+          </ac:spMkLst>
+        </pc:spChg>
+        <pc:spChg chg="add del">
+          <ac:chgData name="Mohammed Fasha" userId="cc64f42d-a1a6-4f08-b97b-0c37f877119f" providerId="ADAL" clId="{E3189476-60BF-4BD3-A575-175D5A28A69C}" dt="2025-03-25T08:15:41.862" v="35"/>
+          <ac:spMkLst>
+            <pc:docMk/>
+            <pc:sldMk cId="991667372" sldId="336"/>
+            <ac:spMk id="16" creationId="{95F4B26E-CB17-46BE-A53E-54007A72B890}"/>
+          </ac:spMkLst>
+        </pc:spChg>
+        <pc:spChg chg="add del">
+          <ac:chgData name="Mohammed Fasha" userId="cc64f42d-a1a6-4f08-b97b-0c37f877119f" providerId="ADAL" clId="{E3189476-60BF-4BD3-A575-175D5A28A69C}" dt="2025-03-25T08:15:41.862" v="35"/>
+          <ac:spMkLst>
+            <pc:docMk/>
+            <pc:sldMk cId="991667372" sldId="336"/>
+            <ac:spMk id="17" creationId="{E09376B5-9B8C-4754-AD05-B483D922D4EB}"/>
+          </ac:spMkLst>
+        </pc:spChg>
+        <pc:spChg chg="add del">
+          <ac:chgData name="Mohammed Fasha" userId="cc64f42d-a1a6-4f08-b97b-0c37f877119f" providerId="ADAL" clId="{E3189476-60BF-4BD3-A575-175D5A28A69C}" dt="2025-03-25T08:15:41.862" v="35"/>
+          <ac:spMkLst>
+            <pc:docMk/>
+            <pc:sldMk cId="991667372" sldId="336"/>
+            <ac:spMk id="18" creationId="{A790D74C-51DC-4364-BDA5-00AB66A58D59}"/>
+          </ac:spMkLst>
+        </pc:spChg>
+        <pc:spChg chg="add del">
+          <ac:chgData name="Mohammed Fasha" userId="cc64f42d-a1a6-4f08-b97b-0c37f877119f" providerId="ADAL" clId="{E3189476-60BF-4BD3-A575-175D5A28A69C}" dt="2025-03-25T08:15:41.862" v="35"/>
+          <ac:spMkLst>
+            <pc:docMk/>
+            <pc:sldMk cId="991667372" sldId="336"/>
+            <ac:spMk id="19" creationId="{2686F127-5B50-4D56-B5A7-1A5FE747EA3A}"/>
+          </ac:spMkLst>
+        </pc:spChg>
+        <pc:spChg chg="add del">
+          <ac:chgData name="Mohammed Fasha" userId="cc64f42d-a1a6-4f08-b97b-0c37f877119f" providerId="ADAL" clId="{E3189476-60BF-4BD3-A575-175D5A28A69C}" dt="2025-03-25T08:15:41.862" v="35"/>
+          <ac:spMkLst>
+            <pc:docMk/>
+            <pc:sldMk cId="991667372" sldId="336"/>
+            <ac:spMk id="20" creationId="{D093964F-C4E8-4279-9002-D444C3828A4B}"/>
+          </ac:spMkLst>
+        </pc:spChg>
+      </pc:sldChg>
+      <pc:sldChg chg="addSp delSp modSp new mod">
+        <pc:chgData name="Mohammed Fasha" userId="cc64f42d-a1a6-4f08-b97b-0c37f877119f" providerId="ADAL" clId="{E3189476-60BF-4BD3-A575-175D5A28A69C}" dt="2025-03-25T08:17:23.900" v="64" actId="5793"/>
+        <pc:sldMkLst>
+          <pc:docMk/>
+          <pc:sldMk cId="2914298022" sldId="336"/>
+        </pc:sldMkLst>
+        <pc:spChg chg="mod">
+          <ac:chgData name="Mohammed Fasha" userId="cc64f42d-a1a6-4f08-b97b-0c37f877119f" providerId="ADAL" clId="{E3189476-60BF-4BD3-A575-175D5A28A69C}" dt="2025-03-25T08:17:21.981" v="63" actId="113"/>
+          <ac:spMkLst>
+            <pc:docMk/>
+            <pc:sldMk cId="2914298022" sldId="336"/>
+            <ac:spMk id="2" creationId="{B9530C9F-C77E-4AB9-8B37-B395A98C43EF}"/>
+          </ac:spMkLst>
+        </pc:spChg>
+        <pc:spChg chg="mod">
+          <ac:chgData name="Mohammed Fasha" userId="cc64f42d-a1a6-4f08-b97b-0c37f877119f" providerId="ADAL" clId="{E3189476-60BF-4BD3-A575-175D5A28A69C}" dt="2025-03-25T08:17:23.900" v="64" actId="5793"/>
+          <ac:spMkLst>
+            <pc:docMk/>
+            <pc:sldMk cId="2914298022" sldId="336"/>
+            <ac:spMk id="3" creationId="{01C6437A-A221-4888-A133-89AFA711B850}"/>
+          </ac:spMkLst>
+        </pc:spChg>
+        <pc:spChg chg="add del">
+          <ac:chgData name="Mohammed Fasha" userId="cc64f42d-a1a6-4f08-b97b-0c37f877119f" providerId="ADAL" clId="{E3189476-60BF-4BD3-A575-175D5A28A69C}" dt="2025-03-25T08:17:05.614" v="56"/>
+          <ac:spMkLst>
+            <pc:docMk/>
+            <pc:sldMk cId="2914298022" sldId="336"/>
+            <ac:spMk id="4" creationId="{A809B343-40BF-4D28-90D1-130BBADB8B67}"/>
+          </ac:spMkLst>
+        </pc:spChg>
+        <pc:spChg chg="add del">
+          <ac:chgData name="Mohammed Fasha" userId="cc64f42d-a1a6-4f08-b97b-0c37f877119f" providerId="ADAL" clId="{E3189476-60BF-4BD3-A575-175D5A28A69C}" dt="2025-03-25T08:17:05.614" v="56"/>
+          <ac:spMkLst>
+            <pc:docMk/>
+            <pc:sldMk cId="2914298022" sldId="336"/>
+            <ac:spMk id="5" creationId="{D6848362-5930-4B9A-A7DD-FE9E006BB95A}"/>
+          </ac:spMkLst>
+        </pc:spChg>
+        <pc:spChg chg="add del">
+          <ac:chgData name="Mohammed Fasha" userId="cc64f42d-a1a6-4f08-b97b-0c37f877119f" providerId="ADAL" clId="{E3189476-60BF-4BD3-A575-175D5A28A69C}" dt="2025-03-25T08:17:05.614" v="56"/>
+          <ac:spMkLst>
+            <pc:docMk/>
+            <pc:sldMk cId="2914298022" sldId="336"/>
+            <ac:spMk id="6" creationId="{DE7EEF3D-673E-495B-8E4E-EA38D2A5C4E2}"/>
+          </ac:spMkLst>
+        </pc:spChg>
+      </pc:sldChg>
+      <pc:sldChg chg="modSp new mod">
+        <pc:chgData name="Mohammed Fasha" userId="cc64f42d-a1a6-4f08-b97b-0c37f877119f" providerId="ADAL" clId="{E3189476-60BF-4BD3-A575-175D5A28A69C}" dt="2025-03-25T08:17:53.199" v="79" actId="207"/>
+        <pc:sldMkLst>
+          <pc:docMk/>
+          <pc:sldMk cId="2164727706" sldId="337"/>
+        </pc:sldMkLst>
+        <pc:spChg chg="mod">
+          <ac:chgData name="Mohammed Fasha" userId="cc64f42d-a1a6-4f08-b97b-0c37f877119f" providerId="ADAL" clId="{E3189476-60BF-4BD3-A575-175D5A28A69C}" dt="2025-03-25T08:17:46.489" v="77" actId="113"/>
+          <ac:spMkLst>
+            <pc:docMk/>
+            <pc:sldMk cId="2164727706" sldId="337"/>
+            <ac:spMk id="2" creationId="{94C8800D-C43B-4FD7-A318-67AEB8003E93}"/>
+          </ac:spMkLst>
+        </pc:spChg>
+        <pc:spChg chg="mod">
+          <ac:chgData name="Mohammed Fasha" userId="cc64f42d-a1a6-4f08-b97b-0c37f877119f" providerId="ADAL" clId="{E3189476-60BF-4BD3-A575-175D5A28A69C}" dt="2025-03-25T08:17:53.199" v="79" actId="207"/>
+          <ac:spMkLst>
+            <pc:docMk/>
+            <pc:sldMk cId="2164727706" sldId="337"/>
+            <ac:spMk id="3" creationId="{0874E313-B8F4-4CC1-A604-3C82F5A688A3}"/>
+          </ac:spMkLst>
+        </pc:spChg>
+      </pc:sldChg>
+      <pc:sldChg chg="modSp add mod">
+        <pc:chgData name="Mohammed Fasha" userId="cc64f42d-a1a6-4f08-b97b-0c37f877119f" providerId="ADAL" clId="{E3189476-60BF-4BD3-A575-175D5A28A69C}" dt="2025-03-25T08:18:04.425" v="87" actId="113"/>
+        <pc:sldMkLst>
+          <pc:docMk/>
+          <pc:sldMk cId="59626595" sldId="338"/>
+        </pc:sldMkLst>
+        <pc:spChg chg="mod">
+          <ac:chgData name="Mohammed Fasha" userId="cc64f42d-a1a6-4f08-b97b-0c37f877119f" providerId="ADAL" clId="{E3189476-60BF-4BD3-A575-175D5A28A69C}" dt="2025-03-25T08:18:04.425" v="87" actId="113"/>
+          <ac:spMkLst>
+            <pc:docMk/>
+            <pc:sldMk cId="59626595" sldId="338"/>
+            <ac:spMk id="2" creationId="{94C8800D-C43B-4FD7-A318-67AEB8003E93}"/>
+          </ac:spMkLst>
+        </pc:spChg>
+        <pc:spChg chg="mod">
+          <ac:chgData name="Mohammed Fasha" userId="cc64f42d-a1a6-4f08-b97b-0c37f877119f" providerId="ADAL" clId="{E3189476-60BF-4BD3-A575-175D5A28A69C}" dt="2025-03-25T08:18:00.154" v="81" actId="21"/>
+          <ac:spMkLst>
+            <pc:docMk/>
+            <pc:sldMk cId="59626595" sldId="338"/>
+            <ac:spMk id="3" creationId="{0874E313-B8F4-4CC1-A604-3C82F5A688A3}"/>
+          </ac:spMkLst>
+        </pc:spChg>
+      </pc:sldChg>
+      <pc:sldChg chg="modSp add mod">
+        <pc:chgData name="Mohammed Fasha" userId="cc64f42d-a1a6-4f08-b97b-0c37f877119f" providerId="ADAL" clId="{E3189476-60BF-4BD3-A575-175D5A28A69C}" dt="2025-03-25T08:18:16.987" v="95" actId="113"/>
+        <pc:sldMkLst>
+          <pc:docMk/>
+          <pc:sldMk cId="4067745355" sldId="339"/>
+        </pc:sldMkLst>
+        <pc:spChg chg="mod">
+          <ac:chgData name="Mohammed Fasha" userId="cc64f42d-a1a6-4f08-b97b-0c37f877119f" providerId="ADAL" clId="{E3189476-60BF-4BD3-A575-175D5A28A69C}" dt="2025-03-25T08:18:16.987" v="95" actId="113"/>
+          <ac:spMkLst>
+            <pc:docMk/>
+            <pc:sldMk cId="4067745355" sldId="339"/>
+            <ac:spMk id="2" creationId="{94C8800D-C43B-4FD7-A318-67AEB8003E93}"/>
+          </ac:spMkLst>
+        </pc:spChg>
+        <pc:spChg chg="mod">
+          <ac:chgData name="Mohammed Fasha" userId="cc64f42d-a1a6-4f08-b97b-0c37f877119f" providerId="ADAL" clId="{E3189476-60BF-4BD3-A575-175D5A28A69C}" dt="2025-03-25T08:18:12.628" v="89" actId="21"/>
+          <ac:spMkLst>
+            <pc:docMk/>
+            <pc:sldMk cId="4067745355" sldId="339"/>
+            <ac:spMk id="3" creationId="{0874E313-B8F4-4CC1-A604-3C82F5A688A3}"/>
+          </ac:spMkLst>
+        </pc:spChg>
+      </pc:sldChg>
+      <pc:sldChg chg="modSp add mod">
+        <pc:chgData name="Mohammed Fasha" userId="cc64f42d-a1a6-4f08-b97b-0c37f877119f" providerId="ADAL" clId="{E3189476-60BF-4BD3-A575-175D5A28A69C}" dt="2025-03-25T08:18:50.621" v="111" actId="113"/>
+        <pc:sldMkLst>
+          <pc:docMk/>
+          <pc:sldMk cId="2996144740" sldId="340"/>
+        </pc:sldMkLst>
+        <pc:spChg chg="mod">
+          <ac:chgData name="Mohammed Fasha" userId="cc64f42d-a1a6-4f08-b97b-0c37f877119f" providerId="ADAL" clId="{E3189476-60BF-4BD3-A575-175D5A28A69C}" dt="2025-03-25T08:18:50.621" v="111" actId="113"/>
+          <ac:spMkLst>
+            <pc:docMk/>
+            <pc:sldMk cId="2996144740" sldId="340"/>
+            <ac:spMk id="2" creationId="{94C8800D-C43B-4FD7-A318-67AEB8003E93}"/>
+          </ac:spMkLst>
+        </pc:spChg>
+        <pc:spChg chg="mod">
+          <ac:chgData name="Mohammed Fasha" userId="cc64f42d-a1a6-4f08-b97b-0c37f877119f" providerId="ADAL" clId="{E3189476-60BF-4BD3-A575-175D5A28A69C}" dt="2025-03-25T08:18:33.574" v="105" actId="5793"/>
+          <ac:spMkLst>
+            <pc:docMk/>
+            <pc:sldMk cId="2996144740" sldId="340"/>
+            <ac:spMk id="3" creationId="{0874E313-B8F4-4CC1-A604-3C82F5A688A3}"/>
+          </ac:spMkLst>
+        </pc:spChg>
+      </pc:sldChg>
+      <pc:sldChg chg="modSp add mod">
+        <pc:chgData name="Mohammed Fasha" userId="cc64f42d-a1a6-4f08-b97b-0c37f877119f" providerId="ADAL" clId="{E3189476-60BF-4BD3-A575-175D5A28A69C}" dt="2025-03-25T08:18:55.064" v="113" actId="113"/>
+        <pc:sldMkLst>
+          <pc:docMk/>
+          <pc:sldMk cId="1106511272" sldId="341"/>
+        </pc:sldMkLst>
+        <pc:spChg chg="mod">
+          <ac:chgData name="Mohammed Fasha" userId="cc64f42d-a1a6-4f08-b97b-0c37f877119f" providerId="ADAL" clId="{E3189476-60BF-4BD3-A575-175D5A28A69C}" dt="2025-03-25T08:18:55.064" v="113" actId="113"/>
+          <ac:spMkLst>
+            <pc:docMk/>
+            <pc:sldMk cId="1106511272" sldId="341"/>
+            <ac:spMk id="2" creationId="{94C8800D-C43B-4FD7-A318-67AEB8003E93}"/>
+          </ac:spMkLst>
+        </pc:spChg>
+        <pc:spChg chg="mod">
+          <ac:chgData name="Mohammed Fasha" userId="cc64f42d-a1a6-4f08-b97b-0c37f877119f" providerId="ADAL" clId="{E3189476-60BF-4BD3-A575-175D5A28A69C}" dt="2025-03-25T08:18:44.632" v="108" actId="5793"/>
+          <ac:spMkLst>
+            <pc:docMk/>
+            <pc:sldMk cId="1106511272" sldId="341"/>
+            <ac:spMk id="3" creationId="{0874E313-B8F4-4CC1-A604-3C82F5A688A3}"/>
+          </ac:spMkLst>
+        </pc:spChg>
+      </pc:sldChg>
+      <pc:sldChg chg="modSp new mod">
+        <pc:chgData name="Mohammed Fasha" userId="cc64f42d-a1a6-4f08-b97b-0c37f877119f" providerId="ADAL" clId="{E3189476-60BF-4BD3-A575-175D5A28A69C}" dt="2025-03-25T08:19:09.380" v="122" actId="113"/>
+        <pc:sldMkLst>
+          <pc:docMk/>
+          <pc:sldMk cId="3443736079" sldId="342"/>
+        </pc:sldMkLst>
+        <pc:spChg chg="mod">
+          <ac:chgData name="Mohammed Fasha" userId="cc64f42d-a1a6-4f08-b97b-0c37f877119f" providerId="ADAL" clId="{E3189476-60BF-4BD3-A575-175D5A28A69C}" dt="2025-03-25T08:19:09.380" v="122" actId="113"/>
+          <ac:spMkLst>
+            <pc:docMk/>
+            <pc:sldMk cId="3443736079" sldId="342"/>
+            <ac:spMk id="2" creationId="{89AAB016-A5A0-4664-87E4-CD43227E5FDA}"/>
+          </ac:spMkLst>
+        </pc:spChg>
+        <pc:spChg chg="mod">
+          <ac:chgData name="Mohammed Fasha" userId="cc64f42d-a1a6-4f08-b97b-0c37f877119f" providerId="ADAL" clId="{E3189476-60BF-4BD3-A575-175D5A28A69C}" dt="2025-03-25T08:19:05.781" v="116" actId="21"/>
+          <ac:spMkLst>
+            <pc:docMk/>
+            <pc:sldMk cId="3443736079" sldId="342"/>
+            <ac:spMk id="3" creationId="{EF97ED4C-AFE0-4A6F-9D86-C36C1AF0CC9B}"/>
+          </ac:spMkLst>
+        </pc:spChg>
+      </pc:sldChg>
+    </pc:docChg>
+  </pc:docChgLst>
+  <pc:docChgLst>
+    <pc:chgData name="Mohammed Fasha" userId="cc64f42d-a1a6-4f08-b97b-0c37f877119f" providerId="ADAL" clId="{52B7A16F-CAD0-4D4D-9F9C-A24C8678CAD7}"/>
+    <pc:docChg chg="undo custSel addSld delSld modSld">
+      <pc:chgData name="Mohammed Fasha" userId="cc64f42d-a1a6-4f08-b97b-0c37f877119f" providerId="ADAL" clId="{52B7A16F-CAD0-4D4D-9F9C-A24C8678CAD7}" dt="2025-03-23T08:12:51.858" v="440" actId="167"/>
+      <pc:docMkLst>
+        <pc:docMk/>
+      </pc:docMkLst>
+      <pc:sldChg chg="modSp mod">
+        <pc:chgData name="Mohammed Fasha" userId="cc64f42d-a1a6-4f08-b97b-0c37f877119f" providerId="ADAL" clId="{52B7A16F-CAD0-4D4D-9F9C-A24C8678CAD7}" dt="2025-03-23T07:38:06.248" v="0" actId="1076"/>
+        <pc:sldMkLst>
+          <pc:docMk/>
+          <pc:sldMk cId="0" sldId="260"/>
+        </pc:sldMkLst>
+        <pc:picChg chg="mod">
+          <ac:chgData name="Mohammed Fasha" userId="cc64f42d-a1a6-4f08-b97b-0c37f877119f" providerId="ADAL" clId="{52B7A16F-CAD0-4D4D-9F9C-A24C8678CAD7}" dt="2025-03-23T07:38:06.248" v="0" actId="1076"/>
+          <ac:picMkLst>
+            <pc:docMk/>
+            <pc:sldMk cId="0" sldId="260"/>
+            <ac:picMk id="4" creationId="{00000000-0000-0000-0000-000000000000}"/>
+          </ac:picMkLst>
+        </pc:picChg>
+      </pc:sldChg>
+      <pc:sldChg chg="addSp delSp modSp mod">
+        <pc:chgData name="Mohammed Fasha" userId="cc64f42d-a1a6-4f08-b97b-0c37f877119f" providerId="ADAL" clId="{52B7A16F-CAD0-4D4D-9F9C-A24C8678CAD7}" dt="2025-03-23T07:53:24.379" v="210" actId="1037"/>
+        <pc:sldMkLst>
+          <pc:docMk/>
+          <pc:sldMk cId="0" sldId="268"/>
+        </pc:sldMkLst>
+        <pc:spChg chg="mod">
+          <ac:chgData name="Mohammed Fasha" userId="cc64f42d-a1a6-4f08-b97b-0c37f877119f" providerId="ADAL" clId="{52B7A16F-CAD0-4D4D-9F9C-A24C8678CAD7}" dt="2025-03-23T07:52:27.822" v="194" actId="14100"/>
+          <ac:spMkLst>
+            <pc:docMk/>
+            <pc:sldMk cId="0" sldId="268"/>
+            <ac:spMk id="2" creationId="{00000000-0000-0000-0000-000000000000}"/>
+          </ac:spMkLst>
+        </pc:spChg>
+        <pc:picChg chg="add mod">
+          <ac:chgData name="Mohammed Fasha" userId="cc64f42d-a1a6-4f08-b97b-0c37f877119f" providerId="ADAL" clId="{52B7A16F-CAD0-4D4D-9F9C-A24C8678CAD7}" dt="2025-03-23T07:53:24.379" v="210" actId="1037"/>
+          <ac:picMkLst>
+            <pc:docMk/>
+            <pc:sldMk cId="0" sldId="268"/>
+            <ac:picMk id="4" creationId="{8938F170-AA00-1377-3C2D-9C4BA79F0B63}"/>
+          </ac:picMkLst>
+        </pc:picChg>
+        <pc:picChg chg="mod">
+          <ac:chgData name="Mohammed Fasha" userId="cc64f42d-a1a6-4f08-b97b-0c37f877119f" providerId="ADAL" clId="{52B7A16F-CAD0-4D4D-9F9C-A24C8678CAD7}" dt="2025-03-23T07:52:46.951" v="196" actId="1076"/>
+          <ac:picMkLst>
+            <pc:docMk/>
+            <pc:sldMk cId="0" sldId="268"/>
+            <ac:picMk id="1026" creationId="{6F3CBA0F-1E6C-643F-B94A-E0D29A10F4F2}"/>
+          </ac:picMkLst>
+        </pc:picChg>
+        <pc:picChg chg="add mod">
+          <ac:chgData name="Mohammed Fasha" userId="cc64f42d-a1a6-4f08-b97b-0c37f877119f" providerId="ADAL" clId="{52B7A16F-CAD0-4D4D-9F9C-A24C8678CAD7}" dt="2025-03-23T07:52:51.388" v="198" actId="1076"/>
+          <ac:picMkLst>
+            <pc:docMk/>
+            <pc:sldMk cId="0" sldId="268"/>
+            <ac:picMk id="3074" creationId="{CA531F7F-21C5-71FB-D0ED-F868724378F4}"/>
+          </ac:picMkLst>
+        </pc:picChg>
+      </pc:sldChg>
+      <pc:sldChg chg="modSp mod">
+        <pc:chgData name="Mohammed Fasha" userId="cc64f42d-a1a6-4f08-b97b-0c37f877119f" providerId="ADAL" clId="{52B7A16F-CAD0-4D4D-9F9C-A24C8678CAD7}" dt="2025-03-23T08:04:37.151" v="351" actId="1076"/>
+        <pc:sldMkLst>
+          <pc:docMk/>
+          <pc:sldMk cId="0" sldId="272"/>
+        </pc:sldMkLst>
+        <pc:picChg chg="mod">
+          <ac:chgData name="Mohammed Fasha" userId="cc64f42d-a1a6-4f08-b97b-0c37f877119f" providerId="ADAL" clId="{52B7A16F-CAD0-4D4D-9F9C-A24C8678CAD7}" dt="2025-03-23T08:04:37.151" v="351" actId="1076"/>
+          <ac:picMkLst>
+            <pc:docMk/>
+            <pc:sldMk cId="0" sldId="272"/>
+            <ac:picMk id="3" creationId="{00000000-0000-0000-0000-000000000000}"/>
+          </ac:picMkLst>
+        </pc:picChg>
+      </pc:sldChg>
+      <pc:sldChg chg="addSp delSp modSp mod">
+        <pc:chgData name="Mohammed Fasha" userId="cc64f42d-a1a6-4f08-b97b-0c37f877119f" providerId="ADAL" clId="{52B7A16F-CAD0-4D4D-9F9C-A24C8678CAD7}" dt="2025-03-23T07:57:49.782" v="247" actId="113"/>
         <pc:sldMkLst>
           <pc:docMk/>
           <pc:sldMk cId="1864506158" sldId="314"/>
         </pc:sldMkLst>
         <pc:spChg chg="mod">
-          <ac:chgData name="Mohammed Fasha" userId="S::mohammed.fasha@uop.edu.jo::cc64f42d-a1a6-4f08-b97b-0c37f877119f" providerId="AD" clId="Web-{2F52505F-0676-E1F8-3A9C-C74E2F5553F9}" dt="2025-03-23T06:05:34.685" v="4" actId="20577"/>
+          <ac:chgData name="Mohammed Fasha" userId="cc64f42d-a1a6-4f08-b97b-0c37f877119f" providerId="ADAL" clId="{52B7A16F-CAD0-4D4D-9F9C-A24C8678CAD7}" dt="2025-03-23T07:45:37.830" v="55" actId="27636"/>
+          <ac:spMkLst>
+            <pc:docMk/>
+            <pc:sldMk cId="1864506158" sldId="314"/>
+            <ac:spMk id="2" creationId="{2531B878-DED6-1381-4B52-F683EA36A7F3}"/>
+          </ac:spMkLst>
+        </pc:spChg>
+        <pc:spChg chg="mod">
+          <ac:chgData name="Mohammed Fasha" userId="cc64f42d-a1a6-4f08-b97b-0c37f877119f" providerId="ADAL" clId="{52B7A16F-CAD0-4D4D-9F9C-A24C8678CAD7}" dt="2025-03-23T07:57:49.782" v="247" actId="113"/>
+          <ac:spMkLst>
+            <pc:docMk/>
+            <pc:sldMk cId="1864506158" sldId="314"/>
+            <ac:spMk id="3" creationId="{4961BB54-A79B-91B6-2B3E-888FA20CC61F}"/>
+          </ac:spMkLst>
+        </pc:spChg>
+        <pc:picChg chg="add mod">
+          <ac:chgData name="Mohammed Fasha" userId="cc64f42d-a1a6-4f08-b97b-0c37f877119f" providerId="ADAL" clId="{52B7A16F-CAD0-4D4D-9F9C-A24C8678CAD7}" dt="2025-03-23T07:50:06.277" v="132" actId="1038"/>
+          <ac:picMkLst>
+            <pc:docMk/>
+            <pc:sldMk cId="1864506158" sldId="314"/>
+            <ac:picMk id="1028" creationId="{A134BD84-5CDB-1185-7A50-8919C0EADE6C}"/>
+          </ac:picMkLst>
+        </pc:picChg>
+      </pc:sldChg>
+      <pc:sldChg chg="del">
+        <pc:chgData name="Mohammed Fasha" userId="cc64f42d-a1a6-4f08-b97b-0c37f877119f" providerId="ADAL" clId="{52B7A16F-CAD0-4D4D-9F9C-A24C8678CAD7}" dt="2025-03-23T07:50:32.125" v="135" actId="2696"/>
+        <pc:sldMkLst>
+          <pc:docMk/>
+          <pc:sldMk cId="2845841377" sldId="315"/>
+        </pc:sldMkLst>
+      </pc:sldChg>
+      <pc:sldChg chg="addSp delSp modSp mod">
+        <pc:chgData name="Mohammed Fasha" userId="cc64f42d-a1a6-4f08-b97b-0c37f877119f" providerId="ADAL" clId="{52B7A16F-CAD0-4D4D-9F9C-A24C8678CAD7}" dt="2025-03-23T08:12:51.858" v="440" actId="167"/>
+        <pc:sldMkLst>
+          <pc:docMk/>
+          <pc:sldMk cId="3694445782" sldId="326"/>
+        </pc:sldMkLst>
+      </pc:sldChg>
+      <pc:sldChg chg="addSp delSp modSp mod">
+        <pc:chgData name="Mohammed Fasha" userId="cc64f42d-a1a6-4f08-b97b-0c37f877119f" providerId="ADAL" clId="{52B7A16F-CAD0-4D4D-9F9C-A24C8678CAD7}" dt="2025-03-23T07:57:59.284" v="248" actId="113"/>
+        <pc:sldMkLst>
+          <pc:docMk/>
+          <pc:sldMk cId="659685489" sldId="327"/>
+        </pc:sldMkLst>
+        <pc:spChg chg="mod">
+          <ac:chgData name="Mohammed Fasha" userId="cc64f42d-a1a6-4f08-b97b-0c37f877119f" providerId="ADAL" clId="{52B7A16F-CAD0-4D4D-9F9C-A24C8678CAD7}" dt="2025-03-23T07:45:22.308" v="49" actId="27636"/>
+          <ac:spMkLst>
+            <pc:docMk/>
+            <pc:sldMk cId="659685489" sldId="327"/>
+            <ac:spMk id="2" creationId="{AB3B982C-02E6-3ED4-9C3C-19BC09ADBB3B}"/>
+          </ac:spMkLst>
+        </pc:spChg>
+        <pc:spChg chg="mod">
+          <ac:chgData name="Mohammed Fasha" userId="cc64f42d-a1a6-4f08-b97b-0c37f877119f" providerId="ADAL" clId="{52B7A16F-CAD0-4D4D-9F9C-A24C8678CAD7}" dt="2025-03-23T07:57:59.284" v="248" actId="113"/>
+          <ac:spMkLst>
+            <pc:docMk/>
+            <pc:sldMk cId="659685489" sldId="327"/>
+            <ac:spMk id="3" creationId="{2370F989-F40F-8A0B-AC42-50D0E7E07AEB}"/>
+          </ac:spMkLst>
+        </pc:spChg>
+        <pc:picChg chg="add mod">
+          <ac:chgData name="Mohammed Fasha" userId="cc64f42d-a1a6-4f08-b97b-0c37f877119f" providerId="ADAL" clId="{52B7A16F-CAD0-4D4D-9F9C-A24C8678CAD7}" dt="2025-03-23T07:51:53.982" v="181" actId="1036"/>
+          <ac:picMkLst>
+            <pc:docMk/>
+            <pc:sldMk cId="659685489" sldId="327"/>
+            <ac:picMk id="2052" creationId="{69FD89B0-8C2D-9A2A-4508-AE34F8749789}"/>
+          </ac:picMkLst>
+        </pc:picChg>
+      </pc:sldChg>
+      <pc:sldChg chg="modSp add">
+        <pc:chgData name="Mohammed Fasha" userId="cc64f42d-a1a6-4f08-b97b-0c37f877119f" providerId="ADAL" clId="{52B7A16F-CAD0-4D4D-9F9C-A24C8678CAD7}" dt="2025-03-23T08:06:38.777" v="363" actId="1035"/>
+        <pc:sldMkLst>
+          <pc:docMk/>
+          <pc:sldMk cId="932796301" sldId="328"/>
+        </pc:sldMkLst>
+        <pc:picChg chg="mod">
+          <ac:chgData name="Mohammed Fasha" userId="cc64f42d-a1a6-4f08-b97b-0c37f877119f" providerId="ADAL" clId="{52B7A16F-CAD0-4D4D-9F9C-A24C8678CAD7}" dt="2025-03-23T08:06:38.777" v="363" actId="1035"/>
+          <ac:picMkLst>
+            <pc:docMk/>
+            <pc:sldMk cId="932796301" sldId="328"/>
+            <ac:picMk id="4098" creationId="{0CAA22BE-1351-B1A5-188C-DD41EC29B52D}"/>
+          </ac:picMkLst>
+        </pc:picChg>
+      </pc:sldChg>
+      <pc:sldChg chg="addSp modSp del mod">
+        <pc:chgData name="Mohammed Fasha" userId="cc64f42d-a1a6-4f08-b97b-0c37f877119f" providerId="ADAL" clId="{52B7A16F-CAD0-4D4D-9F9C-A24C8678CAD7}" dt="2025-03-23T08:06:20.763" v="361" actId="2696"/>
+        <pc:sldMkLst>
+          <pc:docMk/>
+          <pc:sldMk cId="4072578661" sldId="328"/>
+        </pc:sldMkLst>
+      </pc:sldChg>
+      <pc:sldChg chg="addSp modSp mod">
+        <pc:chgData name="Mohammed Fasha" userId="cc64f42d-a1a6-4f08-b97b-0c37f877119f" providerId="ADAL" clId="{52B7A16F-CAD0-4D4D-9F9C-A24C8678CAD7}" dt="2025-03-23T08:05:29.878" v="358" actId="14100"/>
+        <pc:sldMkLst>
+          <pc:docMk/>
+          <pc:sldMk cId="3366111495" sldId="329"/>
+        </pc:sldMkLst>
+        <pc:spChg chg="mod">
+          <ac:chgData name="Mohammed Fasha" userId="cc64f42d-a1a6-4f08-b97b-0c37f877119f" providerId="ADAL" clId="{52B7A16F-CAD0-4D4D-9F9C-A24C8678CAD7}" dt="2025-03-23T07:56:54.852" v="238" actId="27636"/>
+          <ac:spMkLst>
+            <pc:docMk/>
+            <pc:sldMk cId="3366111495" sldId="329"/>
+            <ac:spMk id="2" creationId="{A1718324-DE08-4740-D0D9-7603BC5E0162}"/>
+          </ac:spMkLst>
+        </pc:spChg>
+        <pc:spChg chg="mod">
+          <ac:chgData name="Mohammed Fasha" userId="cc64f42d-a1a6-4f08-b97b-0c37f877119f" providerId="ADAL" clId="{52B7A16F-CAD0-4D4D-9F9C-A24C8678CAD7}" dt="2025-03-23T08:04:51.241" v="354" actId="20577"/>
+          <ac:spMkLst>
+            <pc:docMk/>
+            <pc:sldMk cId="3366111495" sldId="329"/>
+            <ac:spMk id="3" creationId="{9D118BE8-48E4-84B1-F7A3-AE58B873B879}"/>
+          </ac:spMkLst>
+        </pc:spChg>
+        <pc:picChg chg="add mod">
+          <ac:chgData name="Mohammed Fasha" userId="cc64f42d-a1a6-4f08-b97b-0c37f877119f" providerId="ADAL" clId="{52B7A16F-CAD0-4D4D-9F9C-A24C8678CAD7}" dt="2025-03-23T08:05:29.878" v="358" actId="14100"/>
+          <ac:picMkLst>
+            <pc:docMk/>
+            <pc:sldMk cId="3366111495" sldId="329"/>
+            <ac:picMk id="5122" creationId="{9029A929-644F-B232-0F2F-8E746CA5A374}"/>
+          </ac:picMkLst>
+        </pc:picChg>
+      </pc:sldChg>
+    </pc:docChg>
+  </pc:docChgLst>
+  <pc:docChgLst>
+    <pc:chgData name="Mohammed Fasha" userId="S::mohammed.fasha@uop.edu.jo::cc64f42d-a1a6-4f08-b97b-0c37f877119f" providerId="AD" clId="Web-{048CEBFD-D6A1-FF4F-145A-C5347D00F6D8}"/>
+    <pc:docChg chg="addSld delSld modSld">
+      <pc:chgData name="Mohammed Fasha" userId="S::mohammed.fasha@uop.edu.jo::cc64f42d-a1a6-4f08-b97b-0c37f877119f" providerId="AD" clId="Web-{048CEBFD-D6A1-FF4F-145A-C5347D00F6D8}" dt="2025-03-23T06:04:22.577" v="1166" actId="20577"/>
+      <pc:docMkLst>
+        <pc:docMk/>
+      </pc:docMkLst>
+      <pc:sldChg chg="modSp">
+        <pc:chgData name="Mohammed Fasha" userId="S::mohammed.fasha@uop.edu.jo::cc64f42d-a1a6-4f08-b97b-0c37f877119f" providerId="AD" clId="Web-{048CEBFD-D6A1-FF4F-145A-C5347D00F6D8}" dt="2025-03-23T04:07:54.621" v="655" actId="20577"/>
+        <pc:sldMkLst>
+          <pc:docMk/>
+          <pc:sldMk cId="0" sldId="272"/>
+        </pc:sldMkLst>
+        <pc:spChg chg="mod">
+          <ac:chgData name="Mohammed Fasha" userId="S::mohammed.fasha@uop.edu.jo::cc64f42d-a1a6-4f08-b97b-0c37f877119f" providerId="AD" clId="Web-{048CEBFD-D6A1-FF4F-145A-C5347D00F6D8}" dt="2025-03-23T04:07:54.621" v="655" actId="20577"/>
+          <ac:spMkLst>
+            <pc:docMk/>
+            <pc:sldMk cId="0" sldId="272"/>
+            <ac:spMk id="7" creationId="{BD008676-47C8-D88A-CD4A-65BB83D57162}"/>
+          </ac:spMkLst>
+        </pc:spChg>
+      </pc:sldChg>
+      <pc:sldChg chg="del">
+        <pc:chgData name="Mohammed Fasha" userId="S::mohammed.fasha@uop.edu.jo::cc64f42d-a1a6-4f08-b97b-0c37f877119f" providerId="AD" clId="Web-{048CEBFD-D6A1-FF4F-145A-C5347D00F6D8}" dt="2025-03-23T03:16:25.599" v="434"/>
+        <pc:sldMkLst>
+          <pc:docMk/>
+          <pc:sldMk cId="441052949" sldId="309"/>
+        </pc:sldMkLst>
+      </pc:sldChg>
+      <pc:sldChg chg="del">
+        <pc:chgData name="Mohammed Fasha" userId="S::mohammed.fasha@uop.edu.jo::cc64f42d-a1a6-4f08-b97b-0c37f877119f" providerId="AD" clId="Web-{048CEBFD-D6A1-FF4F-145A-C5347D00F6D8}" dt="2025-03-23T03:16:27.646" v="435"/>
+        <pc:sldMkLst>
+          <pc:docMk/>
+          <pc:sldMk cId="4115587381" sldId="311"/>
+        </pc:sldMkLst>
+      </pc:sldChg>
+      <pc:sldChg chg="del">
+        <pc:chgData name="Mohammed Fasha" userId="S::mohammed.fasha@uop.edu.jo::cc64f42d-a1a6-4f08-b97b-0c37f877119f" providerId="AD" clId="Web-{048CEBFD-D6A1-FF4F-145A-C5347D00F6D8}" dt="2025-03-23T03:16:34.240" v="436"/>
+        <pc:sldMkLst>
+          <pc:docMk/>
+          <pc:sldMk cId="1008151712" sldId="313"/>
+        </pc:sldMkLst>
+      </pc:sldChg>
+      <pc:sldChg chg="modSp">
+        <pc:chgData name="Mohammed Fasha" userId="S::mohammed.fasha@uop.edu.jo::cc64f42d-a1a6-4f08-b97b-0c37f877119f" providerId="AD" clId="Web-{048CEBFD-D6A1-FF4F-145A-C5347D00F6D8}" dt="2025-03-23T06:04:22.577" v="1166" actId="20577"/>
+        <pc:sldMkLst>
+          <pc:docMk/>
+          <pc:sldMk cId="1864506158" sldId="314"/>
+        </pc:sldMkLst>
+        <pc:spChg chg="mod">
+          <ac:chgData name="Mohammed Fasha" userId="S::mohammed.fasha@uop.edu.jo::cc64f42d-a1a6-4f08-b97b-0c37f877119f" providerId="AD" clId="Web-{048CEBFD-D6A1-FF4F-145A-C5347D00F6D8}" dt="2025-03-23T06:04:22.577" v="1166" actId="20577"/>
           <ac:spMkLst>
             <pc:docMk/>
             <pc:sldMk cId="1864506158" sldId="314"/>
@@ -3622,174 +3126,238 @@
           </ac:spMkLst>
         </pc:spChg>
       </pc:sldChg>
-      <pc:sldChg chg="modSp new">
-        <pc:chgData name="Mohammed Fasha" userId="S::mohammed.fasha@uop.edu.jo::cc64f42d-a1a6-4f08-b97b-0c37f877119f" providerId="AD" clId="Web-{2F52505F-0676-E1F8-3A9C-C74E2F5553F9}" dt="2025-03-23T06:06:23.139" v="13" actId="20577"/>
+      <pc:sldChg chg="modSp">
+        <pc:chgData name="Mohammed Fasha" userId="S::mohammed.fasha@uop.edu.jo::cc64f42d-a1a6-4f08-b97b-0c37f877119f" providerId="AD" clId="Web-{048CEBFD-D6A1-FF4F-145A-C5347D00F6D8}" dt="2025-03-23T03:13:33.830" v="401" actId="20577"/>
         <pc:sldMkLst>
           <pc:docMk/>
-          <pc:sldMk cId="3694445782" sldId="326"/>
+          <pc:sldMk cId="2845841377" sldId="315"/>
+        </pc:sldMkLst>
+      </pc:sldChg>
+      <pc:sldChg chg="del">
+        <pc:chgData name="Mohammed Fasha" userId="S::mohammed.fasha@uop.edu.jo::cc64f42d-a1a6-4f08-b97b-0c37f877119f" providerId="AD" clId="Web-{048CEBFD-D6A1-FF4F-145A-C5347D00F6D8}" dt="2025-03-23T02:57:56.519" v="0"/>
+        <pc:sldMkLst>
+          <pc:docMk/>
+          <pc:sldMk cId="4201170802" sldId="316"/>
+        </pc:sldMkLst>
+      </pc:sldChg>
+      <pc:sldChg chg="del">
+        <pc:chgData name="Mohammed Fasha" userId="S::mohammed.fasha@uop.edu.jo::cc64f42d-a1a6-4f08-b97b-0c37f877119f" providerId="AD" clId="Web-{048CEBFD-D6A1-FF4F-145A-C5347D00F6D8}" dt="2025-03-23T03:16:16.630" v="433"/>
+        <pc:sldMkLst>
+          <pc:docMk/>
+          <pc:sldMk cId="3352190066" sldId="317"/>
+        </pc:sldMkLst>
+      </pc:sldChg>
+      <pc:sldChg chg="modSp new del">
+        <pc:chgData name="Mohammed Fasha" userId="S::mohammed.fasha@uop.edu.jo::cc64f42d-a1a6-4f08-b97b-0c37f877119f" providerId="AD" clId="Web-{048CEBFD-D6A1-FF4F-145A-C5347D00F6D8}" dt="2025-03-23T03:10:23.882" v="393"/>
+        <pc:sldMkLst>
+          <pc:docMk/>
+          <pc:sldMk cId="4008238018" sldId="318"/>
+        </pc:sldMkLst>
+      </pc:sldChg>
+      <pc:sldChg chg="addSp delSp modSp new del">
+        <pc:chgData name="Mohammed Fasha" userId="S::mohammed.fasha@uop.edu.jo::cc64f42d-a1a6-4f08-b97b-0c37f877119f" providerId="AD" clId="Web-{048CEBFD-D6A1-FF4F-145A-C5347D00F6D8}" dt="2025-03-23T04:04:13.661" v="626"/>
+        <pc:sldMkLst>
+          <pc:docMk/>
+          <pc:sldMk cId="3382703493" sldId="319"/>
+        </pc:sldMkLst>
+      </pc:sldChg>
+      <pc:sldChg chg="addSp delSp modSp new">
+        <pc:chgData name="Mohammed Fasha" userId="S::mohammed.fasha@uop.edu.jo::cc64f42d-a1a6-4f08-b97b-0c37f877119f" providerId="AD" clId="Web-{048CEBFD-D6A1-FF4F-145A-C5347D00F6D8}" dt="2025-03-23T03:59:21.366" v="441" actId="1076"/>
+        <pc:sldMkLst>
+          <pc:docMk/>
+          <pc:sldMk cId="414281864" sldId="320"/>
+        </pc:sldMkLst>
+      </pc:sldChg>
+      <pc:sldChg chg="addSp delSp modSp new">
+        <pc:chgData name="Mohammed Fasha" userId="S::mohammed.fasha@uop.edu.jo::cc64f42d-a1a6-4f08-b97b-0c37f877119f" providerId="AD" clId="Web-{048CEBFD-D6A1-FF4F-145A-C5347D00F6D8}" dt="2025-03-23T04:04:06.582" v="625"/>
+        <pc:sldMkLst>
+          <pc:docMk/>
+          <pc:sldMk cId="2158520731" sldId="321"/>
         </pc:sldMkLst>
         <pc:spChg chg="mod">
-          <ac:chgData name="Mohammed Fasha" userId="S::mohammed.fasha@uop.edu.jo::cc64f42d-a1a6-4f08-b97b-0c37f877119f" providerId="AD" clId="Web-{2F52505F-0676-E1F8-3A9C-C74E2F5553F9}" dt="2025-03-23T06:05:53.435" v="10" actId="20577"/>
+          <ac:chgData name="Mohammed Fasha" userId="S::mohammed.fasha@uop.edu.jo::cc64f42d-a1a6-4f08-b97b-0c37f877119f" providerId="AD" clId="Web-{048CEBFD-D6A1-FF4F-145A-C5347D00F6D8}" dt="2025-03-23T03:06:45.017" v="158" actId="20577"/>
           <ac:spMkLst>
             <pc:docMk/>
-            <pc:sldMk cId="3694445782" sldId="326"/>
-            <ac:spMk id="2" creationId="{76E77D81-B038-7FB5-2B90-061A90EBF23E}"/>
+            <pc:sldMk cId="2158520731" sldId="321"/>
+            <ac:spMk id="2" creationId="{2CBE9B8D-9BCA-A077-FC54-F37DD1ED5A43}"/>
           </ac:spMkLst>
         </pc:spChg>
-        <pc:spChg chg="mod">
-          <ac:chgData name="Mohammed Fasha" userId="S::mohammed.fasha@uop.edu.jo::cc64f42d-a1a6-4f08-b97b-0c37f877119f" providerId="AD" clId="Web-{2F52505F-0676-E1F8-3A9C-C74E2F5553F9}" dt="2025-03-23T06:06:23.139" v="13" actId="20577"/>
+        <pc:spChg chg="add mod">
+          <ac:chgData name="Mohammed Fasha" userId="S::mohammed.fasha@uop.edu.jo::cc64f42d-a1a6-4f08-b97b-0c37f877119f" providerId="AD" clId="Web-{048CEBFD-D6A1-FF4F-145A-C5347D00F6D8}" dt="2025-03-23T04:03:57.144" v="623" actId="20577"/>
           <ac:spMkLst>
             <pc:docMk/>
-            <pc:sldMk cId="3694445782" sldId="326"/>
-            <ac:spMk id="3" creationId="{A83CAC7D-42B8-C614-E399-7F41DD29BBE0}"/>
+            <pc:sldMk cId="2158520731" sldId="321"/>
+            <ac:spMk id="6" creationId="{5CB15C33-8731-2AC8-2AA9-CC56BB604532}"/>
           </ac:spMkLst>
         </pc:spChg>
+        <pc:graphicFrameChg chg="add mod modGraphic">
+          <ac:chgData name="Mohammed Fasha" userId="S::mohammed.fasha@uop.edu.jo::cc64f42d-a1a6-4f08-b97b-0c37f877119f" providerId="AD" clId="Web-{048CEBFD-D6A1-FF4F-145A-C5347D00F6D8}" dt="2025-03-23T04:04:06.582" v="625"/>
+          <ac:graphicFrameMkLst>
+            <pc:docMk/>
+            <pc:sldMk cId="2158520731" sldId="321"/>
+            <ac:graphicFrameMk id="13" creationId="{16C5CEE9-CAE7-15B6-CD99-242FA0B68E48}"/>
+          </ac:graphicFrameMkLst>
+        </pc:graphicFrameChg>
+        <pc:graphicFrameChg chg="add mod modGraphic">
+          <ac:chgData name="Mohammed Fasha" userId="S::mohammed.fasha@uop.edu.jo::cc64f42d-a1a6-4f08-b97b-0c37f877119f" providerId="AD" clId="Web-{048CEBFD-D6A1-FF4F-145A-C5347D00F6D8}" dt="2025-03-23T04:03:46.191" v="620" actId="1076"/>
+          <ac:graphicFrameMkLst>
+            <pc:docMk/>
+            <pc:sldMk cId="2158520731" sldId="321"/>
+            <ac:graphicFrameMk id="14" creationId="{68F65CD9-04AE-694C-CAF9-ABB6912D588B}"/>
+          </ac:graphicFrameMkLst>
+        </pc:graphicFrameChg>
       </pc:sldChg>
-      <pc:sldChg chg="modSp new">
-        <pc:chgData name="Mohammed Fasha" userId="S::mohammed.fasha@uop.edu.jo::cc64f42d-a1a6-4f08-b97b-0c37f877119f" providerId="AD" clId="Web-{2F52505F-0676-E1F8-3A9C-C74E2F5553F9}" dt="2025-03-23T06:06:39.452" v="17" actId="20577"/>
+      <pc:sldChg chg="addSp delSp modSp new">
+        <pc:chgData name="Mohammed Fasha" userId="S::mohammed.fasha@uop.edu.jo::cc64f42d-a1a6-4f08-b97b-0c37f877119f" providerId="AD" clId="Web-{048CEBFD-D6A1-FF4F-145A-C5347D00F6D8}" dt="2025-03-23T04:10:25.939" v="692"/>
         <pc:sldMkLst>
           <pc:docMk/>
-          <pc:sldMk cId="659685489" sldId="327"/>
+          <pc:sldMk cId="3486990666" sldId="322"/>
         </pc:sldMkLst>
         <pc:spChg chg="mod">
-          <ac:chgData name="Mohammed Fasha" userId="S::mohammed.fasha@uop.edu.jo::cc64f42d-a1a6-4f08-b97b-0c37f877119f" providerId="AD" clId="Web-{2F52505F-0676-E1F8-3A9C-C74E2F5553F9}" dt="2025-03-23T06:06:39.452" v="17" actId="20577"/>
+          <ac:chgData name="Mohammed Fasha" userId="S::mohammed.fasha@uop.edu.jo::cc64f42d-a1a6-4f08-b97b-0c37f877119f" providerId="AD" clId="Web-{048CEBFD-D6A1-FF4F-145A-C5347D00F6D8}" dt="2025-03-23T04:09:04.561" v="672" actId="20577"/>
           <ac:spMkLst>
             <pc:docMk/>
-            <pc:sldMk cId="659685489" sldId="327"/>
-            <ac:spMk id="3" creationId="{2370F989-F40F-8A0B-AC42-50D0E7E07AEB}"/>
+            <pc:sldMk cId="3486990666" sldId="322"/>
+            <ac:spMk id="2" creationId="{4F569A76-4CE0-A134-527E-6110690A0204}"/>
           </ac:spMkLst>
         </pc:spChg>
+        <pc:graphicFrameChg chg="add mod ord modGraphic">
+          <ac:chgData name="Mohammed Fasha" userId="S::mohammed.fasha@uop.edu.jo::cc64f42d-a1a6-4f08-b97b-0c37f877119f" providerId="AD" clId="Web-{048CEBFD-D6A1-FF4F-145A-C5347D00F6D8}" dt="2025-03-23T04:10:25.939" v="692"/>
+          <ac:graphicFrameMkLst>
+            <pc:docMk/>
+            <pc:sldMk cId="3486990666" sldId="322"/>
+            <ac:graphicFrameMk id="5" creationId="{1FA2E83F-BCF2-8811-D9EB-3AB7209F9B26}"/>
+          </ac:graphicFrameMkLst>
+        </pc:graphicFrameChg>
       </pc:sldChg>
-      <pc:sldChg chg="modSp new">
-        <pc:chgData name="Mohammed Fasha" userId="S::mohammed.fasha@uop.edu.jo::cc64f42d-a1a6-4f08-b97b-0c37f877119f" providerId="AD" clId="Web-{2F52505F-0676-E1F8-3A9C-C74E2F5553F9}" dt="2025-03-23T06:07:22.532" v="22" actId="20577"/>
+      <pc:sldChg chg="addSp delSp modSp new">
+        <pc:chgData name="Mohammed Fasha" userId="S::mohammed.fasha@uop.edu.jo::cc64f42d-a1a6-4f08-b97b-0c37f877119f" providerId="AD" clId="Web-{048CEBFD-D6A1-FF4F-145A-C5347D00F6D8}" dt="2025-03-23T06:02:22.542" v="1162"/>
         <pc:sldMkLst>
           <pc:docMk/>
-          <pc:sldMk cId="4072578661" sldId="328"/>
+          <pc:sldMk cId="323566195" sldId="323"/>
         </pc:sldMkLst>
         <pc:spChg chg="mod">
-          <ac:chgData name="Mohammed Fasha" userId="S::mohammed.fasha@uop.edu.jo::cc64f42d-a1a6-4f08-b97b-0c37f877119f" providerId="AD" clId="Web-{2F52505F-0676-E1F8-3A9C-C74E2F5553F9}" dt="2025-03-23T06:07:22.532" v="22" actId="20577"/>
+          <ac:chgData name="Mohammed Fasha" userId="S::mohammed.fasha@uop.edu.jo::cc64f42d-a1a6-4f08-b97b-0c37f877119f" providerId="AD" clId="Web-{048CEBFD-D6A1-FF4F-145A-C5347D00F6D8}" dt="2025-03-23T05:55:35.003" v="727" actId="20577"/>
           <ac:spMkLst>
             <pc:docMk/>
-            <pc:sldMk cId="4072578661" sldId="328"/>
-            <ac:spMk id="3" creationId="{3C3E019B-0F20-8E05-2053-6E145189E1FD}"/>
+            <pc:sldMk cId="323566195" sldId="323"/>
+            <ac:spMk id="2" creationId="{595498DF-D91B-3039-6A35-B1D5FAB6D692}"/>
           </ac:spMkLst>
         </pc:spChg>
+        <pc:graphicFrameChg chg="add mod ord modGraphic">
+          <ac:chgData name="Mohammed Fasha" userId="S::mohammed.fasha@uop.edu.jo::cc64f42d-a1a6-4f08-b97b-0c37f877119f" providerId="AD" clId="Web-{048CEBFD-D6A1-FF4F-145A-C5347D00F6D8}" dt="2025-03-23T06:02:22.542" v="1162"/>
+          <ac:graphicFrameMkLst>
+            <pc:docMk/>
+            <pc:sldMk cId="323566195" sldId="323"/>
+            <ac:graphicFrameMk id="82" creationId="{135E2F87-A441-0139-1576-BC186FCA12A1}"/>
+          </ac:graphicFrameMkLst>
+        </pc:graphicFrameChg>
       </pc:sldChg>
-      <pc:sldChg chg="modSp new">
-        <pc:chgData name="Mohammed Fasha" userId="S::mohammed.fasha@uop.edu.jo::cc64f42d-a1a6-4f08-b97b-0c37f877119f" providerId="AD" clId="Web-{2F52505F-0676-E1F8-3A9C-C74E2F5553F9}" dt="2025-03-23T06:07:25.672" v="25" actId="20577"/>
+      <pc:sldChg chg="modSp add replId">
+        <pc:chgData name="Mohammed Fasha" userId="S::mohammed.fasha@uop.edu.jo::cc64f42d-a1a6-4f08-b97b-0c37f877119f" providerId="AD" clId="Web-{048CEBFD-D6A1-FF4F-145A-C5347D00F6D8}" dt="2025-03-23T06:02:28.917" v="1163"/>
         <pc:sldMkLst>
           <pc:docMk/>
-          <pc:sldMk cId="3366111495" sldId="329"/>
+          <pc:sldMk cId="2802975669" sldId="324"/>
         </pc:sldMkLst>
-        <pc:spChg chg="mod">
-          <ac:chgData name="Mohammed Fasha" userId="S::mohammed.fasha@uop.edu.jo::cc64f42d-a1a6-4f08-b97b-0c37f877119f" providerId="AD" clId="Web-{2F52505F-0676-E1F8-3A9C-C74E2F5553F9}" dt="2025-03-23T06:07:25.672" v="25" actId="20577"/>
+        <pc:graphicFrameChg chg="modGraphic">
+          <ac:chgData name="Mohammed Fasha" userId="S::mohammed.fasha@uop.edu.jo::cc64f42d-a1a6-4f08-b97b-0c37f877119f" providerId="AD" clId="Web-{048CEBFD-D6A1-FF4F-145A-C5347D00F6D8}" dt="2025-03-23T06:02:28.917" v="1163"/>
+          <ac:graphicFrameMkLst>
+            <pc:docMk/>
+            <pc:sldMk cId="2802975669" sldId="324"/>
+            <ac:graphicFrameMk id="82" creationId="{E61DA268-6635-1C98-1674-A7AD4D8991C6}"/>
+          </ac:graphicFrameMkLst>
+        </pc:graphicFrameChg>
+      </pc:sldChg>
+      <pc:sldChg chg="modSp new mod modClrScheme chgLayout">
+        <pc:chgData name="Mohammed Fasha" userId="S::mohammed.fasha@uop.edu.jo::cc64f42d-a1a6-4f08-b97b-0c37f877119f" providerId="AD" clId="Web-{048CEBFD-D6A1-FF4F-145A-C5347D00F6D8}" dt="2025-03-23T06:01:57.150" v="1158" actId="20577"/>
+        <pc:sldMkLst>
+          <pc:docMk/>
+          <pc:sldMk cId="1195465549" sldId="325"/>
+        </pc:sldMkLst>
+        <pc:spChg chg="mod ord">
+          <ac:chgData name="Mohammed Fasha" userId="S::mohammed.fasha@uop.edu.jo::cc64f42d-a1a6-4f08-b97b-0c37f877119f" providerId="AD" clId="Web-{048CEBFD-D6A1-FF4F-145A-C5347D00F6D8}" dt="2025-03-23T06:01:57.150" v="1158" actId="20577"/>
           <ac:spMkLst>
             <pc:docMk/>
-            <pc:sldMk cId="3366111495" sldId="329"/>
-            <ac:spMk id="3" creationId="{9D118BE8-48E4-84B1-F7A3-AE58B873B879}"/>
+            <pc:sldMk cId="1195465549" sldId="325"/>
+            <ac:spMk id="2" creationId="{C40B076E-5F79-27B6-B774-38C83230BBDD}"/>
+          </ac:spMkLst>
+        </pc:spChg>
+        <pc:spChg chg="mod ord">
+          <ac:chgData name="Mohammed Fasha" userId="S::mohammed.fasha@uop.edu.jo::cc64f42d-a1a6-4f08-b97b-0c37f877119f" providerId="AD" clId="Web-{048CEBFD-D6A1-FF4F-145A-C5347D00F6D8}" dt="2025-03-23T06:01:44.322" v="1142"/>
+          <ac:spMkLst>
+            <pc:docMk/>
+            <pc:sldMk cId="1195465549" sldId="325"/>
+            <ac:spMk id="3" creationId="{82C6206C-8193-A125-EB18-48C260C8432B}"/>
           </ac:spMkLst>
         </pc:spChg>
       </pc:sldChg>
     </pc:docChg>
   </pc:docChgLst>
   <pc:docChgLst>
-    <pc:chgData name="Mohammed Fasha" userId="S::mohammed.fasha@uop.edu.jo::cc64f42d-a1a6-4f08-b97b-0c37f877119f" providerId="AD" clId="Web-{411F16AF-03A3-6BA1-B79B-E9FB6FBED36A}"/>
+    <pc:chgData name="Mohammed Fasha" userId="S::mohammed.fasha@uop.edu.jo::cc64f42d-a1a6-4f08-b97b-0c37f877119f" providerId="AD" clId="Web-{3873209A-CB00-400D-D158-6330B83C4A7A}"/>
     <pc:docChg chg="addSld delSld modSld">
-      <pc:chgData name="Mohammed Fasha" userId="S::mohammed.fasha@uop.edu.jo::cc64f42d-a1a6-4f08-b97b-0c37f877119f" providerId="AD" clId="Web-{411F16AF-03A3-6BA1-B79B-E9FB6FBED36A}" dt="2025-03-17T05:47:39.406" v="102"/>
+      <pc:chgData name="Mohammed Fasha" userId="S::mohammed.fasha@uop.edu.jo::cc64f42d-a1a6-4f08-b97b-0c37f877119f" providerId="AD" clId="Web-{3873209A-CB00-400D-D158-6330B83C4A7A}" dt="2025-03-19T03:11:02.319" v="274" actId="20577"/>
       <pc:docMkLst>
         <pc:docMk/>
       </pc:docMkLst>
-      <pc:sldChg chg="add del">
-        <pc:chgData name="Mohammed Fasha" userId="S::mohammed.fasha@uop.edu.jo::cc64f42d-a1a6-4f08-b97b-0c37f877119f" providerId="AD" clId="Web-{411F16AF-03A3-6BA1-B79B-E9FB6FBED36A}" dt="2025-03-17T05:47:39.406" v="102"/>
+      <pc:sldChg chg="modSp">
+        <pc:chgData name="Mohammed Fasha" userId="S::mohammed.fasha@uop.edu.jo::cc64f42d-a1a6-4f08-b97b-0c37f877119f" providerId="AD" clId="Web-{3873209A-CB00-400D-D158-6330B83C4A7A}" dt="2025-03-19T03:03:32.760" v="103" actId="14100"/>
         <pc:sldMkLst>
           <pc:docMk/>
-          <pc:sldMk cId="3262872071" sldId="267"/>
+          <pc:sldMk cId="0" sldId="278"/>
         </pc:sldMkLst>
-      </pc:sldChg>
-      <pc:sldChg chg="addSp delSp modSp new add del">
-        <pc:chgData name="Mohammed Fasha" userId="S::mohammed.fasha@uop.edu.jo::cc64f42d-a1a6-4f08-b97b-0c37f877119f" providerId="AD" clId="Web-{411F16AF-03A3-6BA1-B79B-E9FB6FBED36A}" dt="2025-03-17T05:47:39.406" v="101"/>
-        <pc:sldMkLst>
-          <pc:docMk/>
-          <pc:sldMk cId="3133918167" sldId="304"/>
-        </pc:sldMkLst>
-      </pc:sldChg>
-      <pc:sldChg chg="addSp delSp modSp new add del">
-        <pc:chgData name="Mohammed Fasha" userId="S::mohammed.fasha@uop.edu.jo::cc64f42d-a1a6-4f08-b97b-0c37f877119f" providerId="AD" clId="Web-{411F16AF-03A3-6BA1-B79B-E9FB6FBED36A}" dt="2025-03-17T05:47:39.406" v="100"/>
-        <pc:sldMkLst>
-          <pc:docMk/>
-          <pc:sldMk cId="3673227071" sldId="305"/>
-        </pc:sldMkLst>
-      </pc:sldChg>
-    </pc:docChg>
-  </pc:docChgLst>
-  <pc:docChgLst>
-    <pc:chgData name="Mohammed Fasha" userId="S::mohammed.fasha@uop.edu.jo::cc64f42d-a1a6-4f08-b97b-0c37f877119f" providerId="AD" clId="Web-{36B9E10C-9544-F05A-23A9-185BAFD9898D}"/>
-    <pc:docChg chg="addSld modSld">
-      <pc:chgData name="Mohammed Fasha" userId="S::mohammed.fasha@uop.edu.jo::cc64f42d-a1a6-4f08-b97b-0c37f877119f" providerId="AD" clId="Web-{36B9E10C-9544-F05A-23A9-185BAFD9898D}" dt="2025-03-23T12:04:32.957" v="76"/>
-      <pc:docMkLst>
-        <pc:docMk/>
-      </pc:docMkLst>
-      <pc:sldChg chg="addSp delSp modSp">
-        <pc:chgData name="Mohammed Fasha" userId="S::mohammed.fasha@uop.edu.jo::cc64f42d-a1a6-4f08-b97b-0c37f877119f" providerId="AD" clId="Web-{36B9E10C-9544-F05A-23A9-185BAFD9898D}" dt="2025-03-23T12:04:32.957" v="76"/>
-        <pc:sldMkLst>
-          <pc:docMk/>
-          <pc:sldMk cId="0" sldId="274"/>
-        </pc:sldMkLst>
-        <pc:picChg chg="add del mod">
-          <ac:chgData name="Mohammed Fasha" userId="S::mohammed.fasha@uop.edu.jo::cc64f42d-a1a6-4f08-b97b-0c37f877119f" providerId="AD" clId="Web-{36B9E10C-9544-F05A-23A9-185BAFD9898D}" dt="2025-03-23T12:04:30.175" v="75"/>
+        <pc:spChg chg="mod">
+          <ac:chgData name="Mohammed Fasha" userId="S::mohammed.fasha@uop.edu.jo::cc64f42d-a1a6-4f08-b97b-0c37f877119f" providerId="AD" clId="Web-{3873209A-CB00-400D-D158-6330B83C4A7A}" dt="2025-03-19T03:03:32.760" v="103" actId="14100"/>
+          <ac:spMkLst>
+            <pc:docMk/>
+            <pc:sldMk cId="0" sldId="278"/>
+            <ac:spMk id="2" creationId="{00000000-0000-0000-0000-000000000000}"/>
+          </ac:spMkLst>
+        </pc:spChg>
+        <pc:picChg chg="mod">
+          <ac:chgData name="Mohammed Fasha" userId="S::mohammed.fasha@uop.edu.jo::cc64f42d-a1a6-4f08-b97b-0c37f877119f" providerId="AD" clId="Web-{3873209A-CB00-400D-D158-6330B83C4A7A}" dt="2025-03-19T03:03:17.822" v="100" actId="1076"/>
           <ac:picMkLst>
             <pc:docMk/>
-            <pc:sldMk cId="0" sldId="274"/>
-            <ac:picMk id="3" creationId="{3A2BDE6D-2370-007D-DFBC-E92DCE7454F3}"/>
+            <pc:sldMk cId="0" sldId="278"/>
+            <ac:picMk id="4" creationId="{00000000-0000-0000-0000-000000000000}"/>
           </ac:picMkLst>
         </pc:picChg>
-        <pc:picChg chg="add del">
-          <ac:chgData name="Mohammed Fasha" userId="S::mohammed.fasha@uop.edu.jo::cc64f42d-a1a6-4f08-b97b-0c37f877119f" providerId="AD" clId="Web-{36B9E10C-9544-F05A-23A9-185BAFD9898D}" dt="2025-03-23T12:04:32.957" v="76"/>
+        <pc:picChg chg="mod">
+          <ac:chgData name="Mohammed Fasha" userId="S::mohammed.fasha@uop.edu.jo::cc64f42d-a1a6-4f08-b97b-0c37f877119f" providerId="AD" clId="Web-{3873209A-CB00-400D-D158-6330B83C4A7A}" dt="2025-03-19T03:03:23.119" v="101" actId="1076"/>
           <ac:picMkLst>
             <pc:docMk/>
-            <pc:sldMk cId="0" sldId="274"/>
-            <ac:picMk id="6" creationId="{00000000-0000-0000-0000-000000000000}"/>
+            <pc:sldMk cId="0" sldId="278"/>
+            <ac:picMk id="5" creationId="{00000000-0000-0000-0000-000000000000}"/>
           </ac:picMkLst>
         </pc:picChg>
       </pc:sldChg>
-      <pc:sldChg chg="addSp modSp new">
-        <pc:chgData name="Mohammed Fasha" userId="S::mohammed.fasha@uop.edu.jo::cc64f42d-a1a6-4f08-b97b-0c37f877119f" providerId="AD" clId="Web-{36B9E10C-9544-F05A-23A9-185BAFD9898D}" dt="2025-03-23T12:02:36.938" v="60" actId="1076"/>
+      <pc:sldChg chg="addSp delSp modSp new">
+        <pc:chgData name="Mohammed Fasha" userId="S::mohammed.fasha@uop.edu.jo::cc64f42d-a1a6-4f08-b97b-0c37f877119f" providerId="AD" clId="Web-{3873209A-CB00-400D-D158-6330B83C4A7A}" dt="2025-03-19T03:11:02.319" v="274" actId="20577"/>
         <pc:sldMkLst>
           <pc:docMk/>
-          <pc:sldMk cId="2059959534" sldId="330"/>
+          <pc:sldMk cId="441052949" sldId="309"/>
         </pc:sldMkLst>
-        <pc:spChg chg="mod">
-          <ac:chgData name="Mohammed Fasha" userId="S::mohammed.fasha@uop.edu.jo::cc64f42d-a1a6-4f08-b97b-0c37f877119f" providerId="AD" clId="Web-{36B9E10C-9544-F05A-23A9-185BAFD9898D}" dt="2025-03-23T12:01:21.983" v="40" actId="20577"/>
-          <ac:spMkLst>
-            <pc:docMk/>
-            <pc:sldMk cId="2059959534" sldId="330"/>
-            <ac:spMk id="3" creationId="{CAE29CE7-34A3-D84A-09F7-F1FE82DFE999}"/>
-          </ac:spMkLst>
-        </pc:spChg>
-        <pc:spChg chg="add mod">
-          <ac:chgData name="Mohammed Fasha" userId="S::mohammed.fasha@uop.edu.jo::cc64f42d-a1a6-4f08-b97b-0c37f877119f" providerId="AD" clId="Web-{36B9E10C-9544-F05A-23A9-185BAFD9898D}" dt="2025-03-23T12:02:36.938" v="60" actId="1076"/>
-          <ac:spMkLst>
-            <pc:docMk/>
-            <pc:sldMk cId="2059959534" sldId="330"/>
-            <ac:spMk id="6" creationId="{DF962A98-4E4C-ECF1-BFA0-EDDF016A1D0C}"/>
-          </ac:spMkLst>
-        </pc:spChg>
-        <pc:picChg chg="add mod">
-          <ac:chgData name="Mohammed Fasha" userId="S::mohammed.fasha@uop.edu.jo::cc64f42d-a1a6-4f08-b97b-0c37f877119f" providerId="AD" clId="Web-{36B9E10C-9544-F05A-23A9-185BAFD9898D}" dt="2025-03-23T12:01:27.639" v="41" actId="1076"/>
-          <ac:picMkLst>
-            <pc:docMk/>
-            <pc:sldMk cId="2059959534" sldId="330"/>
-            <ac:picMk id="4" creationId="{78519047-ADEA-92C2-247C-84D5B7034606}"/>
-          </ac:picMkLst>
-        </pc:picChg>
-        <pc:picChg chg="add mod">
-          <ac:chgData name="Mohammed Fasha" userId="S::mohammed.fasha@uop.edu.jo::cc64f42d-a1a6-4f08-b97b-0c37f877119f" providerId="AD" clId="Web-{36B9E10C-9544-F05A-23A9-185BAFD9898D}" dt="2025-03-23T12:01:45.280" v="46" actId="1076"/>
-          <ac:picMkLst>
-            <pc:docMk/>
-            <pc:sldMk cId="2059959534" sldId="330"/>
-            <ac:picMk id="5" creationId="{8F67E074-5434-08BD-8BD1-BAAB11107FC6}"/>
-          </ac:picMkLst>
-        </pc:picChg>
+      </pc:sldChg>
+      <pc:sldChg chg="add del replId">
+        <pc:chgData name="Mohammed Fasha" userId="S::mohammed.fasha@uop.edu.jo::cc64f42d-a1a6-4f08-b97b-0c37f877119f" providerId="AD" clId="Web-{3873209A-CB00-400D-D158-6330B83C4A7A}" dt="2025-03-19T03:02:14.461" v="73"/>
+        <pc:sldMkLst>
+          <pc:docMk/>
+          <pc:sldMk cId="3859015806" sldId="310"/>
+        </pc:sldMkLst>
+      </pc:sldChg>
+      <pc:sldChg chg="addSp delSp modSp add replId">
+        <pc:chgData name="Mohammed Fasha" userId="S::mohammed.fasha@uop.edu.jo::cc64f42d-a1a6-4f08-b97b-0c37f877119f" providerId="AD" clId="Web-{3873209A-CB00-400D-D158-6330B83C4A7A}" dt="2025-03-19T03:08:53.628" v="161" actId="20577"/>
+        <pc:sldMkLst>
+          <pc:docMk/>
+          <pc:sldMk cId="4115587381" sldId="311"/>
+        </pc:sldMkLst>
+      </pc:sldChg>
+      <pc:sldChg chg="addSp delSp modSp new del">
+        <pc:chgData name="Mohammed Fasha" userId="S::mohammed.fasha@uop.edu.jo::cc64f42d-a1a6-4f08-b97b-0c37f877119f" providerId="AD" clId="Web-{3873209A-CB00-400D-D158-6330B83C4A7A}" dt="2025-03-19T03:07:33.079" v="142"/>
+        <pc:sldMkLst>
+          <pc:docMk/>
+          <pc:sldMk cId="1952534702" sldId="312"/>
+        </pc:sldMkLst>
       </pc:sldChg>
     </pc:docChg>
   </pc:docChgLst>
@@ -3878,7 +3446,7 @@
           <a:p>
             <a:fld id="{13BA03A4-B9F1-404C-8A74-B1AFD6480953}" type="datetimeFigureOut">
               <a:rPr lang="en-US" smtClean="0"/>
-              <a:t>3/23/2025</a:t>
+              <a:t>3/26/2025</a:t>
             </a:fld>
             <a:endParaRPr lang="en-US"/>
           </a:p>
@@ -4292,7 +3860,7 @@
           <a:p>
             <a:fld id="{0DB78E95-DE77-44D3-BDB9-E242948FB112}" type="datetimeFigureOut">
               <a:rPr lang="en-US" smtClean="0"/>
-              <a:t>3/23/2025</a:t>
+              <a:t>3/26/2025</a:t>
             </a:fld>
             <a:endParaRPr lang="en-US"/>
           </a:p>
@@ -4490,7 +4058,7 @@
           <a:p>
             <a:fld id="{0DB78E95-DE77-44D3-BDB9-E242948FB112}" type="datetimeFigureOut">
               <a:rPr lang="en-US" smtClean="0"/>
-              <a:t>3/23/2025</a:t>
+              <a:t>3/26/2025</a:t>
             </a:fld>
             <a:endParaRPr lang="en-US"/>
           </a:p>
@@ -4698,7 +4266,7 @@
           <a:p>
             <a:fld id="{0DB78E95-DE77-44D3-BDB9-E242948FB112}" type="datetimeFigureOut">
               <a:rPr lang="en-US" smtClean="0"/>
-              <a:t>3/23/2025</a:t>
+              <a:t>3/26/2025</a:t>
             </a:fld>
             <a:endParaRPr lang="en-US"/>
           </a:p>
@@ -5018,7 +4586,7 @@
           <a:p>
             <a:fld id="{1D8BD707-D9CF-40AE-B4C6-C98DA3205C09}" type="datetimeFigureOut">
               <a:rPr lang="en-US"/>
-              <a:t>3/23/2025</a:t>
+              <a:t>3/26/2025</a:t>
             </a:fld>
             <a:endParaRPr lang="en-US"/>
           </a:p>
@@ -5243,7 +4811,7 @@
           <a:p>
             <a:fld id="{1D8BD707-D9CF-40AE-B4C6-C98DA3205C09}" type="datetimeFigureOut">
               <a:rPr lang="en-US"/>
-              <a:t>3/23/2025</a:t>
+              <a:t>3/26/2025</a:t>
             </a:fld>
             <a:endParaRPr lang="en-US"/>
           </a:p>
@@ -5654,7 +5222,7 @@
           <a:p>
             <a:fld id="{0DB78E95-DE77-44D3-BDB9-E242948FB112}" type="datetimeFigureOut">
               <a:rPr lang="en-US" smtClean="0"/>
-              <a:t>3/23/2025</a:t>
+              <a:t>3/26/2025</a:t>
             </a:fld>
             <a:endParaRPr lang="en-US"/>
           </a:p>
@@ -6033,7 +5601,7 @@
           <a:p>
             <a:fld id="{0DB78E95-DE77-44D3-BDB9-E242948FB112}" type="datetimeFigureOut">
               <a:rPr lang="en-US" smtClean="0"/>
-              <a:t>3/23/2025</a:t>
+              <a:t>3/26/2025</a:t>
             </a:fld>
             <a:endParaRPr lang="en-US"/>
           </a:p>
@@ -6445,7 +6013,7 @@
           <a:p>
             <a:fld id="{0DB78E95-DE77-44D3-BDB9-E242948FB112}" type="datetimeFigureOut">
               <a:rPr lang="en-US" smtClean="0"/>
-              <a:t>3/23/2025</a:t>
+              <a:t>3/26/2025</a:t>
             </a:fld>
             <a:endParaRPr lang="en-US"/>
           </a:p>
@@ -6586,7 +6154,7 @@
           <a:p>
             <a:fld id="{0DB78E95-DE77-44D3-BDB9-E242948FB112}" type="datetimeFigureOut">
               <a:rPr lang="en-US" smtClean="0"/>
-              <a:t>3/23/2025</a:t>
+              <a:t>3/26/2025</a:t>
             </a:fld>
             <a:endParaRPr lang="en-US"/>
           </a:p>
@@ -6699,7 +6267,7 @@
           <a:p>
             <a:fld id="{0DB78E95-DE77-44D3-BDB9-E242948FB112}" type="datetimeFigureOut">
               <a:rPr lang="en-US" smtClean="0"/>
-              <a:t>3/23/2025</a:t>
+              <a:t>3/26/2025</a:t>
             </a:fld>
             <a:endParaRPr lang="en-US"/>
           </a:p>
@@ -7010,7 +6578,7 @@
           <a:p>
             <a:fld id="{0DB78E95-DE77-44D3-BDB9-E242948FB112}" type="datetimeFigureOut">
               <a:rPr lang="en-US" smtClean="0"/>
-              <a:t>3/23/2025</a:t>
+              <a:t>3/26/2025</a:t>
             </a:fld>
             <a:endParaRPr lang="en-US"/>
           </a:p>
@@ -7298,7 +6866,7 @@
           <a:p>
             <a:fld id="{0DB78E95-DE77-44D3-BDB9-E242948FB112}" type="datetimeFigureOut">
               <a:rPr lang="en-US" smtClean="0"/>
-              <a:t>3/23/2025</a:t>
+              <a:t>3/26/2025</a:t>
             </a:fld>
             <a:endParaRPr lang="en-US"/>
           </a:p>
@@ -7539,7 +7107,7 @@
           <a:p>
             <a:fld id="{0DB78E95-DE77-44D3-BDB9-E242948FB112}" type="datetimeFigureOut">
               <a:rPr lang="en-US" smtClean="0"/>
-              <a:t>3/23/2025</a:t>
+              <a:t>3/26/2025</a:t>
             </a:fld>
             <a:endParaRPr lang="en-US"/>
           </a:p>
@@ -13335,7 +12903,7 @@
               </a:rPr>
               <a:t>sparse, semi-structured, and unstructured data.</a:t>
             </a:r>
-            <a:endParaRPr lang="en-US">
+            <a:endParaRPr lang="en-US" dirty="0">
               <a:solidFill>
                 <a:srgbClr val="FF0000"/>
               </a:solidFill>
@@ -13580,8 +13148,8 @@
         </p:nvSpPr>
         <p:spPr>
           <a:xfrm>
-            <a:off x="287268" y="4785091"/>
-            <a:ext cx="7261252" cy="1241365"/>
+            <a:off x="8005883" y="5200022"/>
+            <a:ext cx="4202996" cy="1367041"/>
           </a:xfrm>
           <a:prstGeom prst="rect">
             <a:avLst/>
@@ -13603,7 +13171,7 @@
               </a:lnSpc>
             </a:pPr>
             <a:r>
-              <a:rPr lang="en-US" sz="1400" b="1" dirty="0">
+              <a:rPr lang="en-US" sz="1200" b="1" dirty="0">
                 <a:ea typeface="Calibri" panose="020F0502020204030204"/>
                 <a:cs typeface="Arial"/>
               </a:rPr>
@@ -13619,18 +13187,18 @@
               <a:buChar char="•"/>
             </a:pPr>
             <a:r>
-              <a:rPr lang="en-US" sz="1400" b="1" dirty="0" err="1">
+              <a:rPr lang="en-US" sz="1200" b="1" dirty="0" err="1">
                 <a:cs typeface="Arial"/>
               </a:rPr>
               <a:t>HMaster</a:t>
             </a:r>
             <a:r>
-              <a:rPr lang="en-US" sz="1400" dirty="0">
+              <a:rPr lang="en-US" sz="1200" dirty="0">
                 <a:cs typeface="Arial"/>
               </a:rPr>
               <a:t>: Manages the cluster.​</a:t>
             </a:r>
-            <a:endParaRPr lang="en-US" dirty="0">
+            <a:endParaRPr lang="en-US" sz="1200" dirty="0">
               <a:ea typeface="Calibri"/>
               <a:cs typeface="Calibri"/>
             </a:endParaRPr>
@@ -13644,18 +13212,18 @@
               <a:buChar char="•"/>
             </a:pPr>
             <a:r>
-              <a:rPr lang="en-US" sz="1400" b="1" dirty="0" err="1">
+              <a:rPr lang="en-US" sz="1200" b="1" dirty="0" err="1">
                 <a:cs typeface="Arial"/>
               </a:rPr>
               <a:t>RegionServer</a:t>
             </a:r>
             <a:r>
-              <a:rPr lang="en-US" sz="1400" dirty="0">
+              <a:rPr lang="en-US" sz="1200" dirty="0">
                 <a:cs typeface="Arial"/>
               </a:rPr>
               <a:t>: Handles read/write requests for regions of the database.​</a:t>
             </a:r>
-            <a:endParaRPr lang="en-US" sz="1400" dirty="0">
+            <a:endParaRPr lang="en-US" sz="1200" dirty="0">
               <a:ea typeface="Calibri"/>
               <a:cs typeface="Arial"/>
             </a:endParaRPr>
@@ -13669,18 +13237,18 @@
               <a:buChar char="•"/>
             </a:pPr>
             <a:r>
-              <a:rPr lang="en-US" sz="1400" b="1" dirty="0" err="1">
+              <a:rPr lang="en-US" sz="1200" b="1" dirty="0" err="1">
                 <a:cs typeface="Arial"/>
               </a:rPr>
               <a:t>ZooKeeper</a:t>
             </a:r>
             <a:r>
-              <a:rPr lang="en-US" sz="1400" dirty="0">
+              <a:rPr lang="en-US" sz="1200" dirty="0">
                 <a:cs typeface="Arial"/>
               </a:rPr>
               <a:t>: Manages distributed coordination.​</a:t>
             </a:r>
-            <a:endParaRPr lang="en-US" sz="1400" dirty="0">
+            <a:endParaRPr lang="en-US" sz="1200" dirty="0">
               <a:ea typeface="Calibri"/>
               <a:cs typeface="Arial"/>
             </a:endParaRPr>
@@ -13690,7 +13258,7 @@
               <a:buFont typeface=""/>
               <a:buChar char="•"/>
             </a:pPr>
-            <a:endParaRPr lang="en-US">
+            <a:endParaRPr lang="en-US" sz="1200" dirty="0">
               <a:latin typeface="Arial"/>
               <a:cs typeface="Arial"/>
             </a:endParaRPr>
@@ -13776,7 +13344,7 @@
         <p:spPr>
           <a:xfrm>
             <a:off x="284085" y="1712750"/>
-            <a:ext cx="11002281" cy="1828403"/>
+            <a:ext cx="11002281" cy="559803"/>
           </a:xfrm>
           <a:prstGeom prst="rect">
             <a:avLst/>
@@ -13994,48 +13562,10 @@
             </a:r>
           </a:p>
           <a:p>
-            <a:r>
-              <a:rPr lang="en-US" dirty="0">
-                <a:ea typeface="+mn-lt"/>
-                <a:cs typeface="+mn-lt"/>
-              </a:rPr>
-              <a:t>We must </a:t>
-            </a:r>
-            <a:r>
-              <a:rPr lang="en-US" dirty="0">
-                <a:solidFill>
-                  <a:srgbClr val="FF0000"/>
-                </a:solidFill>
-                <a:ea typeface="+mn-lt"/>
-                <a:cs typeface="+mn-lt"/>
-              </a:rPr>
-              <a:t>comply with column families</a:t>
-            </a:r>
-            <a:r>
-              <a:rPr lang="en-US" dirty="0">
-                <a:ea typeface="+mn-lt"/>
-                <a:cs typeface="+mn-lt"/>
-              </a:rPr>
-              <a:t> when we insert data into the table.</a:t>
-            </a:r>
-          </a:p>
-          <a:p>
-            <a:r>
-              <a:rPr lang="en-US" dirty="0">
-                <a:ea typeface="+mn-lt"/>
-                <a:cs typeface="+mn-lt"/>
-              </a:rPr>
-              <a:t>Column families are employed for storage and fast retrieval – HBase is Column Oriented Database.</a:t>
-            </a:r>
-          </a:p>
-          <a:p>
-            <a:r>
-              <a:rPr lang="en-US" dirty="0">
-                <a:ea typeface="+mn-lt"/>
-                <a:cs typeface="+mn-lt"/>
-              </a:rPr>
-              <a:t>But we can use different column names within the column family e.g. </a:t>
-            </a:r>
+            <a:endParaRPr lang="en-US" dirty="0">
+              <a:ea typeface="+mn-lt"/>
+              <a:cs typeface="+mn-lt"/>
+            </a:endParaRPr>
           </a:p>
         </p:txBody>
       </p:sp>
@@ -14054,14 +13584,14 @@
           <p:nvPr>
             <p:extLst>
               <p:ext uri="{D42A27DB-BD31-4B8C-83A1-F6EECF244321}">
-                <p14:modId xmlns:p14="http://schemas.microsoft.com/office/powerpoint/2010/main" val="1946637706"/>
+                <p14:modId xmlns:p14="http://schemas.microsoft.com/office/powerpoint/2010/main" val="151577830"/>
               </p:ext>
             </p:extLst>
           </p:nvPr>
         </p:nvGraphicFramePr>
         <p:xfrm>
-          <a:off x="215788" y="5549788"/>
-          <a:ext cx="6237911" cy="548640"/>
+          <a:off x="215788" y="6080763"/>
+          <a:ext cx="6237911" cy="644651"/>
         </p:xfrm>
         <a:graphic>
           <a:graphicData uri="http://schemas.openxmlformats.org/drawingml/2006/table">
@@ -14085,7 +13615,7 @@
                   </a:extLst>
                 </a:gridCol>
               </a:tblGrid>
-              <a:tr h="0">
+              <a:tr h="370331">
                 <a:tc>
                   <a:txBody>
                     <a:bodyPr/>
@@ -14159,7 +13689,7 @@
                   </a:ext>
                 </a:extLst>
               </a:tr>
-              <a:tr h="0">
+              <a:tr h="170205">
                 <a:tc>
                   <a:txBody>
                     <a:bodyPr/>
@@ -14198,15 +13728,15 @@
                     <a:lstStyle/>
                     <a:p>
                       <a:r>
-                        <a:rPr lang="en-US" sz="1200"/>
+                        <a:rPr lang="en-US" sz="1200" dirty="0"/>
                         <a:t>Yes, </a:t>
                       </a:r>
                       <a:r>
-                        <a:rPr lang="en-US" sz="1200" b="1"/>
+                        <a:rPr lang="en-US" sz="1200" b="1" dirty="0"/>
                         <a:t>for column families</a:t>
                       </a:r>
                       <a:r>
-                        <a:rPr lang="en-US" sz="1200"/>
+                        <a:rPr lang="en-US" sz="1200" dirty="0"/>
                         <a:t> – must be defined when the table is created.</a:t>
                       </a:r>
                     </a:p>
@@ -14252,13 +13782,13 @@
           <p:nvPr>
             <p:extLst>
               <p:ext uri="{D42A27DB-BD31-4B8C-83A1-F6EECF244321}">
-                <p14:modId xmlns:p14="http://schemas.microsoft.com/office/powerpoint/2010/main" val="977089729"/>
+                <p14:modId xmlns:p14="http://schemas.microsoft.com/office/powerpoint/2010/main" val="46418871"/>
               </p:ext>
             </p:extLst>
           </p:nvPr>
         </p:nvGraphicFramePr>
         <p:xfrm>
-          <a:off x="217946" y="3885013"/>
+          <a:off x="215788" y="4508405"/>
           <a:ext cx="9730040" cy="1371600"/>
         </p:xfrm>
         <a:graphic>
@@ -14318,7 +13848,7 @@
                         <a:t>'</a:t>
                       </a:r>
                       <a:r>
-                        <a:rPr lang="en-US" sz="1200" u="none" strike="noStrike" noProof="0" err="1">
+                        <a:rPr lang="en-US" sz="1200" u="none" strike="noStrike" noProof="0" dirty="0" err="1">
                           <a:solidFill>
                             <a:srgbClr val="FF0000"/>
                           </a:solidFill>
@@ -14326,7 +13856,7 @@
                         <a:t>personal</a:t>
                       </a:r>
                       <a:r>
-                        <a:rPr lang="en-US" sz="1200" u="none" strike="noStrike" noProof="0" err="1">
+                        <a:rPr lang="en-US" sz="1200" u="none" strike="noStrike" noProof="0" dirty="0" err="1">
                           <a:solidFill>
                             <a:srgbClr val="000000"/>
                           </a:solidFill>
@@ -14334,7 +13864,7 @@
                         <a:t>:</a:t>
                       </a:r>
                       <a:r>
-                        <a:rPr lang="en-US" sz="1200" u="none" strike="noStrike" noProof="0" err="1">
+                        <a:rPr lang="en-US" sz="1200" u="none" strike="noStrike" noProof="0" dirty="0" err="1">
                           <a:solidFill>
                             <a:srgbClr val="0070C0"/>
                           </a:solidFill>
@@ -14437,7 +13967,7 @@
                         <a:t>'</a:t>
                       </a:r>
                       <a:r>
-                        <a:rPr lang="en-US" sz="1200" b="1" u="none" strike="noStrike" noProof="0" err="1">
+                        <a:rPr lang="en-US" sz="1200" b="1" u="none" strike="noStrike" noProof="0" dirty="0" err="1">
                           <a:solidFill>
                             <a:srgbClr val="FF0000"/>
                           </a:solidFill>
@@ -14445,7 +13975,7 @@
                         <a:t>personal</a:t>
                       </a:r>
                       <a:r>
-                        <a:rPr lang="en-US" sz="1200" u="none" strike="noStrike" noProof="0" err="1">
+                        <a:rPr lang="en-US" sz="1200" u="none" strike="noStrike" noProof="0" dirty="0" err="1">
                           <a:solidFill>
                             <a:srgbClr val="000000"/>
                           </a:solidFill>
@@ -14453,7 +13983,7 @@
                         <a:t>:</a:t>
                       </a:r>
                       <a:r>
-                        <a:rPr lang="en-US" sz="1200" b="1" u="none" strike="noStrike" noProof="0" err="1">
+                        <a:rPr lang="en-US" sz="1200" b="1" u="none" strike="noStrike" noProof="0" dirty="0" err="1">
                           <a:solidFill>
                             <a:srgbClr val="0070C0"/>
                           </a:solidFill>
@@ -14591,6 +14121,364 @@
                         <a:buNone/>
                       </a:pPr>
                       <a:endParaRPr lang="en-US" sz="1200" dirty="0"/>
+                    </a:p>
+                  </a:txBody>
+                  <a:tcPr/>
+                </a:tc>
+                <a:tc>
+                  <a:txBody>
+                    <a:bodyPr/>
+                    <a:lstStyle/>
+                    <a:p>
+                      <a:pPr marL="0" marR="0" lvl="0" indent="0" algn="l">
+                        <a:lnSpc>
+                          <a:spcPct val="100000"/>
+                        </a:lnSpc>
+                        <a:spcBef>
+                          <a:spcPts val="0"/>
+                        </a:spcBef>
+                        <a:spcAft>
+                          <a:spcPts val="0"/>
+                        </a:spcAft>
+                        <a:buNone/>
+                      </a:pPr>
+                      <a:r>
+                        <a:rPr lang="en-US" sz="1200" u="none" strike="noStrike" noProof="0" dirty="0">
+                          <a:solidFill>
+                            <a:srgbClr val="000000"/>
+                          </a:solidFill>
+                        </a:rPr>
+                        <a:t>emp3 has only salary in job, no personal column family</a:t>
+                      </a:r>
+                    </a:p>
+                    <a:p>
+                      <a:pPr lvl="0">
+                        <a:buNone/>
+                      </a:pPr>
+                      <a:endParaRPr lang="en-US" sz="1200" dirty="0"/>
+                    </a:p>
+                  </a:txBody>
+                  <a:tcPr/>
+                </a:tc>
+                <a:extLst>
+                  <a:ext uri="{0D108BD9-81ED-4DB2-BD59-A6C34878D82A}">
+                    <a16:rowId xmlns:a16="http://schemas.microsoft.com/office/drawing/2014/main" val="1855349716"/>
+                  </a:ext>
+                </a:extLst>
+              </a:tr>
+            </a:tbl>
+          </a:graphicData>
+        </a:graphic>
+      </p:graphicFrame>
+      <p:sp>
+        <p:nvSpPr>
+          <p:cNvPr id="4" name="Content Placeholder 2">
+            <a:extLst>
+              <a:ext uri="{FF2B5EF4-FFF2-40B4-BE49-F238E27FC236}">
+                <a16:creationId xmlns:a16="http://schemas.microsoft.com/office/drawing/2014/main" id="{962C54D2-6C6B-4D18-91FD-386C4A4E72B9}"/>
+              </a:ext>
+            </a:extLst>
+          </p:cNvPr>
+          <p:cNvSpPr txBox="1">
+            <a:spLocks/>
+          </p:cNvSpPr>
+          <p:nvPr/>
+        </p:nvSpPr>
+        <p:spPr>
+          <a:xfrm>
+            <a:off x="215788" y="3157373"/>
+            <a:ext cx="11002281" cy="1828403"/>
+          </a:xfrm>
+          <a:prstGeom prst="rect">
+            <a:avLst/>
+          </a:prstGeom>
+        </p:spPr>
+        <p:txBody>
+          <a:bodyPr vert="horz" lIns="91440" tIns="45720" rIns="91440" bIns="45720" rtlCol="0" anchor="t">
+            <a:normAutofit/>
+          </a:bodyPr>
+          <a:lstStyle>
+            <a:lvl1pPr marL="228600" indent="-228600" algn="l" defTabSz="914400" rtl="0" eaLnBrk="1" latinLnBrk="0" hangingPunct="1">
+              <a:lnSpc>
+                <a:spcPct val="90000"/>
+              </a:lnSpc>
+              <a:spcBef>
+                <a:spcPts val="1000"/>
+              </a:spcBef>
+              <a:buFont typeface="Arial" panose="020B0604020202020204" pitchFamily="34" charset="0"/>
+              <a:buChar char="•"/>
+              <a:defRPr sz="2000" kern="1200">
+                <a:solidFill>
+                  <a:schemeClr val="tx1"/>
+                </a:solidFill>
+                <a:latin typeface="+mn-lt"/>
+                <a:ea typeface="+mn-ea"/>
+                <a:cs typeface="+mn-cs"/>
+              </a:defRPr>
+            </a:lvl1pPr>
+            <a:lvl2pPr marL="685800" indent="-228600" algn="l" defTabSz="914400" rtl="0" eaLnBrk="1" latinLnBrk="0" hangingPunct="1">
+              <a:lnSpc>
+                <a:spcPct val="90000"/>
+              </a:lnSpc>
+              <a:spcBef>
+                <a:spcPts val="500"/>
+              </a:spcBef>
+              <a:buFont typeface="Arial" panose="020B0604020202020204" pitchFamily="34" charset="0"/>
+              <a:buChar char="•"/>
+              <a:defRPr sz="1800" kern="1200">
+                <a:solidFill>
+                  <a:schemeClr val="tx1"/>
+                </a:solidFill>
+                <a:latin typeface="+mn-lt"/>
+                <a:ea typeface="+mn-ea"/>
+                <a:cs typeface="+mn-cs"/>
+              </a:defRPr>
+            </a:lvl2pPr>
+            <a:lvl3pPr marL="1143000" indent="-228600" algn="l" defTabSz="914400" rtl="0" eaLnBrk="1" latinLnBrk="0" hangingPunct="1">
+              <a:lnSpc>
+                <a:spcPct val="90000"/>
+              </a:lnSpc>
+              <a:spcBef>
+                <a:spcPts val="500"/>
+              </a:spcBef>
+              <a:buFont typeface="Arial" panose="020B0604020202020204" pitchFamily="34" charset="0"/>
+              <a:buChar char="•"/>
+              <a:defRPr sz="1600" kern="1200">
+                <a:solidFill>
+                  <a:schemeClr val="tx1"/>
+                </a:solidFill>
+                <a:latin typeface="+mn-lt"/>
+                <a:ea typeface="+mn-ea"/>
+                <a:cs typeface="+mn-cs"/>
+              </a:defRPr>
+            </a:lvl3pPr>
+            <a:lvl4pPr marL="1600200" indent="-228600" algn="l" defTabSz="914400" rtl="0" eaLnBrk="1" latinLnBrk="0" hangingPunct="1">
+              <a:lnSpc>
+                <a:spcPct val="90000"/>
+              </a:lnSpc>
+              <a:spcBef>
+                <a:spcPts val="500"/>
+              </a:spcBef>
+              <a:buFont typeface="Arial" panose="020B0604020202020204" pitchFamily="34" charset="0"/>
+              <a:buChar char="•"/>
+              <a:defRPr sz="1400" kern="1200">
+                <a:solidFill>
+                  <a:schemeClr val="tx1"/>
+                </a:solidFill>
+                <a:latin typeface="+mn-lt"/>
+                <a:ea typeface="+mn-ea"/>
+                <a:cs typeface="+mn-cs"/>
+              </a:defRPr>
+            </a:lvl4pPr>
+            <a:lvl5pPr marL="2057400" indent="-228600" algn="l" defTabSz="914400" rtl="0" eaLnBrk="1" latinLnBrk="0" hangingPunct="1">
+              <a:lnSpc>
+                <a:spcPct val="90000"/>
+              </a:lnSpc>
+              <a:spcBef>
+                <a:spcPts val="500"/>
+              </a:spcBef>
+              <a:buFont typeface="Arial" panose="020B0604020202020204" pitchFamily="34" charset="0"/>
+              <a:buChar char="•"/>
+              <a:defRPr sz="1400" kern="1200">
+                <a:solidFill>
+                  <a:schemeClr val="tx1"/>
+                </a:solidFill>
+                <a:latin typeface="+mn-lt"/>
+                <a:ea typeface="+mn-ea"/>
+                <a:cs typeface="+mn-cs"/>
+              </a:defRPr>
+            </a:lvl5pPr>
+            <a:lvl6pPr marL="2514600" indent="-228600" algn="l" defTabSz="914400" rtl="0" eaLnBrk="1" latinLnBrk="0" hangingPunct="1">
+              <a:lnSpc>
+                <a:spcPct val="90000"/>
+              </a:lnSpc>
+              <a:spcBef>
+                <a:spcPts val="500"/>
+              </a:spcBef>
+              <a:buFont typeface="Arial" panose="020B0604020202020204" pitchFamily="34" charset="0"/>
+              <a:buChar char="•"/>
+              <a:defRPr sz="1800" kern="1200">
+                <a:solidFill>
+                  <a:schemeClr val="tx1"/>
+                </a:solidFill>
+                <a:latin typeface="+mn-lt"/>
+                <a:ea typeface="+mn-ea"/>
+                <a:cs typeface="+mn-cs"/>
+              </a:defRPr>
+            </a:lvl6pPr>
+            <a:lvl7pPr marL="2971800" indent="-228600" algn="l" defTabSz="914400" rtl="0" eaLnBrk="1" latinLnBrk="0" hangingPunct="1">
+              <a:lnSpc>
+                <a:spcPct val="90000"/>
+              </a:lnSpc>
+              <a:spcBef>
+                <a:spcPts val="500"/>
+              </a:spcBef>
+              <a:buFont typeface="Arial" panose="020B0604020202020204" pitchFamily="34" charset="0"/>
+              <a:buChar char="•"/>
+              <a:defRPr sz="1800" kern="1200">
+                <a:solidFill>
+                  <a:schemeClr val="tx1"/>
+                </a:solidFill>
+                <a:latin typeface="+mn-lt"/>
+                <a:ea typeface="+mn-ea"/>
+                <a:cs typeface="+mn-cs"/>
+              </a:defRPr>
+            </a:lvl7pPr>
+            <a:lvl8pPr marL="3429000" indent="-228600" algn="l" defTabSz="914400" rtl="0" eaLnBrk="1" latinLnBrk="0" hangingPunct="1">
+              <a:lnSpc>
+                <a:spcPct val="90000"/>
+              </a:lnSpc>
+              <a:spcBef>
+                <a:spcPts val="500"/>
+              </a:spcBef>
+              <a:buFont typeface="Arial" panose="020B0604020202020204" pitchFamily="34" charset="0"/>
+              <a:buChar char="•"/>
+              <a:defRPr sz="1800" kern="1200">
+                <a:solidFill>
+                  <a:schemeClr val="tx1"/>
+                </a:solidFill>
+                <a:latin typeface="+mn-lt"/>
+                <a:ea typeface="+mn-ea"/>
+                <a:cs typeface="+mn-cs"/>
+              </a:defRPr>
+            </a:lvl8pPr>
+            <a:lvl9pPr marL="3886200" indent="-228600" algn="l" defTabSz="914400" rtl="0" eaLnBrk="1" latinLnBrk="0" hangingPunct="1">
+              <a:lnSpc>
+                <a:spcPct val="90000"/>
+              </a:lnSpc>
+              <a:spcBef>
+                <a:spcPts val="500"/>
+              </a:spcBef>
+              <a:buFont typeface="Arial" panose="020B0604020202020204" pitchFamily="34" charset="0"/>
+              <a:buChar char="•"/>
+              <a:defRPr sz="1800" kern="1200">
+                <a:solidFill>
+                  <a:schemeClr val="tx1"/>
+                </a:solidFill>
+                <a:latin typeface="+mn-lt"/>
+                <a:ea typeface="+mn-ea"/>
+                <a:cs typeface="+mn-cs"/>
+              </a:defRPr>
+            </a:lvl9pPr>
+          </a:lstStyle>
+          <a:p>
+            <a:r>
+              <a:rPr lang="en-US" dirty="0">
+                <a:ea typeface="+mn-lt"/>
+                <a:cs typeface="+mn-lt"/>
+              </a:rPr>
+              <a:t>We must </a:t>
+            </a:r>
+            <a:r>
+              <a:rPr lang="en-US" dirty="0">
+                <a:solidFill>
+                  <a:srgbClr val="FF0000"/>
+                </a:solidFill>
+                <a:ea typeface="+mn-lt"/>
+                <a:cs typeface="+mn-lt"/>
+              </a:rPr>
+              <a:t>comply with column families</a:t>
+            </a:r>
+            <a:r>
+              <a:rPr lang="en-US" dirty="0">
+                <a:ea typeface="+mn-lt"/>
+                <a:cs typeface="+mn-lt"/>
+              </a:rPr>
+              <a:t> when we insert data into the table.</a:t>
+            </a:r>
+          </a:p>
+          <a:p>
+            <a:r>
+              <a:rPr lang="en-US" dirty="0">
+                <a:ea typeface="+mn-lt"/>
+                <a:cs typeface="+mn-lt"/>
+              </a:rPr>
+              <a:t>Column families are employed for storage and fast retrieval – HBase is Column Oriented Database.</a:t>
+            </a:r>
+          </a:p>
+          <a:p>
+            <a:r>
+              <a:rPr lang="en-US" dirty="0">
+                <a:ea typeface="+mn-lt"/>
+                <a:cs typeface="+mn-lt"/>
+              </a:rPr>
+              <a:t>But we can use different column names within the column family e.g. </a:t>
+            </a:r>
+          </a:p>
+        </p:txBody>
+      </p:sp>
+      <p:graphicFrame>
+        <p:nvGraphicFramePr>
+          <p:cNvPr id="9" name="Table 8">
+            <a:extLst>
+              <a:ext uri="{FF2B5EF4-FFF2-40B4-BE49-F238E27FC236}">
+                <a16:creationId xmlns:a16="http://schemas.microsoft.com/office/drawing/2014/main" id="{2DD0168C-4AA5-A3AD-EC68-9F3DAD099B7C}"/>
+              </a:ext>
+            </a:extLst>
+          </p:cNvPr>
+          <p:cNvGraphicFramePr>
+            <a:graphicFrameLocks noGrp="1"/>
+          </p:cNvGraphicFramePr>
+          <p:nvPr>
+            <p:extLst>
+              <p:ext uri="{D42A27DB-BD31-4B8C-83A1-F6EECF244321}">
+                <p14:modId xmlns:p14="http://schemas.microsoft.com/office/powerpoint/2010/main" val="230050026"/>
+              </p:ext>
+            </p:extLst>
+          </p:nvPr>
+        </p:nvGraphicFramePr>
+        <p:xfrm>
+          <a:off x="284085" y="2371194"/>
+          <a:ext cx="9730040" cy="457200"/>
+        </p:xfrm>
+        <a:graphic>
+          <a:graphicData uri="http://schemas.openxmlformats.org/drawingml/2006/table">
+            <a:tbl>
+              <a:tblPr firstRow="1" bandRow="1">
+                <a:tableStyleId>{8799B23B-EC83-4686-B30A-512413B5E67A}</a:tableStyleId>
+              </a:tblPr>
+              <a:tblGrid>
+                <a:gridCol w="3914588">
+                  <a:extLst>
+                    <a:ext uri="{9D8B030D-6E8A-4147-A177-3AD203B41FA5}">
+                      <a16:colId xmlns:a16="http://schemas.microsoft.com/office/drawing/2014/main" val="2529012356"/>
+                    </a:ext>
+                  </a:extLst>
+                </a:gridCol>
+                <a:gridCol w="5815452">
+                  <a:extLst>
+                    <a:ext uri="{9D8B030D-6E8A-4147-A177-3AD203B41FA5}">
+                      <a16:colId xmlns:a16="http://schemas.microsoft.com/office/drawing/2014/main" val="2118937829"/>
+                    </a:ext>
+                  </a:extLst>
+                </a:gridCol>
+              </a:tblGrid>
+              <a:tr h="378162">
+                <a:tc>
+                  <a:txBody>
+                    <a:bodyPr/>
+                    <a:lstStyle/>
+                    <a:p>
+                      <a:pPr marL="0" marR="0" lvl="0" indent="0" algn="l">
+                        <a:lnSpc>
+                          <a:spcPct val="90000"/>
+                        </a:lnSpc>
+                        <a:spcBef>
+                          <a:spcPts val="1000"/>
+                        </a:spcBef>
+                        <a:spcAft>
+                          <a:spcPts val="0"/>
+                        </a:spcAft>
+                        <a:buNone/>
+                      </a:pPr>
+                      <a:r>
+                        <a:rPr lang="en-US" sz="1200" u="none" strike="noStrike" noProof="0" dirty="0">
+                          <a:solidFill>
+                            <a:srgbClr val="000000"/>
+                          </a:solidFill>
+                        </a:rPr>
+                        <a:t>Create table ‘employee’, column family</a:t>
+                      </a:r>
                     </a:p>
                   </a:txBody>
                   <a:tcPr/>
@@ -17272,7 +17160,7 @@
               </a:tabLst>
             </a:pPr>
             <a:r>
-              <a:rPr lang="en-US" sz="1600" b="1">
+              <a:rPr lang="en-US" sz="1600" b="1" dirty="0">
                 <a:latin typeface="Calibri"/>
                 <a:cs typeface="Calibri"/>
               </a:rPr>
@@ -17286,7 +17174,7 @@
               <a:t> </a:t>
             </a:r>
             <a:r>
-              <a:rPr lang="en-US" sz="1600" b="1">
+              <a:rPr lang="en-US" sz="1600" b="1" dirty="0">
                 <a:latin typeface="Calibri"/>
                 <a:cs typeface="Calibri"/>
               </a:rPr>
@@ -17300,7 +17188,7 @@
               <a:t> </a:t>
             </a:r>
             <a:r>
-              <a:rPr lang="en-US" sz="1600">
+              <a:rPr lang="en-US" sz="1600" dirty="0">
                 <a:latin typeface="Calibri"/>
                 <a:cs typeface="Calibri"/>
               </a:rPr>
@@ -17314,7 +17202,7 @@
               <a:t> </a:t>
             </a:r>
             <a:r>
-              <a:rPr lang="en-US" sz="1600" spc="-10">
+              <a:rPr lang="en-US" sz="1600" spc="-10" dirty="0">
                 <a:latin typeface="Calibri"/>
                 <a:cs typeface="Calibri"/>
               </a:rPr>
@@ -17328,7 +17216,7 @@
               <a:t> </a:t>
             </a:r>
             <a:r>
-              <a:rPr lang="en-US" sz="1600">
+              <a:rPr lang="en-US" sz="1600" dirty="0">
                 <a:latin typeface="Calibri"/>
                 <a:cs typeface="Calibri"/>
               </a:rPr>
@@ -17342,7 +17230,7 @@
               <a:t> </a:t>
             </a:r>
             <a:r>
-              <a:rPr lang="en-US" sz="1600" spc="-10">
+              <a:rPr lang="en-US" sz="1600" spc="-10" dirty="0">
                 <a:latin typeface="Calibri"/>
                 <a:cs typeface="Calibri"/>
               </a:rPr>
@@ -17356,7 +17244,7 @@
               <a:t> </a:t>
             </a:r>
             <a:r>
-              <a:rPr lang="en-US" sz="1600">
+              <a:rPr lang="en-US" sz="1600" dirty="0">
                 <a:latin typeface="Calibri"/>
                 <a:cs typeface="Calibri"/>
               </a:rPr>
@@ -17370,7 +17258,7 @@
               <a:t> </a:t>
             </a:r>
             <a:r>
-              <a:rPr lang="en-US" sz="1600">
+              <a:rPr lang="en-US" sz="1600" dirty="0">
                 <a:latin typeface="Calibri"/>
                 <a:cs typeface="Calibri"/>
               </a:rPr>
@@ -17384,7 +17272,7 @@
               <a:t> </a:t>
             </a:r>
             <a:r>
-              <a:rPr lang="en-US" sz="1600">
+              <a:rPr lang="en-US" sz="1600" dirty="0">
                 <a:latin typeface="Calibri"/>
                 <a:cs typeface="Calibri"/>
               </a:rPr>
@@ -17398,14 +17286,14 @@
               <a:t> </a:t>
             </a:r>
             <a:r>
-              <a:rPr lang="en-US" sz="1600" spc="-20">
+              <a:rPr lang="en-US" sz="1600" spc="-20" dirty="0">
                 <a:latin typeface="Calibri"/>
                 <a:cs typeface="Calibri"/>
               </a:rPr>
               <a:t>data p</a:t>
             </a:r>
             <a:r>
-              <a:rPr lang="en-US" sz="1600">
+              <a:rPr lang="en-US" sz="1600" dirty="0">
                 <a:latin typeface="Calibri"/>
                 <a:cs typeface="Calibri"/>
               </a:rPr>
@@ -17419,7 +17307,7 @@
               <a:t> </a:t>
             </a:r>
             <a:r>
-              <a:rPr lang="en-US" sz="1600">
+              <a:rPr lang="en-US" sz="1600" dirty="0">
                 <a:latin typeface="Calibri"/>
                 <a:cs typeface="Calibri"/>
               </a:rPr>
@@ -17433,7 +17321,7 @@
               <a:t> </a:t>
             </a:r>
             <a:r>
-              <a:rPr lang="en-US" sz="1600">
+              <a:rPr lang="en-US" sz="1600" dirty="0">
                 <a:latin typeface="Calibri"/>
                 <a:cs typeface="Calibri"/>
               </a:rPr>
@@ -17447,7 +17335,7 @@
               <a:t> </a:t>
             </a:r>
             <a:r>
-              <a:rPr lang="en-US" sz="1600">
+              <a:rPr lang="en-US" sz="1600" dirty="0">
                 <a:latin typeface="Calibri"/>
                 <a:cs typeface="Calibri"/>
               </a:rPr>
@@ -17461,7 +17349,7 @@
               <a:t> </a:t>
             </a:r>
             <a:r>
-              <a:rPr lang="en-US" sz="1600">
+              <a:rPr lang="en-US" sz="1600" dirty="0">
                 <a:latin typeface="Calibri"/>
                 <a:cs typeface="Calibri"/>
               </a:rPr>
@@ -17475,7 +17363,7 @@
               <a:t> </a:t>
             </a:r>
             <a:r>
-              <a:rPr lang="en-US" sz="1600">
+              <a:rPr lang="en-US" sz="1600" dirty="0">
                 <a:latin typeface="Calibri"/>
                 <a:cs typeface="Calibri"/>
               </a:rPr>
@@ -17489,13 +17377,13 @@
               <a:t> </a:t>
             </a:r>
             <a:r>
-              <a:rPr lang="en-US" sz="1600" spc="-10">
+              <a:rPr lang="en-US" sz="1600" spc="-10" dirty="0">
                 <a:latin typeface="Calibri"/>
                 <a:cs typeface="Calibri"/>
               </a:rPr>
               <a:t>cluster.</a:t>
             </a:r>
-            <a:endParaRPr lang="en-US" sz="1600">
+            <a:endParaRPr lang="en-US" sz="1600" dirty="0">
               <a:latin typeface="Calibri"/>
               <a:ea typeface="Calibri"/>
               <a:cs typeface="Calibri"/>
@@ -17515,7 +17403,7 @@
               </a:tabLst>
             </a:pPr>
             <a:r>
-              <a:rPr lang="en-US" sz="1600" b="1">
+              <a:rPr lang="en-US" sz="1600" b="1" dirty="0">
                 <a:latin typeface="Calibri"/>
                 <a:cs typeface="Calibri"/>
               </a:rPr>
@@ -17529,7 +17417,7 @@
               <a:t> </a:t>
             </a:r>
             <a:r>
-              <a:rPr lang="en-US" sz="1600" b="1">
+              <a:rPr lang="en-US" sz="1600" b="1" dirty="0">
                 <a:latin typeface="Calibri"/>
                 <a:cs typeface="Calibri"/>
               </a:rPr>
@@ -17543,7 +17431,7 @@
               <a:t> </a:t>
             </a:r>
             <a:r>
-              <a:rPr lang="en-US" sz="1600">
+              <a:rPr lang="en-US" sz="1600" dirty="0">
                 <a:latin typeface="Calibri"/>
                 <a:cs typeface="Calibri"/>
               </a:rPr>
@@ -17557,14 +17445,14 @@
               <a:t> </a:t>
             </a:r>
             <a:r>
-              <a:rPr lang="en-US" sz="1600" spc="-10">
+              <a:rPr lang="en-US" sz="1600" spc="-10" dirty="0">
                 <a:latin typeface="Calibri"/>
                 <a:cs typeface="Calibri"/>
               </a:rPr>
               <a:t>SQL-</a:t>
             </a:r>
             <a:r>
-              <a:rPr lang="en-US" sz="1600">
+              <a:rPr lang="en-US" sz="1600" dirty="0">
                 <a:latin typeface="Calibri"/>
                 <a:cs typeface="Calibri"/>
               </a:rPr>
@@ -17578,7 +17466,7 @@
               <a:t> </a:t>
             </a:r>
             <a:r>
-              <a:rPr lang="en-US" sz="1600">
+              <a:rPr lang="en-US" sz="1600" dirty="0">
                 <a:latin typeface="Calibri"/>
                 <a:cs typeface="Calibri"/>
               </a:rPr>
@@ -17592,7 +17480,7 @@
               <a:t> </a:t>
             </a:r>
             <a:r>
-              <a:rPr lang="en-US" sz="1600">
+              <a:rPr lang="en-US" sz="1600" dirty="0">
                 <a:latin typeface="Calibri"/>
                 <a:cs typeface="Calibri"/>
               </a:rPr>
@@ -17606,7 +17494,7 @@
               <a:t> </a:t>
             </a:r>
             <a:r>
-              <a:rPr lang="en-US" sz="1600">
+              <a:rPr lang="en-US" sz="1600" dirty="0">
                 <a:latin typeface="Calibri"/>
                 <a:cs typeface="Calibri"/>
               </a:rPr>
@@ -17620,7 +17508,7 @@
               <a:t> </a:t>
             </a:r>
             <a:r>
-              <a:rPr lang="en-US" sz="1600" spc="-10">
+              <a:rPr lang="en-US" sz="1600" spc="-10" dirty="0">
                 <a:latin typeface="Calibri"/>
                 <a:cs typeface="Calibri"/>
               </a:rPr>
@@ -17634,7 +17522,7 @@
               <a:t> </a:t>
             </a:r>
             <a:r>
-              <a:rPr lang="en-US" sz="1600">
+              <a:rPr lang="en-US" sz="1600" dirty="0">
                 <a:latin typeface="Calibri"/>
                 <a:cs typeface="Calibri"/>
               </a:rPr>
@@ -17648,14 +17536,14 @@
               <a:t> </a:t>
             </a:r>
             <a:r>
-              <a:rPr lang="en-US" sz="1600" spc="-10">
+              <a:rPr lang="en-US" sz="1600" spc="-10" dirty="0">
                 <a:latin typeface="Calibri"/>
                 <a:cs typeface="Calibri"/>
               </a:rPr>
               <a:t>distributed </a:t>
             </a:r>
             <a:r>
-              <a:rPr lang="en-US" sz="1600">
+              <a:rPr lang="en-US" sz="1600" dirty="0">
                 <a:latin typeface="Calibri"/>
                 <a:cs typeface="Calibri"/>
               </a:rPr>
@@ -17669,14 +17557,14 @@
               <a:t> </a:t>
             </a:r>
             <a:r>
-              <a:rPr lang="en-US" sz="1600" spc="-10">
+              <a:rPr lang="en-US" sz="1600" spc="-10" dirty="0">
                 <a:latin typeface="Calibri"/>
                 <a:cs typeface="Calibri"/>
               </a:rPr>
               <a:t>(</a:t>
             </a:r>
             <a:r>
-              <a:rPr lang="en-US" sz="1600" spc="-10" err="1">
+              <a:rPr lang="en-US" sz="1600" spc="-10" dirty="0" err="1">
                 <a:latin typeface="Calibri"/>
                 <a:cs typeface="Calibri"/>
               </a:rPr>
@@ -17690,7 +17578,7 @@
               <a:t> </a:t>
             </a:r>
             <a:r>
-              <a:rPr lang="en-US" sz="1600">
+              <a:rPr lang="en-US" sz="1600" dirty="0">
                 <a:latin typeface="Calibri"/>
                 <a:cs typeface="Calibri"/>
               </a:rPr>
@@ -17704,13 +17592,13 @@
               <a:t> </a:t>
             </a:r>
             <a:r>
-              <a:rPr lang="en-US" sz="1600" spc="-10">
+              <a:rPr lang="en-US" sz="1600" spc="-10" dirty="0">
                 <a:latin typeface="Calibri"/>
                 <a:cs typeface="Calibri"/>
               </a:rPr>
               <a:t>Datasets).</a:t>
             </a:r>
-            <a:endParaRPr lang="en-US" sz="1600">
+            <a:endParaRPr lang="en-US" sz="1600" dirty="0">
               <a:latin typeface="Calibri"/>
               <a:ea typeface="Calibri"/>
               <a:cs typeface="Calibri"/>
@@ -17730,7 +17618,7 @@
               </a:tabLst>
             </a:pPr>
             <a:r>
-              <a:rPr lang="en-US" sz="1600" b="1">
+              <a:rPr lang="en-US" sz="1600" b="1" dirty="0">
                 <a:latin typeface="Calibri"/>
                 <a:cs typeface="Calibri"/>
               </a:rPr>
@@ -17744,7 +17632,7 @@
               <a:t> </a:t>
             </a:r>
             <a:r>
-              <a:rPr lang="en-US" sz="1600" b="1">
+              <a:rPr lang="en-US" sz="1600" b="1" dirty="0">
                 <a:latin typeface="Calibri"/>
                 <a:cs typeface="Calibri"/>
               </a:rPr>
@@ -17758,7 +17646,7 @@
               <a:t> </a:t>
             </a:r>
             <a:r>
-              <a:rPr lang="en-US" sz="1600">
+              <a:rPr lang="en-US" sz="1600" dirty="0">
                 <a:latin typeface="Calibri"/>
                 <a:cs typeface="Calibri"/>
               </a:rPr>
@@ -17772,7 +17660,7 @@
               <a:t> </a:t>
             </a:r>
             <a:r>
-              <a:rPr lang="en-US" sz="1600">
+              <a:rPr lang="en-US" sz="1600" dirty="0">
                 <a:latin typeface="Calibri"/>
                 <a:cs typeface="Calibri"/>
               </a:rPr>
@@ -17786,7 +17674,7 @@
               <a:t> </a:t>
             </a:r>
             <a:r>
-              <a:rPr lang="en-US" sz="1600">
+              <a:rPr lang="en-US" sz="1600" dirty="0">
                 <a:latin typeface="Calibri"/>
                 <a:cs typeface="Calibri"/>
               </a:rPr>
@@ -17800,14 +17688,14 @@
               <a:t> </a:t>
             </a:r>
             <a:r>
-              <a:rPr lang="en-US" sz="1600" spc="-20">
+              <a:rPr lang="en-US" sz="1600" spc="-20" dirty="0">
                 <a:latin typeface="Calibri"/>
                 <a:cs typeface="Calibri"/>
               </a:rPr>
               <a:t>real-</a:t>
             </a:r>
             <a:r>
-              <a:rPr lang="en-US" sz="1600">
+              <a:rPr lang="en-US" sz="1600" dirty="0">
                 <a:latin typeface="Calibri"/>
                 <a:cs typeface="Calibri"/>
               </a:rPr>
@@ -17821,7 +17709,7 @@
               <a:t> </a:t>
             </a:r>
             <a:r>
-              <a:rPr lang="en-US" sz="1600">
+              <a:rPr lang="en-US" sz="1600" dirty="0">
                 <a:latin typeface="Calibri"/>
                 <a:cs typeface="Calibri"/>
               </a:rPr>
@@ -17835,7 +17723,7 @@
               <a:t> </a:t>
             </a:r>
             <a:r>
-              <a:rPr lang="en-US" sz="1600" spc="-10">
+              <a:rPr lang="en-US" sz="1600" spc="-10" dirty="0">
                 <a:latin typeface="Calibri"/>
                 <a:cs typeface="Calibri"/>
               </a:rPr>
@@ -17849,14 +17737,14 @@
               <a:t> </a:t>
             </a:r>
             <a:r>
-              <a:rPr lang="en-US" sz="1600" spc="-10">
+              <a:rPr lang="en-US" sz="1600" spc="-10" dirty="0">
                 <a:latin typeface="Calibri"/>
                 <a:cs typeface="Calibri"/>
               </a:rPr>
               <a:t>enabling </a:t>
             </a:r>
             <a:r>
-              <a:rPr lang="en-US" sz="1600">
+              <a:rPr lang="en-US" sz="1600" dirty="0">
                 <a:latin typeface="Calibri"/>
                 <a:cs typeface="Calibri"/>
               </a:rPr>
@@ -17870,14 +17758,14 @@
               <a:t> </a:t>
             </a:r>
             <a:r>
-              <a:rPr lang="en-US" sz="1600" spc="-20">
+              <a:rPr lang="en-US" sz="1600" spc="-20" dirty="0">
                 <a:latin typeface="Calibri"/>
                 <a:cs typeface="Calibri"/>
               </a:rPr>
               <a:t>real-</a:t>
             </a:r>
             <a:r>
-              <a:rPr lang="en-US" sz="1600">
+              <a:rPr lang="en-US" sz="1600" dirty="0">
                 <a:latin typeface="Calibri"/>
                 <a:cs typeface="Calibri"/>
               </a:rPr>
@@ -17891,13 +17779,13 @@
               <a:t> </a:t>
             </a:r>
             <a:r>
-              <a:rPr lang="en-US" sz="1600" spc="-10">
+              <a:rPr lang="en-US" sz="1600" spc="-10" dirty="0">
                 <a:latin typeface="Calibri"/>
                 <a:cs typeface="Calibri"/>
               </a:rPr>
               <a:t>analytics.</a:t>
             </a:r>
-            <a:endParaRPr lang="en-US" sz="1600">
+            <a:endParaRPr lang="en-US" sz="1600" dirty="0">
               <a:latin typeface="Calibri"/>
               <a:ea typeface="Calibri"/>
               <a:cs typeface="Calibri"/>
@@ -17914,14 +17802,14 @@
               </a:tabLst>
             </a:pPr>
             <a:r>
-              <a:rPr lang="en-US" sz="1600" b="1" err="1">
+              <a:rPr lang="en-US" sz="1600" b="1" dirty="0" err="1">
                 <a:latin typeface="Calibri"/>
                 <a:cs typeface="Calibri"/>
               </a:rPr>
               <a:t>MLlib</a:t>
             </a:r>
             <a:r>
-              <a:rPr lang="en-US" sz="1600" b="1">
+              <a:rPr lang="en-US" sz="1600" b="1" dirty="0">
                 <a:latin typeface="Calibri"/>
                 <a:cs typeface="Calibri"/>
               </a:rPr>
@@ -17935,7 +17823,7 @@
               <a:t> </a:t>
             </a:r>
             <a:r>
-              <a:rPr lang="en-US" sz="1600" spc="-10">
+              <a:rPr lang="en-US" sz="1600" spc="-10" dirty="0">
                 <a:latin typeface="Calibri"/>
                 <a:cs typeface="Calibri"/>
               </a:rPr>
@@ -17949,7 +17837,7 @@
               <a:t> </a:t>
             </a:r>
             <a:r>
-              <a:rPr lang="en-US" sz="1600">
+              <a:rPr lang="en-US" sz="1600" dirty="0">
                 <a:latin typeface="Calibri"/>
                 <a:cs typeface="Calibri"/>
               </a:rPr>
@@ -17963,7 +17851,7 @@
               <a:t> </a:t>
             </a:r>
             <a:r>
-              <a:rPr lang="en-US" sz="1600">
+              <a:rPr lang="en-US" sz="1600" dirty="0">
                 <a:latin typeface="Calibri"/>
                 <a:cs typeface="Calibri"/>
               </a:rPr>
@@ -17977,7 +17865,7 @@
               <a:t> </a:t>
             </a:r>
             <a:r>
-              <a:rPr lang="en-US" sz="1600" spc="-20">
+              <a:rPr lang="en-US" sz="1600" spc="-20" dirty="0">
                 <a:latin typeface="Calibri"/>
                 <a:cs typeface="Calibri"/>
               </a:rPr>
@@ -17991,7 +17879,7 @@
               <a:t> </a:t>
             </a:r>
             <a:r>
-              <a:rPr lang="en-US" sz="1600" spc="-10">
+              <a:rPr lang="en-US" sz="1600" spc="-10" dirty="0">
                 <a:latin typeface="Calibri"/>
                 <a:cs typeface="Calibri"/>
               </a:rPr>
@@ -18005,7 +17893,7 @@
               <a:t> </a:t>
             </a:r>
             <a:r>
-              <a:rPr lang="en-US" sz="1600">
+              <a:rPr lang="en-US" sz="1600" dirty="0">
                 <a:latin typeface="Calibri"/>
                 <a:cs typeface="Calibri"/>
               </a:rPr>
@@ -18019,7 +17907,7 @@
               <a:t> </a:t>
             </a:r>
             <a:r>
-              <a:rPr lang="en-US" sz="1600">
+              <a:rPr lang="en-US" sz="1600" dirty="0">
                 <a:latin typeface="Calibri"/>
                 <a:cs typeface="Calibri"/>
               </a:rPr>
@@ -18033,14 +17921,14 @@
               <a:t> </a:t>
             </a:r>
             <a:r>
-              <a:rPr lang="en-US" sz="1600" spc="-10">
+              <a:rPr lang="en-US" sz="1600" spc="-10" dirty="0">
                 <a:latin typeface="Calibri"/>
                 <a:cs typeface="Calibri"/>
               </a:rPr>
               <a:t>scalable </a:t>
             </a:r>
             <a:r>
-              <a:rPr lang="en-US" sz="1600">
+              <a:rPr lang="en-US" sz="1600" dirty="0">
                 <a:latin typeface="Calibri"/>
                 <a:cs typeface="Calibri"/>
               </a:rPr>
@@ -18054,13 +17942,13 @@
               <a:t> </a:t>
             </a:r>
             <a:r>
-              <a:rPr lang="en-US" sz="1600" spc="-10">
+              <a:rPr lang="en-US" sz="1600" spc="-10" dirty="0">
                 <a:latin typeface="Calibri"/>
                 <a:cs typeface="Calibri"/>
               </a:rPr>
               <a:t>learning.</a:t>
             </a:r>
-            <a:endParaRPr lang="en-US" sz="1600">
+            <a:endParaRPr lang="en-US" sz="1600" dirty="0">
               <a:latin typeface="Calibri"/>
               <a:ea typeface="Calibri"/>
               <a:cs typeface="Calibri"/>
@@ -18077,14 +17965,14 @@
               </a:tabLst>
             </a:pPr>
             <a:r>
-              <a:rPr lang="en-US" sz="1600" b="1" err="1">
+              <a:rPr lang="en-US" sz="1600" b="1" dirty="0" err="1">
                 <a:latin typeface="Calibri"/>
                 <a:cs typeface="Calibri"/>
               </a:rPr>
               <a:t>GraphX</a:t>
             </a:r>
             <a:r>
-              <a:rPr lang="en-US" sz="1600" b="1">
+              <a:rPr lang="en-US" sz="1600" b="1" dirty="0">
                 <a:latin typeface="Calibri"/>
                 <a:cs typeface="Calibri"/>
               </a:rPr>
@@ -18098,7 +17986,7 @@
               <a:t> </a:t>
             </a:r>
             <a:r>
-              <a:rPr lang="en-US" sz="1600">
+              <a:rPr lang="en-US" sz="1600" dirty="0">
                 <a:latin typeface="Calibri"/>
                 <a:cs typeface="Calibri"/>
               </a:rPr>
@@ -18112,7 +18000,7 @@
               <a:t> </a:t>
             </a:r>
             <a:r>
-              <a:rPr lang="en-US" sz="1600">
+              <a:rPr lang="en-US" sz="1600" dirty="0">
                 <a:latin typeface="Calibri"/>
                 <a:cs typeface="Calibri"/>
               </a:rPr>
@@ -18126,7 +18014,7 @@
               <a:t> </a:t>
             </a:r>
             <a:r>
-              <a:rPr lang="en-US" sz="1600">
+              <a:rPr lang="en-US" sz="1600" dirty="0">
                 <a:latin typeface="Calibri"/>
                 <a:cs typeface="Calibri"/>
               </a:rPr>
@@ -18140,7 +18028,7 @@
               <a:t> </a:t>
             </a:r>
             <a:r>
-              <a:rPr lang="en-US" sz="1600">
+              <a:rPr lang="en-US" sz="1600" dirty="0">
                 <a:latin typeface="Calibri"/>
                 <a:cs typeface="Calibri"/>
               </a:rPr>
@@ -18154,7 +18042,7 @@
               <a:t> </a:t>
             </a:r>
             <a:r>
-              <a:rPr lang="en-US" sz="1600">
+              <a:rPr lang="en-US" sz="1600" dirty="0">
                 <a:latin typeface="Calibri"/>
                 <a:cs typeface="Calibri"/>
               </a:rPr>
@@ -18168,14 +18056,14 @@
               <a:t> </a:t>
             </a:r>
             <a:r>
-              <a:rPr lang="en-US" sz="1600" spc="-20">
+              <a:rPr lang="en-US" sz="1600" spc="-20" dirty="0">
                 <a:latin typeface="Calibri"/>
                 <a:cs typeface="Calibri"/>
               </a:rPr>
               <a:t>large-</a:t>
             </a:r>
             <a:r>
-              <a:rPr lang="en-US" sz="1600">
+              <a:rPr lang="en-US" sz="1600" dirty="0">
                 <a:latin typeface="Calibri"/>
                 <a:cs typeface="Calibri"/>
               </a:rPr>
@@ -18189,7 +18077,7 @@
               <a:t> </a:t>
             </a:r>
             <a:r>
-              <a:rPr lang="en-US" sz="1600">
+              <a:rPr lang="en-US" sz="1600" dirty="0">
                 <a:latin typeface="Calibri"/>
                 <a:cs typeface="Calibri"/>
               </a:rPr>
@@ -18203,13 +18091,13 @@
               <a:t> </a:t>
             </a:r>
             <a:r>
-              <a:rPr lang="en-US" sz="1600" spc="-10">
+              <a:rPr lang="en-US" sz="1600" spc="-10" dirty="0">
                 <a:latin typeface="Calibri"/>
                 <a:cs typeface="Calibri"/>
               </a:rPr>
               <a:t>computations.</a:t>
             </a:r>
-            <a:endParaRPr lang="en-US" sz="1600">
+            <a:endParaRPr lang="en-US" sz="1600" dirty="0">
               <a:latin typeface="Calibri"/>
               <a:ea typeface="Calibri"/>
               <a:cs typeface="Calibri"/>
@@ -18329,7 +18217,10 @@
           <a:bodyPr/>
           <a:lstStyle/>
           <a:p>
-            <a:endParaRPr lang="en-US"/>
+            <a:r>
+              <a:rPr lang="en-US" dirty="0"/>
+              <a:t>MapReduce vs. Spark</a:t>
+            </a:r>
           </a:p>
         </p:txBody>
       </p:sp>
@@ -18364,10 +18255,6 @@
               </a:rPr>
               <a:t>MapReduce is a first-generation distributed data processing system. It processes data that is parallelizable and performs computation on a distributed, horizontally scalable infrastructure. </a:t>
             </a:r>
-            <a:endParaRPr lang="en-US" sz="1600">
-              <a:ea typeface="+mn-lt"/>
-              <a:cs typeface="+mn-lt"/>
-            </a:endParaRPr>
           </a:p>
           <a:p>
             <a:pPr marL="285750" indent="-285750"/>
@@ -18378,7 +18265,7 @@
               </a:rPr>
               <a:t>As a distributed system, MapReduce applies a particular linear data flow structure, which consists of MapReduce programs that read input from a disk, map a function across the data, reduce the resulting data of the map, and store it on the disk again.</a:t>
             </a:r>
-            <a:endParaRPr lang="en-US" sz="1600">
+            <a:endParaRPr lang="en-US" sz="1600" dirty="0">
               <a:ea typeface="Calibri"/>
               <a:cs typeface="Calibri"/>
             </a:endParaRPr>
@@ -18413,7 +18300,7 @@
               </a:rPr>
               <a:t>Spark is a third-generation data processing framework that enhances MapReduce’s performance by processing data in memory instead of writing them to the disk in each step. </a:t>
             </a:r>
-            <a:endParaRPr lang="en-US" sz="1600">
+            <a:endParaRPr lang="en-US" sz="1600" dirty="0">
               <a:ea typeface="Calibri"/>
               <a:cs typeface="Calibri"/>
             </a:endParaRPr>
@@ -18427,9 +18314,9 @@
               </a:rPr>
               <a:t>Spark distributes the in-memory data in a logically partitioned way on many machines and calls these Resilient Distributed Datasets (RDDs), which are then used as an abstraction layer to manage the logically distributed data.</a:t>
             </a:r>
-            <a:endParaRPr lang="en-US" sz="1600">
-              <a:ea typeface="Calibri"/>
-              <a:cs typeface="Calibri"/>
+            <a:endParaRPr lang="en-US" sz="1600" dirty="0">
+              <a:ea typeface="Calibri" panose="020F0502020204030204"/>
+              <a:cs typeface="Calibri" panose="020F0502020204030204"/>
             </a:endParaRPr>
           </a:p>
           <a:p>
@@ -20646,59 +20533,12 @@
           <a:chExt cx="0" cy="0"/>
         </a:xfrm>
       </p:grpSpPr>
-      <p:pic>
-        <p:nvPicPr>
-          <p:cNvPr id="6150" name="Picture 6" descr="Bank of America to open 165 new ...">
-            <a:extLst>
-              <a:ext uri="{FF2B5EF4-FFF2-40B4-BE49-F238E27FC236}">
-                <a16:creationId xmlns:a16="http://schemas.microsoft.com/office/drawing/2014/main" id="{DA80B1E5-2888-D735-7520-A47852F7ED1C}"/>
-              </a:ext>
-            </a:extLst>
-          </p:cNvPr>
-          <p:cNvPicPr>
-            <a:picLocks noChangeAspect="1" noChangeArrowheads="1"/>
-          </p:cNvPicPr>
-          <p:nvPr/>
-        </p:nvPicPr>
-        <p:blipFill>
-          <a:blip r:embed="rId2">
-            <a:extLst>
-              <a:ext uri="{28A0092B-C50C-407E-A947-70E740481C1C}">
-                <a14:useLocalDpi xmlns:a14="http://schemas.microsoft.com/office/drawing/2010/main" val="0"/>
-              </a:ext>
-            </a:extLst>
-          </a:blip>
-          <a:srcRect/>
-          <a:stretch>
-            <a:fillRect/>
-          </a:stretch>
-        </p:blipFill>
-        <p:spPr bwMode="auto">
-          <a:xfrm>
-            <a:off x="3970554" y="1427541"/>
-            <a:ext cx="1071562" cy="1071562"/>
-          </a:xfrm>
-          <a:prstGeom prst="rect">
-            <a:avLst/>
-          </a:prstGeom>
-          <a:noFill/>
-          <a:extLst>
-            <a:ext uri="{909E8E84-426E-40DD-AFC4-6F175D3DCCD1}">
-              <a14:hiddenFill xmlns:a14="http://schemas.microsoft.com/office/drawing/2010/main">
-                <a:solidFill>
-                  <a:srgbClr val="FFFFFF"/>
-                </a:solidFill>
-              </a14:hiddenFill>
-            </a:ext>
-          </a:extLst>
-        </p:spPr>
-      </p:pic>
       <p:sp>
         <p:nvSpPr>
           <p:cNvPr id="2" name="Title 1">
             <a:extLst>
               <a:ext uri="{FF2B5EF4-FFF2-40B4-BE49-F238E27FC236}">
-                <a16:creationId xmlns:a16="http://schemas.microsoft.com/office/drawing/2014/main" id="{76E77D81-B038-7FB5-2B90-061A90EBF23E}"/>
+                <a16:creationId xmlns:a16="http://schemas.microsoft.com/office/drawing/2014/main" id="{B9530C9F-C77E-4AB9-8B37-B395A98C43EF}"/>
               </a:ext>
             </a:extLst>
           </p:cNvPr>
@@ -20717,11 +20557,13 @@
           <a:lstStyle/>
           <a:p>
             <a:r>
-              <a:rPr lang="en-US" dirty="0">
-                <a:ea typeface="Calibri Light"/>
-                <a:cs typeface="Calibri Light"/>
-              </a:rPr>
-              <a:t>Real-World Use Case: Real-Time Fraud Detection in Banking</a:t>
+              <a:rPr lang="en-US" sz="2800" dirty="0">
+                <a:effectLst/>
+                <a:latin typeface="Times New Roman" panose="02020603050405020304" pitchFamily="18" charset="0"/>
+                <a:ea typeface="Times New Roman" panose="02020603050405020304" pitchFamily="18" charset="0"/>
+                <a:cs typeface="Arial" panose="020B0604020202020204" pitchFamily="34" charset="0"/>
+              </a:rPr>
+              <a:t>Scenario: E-Commerce Order Processing System</a:t>
             </a:r>
             <a:endParaRPr lang="en-US" dirty="0"/>
           </a:p>
@@ -20732,7 +20574,7 @@
           <p:cNvPr id="3" name="Content Placeholder 2">
             <a:extLst>
               <a:ext uri="{FF2B5EF4-FFF2-40B4-BE49-F238E27FC236}">
-                <a16:creationId xmlns:a16="http://schemas.microsoft.com/office/drawing/2014/main" id="{A83CAC7D-42B8-C614-E399-7F41DD29BBE0}"/>
+                <a16:creationId xmlns:a16="http://schemas.microsoft.com/office/drawing/2014/main" id="{01C6437A-A221-4888-A133-89AFA711B850}"/>
               </a:ext>
             </a:extLst>
           </p:cNvPr>
@@ -20743,691 +20585,276 @@
             <p:ph idx="1"/>
           </p:nvPr>
         </p:nvSpPr>
-        <p:spPr>
-          <a:xfrm>
-            <a:off x="284085" y="1706007"/>
-            <a:ext cx="11448132" cy="5640190"/>
-          </a:xfrm>
-        </p:spPr>
+        <p:spPr/>
         <p:txBody>
-          <a:bodyPr vert="horz" lIns="91440" tIns="45720" rIns="91440" bIns="45720" numCol="2" spcCol="457200" rtlCol="0" anchor="t">
-            <a:normAutofit fontScale="92500" lnSpcReduction="10000"/>
-          </a:bodyPr>
+          <a:bodyPr/>
           <a:lstStyle/>
           <a:p>
-            <a:pPr marL="228600" marR="0" indent="0">
+            <a:pPr marL="0" marR="0" indent="0">
               <a:lnSpc>
-                <a:spcPct val="120000"/>
+                <a:spcPct val="107000"/>
               </a:lnSpc>
               <a:spcBef>
                 <a:spcPts val="0"/>
               </a:spcBef>
+              <a:spcAft>
+                <a:spcPts val="800"/>
+              </a:spcAft>
               <a:buNone/>
             </a:pPr>
             <a:r>
-              <a:rPr lang="en-US" sz="1800" b="1" kern="100" dirty="0">
+              <a:rPr lang="en-US" sz="1800" b="1" dirty="0">
                 <a:effectLst/>
-                <a:ea typeface="Aptos" panose="020B0004020202020204" pitchFamily="34" charset="0"/>
+                <a:latin typeface="Times New Roman" panose="02020603050405020304" pitchFamily="18" charset="0"/>
+                <a:ea typeface="Times New Roman" panose="02020603050405020304" pitchFamily="18" charset="0"/>
                 <a:cs typeface="Arial" panose="020B0604020202020204" pitchFamily="34" charset="0"/>
               </a:rPr>
-              <a:t>Company Example:</a:t>
-            </a:r>
-            <a:r>
-              <a:rPr lang="en-US" sz="1800" kern="100" dirty="0">
-                <a:effectLst/>
-                <a:ea typeface="Aptos" panose="020B0004020202020204" pitchFamily="34" charset="0"/>
-                <a:cs typeface="Arial" panose="020B0604020202020204" pitchFamily="34" charset="0"/>
-              </a:rPr>
-              <a:t> </a:t>
-            </a:r>
-            <a:r>
-              <a:rPr lang="en-US" sz="1800" i="1" kern="100" dirty="0">
-                <a:effectLst/>
-                <a:ea typeface="Aptos" panose="020B0004020202020204" pitchFamily="34" charset="0"/>
-                <a:cs typeface="Arial" panose="020B0604020202020204" pitchFamily="34" charset="0"/>
-              </a:rPr>
-              <a:t>Bank of America</a:t>
-            </a:r>
-          </a:p>
-          <a:p>
-            <a:pPr marL="228600" marR="0" indent="0">
+              <a:t>Objective:</a:t>
+            </a:r>
+            <a:endParaRPr lang="en-US" sz="1800" dirty="0">
+              <a:effectLst/>
+              <a:latin typeface="Calibri" panose="020F0502020204030204" pitchFamily="34" charset="0"/>
+              <a:ea typeface="Calibri" panose="020F0502020204030204" pitchFamily="34" charset="0"/>
+              <a:cs typeface="Arial" panose="020B0604020202020204" pitchFamily="34" charset="0"/>
+            </a:endParaRPr>
+          </a:p>
+          <a:p>
+            <a:pPr marL="0" marR="0">
               <a:lnSpc>
-                <a:spcPct val="120000"/>
+                <a:spcPct val="107000"/>
               </a:lnSpc>
               <a:spcBef>
                 <a:spcPts val="0"/>
               </a:spcBef>
-              <a:buNone/>
+              <a:spcAft>
+                <a:spcPts val="800"/>
+              </a:spcAft>
             </a:pPr>
-            <a:endParaRPr lang="en-US" sz="1800" b="1" kern="100" dirty="0">
+            <a:r>
+              <a:rPr lang="en-US" sz="1800" dirty="0">
+                <a:effectLst/>
+                <a:latin typeface="Times New Roman" panose="02020603050405020304" pitchFamily="18" charset="0"/>
+                <a:ea typeface="Times New Roman" panose="02020603050405020304" pitchFamily="18" charset="0"/>
+                <a:cs typeface="Arial" panose="020B0604020202020204" pitchFamily="34" charset="0"/>
+              </a:rPr>
+              <a:t>Efficiently process customer orders, manage inventory, and trigger shipments in real-time.</a:t>
+            </a:r>
+            <a:endParaRPr lang="en-US" sz="1800" dirty="0">
               <a:effectLst/>
-              <a:ea typeface="Aptos" panose="020B0004020202020204" pitchFamily="34" charset="0"/>
+              <a:latin typeface="Calibri" panose="020F0502020204030204" pitchFamily="34" charset="0"/>
+              <a:ea typeface="Calibri" panose="020F0502020204030204" pitchFamily="34" charset="0"/>
               <a:cs typeface="Arial" panose="020B0604020202020204" pitchFamily="34" charset="0"/>
             </a:endParaRPr>
           </a:p>
           <a:p>
-            <a:pPr marL="228600" marR="0" indent="0">
+            <a:pPr marL="0" marR="0">
               <a:lnSpc>
-                <a:spcPct val="120000"/>
+                <a:spcPct val="107000"/>
               </a:lnSpc>
               <a:spcBef>
                 <a:spcPts val="0"/>
               </a:spcBef>
-              <a:buNone/>
+              <a:spcAft>
+                <a:spcPts val="800"/>
+              </a:spcAft>
             </a:pPr>
             <a:r>
-              <a:rPr lang="en-US" sz="1800" b="1" kern="100" dirty="0">
+              <a:rPr lang="en-US" sz="1800" b="1" dirty="0">
                 <a:effectLst/>
-                <a:ea typeface="Aptos" panose="020B0004020202020204" pitchFamily="34" charset="0"/>
+                <a:latin typeface="Times New Roman" panose="02020603050405020304" pitchFamily="18" charset="0"/>
+                <a:ea typeface="Times New Roman" panose="02020603050405020304" pitchFamily="18" charset="0"/>
                 <a:cs typeface="Arial" panose="020B0604020202020204" pitchFamily="34" charset="0"/>
               </a:rPr>
-              <a:t>Objective:</a:t>
-            </a:r>
-            <a:endParaRPr lang="en-US" sz="1800" kern="100" dirty="0">
+              <a:t>Data Sources (Producers):</a:t>
+            </a:r>
+            <a:endParaRPr lang="en-US" sz="1800" dirty="0">
               <a:effectLst/>
-              <a:ea typeface="Aptos" panose="020B0004020202020204" pitchFamily="34" charset="0"/>
+              <a:latin typeface="Calibri" panose="020F0502020204030204" pitchFamily="34" charset="0"/>
+              <a:ea typeface="Calibri" panose="020F0502020204030204" pitchFamily="34" charset="0"/>
               <a:cs typeface="Arial" panose="020B0604020202020204" pitchFamily="34" charset="0"/>
             </a:endParaRPr>
           </a:p>
           <a:p>
-            <a:pPr marL="228600" marR="0" indent="0">
+            <a:pPr marL="342900" marR="0" lvl="0" indent="-342900">
               <a:lnSpc>
-                <a:spcPct val="120000"/>
+                <a:spcPct val="107000"/>
               </a:lnSpc>
               <a:spcBef>
                 <a:spcPts val="0"/>
               </a:spcBef>
-              <a:buNone/>
+              <a:spcAft>
+                <a:spcPts val="800"/>
+              </a:spcAft>
+              <a:buSzPts val="1000"/>
+              <a:buFont typeface="Symbol" panose="05050102010706020507" pitchFamily="18" charset="2"/>
+              <a:buChar char=""/>
+              <a:tabLst>
+                <a:tab pos="457200" algn="l"/>
+              </a:tabLst>
             </a:pPr>
             <a:r>
-              <a:rPr lang="en-US" sz="1800" kern="100" dirty="0">
+              <a:rPr lang="en-US" sz="1800" b="1" dirty="0">
                 <a:effectLst/>
-                <a:ea typeface="Aptos" panose="020B0004020202020204" pitchFamily="34" charset="0"/>
+                <a:latin typeface="Times New Roman" panose="02020603050405020304" pitchFamily="18" charset="0"/>
+                <a:ea typeface="Times New Roman" panose="02020603050405020304" pitchFamily="18" charset="0"/>
                 <a:cs typeface="Arial" panose="020B0604020202020204" pitchFamily="34" charset="0"/>
               </a:rPr>
-              <a:t> Detect fraudulent credit card transactions in real time using streaming data.</a:t>
-            </a:r>
-          </a:p>
-          <a:p>
-            <a:pPr marL="228600" marR="0" indent="0">
+              <a:t>Online Storefront (Website / Mobile App)</a:t>
+            </a:r>
+            <a:r>
+              <a:rPr lang="en-US" sz="1800" dirty="0">
+                <a:effectLst/>
+                <a:latin typeface="Times New Roman" panose="02020603050405020304" pitchFamily="18" charset="0"/>
+                <a:ea typeface="Times New Roman" panose="02020603050405020304" pitchFamily="18" charset="0"/>
+                <a:cs typeface="Arial" panose="020B0604020202020204" pitchFamily="34" charset="0"/>
+              </a:rPr>
+              <a:t>: Customers place orders for products.</a:t>
+            </a:r>
+            <a:endParaRPr lang="en-US" sz="1800" dirty="0">
+              <a:effectLst/>
+              <a:latin typeface="Calibri" panose="020F0502020204030204" pitchFamily="34" charset="0"/>
+              <a:ea typeface="Calibri" panose="020F0502020204030204" pitchFamily="34" charset="0"/>
+              <a:cs typeface="Arial" panose="020B0604020202020204" pitchFamily="34" charset="0"/>
+            </a:endParaRPr>
+          </a:p>
+          <a:p>
+            <a:pPr marL="342900" marR="0" lvl="0" indent="-342900">
               <a:lnSpc>
-                <a:spcPct val="120000"/>
+                <a:spcPct val="107000"/>
               </a:lnSpc>
               <a:spcBef>
                 <a:spcPts val="0"/>
               </a:spcBef>
-              <a:buNone/>
+              <a:spcAft>
+                <a:spcPts val="800"/>
+              </a:spcAft>
+              <a:buSzPts val="1000"/>
+              <a:buFont typeface="Symbol" panose="05050102010706020507" pitchFamily="18" charset="2"/>
+              <a:buChar char=""/>
+              <a:tabLst>
+                <a:tab pos="457200" algn="l"/>
+              </a:tabLst>
             </a:pPr>
-            <a:endParaRPr lang="en-US" sz="1800" kern="100" dirty="0">
+            <a:r>
+              <a:rPr lang="en-US" sz="1800" b="1" dirty="0">
+                <a:effectLst/>
+                <a:latin typeface="Times New Roman" panose="02020603050405020304" pitchFamily="18" charset="0"/>
+                <a:ea typeface="Times New Roman" panose="02020603050405020304" pitchFamily="18" charset="0"/>
+                <a:cs typeface="Arial" panose="020B0604020202020204" pitchFamily="34" charset="0"/>
+              </a:rPr>
+              <a:t>Warehouse Inventory System</a:t>
+            </a:r>
+            <a:r>
+              <a:rPr lang="en-US" sz="1800" dirty="0">
+                <a:effectLst/>
+                <a:latin typeface="Times New Roman" panose="02020603050405020304" pitchFamily="18" charset="0"/>
+                <a:ea typeface="Times New Roman" panose="02020603050405020304" pitchFamily="18" charset="0"/>
+                <a:cs typeface="Arial" panose="020B0604020202020204" pitchFamily="34" charset="0"/>
+              </a:rPr>
+              <a:t>: Sends updates on product availability, stock levels, and any inventory changes.</a:t>
+            </a:r>
+            <a:endParaRPr lang="en-US" sz="1800" dirty="0">
               <a:effectLst/>
-              <a:ea typeface="Aptos" panose="020B0004020202020204" pitchFamily="34" charset="0"/>
+              <a:latin typeface="Calibri" panose="020F0502020204030204" pitchFamily="34" charset="0"/>
+              <a:ea typeface="Calibri" panose="020F0502020204030204" pitchFamily="34" charset="0"/>
               <a:cs typeface="Arial" panose="020B0604020202020204" pitchFamily="34" charset="0"/>
             </a:endParaRPr>
           </a:p>
           <a:p>
-            <a:pPr marL="228600" marR="0" indent="0">
+            <a:pPr marL="342900" marR="0" lvl="0" indent="-342900">
               <a:lnSpc>
-                <a:spcPct val="120000"/>
+                <a:spcPct val="107000"/>
               </a:lnSpc>
               <a:spcBef>
                 <a:spcPts val="0"/>
               </a:spcBef>
-              <a:buNone/>
+              <a:spcAft>
+                <a:spcPts val="800"/>
+              </a:spcAft>
+              <a:buSzPts val="1000"/>
+              <a:buFont typeface="Symbol" panose="05050102010706020507" pitchFamily="18" charset="2"/>
+              <a:buChar char=""/>
+              <a:tabLst>
+                <a:tab pos="457200" algn="l"/>
+              </a:tabLst>
             </a:pPr>
             <a:r>
-              <a:rPr lang="en-US" sz="1800" b="1" kern="100" dirty="0">
+              <a:rPr lang="en-US" sz="1800" b="1" dirty="0">
                 <a:effectLst/>
-                <a:ea typeface="Aptos" panose="020B0004020202020204" pitchFamily="34" charset="0"/>
+                <a:latin typeface="Times New Roman" panose="02020603050405020304" pitchFamily="18" charset="0"/>
+                <a:ea typeface="Times New Roman" panose="02020603050405020304" pitchFamily="18" charset="0"/>
                 <a:cs typeface="Arial" panose="020B0604020202020204" pitchFamily="34" charset="0"/>
               </a:rPr>
-              <a:t>Data Source:</a:t>
-            </a:r>
-            <a:endParaRPr lang="en-US" sz="1800" kern="100" dirty="0">
+              <a:t>Payment Gateway</a:t>
+            </a:r>
+            <a:r>
+              <a:rPr lang="en-US" sz="1800" dirty="0">
+                <a:effectLst/>
+                <a:latin typeface="Times New Roman" panose="02020603050405020304" pitchFamily="18" charset="0"/>
+                <a:ea typeface="Times New Roman" panose="02020603050405020304" pitchFamily="18" charset="0"/>
+                <a:cs typeface="Arial" panose="020B0604020202020204" pitchFamily="34" charset="0"/>
+              </a:rPr>
+              <a:t>: Publishes transaction status (payment confirmed or failed) after a customer places an order.</a:t>
+            </a:r>
+            <a:endParaRPr lang="en-US" sz="1800" dirty="0">
               <a:effectLst/>
-              <a:ea typeface="Aptos" panose="020B0004020202020204" pitchFamily="34" charset="0"/>
+              <a:latin typeface="Calibri" panose="020F0502020204030204" pitchFamily="34" charset="0"/>
+              <a:ea typeface="Calibri" panose="020F0502020204030204" pitchFamily="34" charset="0"/>
               <a:cs typeface="Arial" panose="020B0604020202020204" pitchFamily="34" charset="0"/>
             </a:endParaRPr>
           </a:p>
           <a:p>
-            <a:pPr marL="228600" marR="0" indent="0">
+            <a:pPr marL="342900" marR="0" lvl="0" indent="-342900">
               <a:lnSpc>
-                <a:spcPct val="120000"/>
+                <a:spcPct val="107000"/>
               </a:lnSpc>
               <a:spcBef>
                 <a:spcPts val="0"/>
               </a:spcBef>
-              <a:buNone/>
+              <a:spcAft>
+                <a:spcPts val="800"/>
+              </a:spcAft>
+              <a:buSzPts val="1000"/>
+              <a:buFont typeface="Symbol" panose="05050102010706020507" pitchFamily="18" charset="2"/>
+              <a:buChar char=""/>
+              <a:tabLst>
+                <a:tab pos="457200" algn="l"/>
+              </a:tabLst>
             </a:pPr>
             <a:r>
-              <a:rPr lang="en-US" sz="1800" kern="100" dirty="0">
+              <a:rPr lang="en-US" sz="1800" b="1" dirty="0">
                 <a:effectLst/>
-                <a:ea typeface="Aptos" panose="020B0004020202020204" pitchFamily="34" charset="0"/>
+                <a:latin typeface="Times New Roman" panose="02020603050405020304" pitchFamily="18" charset="0"/>
+                <a:ea typeface="Times New Roman" panose="02020603050405020304" pitchFamily="18" charset="0"/>
                 <a:cs typeface="Arial" panose="020B0604020202020204" pitchFamily="34" charset="0"/>
               </a:rPr>
-              <a:t> Credit card transaction stream from multiple sources (POS terminals, ATMs, mobile apps)</a:t>
-            </a:r>
-          </a:p>
-          <a:p>
-            <a:pPr marL="228600" marR="0" indent="0">
-              <a:lnSpc>
-                <a:spcPct val="120000"/>
-              </a:lnSpc>
-              <a:spcBef>
-                <a:spcPts val="0"/>
-              </a:spcBef>
-              <a:buNone/>
-            </a:pPr>
-            <a:endParaRPr lang="en-US" sz="1800" kern="100" dirty="0">
+              <a:t>Shipping Providers</a:t>
+            </a:r>
+            <a:r>
+              <a:rPr lang="en-US" sz="1800" dirty="0">
+                <a:effectLst/>
+                <a:latin typeface="Times New Roman" panose="02020603050405020304" pitchFamily="18" charset="0"/>
+                <a:ea typeface="Times New Roman" panose="02020603050405020304" pitchFamily="18" charset="0"/>
+                <a:cs typeface="Arial" panose="020B0604020202020204" pitchFamily="34" charset="0"/>
+              </a:rPr>
+              <a:t>: Sends tracking updates for orders as they are dispatched and moved through the supply chain.</a:t>
+            </a:r>
+            <a:endParaRPr lang="en-US" sz="1800" dirty="0">
               <a:effectLst/>
-              <a:ea typeface="Aptos" panose="020B0004020202020204" pitchFamily="34" charset="0"/>
+              <a:latin typeface="Calibri" panose="020F0502020204030204" pitchFamily="34" charset="0"/>
+              <a:ea typeface="Calibri" panose="020F0502020204030204" pitchFamily="34" charset="0"/>
               <a:cs typeface="Arial" panose="020B0604020202020204" pitchFamily="34" charset="0"/>
             </a:endParaRPr>
           </a:p>
           <a:p>
-            <a:pPr marL="228600" marR="0" indent="0">
-              <a:lnSpc>
-                <a:spcPct val="120000"/>
-              </a:lnSpc>
-              <a:spcBef>
-                <a:spcPts val="0"/>
-              </a:spcBef>
-              <a:buNone/>
-            </a:pPr>
-            <a:r>
-              <a:rPr lang="en-US" sz="1800" b="1" kern="100" dirty="0">
-                <a:effectLst/>
-                <a:ea typeface="Aptos" panose="020B0004020202020204" pitchFamily="34" charset="0"/>
-                <a:cs typeface="Arial" panose="020B0604020202020204" pitchFamily="34" charset="0"/>
-              </a:rPr>
-              <a:t>Data Structure (Sample Kafka Message):</a:t>
-            </a:r>
-            <a:endParaRPr lang="en-US" sz="1800" kern="100" dirty="0">
-              <a:effectLst/>
-              <a:ea typeface="Aptos" panose="020B0004020202020204" pitchFamily="34" charset="0"/>
-              <a:cs typeface="Arial" panose="020B0604020202020204" pitchFamily="34" charset="0"/>
-            </a:endParaRPr>
-          </a:p>
-          <a:p>
-            <a:pPr marL="228600" marR="0" indent="0">
-              <a:lnSpc>
-                <a:spcPct val="120000"/>
-              </a:lnSpc>
-              <a:spcBef>
-                <a:spcPts val="0"/>
-              </a:spcBef>
-              <a:buNone/>
-            </a:pPr>
-            <a:r>
-              <a:rPr lang="en-US" sz="1800" b="1" kern="100" dirty="0">
-                <a:solidFill>
-                  <a:srgbClr val="00B050"/>
-                </a:solidFill>
-                <a:effectLst/>
-                <a:ea typeface="Aptos" panose="020B0004020202020204" pitchFamily="34" charset="0"/>
-                <a:cs typeface="Arial" panose="020B0604020202020204" pitchFamily="34" charset="0"/>
-              </a:rPr>
-              <a:t>{  "</a:t>
-            </a:r>
-            <a:r>
-              <a:rPr lang="en-US" sz="1800" b="1" kern="100" dirty="0" err="1">
-                <a:solidFill>
-                  <a:srgbClr val="00B050"/>
-                </a:solidFill>
-                <a:effectLst/>
-                <a:ea typeface="Aptos" panose="020B0004020202020204" pitchFamily="34" charset="0"/>
-                <a:cs typeface="Arial" panose="020B0604020202020204" pitchFamily="34" charset="0"/>
-              </a:rPr>
-              <a:t>transaction_id</a:t>
-            </a:r>
-            <a:r>
-              <a:rPr lang="en-US" sz="1800" b="1" kern="100" dirty="0">
-                <a:solidFill>
-                  <a:srgbClr val="00B050"/>
-                </a:solidFill>
-                <a:effectLst/>
-                <a:ea typeface="Aptos" panose="020B0004020202020204" pitchFamily="34" charset="0"/>
-                <a:cs typeface="Arial" panose="020B0604020202020204" pitchFamily="34" charset="0"/>
-              </a:rPr>
-              <a:t>": "txn78923",</a:t>
-            </a:r>
-            <a:br>
-              <a:rPr lang="en-US" sz="1800" b="1" kern="100" dirty="0">
-                <a:solidFill>
-                  <a:srgbClr val="00B050"/>
-                </a:solidFill>
-                <a:effectLst/>
-                <a:ea typeface="Aptos" panose="020B0004020202020204" pitchFamily="34" charset="0"/>
-                <a:cs typeface="Arial" panose="020B0604020202020204" pitchFamily="34" charset="0"/>
-              </a:rPr>
-            </a:br>
-            <a:r>
-              <a:rPr lang="en-US" sz="1800" b="1" kern="100" dirty="0">
-                <a:solidFill>
-                  <a:srgbClr val="00B050"/>
-                </a:solidFill>
-                <a:effectLst/>
-                <a:ea typeface="Aptos" panose="020B0004020202020204" pitchFamily="34" charset="0"/>
-                <a:cs typeface="Arial" panose="020B0604020202020204" pitchFamily="34" charset="0"/>
-              </a:rPr>
-              <a:t>  "timestamp": "2025-03-20T14:33:21Z",</a:t>
-            </a:r>
-            <a:br>
-              <a:rPr lang="en-US" sz="1800" b="1" kern="100" dirty="0">
-                <a:solidFill>
-                  <a:srgbClr val="00B050"/>
-                </a:solidFill>
-                <a:effectLst/>
-                <a:ea typeface="Aptos" panose="020B0004020202020204" pitchFamily="34" charset="0"/>
-                <a:cs typeface="Arial" panose="020B0604020202020204" pitchFamily="34" charset="0"/>
-              </a:rPr>
-            </a:br>
-            <a:r>
-              <a:rPr lang="en-US" sz="1800" b="1" kern="100" dirty="0">
-                <a:solidFill>
-                  <a:srgbClr val="00B050"/>
-                </a:solidFill>
-                <a:effectLst/>
-                <a:ea typeface="Aptos" panose="020B0004020202020204" pitchFamily="34" charset="0"/>
-                <a:cs typeface="Arial" panose="020B0604020202020204" pitchFamily="34" charset="0"/>
-              </a:rPr>
-              <a:t>  "</a:t>
-            </a:r>
-            <a:r>
-              <a:rPr lang="en-US" sz="1800" b="1" kern="100" dirty="0" err="1">
-                <a:solidFill>
-                  <a:srgbClr val="00B050"/>
-                </a:solidFill>
-                <a:effectLst/>
-                <a:ea typeface="Aptos" panose="020B0004020202020204" pitchFamily="34" charset="0"/>
-                <a:cs typeface="Arial" panose="020B0604020202020204" pitchFamily="34" charset="0"/>
-              </a:rPr>
-              <a:t>card_id</a:t>
-            </a:r>
-            <a:r>
-              <a:rPr lang="en-US" sz="1800" b="1" kern="100" dirty="0">
-                <a:solidFill>
-                  <a:srgbClr val="00B050"/>
-                </a:solidFill>
-                <a:effectLst/>
-                <a:ea typeface="Aptos" panose="020B0004020202020204" pitchFamily="34" charset="0"/>
-                <a:cs typeface="Arial" panose="020B0604020202020204" pitchFamily="34" charset="0"/>
-              </a:rPr>
-              <a:t>": "card3746",</a:t>
-            </a:r>
-            <a:br>
-              <a:rPr lang="en-US" sz="1800" b="1" kern="100" dirty="0">
-                <a:solidFill>
-                  <a:srgbClr val="00B050"/>
-                </a:solidFill>
-                <a:effectLst/>
-                <a:ea typeface="Aptos" panose="020B0004020202020204" pitchFamily="34" charset="0"/>
-                <a:cs typeface="Arial" panose="020B0604020202020204" pitchFamily="34" charset="0"/>
-              </a:rPr>
-            </a:br>
-            <a:r>
-              <a:rPr lang="en-US" sz="1800" b="1" kern="100" dirty="0">
-                <a:solidFill>
-                  <a:srgbClr val="00B050"/>
-                </a:solidFill>
-                <a:effectLst/>
-                <a:ea typeface="Aptos" panose="020B0004020202020204" pitchFamily="34" charset="0"/>
-                <a:cs typeface="Arial" panose="020B0604020202020204" pitchFamily="34" charset="0"/>
-              </a:rPr>
-              <a:t>  "amount": 324.55,</a:t>
-            </a:r>
-            <a:br>
-              <a:rPr lang="en-US" sz="1800" b="1" kern="100" dirty="0">
-                <a:solidFill>
-                  <a:srgbClr val="00B050"/>
-                </a:solidFill>
-                <a:effectLst/>
-                <a:ea typeface="Aptos" panose="020B0004020202020204" pitchFamily="34" charset="0"/>
-                <a:cs typeface="Arial" panose="020B0604020202020204" pitchFamily="34" charset="0"/>
-              </a:rPr>
-            </a:br>
-            <a:r>
-              <a:rPr lang="en-US" sz="1800" b="1" kern="100" dirty="0">
-                <a:solidFill>
-                  <a:srgbClr val="00B050"/>
-                </a:solidFill>
-                <a:effectLst/>
-                <a:ea typeface="Aptos" panose="020B0004020202020204" pitchFamily="34" charset="0"/>
-                <a:cs typeface="Arial" panose="020B0604020202020204" pitchFamily="34" charset="0"/>
-              </a:rPr>
-              <a:t>  "merchant": "Amazon",</a:t>
-            </a:r>
-            <a:br>
-              <a:rPr lang="en-US" sz="1800" b="1" kern="100" dirty="0">
-                <a:solidFill>
-                  <a:srgbClr val="00B050"/>
-                </a:solidFill>
-                <a:effectLst/>
-                <a:ea typeface="Aptos" panose="020B0004020202020204" pitchFamily="34" charset="0"/>
-                <a:cs typeface="Arial" panose="020B0604020202020204" pitchFamily="34" charset="0"/>
-              </a:rPr>
-            </a:br>
-            <a:r>
-              <a:rPr lang="en-US" sz="1800" b="1" kern="100" dirty="0">
-                <a:solidFill>
-                  <a:srgbClr val="00B050"/>
-                </a:solidFill>
-                <a:effectLst/>
-                <a:ea typeface="Aptos" panose="020B0004020202020204" pitchFamily="34" charset="0"/>
-                <a:cs typeface="Arial" panose="020B0604020202020204" pitchFamily="34" charset="0"/>
-              </a:rPr>
-              <a:t>  "location": "San Francisco, USA",</a:t>
-            </a:r>
-            <a:br>
-              <a:rPr lang="en-US" sz="1800" b="1" kern="100" dirty="0">
-                <a:solidFill>
-                  <a:srgbClr val="00B050"/>
-                </a:solidFill>
-                <a:effectLst/>
-                <a:ea typeface="Aptos" panose="020B0004020202020204" pitchFamily="34" charset="0"/>
-                <a:cs typeface="Arial" panose="020B0604020202020204" pitchFamily="34" charset="0"/>
-              </a:rPr>
-            </a:br>
-            <a:r>
-              <a:rPr lang="en-US" sz="1800" b="1" kern="100" dirty="0">
-                <a:solidFill>
-                  <a:srgbClr val="00B050"/>
-                </a:solidFill>
-                <a:effectLst/>
-                <a:ea typeface="Aptos" panose="020B0004020202020204" pitchFamily="34" charset="0"/>
-                <a:cs typeface="Arial" panose="020B0604020202020204" pitchFamily="34" charset="0"/>
-              </a:rPr>
-              <a:t>  "channel": "e-commerce"}</a:t>
-            </a:r>
-          </a:p>
-          <a:p>
-            <a:pPr marL="228600" marR="0" indent="0">
-              <a:lnSpc>
-                <a:spcPct val="120000"/>
-              </a:lnSpc>
-              <a:spcBef>
-                <a:spcPts val="0"/>
-              </a:spcBef>
-              <a:buNone/>
-            </a:pPr>
-            <a:endParaRPr lang="en-US" sz="1800" b="1" kern="100" dirty="0">
-              <a:solidFill>
-                <a:srgbClr val="00B050"/>
-              </a:solidFill>
-              <a:effectLst/>
-              <a:ea typeface="Aptos" panose="020B0004020202020204" pitchFamily="34" charset="0"/>
-              <a:cs typeface="Arial" panose="020B0604020202020204" pitchFamily="34" charset="0"/>
-            </a:endParaRPr>
-          </a:p>
-          <a:p>
-            <a:pPr marL="228600" marR="0" indent="0">
-              <a:lnSpc>
-                <a:spcPct val="120000"/>
-              </a:lnSpc>
-              <a:spcBef>
-                <a:spcPts val="0"/>
-              </a:spcBef>
-              <a:buNone/>
-            </a:pPr>
-            <a:r>
-              <a:rPr lang="en-US" sz="1800" b="1" kern="100" dirty="0">
-                <a:effectLst/>
-                <a:ea typeface="Aptos" panose="020B0004020202020204" pitchFamily="34" charset="0"/>
-                <a:cs typeface="Arial" panose="020B0604020202020204" pitchFamily="34" charset="0"/>
-              </a:rPr>
-              <a:t>Processing with Kafka:</a:t>
-            </a:r>
-            <a:endParaRPr lang="en-US" sz="1800" kern="100" dirty="0">
-              <a:effectLst/>
-              <a:ea typeface="Aptos" panose="020B0004020202020204" pitchFamily="34" charset="0"/>
-              <a:cs typeface="Arial" panose="020B0604020202020204" pitchFamily="34" charset="0"/>
-            </a:endParaRPr>
-          </a:p>
-          <a:p>
-            <a:pPr marL="228600" marR="0" indent="0">
-              <a:lnSpc>
-                <a:spcPct val="120000"/>
-              </a:lnSpc>
-              <a:spcBef>
-                <a:spcPts val="0"/>
-              </a:spcBef>
-              <a:buNone/>
-            </a:pPr>
-            <a:r>
-              <a:rPr lang="en-US" sz="1800" b="1" kern="100" dirty="0">
-                <a:effectLst/>
-                <a:ea typeface="Aptos" panose="020B0004020202020204" pitchFamily="34" charset="0"/>
-                <a:cs typeface="Arial" panose="020B0604020202020204" pitchFamily="34" charset="0"/>
-              </a:rPr>
-              <a:t>Producers:</a:t>
-            </a:r>
-            <a:endParaRPr lang="en-US" sz="1800" b="1" kern="100" dirty="0">
-              <a:ea typeface="Aptos" panose="020B0004020202020204" pitchFamily="34" charset="0"/>
-              <a:cs typeface="Arial" panose="020B0604020202020204" pitchFamily="34" charset="0"/>
-            </a:endParaRPr>
-          </a:p>
-          <a:p>
-            <a:pPr marL="228600" marR="0" indent="0">
-              <a:lnSpc>
-                <a:spcPct val="120000"/>
-              </a:lnSpc>
-              <a:spcBef>
-                <a:spcPts val="0"/>
-              </a:spcBef>
-              <a:buNone/>
-            </a:pPr>
-            <a:r>
-              <a:rPr lang="en-US" sz="1800" kern="100" dirty="0">
-                <a:effectLst/>
-                <a:ea typeface="Aptos" panose="020B0004020202020204" pitchFamily="34" charset="0"/>
-                <a:cs typeface="Arial" panose="020B0604020202020204" pitchFamily="34" charset="0"/>
-              </a:rPr>
-              <a:t>POS terminals and mobile apps publish transaction data to Kafka topics (transactions, locations, users).</a:t>
-            </a:r>
-          </a:p>
-          <a:p>
-            <a:pPr marL="228600" marR="0" indent="0">
-              <a:lnSpc>
-                <a:spcPct val="120000"/>
-              </a:lnSpc>
-              <a:spcBef>
-                <a:spcPts val="0"/>
-              </a:spcBef>
-              <a:buNone/>
-            </a:pPr>
-            <a:endParaRPr lang="en-US" sz="1800" kern="100" dirty="0">
-              <a:effectLst/>
-              <a:ea typeface="Aptos" panose="020B0004020202020204" pitchFamily="34" charset="0"/>
-              <a:cs typeface="Arial" panose="020B0604020202020204" pitchFamily="34" charset="0"/>
-            </a:endParaRPr>
-          </a:p>
-          <a:p>
-            <a:pPr marL="228600" marR="0" indent="0">
-              <a:lnSpc>
-                <a:spcPct val="120000"/>
-              </a:lnSpc>
-              <a:spcBef>
-                <a:spcPts val="0"/>
-              </a:spcBef>
-              <a:buNone/>
-            </a:pPr>
-            <a:r>
-              <a:rPr lang="en-US" sz="1800" b="1" kern="100" dirty="0">
-                <a:effectLst/>
-                <a:ea typeface="Aptos" panose="020B0004020202020204" pitchFamily="34" charset="0"/>
-                <a:cs typeface="Arial" panose="020B0604020202020204" pitchFamily="34" charset="0"/>
-              </a:rPr>
-              <a:t>Kafka Streams / Consumers:</a:t>
-            </a:r>
-            <a:endParaRPr lang="en-US" sz="1800" b="1" kern="100" dirty="0">
-              <a:ea typeface="Aptos" panose="020B0004020202020204" pitchFamily="34" charset="0"/>
-              <a:cs typeface="Arial" panose="020B0604020202020204" pitchFamily="34" charset="0"/>
-            </a:endParaRPr>
-          </a:p>
-          <a:p>
-            <a:pPr marL="514350" indent="-285750">
-              <a:lnSpc>
-                <a:spcPct val="120000"/>
-              </a:lnSpc>
-              <a:spcBef>
-                <a:spcPts val="0"/>
-              </a:spcBef>
-            </a:pPr>
-            <a:r>
-              <a:rPr lang="en-US" sz="1800" kern="100" dirty="0">
-                <a:effectLst/>
-                <a:ea typeface="Aptos" panose="020B0004020202020204" pitchFamily="34" charset="0"/>
-                <a:cs typeface="Arial" panose="020B0604020202020204" pitchFamily="34" charset="0"/>
-              </a:rPr>
-              <a:t>Stream joins with historical user behavior data.</a:t>
-            </a:r>
-          </a:p>
-          <a:p>
-            <a:pPr marL="514350" indent="-285750">
-              <a:lnSpc>
-                <a:spcPct val="120000"/>
-              </a:lnSpc>
-              <a:spcBef>
-                <a:spcPts val="0"/>
-              </a:spcBef>
-            </a:pPr>
-            <a:r>
-              <a:rPr lang="en-US" sz="1800" kern="100" dirty="0">
-                <a:effectLst/>
-                <a:ea typeface="Aptos" panose="020B0004020202020204" pitchFamily="34" charset="0"/>
-                <a:cs typeface="Arial" panose="020B0604020202020204" pitchFamily="34" charset="0"/>
-              </a:rPr>
-              <a:t>Apply real-time rule-based or ML-based fraud detection (e.g., unusual amount, location mismatch, rapid transactions).</a:t>
-            </a:r>
-          </a:p>
-          <a:p>
-            <a:pPr marL="514350" indent="-285750">
-              <a:lnSpc>
-                <a:spcPct val="120000"/>
-              </a:lnSpc>
-              <a:spcBef>
-                <a:spcPts val="0"/>
-              </a:spcBef>
-            </a:pPr>
-            <a:r>
-              <a:rPr lang="en-US" sz="1800" kern="100" dirty="0">
-                <a:effectLst/>
-                <a:ea typeface="Aptos" panose="020B0004020202020204" pitchFamily="34" charset="0"/>
-                <a:cs typeface="Arial" panose="020B0604020202020204" pitchFamily="34" charset="0"/>
-              </a:rPr>
-              <a:t>Flag anomalies and push alerts to a </a:t>
-            </a:r>
-            <a:r>
-              <a:rPr lang="en-US" sz="1800" kern="100" dirty="0" err="1">
-                <a:effectLst/>
-                <a:ea typeface="Aptos" panose="020B0004020202020204" pitchFamily="34" charset="0"/>
-                <a:cs typeface="Arial" panose="020B0604020202020204" pitchFamily="34" charset="0"/>
-              </a:rPr>
-              <a:t>fraud_alerts</a:t>
-            </a:r>
-            <a:r>
-              <a:rPr lang="en-US" sz="1800" kern="100" dirty="0">
-                <a:effectLst/>
-                <a:ea typeface="Aptos" panose="020B0004020202020204" pitchFamily="34" charset="0"/>
-                <a:cs typeface="Arial" panose="020B0604020202020204" pitchFamily="34" charset="0"/>
-              </a:rPr>
-              <a:t> topic.</a:t>
-            </a:r>
-          </a:p>
-          <a:p>
-            <a:pPr marL="228600" marR="0" indent="0">
-              <a:lnSpc>
-                <a:spcPct val="120000"/>
-              </a:lnSpc>
-              <a:spcBef>
-                <a:spcPts val="0"/>
-              </a:spcBef>
-              <a:buNone/>
-            </a:pPr>
-            <a:endParaRPr lang="en-US" sz="1800" b="1" kern="100" dirty="0">
-              <a:ea typeface="Aptos" panose="020B0004020202020204" pitchFamily="34" charset="0"/>
-              <a:cs typeface="Arial" panose="020B0604020202020204" pitchFamily="34" charset="0"/>
-            </a:endParaRPr>
-          </a:p>
-          <a:p>
-            <a:pPr indent="0">
-              <a:lnSpc>
-                <a:spcPct val="120000"/>
-              </a:lnSpc>
-              <a:spcBef>
-                <a:spcPts val="0"/>
-              </a:spcBef>
-              <a:buNone/>
-            </a:pPr>
-            <a:r>
-              <a:rPr lang="en-US" sz="1800" b="1" kern="100" dirty="0">
-                <a:effectLst/>
-                <a:ea typeface="Aptos" panose="020B0004020202020204" pitchFamily="34" charset="0"/>
-                <a:cs typeface="Arial" panose="020B0604020202020204" pitchFamily="34" charset="0"/>
-              </a:rPr>
-              <a:t>Outcome:</a:t>
-            </a:r>
-            <a:endParaRPr lang="en-US" sz="1800" kern="100" dirty="0">
-              <a:effectLst/>
-              <a:ea typeface="Aptos" panose="020B0004020202020204" pitchFamily="34" charset="0"/>
-              <a:cs typeface="Arial" panose="020B0604020202020204" pitchFamily="34" charset="0"/>
-            </a:endParaRPr>
-          </a:p>
-          <a:p>
-            <a:pPr marL="514350" indent="-285750">
-              <a:lnSpc>
-                <a:spcPct val="120000"/>
-              </a:lnSpc>
-              <a:spcBef>
-                <a:spcPts val="0"/>
-              </a:spcBef>
-            </a:pPr>
-            <a:r>
-              <a:rPr lang="en-US" sz="1800" kern="100" dirty="0">
-                <a:effectLst/>
-                <a:ea typeface="Aptos" panose="020B0004020202020204" pitchFamily="34" charset="0"/>
-                <a:cs typeface="Arial" panose="020B0604020202020204" pitchFamily="34" charset="0"/>
-              </a:rPr>
-              <a:t>Enables real-time detection and blocking of suspicious transactions.</a:t>
-            </a:r>
-          </a:p>
-          <a:p>
-            <a:pPr marL="514350" indent="-285750">
-              <a:lnSpc>
-                <a:spcPct val="120000"/>
-              </a:lnSpc>
-              <a:spcBef>
-                <a:spcPts val="0"/>
-              </a:spcBef>
-            </a:pPr>
-            <a:r>
-              <a:rPr lang="en-US" sz="1800" kern="100" dirty="0">
-                <a:effectLst/>
-                <a:ea typeface="Aptos" panose="020B0004020202020204" pitchFamily="34" charset="0"/>
-                <a:cs typeface="Arial" panose="020B0604020202020204" pitchFamily="34" charset="0"/>
-              </a:rPr>
-              <a:t>Reduces fraud loss and enhances customer trust.</a:t>
-            </a:r>
-          </a:p>
-          <a:p>
-            <a:pPr indent="0">
-              <a:lnSpc>
-                <a:spcPct val="120000"/>
-              </a:lnSpc>
-              <a:spcBef>
-                <a:spcPts val="0"/>
-              </a:spcBef>
-            </a:pPr>
-            <a:endParaRPr lang="en-US" dirty="0">
-              <a:ea typeface="Calibri"/>
-              <a:cs typeface="Calibri"/>
-            </a:endParaRPr>
+            <a:endParaRPr lang="en-US" dirty="0"/>
           </a:p>
         </p:txBody>
       </p:sp>
     </p:spTree>
     <p:extLst>
       <p:ext uri="{BB962C8B-B14F-4D97-AF65-F5344CB8AC3E}">
-        <p14:creationId xmlns:p14="http://schemas.microsoft.com/office/powerpoint/2010/main" val="3694445782"/>
+        <p14:creationId xmlns:p14="http://schemas.microsoft.com/office/powerpoint/2010/main" val="2914298022"/>
       </p:ext>
     </p:extLst>
   </p:cSld>
@@ -21438,6 +20865,2775 @@
 </file>
 
 <file path=ppt/slides/slide24.xml><?xml version="1.0" encoding="utf-8"?>
+<p:sld xmlns:a="http://schemas.openxmlformats.org/drawingml/2006/main" xmlns:r="http://schemas.openxmlformats.org/officeDocument/2006/relationships" xmlns:p="http://schemas.openxmlformats.org/presentationml/2006/main">
+  <p:cSld>
+    <p:spTree>
+      <p:nvGrpSpPr>
+        <p:cNvPr id="1" name=""/>
+        <p:cNvGrpSpPr/>
+        <p:nvPr/>
+      </p:nvGrpSpPr>
+      <p:grpSpPr>
+        <a:xfrm>
+          <a:off x="0" y="0"/>
+          <a:ext cx="0" cy="0"/>
+          <a:chOff x="0" y="0"/>
+          <a:chExt cx="0" cy="0"/>
+        </a:xfrm>
+      </p:grpSpPr>
+      <p:sp>
+        <p:nvSpPr>
+          <p:cNvPr id="2" name="Title 1">
+            <a:extLst>
+              <a:ext uri="{FF2B5EF4-FFF2-40B4-BE49-F238E27FC236}">
+                <a16:creationId xmlns:a16="http://schemas.microsoft.com/office/drawing/2014/main" id="{94C8800D-C43B-4FD7-A318-67AEB8003E93}"/>
+              </a:ext>
+            </a:extLst>
+          </p:cNvPr>
+          <p:cNvSpPr>
+            <a:spLocks noGrp="1"/>
+          </p:cNvSpPr>
+          <p:nvPr>
+            <p:ph type="title"/>
+          </p:nvPr>
+        </p:nvSpPr>
+        <p:spPr/>
+        <p:txBody>
+          <a:bodyPr>
+            <a:normAutofit/>
+          </a:bodyPr>
+          <a:lstStyle/>
+          <a:p>
+            <a:r>
+              <a:rPr lang="en-US" sz="2800" dirty="0">
+                <a:effectLst/>
+                <a:latin typeface="Times New Roman" panose="02020603050405020304" pitchFamily="18" charset="0"/>
+                <a:ea typeface="Times New Roman" panose="02020603050405020304" pitchFamily="18" charset="0"/>
+                <a:cs typeface="Arial" panose="020B0604020202020204" pitchFamily="34" charset="0"/>
+              </a:rPr>
+              <a:t>Kafka Data Structure (Sample Message):</a:t>
+            </a:r>
+            <a:endParaRPr lang="en-US" dirty="0"/>
+          </a:p>
+        </p:txBody>
+      </p:sp>
+      <p:sp>
+        <p:nvSpPr>
+          <p:cNvPr id="3" name="Content Placeholder 2">
+            <a:extLst>
+              <a:ext uri="{FF2B5EF4-FFF2-40B4-BE49-F238E27FC236}">
+                <a16:creationId xmlns:a16="http://schemas.microsoft.com/office/drawing/2014/main" id="{0874E313-B8F4-4CC1-A604-3C82F5A688A3}"/>
+              </a:ext>
+            </a:extLst>
+          </p:cNvPr>
+          <p:cNvSpPr>
+            <a:spLocks noGrp="1"/>
+          </p:cNvSpPr>
+          <p:nvPr>
+            <p:ph idx="1"/>
+          </p:nvPr>
+        </p:nvSpPr>
+        <p:spPr/>
+        <p:txBody>
+          <a:bodyPr/>
+          <a:lstStyle/>
+          <a:p>
+            <a:pPr marL="0" marR="0" indent="0">
+              <a:lnSpc>
+                <a:spcPct val="107000"/>
+              </a:lnSpc>
+              <a:spcBef>
+                <a:spcPts val="0"/>
+              </a:spcBef>
+              <a:spcAft>
+                <a:spcPts val="800"/>
+              </a:spcAft>
+              <a:buNone/>
+            </a:pPr>
+            <a:r>
+              <a:rPr lang="en-US" sz="1800" b="1" dirty="0">
+                <a:solidFill>
+                  <a:srgbClr val="00B050"/>
+                </a:solidFill>
+                <a:effectLst/>
+                <a:latin typeface="Times New Roman" panose="02020603050405020304" pitchFamily="18" charset="0"/>
+                <a:ea typeface="Times New Roman" panose="02020603050405020304" pitchFamily="18" charset="0"/>
+                <a:cs typeface="Arial" panose="020B0604020202020204" pitchFamily="34" charset="0"/>
+              </a:rPr>
+              <a:t>Order Message (from storefront):</a:t>
+            </a:r>
+            <a:endParaRPr lang="en-US" sz="1800" dirty="0">
+              <a:solidFill>
+                <a:srgbClr val="00B050"/>
+              </a:solidFill>
+              <a:effectLst/>
+              <a:latin typeface="Calibri" panose="020F0502020204030204" pitchFamily="34" charset="0"/>
+              <a:ea typeface="Calibri" panose="020F0502020204030204" pitchFamily="34" charset="0"/>
+              <a:cs typeface="Arial" panose="020B0604020202020204" pitchFamily="34" charset="0"/>
+            </a:endParaRPr>
+          </a:p>
+          <a:p>
+            <a:pPr marL="0" marR="0" indent="0">
+              <a:lnSpc>
+                <a:spcPct val="107000"/>
+              </a:lnSpc>
+              <a:spcBef>
+                <a:spcPts val="0"/>
+              </a:spcBef>
+              <a:spcAft>
+                <a:spcPts val="0"/>
+              </a:spcAft>
+              <a:buNone/>
+              <a:tabLst>
+                <a:tab pos="581660" algn="l"/>
+                <a:tab pos="1163320" algn="l"/>
+                <a:tab pos="1744980" algn="l"/>
+                <a:tab pos="2326640" algn="l"/>
+                <a:tab pos="2908300" algn="l"/>
+                <a:tab pos="3489960" algn="l"/>
+                <a:tab pos="4071620" algn="l"/>
+                <a:tab pos="4653280" algn="l"/>
+                <a:tab pos="5234940" algn="l"/>
+                <a:tab pos="5816600" algn="l"/>
+                <a:tab pos="6398260" algn="l"/>
+                <a:tab pos="6979920" algn="l"/>
+                <a:tab pos="7561580" algn="l"/>
+                <a:tab pos="8143240" algn="l"/>
+                <a:tab pos="8724900" algn="l"/>
+                <a:tab pos="9306560" algn="l"/>
+              </a:tabLst>
+            </a:pPr>
+            <a:r>
+              <a:rPr lang="en-US" sz="1800" dirty="0">
+                <a:solidFill>
+                  <a:srgbClr val="00B050"/>
+                </a:solidFill>
+                <a:effectLst/>
+                <a:latin typeface="Courier New" panose="02070309020205020404" pitchFamily="49" charset="0"/>
+                <a:ea typeface="Times New Roman" panose="02020603050405020304" pitchFamily="18" charset="0"/>
+                <a:cs typeface="Arial" panose="020B0604020202020204" pitchFamily="34" charset="0"/>
+              </a:rPr>
+              <a:t>{</a:t>
+            </a:r>
+            <a:endParaRPr lang="en-US" sz="1800" dirty="0">
+              <a:solidFill>
+                <a:srgbClr val="00B050"/>
+              </a:solidFill>
+              <a:effectLst/>
+              <a:latin typeface="Calibri" panose="020F0502020204030204" pitchFamily="34" charset="0"/>
+              <a:ea typeface="Calibri" panose="020F0502020204030204" pitchFamily="34" charset="0"/>
+              <a:cs typeface="Arial" panose="020B0604020202020204" pitchFamily="34" charset="0"/>
+            </a:endParaRPr>
+          </a:p>
+          <a:p>
+            <a:pPr marL="0" marR="0" indent="0">
+              <a:lnSpc>
+                <a:spcPct val="107000"/>
+              </a:lnSpc>
+              <a:spcBef>
+                <a:spcPts val="0"/>
+              </a:spcBef>
+              <a:spcAft>
+                <a:spcPts val="0"/>
+              </a:spcAft>
+              <a:buNone/>
+              <a:tabLst>
+                <a:tab pos="581660" algn="l"/>
+                <a:tab pos="1163320" algn="l"/>
+                <a:tab pos="1744980" algn="l"/>
+                <a:tab pos="2326640" algn="l"/>
+                <a:tab pos="2908300" algn="l"/>
+                <a:tab pos="3489960" algn="l"/>
+                <a:tab pos="4071620" algn="l"/>
+                <a:tab pos="4653280" algn="l"/>
+                <a:tab pos="5234940" algn="l"/>
+                <a:tab pos="5816600" algn="l"/>
+                <a:tab pos="6398260" algn="l"/>
+                <a:tab pos="6979920" algn="l"/>
+                <a:tab pos="7561580" algn="l"/>
+                <a:tab pos="8143240" algn="l"/>
+                <a:tab pos="8724900" algn="l"/>
+                <a:tab pos="9306560" algn="l"/>
+              </a:tabLst>
+            </a:pPr>
+            <a:r>
+              <a:rPr lang="en-US" sz="1800" dirty="0">
+                <a:solidFill>
+                  <a:srgbClr val="00B050"/>
+                </a:solidFill>
+                <a:effectLst/>
+                <a:latin typeface="Courier New" panose="02070309020205020404" pitchFamily="49" charset="0"/>
+                <a:ea typeface="Times New Roman" panose="02020603050405020304" pitchFamily="18" charset="0"/>
+                <a:cs typeface="Arial" panose="020B0604020202020204" pitchFamily="34" charset="0"/>
+              </a:rPr>
+              <a:t>  "</a:t>
+            </a:r>
+            <a:r>
+              <a:rPr lang="en-US" sz="1800" dirty="0" err="1">
+                <a:solidFill>
+                  <a:srgbClr val="00B050"/>
+                </a:solidFill>
+                <a:effectLst/>
+                <a:latin typeface="Courier New" panose="02070309020205020404" pitchFamily="49" charset="0"/>
+                <a:ea typeface="Times New Roman" panose="02020603050405020304" pitchFamily="18" charset="0"/>
+                <a:cs typeface="Arial" panose="020B0604020202020204" pitchFamily="34" charset="0"/>
+              </a:rPr>
+              <a:t>order_id</a:t>
+            </a:r>
+            <a:r>
+              <a:rPr lang="en-US" sz="1800" dirty="0">
+                <a:solidFill>
+                  <a:srgbClr val="00B050"/>
+                </a:solidFill>
+                <a:effectLst/>
+                <a:latin typeface="Courier New" panose="02070309020205020404" pitchFamily="49" charset="0"/>
+                <a:ea typeface="Times New Roman" panose="02020603050405020304" pitchFamily="18" charset="0"/>
+                <a:cs typeface="Arial" panose="020B0604020202020204" pitchFamily="34" charset="0"/>
+              </a:rPr>
+              <a:t>": "ord12345",</a:t>
+            </a:r>
+            <a:endParaRPr lang="en-US" sz="1800" dirty="0">
+              <a:solidFill>
+                <a:srgbClr val="00B050"/>
+              </a:solidFill>
+              <a:effectLst/>
+              <a:latin typeface="Calibri" panose="020F0502020204030204" pitchFamily="34" charset="0"/>
+              <a:ea typeface="Calibri" panose="020F0502020204030204" pitchFamily="34" charset="0"/>
+              <a:cs typeface="Arial" panose="020B0604020202020204" pitchFamily="34" charset="0"/>
+            </a:endParaRPr>
+          </a:p>
+          <a:p>
+            <a:pPr marL="0" marR="0" indent="0">
+              <a:lnSpc>
+                <a:spcPct val="107000"/>
+              </a:lnSpc>
+              <a:spcBef>
+                <a:spcPts val="0"/>
+              </a:spcBef>
+              <a:spcAft>
+                <a:spcPts val="0"/>
+              </a:spcAft>
+              <a:buNone/>
+              <a:tabLst>
+                <a:tab pos="581660" algn="l"/>
+                <a:tab pos="1163320" algn="l"/>
+                <a:tab pos="1744980" algn="l"/>
+                <a:tab pos="2326640" algn="l"/>
+                <a:tab pos="2908300" algn="l"/>
+                <a:tab pos="3489960" algn="l"/>
+                <a:tab pos="4071620" algn="l"/>
+                <a:tab pos="4653280" algn="l"/>
+                <a:tab pos="5234940" algn="l"/>
+                <a:tab pos="5816600" algn="l"/>
+                <a:tab pos="6398260" algn="l"/>
+                <a:tab pos="6979920" algn="l"/>
+                <a:tab pos="7561580" algn="l"/>
+                <a:tab pos="8143240" algn="l"/>
+                <a:tab pos="8724900" algn="l"/>
+                <a:tab pos="9306560" algn="l"/>
+              </a:tabLst>
+            </a:pPr>
+            <a:r>
+              <a:rPr lang="en-US" sz="1800" dirty="0">
+                <a:solidFill>
+                  <a:srgbClr val="00B050"/>
+                </a:solidFill>
+                <a:effectLst/>
+                <a:latin typeface="Courier New" panose="02070309020205020404" pitchFamily="49" charset="0"/>
+                <a:ea typeface="Times New Roman" panose="02020603050405020304" pitchFamily="18" charset="0"/>
+                <a:cs typeface="Arial" panose="020B0604020202020204" pitchFamily="34" charset="0"/>
+              </a:rPr>
+              <a:t>  "timestamp": "2025-03-25T10:10:30Z",</a:t>
+            </a:r>
+            <a:endParaRPr lang="en-US" sz="1800" dirty="0">
+              <a:solidFill>
+                <a:srgbClr val="00B050"/>
+              </a:solidFill>
+              <a:effectLst/>
+              <a:latin typeface="Calibri" panose="020F0502020204030204" pitchFamily="34" charset="0"/>
+              <a:ea typeface="Calibri" panose="020F0502020204030204" pitchFamily="34" charset="0"/>
+              <a:cs typeface="Arial" panose="020B0604020202020204" pitchFamily="34" charset="0"/>
+            </a:endParaRPr>
+          </a:p>
+          <a:p>
+            <a:pPr marL="0" marR="0" indent="0">
+              <a:lnSpc>
+                <a:spcPct val="107000"/>
+              </a:lnSpc>
+              <a:spcBef>
+                <a:spcPts val="0"/>
+              </a:spcBef>
+              <a:spcAft>
+                <a:spcPts val="0"/>
+              </a:spcAft>
+              <a:buNone/>
+              <a:tabLst>
+                <a:tab pos="581660" algn="l"/>
+                <a:tab pos="1163320" algn="l"/>
+                <a:tab pos="1744980" algn="l"/>
+                <a:tab pos="2326640" algn="l"/>
+                <a:tab pos="2908300" algn="l"/>
+                <a:tab pos="3489960" algn="l"/>
+                <a:tab pos="4071620" algn="l"/>
+                <a:tab pos="4653280" algn="l"/>
+                <a:tab pos="5234940" algn="l"/>
+                <a:tab pos="5816600" algn="l"/>
+                <a:tab pos="6398260" algn="l"/>
+                <a:tab pos="6979920" algn="l"/>
+                <a:tab pos="7561580" algn="l"/>
+                <a:tab pos="8143240" algn="l"/>
+                <a:tab pos="8724900" algn="l"/>
+                <a:tab pos="9306560" algn="l"/>
+              </a:tabLst>
+            </a:pPr>
+            <a:r>
+              <a:rPr lang="en-US" sz="1800" dirty="0">
+                <a:solidFill>
+                  <a:srgbClr val="00B050"/>
+                </a:solidFill>
+                <a:effectLst/>
+                <a:latin typeface="Courier New" panose="02070309020205020404" pitchFamily="49" charset="0"/>
+                <a:ea typeface="Times New Roman" panose="02020603050405020304" pitchFamily="18" charset="0"/>
+                <a:cs typeface="Arial" panose="020B0604020202020204" pitchFamily="34" charset="0"/>
+              </a:rPr>
+              <a:t>  "</a:t>
+            </a:r>
+            <a:r>
+              <a:rPr lang="en-US" sz="1800" dirty="0" err="1">
+                <a:solidFill>
+                  <a:srgbClr val="00B050"/>
+                </a:solidFill>
+                <a:effectLst/>
+                <a:latin typeface="Courier New" panose="02070309020205020404" pitchFamily="49" charset="0"/>
+                <a:ea typeface="Times New Roman" panose="02020603050405020304" pitchFamily="18" charset="0"/>
+                <a:cs typeface="Arial" panose="020B0604020202020204" pitchFamily="34" charset="0"/>
+              </a:rPr>
+              <a:t>customer_id</a:t>
+            </a:r>
+            <a:r>
+              <a:rPr lang="en-US" sz="1800" dirty="0">
+                <a:solidFill>
+                  <a:srgbClr val="00B050"/>
+                </a:solidFill>
+                <a:effectLst/>
+                <a:latin typeface="Courier New" panose="02070309020205020404" pitchFamily="49" charset="0"/>
+                <a:ea typeface="Times New Roman" panose="02020603050405020304" pitchFamily="18" charset="0"/>
+                <a:cs typeface="Arial" panose="020B0604020202020204" pitchFamily="34" charset="0"/>
+              </a:rPr>
+              <a:t>": "cust456",</a:t>
+            </a:r>
+            <a:endParaRPr lang="en-US" sz="1800" dirty="0">
+              <a:solidFill>
+                <a:srgbClr val="00B050"/>
+              </a:solidFill>
+              <a:effectLst/>
+              <a:latin typeface="Calibri" panose="020F0502020204030204" pitchFamily="34" charset="0"/>
+              <a:ea typeface="Calibri" panose="020F0502020204030204" pitchFamily="34" charset="0"/>
+              <a:cs typeface="Arial" panose="020B0604020202020204" pitchFamily="34" charset="0"/>
+            </a:endParaRPr>
+          </a:p>
+          <a:p>
+            <a:pPr marL="0" marR="0" indent="0">
+              <a:lnSpc>
+                <a:spcPct val="107000"/>
+              </a:lnSpc>
+              <a:spcBef>
+                <a:spcPts val="0"/>
+              </a:spcBef>
+              <a:spcAft>
+                <a:spcPts val="0"/>
+              </a:spcAft>
+              <a:buNone/>
+              <a:tabLst>
+                <a:tab pos="581660" algn="l"/>
+                <a:tab pos="1163320" algn="l"/>
+                <a:tab pos="1744980" algn="l"/>
+                <a:tab pos="2326640" algn="l"/>
+                <a:tab pos="2908300" algn="l"/>
+                <a:tab pos="3489960" algn="l"/>
+                <a:tab pos="4071620" algn="l"/>
+                <a:tab pos="4653280" algn="l"/>
+                <a:tab pos="5234940" algn="l"/>
+                <a:tab pos="5816600" algn="l"/>
+                <a:tab pos="6398260" algn="l"/>
+                <a:tab pos="6979920" algn="l"/>
+                <a:tab pos="7561580" algn="l"/>
+                <a:tab pos="8143240" algn="l"/>
+                <a:tab pos="8724900" algn="l"/>
+                <a:tab pos="9306560" algn="l"/>
+              </a:tabLst>
+            </a:pPr>
+            <a:r>
+              <a:rPr lang="en-US" sz="1800" dirty="0">
+                <a:solidFill>
+                  <a:srgbClr val="00B050"/>
+                </a:solidFill>
+                <a:effectLst/>
+                <a:latin typeface="Courier New" panose="02070309020205020404" pitchFamily="49" charset="0"/>
+                <a:ea typeface="Times New Roman" panose="02020603050405020304" pitchFamily="18" charset="0"/>
+                <a:cs typeface="Arial" panose="020B0604020202020204" pitchFamily="34" charset="0"/>
+              </a:rPr>
+              <a:t>  "items": [</a:t>
+            </a:r>
+            <a:endParaRPr lang="en-US" sz="1800" dirty="0">
+              <a:solidFill>
+                <a:srgbClr val="00B050"/>
+              </a:solidFill>
+              <a:effectLst/>
+              <a:latin typeface="Calibri" panose="020F0502020204030204" pitchFamily="34" charset="0"/>
+              <a:ea typeface="Calibri" panose="020F0502020204030204" pitchFamily="34" charset="0"/>
+              <a:cs typeface="Arial" panose="020B0604020202020204" pitchFamily="34" charset="0"/>
+            </a:endParaRPr>
+          </a:p>
+          <a:p>
+            <a:pPr marL="0" marR="0" indent="0">
+              <a:lnSpc>
+                <a:spcPct val="107000"/>
+              </a:lnSpc>
+              <a:spcBef>
+                <a:spcPts val="0"/>
+              </a:spcBef>
+              <a:spcAft>
+                <a:spcPts val="0"/>
+              </a:spcAft>
+              <a:buNone/>
+              <a:tabLst>
+                <a:tab pos="581660" algn="l"/>
+                <a:tab pos="1163320" algn="l"/>
+                <a:tab pos="1744980" algn="l"/>
+                <a:tab pos="2326640" algn="l"/>
+                <a:tab pos="2908300" algn="l"/>
+                <a:tab pos="3489960" algn="l"/>
+                <a:tab pos="4071620" algn="l"/>
+                <a:tab pos="4653280" algn="l"/>
+                <a:tab pos="5234940" algn="l"/>
+                <a:tab pos="5816600" algn="l"/>
+                <a:tab pos="6398260" algn="l"/>
+                <a:tab pos="6979920" algn="l"/>
+                <a:tab pos="7561580" algn="l"/>
+                <a:tab pos="8143240" algn="l"/>
+                <a:tab pos="8724900" algn="l"/>
+                <a:tab pos="9306560" algn="l"/>
+              </a:tabLst>
+            </a:pPr>
+            <a:r>
+              <a:rPr lang="en-US" sz="1800" dirty="0">
+                <a:solidFill>
+                  <a:srgbClr val="00B050"/>
+                </a:solidFill>
+                <a:effectLst/>
+                <a:latin typeface="Courier New" panose="02070309020205020404" pitchFamily="49" charset="0"/>
+                <a:ea typeface="Times New Roman" panose="02020603050405020304" pitchFamily="18" charset="0"/>
+                <a:cs typeface="Arial" panose="020B0604020202020204" pitchFamily="34" charset="0"/>
+              </a:rPr>
+              <a:t>    {"</a:t>
+            </a:r>
+            <a:r>
+              <a:rPr lang="en-US" sz="1800" dirty="0" err="1">
+                <a:solidFill>
+                  <a:srgbClr val="00B050"/>
+                </a:solidFill>
+                <a:effectLst/>
+                <a:latin typeface="Courier New" panose="02070309020205020404" pitchFamily="49" charset="0"/>
+                <a:ea typeface="Times New Roman" panose="02020603050405020304" pitchFamily="18" charset="0"/>
+                <a:cs typeface="Arial" panose="020B0604020202020204" pitchFamily="34" charset="0"/>
+              </a:rPr>
+              <a:t>product_id</a:t>
+            </a:r>
+            <a:r>
+              <a:rPr lang="en-US" sz="1800" dirty="0">
+                <a:solidFill>
+                  <a:srgbClr val="00B050"/>
+                </a:solidFill>
+                <a:effectLst/>
+                <a:latin typeface="Courier New" panose="02070309020205020404" pitchFamily="49" charset="0"/>
+                <a:ea typeface="Times New Roman" panose="02020603050405020304" pitchFamily="18" charset="0"/>
+                <a:cs typeface="Arial" panose="020B0604020202020204" pitchFamily="34" charset="0"/>
+              </a:rPr>
+              <a:t>": "prod678", "quantity": 2},</a:t>
+            </a:r>
+            <a:endParaRPr lang="en-US" sz="1800" dirty="0">
+              <a:solidFill>
+                <a:srgbClr val="00B050"/>
+              </a:solidFill>
+              <a:effectLst/>
+              <a:latin typeface="Calibri" panose="020F0502020204030204" pitchFamily="34" charset="0"/>
+              <a:ea typeface="Calibri" panose="020F0502020204030204" pitchFamily="34" charset="0"/>
+              <a:cs typeface="Arial" panose="020B0604020202020204" pitchFamily="34" charset="0"/>
+            </a:endParaRPr>
+          </a:p>
+          <a:p>
+            <a:pPr marL="0" marR="0" indent="0">
+              <a:lnSpc>
+                <a:spcPct val="107000"/>
+              </a:lnSpc>
+              <a:spcBef>
+                <a:spcPts val="0"/>
+              </a:spcBef>
+              <a:spcAft>
+                <a:spcPts val="0"/>
+              </a:spcAft>
+              <a:buNone/>
+              <a:tabLst>
+                <a:tab pos="581660" algn="l"/>
+                <a:tab pos="1163320" algn="l"/>
+                <a:tab pos="1744980" algn="l"/>
+                <a:tab pos="2326640" algn="l"/>
+                <a:tab pos="2908300" algn="l"/>
+                <a:tab pos="3489960" algn="l"/>
+                <a:tab pos="4071620" algn="l"/>
+                <a:tab pos="4653280" algn="l"/>
+                <a:tab pos="5234940" algn="l"/>
+                <a:tab pos="5816600" algn="l"/>
+                <a:tab pos="6398260" algn="l"/>
+                <a:tab pos="6979920" algn="l"/>
+                <a:tab pos="7561580" algn="l"/>
+                <a:tab pos="8143240" algn="l"/>
+                <a:tab pos="8724900" algn="l"/>
+                <a:tab pos="9306560" algn="l"/>
+              </a:tabLst>
+            </a:pPr>
+            <a:r>
+              <a:rPr lang="en-US" sz="1800" dirty="0">
+                <a:solidFill>
+                  <a:srgbClr val="00B050"/>
+                </a:solidFill>
+                <a:effectLst/>
+                <a:latin typeface="Courier New" panose="02070309020205020404" pitchFamily="49" charset="0"/>
+                <a:ea typeface="Times New Roman" panose="02020603050405020304" pitchFamily="18" charset="0"/>
+                <a:cs typeface="Arial" panose="020B0604020202020204" pitchFamily="34" charset="0"/>
+              </a:rPr>
+              <a:t>    {"</a:t>
+            </a:r>
+            <a:r>
+              <a:rPr lang="en-US" sz="1800" dirty="0" err="1">
+                <a:solidFill>
+                  <a:srgbClr val="00B050"/>
+                </a:solidFill>
+                <a:effectLst/>
+                <a:latin typeface="Courier New" panose="02070309020205020404" pitchFamily="49" charset="0"/>
+                <a:ea typeface="Times New Roman" panose="02020603050405020304" pitchFamily="18" charset="0"/>
+                <a:cs typeface="Arial" panose="020B0604020202020204" pitchFamily="34" charset="0"/>
+              </a:rPr>
+              <a:t>product_id</a:t>
+            </a:r>
+            <a:r>
+              <a:rPr lang="en-US" sz="1800" dirty="0">
+                <a:solidFill>
+                  <a:srgbClr val="00B050"/>
+                </a:solidFill>
+                <a:effectLst/>
+                <a:latin typeface="Courier New" panose="02070309020205020404" pitchFamily="49" charset="0"/>
+                <a:ea typeface="Times New Roman" panose="02020603050405020304" pitchFamily="18" charset="0"/>
+                <a:cs typeface="Arial" panose="020B0604020202020204" pitchFamily="34" charset="0"/>
+              </a:rPr>
+              <a:t>": "prod789", "quantity": 1}</a:t>
+            </a:r>
+            <a:endParaRPr lang="en-US" sz="1800" dirty="0">
+              <a:solidFill>
+                <a:srgbClr val="00B050"/>
+              </a:solidFill>
+              <a:effectLst/>
+              <a:latin typeface="Calibri" panose="020F0502020204030204" pitchFamily="34" charset="0"/>
+              <a:ea typeface="Calibri" panose="020F0502020204030204" pitchFamily="34" charset="0"/>
+              <a:cs typeface="Arial" panose="020B0604020202020204" pitchFamily="34" charset="0"/>
+            </a:endParaRPr>
+          </a:p>
+          <a:p>
+            <a:pPr marL="0" marR="0" indent="0">
+              <a:lnSpc>
+                <a:spcPct val="107000"/>
+              </a:lnSpc>
+              <a:spcBef>
+                <a:spcPts val="0"/>
+              </a:spcBef>
+              <a:spcAft>
+                <a:spcPts val="0"/>
+              </a:spcAft>
+              <a:buNone/>
+              <a:tabLst>
+                <a:tab pos="581660" algn="l"/>
+                <a:tab pos="1163320" algn="l"/>
+                <a:tab pos="1744980" algn="l"/>
+                <a:tab pos="2326640" algn="l"/>
+                <a:tab pos="2908300" algn="l"/>
+                <a:tab pos="3489960" algn="l"/>
+                <a:tab pos="4071620" algn="l"/>
+                <a:tab pos="4653280" algn="l"/>
+                <a:tab pos="5234940" algn="l"/>
+                <a:tab pos="5816600" algn="l"/>
+                <a:tab pos="6398260" algn="l"/>
+                <a:tab pos="6979920" algn="l"/>
+                <a:tab pos="7561580" algn="l"/>
+                <a:tab pos="8143240" algn="l"/>
+                <a:tab pos="8724900" algn="l"/>
+                <a:tab pos="9306560" algn="l"/>
+              </a:tabLst>
+            </a:pPr>
+            <a:r>
+              <a:rPr lang="en-US" sz="1800" dirty="0">
+                <a:solidFill>
+                  <a:srgbClr val="00B050"/>
+                </a:solidFill>
+                <a:effectLst/>
+                <a:latin typeface="Courier New" panose="02070309020205020404" pitchFamily="49" charset="0"/>
+                <a:ea typeface="Times New Roman" panose="02020603050405020304" pitchFamily="18" charset="0"/>
+                <a:cs typeface="Arial" panose="020B0604020202020204" pitchFamily="34" charset="0"/>
+              </a:rPr>
+              <a:t>  ],</a:t>
+            </a:r>
+            <a:endParaRPr lang="en-US" sz="1800" dirty="0">
+              <a:solidFill>
+                <a:srgbClr val="00B050"/>
+              </a:solidFill>
+              <a:effectLst/>
+              <a:latin typeface="Calibri" panose="020F0502020204030204" pitchFamily="34" charset="0"/>
+              <a:ea typeface="Calibri" panose="020F0502020204030204" pitchFamily="34" charset="0"/>
+              <a:cs typeface="Arial" panose="020B0604020202020204" pitchFamily="34" charset="0"/>
+            </a:endParaRPr>
+          </a:p>
+          <a:p>
+            <a:pPr marL="0" marR="0" indent="0">
+              <a:lnSpc>
+                <a:spcPct val="107000"/>
+              </a:lnSpc>
+              <a:spcBef>
+                <a:spcPts val="0"/>
+              </a:spcBef>
+              <a:spcAft>
+                <a:spcPts val="0"/>
+              </a:spcAft>
+              <a:buNone/>
+              <a:tabLst>
+                <a:tab pos="581660" algn="l"/>
+                <a:tab pos="1163320" algn="l"/>
+                <a:tab pos="1744980" algn="l"/>
+                <a:tab pos="2326640" algn="l"/>
+                <a:tab pos="2908300" algn="l"/>
+                <a:tab pos="3489960" algn="l"/>
+                <a:tab pos="4071620" algn="l"/>
+                <a:tab pos="4653280" algn="l"/>
+                <a:tab pos="5234940" algn="l"/>
+                <a:tab pos="5816600" algn="l"/>
+                <a:tab pos="6398260" algn="l"/>
+                <a:tab pos="6979920" algn="l"/>
+                <a:tab pos="7561580" algn="l"/>
+                <a:tab pos="8143240" algn="l"/>
+                <a:tab pos="8724900" algn="l"/>
+                <a:tab pos="9306560" algn="l"/>
+              </a:tabLst>
+            </a:pPr>
+            <a:r>
+              <a:rPr lang="en-US" sz="1800" dirty="0">
+                <a:solidFill>
+                  <a:srgbClr val="00B050"/>
+                </a:solidFill>
+                <a:effectLst/>
+                <a:latin typeface="Courier New" panose="02070309020205020404" pitchFamily="49" charset="0"/>
+                <a:ea typeface="Times New Roman" panose="02020603050405020304" pitchFamily="18" charset="0"/>
+                <a:cs typeface="Arial" panose="020B0604020202020204" pitchFamily="34" charset="0"/>
+              </a:rPr>
+              <a:t>  "</a:t>
+            </a:r>
+            <a:r>
+              <a:rPr lang="en-US" sz="1800" dirty="0" err="1">
+                <a:solidFill>
+                  <a:srgbClr val="00B050"/>
+                </a:solidFill>
+                <a:effectLst/>
+                <a:latin typeface="Courier New" panose="02070309020205020404" pitchFamily="49" charset="0"/>
+                <a:ea typeface="Times New Roman" panose="02020603050405020304" pitchFamily="18" charset="0"/>
+                <a:cs typeface="Arial" panose="020B0604020202020204" pitchFamily="34" charset="0"/>
+              </a:rPr>
+              <a:t>total_amount</a:t>
+            </a:r>
+            <a:r>
+              <a:rPr lang="en-US" sz="1800" dirty="0">
+                <a:solidFill>
+                  <a:srgbClr val="00B050"/>
+                </a:solidFill>
+                <a:effectLst/>
+                <a:latin typeface="Courier New" panose="02070309020205020404" pitchFamily="49" charset="0"/>
+                <a:ea typeface="Times New Roman" panose="02020603050405020304" pitchFamily="18" charset="0"/>
+                <a:cs typeface="Arial" panose="020B0604020202020204" pitchFamily="34" charset="0"/>
+              </a:rPr>
+              <a:t>": 129.99,</a:t>
+            </a:r>
+            <a:endParaRPr lang="en-US" sz="1800" dirty="0">
+              <a:solidFill>
+                <a:srgbClr val="00B050"/>
+              </a:solidFill>
+              <a:effectLst/>
+              <a:latin typeface="Calibri" panose="020F0502020204030204" pitchFamily="34" charset="0"/>
+              <a:ea typeface="Calibri" panose="020F0502020204030204" pitchFamily="34" charset="0"/>
+              <a:cs typeface="Arial" panose="020B0604020202020204" pitchFamily="34" charset="0"/>
+            </a:endParaRPr>
+          </a:p>
+          <a:p>
+            <a:pPr marL="0" marR="0" indent="0">
+              <a:lnSpc>
+                <a:spcPct val="107000"/>
+              </a:lnSpc>
+              <a:spcBef>
+                <a:spcPts val="0"/>
+              </a:spcBef>
+              <a:spcAft>
+                <a:spcPts val="0"/>
+              </a:spcAft>
+              <a:buNone/>
+              <a:tabLst>
+                <a:tab pos="581660" algn="l"/>
+                <a:tab pos="1163320" algn="l"/>
+                <a:tab pos="1744980" algn="l"/>
+                <a:tab pos="2326640" algn="l"/>
+                <a:tab pos="2908300" algn="l"/>
+                <a:tab pos="3489960" algn="l"/>
+                <a:tab pos="4071620" algn="l"/>
+                <a:tab pos="4653280" algn="l"/>
+                <a:tab pos="5234940" algn="l"/>
+                <a:tab pos="5816600" algn="l"/>
+                <a:tab pos="6398260" algn="l"/>
+                <a:tab pos="6979920" algn="l"/>
+                <a:tab pos="7561580" algn="l"/>
+                <a:tab pos="8143240" algn="l"/>
+                <a:tab pos="8724900" algn="l"/>
+                <a:tab pos="9306560" algn="l"/>
+              </a:tabLst>
+            </a:pPr>
+            <a:r>
+              <a:rPr lang="en-US" sz="1800" dirty="0">
+                <a:solidFill>
+                  <a:srgbClr val="00B050"/>
+                </a:solidFill>
+                <a:effectLst/>
+                <a:latin typeface="Courier New" panose="02070309020205020404" pitchFamily="49" charset="0"/>
+                <a:ea typeface="Times New Roman" panose="02020603050405020304" pitchFamily="18" charset="0"/>
+                <a:cs typeface="Arial" panose="020B0604020202020204" pitchFamily="34" charset="0"/>
+              </a:rPr>
+              <a:t>  "</a:t>
+            </a:r>
+            <a:r>
+              <a:rPr lang="en-US" sz="1800" dirty="0" err="1">
+                <a:solidFill>
+                  <a:srgbClr val="00B050"/>
+                </a:solidFill>
+                <a:effectLst/>
+                <a:latin typeface="Courier New" panose="02070309020205020404" pitchFamily="49" charset="0"/>
+                <a:ea typeface="Times New Roman" panose="02020603050405020304" pitchFamily="18" charset="0"/>
+                <a:cs typeface="Arial" panose="020B0604020202020204" pitchFamily="34" charset="0"/>
+              </a:rPr>
+              <a:t>payment_status</a:t>
+            </a:r>
+            <a:r>
+              <a:rPr lang="en-US" sz="1800" dirty="0">
+                <a:solidFill>
+                  <a:srgbClr val="00B050"/>
+                </a:solidFill>
+                <a:effectLst/>
+                <a:latin typeface="Courier New" panose="02070309020205020404" pitchFamily="49" charset="0"/>
+                <a:ea typeface="Times New Roman" panose="02020603050405020304" pitchFamily="18" charset="0"/>
+                <a:cs typeface="Arial" panose="020B0604020202020204" pitchFamily="34" charset="0"/>
+              </a:rPr>
+              <a:t>": "paid",</a:t>
+            </a:r>
+            <a:endParaRPr lang="en-US" sz="1800" dirty="0">
+              <a:solidFill>
+                <a:srgbClr val="00B050"/>
+              </a:solidFill>
+              <a:effectLst/>
+              <a:latin typeface="Calibri" panose="020F0502020204030204" pitchFamily="34" charset="0"/>
+              <a:ea typeface="Calibri" panose="020F0502020204030204" pitchFamily="34" charset="0"/>
+              <a:cs typeface="Arial" panose="020B0604020202020204" pitchFamily="34" charset="0"/>
+            </a:endParaRPr>
+          </a:p>
+          <a:p>
+            <a:pPr marL="0" marR="0" indent="0">
+              <a:lnSpc>
+                <a:spcPct val="107000"/>
+              </a:lnSpc>
+              <a:spcBef>
+                <a:spcPts val="0"/>
+              </a:spcBef>
+              <a:spcAft>
+                <a:spcPts val="0"/>
+              </a:spcAft>
+              <a:buNone/>
+              <a:tabLst>
+                <a:tab pos="581660" algn="l"/>
+                <a:tab pos="1163320" algn="l"/>
+                <a:tab pos="1744980" algn="l"/>
+                <a:tab pos="2326640" algn="l"/>
+                <a:tab pos="2908300" algn="l"/>
+                <a:tab pos="3489960" algn="l"/>
+                <a:tab pos="4071620" algn="l"/>
+                <a:tab pos="4653280" algn="l"/>
+                <a:tab pos="5234940" algn="l"/>
+                <a:tab pos="5816600" algn="l"/>
+                <a:tab pos="6398260" algn="l"/>
+                <a:tab pos="6979920" algn="l"/>
+                <a:tab pos="7561580" algn="l"/>
+                <a:tab pos="8143240" algn="l"/>
+                <a:tab pos="8724900" algn="l"/>
+                <a:tab pos="9306560" algn="l"/>
+              </a:tabLst>
+            </a:pPr>
+            <a:r>
+              <a:rPr lang="en-US" sz="1800" dirty="0">
+                <a:solidFill>
+                  <a:srgbClr val="00B050"/>
+                </a:solidFill>
+                <a:effectLst/>
+                <a:latin typeface="Courier New" panose="02070309020205020404" pitchFamily="49" charset="0"/>
+                <a:ea typeface="Times New Roman" panose="02020603050405020304" pitchFamily="18" charset="0"/>
+                <a:cs typeface="Arial" panose="020B0604020202020204" pitchFamily="34" charset="0"/>
+              </a:rPr>
+              <a:t>  "</a:t>
+            </a:r>
+            <a:r>
+              <a:rPr lang="en-US" sz="1800" dirty="0" err="1">
+                <a:solidFill>
+                  <a:srgbClr val="00B050"/>
+                </a:solidFill>
+                <a:effectLst/>
+                <a:latin typeface="Courier New" panose="02070309020205020404" pitchFamily="49" charset="0"/>
+                <a:ea typeface="Times New Roman" panose="02020603050405020304" pitchFamily="18" charset="0"/>
+                <a:cs typeface="Arial" panose="020B0604020202020204" pitchFamily="34" charset="0"/>
+              </a:rPr>
+              <a:t>shipping_address</a:t>
+            </a:r>
+            <a:r>
+              <a:rPr lang="en-US" sz="1800" dirty="0">
+                <a:solidFill>
+                  <a:srgbClr val="00B050"/>
+                </a:solidFill>
+                <a:effectLst/>
+                <a:latin typeface="Courier New" panose="02070309020205020404" pitchFamily="49" charset="0"/>
+                <a:ea typeface="Times New Roman" panose="02020603050405020304" pitchFamily="18" charset="0"/>
+                <a:cs typeface="Arial" panose="020B0604020202020204" pitchFamily="34" charset="0"/>
+              </a:rPr>
+              <a:t>": "123 Main St, Anytown, USA"</a:t>
+            </a:r>
+            <a:endParaRPr lang="en-US" sz="1800" dirty="0">
+              <a:solidFill>
+                <a:srgbClr val="00B050"/>
+              </a:solidFill>
+              <a:effectLst/>
+              <a:latin typeface="Calibri" panose="020F0502020204030204" pitchFamily="34" charset="0"/>
+              <a:ea typeface="Calibri" panose="020F0502020204030204" pitchFamily="34" charset="0"/>
+              <a:cs typeface="Arial" panose="020B0604020202020204" pitchFamily="34" charset="0"/>
+            </a:endParaRPr>
+          </a:p>
+          <a:p>
+            <a:pPr marL="0" marR="0" indent="0">
+              <a:lnSpc>
+                <a:spcPct val="107000"/>
+              </a:lnSpc>
+              <a:spcBef>
+                <a:spcPts val="0"/>
+              </a:spcBef>
+              <a:spcAft>
+                <a:spcPts val="0"/>
+              </a:spcAft>
+              <a:buNone/>
+              <a:tabLst>
+                <a:tab pos="581660" algn="l"/>
+                <a:tab pos="1163320" algn="l"/>
+                <a:tab pos="1744980" algn="l"/>
+                <a:tab pos="2326640" algn="l"/>
+                <a:tab pos="2908300" algn="l"/>
+                <a:tab pos="3489960" algn="l"/>
+                <a:tab pos="4071620" algn="l"/>
+                <a:tab pos="4653280" algn="l"/>
+                <a:tab pos="5234940" algn="l"/>
+                <a:tab pos="5816600" algn="l"/>
+                <a:tab pos="6398260" algn="l"/>
+                <a:tab pos="6979920" algn="l"/>
+                <a:tab pos="7561580" algn="l"/>
+                <a:tab pos="8143240" algn="l"/>
+                <a:tab pos="8724900" algn="l"/>
+                <a:tab pos="9306560" algn="l"/>
+              </a:tabLst>
+            </a:pPr>
+            <a:r>
+              <a:rPr lang="en-US" sz="1800" dirty="0">
+                <a:solidFill>
+                  <a:srgbClr val="00B050"/>
+                </a:solidFill>
+                <a:effectLst/>
+                <a:latin typeface="Courier New" panose="02070309020205020404" pitchFamily="49" charset="0"/>
+                <a:ea typeface="Times New Roman" panose="02020603050405020304" pitchFamily="18" charset="0"/>
+                <a:cs typeface="Arial" panose="020B0604020202020204" pitchFamily="34" charset="0"/>
+              </a:rPr>
+              <a:t>}</a:t>
+            </a:r>
+            <a:endParaRPr lang="en-US" sz="1800" dirty="0">
+              <a:solidFill>
+                <a:srgbClr val="00B050"/>
+              </a:solidFill>
+              <a:effectLst/>
+              <a:latin typeface="Calibri" panose="020F0502020204030204" pitchFamily="34" charset="0"/>
+              <a:ea typeface="Calibri" panose="020F0502020204030204" pitchFamily="34" charset="0"/>
+              <a:cs typeface="Arial" panose="020B0604020202020204" pitchFamily="34" charset="0"/>
+            </a:endParaRPr>
+          </a:p>
+          <a:p>
+            <a:pPr marL="0" indent="0">
+              <a:buNone/>
+            </a:pPr>
+            <a:endParaRPr lang="en-US" dirty="0">
+              <a:solidFill>
+                <a:srgbClr val="00B050"/>
+              </a:solidFill>
+            </a:endParaRPr>
+          </a:p>
+        </p:txBody>
+      </p:sp>
+    </p:spTree>
+    <p:extLst>
+      <p:ext uri="{BB962C8B-B14F-4D97-AF65-F5344CB8AC3E}">
+        <p14:creationId xmlns:p14="http://schemas.microsoft.com/office/powerpoint/2010/main" val="2164727706"/>
+      </p:ext>
+    </p:extLst>
+  </p:cSld>
+  <p:clrMapOvr>
+    <a:masterClrMapping/>
+  </p:clrMapOvr>
+</p:sld>
+</file>
+
+<file path=ppt/slides/slide25.xml><?xml version="1.0" encoding="utf-8"?>
+<p:sld xmlns:a="http://schemas.openxmlformats.org/drawingml/2006/main" xmlns:r="http://schemas.openxmlformats.org/officeDocument/2006/relationships" xmlns:p="http://schemas.openxmlformats.org/presentationml/2006/main">
+  <p:cSld>
+    <p:spTree>
+      <p:nvGrpSpPr>
+        <p:cNvPr id="1" name=""/>
+        <p:cNvGrpSpPr/>
+        <p:nvPr/>
+      </p:nvGrpSpPr>
+      <p:grpSpPr>
+        <a:xfrm>
+          <a:off x="0" y="0"/>
+          <a:ext cx="0" cy="0"/>
+          <a:chOff x="0" y="0"/>
+          <a:chExt cx="0" cy="0"/>
+        </a:xfrm>
+      </p:grpSpPr>
+      <p:sp>
+        <p:nvSpPr>
+          <p:cNvPr id="2" name="Title 1">
+            <a:extLst>
+              <a:ext uri="{FF2B5EF4-FFF2-40B4-BE49-F238E27FC236}">
+                <a16:creationId xmlns:a16="http://schemas.microsoft.com/office/drawing/2014/main" id="{94C8800D-C43B-4FD7-A318-67AEB8003E93}"/>
+              </a:ext>
+            </a:extLst>
+          </p:cNvPr>
+          <p:cNvSpPr>
+            <a:spLocks noGrp="1"/>
+          </p:cNvSpPr>
+          <p:nvPr>
+            <p:ph type="title"/>
+          </p:nvPr>
+        </p:nvSpPr>
+        <p:spPr/>
+        <p:txBody>
+          <a:bodyPr>
+            <a:normAutofit/>
+          </a:bodyPr>
+          <a:lstStyle/>
+          <a:p>
+            <a:r>
+              <a:rPr lang="en-US" sz="2800" dirty="0">
+                <a:effectLst/>
+                <a:latin typeface="Times New Roman" panose="02020603050405020304" pitchFamily="18" charset="0"/>
+                <a:ea typeface="Times New Roman" panose="02020603050405020304" pitchFamily="18" charset="0"/>
+                <a:cs typeface="Arial" panose="020B0604020202020204" pitchFamily="34" charset="0"/>
+              </a:rPr>
+              <a:t>Kafka Topics</a:t>
+            </a:r>
+            <a:endParaRPr lang="en-US" dirty="0"/>
+          </a:p>
+        </p:txBody>
+      </p:sp>
+      <p:sp>
+        <p:nvSpPr>
+          <p:cNvPr id="3" name="Content Placeholder 2">
+            <a:extLst>
+              <a:ext uri="{FF2B5EF4-FFF2-40B4-BE49-F238E27FC236}">
+                <a16:creationId xmlns:a16="http://schemas.microsoft.com/office/drawing/2014/main" id="{0874E313-B8F4-4CC1-A604-3C82F5A688A3}"/>
+              </a:ext>
+            </a:extLst>
+          </p:cNvPr>
+          <p:cNvSpPr>
+            <a:spLocks noGrp="1"/>
+          </p:cNvSpPr>
+          <p:nvPr>
+            <p:ph idx="1"/>
+          </p:nvPr>
+        </p:nvSpPr>
+        <p:spPr/>
+        <p:txBody>
+          <a:bodyPr/>
+          <a:lstStyle/>
+          <a:p>
+            <a:pPr marL="342900" marR="0" lvl="0" indent="-342900">
+              <a:lnSpc>
+                <a:spcPct val="107000"/>
+              </a:lnSpc>
+              <a:spcBef>
+                <a:spcPts val="0"/>
+              </a:spcBef>
+              <a:spcAft>
+                <a:spcPts val="800"/>
+              </a:spcAft>
+              <a:buSzPts val="1000"/>
+              <a:buFont typeface="Symbol" panose="05050102010706020507" pitchFamily="18" charset="2"/>
+              <a:buChar char=""/>
+              <a:tabLst>
+                <a:tab pos="457200" algn="l"/>
+              </a:tabLst>
+            </a:pPr>
+            <a:r>
+              <a:rPr lang="en-US" sz="1800" b="1" dirty="0">
+                <a:effectLst/>
+                <a:latin typeface="Times New Roman" panose="02020603050405020304" pitchFamily="18" charset="0"/>
+                <a:ea typeface="Times New Roman" panose="02020603050405020304" pitchFamily="18" charset="0"/>
+                <a:cs typeface="Arial" panose="020B0604020202020204" pitchFamily="34" charset="0"/>
+              </a:rPr>
+              <a:t>orders</a:t>
+            </a:r>
+            <a:r>
+              <a:rPr lang="en-US" sz="1800" dirty="0">
+                <a:effectLst/>
+                <a:latin typeface="Times New Roman" panose="02020603050405020304" pitchFamily="18" charset="0"/>
+                <a:ea typeface="Times New Roman" panose="02020603050405020304" pitchFamily="18" charset="0"/>
+                <a:cs typeface="Arial" panose="020B0604020202020204" pitchFamily="34" charset="0"/>
+              </a:rPr>
+              <a:t>: Stores messages related to customer orders.</a:t>
+            </a:r>
+            <a:endParaRPr lang="en-US" sz="1800" dirty="0">
+              <a:effectLst/>
+              <a:latin typeface="Calibri" panose="020F0502020204030204" pitchFamily="34" charset="0"/>
+              <a:ea typeface="Calibri" panose="020F0502020204030204" pitchFamily="34" charset="0"/>
+              <a:cs typeface="Arial" panose="020B0604020202020204" pitchFamily="34" charset="0"/>
+            </a:endParaRPr>
+          </a:p>
+          <a:p>
+            <a:pPr marL="342900" marR="0" lvl="0" indent="-342900">
+              <a:lnSpc>
+                <a:spcPct val="107000"/>
+              </a:lnSpc>
+              <a:spcBef>
+                <a:spcPts val="0"/>
+              </a:spcBef>
+              <a:spcAft>
+                <a:spcPts val="800"/>
+              </a:spcAft>
+              <a:buSzPts val="1000"/>
+              <a:buFont typeface="Symbol" panose="05050102010706020507" pitchFamily="18" charset="2"/>
+              <a:buChar char=""/>
+              <a:tabLst>
+                <a:tab pos="457200" algn="l"/>
+              </a:tabLst>
+            </a:pPr>
+            <a:r>
+              <a:rPr lang="en-US" sz="1800" b="1" dirty="0">
+                <a:effectLst/>
+                <a:latin typeface="Times New Roman" panose="02020603050405020304" pitchFamily="18" charset="0"/>
+                <a:ea typeface="Times New Roman" panose="02020603050405020304" pitchFamily="18" charset="0"/>
+                <a:cs typeface="Arial" panose="020B0604020202020204" pitchFamily="34" charset="0"/>
+              </a:rPr>
+              <a:t>inventory</a:t>
+            </a:r>
+            <a:r>
+              <a:rPr lang="en-US" sz="1800" dirty="0">
+                <a:effectLst/>
+                <a:latin typeface="Times New Roman" panose="02020603050405020304" pitchFamily="18" charset="0"/>
+                <a:ea typeface="Times New Roman" panose="02020603050405020304" pitchFamily="18" charset="0"/>
+                <a:cs typeface="Arial" panose="020B0604020202020204" pitchFamily="34" charset="0"/>
+              </a:rPr>
+              <a:t>: Updates on product stock levels from the warehouse.</a:t>
+            </a:r>
+            <a:endParaRPr lang="en-US" sz="1800" dirty="0">
+              <a:effectLst/>
+              <a:latin typeface="Calibri" panose="020F0502020204030204" pitchFamily="34" charset="0"/>
+              <a:ea typeface="Calibri" panose="020F0502020204030204" pitchFamily="34" charset="0"/>
+              <a:cs typeface="Arial" panose="020B0604020202020204" pitchFamily="34" charset="0"/>
+            </a:endParaRPr>
+          </a:p>
+          <a:p>
+            <a:pPr marL="342900" marR="0" lvl="0" indent="-342900">
+              <a:lnSpc>
+                <a:spcPct val="107000"/>
+              </a:lnSpc>
+              <a:spcBef>
+                <a:spcPts val="0"/>
+              </a:spcBef>
+              <a:spcAft>
+                <a:spcPts val="800"/>
+              </a:spcAft>
+              <a:buSzPts val="1000"/>
+              <a:buFont typeface="Symbol" panose="05050102010706020507" pitchFamily="18" charset="2"/>
+              <a:buChar char=""/>
+              <a:tabLst>
+                <a:tab pos="457200" algn="l"/>
+              </a:tabLst>
+            </a:pPr>
+            <a:r>
+              <a:rPr lang="en-US" sz="1800" b="1" dirty="0">
+                <a:effectLst/>
+                <a:latin typeface="Times New Roman" panose="02020603050405020304" pitchFamily="18" charset="0"/>
+                <a:ea typeface="Times New Roman" panose="02020603050405020304" pitchFamily="18" charset="0"/>
+                <a:cs typeface="Arial" panose="020B0604020202020204" pitchFamily="34" charset="0"/>
+              </a:rPr>
+              <a:t>payments</a:t>
+            </a:r>
+            <a:r>
+              <a:rPr lang="en-US" sz="1800" dirty="0">
+                <a:effectLst/>
+                <a:latin typeface="Times New Roman" panose="02020603050405020304" pitchFamily="18" charset="0"/>
+                <a:ea typeface="Times New Roman" panose="02020603050405020304" pitchFamily="18" charset="0"/>
+                <a:cs typeface="Arial" panose="020B0604020202020204" pitchFamily="34" charset="0"/>
+              </a:rPr>
+              <a:t>: Transaction status updates from the payment gateway.</a:t>
+            </a:r>
+            <a:endParaRPr lang="en-US" sz="1800" dirty="0">
+              <a:effectLst/>
+              <a:latin typeface="Calibri" panose="020F0502020204030204" pitchFamily="34" charset="0"/>
+              <a:ea typeface="Calibri" panose="020F0502020204030204" pitchFamily="34" charset="0"/>
+              <a:cs typeface="Arial" panose="020B0604020202020204" pitchFamily="34" charset="0"/>
+            </a:endParaRPr>
+          </a:p>
+          <a:p>
+            <a:pPr marL="342900" marR="0" lvl="0" indent="-342900">
+              <a:lnSpc>
+                <a:spcPct val="107000"/>
+              </a:lnSpc>
+              <a:spcBef>
+                <a:spcPts val="0"/>
+              </a:spcBef>
+              <a:spcAft>
+                <a:spcPts val="800"/>
+              </a:spcAft>
+              <a:buSzPts val="1000"/>
+              <a:buFont typeface="Symbol" panose="05050102010706020507" pitchFamily="18" charset="2"/>
+              <a:buChar char=""/>
+              <a:tabLst>
+                <a:tab pos="457200" algn="l"/>
+              </a:tabLst>
+            </a:pPr>
+            <a:r>
+              <a:rPr lang="en-US" sz="1800" b="1" dirty="0">
+                <a:effectLst/>
+                <a:latin typeface="Times New Roman" panose="02020603050405020304" pitchFamily="18" charset="0"/>
+                <a:ea typeface="Times New Roman" panose="02020603050405020304" pitchFamily="18" charset="0"/>
+                <a:cs typeface="Arial" panose="020B0604020202020204" pitchFamily="34" charset="0"/>
+              </a:rPr>
+              <a:t>shipping</a:t>
+            </a:r>
+            <a:r>
+              <a:rPr lang="en-US" sz="1800" dirty="0">
+                <a:effectLst/>
+                <a:latin typeface="Times New Roman" panose="02020603050405020304" pitchFamily="18" charset="0"/>
+                <a:ea typeface="Times New Roman" panose="02020603050405020304" pitchFamily="18" charset="0"/>
+                <a:cs typeface="Arial" panose="020B0604020202020204" pitchFamily="34" charset="0"/>
+              </a:rPr>
+              <a:t>: Information about the status and tracking of the shipments.</a:t>
+            </a:r>
+            <a:endParaRPr lang="en-US" sz="1800" dirty="0">
+              <a:effectLst/>
+              <a:latin typeface="Calibri" panose="020F0502020204030204" pitchFamily="34" charset="0"/>
+              <a:ea typeface="Calibri" panose="020F0502020204030204" pitchFamily="34" charset="0"/>
+              <a:cs typeface="Arial" panose="020B0604020202020204" pitchFamily="34" charset="0"/>
+            </a:endParaRPr>
+          </a:p>
+          <a:p>
+            <a:endParaRPr lang="en-US" dirty="0"/>
+          </a:p>
+        </p:txBody>
+      </p:sp>
+    </p:spTree>
+    <p:extLst>
+      <p:ext uri="{BB962C8B-B14F-4D97-AF65-F5344CB8AC3E}">
+        <p14:creationId xmlns:p14="http://schemas.microsoft.com/office/powerpoint/2010/main" val="59626595"/>
+      </p:ext>
+    </p:extLst>
+  </p:cSld>
+  <p:clrMapOvr>
+    <a:masterClrMapping/>
+  </p:clrMapOvr>
+</p:sld>
+</file>
+
+<file path=ppt/slides/slide26.xml><?xml version="1.0" encoding="utf-8"?>
+<p:sld xmlns:a="http://schemas.openxmlformats.org/drawingml/2006/main" xmlns:r="http://schemas.openxmlformats.org/officeDocument/2006/relationships" xmlns:p="http://schemas.openxmlformats.org/presentationml/2006/main">
+  <p:cSld>
+    <p:spTree>
+      <p:nvGrpSpPr>
+        <p:cNvPr id="1" name=""/>
+        <p:cNvGrpSpPr/>
+        <p:nvPr/>
+      </p:nvGrpSpPr>
+      <p:grpSpPr>
+        <a:xfrm>
+          <a:off x="0" y="0"/>
+          <a:ext cx="0" cy="0"/>
+          <a:chOff x="0" y="0"/>
+          <a:chExt cx="0" cy="0"/>
+        </a:xfrm>
+      </p:grpSpPr>
+      <p:sp>
+        <p:nvSpPr>
+          <p:cNvPr id="2" name="Title 1">
+            <a:extLst>
+              <a:ext uri="{FF2B5EF4-FFF2-40B4-BE49-F238E27FC236}">
+                <a16:creationId xmlns:a16="http://schemas.microsoft.com/office/drawing/2014/main" id="{94C8800D-C43B-4FD7-A318-67AEB8003E93}"/>
+              </a:ext>
+            </a:extLst>
+          </p:cNvPr>
+          <p:cNvSpPr>
+            <a:spLocks noGrp="1"/>
+          </p:cNvSpPr>
+          <p:nvPr>
+            <p:ph type="title"/>
+          </p:nvPr>
+        </p:nvSpPr>
+        <p:spPr/>
+        <p:txBody>
+          <a:bodyPr>
+            <a:normAutofit/>
+          </a:bodyPr>
+          <a:lstStyle/>
+          <a:p>
+            <a:r>
+              <a:rPr lang="en-US" sz="2800" dirty="0">
+                <a:effectLst/>
+                <a:latin typeface="Times New Roman" panose="02020603050405020304" pitchFamily="18" charset="0"/>
+                <a:ea typeface="Times New Roman" panose="02020603050405020304" pitchFamily="18" charset="0"/>
+                <a:cs typeface="Arial" panose="020B0604020202020204" pitchFamily="34" charset="0"/>
+              </a:rPr>
+              <a:t>Kafka Producers</a:t>
+            </a:r>
+            <a:endParaRPr lang="en-US" dirty="0"/>
+          </a:p>
+        </p:txBody>
+      </p:sp>
+      <p:sp>
+        <p:nvSpPr>
+          <p:cNvPr id="3" name="Content Placeholder 2">
+            <a:extLst>
+              <a:ext uri="{FF2B5EF4-FFF2-40B4-BE49-F238E27FC236}">
+                <a16:creationId xmlns:a16="http://schemas.microsoft.com/office/drawing/2014/main" id="{0874E313-B8F4-4CC1-A604-3C82F5A688A3}"/>
+              </a:ext>
+            </a:extLst>
+          </p:cNvPr>
+          <p:cNvSpPr>
+            <a:spLocks noGrp="1"/>
+          </p:cNvSpPr>
+          <p:nvPr>
+            <p:ph idx="1"/>
+          </p:nvPr>
+        </p:nvSpPr>
+        <p:spPr/>
+        <p:txBody>
+          <a:bodyPr/>
+          <a:lstStyle/>
+          <a:p>
+            <a:pPr marL="342900" marR="0" lvl="0" indent="-342900">
+              <a:lnSpc>
+                <a:spcPct val="107000"/>
+              </a:lnSpc>
+              <a:spcBef>
+                <a:spcPts val="0"/>
+              </a:spcBef>
+              <a:spcAft>
+                <a:spcPts val="800"/>
+              </a:spcAft>
+              <a:buSzPts val="1000"/>
+              <a:buFont typeface="Symbol" panose="05050102010706020507" pitchFamily="18" charset="2"/>
+              <a:buChar char=""/>
+              <a:tabLst>
+                <a:tab pos="457200" algn="l"/>
+              </a:tabLst>
+            </a:pPr>
+            <a:r>
+              <a:rPr lang="en-US" sz="1800" b="1" dirty="0">
+                <a:effectLst/>
+                <a:latin typeface="Times New Roman" panose="02020603050405020304" pitchFamily="18" charset="0"/>
+                <a:ea typeface="Times New Roman" panose="02020603050405020304" pitchFamily="18" charset="0"/>
+                <a:cs typeface="Arial" panose="020B0604020202020204" pitchFamily="34" charset="0"/>
+              </a:rPr>
+              <a:t>Online Storefront</a:t>
+            </a:r>
+            <a:r>
+              <a:rPr lang="en-US" sz="1800" dirty="0">
+                <a:effectLst/>
+                <a:latin typeface="Times New Roman" panose="02020603050405020304" pitchFamily="18" charset="0"/>
+                <a:ea typeface="Times New Roman" panose="02020603050405020304" pitchFamily="18" charset="0"/>
+                <a:cs typeface="Arial" panose="020B0604020202020204" pitchFamily="34" charset="0"/>
+              </a:rPr>
+              <a:t>: When a customer places an order, the website or mobile app sends the order details to the </a:t>
+            </a:r>
+            <a:r>
+              <a:rPr lang="en-US" sz="1800" dirty="0">
+                <a:effectLst/>
+                <a:latin typeface="Courier New" panose="02070309020205020404" pitchFamily="49" charset="0"/>
+                <a:ea typeface="Times New Roman" panose="02020603050405020304" pitchFamily="18" charset="0"/>
+                <a:cs typeface="Arial" panose="020B0604020202020204" pitchFamily="34" charset="0"/>
+              </a:rPr>
+              <a:t>orders</a:t>
+            </a:r>
+            <a:r>
+              <a:rPr lang="en-US" sz="1800" dirty="0">
+                <a:effectLst/>
+                <a:latin typeface="Times New Roman" panose="02020603050405020304" pitchFamily="18" charset="0"/>
+                <a:ea typeface="Times New Roman" panose="02020603050405020304" pitchFamily="18" charset="0"/>
+                <a:cs typeface="Arial" panose="020B0604020202020204" pitchFamily="34" charset="0"/>
+              </a:rPr>
+              <a:t> topic.</a:t>
+            </a:r>
+            <a:endParaRPr lang="en-US" sz="1800" dirty="0">
+              <a:effectLst/>
+              <a:latin typeface="Calibri" panose="020F0502020204030204" pitchFamily="34" charset="0"/>
+              <a:ea typeface="Calibri" panose="020F0502020204030204" pitchFamily="34" charset="0"/>
+              <a:cs typeface="Arial" panose="020B0604020202020204" pitchFamily="34" charset="0"/>
+            </a:endParaRPr>
+          </a:p>
+          <a:p>
+            <a:pPr marL="342900" marR="0" lvl="0" indent="-342900">
+              <a:lnSpc>
+                <a:spcPct val="107000"/>
+              </a:lnSpc>
+              <a:spcBef>
+                <a:spcPts val="0"/>
+              </a:spcBef>
+              <a:spcAft>
+                <a:spcPts val="800"/>
+              </a:spcAft>
+              <a:buSzPts val="1000"/>
+              <a:buFont typeface="Symbol" panose="05050102010706020507" pitchFamily="18" charset="2"/>
+              <a:buChar char=""/>
+              <a:tabLst>
+                <a:tab pos="457200" algn="l"/>
+              </a:tabLst>
+            </a:pPr>
+            <a:r>
+              <a:rPr lang="en-US" sz="1800" b="1" dirty="0">
+                <a:effectLst/>
+                <a:latin typeface="Times New Roman" panose="02020603050405020304" pitchFamily="18" charset="0"/>
+                <a:ea typeface="Times New Roman" panose="02020603050405020304" pitchFamily="18" charset="0"/>
+                <a:cs typeface="Arial" panose="020B0604020202020204" pitchFamily="34" charset="0"/>
+              </a:rPr>
+              <a:t>Warehouse System</a:t>
+            </a:r>
+            <a:r>
+              <a:rPr lang="en-US" sz="1800" dirty="0">
+                <a:effectLst/>
+                <a:latin typeface="Times New Roman" panose="02020603050405020304" pitchFamily="18" charset="0"/>
+                <a:ea typeface="Times New Roman" panose="02020603050405020304" pitchFamily="18" charset="0"/>
+                <a:cs typeface="Arial" panose="020B0604020202020204" pitchFamily="34" charset="0"/>
+              </a:rPr>
+              <a:t>: The warehouse system continuously updates stock levels and product availability, sending this information to the </a:t>
+            </a:r>
+            <a:r>
+              <a:rPr lang="en-US" sz="1800" dirty="0">
+                <a:effectLst/>
+                <a:latin typeface="Courier New" panose="02070309020205020404" pitchFamily="49" charset="0"/>
+                <a:ea typeface="Times New Roman" panose="02020603050405020304" pitchFamily="18" charset="0"/>
+                <a:cs typeface="Arial" panose="020B0604020202020204" pitchFamily="34" charset="0"/>
+              </a:rPr>
+              <a:t>inventory</a:t>
+            </a:r>
+            <a:r>
+              <a:rPr lang="en-US" sz="1800" dirty="0">
+                <a:effectLst/>
+                <a:latin typeface="Times New Roman" panose="02020603050405020304" pitchFamily="18" charset="0"/>
+                <a:ea typeface="Times New Roman" panose="02020603050405020304" pitchFamily="18" charset="0"/>
+                <a:cs typeface="Arial" panose="020B0604020202020204" pitchFamily="34" charset="0"/>
+              </a:rPr>
+              <a:t> topic.</a:t>
+            </a:r>
+            <a:endParaRPr lang="en-US" sz="1800" dirty="0">
+              <a:effectLst/>
+              <a:latin typeface="Calibri" panose="020F0502020204030204" pitchFamily="34" charset="0"/>
+              <a:ea typeface="Calibri" panose="020F0502020204030204" pitchFamily="34" charset="0"/>
+              <a:cs typeface="Arial" panose="020B0604020202020204" pitchFamily="34" charset="0"/>
+            </a:endParaRPr>
+          </a:p>
+          <a:p>
+            <a:pPr marL="342900" marR="0" lvl="0" indent="-342900">
+              <a:lnSpc>
+                <a:spcPct val="107000"/>
+              </a:lnSpc>
+              <a:spcBef>
+                <a:spcPts val="0"/>
+              </a:spcBef>
+              <a:spcAft>
+                <a:spcPts val="800"/>
+              </a:spcAft>
+              <a:buSzPts val="1000"/>
+              <a:buFont typeface="Symbol" panose="05050102010706020507" pitchFamily="18" charset="2"/>
+              <a:buChar char=""/>
+              <a:tabLst>
+                <a:tab pos="457200" algn="l"/>
+              </a:tabLst>
+            </a:pPr>
+            <a:r>
+              <a:rPr lang="en-US" sz="1800" b="1" dirty="0">
+                <a:effectLst/>
+                <a:latin typeface="Times New Roman" panose="02020603050405020304" pitchFamily="18" charset="0"/>
+                <a:ea typeface="Times New Roman" panose="02020603050405020304" pitchFamily="18" charset="0"/>
+                <a:cs typeface="Arial" panose="020B0604020202020204" pitchFamily="34" charset="0"/>
+              </a:rPr>
+              <a:t>Payment Gateway</a:t>
+            </a:r>
+            <a:r>
+              <a:rPr lang="en-US" sz="1800" dirty="0">
+                <a:effectLst/>
+                <a:latin typeface="Times New Roman" panose="02020603050405020304" pitchFamily="18" charset="0"/>
+                <a:ea typeface="Times New Roman" panose="02020603050405020304" pitchFamily="18" charset="0"/>
+                <a:cs typeface="Arial" panose="020B0604020202020204" pitchFamily="34" charset="0"/>
+              </a:rPr>
+              <a:t>: After a payment is processed, the payment gateway sends the payment status (approved or failed) to the </a:t>
+            </a:r>
+            <a:r>
+              <a:rPr lang="en-US" sz="1800" dirty="0">
+                <a:effectLst/>
+                <a:latin typeface="Courier New" panose="02070309020205020404" pitchFamily="49" charset="0"/>
+                <a:ea typeface="Times New Roman" panose="02020603050405020304" pitchFamily="18" charset="0"/>
+                <a:cs typeface="Arial" panose="020B0604020202020204" pitchFamily="34" charset="0"/>
+              </a:rPr>
+              <a:t>payments</a:t>
+            </a:r>
+            <a:r>
+              <a:rPr lang="en-US" sz="1800" dirty="0">
+                <a:effectLst/>
+                <a:latin typeface="Times New Roman" panose="02020603050405020304" pitchFamily="18" charset="0"/>
+                <a:ea typeface="Times New Roman" panose="02020603050405020304" pitchFamily="18" charset="0"/>
+                <a:cs typeface="Arial" panose="020B0604020202020204" pitchFamily="34" charset="0"/>
+              </a:rPr>
+              <a:t> topic.</a:t>
+            </a:r>
+            <a:endParaRPr lang="en-US" sz="1800" dirty="0">
+              <a:effectLst/>
+              <a:latin typeface="Calibri" panose="020F0502020204030204" pitchFamily="34" charset="0"/>
+              <a:ea typeface="Calibri" panose="020F0502020204030204" pitchFamily="34" charset="0"/>
+              <a:cs typeface="Arial" panose="020B0604020202020204" pitchFamily="34" charset="0"/>
+            </a:endParaRPr>
+          </a:p>
+          <a:p>
+            <a:pPr marL="342900" marR="0" lvl="0" indent="-342900">
+              <a:lnSpc>
+                <a:spcPct val="107000"/>
+              </a:lnSpc>
+              <a:spcBef>
+                <a:spcPts val="0"/>
+              </a:spcBef>
+              <a:spcAft>
+                <a:spcPts val="800"/>
+              </a:spcAft>
+              <a:buSzPts val="1000"/>
+              <a:buFont typeface="Symbol" panose="05050102010706020507" pitchFamily="18" charset="2"/>
+              <a:buChar char=""/>
+              <a:tabLst>
+                <a:tab pos="457200" algn="l"/>
+              </a:tabLst>
+            </a:pPr>
+            <a:r>
+              <a:rPr lang="en-US" sz="1800" b="1" dirty="0">
+                <a:effectLst/>
+                <a:latin typeface="Times New Roman" panose="02020603050405020304" pitchFamily="18" charset="0"/>
+                <a:ea typeface="Times New Roman" panose="02020603050405020304" pitchFamily="18" charset="0"/>
+                <a:cs typeface="Arial" panose="020B0604020202020204" pitchFamily="34" charset="0"/>
+              </a:rPr>
+              <a:t>Shipping Providers</a:t>
+            </a:r>
+            <a:r>
+              <a:rPr lang="en-US" sz="1800" dirty="0">
+                <a:effectLst/>
+                <a:latin typeface="Times New Roman" panose="02020603050405020304" pitchFamily="18" charset="0"/>
+                <a:ea typeface="Times New Roman" panose="02020603050405020304" pitchFamily="18" charset="0"/>
+                <a:cs typeface="Arial" panose="020B0604020202020204" pitchFamily="34" charset="0"/>
+              </a:rPr>
+              <a:t>: As items are shipped and moved, the shipping providers send updates (tracking info, shipment status) to the </a:t>
+            </a:r>
+            <a:r>
+              <a:rPr lang="en-US" sz="1800" dirty="0">
+                <a:effectLst/>
+                <a:latin typeface="Courier New" panose="02070309020205020404" pitchFamily="49" charset="0"/>
+                <a:ea typeface="Times New Roman" panose="02020603050405020304" pitchFamily="18" charset="0"/>
+                <a:cs typeface="Arial" panose="020B0604020202020204" pitchFamily="34" charset="0"/>
+              </a:rPr>
+              <a:t>shipping</a:t>
+            </a:r>
+            <a:r>
+              <a:rPr lang="en-US" sz="1800" dirty="0">
+                <a:effectLst/>
+                <a:latin typeface="Times New Roman" panose="02020603050405020304" pitchFamily="18" charset="0"/>
+                <a:ea typeface="Times New Roman" panose="02020603050405020304" pitchFamily="18" charset="0"/>
+                <a:cs typeface="Arial" panose="020B0604020202020204" pitchFamily="34" charset="0"/>
+              </a:rPr>
+              <a:t> topic.</a:t>
+            </a:r>
+            <a:endParaRPr lang="en-US" sz="1800" dirty="0">
+              <a:effectLst/>
+              <a:latin typeface="Calibri" panose="020F0502020204030204" pitchFamily="34" charset="0"/>
+              <a:ea typeface="Calibri" panose="020F0502020204030204" pitchFamily="34" charset="0"/>
+              <a:cs typeface="Arial" panose="020B0604020202020204" pitchFamily="34" charset="0"/>
+            </a:endParaRPr>
+          </a:p>
+          <a:p>
+            <a:endParaRPr lang="en-US" dirty="0"/>
+          </a:p>
+        </p:txBody>
+      </p:sp>
+    </p:spTree>
+    <p:extLst>
+      <p:ext uri="{BB962C8B-B14F-4D97-AF65-F5344CB8AC3E}">
+        <p14:creationId xmlns:p14="http://schemas.microsoft.com/office/powerpoint/2010/main" val="4067745355"/>
+      </p:ext>
+    </p:extLst>
+  </p:cSld>
+  <p:clrMapOvr>
+    <a:masterClrMapping/>
+  </p:clrMapOvr>
+</p:sld>
+</file>
+
+<file path=ppt/slides/slide27.xml><?xml version="1.0" encoding="utf-8"?>
+<p:sld xmlns:a="http://schemas.openxmlformats.org/drawingml/2006/main" xmlns:r="http://schemas.openxmlformats.org/officeDocument/2006/relationships" xmlns:p="http://schemas.openxmlformats.org/presentationml/2006/main">
+  <p:cSld>
+    <p:spTree>
+      <p:nvGrpSpPr>
+        <p:cNvPr id="1" name=""/>
+        <p:cNvGrpSpPr/>
+        <p:nvPr/>
+      </p:nvGrpSpPr>
+      <p:grpSpPr>
+        <a:xfrm>
+          <a:off x="0" y="0"/>
+          <a:ext cx="0" cy="0"/>
+          <a:chOff x="0" y="0"/>
+          <a:chExt cx="0" cy="0"/>
+        </a:xfrm>
+      </p:grpSpPr>
+      <p:sp>
+        <p:nvSpPr>
+          <p:cNvPr id="2" name="Title 1">
+            <a:extLst>
+              <a:ext uri="{FF2B5EF4-FFF2-40B4-BE49-F238E27FC236}">
+                <a16:creationId xmlns:a16="http://schemas.microsoft.com/office/drawing/2014/main" id="{94C8800D-C43B-4FD7-A318-67AEB8003E93}"/>
+              </a:ext>
+            </a:extLst>
+          </p:cNvPr>
+          <p:cNvSpPr>
+            <a:spLocks noGrp="1"/>
+          </p:cNvSpPr>
+          <p:nvPr>
+            <p:ph type="title"/>
+          </p:nvPr>
+        </p:nvSpPr>
+        <p:spPr/>
+        <p:txBody>
+          <a:bodyPr>
+            <a:normAutofit/>
+          </a:bodyPr>
+          <a:lstStyle/>
+          <a:p>
+            <a:r>
+              <a:rPr lang="en-US" sz="2800" dirty="0">
+                <a:effectLst/>
+                <a:latin typeface="Times New Roman" panose="02020603050405020304" pitchFamily="18" charset="0"/>
+                <a:ea typeface="Times New Roman" panose="02020603050405020304" pitchFamily="18" charset="0"/>
+                <a:cs typeface="Arial" panose="020B0604020202020204" pitchFamily="34" charset="0"/>
+              </a:rPr>
+              <a:t>Kafka Streams / Consumers</a:t>
+            </a:r>
+            <a:endParaRPr lang="en-US" dirty="0"/>
+          </a:p>
+        </p:txBody>
+      </p:sp>
+      <p:sp>
+        <p:nvSpPr>
+          <p:cNvPr id="3" name="Content Placeholder 2">
+            <a:extLst>
+              <a:ext uri="{FF2B5EF4-FFF2-40B4-BE49-F238E27FC236}">
+                <a16:creationId xmlns:a16="http://schemas.microsoft.com/office/drawing/2014/main" id="{0874E313-B8F4-4CC1-A604-3C82F5A688A3}"/>
+              </a:ext>
+            </a:extLst>
+          </p:cNvPr>
+          <p:cNvSpPr>
+            <a:spLocks noGrp="1"/>
+          </p:cNvSpPr>
+          <p:nvPr>
+            <p:ph idx="1"/>
+          </p:nvPr>
+        </p:nvSpPr>
+        <p:spPr/>
+        <p:txBody>
+          <a:bodyPr/>
+          <a:lstStyle/>
+          <a:p>
+            <a:pPr marL="0" marR="0" indent="0">
+              <a:lnSpc>
+                <a:spcPct val="107000"/>
+              </a:lnSpc>
+              <a:spcBef>
+                <a:spcPts val="0"/>
+              </a:spcBef>
+              <a:spcAft>
+                <a:spcPts val="800"/>
+              </a:spcAft>
+              <a:buNone/>
+            </a:pPr>
+            <a:r>
+              <a:rPr lang="en-US" sz="1800" b="1" dirty="0">
+                <a:effectLst/>
+                <a:latin typeface="Times New Roman" panose="02020603050405020304" pitchFamily="18" charset="0"/>
+                <a:ea typeface="Times New Roman" panose="02020603050405020304" pitchFamily="18" charset="0"/>
+                <a:cs typeface="Arial" panose="020B0604020202020204" pitchFamily="34" charset="0"/>
+              </a:rPr>
+              <a:t>Consumer 1: Order Processing Service</a:t>
+            </a:r>
+            <a:endParaRPr lang="en-US" sz="1800" dirty="0">
+              <a:effectLst/>
+              <a:latin typeface="Calibri" panose="020F0502020204030204" pitchFamily="34" charset="0"/>
+              <a:ea typeface="Calibri" panose="020F0502020204030204" pitchFamily="34" charset="0"/>
+              <a:cs typeface="Arial" panose="020B0604020202020204" pitchFamily="34" charset="0"/>
+            </a:endParaRPr>
+          </a:p>
+          <a:p>
+            <a:pPr marL="342900" marR="0" lvl="0" indent="-342900">
+              <a:lnSpc>
+                <a:spcPct val="107000"/>
+              </a:lnSpc>
+              <a:spcBef>
+                <a:spcPts val="0"/>
+              </a:spcBef>
+              <a:spcAft>
+                <a:spcPts val="800"/>
+              </a:spcAft>
+              <a:buSzPts val="1000"/>
+              <a:buFont typeface="Symbol" panose="05050102010706020507" pitchFamily="18" charset="2"/>
+              <a:buChar char=""/>
+              <a:tabLst>
+                <a:tab pos="457200" algn="l"/>
+              </a:tabLst>
+            </a:pPr>
+            <a:r>
+              <a:rPr lang="en-US" sz="1800" b="1" dirty="0">
+                <a:effectLst/>
+                <a:latin typeface="Times New Roman" panose="02020603050405020304" pitchFamily="18" charset="0"/>
+                <a:ea typeface="Times New Roman" panose="02020603050405020304" pitchFamily="18" charset="0"/>
+                <a:cs typeface="Arial" panose="020B0604020202020204" pitchFamily="34" charset="0"/>
+              </a:rPr>
+              <a:t>Consumes</a:t>
+            </a:r>
+            <a:r>
+              <a:rPr lang="en-US" sz="1800" dirty="0">
+                <a:effectLst/>
+                <a:latin typeface="Times New Roman" panose="02020603050405020304" pitchFamily="18" charset="0"/>
+                <a:ea typeface="Times New Roman" panose="02020603050405020304" pitchFamily="18" charset="0"/>
+                <a:cs typeface="Arial" panose="020B0604020202020204" pitchFamily="34" charset="0"/>
+              </a:rPr>
+              <a:t>: Orders from the </a:t>
+            </a:r>
+            <a:r>
+              <a:rPr lang="en-US" sz="1800" dirty="0">
+                <a:effectLst/>
+                <a:latin typeface="Courier New" panose="02070309020205020404" pitchFamily="49" charset="0"/>
+                <a:ea typeface="Times New Roman" panose="02020603050405020304" pitchFamily="18" charset="0"/>
+                <a:cs typeface="Arial" panose="020B0604020202020204" pitchFamily="34" charset="0"/>
+              </a:rPr>
+              <a:t>orders</a:t>
+            </a:r>
+            <a:r>
+              <a:rPr lang="en-US" sz="1800" dirty="0">
+                <a:effectLst/>
+                <a:latin typeface="Times New Roman" panose="02020603050405020304" pitchFamily="18" charset="0"/>
+                <a:ea typeface="Times New Roman" panose="02020603050405020304" pitchFamily="18" charset="0"/>
+                <a:cs typeface="Arial" panose="020B0604020202020204" pitchFamily="34" charset="0"/>
+              </a:rPr>
+              <a:t> topic.</a:t>
+            </a:r>
+            <a:endParaRPr lang="en-US" sz="1800" dirty="0">
+              <a:effectLst/>
+              <a:latin typeface="Calibri" panose="020F0502020204030204" pitchFamily="34" charset="0"/>
+              <a:ea typeface="Calibri" panose="020F0502020204030204" pitchFamily="34" charset="0"/>
+              <a:cs typeface="Arial" panose="020B0604020202020204" pitchFamily="34" charset="0"/>
+            </a:endParaRPr>
+          </a:p>
+          <a:p>
+            <a:pPr marL="342900" marR="0" lvl="0" indent="-342900">
+              <a:lnSpc>
+                <a:spcPct val="107000"/>
+              </a:lnSpc>
+              <a:spcBef>
+                <a:spcPts val="0"/>
+              </a:spcBef>
+              <a:spcAft>
+                <a:spcPts val="800"/>
+              </a:spcAft>
+              <a:buSzPts val="1000"/>
+              <a:buFont typeface="Symbol" panose="05050102010706020507" pitchFamily="18" charset="2"/>
+              <a:buChar char=""/>
+              <a:tabLst>
+                <a:tab pos="457200" algn="l"/>
+              </a:tabLst>
+            </a:pPr>
+            <a:r>
+              <a:rPr lang="en-US" sz="1800" b="1" dirty="0">
+                <a:effectLst/>
+                <a:latin typeface="Times New Roman" panose="02020603050405020304" pitchFamily="18" charset="0"/>
+                <a:ea typeface="Times New Roman" panose="02020603050405020304" pitchFamily="18" charset="0"/>
+                <a:cs typeface="Arial" panose="020B0604020202020204" pitchFamily="34" charset="0"/>
+              </a:rPr>
+              <a:t>Processes</a:t>
+            </a:r>
+            <a:r>
+              <a:rPr lang="en-US" sz="1800" dirty="0">
+                <a:effectLst/>
+                <a:latin typeface="Times New Roman" panose="02020603050405020304" pitchFamily="18" charset="0"/>
+                <a:ea typeface="Times New Roman" panose="02020603050405020304" pitchFamily="18" charset="0"/>
+                <a:cs typeface="Arial" panose="020B0604020202020204" pitchFamily="34" charset="0"/>
+              </a:rPr>
+              <a:t>: Validates the order (checks if the payment is confirmed, verifies product availability).</a:t>
+            </a:r>
+            <a:endParaRPr lang="en-US" sz="1800" dirty="0">
+              <a:effectLst/>
+              <a:latin typeface="Calibri" panose="020F0502020204030204" pitchFamily="34" charset="0"/>
+              <a:ea typeface="Calibri" panose="020F0502020204030204" pitchFamily="34" charset="0"/>
+              <a:cs typeface="Arial" panose="020B0604020202020204" pitchFamily="34" charset="0"/>
+            </a:endParaRPr>
+          </a:p>
+          <a:p>
+            <a:pPr marL="342900" marR="0" lvl="0" indent="-342900">
+              <a:lnSpc>
+                <a:spcPct val="107000"/>
+              </a:lnSpc>
+              <a:spcBef>
+                <a:spcPts val="0"/>
+              </a:spcBef>
+              <a:spcAft>
+                <a:spcPts val="800"/>
+              </a:spcAft>
+              <a:buSzPts val="1000"/>
+              <a:buFont typeface="Symbol" panose="05050102010706020507" pitchFamily="18" charset="2"/>
+              <a:buChar char=""/>
+              <a:tabLst>
+                <a:tab pos="457200" algn="l"/>
+              </a:tabLst>
+            </a:pPr>
+            <a:r>
+              <a:rPr lang="en-US" sz="1800" b="1" dirty="0">
+                <a:effectLst/>
+                <a:latin typeface="Times New Roman" panose="02020603050405020304" pitchFamily="18" charset="0"/>
+                <a:ea typeface="Times New Roman" panose="02020603050405020304" pitchFamily="18" charset="0"/>
+                <a:cs typeface="Arial" panose="020B0604020202020204" pitchFamily="34" charset="0"/>
+              </a:rPr>
+              <a:t>Output</a:t>
+            </a:r>
+            <a:r>
+              <a:rPr lang="en-US" sz="1800" dirty="0">
+                <a:effectLst/>
+                <a:latin typeface="Times New Roman" panose="02020603050405020304" pitchFamily="18" charset="0"/>
+                <a:ea typeface="Times New Roman" panose="02020603050405020304" pitchFamily="18" charset="0"/>
+                <a:cs typeface="Arial" panose="020B0604020202020204" pitchFamily="34" charset="0"/>
+              </a:rPr>
+              <a:t>: Updates the order status (pending, confirmed, canceled) and sends the result to the next step (inventory or shipping system).</a:t>
+            </a:r>
+            <a:endParaRPr lang="en-US" sz="1800" dirty="0">
+              <a:effectLst/>
+              <a:latin typeface="Calibri" panose="020F0502020204030204" pitchFamily="34" charset="0"/>
+              <a:ea typeface="Calibri" panose="020F0502020204030204" pitchFamily="34" charset="0"/>
+              <a:cs typeface="Arial" panose="020B0604020202020204" pitchFamily="34" charset="0"/>
+            </a:endParaRPr>
+          </a:p>
+          <a:p>
+            <a:pPr marL="0" marR="0" indent="0">
+              <a:lnSpc>
+                <a:spcPct val="107000"/>
+              </a:lnSpc>
+              <a:spcBef>
+                <a:spcPts val="0"/>
+              </a:spcBef>
+              <a:spcAft>
+                <a:spcPts val="800"/>
+              </a:spcAft>
+              <a:buNone/>
+            </a:pPr>
+            <a:r>
+              <a:rPr lang="en-US" sz="1800" b="1" dirty="0">
+                <a:effectLst/>
+                <a:latin typeface="Times New Roman" panose="02020603050405020304" pitchFamily="18" charset="0"/>
+                <a:ea typeface="Times New Roman" panose="02020603050405020304" pitchFamily="18" charset="0"/>
+                <a:cs typeface="Arial" panose="020B0604020202020204" pitchFamily="34" charset="0"/>
+              </a:rPr>
+              <a:t>Consumer 2: Inventory Management Service</a:t>
+            </a:r>
+            <a:endParaRPr lang="en-US" sz="1800" dirty="0">
+              <a:effectLst/>
+              <a:latin typeface="Calibri" panose="020F0502020204030204" pitchFamily="34" charset="0"/>
+              <a:ea typeface="Calibri" panose="020F0502020204030204" pitchFamily="34" charset="0"/>
+              <a:cs typeface="Arial" panose="020B0604020202020204" pitchFamily="34" charset="0"/>
+            </a:endParaRPr>
+          </a:p>
+          <a:p>
+            <a:pPr marL="342900" marR="0" lvl="0" indent="-342900">
+              <a:lnSpc>
+                <a:spcPct val="107000"/>
+              </a:lnSpc>
+              <a:spcBef>
+                <a:spcPts val="0"/>
+              </a:spcBef>
+              <a:spcAft>
+                <a:spcPts val="800"/>
+              </a:spcAft>
+              <a:buSzPts val="1000"/>
+              <a:buFont typeface="Symbol" panose="05050102010706020507" pitchFamily="18" charset="2"/>
+              <a:buChar char=""/>
+              <a:tabLst>
+                <a:tab pos="457200" algn="l"/>
+              </a:tabLst>
+            </a:pPr>
+            <a:r>
+              <a:rPr lang="en-US" sz="1800" b="1" dirty="0">
+                <a:effectLst/>
+                <a:latin typeface="Times New Roman" panose="02020603050405020304" pitchFamily="18" charset="0"/>
+                <a:ea typeface="Times New Roman" panose="02020603050405020304" pitchFamily="18" charset="0"/>
+                <a:cs typeface="Arial" panose="020B0604020202020204" pitchFamily="34" charset="0"/>
+              </a:rPr>
+              <a:t>Consumes</a:t>
+            </a:r>
+            <a:r>
+              <a:rPr lang="en-US" sz="1800" dirty="0">
+                <a:effectLst/>
+                <a:latin typeface="Times New Roman" panose="02020603050405020304" pitchFamily="18" charset="0"/>
+                <a:ea typeface="Times New Roman" panose="02020603050405020304" pitchFamily="18" charset="0"/>
+                <a:cs typeface="Arial" panose="020B0604020202020204" pitchFamily="34" charset="0"/>
+              </a:rPr>
+              <a:t>: Inventory updates from the </a:t>
+            </a:r>
+            <a:r>
+              <a:rPr lang="en-US" sz="1800" dirty="0">
+                <a:effectLst/>
+                <a:latin typeface="Courier New" panose="02070309020205020404" pitchFamily="49" charset="0"/>
+                <a:ea typeface="Times New Roman" panose="02020603050405020304" pitchFamily="18" charset="0"/>
+                <a:cs typeface="Arial" panose="020B0604020202020204" pitchFamily="34" charset="0"/>
+              </a:rPr>
+              <a:t>inventory</a:t>
+            </a:r>
+            <a:r>
+              <a:rPr lang="en-US" sz="1800" dirty="0">
+                <a:effectLst/>
+                <a:latin typeface="Times New Roman" panose="02020603050405020304" pitchFamily="18" charset="0"/>
+                <a:ea typeface="Times New Roman" panose="02020603050405020304" pitchFamily="18" charset="0"/>
+                <a:cs typeface="Arial" panose="020B0604020202020204" pitchFamily="34" charset="0"/>
+              </a:rPr>
+              <a:t> topic.</a:t>
+            </a:r>
+            <a:endParaRPr lang="en-US" sz="1800" dirty="0">
+              <a:effectLst/>
+              <a:latin typeface="Calibri" panose="020F0502020204030204" pitchFamily="34" charset="0"/>
+              <a:ea typeface="Calibri" panose="020F0502020204030204" pitchFamily="34" charset="0"/>
+              <a:cs typeface="Arial" panose="020B0604020202020204" pitchFamily="34" charset="0"/>
+            </a:endParaRPr>
+          </a:p>
+          <a:p>
+            <a:pPr marL="342900" marR="0" lvl="0" indent="-342900">
+              <a:lnSpc>
+                <a:spcPct val="107000"/>
+              </a:lnSpc>
+              <a:spcBef>
+                <a:spcPts val="0"/>
+              </a:spcBef>
+              <a:spcAft>
+                <a:spcPts val="800"/>
+              </a:spcAft>
+              <a:buSzPts val="1000"/>
+              <a:buFont typeface="Symbol" panose="05050102010706020507" pitchFamily="18" charset="2"/>
+              <a:buChar char=""/>
+              <a:tabLst>
+                <a:tab pos="457200" algn="l"/>
+              </a:tabLst>
+            </a:pPr>
+            <a:r>
+              <a:rPr lang="en-US" sz="1800" b="1" dirty="0">
+                <a:effectLst/>
+                <a:latin typeface="Times New Roman" panose="02020603050405020304" pitchFamily="18" charset="0"/>
+                <a:ea typeface="Times New Roman" panose="02020603050405020304" pitchFamily="18" charset="0"/>
+                <a:cs typeface="Arial" panose="020B0604020202020204" pitchFamily="34" charset="0"/>
+              </a:rPr>
+              <a:t>Processes</a:t>
+            </a:r>
+            <a:r>
+              <a:rPr lang="en-US" sz="1800" dirty="0">
+                <a:effectLst/>
+                <a:latin typeface="Times New Roman" panose="02020603050405020304" pitchFamily="18" charset="0"/>
+                <a:ea typeface="Times New Roman" panose="02020603050405020304" pitchFamily="18" charset="0"/>
+                <a:cs typeface="Arial" panose="020B0604020202020204" pitchFamily="34" charset="0"/>
+              </a:rPr>
+              <a:t>: Compares inventory data with incoming orders. If an item is out of stock or the quantity exceeds available stock, the order is either placed on hold or canceled.</a:t>
+            </a:r>
+            <a:endParaRPr lang="en-US" sz="1800" dirty="0">
+              <a:effectLst/>
+              <a:latin typeface="Calibri" panose="020F0502020204030204" pitchFamily="34" charset="0"/>
+              <a:ea typeface="Calibri" panose="020F0502020204030204" pitchFamily="34" charset="0"/>
+              <a:cs typeface="Arial" panose="020B0604020202020204" pitchFamily="34" charset="0"/>
+            </a:endParaRPr>
+          </a:p>
+          <a:p>
+            <a:pPr marL="342900" marR="0" lvl="0" indent="-342900">
+              <a:lnSpc>
+                <a:spcPct val="107000"/>
+              </a:lnSpc>
+              <a:spcBef>
+                <a:spcPts val="0"/>
+              </a:spcBef>
+              <a:spcAft>
+                <a:spcPts val="800"/>
+              </a:spcAft>
+              <a:buSzPts val="1000"/>
+              <a:buFont typeface="Symbol" panose="05050102010706020507" pitchFamily="18" charset="2"/>
+              <a:buChar char=""/>
+              <a:tabLst>
+                <a:tab pos="457200" algn="l"/>
+              </a:tabLst>
+            </a:pPr>
+            <a:r>
+              <a:rPr lang="en-US" sz="1800" b="1" dirty="0">
+                <a:effectLst/>
+                <a:latin typeface="Times New Roman" panose="02020603050405020304" pitchFamily="18" charset="0"/>
+                <a:ea typeface="Times New Roman" panose="02020603050405020304" pitchFamily="18" charset="0"/>
+                <a:cs typeface="Arial" panose="020B0604020202020204" pitchFamily="34" charset="0"/>
+              </a:rPr>
+              <a:t>Output</a:t>
+            </a:r>
+            <a:r>
+              <a:rPr lang="en-US" sz="1800" dirty="0">
+                <a:effectLst/>
+                <a:latin typeface="Times New Roman" panose="02020603050405020304" pitchFamily="18" charset="0"/>
+                <a:ea typeface="Times New Roman" panose="02020603050405020304" pitchFamily="18" charset="0"/>
+                <a:cs typeface="Arial" panose="020B0604020202020204" pitchFamily="34" charset="0"/>
+              </a:rPr>
+              <a:t>: Sends updated inventory status (e.g., stock depletion or restocking) to the inventory management system and updates the order status.</a:t>
+            </a:r>
+            <a:endParaRPr lang="en-US" sz="1800" dirty="0">
+              <a:effectLst/>
+              <a:latin typeface="Calibri" panose="020F0502020204030204" pitchFamily="34" charset="0"/>
+              <a:ea typeface="Calibri" panose="020F0502020204030204" pitchFamily="34" charset="0"/>
+              <a:cs typeface="Arial" panose="020B0604020202020204" pitchFamily="34" charset="0"/>
+            </a:endParaRPr>
+          </a:p>
+          <a:p>
+            <a:endParaRPr lang="en-US" dirty="0"/>
+          </a:p>
+        </p:txBody>
+      </p:sp>
+    </p:spTree>
+    <p:extLst>
+      <p:ext uri="{BB962C8B-B14F-4D97-AF65-F5344CB8AC3E}">
+        <p14:creationId xmlns:p14="http://schemas.microsoft.com/office/powerpoint/2010/main" val="2996144740"/>
+      </p:ext>
+    </p:extLst>
+  </p:cSld>
+  <p:clrMapOvr>
+    <a:masterClrMapping/>
+  </p:clrMapOvr>
+</p:sld>
+</file>
+
+<file path=ppt/slides/slide28.xml><?xml version="1.0" encoding="utf-8"?>
+<p:sld xmlns:a="http://schemas.openxmlformats.org/drawingml/2006/main" xmlns:r="http://schemas.openxmlformats.org/officeDocument/2006/relationships" xmlns:p="http://schemas.openxmlformats.org/presentationml/2006/main">
+  <p:cSld>
+    <p:spTree>
+      <p:nvGrpSpPr>
+        <p:cNvPr id="1" name=""/>
+        <p:cNvGrpSpPr/>
+        <p:nvPr/>
+      </p:nvGrpSpPr>
+      <p:grpSpPr>
+        <a:xfrm>
+          <a:off x="0" y="0"/>
+          <a:ext cx="0" cy="0"/>
+          <a:chOff x="0" y="0"/>
+          <a:chExt cx="0" cy="0"/>
+        </a:xfrm>
+      </p:grpSpPr>
+      <p:sp>
+        <p:nvSpPr>
+          <p:cNvPr id="2" name="Title 1">
+            <a:extLst>
+              <a:ext uri="{FF2B5EF4-FFF2-40B4-BE49-F238E27FC236}">
+                <a16:creationId xmlns:a16="http://schemas.microsoft.com/office/drawing/2014/main" id="{94C8800D-C43B-4FD7-A318-67AEB8003E93}"/>
+              </a:ext>
+            </a:extLst>
+          </p:cNvPr>
+          <p:cNvSpPr>
+            <a:spLocks noGrp="1"/>
+          </p:cNvSpPr>
+          <p:nvPr>
+            <p:ph type="title"/>
+          </p:nvPr>
+        </p:nvSpPr>
+        <p:spPr/>
+        <p:txBody>
+          <a:bodyPr/>
+          <a:lstStyle/>
+          <a:p>
+            <a:r>
+              <a:rPr lang="en-US" sz="2800" dirty="0">
+                <a:effectLst/>
+                <a:latin typeface="Times New Roman" panose="02020603050405020304" pitchFamily="18" charset="0"/>
+                <a:ea typeface="Times New Roman" panose="02020603050405020304" pitchFamily="18" charset="0"/>
+                <a:cs typeface="Arial" panose="020B0604020202020204" pitchFamily="34" charset="0"/>
+              </a:rPr>
+              <a:t>Kafka Streams / Consumers</a:t>
+            </a:r>
+            <a:endParaRPr lang="en-US" dirty="0"/>
+          </a:p>
+        </p:txBody>
+      </p:sp>
+      <p:sp>
+        <p:nvSpPr>
+          <p:cNvPr id="3" name="Content Placeholder 2">
+            <a:extLst>
+              <a:ext uri="{FF2B5EF4-FFF2-40B4-BE49-F238E27FC236}">
+                <a16:creationId xmlns:a16="http://schemas.microsoft.com/office/drawing/2014/main" id="{0874E313-B8F4-4CC1-A604-3C82F5A688A3}"/>
+              </a:ext>
+            </a:extLst>
+          </p:cNvPr>
+          <p:cNvSpPr>
+            <a:spLocks noGrp="1"/>
+          </p:cNvSpPr>
+          <p:nvPr>
+            <p:ph idx="1"/>
+          </p:nvPr>
+        </p:nvSpPr>
+        <p:spPr/>
+        <p:txBody>
+          <a:bodyPr/>
+          <a:lstStyle/>
+          <a:p>
+            <a:pPr marL="0" marR="0" indent="0">
+              <a:lnSpc>
+                <a:spcPct val="107000"/>
+              </a:lnSpc>
+              <a:spcBef>
+                <a:spcPts val="0"/>
+              </a:spcBef>
+              <a:spcAft>
+                <a:spcPts val="800"/>
+              </a:spcAft>
+              <a:buNone/>
+            </a:pPr>
+            <a:r>
+              <a:rPr lang="en-US" sz="1800" b="1" dirty="0">
+                <a:effectLst/>
+                <a:latin typeface="Times New Roman" panose="02020603050405020304" pitchFamily="18" charset="0"/>
+                <a:ea typeface="Times New Roman" panose="02020603050405020304" pitchFamily="18" charset="0"/>
+                <a:cs typeface="Arial" panose="020B0604020202020204" pitchFamily="34" charset="0"/>
+              </a:rPr>
+              <a:t>Consumer 4: Shipping Service</a:t>
+            </a:r>
+            <a:endParaRPr lang="en-US" sz="1800" dirty="0">
+              <a:effectLst/>
+              <a:latin typeface="Calibri" panose="020F0502020204030204" pitchFamily="34" charset="0"/>
+              <a:ea typeface="Calibri" panose="020F0502020204030204" pitchFamily="34" charset="0"/>
+              <a:cs typeface="Arial" panose="020B0604020202020204" pitchFamily="34" charset="0"/>
+            </a:endParaRPr>
+          </a:p>
+          <a:p>
+            <a:pPr marL="342900" marR="0" lvl="0" indent="-342900">
+              <a:lnSpc>
+                <a:spcPct val="107000"/>
+              </a:lnSpc>
+              <a:spcBef>
+                <a:spcPts val="0"/>
+              </a:spcBef>
+              <a:spcAft>
+                <a:spcPts val="800"/>
+              </a:spcAft>
+              <a:buSzPts val="1000"/>
+              <a:buFont typeface="Symbol" panose="05050102010706020507" pitchFamily="18" charset="2"/>
+              <a:buChar char=""/>
+              <a:tabLst>
+                <a:tab pos="457200" algn="l"/>
+              </a:tabLst>
+            </a:pPr>
+            <a:r>
+              <a:rPr lang="en-US" sz="1800" b="1" dirty="0">
+                <a:effectLst/>
+                <a:latin typeface="Times New Roman" panose="02020603050405020304" pitchFamily="18" charset="0"/>
+                <a:ea typeface="Times New Roman" panose="02020603050405020304" pitchFamily="18" charset="0"/>
+                <a:cs typeface="Arial" panose="020B0604020202020204" pitchFamily="34" charset="0"/>
+              </a:rPr>
+              <a:t>Consumes</a:t>
+            </a:r>
+            <a:r>
+              <a:rPr lang="en-US" sz="1800" dirty="0">
+                <a:effectLst/>
+                <a:latin typeface="Times New Roman" panose="02020603050405020304" pitchFamily="18" charset="0"/>
+                <a:ea typeface="Times New Roman" panose="02020603050405020304" pitchFamily="18" charset="0"/>
+                <a:cs typeface="Arial" panose="020B0604020202020204" pitchFamily="34" charset="0"/>
+              </a:rPr>
+              <a:t>: Order data (if the order is confirmed) and shipping updates from the </a:t>
+            </a:r>
+            <a:r>
+              <a:rPr lang="en-US" sz="1800" dirty="0">
+                <a:effectLst/>
+                <a:latin typeface="Courier New" panose="02070309020205020404" pitchFamily="49" charset="0"/>
+                <a:ea typeface="Times New Roman" panose="02020603050405020304" pitchFamily="18" charset="0"/>
+                <a:cs typeface="Arial" panose="020B0604020202020204" pitchFamily="34" charset="0"/>
+              </a:rPr>
+              <a:t>shipping</a:t>
+            </a:r>
+            <a:r>
+              <a:rPr lang="en-US" sz="1800" dirty="0">
+                <a:effectLst/>
+                <a:latin typeface="Times New Roman" panose="02020603050405020304" pitchFamily="18" charset="0"/>
+                <a:ea typeface="Times New Roman" panose="02020603050405020304" pitchFamily="18" charset="0"/>
+                <a:cs typeface="Arial" panose="020B0604020202020204" pitchFamily="34" charset="0"/>
+              </a:rPr>
+              <a:t> topic.</a:t>
+            </a:r>
+            <a:endParaRPr lang="en-US" sz="1800" dirty="0">
+              <a:effectLst/>
+              <a:latin typeface="Calibri" panose="020F0502020204030204" pitchFamily="34" charset="0"/>
+              <a:ea typeface="Calibri" panose="020F0502020204030204" pitchFamily="34" charset="0"/>
+              <a:cs typeface="Arial" panose="020B0604020202020204" pitchFamily="34" charset="0"/>
+            </a:endParaRPr>
+          </a:p>
+          <a:p>
+            <a:pPr marL="342900" marR="0" lvl="0" indent="-342900">
+              <a:lnSpc>
+                <a:spcPct val="107000"/>
+              </a:lnSpc>
+              <a:spcBef>
+                <a:spcPts val="0"/>
+              </a:spcBef>
+              <a:spcAft>
+                <a:spcPts val="800"/>
+              </a:spcAft>
+              <a:buSzPts val="1000"/>
+              <a:buFont typeface="Symbol" panose="05050102010706020507" pitchFamily="18" charset="2"/>
+              <a:buChar char=""/>
+              <a:tabLst>
+                <a:tab pos="457200" algn="l"/>
+              </a:tabLst>
+            </a:pPr>
+            <a:r>
+              <a:rPr lang="en-US" sz="1800" b="1" dirty="0">
+                <a:effectLst/>
+                <a:latin typeface="Times New Roman" panose="02020603050405020304" pitchFamily="18" charset="0"/>
+                <a:ea typeface="Times New Roman" panose="02020603050405020304" pitchFamily="18" charset="0"/>
+                <a:cs typeface="Arial" panose="020B0604020202020204" pitchFamily="34" charset="0"/>
+              </a:rPr>
+              <a:t>Processes</a:t>
+            </a:r>
+            <a:r>
+              <a:rPr lang="en-US" sz="1800" dirty="0">
+                <a:effectLst/>
+                <a:latin typeface="Times New Roman" panose="02020603050405020304" pitchFamily="18" charset="0"/>
+                <a:ea typeface="Times New Roman" panose="02020603050405020304" pitchFamily="18" charset="0"/>
+                <a:cs typeface="Arial" panose="020B0604020202020204" pitchFamily="34" charset="0"/>
+              </a:rPr>
+              <a:t>: When an order is confirmed, the service generates a shipment and tracks the order's shipping status. It also manages the shipping progress.</a:t>
+            </a:r>
+            <a:endParaRPr lang="en-US" sz="1800" dirty="0">
+              <a:effectLst/>
+              <a:latin typeface="Calibri" panose="020F0502020204030204" pitchFamily="34" charset="0"/>
+              <a:ea typeface="Calibri" panose="020F0502020204030204" pitchFamily="34" charset="0"/>
+              <a:cs typeface="Arial" panose="020B0604020202020204" pitchFamily="34" charset="0"/>
+            </a:endParaRPr>
+          </a:p>
+          <a:p>
+            <a:pPr marL="342900" marR="0" lvl="0" indent="-342900">
+              <a:lnSpc>
+                <a:spcPct val="107000"/>
+              </a:lnSpc>
+              <a:spcBef>
+                <a:spcPts val="0"/>
+              </a:spcBef>
+              <a:spcAft>
+                <a:spcPts val="800"/>
+              </a:spcAft>
+              <a:buSzPts val="1000"/>
+              <a:buFont typeface="Symbol" panose="05050102010706020507" pitchFamily="18" charset="2"/>
+              <a:buChar char=""/>
+              <a:tabLst>
+                <a:tab pos="457200" algn="l"/>
+              </a:tabLst>
+            </a:pPr>
+            <a:r>
+              <a:rPr lang="en-US" sz="1800" b="1" dirty="0">
+                <a:effectLst/>
+                <a:latin typeface="Times New Roman" panose="02020603050405020304" pitchFamily="18" charset="0"/>
+                <a:ea typeface="Times New Roman" panose="02020603050405020304" pitchFamily="18" charset="0"/>
+                <a:cs typeface="Arial" panose="020B0604020202020204" pitchFamily="34" charset="0"/>
+              </a:rPr>
+              <a:t>Output</a:t>
+            </a:r>
+            <a:r>
+              <a:rPr lang="en-US" sz="1800" dirty="0">
+                <a:effectLst/>
+                <a:latin typeface="Times New Roman" panose="02020603050405020304" pitchFamily="18" charset="0"/>
+                <a:ea typeface="Times New Roman" panose="02020603050405020304" pitchFamily="18" charset="0"/>
+                <a:cs typeface="Arial" panose="020B0604020202020204" pitchFamily="34" charset="0"/>
+              </a:rPr>
+              <a:t>: Sends tracking information to customers and updates the order status (shipped, delivered).</a:t>
+            </a:r>
+            <a:endParaRPr lang="en-US" sz="1800" dirty="0">
+              <a:effectLst/>
+              <a:latin typeface="Calibri" panose="020F0502020204030204" pitchFamily="34" charset="0"/>
+              <a:ea typeface="Calibri" panose="020F0502020204030204" pitchFamily="34" charset="0"/>
+              <a:cs typeface="Arial" panose="020B0604020202020204" pitchFamily="34" charset="0"/>
+            </a:endParaRPr>
+          </a:p>
+          <a:p>
+            <a:pPr marL="0" marR="0" indent="0">
+              <a:lnSpc>
+                <a:spcPct val="107000"/>
+              </a:lnSpc>
+              <a:spcBef>
+                <a:spcPts val="0"/>
+              </a:spcBef>
+              <a:spcAft>
+                <a:spcPts val="800"/>
+              </a:spcAft>
+              <a:buNone/>
+            </a:pPr>
+            <a:r>
+              <a:rPr lang="en-US" sz="1800" b="1" dirty="0">
+                <a:effectLst/>
+                <a:latin typeface="Times New Roman" panose="02020603050405020304" pitchFamily="18" charset="0"/>
+                <a:ea typeface="Times New Roman" panose="02020603050405020304" pitchFamily="18" charset="0"/>
+                <a:cs typeface="Arial" panose="020B0604020202020204" pitchFamily="34" charset="0"/>
+              </a:rPr>
+              <a:t>Consumer 5: Customer Notification Service</a:t>
+            </a:r>
+            <a:endParaRPr lang="en-US" sz="1800" dirty="0">
+              <a:effectLst/>
+              <a:latin typeface="Calibri" panose="020F0502020204030204" pitchFamily="34" charset="0"/>
+              <a:ea typeface="Calibri" panose="020F0502020204030204" pitchFamily="34" charset="0"/>
+              <a:cs typeface="Arial" panose="020B0604020202020204" pitchFamily="34" charset="0"/>
+            </a:endParaRPr>
+          </a:p>
+          <a:p>
+            <a:pPr marL="342900" marR="0" lvl="0" indent="-342900">
+              <a:lnSpc>
+                <a:spcPct val="107000"/>
+              </a:lnSpc>
+              <a:spcBef>
+                <a:spcPts val="0"/>
+              </a:spcBef>
+              <a:spcAft>
+                <a:spcPts val="800"/>
+              </a:spcAft>
+              <a:buSzPts val="1000"/>
+              <a:buFont typeface="Symbol" panose="05050102010706020507" pitchFamily="18" charset="2"/>
+              <a:buChar char=""/>
+              <a:tabLst>
+                <a:tab pos="457200" algn="l"/>
+              </a:tabLst>
+            </a:pPr>
+            <a:r>
+              <a:rPr lang="en-US" sz="1800" b="1" dirty="0">
+                <a:effectLst/>
+                <a:latin typeface="Times New Roman" panose="02020603050405020304" pitchFamily="18" charset="0"/>
+                <a:ea typeface="Times New Roman" panose="02020603050405020304" pitchFamily="18" charset="0"/>
+                <a:cs typeface="Arial" panose="020B0604020202020204" pitchFamily="34" charset="0"/>
+              </a:rPr>
+              <a:t>Consumes</a:t>
+            </a:r>
+            <a:r>
+              <a:rPr lang="en-US" sz="1800" dirty="0">
+                <a:effectLst/>
+                <a:latin typeface="Times New Roman" panose="02020603050405020304" pitchFamily="18" charset="0"/>
+                <a:ea typeface="Times New Roman" panose="02020603050405020304" pitchFamily="18" charset="0"/>
+                <a:cs typeface="Arial" panose="020B0604020202020204" pitchFamily="34" charset="0"/>
+              </a:rPr>
+              <a:t>: Order status updates, shipping updates, and payment updates.</a:t>
+            </a:r>
+            <a:endParaRPr lang="en-US" sz="1800" dirty="0">
+              <a:effectLst/>
+              <a:latin typeface="Calibri" panose="020F0502020204030204" pitchFamily="34" charset="0"/>
+              <a:ea typeface="Calibri" panose="020F0502020204030204" pitchFamily="34" charset="0"/>
+              <a:cs typeface="Arial" panose="020B0604020202020204" pitchFamily="34" charset="0"/>
+            </a:endParaRPr>
+          </a:p>
+          <a:p>
+            <a:pPr marL="342900" marR="0" lvl="0" indent="-342900">
+              <a:lnSpc>
+                <a:spcPct val="107000"/>
+              </a:lnSpc>
+              <a:spcBef>
+                <a:spcPts val="0"/>
+              </a:spcBef>
+              <a:spcAft>
+                <a:spcPts val="800"/>
+              </a:spcAft>
+              <a:buSzPts val="1000"/>
+              <a:buFont typeface="Symbol" panose="05050102010706020507" pitchFamily="18" charset="2"/>
+              <a:buChar char=""/>
+              <a:tabLst>
+                <a:tab pos="457200" algn="l"/>
+              </a:tabLst>
+            </a:pPr>
+            <a:r>
+              <a:rPr lang="en-US" sz="1800" b="1" dirty="0">
+                <a:effectLst/>
+                <a:latin typeface="Times New Roman" panose="02020603050405020304" pitchFamily="18" charset="0"/>
+                <a:ea typeface="Times New Roman" panose="02020603050405020304" pitchFamily="18" charset="0"/>
+                <a:cs typeface="Arial" panose="020B0604020202020204" pitchFamily="34" charset="0"/>
+              </a:rPr>
+              <a:t>Processes</a:t>
+            </a:r>
+            <a:r>
+              <a:rPr lang="en-US" sz="1800" dirty="0">
+                <a:effectLst/>
+                <a:latin typeface="Times New Roman" panose="02020603050405020304" pitchFamily="18" charset="0"/>
+                <a:ea typeface="Times New Roman" panose="02020603050405020304" pitchFamily="18" charset="0"/>
+                <a:cs typeface="Arial" panose="020B0604020202020204" pitchFamily="34" charset="0"/>
+              </a:rPr>
+              <a:t>: Notifies customers about their order's progress (payment successful, order shipped, order delivered).</a:t>
+            </a:r>
+            <a:endParaRPr lang="en-US" sz="1800" dirty="0">
+              <a:effectLst/>
+              <a:latin typeface="Calibri" panose="020F0502020204030204" pitchFamily="34" charset="0"/>
+              <a:ea typeface="Calibri" panose="020F0502020204030204" pitchFamily="34" charset="0"/>
+              <a:cs typeface="Arial" panose="020B0604020202020204" pitchFamily="34" charset="0"/>
+            </a:endParaRPr>
+          </a:p>
+          <a:p>
+            <a:pPr marL="342900" marR="0" lvl="0" indent="-342900">
+              <a:lnSpc>
+                <a:spcPct val="107000"/>
+              </a:lnSpc>
+              <a:spcBef>
+                <a:spcPts val="0"/>
+              </a:spcBef>
+              <a:spcAft>
+                <a:spcPts val="800"/>
+              </a:spcAft>
+              <a:buSzPts val="1000"/>
+              <a:buFont typeface="Symbol" panose="05050102010706020507" pitchFamily="18" charset="2"/>
+              <a:buChar char=""/>
+              <a:tabLst>
+                <a:tab pos="457200" algn="l"/>
+              </a:tabLst>
+            </a:pPr>
+            <a:r>
+              <a:rPr lang="en-US" sz="1800" b="1" dirty="0">
+                <a:effectLst/>
+                <a:latin typeface="Times New Roman" panose="02020603050405020304" pitchFamily="18" charset="0"/>
+                <a:ea typeface="Times New Roman" panose="02020603050405020304" pitchFamily="18" charset="0"/>
+                <a:cs typeface="Arial" panose="020B0604020202020204" pitchFamily="34" charset="0"/>
+              </a:rPr>
+              <a:t>Output</a:t>
+            </a:r>
+            <a:r>
+              <a:rPr lang="en-US" sz="1800" dirty="0">
+                <a:effectLst/>
+                <a:latin typeface="Times New Roman" panose="02020603050405020304" pitchFamily="18" charset="0"/>
+                <a:ea typeface="Times New Roman" panose="02020603050405020304" pitchFamily="18" charset="0"/>
+                <a:cs typeface="Arial" panose="020B0604020202020204" pitchFamily="34" charset="0"/>
+              </a:rPr>
+              <a:t>: Sends push notifications, emails, or SMS to customers about the order’s status.</a:t>
+            </a:r>
+            <a:endParaRPr lang="en-US" sz="1800" dirty="0">
+              <a:effectLst/>
+              <a:latin typeface="Calibri" panose="020F0502020204030204" pitchFamily="34" charset="0"/>
+              <a:ea typeface="Calibri" panose="020F0502020204030204" pitchFamily="34" charset="0"/>
+              <a:cs typeface="Arial" panose="020B0604020202020204" pitchFamily="34" charset="0"/>
+            </a:endParaRPr>
+          </a:p>
+          <a:p>
+            <a:endParaRPr lang="en-US" dirty="0"/>
+          </a:p>
+        </p:txBody>
+      </p:sp>
+    </p:spTree>
+    <p:extLst>
+      <p:ext uri="{BB962C8B-B14F-4D97-AF65-F5344CB8AC3E}">
+        <p14:creationId xmlns:p14="http://schemas.microsoft.com/office/powerpoint/2010/main" val="1106511272"/>
+      </p:ext>
+    </p:extLst>
+  </p:cSld>
+  <p:clrMapOvr>
+    <a:masterClrMapping/>
+  </p:clrMapOvr>
+</p:sld>
+</file>
+
+<file path=ppt/slides/slide29.xml><?xml version="1.0" encoding="utf-8"?>
+<p:sld xmlns:a="http://schemas.openxmlformats.org/drawingml/2006/main" xmlns:r="http://schemas.openxmlformats.org/officeDocument/2006/relationships" xmlns:p="http://schemas.openxmlformats.org/presentationml/2006/main">
+  <p:cSld>
+    <p:spTree>
+      <p:nvGrpSpPr>
+        <p:cNvPr id="1" name=""/>
+        <p:cNvGrpSpPr/>
+        <p:nvPr/>
+      </p:nvGrpSpPr>
+      <p:grpSpPr>
+        <a:xfrm>
+          <a:off x="0" y="0"/>
+          <a:ext cx="0" cy="0"/>
+          <a:chOff x="0" y="0"/>
+          <a:chExt cx="0" cy="0"/>
+        </a:xfrm>
+      </p:grpSpPr>
+      <p:sp>
+        <p:nvSpPr>
+          <p:cNvPr id="2" name="Title 1">
+            <a:extLst>
+              <a:ext uri="{FF2B5EF4-FFF2-40B4-BE49-F238E27FC236}">
+                <a16:creationId xmlns:a16="http://schemas.microsoft.com/office/drawing/2014/main" id="{89AAB016-A5A0-4664-87E4-CD43227E5FDA}"/>
+              </a:ext>
+            </a:extLst>
+          </p:cNvPr>
+          <p:cNvSpPr>
+            <a:spLocks noGrp="1"/>
+          </p:cNvSpPr>
+          <p:nvPr>
+            <p:ph type="title"/>
+          </p:nvPr>
+        </p:nvSpPr>
+        <p:spPr/>
+        <p:txBody>
+          <a:bodyPr>
+            <a:normAutofit/>
+          </a:bodyPr>
+          <a:lstStyle/>
+          <a:p>
+            <a:r>
+              <a:rPr lang="en-US" sz="2800" b="1" dirty="0">
+                <a:effectLst/>
+                <a:latin typeface="Times New Roman" panose="02020603050405020304" pitchFamily="18" charset="0"/>
+                <a:ea typeface="Times New Roman" panose="02020603050405020304" pitchFamily="18" charset="0"/>
+                <a:cs typeface="Arial" panose="020B0604020202020204" pitchFamily="34" charset="0"/>
+              </a:rPr>
+              <a:t>Key </a:t>
+            </a:r>
+            <a:r>
+              <a:rPr lang="en-US" sz="2800" dirty="0">
+                <a:effectLst/>
+                <a:latin typeface="Times New Roman" panose="02020603050405020304" pitchFamily="18" charset="0"/>
+                <a:ea typeface="Times New Roman" panose="02020603050405020304" pitchFamily="18" charset="0"/>
+                <a:cs typeface="Arial" panose="020B0604020202020204" pitchFamily="34" charset="0"/>
+              </a:rPr>
+              <a:t>Advantages</a:t>
+            </a:r>
+            <a:r>
+              <a:rPr lang="en-US" sz="2800" b="1" dirty="0">
+                <a:effectLst/>
+                <a:latin typeface="Times New Roman" panose="02020603050405020304" pitchFamily="18" charset="0"/>
+                <a:ea typeface="Times New Roman" panose="02020603050405020304" pitchFamily="18" charset="0"/>
+                <a:cs typeface="Arial" panose="020B0604020202020204" pitchFamily="34" charset="0"/>
+              </a:rPr>
+              <a:t> of Kafka in This Scenario</a:t>
+            </a:r>
+            <a:endParaRPr lang="en-US" dirty="0"/>
+          </a:p>
+        </p:txBody>
+      </p:sp>
+      <p:sp>
+        <p:nvSpPr>
+          <p:cNvPr id="3" name="Content Placeholder 2">
+            <a:extLst>
+              <a:ext uri="{FF2B5EF4-FFF2-40B4-BE49-F238E27FC236}">
+                <a16:creationId xmlns:a16="http://schemas.microsoft.com/office/drawing/2014/main" id="{EF97ED4C-AFE0-4A6F-9D86-C36C1AF0CC9B}"/>
+              </a:ext>
+            </a:extLst>
+          </p:cNvPr>
+          <p:cNvSpPr>
+            <a:spLocks noGrp="1"/>
+          </p:cNvSpPr>
+          <p:nvPr>
+            <p:ph idx="1"/>
+          </p:nvPr>
+        </p:nvSpPr>
+        <p:spPr/>
+        <p:txBody>
+          <a:bodyPr/>
+          <a:lstStyle/>
+          <a:p>
+            <a:pPr marL="342900" marR="0" lvl="0" indent="-342900">
+              <a:lnSpc>
+                <a:spcPct val="107000"/>
+              </a:lnSpc>
+              <a:spcBef>
+                <a:spcPts val="0"/>
+              </a:spcBef>
+              <a:spcAft>
+                <a:spcPts val="800"/>
+              </a:spcAft>
+              <a:buSzPts val="1000"/>
+              <a:buFont typeface="Symbol" panose="05050102010706020507" pitchFamily="18" charset="2"/>
+              <a:buChar char=""/>
+              <a:tabLst>
+                <a:tab pos="457200" algn="l"/>
+              </a:tabLst>
+            </a:pPr>
+            <a:r>
+              <a:rPr lang="en-US" sz="1800" b="1" dirty="0">
+                <a:effectLst/>
+                <a:latin typeface="Times New Roman" panose="02020603050405020304" pitchFamily="18" charset="0"/>
+                <a:ea typeface="Times New Roman" panose="02020603050405020304" pitchFamily="18" charset="0"/>
+                <a:cs typeface="Arial" panose="020B0604020202020204" pitchFamily="34" charset="0"/>
+              </a:rPr>
+              <a:t>Real-Time Processing</a:t>
+            </a:r>
+            <a:r>
+              <a:rPr lang="en-US" sz="1800" dirty="0">
+                <a:effectLst/>
+                <a:latin typeface="Times New Roman" panose="02020603050405020304" pitchFamily="18" charset="0"/>
+                <a:ea typeface="Times New Roman" panose="02020603050405020304" pitchFamily="18" charset="0"/>
+                <a:cs typeface="Arial" panose="020B0604020202020204" pitchFamily="34" charset="0"/>
+              </a:rPr>
+              <a:t>: Kafka ensures that all systems (order processing, inventory management, payment verification, and shipping) communicate and update in real time.</a:t>
+            </a:r>
+            <a:endParaRPr lang="en-US" sz="1800" dirty="0">
+              <a:effectLst/>
+              <a:latin typeface="Calibri" panose="020F0502020204030204" pitchFamily="34" charset="0"/>
+              <a:ea typeface="Calibri" panose="020F0502020204030204" pitchFamily="34" charset="0"/>
+              <a:cs typeface="Arial" panose="020B0604020202020204" pitchFamily="34" charset="0"/>
+            </a:endParaRPr>
+          </a:p>
+          <a:p>
+            <a:pPr marL="342900" marR="0" lvl="0" indent="-342900">
+              <a:lnSpc>
+                <a:spcPct val="107000"/>
+              </a:lnSpc>
+              <a:spcBef>
+                <a:spcPts val="0"/>
+              </a:spcBef>
+              <a:spcAft>
+                <a:spcPts val="800"/>
+              </a:spcAft>
+              <a:buSzPts val="1000"/>
+              <a:buFont typeface="Symbol" panose="05050102010706020507" pitchFamily="18" charset="2"/>
+              <a:buChar char=""/>
+              <a:tabLst>
+                <a:tab pos="457200" algn="l"/>
+              </a:tabLst>
+            </a:pPr>
+            <a:r>
+              <a:rPr lang="en-US" sz="1800" b="1" dirty="0">
+                <a:effectLst/>
+                <a:latin typeface="Times New Roman" panose="02020603050405020304" pitchFamily="18" charset="0"/>
+                <a:ea typeface="Times New Roman" panose="02020603050405020304" pitchFamily="18" charset="0"/>
+                <a:cs typeface="Arial" panose="020B0604020202020204" pitchFamily="34" charset="0"/>
+              </a:rPr>
+              <a:t>Fault Tolerance</a:t>
+            </a:r>
+            <a:r>
+              <a:rPr lang="en-US" sz="1800" dirty="0">
+                <a:effectLst/>
+                <a:latin typeface="Times New Roman" panose="02020603050405020304" pitchFamily="18" charset="0"/>
+                <a:ea typeface="Times New Roman" panose="02020603050405020304" pitchFamily="18" charset="0"/>
+                <a:cs typeface="Arial" panose="020B0604020202020204" pitchFamily="34" charset="0"/>
+              </a:rPr>
+              <a:t>: Kafka’s distributed system ensures that data is not lost if a consumer or producer fails, and the system can continue functioning.</a:t>
+            </a:r>
+            <a:endParaRPr lang="en-US" sz="1800" dirty="0">
+              <a:effectLst/>
+              <a:latin typeface="Calibri" panose="020F0502020204030204" pitchFamily="34" charset="0"/>
+              <a:ea typeface="Calibri" panose="020F0502020204030204" pitchFamily="34" charset="0"/>
+              <a:cs typeface="Arial" panose="020B0604020202020204" pitchFamily="34" charset="0"/>
+            </a:endParaRPr>
+          </a:p>
+          <a:p>
+            <a:pPr marL="342900" marR="0" lvl="0" indent="-342900">
+              <a:lnSpc>
+                <a:spcPct val="107000"/>
+              </a:lnSpc>
+              <a:spcBef>
+                <a:spcPts val="0"/>
+              </a:spcBef>
+              <a:spcAft>
+                <a:spcPts val="800"/>
+              </a:spcAft>
+              <a:buSzPts val="1000"/>
+              <a:buFont typeface="Symbol" panose="05050102010706020507" pitchFamily="18" charset="2"/>
+              <a:buChar char=""/>
+              <a:tabLst>
+                <a:tab pos="457200" algn="l"/>
+              </a:tabLst>
+            </a:pPr>
+            <a:r>
+              <a:rPr lang="en-US" sz="1800" b="1" dirty="0">
+                <a:effectLst/>
+                <a:latin typeface="Times New Roman" panose="02020603050405020304" pitchFamily="18" charset="0"/>
+                <a:ea typeface="Times New Roman" panose="02020603050405020304" pitchFamily="18" charset="0"/>
+                <a:cs typeface="Arial" panose="020B0604020202020204" pitchFamily="34" charset="0"/>
+              </a:rPr>
+              <a:t>Scalability</a:t>
+            </a:r>
+            <a:r>
+              <a:rPr lang="en-US" sz="1800" dirty="0">
+                <a:effectLst/>
+                <a:latin typeface="Times New Roman" panose="02020603050405020304" pitchFamily="18" charset="0"/>
+                <a:ea typeface="Times New Roman" panose="02020603050405020304" pitchFamily="18" charset="0"/>
+                <a:cs typeface="Arial" panose="020B0604020202020204" pitchFamily="34" charset="0"/>
+              </a:rPr>
+              <a:t>: As the e-commerce platform grows, Kafka can scale to accommodate more products, orders, payments, and shipping updates.</a:t>
+            </a:r>
+            <a:endParaRPr lang="en-US" sz="1800" dirty="0">
+              <a:effectLst/>
+              <a:latin typeface="Calibri" panose="020F0502020204030204" pitchFamily="34" charset="0"/>
+              <a:ea typeface="Calibri" panose="020F0502020204030204" pitchFamily="34" charset="0"/>
+              <a:cs typeface="Arial" panose="020B0604020202020204" pitchFamily="34" charset="0"/>
+            </a:endParaRPr>
+          </a:p>
+          <a:p>
+            <a:pPr marL="342900" marR="0" lvl="0" indent="-342900">
+              <a:lnSpc>
+                <a:spcPct val="107000"/>
+              </a:lnSpc>
+              <a:spcBef>
+                <a:spcPts val="0"/>
+              </a:spcBef>
+              <a:spcAft>
+                <a:spcPts val="800"/>
+              </a:spcAft>
+              <a:buSzPts val="1000"/>
+              <a:buFont typeface="Symbol" panose="05050102010706020507" pitchFamily="18" charset="2"/>
+              <a:buChar char=""/>
+              <a:tabLst>
+                <a:tab pos="457200" algn="l"/>
+              </a:tabLst>
+            </a:pPr>
+            <a:r>
+              <a:rPr lang="en-US" sz="1800" b="1" dirty="0">
+                <a:effectLst/>
+                <a:latin typeface="Times New Roman" panose="02020603050405020304" pitchFamily="18" charset="0"/>
+                <a:ea typeface="Times New Roman" panose="02020603050405020304" pitchFamily="18" charset="0"/>
+                <a:cs typeface="Arial" panose="020B0604020202020204" pitchFamily="34" charset="0"/>
+              </a:rPr>
+              <a:t>Loose Coupling</a:t>
+            </a:r>
+            <a:r>
+              <a:rPr lang="en-US" sz="1800" dirty="0">
+                <a:effectLst/>
+                <a:latin typeface="Times New Roman" panose="02020603050405020304" pitchFamily="18" charset="0"/>
+                <a:ea typeface="Times New Roman" panose="02020603050405020304" pitchFamily="18" charset="0"/>
+                <a:cs typeface="Arial" panose="020B0604020202020204" pitchFamily="34" charset="0"/>
+              </a:rPr>
+              <a:t>: Kafka decouples producers (storefront, warehouse, payment gateway, etc.) and consumers (order processing, inventory, shipping) so that they can evolve independently.</a:t>
+            </a:r>
+            <a:endParaRPr lang="en-US" sz="1800" dirty="0">
+              <a:effectLst/>
+              <a:latin typeface="Calibri" panose="020F0502020204030204" pitchFamily="34" charset="0"/>
+              <a:ea typeface="Calibri" panose="020F0502020204030204" pitchFamily="34" charset="0"/>
+              <a:cs typeface="Arial" panose="020B0604020202020204" pitchFamily="34" charset="0"/>
+            </a:endParaRPr>
+          </a:p>
+          <a:p>
+            <a:endParaRPr lang="en-US" dirty="0"/>
+          </a:p>
+        </p:txBody>
+      </p:sp>
+    </p:spTree>
+    <p:extLst>
+      <p:ext uri="{BB962C8B-B14F-4D97-AF65-F5344CB8AC3E}">
+        <p14:creationId xmlns:p14="http://schemas.microsoft.com/office/powerpoint/2010/main" val="3443736079"/>
+      </p:ext>
+    </p:extLst>
+  </p:cSld>
+  <p:clrMapOvr>
+    <a:masterClrMapping/>
+  </p:clrMapOvr>
+</p:sld>
+</file>
+
+<file path=ppt/slides/slide3.xml><?xml version="1.0" encoding="utf-8"?>
+<p:sld xmlns:a="http://schemas.openxmlformats.org/drawingml/2006/main" xmlns:r="http://schemas.openxmlformats.org/officeDocument/2006/relationships" xmlns:p="http://schemas.openxmlformats.org/presentationml/2006/main">
+  <p:cSld>
+    <p:spTree>
+      <p:nvGrpSpPr>
+        <p:cNvPr id="1" name=""/>
+        <p:cNvGrpSpPr/>
+        <p:nvPr/>
+      </p:nvGrpSpPr>
+      <p:grpSpPr>
+        <a:xfrm>
+          <a:off x="0" y="0"/>
+          <a:ext cx="0" cy="0"/>
+          <a:chOff x="0" y="0"/>
+          <a:chExt cx="0" cy="0"/>
+        </a:xfrm>
+      </p:grpSpPr>
+      <p:sp>
+        <p:nvSpPr>
+          <p:cNvPr id="2" name="Title 1">
+            <a:extLst>
+              <a:ext uri="{FF2B5EF4-FFF2-40B4-BE49-F238E27FC236}">
+                <a16:creationId xmlns:a16="http://schemas.microsoft.com/office/drawing/2014/main" id="{28AF675C-3963-4D6A-1306-49A13120C036}"/>
+              </a:ext>
+            </a:extLst>
+          </p:cNvPr>
+          <p:cNvSpPr>
+            <a:spLocks noGrp="1"/>
+          </p:cNvSpPr>
+          <p:nvPr>
+            <p:ph type="title"/>
+          </p:nvPr>
+        </p:nvSpPr>
+        <p:spPr/>
+        <p:txBody>
+          <a:bodyPr/>
+          <a:lstStyle/>
+          <a:p>
+            <a:r>
+              <a:rPr lang="en-US"/>
+              <a:t>Speedup Concept</a:t>
+            </a:r>
+          </a:p>
+        </p:txBody>
+      </p:sp>
+      <p:pic>
+        <p:nvPicPr>
+          <p:cNvPr id="5" name="Content Placeholder 4">
+            <a:extLst>
+              <a:ext uri="{FF2B5EF4-FFF2-40B4-BE49-F238E27FC236}">
+                <a16:creationId xmlns:a16="http://schemas.microsoft.com/office/drawing/2014/main" id="{A95C5826-1816-6A55-9BE7-F70077964440}"/>
+              </a:ext>
+            </a:extLst>
+          </p:cNvPr>
+          <p:cNvPicPr>
+            <a:picLocks noGrp="1" noChangeAspect="1"/>
+          </p:cNvPicPr>
+          <p:nvPr>
+            <p:ph idx="1"/>
+          </p:nvPr>
+        </p:nvPicPr>
+        <p:blipFill>
+          <a:blip r:embed="rId2"/>
+          <a:stretch>
+            <a:fillRect/>
+          </a:stretch>
+        </p:blipFill>
+        <p:spPr>
+          <a:xfrm>
+            <a:off x="3015703" y="1706563"/>
+            <a:ext cx="5606556" cy="4991100"/>
+          </a:xfrm>
+        </p:spPr>
+      </p:pic>
+    </p:spTree>
+    <p:extLst>
+      <p:ext uri="{BB962C8B-B14F-4D97-AF65-F5344CB8AC3E}">
+        <p14:creationId xmlns:p14="http://schemas.microsoft.com/office/powerpoint/2010/main" val="3902878762"/>
+      </p:ext>
+    </p:extLst>
+  </p:cSld>
+  <p:clrMapOvr>
+    <a:masterClrMapping/>
+  </p:clrMapOvr>
+</p:sld>
+</file>
+
+<file path=ppt/slides/slide30.xml><?xml version="1.0" encoding="utf-8"?>
 <p:sld xmlns:a="http://schemas.openxmlformats.org/drawingml/2006/main" xmlns:r="http://schemas.openxmlformats.org/officeDocument/2006/relationships" xmlns:p="http://schemas.openxmlformats.org/presentationml/2006/main">
   <p:cSld>
     <p:spTree>
@@ -23465,7 +25661,7 @@
 </p:sld>
 </file>
 
-<file path=ppt/slides/slide25.xml><?xml version="1.0" encoding="utf-8"?>
+<file path=ppt/slides/slide31.xml><?xml version="1.0" encoding="utf-8"?>
 <p:sld xmlns:a="http://schemas.openxmlformats.org/drawingml/2006/main" xmlns:r="http://schemas.openxmlformats.org/officeDocument/2006/relationships" xmlns:p="http://schemas.openxmlformats.org/presentationml/2006/main">
   <p:cSld>
     <p:spTree>
@@ -25617,7 +27813,7 @@
 </p:sld>
 </file>
 
-<file path=ppt/slides/slide26.xml><?xml version="1.0" encoding="utf-8"?>
+<file path=ppt/slides/slide32.xml><?xml version="1.0" encoding="utf-8"?>
 <p:sld xmlns:a="http://schemas.openxmlformats.org/drawingml/2006/main" xmlns:r="http://schemas.openxmlformats.org/officeDocument/2006/relationships" xmlns:p="http://schemas.openxmlformats.org/presentationml/2006/main">
   <p:cSld>
     <p:spTree>
@@ -28462,7 +30658,7 @@
 </p:sld>
 </file>
 
-<file path=ppt/slides/slide27.xml><?xml version="1.0" encoding="utf-8"?>
+<file path=ppt/slides/slide33.xml><?xml version="1.0" encoding="utf-8"?>
 <p:sld xmlns:a="http://schemas.openxmlformats.org/drawingml/2006/main" xmlns:r="http://schemas.openxmlformats.org/officeDocument/2006/relationships" xmlns:p="http://schemas.openxmlformats.org/presentationml/2006/main">
   <p:cSld>
     <p:spTree>
@@ -28549,7 +30745,7 @@
 </p:sld>
 </file>
 
-<file path=ppt/slides/slide28.xml><?xml version="1.0" encoding="utf-8"?>
+<file path=ppt/slides/slide34.xml><?xml version="1.0" encoding="utf-8"?>
 <p:sld xmlns:a="http://schemas.openxmlformats.org/drawingml/2006/main" xmlns:r="http://schemas.openxmlformats.org/officeDocument/2006/relationships" xmlns:p="http://schemas.openxmlformats.org/presentationml/2006/main">
   <p:cSld>
     <p:spTree>
@@ -29331,7 +31527,7 @@
 </p:sld>
 </file>
 
-<file path=ppt/slides/slide29.xml><?xml version="1.0" encoding="utf-8"?>
+<file path=ppt/slides/slide35.xml><?xml version="1.0" encoding="utf-8"?>
 <p:sld xmlns:a="http://schemas.openxmlformats.org/drawingml/2006/main" xmlns:r="http://schemas.openxmlformats.org/officeDocument/2006/relationships" xmlns:p="http://schemas.openxmlformats.org/presentationml/2006/main">
   <p:cSld>
     <p:spTree>
@@ -30169,94 +32365,7 @@
 </p:sld>
 </file>
 
-<file path=ppt/slides/slide3.xml><?xml version="1.0" encoding="utf-8"?>
-<p:sld xmlns:a="http://schemas.openxmlformats.org/drawingml/2006/main" xmlns:r="http://schemas.openxmlformats.org/officeDocument/2006/relationships" xmlns:p="http://schemas.openxmlformats.org/presentationml/2006/main">
-  <p:cSld>
-    <p:spTree>
-      <p:nvGrpSpPr>
-        <p:cNvPr id="1" name=""/>
-        <p:cNvGrpSpPr/>
-        <p:nvPr/>
-      </p:nvGrpSpPr>
-      <p:grpSpPr>
-        <a:xfrm>
-          <a:off x="0" y="0"/>
-          <a:ext cx="0" cy="0"/>
-          <a:chOff x="0" y="0"/>
-          <a:chExt cx="0" cy="0"/>
-        </a:xfrm>
-      </p:grpSpPr>
-      <p:sp>
-        <p:nvSpPr>
-          <p:cNvPr id="2" name="Title 1">
-            <a:extLst>
-              <a:ext uri="{FF2B5EF4-FFF2-40B4-BE49-F238E27FC236}">
-                <a16:creationId xmlns:a16="http://schemas.microsoft.com/office/drawing/2014/main" id="{28AF675C-3963-4D6A-1306-49A13120C036}"/>
-              </a:ext>
-            </a:extLst>
-          </p:cNvPr>
-          <p:cNvSpPr>
-            <a:spLocks noGrp="1"/>
-          </p:cNvSpPr>
-          <p:nvPr>
-            <p:ph type="title"/>
-          </p:nvPr>
-        </p:nvSpPr>
-        <p:spPr/>
-        <p:txBody>
-          <a:bodyPr/>
-          <a:lstStyle/>
-          <a:p>
-            <a:r>
-              <a:rPr lang="en-US"/>
-              <a:t>Speedup Concept</a:t>
-            </a:r>
-          </a:p>
-        </p:txBody>
-      </p:sp>
-      <p:pic>
-        <p:nvPicPr>
-          <p:cNvPr id="5" name="Content Placeholder 4">
-            <a:extLst>
-              <a:ext uri="{FF2B5EF4-FFF2-40B4-BE49-F238E27FC236}">
-                <a16:creationId xmlns:a16="http://schemas.microsoft.com/office/drawing/2014/main" id="{A95C5826-1816-6A55-9BE7-F70077964440}"/>
-              </a:ext>
-            </a:extLst>
-          </p:cNvPr>
-          <p:cNvPicPr>
-            <a:picLocks noGrp="1" noChangeAspect="1"/>
-          </p:cNvPicPr>
-          <p:nvPr>
-            <p:ph idx="1"/>
-          </p:nvPr>
-        </p:nvPicPr>
-        <p:blipFill>
-          <a:blip r:embed="rId2"/>
-          <a:stretch>
-            <a:fillRect/>
-          </a:stretch>
-        </p:blipFill>
-        <p:spPr>
-          <a:xfrm>
-            <a:off x="3015703" y="1706563"/>
-            <a:ext cx="5606556" cy="4991100"/>
-          </a:xfrm>
-        </p:spPr>
-      </p:pic>
-    </p:spTree>
-    <p:extLst>
-      <p:ext uri="{BB962C8B-B14F-4D97-AF65-F5344CB8AC3E}">
-        <p14:creationId xmlns:p14="http://schemas.microsoft.com/office/powerpoint/2010/main" val="3902878762"/>
-      </p:ext>
-    </p:extLst>
-  </p:cSld>
-  <p:clrMapOvr>
-    <a:masterClrMapping/>
-  </p:clrMapOvr>
-</p:sld>
-</file>
-
-<file path=ppt/slides/slide30.xml><?xml version="1.0" encoding="utf-8"?>
+<file path=ppt/slides/slide36.xml><?xml version="1.0" encoding="utf-8"?>
 <p:sld xmlns:a="http://schemas.openxmlformats.org/drawingml/2006/main" xmlns:r="http://schemas.openxmlformats.org/officeDocument/2006/relationships" xmlns:p="http://schemas.openxmlformats.org/presentationml/2006/main">
   <p:cSld>
     <p:spTree>
@@ -30343,7 +32452,7 @@
 </p:sld>
 </file>
 
-<file path=ppt/slides/slide31.xml><?xml version="1.0" encoding="utf-8"?>
+<file path=ppt/slides/slide37.xml><?xml version="1.0" encoding="utf-8"?>
 <p:sld xmlns:a="http://schemas.openxmlformats.org/drawingml/2006/main" xmlns:r="http://schemas.openxmlformats.org/officeDocument/2006/relationships" xmlns:p="http://schemas.openxmlformats.org/presentationml/2006/main">
   <p:cSld>
     <p:spTree>
@@ -30652,7 +32761,7 @@
 </p:sld>
 </file>
 
-<file path=ppt/slides/slide32.xml><?xml version="1.0" encoding="utf-8"?>
+<file path=ppt/slides/slide38.xml><?xml version="1.0" encoding="utf-8"?>
 <p:sld xmlns:a="http://schemas.openxmlformats.org/drawingml/2006/main" xmlns:r="http://schemas.openxmlformats.org/officeDocument/2006/relationships" xmlns:p="http://schemas.openxmlformats.org/presentationml/2006/main">
   <p:cSld>
     <p:spTree>

--- a/Lecture Notes/Section 2 - Introduction to Hadoop Eco System/2-Introduction to Hadoop Eco System.pptx
+++ b/Lecture Notes/Section 2 - Introduction to Hadoop Eco System/2-Introduction to Hadoop Eco System.pptx
@@ -5,7 +5,7 @@
     <p:sldMasterId id="2147483648" r:id="rId1"/>
   </p:sldMasterIdLst>
   <p:notesMasterIdLst>
-    <p:notesMasterId r:id="rId40"/>
+    <p:notesMasterId r:id="rId37"/>
   </p:notesMasterIdLst>
   <p:sldIdLst>
     <p:sldId id="256" r:id="rId2"/>
@@ -31,21 +31,18 @@
     <p:sldId id="330" r:id="rId22"/>
     <p:sldId id="278" r:id="rId23"/>
     <p:sldId id="336" r:id="rId24"/>
-    <p:sldId id="337" r:id="rId25"/>
-    <p:sldId id="338" r:id="rId26"/>
-    <p:sldId id="339" r:id="rId27"/>
-    <p:sldId id="340" r:id="rId28"/>
-    <p:sldId id="341" r:id="rId29"/>
-    <p:sldId id="342" r:id="rId30"/>
-    <p:sldId id="280" r:id="rId31"/>
-    <p:sldId id="281" r:id="rId32"/>
-    <p:sldId id="282" r:id="rId33"/>
-    <p:sldId id="325" r:id="rId34"/>
-    <p:sldId id="323" r:id="rId35"/>
-    <p:sldId id="324" r:id="rId36"/>
-    <p:sldId id="334" r:id="rId37"/>
-    <p:sldId id="332" r:id="rId38"/>
-    <p:sldId id="333" r:id="rId39"/>
+    <p:sldId id="345" r:id="rId25"/>
+    <p:sldId id="343" r:id="rId26"/>
+    <p:sldId id="337" r:id="rId27"/>
+    <p:sldId id="280" r:id="rId28"/>
+    <p:sldId id="281" r:id="rId29"/>
+    <p:sldId id="282" r:id="rId30"/>
+    <p:sldId id="325" r:id="rId31"/>
+    <p:sldId id="323" r:id="rId32"/>
+    <p:sldId id="324" r:id="rId33"/>
+    <p:sldId id="334" r:id="rId34"/>
+    <p:sldId id="332" r:id="rId35"/>
+    <p:sldId id="333" r:id="rId36"/>
   </p:sldIdLst>
   <p:sldSz cx="12192000" cy="6858000"/>
   <p:notesSz cx="6858000" cy="9144000"/>
@@ -2488,11 +2485,58 @@
   </pc:docChgLst>
   <pc:docChgLst>
     <pc:chgData name="Mohammed Fasha" userId="cc64f42d-a1a6-4f08-b97b-0c37f877119f" providerId="ADAL" clId="{E3189476-60BF-4BD3-A575-175D5A28A69C}"/>
-    <pc:docChg chg="undo custSel addSld delSld modSld">
-      <pc:chgData name="Mohammed Fasha" userId="cc64f42d-a1a6-4f08-b97b-0c37f877119f" providerId="ADAL" clId="{E3189476-60BF-4BD3-A575-175D5A28A69C}" dt="2025-03-25T08:19:09.380" v="122" actId="113"/>
+    <pc:docChg chg="undo custSel addSld delSld modSld sldOrd">
+      <pc:chgData name="Mohammed Fasha" userId="cc64f42d-a1a6-4f08-b97b-0c37f877119f" providerId="ADAL" clId="{E3189476-60BF-4BD3-A575-175D5A28A69C}" dt="2025-03-26T09:13:05.669" v="394" actId="1076"/>
       <pc:docMkLst>
         <pc:docMk/>
       </pc:docMkLst>
+      <pc:sldChg chg="addSp delSp modSp mod">
+        <pc:chgData name="Mohammed Fasha" userId="cc64f42d-a1a6-4f08-b97b-0c37f877119f" providerId="ADAL" clId="{E3189476-60BF-4BD3-A575-175D5A28A69C}" dt="2025-03-26T08:04:30.144" v="309" actId="27636"/>
+        <pc:sldMkLst>
+          <pc:docMk/>
+          <pc:sldMk cId="2158520731" sldId="321"/>
+        </pc:sldMkLst>
+        <pc:spChg chg="mod">
+          <ac:chgData name="Mohammed Fasha" userId="cc64f42d-a1a6-4f08-b97b-0c37f877119f" providerId="ADAL" clId="{E3189476-60BF-4BD3-A575-175D5A28A69C}" dt="2025-03-26T08:04:30.144" v="309" actId="27636"/>
+          <ac:spMkLst>
+            <pc:docMk/>
+            <pc:sldMk cId="2158520731" sldId="321"/>
+            <ac:spMk id="4" creationId="{962C54D2-6C6B-4D18-91FD-386C4A4E72B9}"/>
+          </ac:spMkLst>
+        </pc:spChg>
+        <pc:spChg chg="add mod">
+          <ac:chgData name="Mohammed Fasha" userId="cc64f42d-a1a6-4f08-b97b-0c37f877119f" providerId="ADAL" clId="{E3189476-60BF-4BD3-A575-175D5A28A69C}" dt="2025-03-26T08:04:23.779" v="306" actId="1076"/>
+          <ac:spMkLst>
+            <pc:docMk/>
+            <pc:sldMk cId="2158520731" sldId="321"/>
+            <ac:spMk id="8" creationId="{9DCBA9F6-7422-4C0E-BF70-568EFB72FA3F}"/>
+          </ac:spMkLst>
+        </pc:spChg>
+        <pc:graphicFrameChg chg="mod modGraphic">
+          <ac:chgData name="Mohammed Fasha" userId="cc64f42d-a1a6-4f08-b97b-0c37f877119f" providerId="ADAL" clId="{E3189476-60BF-4BD3-A575-175D5A28A69C}" dt="2025-03-26T08:02:08.532" v="277" actId="20577"/>
+          <ac:graphicFrameMkLst>
+            <pc:docMk/>
+            <pc:sldMk cId="2158520731" sldId="321"/>
+            <ac:graphicFrameMk id="9" creationId="{2DD0168C-4AA5-A3AD-EC68-9F3DAD099B7C}"/>
+          </ac:graphicFrameMkLst>
+        </pc:graphicFrameChg>
+        <pc:graphicFrameChg chg="add del">
+          <ac:chgData name="Mohammed Fasha" userId="cc64f42d-a1a6-4f08-b97b-0c37f877119f" providerId="ADAL" clId="{E3189476-60BF-4BD3-A575-175D5A28A69C}" dt="2025-03-26T08:02:19.134" v="280" actId="21"/>
+          <ac:graphicFrameMkLst>
+            <pc:docMk/>
+            <pc:sldMk cId="2158520731" sldId="321"/>
+            <ac:graphicFrameMk id="13" creationId="{16C5CEE9-CAE7-15B6-CD99-242FA0B68E48}"/>
+          </ac:graphicFrameMkLst>
+        </pc:graphicFrameChg>
+        <pc:graphicFrameChg chg="mod">
+          <ac:chgData name="Mohammed Fasha" userId="cc64f42d-a1a6-4f08-b97b-0c37f877119f" providerId="ADAL" clId="{E3189476-60BF-4BD3-A575-175D5A28A69C}" dt="2025-03-26T08:02:14.434" v="278" actId="1076"/>
+          <ac:graphicFrameMkLst>
+            <pc:docMk/>
+            <pc:sldMk cId="2158520731" sldId="321"/>
+            <ac:graphicFrameMk id="14" creationId="{68F65CD9-04AE-694C-CAF9-ABB6912D588B}"/>
+          </ac:graphicFrameMkLst>
+        </pc:graphicFrameChg>
+      </pc:sldChg>
       <pc:sldChg chg="modSp del mod">
         <pc:chgData name="Mohammed Fasha" userId="cc64f42d-a1a6-4f08-b97b-0c37f877119f" providerId="ADAL" clId="{E3189476-60BF-4BD3-A575-175D5A28A69C}" dt="2025-03-25T08:17:30.655" v="70" actId="2696"/>
         <pc:sldMkLst>
@@ -2522,6 +2566,37 @@
             <ac:spMk id="2" creationId="{10F94810-6956-B8FE-E0F1-548F2181FEA5}"/>
           </ac:spMkLst>
         </pc:spChg>
+      </pc:sldChg>
+      <pc:sldChg chg="modSp mod">
+        <pc:chgData name="Mohammed Fasha" userId="cc64f42d-a1a6-4f08-b97b-0c37f877119f" providerId="ADAL" clId="{E3189476-60BF-4BD3-A575-175D5A28A69C}" dt="2025-03-26T08:05:04.940" v="317" actId="20577"/>
+        <pc:sldMkLst>
+          <pc:docMk/>
+          <pc:sldMk cId="4251754830" sldId="335"/>
+        </pc:sldMkLst>
+        <pc:spChg chg="mod">
+          <ac:chgData name="Mohammed Fasha" userId="cc64f42d-a1a6-4f08-b97b-0c37f877119f" providerId="ADAL" clId="{E3189476-60BF-4BD3-A575-175D5A28A69C}" dt="2025-03-26T08:05:04.940" v="317" actId="20577"/>
+          <ac:spMkLst>
+            <pc:docMk/>
+            <pc:sldMk cId="4251754830" sldId="335"/>
+            <ac:spMk id="2" creationId="{880BEA05-F32B-B175-AA7B-47CBCB32C4E0}"/>
+          </ac:spMkLst>
+        </pc:spChg>
+        <pc:spChg chg="mod">
+          <ac:chgData name="Mohammed Fasha" userId="cc64f42d-a1a6-4f08-b97b-0c37f877119f" providerId="ADAL" clId="{E3189476-60BF-4BD3-A575-175D5A28A69C}" dt="2025-03-26T08:04:57.617" v="312" actId="21"/>
+          <ac:spMkLst>
+            <pc:docMk/>
+            <pc:sldMk cId="4251754830" sldId="335"/>
+            <ac:spMk id="3" creationId="{1821722D-3CE7-874F-C927-A9A7BB997821}"/>
+          </ac:spMkLst>
+        </pc:spChg>
+        <pc:picChg chg="mod">
+          <ac:chgData name="Mohammed Fasha" userId="cc64f42d-a1a6-4f08-b97b-0c37f877119f" providerId="ADAL" clId="{E3189476-60BF-4BD3-A575-175D5A28A69C}" dt="2025-03-26T08:04:43.016" v="311" actId="1076"/>
+          <ac:picMkLst>
+            <pc:docMk/>
+            <pc:sldMk cId="4251754830" sldId="335"/>
+            <ac:picMk id="4" creationId="{24975023-F336-E81B-3410-B0E86A42F3E0}"/>
+          </ac:picMkLst>
+        </pc:picChg>
       </pc:sldChg>
       <pc:sldChg chg="addSp delSp modSp new del mod">
         <pc:chgData name="Mohammed Fasha" userId="cc64f42d-a1a6-4f08-b97b-0c37f877119f" providerId="ADAL" clId="{E3189476-60BF-4BD3-A575-175D5A28A69C}" dt="2025-03-25T08:16:02.768" v="51" actId="680"/>
@@ -2675,25 +2750,33 @@
         </pc:spChg>
       </pc:sldChg>
       <pc:sldChg chg="addSp delSp modSp new mod">
-        <pc:chgData name="Mohammed Fasha" userId="cc64f42d-a1a6-4f08-b97b-0c37f877119f" providerId="ADAL" clId="{E3189476-60BF-4BD3-A575-175D5A28A69C}" dt="2025-03-25T08:17:23.900" v="64" actId="5793"/>
+        <pc:chgData name="Mohammed Fasha" userId="cc64f42d-a1a6-4f08-b97b-0c37f877119f" providerId="ADAL" clId="{E3189476-60BF-4BD3-A575-175D5A28A69C}" dt="2025-03-26T09:12:12.290" v="378" actId="2711"/>
         <pc:sldMkLst>
           <pc:docMk/>
           <pc:sldMk cId="2914298022" sldId="336"/>
         </pc:sldMkLst>
         <pc:spChg chg="mod">
-          <ac:chgData name="Mohammed Fasha" userId="cc64f42d-a1a6-4f08-b97b-0c37f877119f" providerId="ADAL" clId="{E3189476-60BF-4BD3-A575-175D5A28A69C}" dt="2025-03-25T08:17:21.981" v="63" actId="113"/>
+          <ac:chgData name="Mohammed Fasha" userId="cc64f42d-a1a6-4f08-b97b-0c37f877119f" providerId="ADAL" clId="{E3189476-60BF-4BD3-A575-175D5A28A69C}" dt="2025-03-26T09:06:53.805" v="318"/>
           <ac:spMkLst>
             <pc:docMk/>
             <pc:sldMk cId="2914298022" sldId="336"/>
             <ac:spMk id="2" creationId="{B9530C9F-C77E-4AB9-8B37-B395A98C43EF}"/>
           </ac:spMkLst>
         </pc:spChg>
-        <pc:spChg chg="mod">
-          <ac:chgData name="Mohammed Fasha" userId="cc64f42d-a1a6-4f08-b97b-0c37f877119f" providerId="ADAL" clId="{E3189476-60BF-4BD3-A575-175D5A28A69C}" dt="2025-03-25T08:17:23.900" v="64" actId="5793"/>
+        <pc:spChg chg="add del mod">
+          <ac:chgData name="Mohammed Fasha" userId="cc64f42d-a1a6-4f08-b97b-0c37f877119f" providerId="ADAL" clId="{E3189476-60BF-4BD3-A575-175D5A28A69C}" dt="2025-03-26T09:12:12.290" v="378" actId="2711"/>
           <ac:spMkLst>
             <pc:docMk/>
             <pc:sldMk cId="2914298022" sldId="336"/>
             <ac:spMk id="3" creationId="{01C6437A-A221-4888-A133-89AFA711B850}"/>
+          </ac:spMkLst>
+        </pc:spChg>
+        <pc:spChg chg="add del mod">
+          <ac:chgData name="Mohammed Fasha" userId="cc64f42d-a1a6-4f08-b97b-0c37f877119f" providerId="ADAL" clId="{E3189476-60BF-4BD3-A575-175D5A28A69C}" dt="2025-03-26T09:07:03.048" v="321"/>
+          <ac:spMkLst>
+            <pc:docMk/>
+            <pc:sldMk cId="2914298022" sldId="336"/>
+            <ac:spMk id="4" creationId="{8FD2BB68-7B7C-4FBF-9467-57298C7D0EF7}"/>
           </ac:spMkLst>
         </pc:spChg>
         <pc:spChg chg="add del">
@@ -2705,11 +2788,27 @@
           </ac:spMkLst>
         </pc:spChg>
         <pc:spChg chg="add del">
+          <ac:chgData name="Mohammed Fasha" userId="cc64f42d-a1a6-4f08-b97b-0c37f877119f" providerId="ADAL" clId="{E3189476-60BF-4BD3-A575-175D5A28A69C}" dt="2025-03-26T09:07:11.327" v="323"/>
+          <ac:spMkLst>
+            <pc:docMk/>
+            <pc:sldMk cId="2914298022" sldId="336"/>
+            <ac:spMk id="5" creationId="{20B1FDF5-220F-438C-BB22-391EC4A5704D}"/>
+          </ac:spMkLst>
+        </pc:spChg>
+        <pc:spChg chg="add del">
           <ac:chgData name="Mohammed Fasha" userId="cc64f42d-a1a6-4f08-b97b-0c37f877119f" providerId="ADAL" clId="{E3189476-60BF-4BD3-A575-175D5A28A69C}" dt="2025-03-25T08:17:05.614" v="56"/>
           <ac:spMkLst>
             <pc:docMk/>
             <pc:sldMk cId="2914298022" sldId="336"/>
             <ac:spMk id="5" creationId="{D6848362-5930-4B9A-A7DD-FE9E006BB95A}"/>
+          </ac:spMkLst>
+        </pc:spChg>
+        <pc:spChg chg="add del mod">
+          <ac:chgData name="Mohammed Fasha" userId="cc64f42d-a1a6-4f08-b97b-0c37f877119f" providerId="ADAL" clId="{E3189476-60BF-4BD3-A575-175D5A28A69C}" dt="2025-03-26T09:07:16.773" v="326"/>
+          <ac:spMkLst>
+            <pc:docMk/>
+            <pc:sldMk cId="2914298022" sldId="336"/>
+            <ac:spMk id="6" creationId="{A50EA1FE-26DF-48ED-9B79-26A31E9ED2DB}"/>
           </ac:spMkLst>
         </pc:spChg>
         <pc:spChg chg="add del">
@@ -2744,8 +2843,8 @@
           </ac:spMkLst>
         </pc:spChg>
       </pc:sldChg>
-      <pc:sldChg chg="modSp add mod">
-        <pc:chgData name="Mohammed Fasha" userId="cc64f42d-a1a6-4f08-b97b-0c37f877119f" providerId="ADAL" clId="{E3189476-60BF-4BD3-A575-175D5A28A69C}" dt="2025-03-25T08:18:04.425" v="87" actId="113"/>
+      <pc:sldChg chg="modSp add del mod">
+        <pc:chgData name="Mohammed Fasha" userId="cc64f42d-a1a6-4f08-b97b-0c37f877119f" providerId="ADAL" clId="{E3189476-60BF-4BD3-A575-175D5A28A69C}" dt="2025-03-26T09:12:55.746" v="388" actId="47"/>
         <pc:sldMkLst>
           <pc:docMk/>
           <pc:sldMk cId="59626595" sldId="338"/>
@@ -2767,8 +2866,8 @@
           </ac:spMkLst>
         </pc:spChg>
       </pc:sldChg>
-      <pc:sldChg chg="modSp add mod">
-        <pc:chgData name="Mohammed Fasha" userId="cc64f42d-a1a6-4f08-b97b-0c37f877119f" providerId="ADAL" clId="{E3189476-60BF-4BD3-A575-175D5A28A69C}" dt="2025-03-25T08:18:16.987" v="95" actId="113"/>
+      <pc:sldChg chg="modSp add del mod">
+        <pc:chgData name="Mohammed Fasha" userId="cc64f42d-a1a6-4f08-b97b-0c37f877119f" providerId="ADAL" clId="{E3189476-60BF-4BD3-A575-175D5A28A69C}" dt="2025-03-26T09:12:56.404" v="389" actId="47"/>
         <pc:sldMkLst>
           <pc:docMk/>
           <pc:sldMk cId="4067745355" sldId="339"/>
@@ -2790,8 +2889,8 @@
           </ac:spMkLst>
         </pc:spChg>
       </pc:sldChg>
-      <pc:sldChg chg="modSp add mod">
-        <pc:chgData name="Mohammed Fasha" userId="cc64f42d-a1a6-4f08-b97b-0c37f877119f" providerId="ADAL" clId="{E3189476-60BF-4BD3-A575-175D5A28A69C}" dt="2025-03-25T08:18:50.621" v="111" actId="113"/>
+      <pc:sldChg chg="modSp add del mod">
+        <pc:chgData name="Mohammed Fasha" userId="cc64f42d-a1a6-4f08-b97b-0c37f877119f" providerId="ADAL" clId="{E3189476-60BF-4BD3-A575-175D5A28A69C}" dt="2025-03-26T09:12:57.123" v="390" actId="47"/>
         <pc:sldMkLst>
           <pc:docMk/>
           <pc:sldMk cId="2996144740" sldId="340"/>
@@ -2813,8 +2912,8 @@
           </ac:spMkLst>
         </pc:spChg>
       </pc:sldChg>
-      <pc:sldChg chg="modSp add mod">
-        <pc:chgData name="Mohammed Fasha" userId="cc64f42d-a1a6-4f08-b97b-0c37f877119f" providerId="ADAL" clId="{E3189476-60BF-4BD3-A575-175D5A28A69C}" dt="2025-03-25T08:18:55.064" v="113" actId="113"/>
+      <pc:sldChg chg="modSp add del mod">
+        <pc:chgData name="Mohammed Fasha" userId="cc64f42d-a1a6-4f08-b97b-0c37f877119f" providerId="ADAL" clId="{E3189476-60BF-4BD3-A575-175D5A28A69C}" dt="2025-03-26T09:12:57.767" v="391" actId="47"/>
         <pc:sldMkLst>
           <pc:docMk/>
           <pc:sldMk cId="1106511272" sldId="341"/>
@@ -2836,8 +2935,8 @@
           </ac:spMkLst>
         </pc:spChg>
       </pc:sldChg>
-      <pc:sldChg chg="modSp new mod">
-        <pc:chgData name="Mohammed Fasha" userId="cc64f42d-a1a6-4f08-b97b-0c37f877119f" providerId="ADAL" clId="{E3189476-60BF-4BD3-A575-175D5A28A69C}" dt="2025-03-25T08:19:09.380" v="122" actId="113"/>
+      <pc:sldChg chg="modSp new del mod">
+        <pc:chgData name="Mohammed Fasha" userId="cc64f42d-a1a6-4f08-b97b-0c37f877119f" providerId="ADAL" clId="{E3189476-60BF-4BD3-A575-175D5A28A69C}" dt="2025-03-26T09:12:59.198" v="392" actId="47"/>
         <pc:sldMkLst>
           <pc:docMk/>
           <pc:sldMk cId="3443736079" sldId="342"/>
@@ -2858,6 +2957,90 @@
             <ac:spMk id="3" creationId="{EF97ED4C-AFE0-4A6F-9D86-C36C1AF0CC9B}"/>
           </ac:spMkLst>
         </pc:spChg>
+      </pc:sldChg>
+      <pc:sldChg chg="addSp delSp modSp new mod">
+        <pc:chgData name="Mohammed Fasha" userId="cc64f42d-a1a6-4f08-b97b-0c37f877119f" providerId="ADAL" clId="{E3189476-60BF-4BD3-A575-175D5A28A69C}" dt="2025-03-26T09:13:05.669" v="394" actId="1076"/>
+        <pc:sldMkLst>
+          <pc:docMk/>
+          <pc:sldMk cId="78335346" sldId="343"/>
+        </pc:sldMkLst>
+        <pc:spChg chg="mod">
+          <ac:chgData name="Mohammed Fasha" userId="cc64f42d-a1a6-4f08-b97b-0c37f877119f" providerId="ADAL" clId="{E3189476-60BF-4BD3-A575-175D5A28A69C}" dt="2025-03-26T09:12:43.779" v="386"/>
+          <ac:spMkLst>
+            <pc:docMk/>
+            <pc:sldMk cId="78335346" sldId="343"/>
+            <ac:spMk id="2" creationId="{A2B633F3-47B3-426F-BE46-842E0F7F5E3A}"/>
+          </ac:spMkLst>
+        </pc:spChg>
+        <pc:spChg chg="del">
+          <ac:chgData name="Mohammed Fasha" userId="cc64f42d-a1a6-4f08-b97b-0c37f877119f" providerId="ADAL" clId="{E3189476-60BF-4BD3-A575-175D5A28A69C}" dt="2025-03-26T09:09:09.858" v="355" actId="22"/>
+          <ac:spMkLst>
+            <pc:docMk/>
+            <pc:sldMk cId="78335346" sldId="343"/>
+            <ac:spMk id="3" creationId="{51081A64-5F6E-41C6-94F6-97332153855B}"/>
+          </ac:spMkLst>
+        </pc:spChg>
+        <pc:spChg chg="add mod">
+          <ac:chgData name="Mohammed Fasha" userId="cc64f42d-a1a6-4f08-b97b-0c37f877119f" providerId="ADAL" clId="{E3189476-60BF-4BD3-A575-175D5A28A69C}" dt="2025-03-26T09:12:32.050" v="383" actId="1076"/>
+          <ac:spMkLst>
+            <pc:docMk/>
+            <pc:sldMk cId="78335346" sldId="343"/>
+            <ac:spMk id="6" creationId="{F7895303-AE5C-409C-83B7-CA9C3754FA14}"/>
+          </ac:spMkLst>
+        </pc:spChg>
+        <pc:spChg chg="add mod">
+          <ac:chgData name="Mohammed Fasha" userId="cc64f42d-a1a6-4f08-b97b-0c37f877119f" providerId="ADAL" clId="{E3189476-60BF-4BD3-A575-175D5A28A69C}" dt="2025-03-26T09:12:35.100" v="385" actId="113"/>
+          <ac:spMkLst>
+            <pc:docMk/>
+            <pc:sldMk cId="78335346" sldId="343"/>
+            <ac:spMk id="8" creationId="{6937C874-4F20-4FF7-8AA0-5588E59D195C}"/>
+          </ac:spMkLst>
+        </pc:spChg>
+        <pc:picChg chg="add mod ord">
+          <ac:chgData name="Mohammed Fasha" userId="cc64f42d-a1a6-4f08-b97b-0c37f877119f" providerId="ADAL" clId="{E3189476-60BF-4BD3-A575-175D5A28A69C}" dt="2025-03-26T09:13:05.669" v="394" actId="1076"/>
+          <ac:picMkLst>
+            <pc:docMk/>
+            <pc:sldMk cId="78335346" sldId="343"/>
+            <ac:picMk id="5" creationId="{C9570D6B-F492-4FA9-B1F1-9F5BA695E882}"/>
+          </ac:picMkLst>
+        </pc:picChg>
+      </pc:sldChg>
+      <pc:sldChg chg="add del">
+        <pc:chgData name="Mohammed Fasha" userId="cc64f42d-a1a6-4f08-b97b-0c37f877119f" providerId="ADAL" clId="{E3189476-60BF-4BD3-A575-175D5A28A69C}" dt="2025-03-26T08:03:08.852" v="301" actId="47"/>
+        <pc:sldMkLst>
+          <pc:docMk/>
+          <pc:sldMk cId="1722615342" sldId="343"/>
+        </pc:sldMkLst>
+      </pc:sldChg>
+      <pc:sldChg chg="add del">
+        <pc:chgData name="Mohammed Fasha" userId="cc64f42d-a1a6-4f08-b97b-0c37f877119f" providerId="ADAL" clId="{E3189476-60BF-4BD3-A575-175D5A28A69C}" dt="2025-03-26T09:12:51.690" v="387" actId="47"/>
+        <pc:sldMkLst>
+          <pc:docMk/>
+          <pc:sldMk cId="3749953585" sldId="344"/>
+        </pc:sldMkLst>
+      </pc:sldChg>
+      <pc:sldChg chg="addSp delSp modSp add mod ord">
+        <pc:chgData name="Mohammed Fasha" userId="cc64f42d-a1a6-4f08-b97b-0c37f877119f" providerId="ADAL" clId="{E3189476-60BF-4BD3-A575-175D5A28A69C}" dt="2025-03-26T09:09:07.191" v="354"/>
+        <pc:sldMkLst>
+          <pc:docMk/>
+          <pc:sldMk cId="1605944735" sldId="345"/>
+        </pc:sldMkLst>
+        <pc:spChg chg="del">
+          <ac:chgData name="Mohammed Fasha" userId="cc64f42d-a1a6-4f08-b97b-0c37f877119f" providerId="ADAL" clId="{E3189476-60BF-4BD3-A575-175D5A28A69C}" dt="2025-03-26T09:08:21.343" v="336"/>
+          <ac:spMkLst>
+            <pc:docMk/>
+            <pc:sldMk cId="1605944735" sldId="345"/>
+            <ac:spMk id="3" creationId="{51081A64-5F6E-41C6-94F6-97332153855B}"/>
+          </ac:spMkLst>
+        </pc:spChg>
+        <pc:graphicFrameChg chg="add mod modGraphic">
+          <ac:chgData name="Mohammed Fasha" userId="cc64f42d-a1a6-4f08-b97b-0c37f877119f" providerId="ADAL" clId="{E3189476-60BF-4BD3-A575-175D5A28A69C}" dt="2025-03-26T09:08:45.055" v="352" actId="12385"/>
+          <ac:graphicFrameMkLst>
+            <pc:docMk/>
+            <pc:sldMk cId="1605944735" sldId="345"/>
+            <ac:graphicFrameMk id="4" creationId="{9109CD38-3195-4D52-AD91-3766726C91AA}"/>
+          </ac:graphicFrameMkLst>
+        </pc:graphicFrameChg>
       </pc:sldChg>
     </pc:docChg>
   </pc:docChgLst>
@@ -13782,13 +13965,13 @@
           <p:nvPr>
             <p:extLst>
               <p:ext uri="{D42A27DB-BD31-4B8C-83A1-F6EECF244321}">
-                <p14:modId xmlns:p14="http://schemas.microsoft.com/office/powerpoint/2010/main" val="46418871"/>
+                <p14:modId xmlns:p14="http://schemas.microsoft.com/office/powerpoint/2010/main" val="802229249"/>
               </p:ext>
             </p:extLst>
           </p:nvPr>
         </p:nvGraphicFramePr>
         <p:xfrm>
-          <a:off x="215788" y="4508405"/>
+          <a:off x="284085" y="3426917"/>
           <a:ext cx="9730040" cy="1371600"/>
         </p:xfrm>
         <a:graphic>
@@ -14186,8 +14369,8 @@
         </p:nvSpPr>
         <p:spPr>
           <a:xfrm>
-            <a:off x="215788" y="3157373"/>
-            <a:ext cx="11002281" cy="1828403"/>
+            <a:off x="215786" y="2877290"/>
+            <a:ext cx="11002281" cy="362341"/>
           </a:xfrm>
           <a:prstGeom prst="rect">
             <a:avLst/>
@@ -14195,7 +14378,7 @@
         </p:spPr>
         <p:txBody>
           <a:bodyPr vert="horz" lIns="91440" tIns="45720" rIns="91440" bIns="45720" rtlCol="0" anchor="t">
-            <a:normAutofit/>
+            <a:normAutofit lnSpcReduction="10000"/>
           </a:bodyPr>
           <a:lstStyle>
             <a:lvl1pPr marL="228600" indent="-228600" algn="l" defTabSz="914400" rtl="0" eaLnBrk="1" latinLnBrk="0" hangingPunct="1">
@@ -14367,42 +14550,7 @@
                 <a:ea typeface="+mn-lt"/>
                 <a:cs typeface="+mn-lt"/>
               </a:rPr>
-              <a:t>We must </a:t>
-            </a:r>
-            <a:r>
-              <a:rPr lang="en-US" dirty="0">
-                <a:solidFill>
-                  <a:srgbClr val="FF0000"/>
-                </a:solidFill>
-                <a:ea typeface="+mn-lt"/>
-                <a:cs typeface="+mn-lt"/>
-              </a:rPr>
-              <a:t>comply with column families</a:t>
-            </a:r>
-            <a:r>
-              <a:rPr lang="en-US" dirty="0">
-                <a:ea typeface="+mn-lt"/>
-                <a:cs typeface="+mn-lt"/>
-              </a:rPr>
-              <a:t> when we insert data into the table.</a:t>
-            </a:r>
-          </a:p>
-          <a:p>
-            <a:r>
-              <a:rPr lang="en-US" dirty="0">
-                <a:ea typeface="+mn-lt"/>
-                <a:cs typeface="+mn-lt"/>
-              </a:rPr>
-              <a:t>Column families are employed for storage and fast retrieval – HBase is Column Oriented Database.</a:t>
-            </a:r>
-          </a:p>
-          <a:p>
-            <a:r>
-              <a:rPr lang="en-US" dirty="0">
-                <a:ea typeface="+mn-lt"/>
-                <a:cs typeface="+mn-lt"/>
-              </a:rPr>
-              <a:t>But we can use different column names within the column family e.g. </a:t>
+              <a:t>Then we insert values</a:t>
             </a:r>
           </a:p>
         </p:txBody>
@@ -14422,14 +14570,14 @@
           <p:nvPr>
             <p:extLst>
               <p:ext uri="{D42A27DB-BD31-4B8C-83A1-F6EECF244321}">
-                <p14:modId xmlns:p14="http://schemas.microsoft.com/office/powerpoint/2010/main" val="230050026"/>
+                <p14:modId xmlns:p14="http://schemas.microsoft.com/office/powerpoint/2010/main" val="4284871561"/>
               </p:ext>
             </p:extLst>
           </p:nvPr>
         </p:nvGraphicFramePr>
         <p:xfrm>
           <a:off x="284085" y="2371194"/>
-          <a:ext cx="9730040" cy="457200"/>
+          <a:ext cx="9730040" cy="378162"/>
         </p:xfrm>
         <a:graphic>
           <a:graphicData uri="http://schemas.openxmlformats.org/drawingml/2006/table">
@@ -14477,7 +14625,7 @@
                             <a:srgbClr val="000000"/>
                           </a:solidFill>
                         </a:rPr>
-                        <a:t>Create table ‘employee’, column family</a:t>
+                        <a:t>create 'employees', 'personal', 'job'</a:t>
                       </a:r>
                     </a:p>
                   </a:txBody>
@@ -14488,32 +14636,13 @@
                     <a:bodyPr/>
                     <a:lstStyle/>
                     <a:p>
-                      <a:pPr marL="0" marR="0" lvl="0" indent="0" algn="l">
-                        <a:lnSpc>
-                          <a:spcPct val="100000"/>
-                        </a:lnSpc>
-                        <a:spcBef>
-                          <a:spcPts val="0"/>
-                        </a:spcBef>
-                        <a:spcAft>
-                          <a:spcPts val="0"/>
-                        </a:spcAft>
+                      <a:pPr lvl="0">
                         <a:buNone/>
                       </a:pPr>
                       <a:r>
-                        <a:rPr lang="en-US" sz="1200" u="none" strike="noStrike" noProof="0" dirty="0">
-                          <a:solidFill>
-                            <a:srgbClr val="000000"/>
-                          </a:solidFill>
-                        </a:rPr>
-                        <a:t>emp3 has only salary in job, no personal column family</a:t>
+                        <a:rPr lang="en-US" sz="1200" dirty="0"/>
+                        <a:t>Create a table named employees with two families (personal and job)</a:t>
                       </a:r>
-                    </a:p>
-                    <a:p>
-                      <a:pPr lvl="0">
-                        <a:buNone/>
-                      </a:pPr>
-                      <a:endParaRPr lang="en-US" sz="1200" dirty="0"/>
                     </a:p>
                   </a:txBody>
                   <a:tcPr/>
@@ -14528,6 +14657,251 @@
           </a:graphicData>
         </a:graphic>
       </p:graphicFrame>
+      <p:sp>
+        <p:nvSpPr>
+          <p:cNvPr id="8" name="Content Placeholder 2">
+            <a:extLst>
+              <a:ext uri="{FF2B5EF4-FFF2-40B4-BE49-F238E27FC236}">
+                <a16:creationId xmlns:a16="http://schemas.microsoft.com/office/drawing/2014/main" id="{9DCBA9F6-7422-4C0E-BF70-568EFB72FA3F}"/>
+              </a:ext>
+            </a:extLst>
+          </p:cNvPr>
+          <p:cNvSpPr txBox="1">
+            <a:spLocks/>
+          </p:cNvSpPr>
+          <p:nvPr/>
+        </p:nvSpPr>
+        <p:spPr>
+          <a:xfrm>
+            <a:off x="215787" y="4985803"/>
+            <a:ext cx="11002281" cy="1094960"/>
+          </a:xfrm>
+          <a:prstGeom prst="rect">
+            <a:avLst/>
+          </a:prstGeom>
+        </p:spPr>
+        <p:txBody>
+          <a:bodyPr vert="horz" lIns="91440" tIns="45720" rIns="91440" bIns="45720" rtlCol="0" anchor="t">
+            <a:normAutofit/>
+          </a:bodyPr>
+          <a:lstStyle>
+            <a:lvl1pPr marL="228600" indent="-228600" algn="l" defTabSz="914400" rtl="0" eaLnBrk="1" latinLnBrk="0" hangingPunct="1">
+              <a:lnSpc>
+                <a:spcPct val="90000"/>
+              </a:lnSpc>
+              <a:spcBef>
+                <a:spcPts val="1000"/>
+              </a:spcBef>
+              <a:buFont typeface="Arial" panose="020B0604020202020204" pitchFamily="34" charset="0"/>
+              <a:buChar char="•"/>
+              <a:defRPr sz="2000" kern="1200">
+                <a:solidFill>
+                  <a:schemeClr val="tx1"/>
+                </a:solidFill>
+                <a:latin typeface="+mn-lt"/>
+                <a:ea typeface="+mn-ea"/>
+                <a:cs typeface="+mn-cs"/>
+              </a:defRPr>
+            </a:lvl1pPr>
+            <a:lvl2pPr marL="685800" indent="-228600" algn="l" defTabSz="914400" rtl="0" eaLnBrk="1" latinLnBrk="0" hangingPunct="1">
+              <a:lnSpc>
+                <a:spcPct val="90000"/>
+              </a:lnSpc>
+              <a:spcBef>
+                <a:spcPts val="500"/>
+              </a:spcBef>
+              <a:buFont typeface="Arial" panose="020B0604020202020204" pitchFamily="34" charset="0"/>
+              <a:buChar char="•"/>
+              <a:defRPr sz="1800" kern="1200">
+                <a:solidFill>
+                  <a:schemeClr val="tx1"/>
+                </a:solidFill>
+                <a:latin typeface="+mn-lt"/>
+                <a:ea typeface="+mn-ea"/>
+                <a:cs typeface="+mn-cs"/>
+              </a:defRPr>
+            </a:lvl2pPr>
+            <a:lvl3pPr marL="1143000" indent="-228600" algn="l" defTabSz="914400" rtl="0" eaLnBrk="1" latinLnBrk="0" hangingPunct="1">
+              <a:lnSpc>
+                <a:spcPct val="90000"/>
+              </a:lnSpc>
+              <a:spcBef>
+                <a:spcPts val="500"/>
+              </a:spcBef>
+              <a:buFont typeface="Arial" panose="020B0604020202020204" pitchFamily="34" charset="0"/>
+              <a:buChar char="•"/>
+              <a:defRPr sz="1600" kern="1200">
+                <a:solidFill>
+                  <a:schemeClr val="tx1"/>
+                </a:solidFill>
+                <a:latin typeface="+mn-lt"/>
+                <a:ea typeface="+mn-ea"/>
+                <a:cs typeface="+mn-cs"/>
+              </a:defRPr>
+            </a:lvl3pPr>
+            <a:lvl4pPr marL="1600200" indent="-228600" algn="l" defTabSz="914400" rtl="0" eaLnBrk="1" latinLnBrk="0" hangingPunct="1">
+              <a:lnSpc>
+                <a:spcPct val="90000"/>
+              </a:lnSpc>
+              <a:spcBef>
+                <a:spcPts val="500"/>
+              </a:spcBef>
+              <a:buFont typeface="Arial" panose="020B0604020202020204" pitchFamily="34" charset="0"/>
+              <a:buChar char="•"/>
+              <a:defRPr sz="1400" kern="1200">
+                <a:solidFill>
+                  <a:schemeClr val="tx1"/>
+                </a:solidFill>
+                <a:latin typeface="+mn-lt"/>
+                <a:ea typeface="+mn-ea"/>
+                <a:cs typeface="+mn-cs"/>
+              </a:defRPr>
+            </a:lvl4pPr>
+            <a:lvl5pPr marL="2057400" indent="-228600" algn="l" defTabSz="914400" rtl="0" eaLnBrk="1" latinLnBrk="0" hangingPunct="1">
+              <a:lnSpc>
+                <a:spcPct val="90000"/>
+              </a:lnSpc>
+              <a:spcBef>
+                <a:spcPts val="500"/>
+              </a:spcBef>
+              <a:buFont typeface="Arial" panose="020B0604020202020204" pitchFamily="34" charset="0"/>
+              <a:buChar char="•"/>
+              <a:defRPr sz="1400" kern="1200">
+                <a:solidFill>
+                  <a:schemeClr val="tx1"/>
+                </a:solidFill>
+                <a:latin typeface="+mn-lt"/>
+                <a:ea typeface="+mn-ea"/>
+                <a:cs typeface="+mn-cs"/>
+              </a:defRPr>
+            </a:lvl5pPr>
+            <a:lvl6pPr marL="2514600" indent="-228600" algn="l" defTabSz="914400" rtl="0" eaLnBrk="1" latinLnBrk="0" hangingPunct="1">
+              <a:lnSpc>
+                <a:spcPct val="90000"/>
+              </a:lnSpc>
+              <a:spcBef>
+                <a:spcPts val="500"/>
+              </a:spcBef>
+              <a:buFont typeface="Arial" panose="020B0604020202020204" pitchFamily="34" charset="0"/>
+              <a:buChar char="•"/>
+              <a:defRPr sz="1800" kern="1200">
+                <a:solidFill>
+                  <a:schemeClr val="tx1"/>
+                </a:solidFill>
+                <a:latin typeface="+mn-lt"/>
+                <a:ea typeface="+mn-ea"/>
+                <a:cs typeface="+mn-cs"/>
+              </a:defRPr>
+            </a:lvl6pPr>
+            <a:lvl7pPr marL="2971800" indent="-228600" algn="l" defTabSz="914400" rtl="0" eaLnBrk="1" latinLnBrk="0" hangingPunct="1">
+              <a:lnSpc>
+                <a:spcPct val="90000"/>
+              </a:lnSpc>
+              <a:spcBef>
+                <a:spcPts val="500"/>
+              </a:spcBef>
+              <a:buFont typeface="Arial" panose="020B0604020202020204" pitchFamily="34" charset="0"/>
+              <a:buChar char="•"/>
+              <a:defRPr sz="1800" kern="1200">
+                <a:solidFill>
+                  <a:schemeClr val="tx1"/>
+                </a:solidFill>
+                <a:latin typeface="+mn-lt"/>
+                <a:ea typeface="+mn-ea"/>
+                <a:cs typeface="+mn-cs"/>
+              </a:defRPr>
+            </a:lvl7pPr>
+            <a:lvl8pPr marL="3429000" indent="-228600" algn="l" defTabSz="914400" rtl="0" eaLnBrk="1" latinLnBrk="0" hangingPunct="1">
+              <a:lnSpc>
+                <a:spcPct val="90000"/>
+              </a:lnSpc>
+              <a:spcBef>
+                <a:spcPts val="500"/>
+              </a:spcBef>
+              <a:buFont typeface="Arial" panose="020B0604020202020204" pitchFamily="34" charset="0"/>
+              <a:buChar char="•"/>
+              <a:defRPr sz="1800" kern="1200">
+                <a:solidFill>
+                  <a:schemeClr val="tx1"/>
+                </a:solidFill>
+                <a:latin typeface="+mn-lt"/>
+                <a:ea typeface="+mn-ea"/>
+                <a:cs typeface="+mn-cs"/>
+              </a:defRPr>
+            </a:lvl8pPr>
+            <a:lvl9pPr marL="3886200" indent="-228600" algn="l" defTabSz="914400" rtl="0" eaLnBrk="1" latinLnBrk="0" hangingPunct="1">
+              <a:lnSpc>
+                <a:spcPct val="90000"/>
+              </a:lnSpc>
+              <a:spcBef>
+                <a:spcPts val="500"/>
+              </a:spcBef>
+              <a:buFont typeface="Arial" panose="020B0604020202020204" pitchFamily="34" charset="0"/>
+              <a:buChar char="•"/>
+              <a:defRPr sz="1800" kern="1200">
+                <a:solidFill>
+                  <a:schemeClr val="tx1"/>
+                </a:solidFill>
+                <a:latin typeface="+mn-lt"/>
+                <a:ea typeface="+mn-ea"/>
+                <a:cs typeface="+mn-cs"/>
+              </a:defRPr>
+            </a:lvl9pPr>
+          </a:lstStyle>
+          <a:p>
+            <a:r>
+              <a:rPr lang="en-US" dirty="0">
+                <a:ea typeface="+mn-lt"/>
+                <a:cs typeface="+mn-lt"/>
+              </a:rPr>
+              <a:t>Notice that </a:t>
+            </a:r>
+            <a:r>
+              <a:rPr lang="en-US" dirty="0">
+                <a:solidFill>
+                  <a:srgbClr val="FF0000"/>
+                </a:solidFill>
+                <a:ea typeface="+mn-lt"/>
+                <a:cs typeface="+mn-lt"/>
+              </a:rPr>
+              <a:t>must</a:t>
+            </a:r>
+            <a:r>
+              <a:rPr lang="en-US" dirty="0">
+                <a:ea typeface="+mn-lt"/>
+                <a:cs typeface="+mn-lt"/>
+              </a:rPr>
+              <a:t> </a:t>
+            </a:r>
+            <a:r>
+              <a:rPr lang="en-US" dirty="0">
+                <a:solidFill>
+                  <a:srgbClr val="FF0000"/>
+                </a:solidFill>
+                <a:ea typeface="+mn-lt"/>
+                <a:cs typeface="+mn-lt"/>
+              </a:rPr>
+              <a:t>comply with column families</a:t>
+            </a:r>
+            <a:r>
+              <a:rPr lang="en-US" dirty="0">
+                <a:ea typeface="+mn-lt"/>
+                <a:cs typeface="+mn-lt"/>
+              </a:rPr>
+              <a:t> when we insert data into the table.</a:t>
+            </a:r>
+          </a:p>
+          <a:p>
+            <a:r>
+              <a:rPr lang="en-US" dirty="0">
+                <a:ea typeface="+mn-lt"/>
+                <a:cs typeface="+mn-lt"/>
+              </a:rPr>
+              <a:t>But we can use different column names within the column family e.g.</a:t>
+            </a:r>
+          </a:p>
+        </p:txBody>
+      </p:sp>
     </p:spTree>
     <p:extLst>
       <p:ext uri="{BB962C8B-B14F-4D97-AF65-F5344CB8AC3E}">
@@ -14581,10 +14955,19 @@
           </a:xfrm>
         </p:spPr>
         <p:txBody>
-          <a:bodyPr/>
+          <a:bodyPr>
+            <a:normAutofit/>
+          </a:bodyPr>
           <a:lstStyle/>
           <a:p>
-            <a:endParaRPr lang="en-US"/>
+            <a:r>
+              <a:rPr lang="en-US" b="1" dirty="0">
+                <a:ea typeface="Calibri"/>
+                <a:cs typeface="Calibri"/>
+              </a:rPr>
+              <a:t>Key Concepts</a:t>
+            </a:r>
+            <a:endParaRPr lang="en-US" dirty="0"/>
           </a:p>
         </p:txBody>
       </p:sp>
@@ -14616,18 +14999,6 @@
           </a:bodyPr>
           <a:lstStyle/>
           <a:p>
-            <a:pPr marL="0" indent="0">
-              <a:buNone/>
-            </a:pPr>
-            <a:r>
-              <a:rPr lang="en-US" b="1" dirty="0">
-                <a:ea typeface="Calibri"/>
-                <a:cs typeface="Calibri"/>
-              </a:rPr>
-              <a:t>Key Concepts:</a:t>
-            </a:r>
-          </a:p>
-          <a:p>
             <a:r>
               <a:rPr lang="en-US" dirty="0">
                 <a:ea typeface="Calibri" panose="020F0502020204030204"/>
@@ -14705,7 +15076,7 @@
         </p:blipFill>
         <p:spPr>
           <a:xfrm>
-            <a:off x="6456054" y="799552"/>
+            <a:off x="6390685" y="797523"/>
             <a:ext cx="5638884" cy="4995905"/>
           </a:xfrm>
           <a:prstGeom prst="rect">
@@ -20557,15 +20928,9 @@
           <a:lstStyle/>
           <a:p>
             <a:r>
-              <a:rPr lang="en-US" sz="2800" dirty="0">
-                <a:effectLst/>
-                <a:latin typeface="Times New Roman" panose="02020603050405020304" pitchFamily="18" charset="0"/>
-                <a:ea typeface="Times New Roman" panose="02020603050405020304" pitchFamily="18" charset="0"/>
-                <a:cs typeface="Arial" panose="020B0604020202020204" pitchFamily="34" charset="0"/>
-              </a:rPr>
-              <a:t>Scenario: E-Commerce Order Processing System</a:t>
-            </a:r>
-            <a:endParaRPr lang="en-US" dirty="0"/>
+              <a:rPr lang="en-US" dirty="0"/>
+              <a:t>Kafka in E-Commerce Order Processing</a:t>
+            </a:r>
           </a:p>
         </p:txBody>
       </p:sp>
@@ -20587,37 +20952,10 @@
         </p:nvSpPr>
         <p:spPr/>
         <p:txBody>
-          <a:bodyPr/>
+          <a:bodyPr>
+            <a:normAutofit/>
+          </a:bodyPr>
           <a:lstStyle/>
-          <a:p>
-            <a:pPr marL="0" marR="0" indent="0">
-              <a:lnSpc>
-                <a:spcPct val="107000"/>
-              </a:lnSpc>
-              <a:spcBef>
-                <a:spcPts val="0"/>
-              </a:spcBef>
-              <a:spcAft>
-                <a:spcPts val="800"/>
-              </a:spcAft>
-              <a:buNone/>
-            </a:pPr>
-            <a:r>
-              <a:rPr lang="en-US" sz="1800" b="1" dirty="0">
-                <a:effectLst/>
-                <a:latin typeface="Times New Roman" panose="02020603050405020304" pitchFamily="18" charset="0"/>
-                <a:ea typeface="Times New Roman" panose="02020603050405020304" pitchFamily="18" charset="0"/>
-                <a:cs typeface="Arial" panose="020B0604020202020204" pitchFamily="34" charset="0"/>
-              </a:rPr>
-              <a:t>Objective:</a:t>
-            </a:r>
-            <a:endParaRPr lang="en-US" sz="1800" dirty="0">
-              <a:effectLst/>
-              <a:latin typeface="Calibri" panose="020F0502020204030204" pitchFamily="34" charset="0"/>
-              <a:ea typeface="Calibri" panose="020F0502020204030204" pitchFamily="34" charset="0"/>
-              <a:cs typeface="Arial" panose="020B0604020202020204" pitchFamily="34" charset="0"/>
-            </a:endParaRPr>
-          </a:p>
           <a:p>
             <a:pPr marL="0" marR="0">
               <a:lnSpc>
@@ -20631,17 +20969,15 @@
               </a:spcAft>
             </a:pPr>
             <a:r>
-              <a:rPr lang="en-US" sz="1800" dirty="0">
+              <a:rPr lang="en-US" b="1" dirty="0">
                 <a:effectLst/>
-                <a:latin typeface="Times New Roman" panose="02020603050405020304" pitchFamily="18" charset="0"/>
                 <a:ea typeface="Times New Roman" panose="02020603050405020304" pitchFamily="18" charset="0"/>
                 <a:cs typeface="Arial" panose="020B0604020202020204" pitchFamily="34" charset="0"/>
               </a:rPr>
-              <a:t>Efficiently process customer orders, manage inventory, and trigger shipments in real-time.</a:t>
-            </a:r>
-            <a:endParaRPr lang="en-US" sz="1800" dirty="0">
+              <a:t>Scenario:</a:t>
+            </a:r>
+            <a:endParaRPr lang="en-US" dirty="0">
               <a:effectLst/>
-              <a:latin typeface="Calibri" panose="020F0502020204030204" pitchFamily="34" charset="0"/>
               <a:ea typeface="Calibri" panose="020F0502020204030204" pitchFamily="34" charset="0"/>
               <a:cs typeface="Arial" panose="020B0604020202020204" pitchFamily="34" charset="0"/>
             </a:endParaRPr>
@@ -20659,17 +20995,57 @@
               </a:spcAft>
             </a:pPr>
             <a:r>
-              <a:rPr lang="en-US" sz="1800" b="1" dirty="0">
+              <a:rPr lang="en-US" dirty="0">
                 <a:effectLst/>
-                <a:latin typeface="Times New Roman" panose="02020603050405020304" pitchFamily="18" charset="0"/>
                 <a:ea typeface="Times New Roman" panose="02020603050405020304" pitchFamily="18" charset="0"/>
                 <a:cs typeface="Arial" panose="020B0604020202020204" pitchFamily="34" charset="0"/>
               </a:rPr>
-              <a:t>Data Sources (Producers):</a:t>
-            </a:r>
-            <a:endParaRPr lang="en-US" sz="1800" dirty="0">
+              <a:t>An online store uses </a:t>
+            </a:r>
+            <a:r>
+              <a:rPr lang="en-US" b="1" dirty="0">
+                <a:effectLst/>
+                <a:ea typeface="Times New Roman" panose="02020603050405020304" pitchFamily="18" charset="0"/>
+                <a:cs typeface="Arial" panose="020B0604020202020204" pitchFamily="34" charset="0"/>
+              </a:rPr>
+              <a:t>Kafka</a:t>
+            </a:r>
+            <a:r>
+              <a:rPr lang="en-US" dirty="0">
+                <a:effectLst/>
+                <a:ea typeface="Times New Roman" panose="02020603050405020304" pitchFamily="18" charset="0"/>
+                <a:cs typeface="Arial" panose="020B0604020202020204" pitchFamily="34" charset="0"/>
+              </a:rPr>
+              <a:t> to manage orders, inventory, payments, and shipping in real time.</a:t>
+            </a:r>
+            <a:endParaRPr lang="en-US" dirty="0">
               <a:effectLst/>
-              <a:latin typeface="Calibri" panose="020F0502020204030204" pitchFamily="34" charset="0"/>
+              <a:ea typeface="Calibri" panose="020F0502020204030204" pitchFamily="34" charset="0"/>
+              <a:cs typeface="Arial" panose="020B0604020202020204" pitchFamily="34" charset="0"/>
+            </a:endParaRPr>
+          </a:p>
+          <a:p>
+            <a:pPr marL="0" marR="0">
+              <a:lnSpc>
+                <a:spcPct val="107000"/>
+              </a:lnSpc>
+              <a:spcBef>
+                <a:spcPts val="0"/>
+              </a:spcBef>
+              <a:spcAft>
+                <a:spcPts val="800"/>
+              </a:spcAft>
+            </a:pPr>
+            <a:r>
+              <a:rPr lang="en-US" b="1" dirty="0">
+                <a:effectLst/>
+                <a:ea typeface="Times New Roman" panose="02020603050405020304" pitchFamily="18" charset="0"/>
+                <a:cs typeface="Arial" panose="020B0604020202020204" pitchFamily="34" charset="0"/>
+              </a:rPr>
+              <a:t>Process Flow:</a:t>
+            </a:r>
+            <a:endParaRPr lang="en-US" dirty="0">
+              <a:effectLst/>
               <a:ea typeface="Calibri" panose="020F0502020204030204" pitchFamily="34" charset="0"/>
               <a:cs typeface="Arial" panose="020B0604020202020204" pitchFamily="34" charset="0"/>
             </a:endParaRPr>
@@ -20685,34 +21061,30 @@
               <a:spcAft>
                 <a:spcPts val="800"/>
               </a:spcAft>
-              <a:buSzPts val="1000"/>
-              <a:buFont typeface="Symbol" panose="05050102010706020507" pitchFamily="18" charset="2"/>
-              <a:buChar char=""/>
+              <a:buFont typeface="+mj-lt"/>
+              <a:buAutoNum type="arabicPeriod"/>
               <a:tabLst>
                 <a:tab pos="457200" algn="l"/>
               </a:tabLst>
             </a:pPr>
             <a:r>
-              <a:rPr lang="en-US" sz="1800" b="1" dirty="0">
+              <a:rPr lang="en-US" b="1" dirty="0">
                 <a:effectLst/>
-                <a:latin typeface="Times New Roman" panose="02020603050405020304" pitchFamily="18" charset="0"/>
                 <a:ea typeface="Times New Roman" panose="02020603050405020304" pitchFamily="18" charset="0"/>
                 <a:cs typeface="Arial" panose="020B0604020202020204" pitchFamily="34" charset="0"/>
               </a:rPr>
-              <a:t>Online Storefront (Website / Mobile App)</a:t>
-            </a:r>
-            <a:r>
-              <a:rPr lang="en-US" sz="1800" dirty="0">
+              <a:t>A customer places an order</a:t>
+            </a:r>
+            <a:r>
+              <a:rPr lang="en-US" dirty="0">
                 <a:effectLst/>
-                <a:latin typeface="Times New Roman" panose="02020603050405020304" pitchFamily="18" charset="0"/>
                 <a:ea typeface="Times New Roman" panose="02020603050405020304" pitchFamily="18" charset="0"/>
                 <a:cs typeface="Arial" panose="020B0604020202020204" pitchFamily="34" charset="0"/>
               </a:rPr>
-              <a:t>: Customers place orders for products.</a:t>
-            </a:r>
-            <a:endParaRPr lang="en-US" sz="1800" dirty="0">
+              <a:t> on the storefront (website/app).</a:t>
+            </a:r>
+            <a:endParaRPr lang="en-US" dirty="0">
               <a:effectLst/>
-              <a:latin typeface="Calibri" panose="020F0502020204030204" pitchFamily="34" charset="0"/>
               <a:ea typeface="Calibri" panose="020F0502020204030204" pitchFamily="34" charset="0"/>
               <a:cs typeface="Arial" panose="020B0604020202020204" pitchFamily="34" charset="0"/>
             </a:endParaRPr>
@@ -20728,34 +21100,38 @@
               <a:spcAft>
                 <a:spcPts val="800"/>
               </a:spcAft>
-              <a:buSzPts val="1000"/>
-              <a:buFont typeface="Symbol" panose="05050102010706020507" pitchFamily="18" charset="2"/>
-              <a:buChar char=""/>
+              <a:buFont typeface="+mj-lt"/>
+              <a:buAutoNum type="arabicPeriod"/>
               <a:tabLst>
                 <a:tab pos="457200" algn="l"/>
               </a:tabLst>
             </a:pPr>
             <a:r>
-              <a:rPr lang="en-US" sz="1800" b="1" dirty="0">
+              <a:rPr lang="en-US" dirty="0">
                 <a:effectLst/>
-                <a:latin typeface="Times New Roman" panose="02020603050405020304" pitchFamily="18" charset="0"/>
                 <a:ea typeface="Times New Roman" panose="02020603050405020304" pitchFamily="18" charset="0"/>
                 <a:cs typeface="Arial" panose="020B0604020202020204" pitchFamily="34" charset="0"/>
               </a:rPr>
-              <a:t>Warehouse Inventory System</a:t>
-            </a:r>
-            <a:r>
-              <a:rPr lang="en-US" sz="1800" dirty="0">
+              <a:t>The order details are sent to the </a:t>
+            </a:r>
+            <a:r>
+              <a:rPr lang="en-US" b="1" dirty="0">
                 <a:effectLst/>
-                <a:latin typeface="Times New Roman" panose="02020603050405020304" pitchFamily="18" charset="0"/>
                 <a:ea typeface="Times New Roman" panose="02020603050405020304" pitchFamily="18" charset="0"/>
                 <a:cs typeface="Arial" panose="020B0604020202020204" pitchFamily="34" charset="0"/>
               </a:rPr>
-              <a:t>: Sends updates on product availability, stock levels, and any inventory changes.</a:t>
-            </a:r>
-            <a:endParaRPr lang="en-US" sz="1800" dirty="0">
+              <a:t>Kafka orders topic</a:t>
+            </a:r>
+            <a:r>
+              <a:rPr lang="en-US" dirty="0">
+                <a:effectLst/>
+                <a:ea typeface="Times New Roman" panose="02020603050405020304" pitchFamily="18" charset="0"/>
+                <a:cs typeface="Arial" panose="020B0604020202020204" pitchFamily="34" charset="0"/>
+              </a:rPr>
+              <a:t>.</a:t>
+            </a:r>
+            <a:endParaRPr lang="en-US" dirty="0">
               <a:effectLst/>
-              <a:latin typeface="Calibri" panose="020F0502020204030204" pitchFamily="34" charset="0"/>
               <a:ea typeface="Calibri" panose="020F0502020204030204" pitchFamily="34" charset="0"/>
               <a:cs typeface="Arial" panose="020B0604020202020204" pitchFamily="34" charset="0"/>
             </a:endParaRPr>
@@ -20771,34 +21147,38 @@
               <a:spcAft>
                 <a:spcPts val="800"/>
               </a:spcAft>
-              <a:buSzPts val="1000"/>
-              <a:buFont typeface="Symbol" panose="05050102010706020507" pitchFamily="18" charset="2"/>
-              <a:buChar char=""/>
+              <a:buFont typeface="+mj-lt"/>
+              <a:buAutoNum type="arabicPeriod"/>
               <a:tabLst>
                 <a:tab pos="457200" algn="l"/>
               </a:tabLst>
             </a:pPr>
             <a:r>
-              <a:rPr lang="en-US" sz="1800" b="1" dirty="0">
+              <a:rPr lang="en-US" dirty="0">
                 <a:effectLst/>
-                <a:latin typeface="Times New Roman" panose="02020603050405020304" pitchFamily="18" charset="0"/>
                 <a:ea typeface="Times New Roman" panose="02020603050405020304" pitchFamily="18" charset="0"/>
                 <a:cs typeface="Arial" panose="020B0604020202020204" pitchFamily="34" charset="0"/>
               </a:rPr>
-              <a:t>Payment Gateway</a:t>
-            </a:r>
-            <a:r>
-              <a:rPr lang="en-US" sz="1800" dirty="0">
+              <a:t>The </a:t>
+            </a:r>
+            <a:r>
+              <a:rPr lang="en-US" b="1" dirty="0">
                 <a:effectLst/>
-                <a:latin typeface="Times New Roman" panose="02020603050405020304" pitchFamily="18" charset="0"/>
                 <a:ea typeface="Times New Roman" panose="02020603050405020304" pitchFamily="18" charset="0"/>
                 <a:cs typeface="Arial" panose="020B0604020202020204" pitchFamily="34" charset="0"/>
               </a:rPr>
-              <a:t>: Publishes transaction status (payment confirmed or failed) after a customer places an order.</a:t>
-            </a:r>
-            <a:endParaRPr lang="en-US" sz="1800" dirty="0">
+              <a:t>Order Processing Service</a:t>
+            </a:r>
+            <a:r>
+              <a:rPr lang="en-US" dirty="0">
+                <a:effectLst/>
+                <a:ea typeface="Times New Roman" panose="02020603050405020304" pitchFamily="18" charset="0"/>
+                <a:cs typeface="Arial" panose="020B0604020202020204" pitchFamily="34" charset="0"/>
+              </a:rPr>
+              <a:t> consumes the order, checks inventory, and verifies payment.</a:t>
+            </a:r>
+            <a:endParaRPr lang="en-US" dirty="0">
               <a:effectLst/>
-              <a:latin typeface="Calibri" panose="020F0502020204030204" pitchFamily="34" charset="0"/>
               <a:ea typeface="Calibri" panose="020F0502020204030204" pitchFamily="34" charset="0"/>
               <a:cs typeface="Arial" panose="020B0604020202020204" pitchFamily="34" charset="0"/>
             </a:endParaRPr>
@@ -20814,40 +21194,135 @@
               <a:spcAft>
                 <a:spcPts val="800"/>
               </a:spcAft>
-              <a:buSzPts val="1000"/>
-              <a:buFont typeface="Symbol" panose="05050102010706020507" pitchFamily="18" charset="2"/>
-              <a:buChar char=""/>
+              <a:buFont typeface="+mj-lt"/>
+              <a:buAutoNum type="arabicPeriod"/>
               <a:tabLst>
                 <a:tab pos="457200" algn="l"/>
               </a:tabLst>
             </a:pPr>
             <a:r>
-              <a:rPr lang="en-US" sz="1800" b="1" dirty="0">
+              <a:rPr lang="en-US" dirty="0">
                 <a:effectLst/>
-                <a:latin typeface="Times New Roman" panose="02020603050405020304" pitchFamily="18" charset="0"/>
                 <a:ea typeface="Times New Roman" panose="02020603050405020304" pitchFamily="18" charset="0"/>
                 <a:cs typeface="Arial" panose="020B0604020202020204" pitchFamily="34" charset="0"/>
               </a:rPr>
-              <a:t>Shipping Providers</a:t>
-            </a:r>
-            <a:r>
-              <a:rPr lang="en-US" sz="1800" dirty="0">
+              <a:t>If items are in stock, the order is confirmed, and a message is sent to the </a:t>
+            </a:r>
+            <a:r>
+              <a:rPr lang="en-US" b="1" dirty="0">
                 <a:effectLst/>
-                <a:latin typeface="Times New Roman" panose="02020603050405020304" pitchFamily="18" charset="0"/>
                 <a:ea typeface="Times New Roman" panose="02020603050405020304" pitchFamily="18" charset="0"/>
                 <a:cs typeface="Arial" panose="020B0604020202020204" pitchFamily="34" charset="0"/>
               </a:rPr>
-              <a:t>: Sends tracking updates for orders as they are dispatched and moved through the supply chain.</a:t>
-            </a:r>
-            <a:endParaRPr lang="en-US" sz="1800" dirty="0">
+              <a:t>Inventory &amp; Payment topics</a:t>
+            </a:r>
+            <a:r>
+              <a:rPr lang="en-US" dirty="0">
+                <a:effectLst/>
+                <a:ea typeface="Times New Roman" panose="02020603050405020304" pitchFamily="18" charset="0"/>
+                <a:cs typeface="Arial" panose="020B0604020202020204" pitchFamily="34" charset="0"/>
+              </a:rPr>
+              <a:t>.</a:t>
+            </a:r>
+            <a:endParaRPr lang="en-US" dirty="0">
               <a:effectLst/>
-              <a:latin typeface="Calibri" panose="020F0502020204030204" pitchFamily="34" charset="0"/>
               <a:ea typeface="Calibri" panose="020F0502020204030204" pitchFamily="34" charset="0"/>
               <a:cs typeface="Arial" panose="020B0604020202020204" pitchFamily="34" charset="0"/>
             </a:endParaRPr>
           </a:p>
           <a:p>
-            <a:endParaRPr lang="en-US" dirty="0"/>
+            <a:pPr marL="342900" marR="0" lvl="0" indent="-342900">
+              <a:lnSpc>
+                <a:spcPct val="107000"/>
+              </a:lnSpc>
+              <a:spcBef>
+                <a:spcPts val="0"/>
+              </a:spcBef>
+              <a:spcAft>
+                <a:spcPts val="800"/>
+              </a:spcAft>
+              <a:buFont typeface="+mj-lt"/>
+              <a:buAutoNum type="arabicPeriod"/>
+              <a:tabLst>
+                <a:tab pos="457200" algn="l"/>
+              </a:tabLst>
+            </a:pPr>
+            <a:r>
+              <a:rPr lang="en-US" dirty="0">
+                <a:effectLst/>
+                <a:ea typeface="Times New Roman" panose="02020603050405020304" pitchFamily="18" charset="0"/>
+                <a:cs typeface="Arial" panose="020B0604020202020204" pitchFamily="34" charset="0"/>
+              </a:rPr>
+              <a:t>Once the payment is confirmed, the </a:t>
+            </a:r>
+            <a:r>
+              <a:rPr lang="en-US" b="1" dirty="0">
+                <a:effectLst/>
+                <a:ea typeface="Times New Roman" panose="02020603050405020304" pitchFamily="18" charset="0"/>
+                <a:cs typeface="Arial" panose="020B0604020202020204" pitchFamily="34" charset="0"/>
+              </a:rPr>
+              <a:t>Shipping Service</a:t>
+            </a:r>
+            <a:r>
+              <a:rPr lang="en-US" dirty="0">
+                <a:effectLst/>
+                <a:ea typeface="Times New Roman" panose="02020603050405020304" pitchFamily="18" charset="0"/>
+                <a:cs typeface="Arial" panose="020B0604020202020204" pitchFamily="34" charset="0"/>
+              </a:rPr>
+              <a:t> picks up the order details from Kafka and generates a shipment.</a:t>
+            </a:r>
+            <a:endParaRPr lang="en-US" dirty="0">
+              <a:effectLst/>
+              <a:ea typeface="Calibri" panose="020F0502020204030204" pitchFamily="34" charset="0"/>
+              <a:cs typeface="Arial" panose="020B0604020202020204" pitchFamily="34" charset="0"/>
+            </a:endParaRPr>
+          </a:p>
+          <a:p>
+            <a:pPr marL="342900" marR="0" lvl="0" indent="-342900">
+              <a:lnSpc>
+                <a:spcPct val="107000"/>
+              </a:lnSpc>
+              <a:spcBef>
+                <a:spcPts val="0"/>
+              </a:spcBef>
+              <a:spcAft>
+                <a:spcPts val="800"/>
+              </a:spcAft>
+              <a:buFont typeface="+mj-lt"/>
+              <a:buAutoNum type="arabicPeriod"/>
+              <a:tabLst>
+                <a:tab pos="457200" algn="l"/>
+              </a:tabLst>
+            </a:pPr>
+            <a:r>
+              <a:rPr lang="en-US" dirty="0">
+                <a:effectLst/>
+                <a:ea typeface="Times New Roman" panose="02020603050405020304" pitchFamily="18" charset="0"/>
+                <a:cs typeface="Arial" panose="020B0604020202020204" pitchFamily="34" charset="0"/>
+              </a:rPr>
+              <a:t>The </a:t>
+            </a:r>
+            <a:r>
+              <a:rPr lang="en-US" b="1" dirty="0">
+                <a:effectLst/>
+                <a:ea typeface="Times New Roman" panose="02020603050405020304" pitchFamily="18" charset="0"/>
+                <a:cs typeface="Arial" panose="020B0604020202020204" pitchFamily="34" charset="0"/>
+              </a:rPr>
+              <a:t>Customer Notification Service</a:t>
+            </a:r>
+            <a:r>
+              <a:rPr lang="en-US" dirty="0">
+                <a:effectLst/>
+                <a:ea typeface="Times New Roman" panose="02020603050405020304" pitchFamily="18" charset="0"/>
+                <a:cs typeface="Arial" panose="020B0604020202020204" pitchFamily="34" charset="0"/>
+              </a:rPr>
+              <a:t> listens for updates and sends notifications.</a:t>
+            </a:r>
+            <a:endParaRPr lang="en-US" dirty="0">
+              <a:effectLst/>
+              <a:ea typeface="Calibri" panose="020F0502020204030204" pitchFamily="34" charset="0"/>
+              <a:cs typeface="Arial" panose="020B0604020202020204" pitchFamily="34" charset="0"/>
+            </a:endParaRPr>
           </a:p>
         </p:txBody>
       </p:sp>
@@ -20886,7 +21361,7 @@
           <p:cNvPr id="2" name="Title 1">
             <a:extLst>
               <a:ext uri="{FF2B5EF4-FFF2-40B4-BE49-F238E27FC236}">
-                <a16:creationId xmlns:a16="http://schemas.microsoft.com/office/drawing/2014/main" id="{94C8800D-C43B-4FD7-A318-67AEB8003E93}"/>
+                <a16:creationId xmlns:a16="http://schemas.microsoft.com/office/drawing/2014/main" id="{A2B633F3-47B3-426F-BE46-842E0F7F5E3A}"/>
               </a:ext>
             </a:extLst>
           </p:cNvPr>
@@ -20899,899 +21374,1065 @@
         </p:nvSpPr>
         <p:spPr/>
         <p:txBody>
-          <a:bodyPr>
-            <a:normAutofit/>
-          </a:bodyPr>
+          <a:bodyPr/>
           <a:lstStyle/>
           <a:p>
-            <a:r>
-              <a:rPr lang="en-US" sz="2800" dirty="0">
-                <a:effectLst/>
-                <a:latin typeface="Times New Roman" panose="02020603050405020304" pitchFamily="18" charset="0"/>
-                <a:ea typeface="Times New Roman" panose="02020603050405020304" pitchFamily="18" charset="0"/>
-                <a:cs typeface="Arial" panose="020B0604020202020204" pitchFamily="34" charset="0"/>
-              </a:rPr>
-              <a:t>Kafka Data Structure (Sample Message):</a:t>
-            </a:r>
-            <a:endParaRPr lang="en-US" dirty="0"/>
+            <a:endParaRPr lang="en-US"/>
           </a:p>
         </p:txBody>
       </p:sp>
-      <p:sp>
-        <p:nvSpPr>
-          <p:cNvPr id="3" name="Content Placeholder 2">
+      <p:graphicFrame>
+        <p:nvGraphicFramePr>
+          <p:cNvPr id="4" name="Content Placeholder 3">
             <a:extLst>
               <a:ext uri="{FF2B5EF4-FFF2-40B4-BE49-F238E27FC236}">
-                <a16:creationId xmlns:a16="http://schemas.microsoft.com/office/drawing/2014/main" id="{0874E313-B8F4-4CC1-A604-3C82F5A688A3}"/>
+                <a16:creationId xmlns:a16="http://schemas.microsoft.com/office/drawing/2014/main" id="{9109CD38-3195-4D52-AD91-3766726C91AA}"/>
               </a:ext>
             </a:extLst>
           </p:cNvPr>
-          <p:cNvSpPr>
-            <a:spLocks noGrp="1"/>
-          </p:cNvSpPr>
+          <p:cNvGraphicFramePr>
+            <a:graphicFrameLocks noGrp="1"/>
+          </p:cNvGraphicFramePr>
           <p:nvPr>
             <p:ph idx="1"/>
+            <p:extLst>
+              <p:ext uri="{D42A27DB-BD31-4B8C-83A1-F6EECF244321}">
+                <p14:modId xmlns:p14="http://schemas.microsoft.com/office/powerpoint/2010/main" val="3003050948"/>
+              </p:ext>
+            </p:extLst>
           </p:nvPr>
-        </p:nvSpPr>
-        <p:spPr/>
-        <p:txBody>
-          <a:bodyPr/>
-          <a:lstStyle/>
-          <a:p>
-            <a:pPr marL="0" marR="0" indent="0">
-              <a:lnSpc>
-                <a:spcPct val="107000"/>
-              </a:lnSpc>
-              <a:spcBef>
-                <a:spcPts val="0"/>
-              </a:spcBef>
-              <a:spcAft>
-                <a:spcPts val="800"/>
-              </a:spcAft>
-              <a:buNone/>
-            </a:pPr>
-            <a:r>
-              <a:rPr lang="en-US" sz="1800" b="1" dirty="0">
-                <a:solidFill>
-                  <a:srgbClr val="00B050"/>
-                </a:solidFill>
-                <a:effectLst/>
-                <a:latin typeface="Times New Roman" panose="02020603050405020304" pitchFamily="18" charset="0"/>
-                <a:ea typeface="Times New Roman" panose="02020603050405020304" pitchFamily="18" charset="0"/>
-                <a:cs typeface="Arial" panose="020B0604020202020204" pitchFamily="34" charset="0"/>
-              </a:rPr>
-              <a:t>Order Message (from storefront):</a:t>
-            </a:r>
-            <a:endParaRPr lang="en-US" sz="1800" dirty="0">
-              <a:solidFill>
-                <a:srgbClr val="00B050"/>
-              </a:solidFill>
-              <a:effectLst/>
-              <a:latin typeface="Calibri" panose="020F0502020204030204" pitchFamily="34" charset="0"/>
-              <a:ea typeface="Calibri" panose="020F0502020204030204" pitchFamily="34" charset="0"/>
-              <a:cs typeface="Arial" panose="020B0604020202020204" pitchFamily="34" charset="0"/>
-            </a:endParaRPr>
-          </a:p>
-          <a:p>
-            <a:pPr marL="0" marR="0" indent="0">
-              <a:lnSpc>
-                <a:spcPct val="107000"/>
-              </a:lnSpc>
-              <a:spcBef>
-                <a:spcPts val="0"/>
-              </a:spcBef>
-              <a:spcAft>
-                <a:spcPts val="0"/>
-              </a:spcAft>
-              <a:buNone/>
-              <a:tabLst>
-                <a:tab pos="581660" algn="l"/>
-                <a:tab pos="1163320" algn="l"/>
-                <a:tab pos="1744980" algn="l"/>
-                <a:tab pos="2326640" algn="l"/>
-                <a:tab pos="2908300" algn="l"/>
-                <a:tab pos="3489960" algn="l"/>
-                <a:tab pos="4071620" algn="l"/>
-                <a:tab pos="4653280" algn="l"/>
-                <a:tab pos="5234940" algn="l"/>
-                <a:tab pos="5816600" algn="l"/>
-                <a:tab pos="6398260" algn="l"/>
-                <a:tab pos="6979920" algn="l"/>
-                <a:tab pos="7561580" algn="l"/>
-                <a:tab pos="8143240" algn="l"/>
-                <a:tab pos="8724900" algn="l"/>
-                <a:tab pos="9306560" algn="l"/>
-              </a:tabLst>
-            </a:pPr>
-            <a:r>
-              <a:rPr lang="en-US" sz="1800" dirty="0">
-                <a:solidFill>
-                  <a:srgbClr val="00B050"/>
-                </a:solidFill>
-                <a:effectLst/>
-                <a:latin typeface="Courier New" panose="02070309020205020404" pitchFamily="49" charset="0"/>
-                <a:ea typeface="Times New Roman" panose="02020603050405020304" pitchFamily="18" charset="0"/>
-                <a:cs typeface="Arial" panose="020B0604020202020204" pitchFamily="34" charset="0"/>
-              </a:rPr>
-              <a:t>{</a:t>
-            </a:r>
-            <a:endParaRPr lang="en-US" sz="1800" dirty="0">
-              <a:solidFill>
-                <a:srgbClr val="00B050"/>
-              </a:solidFill>
-              <a:effectLst/>
-              <a:latin typeface="Calibri" panose="020F0502020204030204" pitchFamily="34" charset="0"/>
-              <a:ea typeface="Calibri" panose="020F0502020204030204" pitchFamily="34" charset="0"/>
-              <a:cs typeface="Arial" panose="020B0604020202020204" pitchFamily="34" charset="0"/>
-            </a:endParaRPr>
-          </a:p>
-          <a:p>
-            <a:pPr marL="0" marR="0" indent="0">
-              <a:lnSpc>
-                <a:spcPct val="107000"/>
-              </a:lnSpc>
-              <a:spcBef>
-                <a:spcPts val="0"/>
-              </a:spcBef>
-              <a:spcAft>
-                <a:spcPts val="0"/>
-              </a:spcAft>
-              <a:buNone/>
-              <a:tabLst>
-                <a:tab pos="581660" algn="l"/>
-                <a:tab pos="1163320" algn="l"/>
-                <a:tab pos="1744980" algn="l"/>
-                <a:tab pos="2326640" algn="l"/>
-                <a:tab pos="2908300" algn="l"/>
-                <a:tab pos="3489960" algn="l"/>
-                <a:tab pos="4071620" algn="l"/>
-                <a:tab pos="4653280" algn="l"/>
-                <a:tab pos="5234940" algn="l"/>
-                <a:tab pos="5816600" algn="l"/>
-                <a:tab pos="6398260" algn="l"/>
-                <a:tab pos="6979920" algn="l"/>
-                <a:tab pos="7561580" algn="l"/>
-                <a:tab pos="8143240" algn="l"/>
-                <a:tab pos="8724900" algn="l"/>
-                <a:tab pos="9306560" algn="l"/>
-              </a:tabLst>
-            </a:pPr>
-            <a:r>
-              <a:rPr lang="en-US" sz="1800" dirty="0">
-                <a:solidFill>
-                  <a:srgbClr val="00B050"/>
-                </a:solidFill>
-                <a:effectLst/>
-                <a:latin typeface="Courier New" panose="02070309020205020404" pitchFamily="49" charset="0"/>
-                <a:ea typeface="Times New Roman" panose="02020603050405020304" pitchFamily="18" charset="0"/>
-                <a:cs typeface="Arial" panose="020B0604020202020204" pitchFamily="34" charset="0"/>
-              </a:rPr>
-              <a:t>  "</a:t>
-            </a:r>
-            <a:r>
-              <a:rPr lang="en-US" sz="1800" dirty="0" err="1">
-                <a:solidFill>
-                  <a:srgbClr val="00B050"/>
-                </a:solidFill>
-                <a:effectLst/>
-                <a:latin typeface="Courier New" panose="02070309020205020404" pitchFamily="49" charset="0"/>
-                <a:ea typeface="Times New Roman" panose="02020603050405020304" pitchFamily="18" charset="0"/>
-                <a:cs typeface="Arial" panose="020B0604020202020204" pitchFamily="34" charset="0"/>
-              </a:rPr>
-              <a:t>order_id</a:t>
-            </a:r>
-            <a:r>
-              <a:rPr lang="en-US" sz="1800" dirty="0">
-                <a:solidFill>
-                  <a:srgbClr val="00B050"/>
-                </a:solidFill>
-                <a:effectLst/>
-                <a:latin typeface="Courier New" panose="02070309020205020404" pitchFamily="49" charset="0"/>
-                <a:ea typeface="Times New Roman" panose="02020603050405020304" pitchFamily="18" charset="0"/>
-                <a:cs typeface="Arial" panose="020B0604020202020204" pitchFamily="34" charset="0"/>
-              </a:rPr>
-              <a:t>": "ord12345",</a:t>
-            </a:r>
-            <a:endParaRPr lang="en-US" sz="1800" dirty="0">
-              <a:solidFill>
-                <a:srgbClr val="00B050"/>
-              </a:solidFill>
-              <a:effectLst/>
-              <a:latin typeface="Calibri" panose="020F0502020204030204" pitchFamily="34" charset="0"/>
-              <a:ea typeface="Calibri" panose="020F0502020204030204" pitchFamily="34" charset="0"/>
-              <a:cs typeface="Arial" panose="020B0604020202020204" pitchFamily="34" charset="0"/>
-            </a:endParaRPr>
-          </a:p>
-          <a:p>
-            <a:pPr marL="0" marR="0" indent="0">
-              <a:lnSpc>
-                <a:spcPct val="107000"/>
-              </a:lnSpc>
-              <a:spcBef>
-                <a:spcPts val="0"/>
-              </a:spcBef>
-              <a:spcAft>
-                <a:spcPts val="0"/>
-              </a:spcAft>
-              <a:buNone/>
-              <a:tabLst>
-                <a:tab pos="581660" algn="l"/>
-                <a:tab pos="1163320" algn="l"/>
-                <a:tab pos="1744980" algn="l"/>
-                <a:tab pos="2326640" algn="l"/>
-                <a:tab pos="2908300" algn="l"/>
-                <a:tab pos="3489960" algn="l"/>
-                <a:tab pos="4071620" algn="l"/>
-                <a:tab pos="4653280" algn="l"/>
-                <a:tab pos="5234940" algn="l"/>
-                <a:tab pos="5816600" algn="l"/>
-                <a:tab pos="6398260" algn="l"/>
-                <a:tab pos="6979920" algn="l"/>
-                <a:tab pos="7561580" algn="l"/>
-                <a:tab pos="8143240" algn="l"/>
-                <a:tab pos="8724900" algn="l"/>
-                <a:tab pos="9306560" algn="l"/>
-              </a:tabLst>
-            </a:pPr>
-            <a:r>
-              <a:rPr lang="en-US" sz="1800" dirty="0">
-                <a:solidFill>
-                  <a:srgbClr val="00B050"/>
-                </a:solidFill>
-                <a:effectLst/>
-                <a:latin typeface="Courier New" panose="02070309020205020404" pitchFamily="49" charset="0"/>
-                <a:ea typeface="Times New Roman" panose="02020603050405020304" pitchFamily="18" charset="0"/>
-                <a:cs typeface="Arial" panose="020B0604020202020204" pitchFamily="34" charset="0"/>
-              </a:rPr>
-              <a:t>  "timestamp": "2025-03-25T10:10:30Z",</a:t>
-            </a:r>
-            <a:endParaRPr lang="en-US" sz="1800" dirty="0">
-              <a:solidFill>
-                <a:srgbClr val="00B050"/>
-              </a:solidFill>
-              <a:effectLst/>
-              <a:latin typeface="Calibri" panose="020F0502020204030204" pitchFamily="34" charset="0"/>
-              <a:ea typeface="Calibri" panose="020F0502020204030204" pitchFamily="34" charset="0"/>
-              <a:cs typeface="Arial" panose="020B0604020202020204" pitchFamily="34" charset="0"/>
-            </a:endParaRPr>
-          </a:p>
-          <a:p>
-            <a:pPr marL="0" marR="0" indent="0">
-              <a:lnSpc>
-                <a:spcPct val="107000"/>
-              </a:lnSpc>
-              <a:spcBef>
-                <a:spcPts val="0"/>
-              </a:spcBef>
-              <a:spcAft>
-                <a:spcPts val="0"/>
-              </a:spcAft>
-              <a:buNone/>
-              <a:tabLst>
-                <a:tab pos="581660" algn="l"/>
-                <a:tab pos="1163320" algn="l"/>
-                <a:tab pos="1744980" algn="l"/>
-                <a:tab pos="2326640" algn="l"/>
-                <a:tab pos="2908300" algn="l"/>
-                <a:tab pos="3489960" algn="l"/>
-                <a:tab pos="4071620" algn="l"/>
-                <a:tab pos="4653280" algn="l"/>
-                <a:tab pos="5234940" algn="l"/>
-                <a:tab pos="5816600" algn="l"/>
-                <a:tab pos="6398260" algn="l"/>
-                <a:tab pos="6979920" algn="l"/>
-                <a:tab pos="7561580" algn="l"/>
-                <a:tab pos="8143240" algn="l"/>
-                <a:tab pos="8724900" algn="l"/>
-                <a:tab pos="9306560" algn="l"/>
-              </a:tabLst>
-            </a:pPr>
-            <a:r>
-              <a:rPr lang="en-US" sz="1800" dirty="0">
-                <a:solidFill>
-                  <a:srgbClr val="00B050"/>
-                </a:solidFill>
-                <a:effectLst/>
-                <a:latin typeface="Courier New" panose="02070309020205020404" pitchFamily="49" charset="0"/>
-                <a:ea typeface="Times New Roman" panose="02020603050405020304" pitchFamily="18" charset="0"/>
-                <a:cs typeface="Arial" panose="020B0604020202020204" pitchFamily="34" charset="0"/>
-              </a:rPr>
-              <a:t>  "</a:t>
-            </a:r>
-            <a:r>
-              <a:rPr lang="en-US" sz="1800" dirty="0" err="1">
-                <a:solidFill>
-                  <a:srgbClr val="00B050"/>
-                </a:solidFill>
-                <a:effectLst/>
-                <a:latin typeface="Courier New" panose="02070309020205020404" pitchFamily="49" charset="0"/>
-                <a:ea typeface="Times New Roman" panose="02020603050405020304" pitchFamily="18" charset="0"/>
-                <a:cs typeface="Arial" panose="020B0604020202020204" pitchFamily="34" charset="0"/>
-              </a:rPr>
-              <a:t>customer_id</a:t>
-            </a:r>
-            <a:r>
-              <a:rPr lang="en-US" sz="1800" dirty="0">
-                <a:solidFill>
-                  <a:srgbClr val="00B050"/>
-                </a:solidFill>
-                <a:effectLst/>
-                <a:latin typeface="Courier New" panose="02070309020205020404" pitchFamily="49" charset="0"/>
-                <a:ea typeface="Times New Roman" panose="02020603050405020304" pitchFamily="18" charset="0"/>
-                <a:cs typeface="Arial" panose="020B0604020202020204" pitchFamily="34" charset="0"/>
-              </a:rPr>
-              <a:t>": "cust456",</a:t>
-            </a:r>
-            <a:endParaRPr lang="en-US" sz="1800" dirty="0">
-              <a:solidFill>
-                <a:srgbClr val="00B050"/>
-              </a:solidFill>
-              <a:effectLst/>
-              <a:latin typeface="Calibri" panose="020F0502020204030204" pitchFamily="34" charset="0"/>
-              <a:ea typeface="Calibri" panose="020F0502020204030204" pitchFamily="34" charset="0"/>
-              <a:cs typeface="Arial" panose="020B0604020202020204" pitchFamily="34" charset="0"/>
-            </a:endParaRPr>
-          </a:p>
-          <a:p>
-            <a:pPr marL="0" marR="0" indent="0">
-              <a:lnSpc>
-                <a:spcPct val="107000"/>
-              </a:lnSpc>
-              <a:spcBef>
-                <a:spcPts val="0"/>
-              </a:spcBef>
-              <a:spcAft>
-                <a:spcPts val="0"/>
-              </a:spcAft>
-              <a:buNone/>
-              <a:tabLst>
-                <a:tab pos="581660" algn="l"/>
-                <a:tab pos="1163320" algn="l"/>
-                <a:tab pos="1744980" algn="l"/>
-                <a:tab pos="2326640" algn="l"/>
-                <a:tab pos="2908300" algn="l"/>
-                <a:tab pos="3489960" algn="l"/>
-                <a:tab pos="4071620" algn="l"/>
-                <a:tab pos="4653280" algn="l"/>
-                <a:tab pos="5234940" algn="l"/>
-                <a:tab pos="5816600" algn="l"/>
-                <a:tab pos="6398260" algn="l"/>
-                <a:tab pos="6979920" algn="l"/>
-                <a:tab pos="7561580" algn="l"/>
-                <a:tab pos="8143240" algn="l"/>
-                <a:tab pos="8724900" algn="l"/>
-                <a:tab pos="9306560" algn="l"/>
-              </a:tabLst>
-            </a:pPr>
-            <a:r>
-              <a:rPr lang="en-US" sz="1800" dirty="0">
-                <a:solidFill>
-                  <a:srgbClr val="00B050"/>
-                </a:solidFill>
-                <a:effectLst/>
-                <a:latin typeface="Courier New" panose="02070309020205020404" pitchFamily="49" charset="0"/>
-                <a:ea typeface="Times New Roman" panose="02020603050405020304" pitchFamily="18" charset="0"/>
-                <a:cs typeface="Arial" panose="020B0604020202020204" pitchFamily="34" charset="0"/>
-              </a:rPr>
-              <a:t>  "items": [</a:t>
-            </a:r>
-            <a:endParaRPr lang="en-US" sz="1800" dirty="0">
-              <a:solidFill>
-                <a:srgbClr val="00B050"/>
-              </a:solidFill>
-              <a:effectLst/>
-              <a:latin typeface="Calibri" panose="020F0502020204030204" pitchFamily="34" charset="0"/>
-              <a:ea typeface="Calibri" panose="020F0502020204030204" pitchFamily="34" charset="0"/>
-              <a:cs typeface="Arial" panose="020B0604020202020204" pitchFamily="34" charset="0"/>
-            </a:endParaRPr>
-          </a:p>
-          <a:p>
-            <a:pPr marL="0" marR="0" indent="0">
-              <a:lnSpc>
-                <a:spcPct val="107000"/>
-              </a:lnSpc>
-              <a:spcBef>
-                <a:spcPts val="0"/>
-              </a:spcBef>
-              <a:spcAft>
-                <a:spcPts val="0"/>
-              </a:spcAft>
-              <a:buNone/>
-              <a:tabLst>
-                <a:tab pos="581660" algn="l"/>
-                <a:tab pos="1163320" algn="l"/>
-                <a:tab pos="1744980" algn="l"/>
-                <a:tab pos="2326640" algn="l"/>
-                <a:tab pos="2908300" algn="l"/>
-                <a:tab pos="3489960" algn="l"/>
-                <a:tab pos="4071620" algn="l"/>
-                <a:tab pos="4653280" algn="l"/>
-                <a:tab pos="5234940" algn="l"/>
-                <a:tab pos="5816600" algn="l"/>
-                <a:tab pos="6398260" algn="l"/>
-                <a:tab pos="6979920" algn="l"/>
-                <a:tab pos="7561580" algn="l"/>
-                <a:tab pos="8143240" algn="l"/>
-                <a:tab pos="8724900" algn="l"/>
-                <a:tab pos="9306560" algn="l"/>
-              </a:tabLst>
-            </a:pPr>
-            <a:r>
-              <a:rPr lang="en-US" sz="1800" dirty="0">
-                <a:solidFill>
-                  <a:srgbClr val="00B050"/>
-                </a:solidFill>
-                <a:effectLst/>
-                <a:latin typeface="Courier New" panose="02070309020205020404" pitchFamily="49" charset="0"/>
-                <a:ea typeface="Times New Roman" panose="02020603050405020304" pitchFamily="18" charset="0"/>
-                <a:cs typeface="Arial" panose="020B0604020202020204" pitchFamily="34" charset="0"/>
-              </a:rPr>
-              <a:t>    {"</a:t>
-            </a:r>
-            <a:r>
-              <a:rPr lang="en-US" sz="1800" dirty="0" err="1">
-                <a:solidFill>
-                  <a:srgbClr val="00B050"/>
-                </a:solidFill>
-                <a:effectLst/>
-                <a:latin typeface="Courier New" panose="02070309020205020404" pitchFamily="49" charset="0"/>
-                <a:ea typeface="Times New Roman" panose="02020603050405020304" pitchFamily="18" charset="0"/>
-                <a:cs typeface="Arial" panose="020B0604020202020204" pitchFamily="34" charset="0"/>
-              </a:rPr>
-              <a:t>product_id</a:t>
-            </a:r>
-            <a:r>
-              <a:rPr lang="en-US" sz="1800" dirty="0">
-                <a:solidFill>
-                  <a:srgbClr val="00B050"/>
-                </a:solidFill>
-                <a:effectLst/>
-                <a:latin typeface="Courier New" panose="02070309020205020404" pitchFamily="49" charset="0"/>
-                <a:ea typeface="Times New Roman" panose="02020603050405020304" pitchFamily="18" charset="0"/>
-                <a:cs typeface="Arial" panose="020B0604020202020204" pitchFamily="34" charset="0"/>
-              </a:rPr>
-              <a:t>": "prod678", "quantity": 2},</a:t>
-            </a:r>
-            <a:endParaRPr lang="en-US" sz="1800" dirty="0">
-              <a:solidFill>
-                <a:srgbClr val="00B050"/>
-              </a:solidFill>
-              <a:effectLst/>
-              <a:latin typeface="Calibri" panose="020F0502020204030204" pitchFamily="34" charset="0"/>
-              <a:ea typeface="Calibri" panose="020F0502020204030204" pitchFamily="34" charset="0"/>
-              <a:cs typeface="Arial" panose="020B0604020202020204" pitchFamily="34" charset="0"/>
-            </a:endParaRPr>
-          </a:p>
-          <a:p>
-            <a:pPr marL="0" marR="0" indent="0">
-              <a:lnSpc>
-                <a:spcPct val="107000"/>
-              </a:lnSpc>
-              <a:spcBef>
-                <a:spcPts val="0"/>
-              </a:spcBef>
-              <a:spcAft>
-                <a:spcPts val="0"/>
-              </a:spcAft>
-              <a:buNone/>
-              <a:tabLst>
-                <a:tab pos="581660" algn="l"/>
-                <a:tab pos="1163320" algn="l"/>
-                <a:tab pos="1744980" algn="l"/>
-                <a:tab pos="2326640" algn="l"/>
-                <a:tab pos="2908300" algn="l"/>
-                <a:tab pos="3489960" algn="l"/>
-                <a:tab pos="4071620" algn="l"/>
-                <a:tab pos="4653280" algn="l"/>
-                <a:tab pos="5234940" algn="l"/>
-                <a:tab pos="5816600" algn="l"/>
-                <a:tab pos="6398260" algn="l"/>
-                <a:tab pos="6979920" algn="l"/>
-                <a:tab pos="7561580" algn="l"/>
-                <a:tab pos="8143240" algn="l"/>
-                <a:tab pos="8724900" algn="l"/>
-                <a:tab pos="9306560" algn="l"/>
-              </a:tabLst>
-            </a:pPr>
-            <a:r>
-              <a:rPr lang="en-US" sz="1800" dirty="0">
-                <a:solidFill>
-                  <a:srgbClr val="00B050"/>
-                </a:solidFill>
-                <a:effectLst/>
-                <a:latin typeface="Courier New" panose="02070309020205020404" pitchFamily="49" charset="0"/>
-                <a:ea typeface="Times New Roman" panose="02020603050405020304" pitchFamily="18" charset="0"/>
-                <a:cs typeface="Arial" panose="020B0604020202020204" pitchFamily="34" charset="0"/>
-              </a:rPr>
-              <a:t>    {"</a:t>
-            </a:r>
-            <a:r>
-              <a:rPr lang="en-US" sz="1800" dirty="0" err="1">
-                <a:solidFill>
-                  <a:srgbClr val="00B050"/>
-                </a:solidFill>
-                <a:effectLst/>
-                <a:latin typeface="Courier New" panose="02070309020205020404" pitchFamily="49" charset="0"/>
-                <a:ea typeface="Times New Roman" panose="02020603050405020304" pitchFamily="18" charset="0"/>
-                <a:cs typeface="Arial" panose="020B0604020202020204" pitchFamily="34" charset="0"/>
-              </a:rPr>
-              <a:t>product_id</a:t>
-            </a:r>
-            <a:r>
-              <a:rPr lang="en-US" sz="1800" dirty="0">
-                <a:solidFill>
-                  <a:srgbClr val="00B050"/>
-                </a:solidFill>
-                <a:effectLst/>
-                <a:latin typeface="Courier New" panose="02070309020205020404" pitchFamily="49" charset="0"/>
-                <a:ea typeface="Times New Roman" panose="02020603050405020304" pitchFamily="18" charset="0"/>
-                <a:cs typeface="Arial" panose="020B0604020202020204" pitchFamily="34" charset="0"/>
-              </a:rPr>
-              <a:t>": "prod789", "quantity": 1}</a:t>
-            </a:r>
-            <a:endParaRPr lang="en-US" sz="1800" dirty="0">
-              <a:solidFill>
-                <a:srgbClr val="00B050"/>
-              </a:solidFill>
-              <a:effectLst/>
-              <a:latin typeface="Calibri" panose="020F0502020204030204" pitchFamily="34" charset="0"/>
-              <a:ea typeface="Calibri" panose="020F0502020204030204" pitchFamily="34" charset="0"/>
-              <a:cs typeface="Arial" panose="020B0604020202020204" pitchFamily="34" charset="0"/>
-            </a:endParaRPr>
-          </a:p>
-          <a:p>
-            <a:pPr marL="0" marR="0" indent="0">
-              <a:lnSpc>
-                <a:spcPct val="107000"/>
-              </a:lnSpc>
-              <a:spcBef>
-                <a:spcPts val="0"/>
-              </a:spcBef>
-              <a:spcAft>
-                <a:spcPts val="0"/>
-              </a:spcAft>
-              <a:buNone/>
-              <a:tabLst>
-                <a:tab pos="581660" algn="l"/>
-                <a:tab pos="1163320" algn="l"/>
-                <a:tab pos="1744980" algn="l"/>
-                <a:tab pos="2326640" algn="l"/>
-                <a:tab pos="2908300" algn="l"/>
-                <a:tab pos="3489960" algn="l"/>
-                <a:tab pos="4071620" algn="l"/>
-                <a:tab pos="4653280" algn="l"/>
-                <a:tab pos="5234940" algn="l"/>
-                <a:tab pos="5816600" algn="l"/>
-                <a:tab pos="6398260" algn="l"/>
-                <a:tab pos="6979920" algn="l"/>
-                <a:tab pos="7561580" algn="l"/>
-                <a:tab pos="8143240" algn="l"/>
-                <a:tab pos="8724900" algn="l"/>
-                <a:tab pos="9306560" algn="l"/>
-              </a:tabLst>
-            </a:pPr>
-            <a:r>
-              <a:rPr lang="en-US" sz="1800" dirty="0">
-                <a:solidFill>
-                  <a:srgbClr val="00B050"/>
-                </a:solidFill>
-                <a:effectLst/>
-                <a:latin typeface="Courier New" panose="02070309020205020404" pitchFamily="49" charset="0"/>
-                <a:ea typeface="Times New Roman" panose="02020603050405020304" pitchFamily="18" charset="0"/>
-                <a:cs typeface="Arial" panose="020B0604020202020204" pitchFamily="34" charset="0"/>
-              </a:rPr>
-              <a:t>  ],</a:t>
-            </a:r>
-            <a:endParaRPr lang="en-US" sz="1800" dirty="0">
-              <a:solidFill>
-                <a:srgbClr val="00B050"/>
-              </a:solidFill>
-              <a:effectLst/>
-              <a:latin typeface="Calibri" panose="020F0502020204030204" pitchFamily="34" charset="0"/>
-              <a:ea typeface="Calibri" panose="020F0502020204030204" pitchFamily="34" charset="0"/>
-              <a:cs typeface="Arial" panose="020B0604020202020204" pitchFamily="34" charset="0"/>
-            </a:endParaRPr>
-          </a:p>
-          <a:p>
-            <a:pPr marL="0" marR="0" indent="0">
-              <a:lnSpc>
-                <a:spcPct val="107000"/>
-              </a:lnSpc>
-              <a:spcBef>
-                <a:spcPts val="0"/>
-              </a:spcBef>
-              <a:spcAft>
-                <a:spcPts val="0"/>
-              </a:spcAft>
-              <a:buNone/>
-              <a:tabLst>
-                <a:tab pos="581660" algn="l"/>
-                <a:tab pos="1163320" algn="l"/>
-                <a:tab pos="1744980" algn="l"/>
-                <a:tab pos="2326640" algn="l"/>
-                <a:tab pos="2908300" algn="l"/>
-                <a:tab pos="3489960" algn="l"/>
-                <a:tab pos="4071620" algn="l"/>
-                <a:tab pos="4653280" algn="l"/>
-                <a:tab pos="5234940" algn="l"/>
-                <a:tab pos="5816600" algn="l"/>
-                <a:tab pos="6398260" algn="l"/>
-                <a:tab pos="6979920" algn="l"/>
-                <a:tab pos="7561580" algn="l"/>
-                <a:tab pos="8143240" algn="l"/>
-                <a:tab pos="8724900" algn="l"/>
-                <a:tab pos="9306560" algn="l"/>
-              </a:tabLst>
-            </a:pPr>
-            <a:r>
-              <a:rPr lang="en-US" sz="1800" dirty="0">
-                <a:solidFill>
-                  <a:srgbClr val="00B050"/>
-                </a:solidFill>
-                <a:effectLst/>
-                <a:latin typeface="Courier New" panose="02070309020205020404" pitchFamily="49" charset="0"/>
-                <a:ea typeface="Times New Roman" panose="02020603050405020304" pitchFamily="18" charset="0"/>
-                <a:cs typeface="Arial" panose="020B0604020202020204" pitchFamily="34" charset="0"/>
-              </a:rPr>
-              <a:t>  "</a:t>
-            </a:r>
-            <a:r>
-              <a:rPr lang="en-US" sz="1800" dirty="0" err="1">
-                <a:solidFill>
-                  <a:srgbClr val="00B050"/>
-                </a:solidFill>
-                <a:effectLst/>
-                <a:latin typeface="Courier New" panose="02070309020205020404" pitchFamily="49" charset="0"/>
-                <a:ea typeface="Times New Roman" panose="02020603050405020304" pitchFamily="18" charset="0"/>
-                <a:cs typeface="Arial" panose="020B0604020202020204" pitchFamily="34" charset="0"/>
-              </a:rPr>
-              <a:t>total_amount</a:t>
-            </a:r>
-            <a:r>
-              <a:rPr lang="en-US" sz="1800" dirty="0">
-                <a:solidFill>
-                  <a:srgbClr val="00B050"/>
-                </a:solidFill>
-                <a:effectLst/>
-                <a:latin typeface="Courier New" panose="02070309020205020404" pitchFamily="49" charset="0"/>
-                <a:ea typeface="Times New Roman" panose="02020603050405020304" pitchFamily="18" charset="0"/>
-                <a:cs typeface="Arial" panose="020B0604020202020204" pitchFamily="34" charset="0"/>
-              </a:rPr>
-              <a:t>": 129.99,</a:t>
-            </a:r>
-            <a:endParaRPr lang="en-US" sz="1800" dirty="0">
-              <a:solidFill>
-                <a:srgbClr val="00B050"/>
-              </a:solidFill>
-              <a:effectLst/>
-              <a:latin typeface="Calibri" panose="020F0502020204030204" pitchFamily="34" charset="0"/>
-              <a:ea typeface="Calibri" panose="020F0502020204030204" pitchFamily="34" charset="0"/>
-              <a:cs typeface="Arial" panose="020B0604020202020204" pitchFamily="34" charset="0"/>
-            </a:endParaRPr>
-          </a:p>
-          <a:p>
-            <a:pPr marL="0" marR="0" indent="0">
-              <a:lnSpc>
-                <a:spcPct val="107000"/>
-              </a:lnSpc>
-              <a:spcBef>
-                <a:spcPts val="0"/>
-              </a:spcBef>
-              <a:spcAft>
-                <a:spcPts val="0"/>
-              </a:spcAft>
-              <a:buNone/>
-              <a:tabLst>
-                <a:tab pos="581660" algn="l"/>
-                <a:tab pos="1163320" algn="l"/>
-                <a:tab pos="1744980" algn="l"/>
-                <a:tab pos="2326640" algn="l"/>
-                <a:tab pos="2908300" algn="l"/>
-                <a:tab pos="3489960" algn="l"/>
-                <a:tab pos="4071620" algn="l"/>
-                <a:tab pos="4653280" algn="l"/>
-                <a:tab pos="5234940" algn="l"/>
-                <a:tab pos="5816600" algn="l"/>
-                <a:tab pos="6398260" algn="l"/>
-                <a:tab pos="6979920" algn="l"/>
-                <a:tab pos="7561580" algn="l"/>
-                <a:tab pos="8143240" algn="l"/>
-                <a:tab pos="8724900" algn="l"/>
-                <a:tab pos="9306560" algn="l"/>
-              </a:tabLst>
-            </a:pPr>
-            <a:r>
-              <a:rPr lang="en-US" sz="1800" dirty="0">
-                <a:solidFill>
-                  <a:srgbClr val="00B050"/>
-                </a:solidFill>
-                <a:effectLst/>
-                <a:latin typeface="Courier New" panose="02070309020205020404" pitchFamily="49" charset="0"/>
-                <a:ea typeface="Times New Roman" panose="02020603050405020304" pitchFamily="18" charset="0"/>
-                <a:cs typeface="Arial" panose="020B0604020202020204" pitchFamily="34" charset="0"/>
-              </a:rPr>
-              <a:t>  "</a:t>
-            </a:r>
-            <a:r>
-              <a:rPr lang="en-US" sz="1800" dirty="0" err="1">
-                <a:solidFill>
-                  <a:srgbClr val="00B050"/>
-                </a:solidFill>
-                <a:effectLst/>
-                <a:latin typeface="Courier New" panose="02070309020205020404" pitchFamily="49" charset="0"/>
-                <a:ea typeface="Times New Roman" panose="02020603050405020304" pitchFamily="18" charset="0"/>
-                <a:cs typeface="Arial" panose="020B0604020202020204" pitchFamily="34" charset="0"/>
-              </a:rPr>
-              <a:t>payment_status</a:t>
-            </a:r>
-            <a:r>
-              <a:rPr lang="en-US" sz="1800" dirty="0">
-                <a:solidFill>
-                  <a:srgbClr val="00B050"/>
-                </a:solidFill>
-                <a:effectLst/>
-                <a:latin typeface="Courier New" panose="02070309020205020404" pitchFamily="49" charset="0"/>
-                <a:ea typeface="Times New Roman" panose="02020603050405020304" pitchFamily="18" charset="0"/>
-                <a:cs typeface="Arial" panose="020B0604020202020204" pitchFamily="34" charset="0"/>
-              </a:rPr>
-              <a:t>": "paid",</a:t>
-            </a:r>
-            <a:endParaRPr lang="en-US" sz="1800" dirty="0">
-              <a:solidFill>
-                <a:srgbClr val="00B050"/>
-              </a:solidFill>
-              <a:effectLst/>
-              <a:latin typeface="Calibri" panose="020F0502020204030204" pitchFamily="34" charset="0"/>
-              <a:ea typeface="Calibri" panose="020F0502020204030204" pitchFamily="34" charset="0"/>
-              <a:cs typeface="Arial" panose="020B0604020202020204" pitchFamily="34" charset="0"/>
-            </a:endParaRPr>
-          </a:p>
-          <a:p>
-            <a:pPr marL="0" marR="0" indent="0">
-              <a:lnSpc>
-                <a:spcPct val="107000"/>
-              </a:lnSpc>
-              <a:spcBef>
-                <a:spcPts val="0"/>
-              </a:spcBef>
-              <a:spcAft>
-                <a:spcPts val="0"/>
-              </a:spcAft>
-              <a:buNone/>
-              <a:tabLst>
-                <a:tab pos="581660" algn="l"/>
-                <a:tab pos="1163320" algn="l"/>
-                <a:tab pos="1744980" algn="l"/>
-                <a:tab pos="2326640" algn="l"/>
-                <a:tab pos="2908300" algn="l"/>
-                <a:tab pos="3489960" algn="l"/>
-                <a:tab pos="4071620" algn="l"/>
-                <a:tab pos="4653280" algn="l"/>
-                <a:tab pos="5234940" algn="l"/>
-                <a:tab pos="5816600" algn="l"/>
-                <a:tab pos="6398260" algn="l"/>
-                <a:tab pos="6979920" algn="l"/>
-                <a:tab pos="7561580" algn="l"/>
-                <a:tab pos="8143240" algn="l"/>
-                <a:tab pos="8724900" algn="l"/>
-                <a:tab pos="9306560" algn="l"/>
-              </a:tabLst>
-            </a:pPr>
-            <a:r>
-              <a:rPr lang="en-US" sz="1800" dirty="0">
-                <a:solidFill>
-                  <a:srgbClr val="00B050"/>
-                </a:solidFill>
-                <a:effectLst/>
-                <a:latin typeface="Courier New" panose="02070309020205020404" pitchFamily="49" charset="0"/>
-                <a:ea typeface="Times New Roman" panose="02020603050405020304" pitchFamily="18" charset="0"/>
-                <a:cs typeface="Arial" panose="020B0604020202020204" pitchFamily="34" charset="0"/>
-              </a:rPr>
-              <a:t>  "</a:t>
-            </a:r>
-            <a:r>
-              <a:rPr lang="en-US" sz="1800" dirty="0" err="1">
-                <a:solidFill>
-                  <a:srgbClr val="00B050"/>
-                </a:solidFill>
-                <a:effectLst/>
-                <a:latin typeface="Courier New" panose="02070309020205020404" pitchFamily="49" charset="0"/>
-                <a:ea typeface="Times New Roman" panose="02020603050405020304" pitchFamily="18" charset="0"/>
-                <a:cs typeface="Arial" panose="020B0604020202020204" pitchFamily="34" charset="0"/>
-              </a:rPr>
-              <a:t>shipping_address</a:t>
-            </a:r>
-            <a:r>
-              <a:rPr lang="en-US" sz="1800" dirty="0">
-                <a:solidFill>
-                  <a:srgbClr val="00B050"/>
-                </a:solidFill>
-                <a:effectLst/>
-                <a:latin typeface="Courier New" panose="02070309020205020404" pitchFamily="49" charset="0"/>
-                <a:ea typeface="Times New Roman" panose="02020603050405020304" pitchFamily="18" charset="0"/>
-                <a:cs typeface="Arial" panose="020B0604020202020204" pitchFamily="34" charset="0"/>
-              </a:rPr>
-              <a:t>": "123 Main St, Anytown, USA"</a:t>
-            </a:r>
-            <a:endParaRPr lang="en-US" sz="1800" dirty="0">
-              <a:solidFill>
-                <a:srgbClr val="00B050"/>
-              </a:solidFill>
-              <a:effectLst/>
-              <a:latin typeface="Calibri" panose="020F0502020204030204" pitchFamily="34" charset="0"/>
-              <a:ea typeface="Calibri" panose="020F0502020204030204" pitchFamily="34" charset="0"/>
-              <a:cs typeface="Arial" panose="020B0604020202020204" pitchFamily="34" charset="0"/>
-            </a:endParaRPr>
-          </a:p>
-          <a:p>
-            <a:pPr marL="0" marR="0" indent="0">
-              <a:lnSpc>
-                <a:spcPct val="107000"/>
-              </a:lnSpc>
-              <a:spcBef>
-                <a:spcPts val="0"/>
-              </a:spcBef>
-              <a:spcAft>
-                <a:spcPts val="0"/>
-              </a:spcAft>
-              <a:buNone/>
-              <a:tabLst>
-                <a:tab pos="581660" algn="l"/>
-                <a:tab pos="1163320" algn="l"/>
-                <a:tab pos="1744980" algn="l"/>
-                <a:tab pos="2326640" algn="l"/>
-                <a:tab pos="2908300" algn="l"/>
-                <a:tab pos="3489960" algn="l"/>
-                <a:tab pos="4071620" algn="l"/>
-                <a:tab pos="4653280" algn="l"/>
-                <a:tab pos="5234940" algn="l"/>
-                <a:tab pos="5816600" algn="l"/>
-                <a:tab pos="6398260" algn="l"/>
-                <a:tab pos="6979920" algn="l"/>
-                <a:tab pos="7561580" algn="l"/>
-                <a:tab pos="8143240" algn="l"/>
-                <a:tab pos="8724900" algn="l"/>
-                <a:tab pos="9306560" algn="l"/>
-              </a:tabLst>
-            </a:pPr>
-            <a:r>
-              <a:rPr lang="en-US" sz="1800" dirty="0">
-                <a:solidFill>
-                  <a:srgbClr val="00B050"/>
-                </a:solidFill>
-                <a:effectLst/>
-                <a:latin typeface="Courier New" panose="02070309020205020404" pitchFamily="49" charset="0"/>
-                <a:ea typeface="Times New Roman" panose="02020603050405020304" pitchFamily="18" charset="0"/>
-                <a:cs typeface="Arial" panose="020B0604020202020204" pitchFamily="34" charset="0"/>
-              </a:rPr>
-              <a:t>}</a:t>
-            </a:r>
-            <a:endParaRPr lang="en-US" sz="1800" dirty="0">
-              <a:solidFill>
-                <a:srgbClr val="00B050"/>
-              </a:solidFill>
-              <a:effectLst/>
-              <a:latin typeface="Calibri" panose="020F0502020204030204" pitchFamily="34" charset="0"/>
-              <a:ea typeface="Calibri" panose="020F0502020204030204" pitchFamily="34" charset="0"/>
-              <a:cs typeface="Arial" panose="020B0604020202020204" pitchFamily="34" charset="0"/>
-            </a:endParaRPr>
-          </a:p>
-          <a:p>
-            <a:pPr marL="0" indent="0">
-              <a:buNone/>
-            </a:pPr>
-            <a:endParaRPr lang="en-US" dirty="0">
-              <a:solidFill>
-                <a:srgbClr val="00B050"/>
-              </a:solidFill>
-            </a:endParaRPr>
-          </a:p>
-        </p:txBody>
-      </p:sp>
+        </p:nvGraphicFramePr>
+        <p:xfrm>
+          <a:off x="284084" y="1706563"/>
+          <a:ext cx="11069715" cy="4991100"/>
+        </p:xfrm>
+        <a:graphic>
+          <a:graphicData uri="http://schemas.openxmlformats.org/drawingml/2006/table">
+            <a:tbl>
+              <a:tblPr>
+                <a:tableStyleId>{616DA210-FB5B-4158-B5E0-FEB733F419BA}</a:tableStyleId>
+              </a:tblPr>
+              <a:tblGrid>
+                <a:gridCol w="2213943">
+                  <a:extLst>
+                    <a:ext uri="{9D8B030D-6E8A-4147-A177-3AD203B41FA5}">
+                      <a16:colId xmlns:a16="http://schemas.microsoft.com/office/drawing/2014/main" val="862542892"/>
+                    </a:ext>
+                  </a:extLst>
+                </a:gridCol>
+                <a:gridCol w="2213943">
+                  <a:extLst>
+                    <a:ext uri="{9D8B030D-6E8A-4147-A177-3AD203B41FA5}">
+                      <a16:colId xmlns:a16="http://schemas.microsoft.com/office/drawing/2014/main" val="2791124987"/>
+                    </a:ext>
+                  </a:extLst>
+                </a:gridCol>
+                <a:gridCol w="2213943">
+                  <a:extLst>
+                    <a:ext uri="{9D8B030D-6E8A-4147-A177-3AD203B41FA5}">
+                      <a16:colId xmlns:a16="http://schemas.microsoft.com/office/drawing/2014/main" val="1555378496"/>
+                    </a:ext>
+                  </a:extLst>
+                </a:gridCol>
+                <a:gridCol w="2213943">
+                  <a:extLst>
+                    <a:ext uri="{9D8B030D-6E8A-4147-A177-3AD203B41FA5}">
+                      <a16:colId xmlns:a16="http://schemas.microsoft.com/office/drawing/2014/main" val="964624420"/>
+                    </a:ext>
+                  </a:extLst>
+                </a:gridCol>
+                <a:gridCol w="2213943">
+                  <a:extLst>
+                    <a:ext uri="{9D8B030D-6E8A-4147-A177-3AD203B41FA5}">
+                      <a16:colId xmlns:a16="http://schemas.microsoft.com/office/drawing/2014/main" val="3283413951"/>
+                    </a:ext>
+                  </a:extLst>
+                </a:gridCol>
+              </a:tblGrid>
+              <a:tr h="453736">
+                <a:tc>
+                  <a:txBody>
+                    <a:bodyPr/>
+                    <a:lstStyle/>
+                    <a:p>
+                      <a:pPr algn="ctr" fontAlgn="ctr"/>
+                      <a:r>
+                        <a:rPr lang="en-US" sz="1400" u="none" strike="noStrike">
+                          <a:effectLst/>
+                        </a:rPr>
+                        <a:t>Producer (Sends Data)</a:t>
+                      </a:r>
+                      <a:endParaRPr lang="en-US" sz="1400" b="1" i="0" u="none" strike="noStrike">
+                        <a:solidFill>
+                          <a:srgbClr val="000000"/>
+                        </a:solidFill>
+                        <a:effectLst/>
+                        <a:latin typeface="Calibri" panose="020F0502020204030204" pitchFamily="34" charset="0"/>
+                      </a:endParaRPr>
+                    </a:p>
+                  </a:txBody>
+                  <a:tcPr marL="3781" marR="3781" marT="3781" marB="0" anchor="ctr"/>
+                </a:tc>
+                <a:tc>
+                  <a:txBody>
+                    <a:bodyPr/>
+                    <a:lstStyle/>
+                    <a:p>
+                      <a:pPr algn="ctr" fontAlgn="ctr"/>
+                      <a:r>
+                        <a:rPr lang="en-US" sz="1400" u="none" strike="noStrike">
+                          <a:effectLst/>
+                        </a:rPr>
+                        <a:t>Kafka Topic</a:t>
+                      </a:r>
+                      <a:endParaRPr lang="en-US" sz="1400" b="1" i="0" u="none" strike="noStrike">
+                        <a:solidFill>
+                          <a:srgbClr val="000000"/>
+                        </a:solidFill>
+                        <a:effectLst/>
+                        <a:latin typeface="Calibri" panose="020F0502020204030204" pitchFamily="34" charset="0"/>
+                      </a:endParaRPr>
+                    </a:p>
+                  </a:txBody>
+                  <a:tcPr marL="3781" marR="3781" marT="3781" marB="0" anchor="ctr"/>
+                </a:tc>
+                <a:tc>
+                  <a:txBody>
+                    <a:bodyPr/>
+                    <a:lstStyle/>
+                    <a:p>
+                      <a:pPr algn="ctr" fontAlgn="ctr"/>
+                      <a:r>
+                        <a:rPr lang="en-US" sz="1400" u="none" strike="noStrike">
+                          <a:effectLst/>
+                        </a:rPr>
+                        <a:t>Description of Producer Output</a:t>
+                      </a:r>
+                      <a:endParaRPr lang="en-US" sz="1400" b="1" i="0" u="none" strike="noStrike">
+                        <a:solidFill>
+                          <a:srgbClr val="000000"/>
+                        </a:solidFill>
+                        <a:effectLst/>
+                        <a:latin typeface="Calibri" panose="020F0502020204030204" pitchFamily="34" charset="0"/>
+                      </a:endParaRPr>
+                    </a:p>
+                  </a:txBody>
+                  <a:tcPr marL="3781" marR="3781" marT="3781" marB="0" anchor="ctr"/>
+                </a:tc>
+                <a:tc>
+                  <a:txBody>
+                    <a:bodyPr/>
+                    <a:lstStyle/>
+                    <a:p>
+                      <a:pPr algn="ctr" fontAlgn="ctr"/>
+                      <a:r>
+                        <a:rPr lang="en-US" sz="1400" u="none" strike="noStrike">
+                          <a:effectLst/>
+                        </a:rPr>
+                        <a:t>Consumer (Receives &amp; Processes Data)</a:t>
+                      </a:r>
+                      <a:endParaRPr lang="en-US" sz="1400" b="1" i="0" u="none" strike="noStrike">
+                        <a:solidFill>
+                          <a:srgbClr val="000000"/>
+                        </a:solidFill>
+                        <a:effectLst/>
+                        <a:latin typeface="Calibri" panose="020F0502020204030204" pitchFamily="34" charset="0"/>
+                      </a:endParaRPr>
+                    </a:p>
+                  </a:txBody>
+                  <a:tcPr marL="3781" marR="3781" marT="3781" marB="0" anchor="ctr"/>
+                </a:tc>
+                <a:tc>
+                  <a:txBody>
+                    <a:bodyPr/>
+                    <a:lstStyle/>
+                    <a:p>
+                      <a:pPr algn="ctr" fontAlgn="ctr"/>
+                      <a:r>
+                        <a:rPr lang="en-US" sz="1400" u="none" strike="noStrike">
+                          <a:effectLst/>
+                        </a:rPr>
+                        <a:t>Usage of Received Data</a:t>
+                      </a:r>
+                      <a:endParaRPr lang="en-US" sz="1400" b="1" i="0" u="none" strike="noStrike">
+                        <a:solidFill>
+                          <a:srgbClr val="000000"/>
+                        </a:solidFill>
+                        <a:effectLst/>
+                        <a:latin typeface="Calibri" panose="020F0502020204030204" pitchFamily="34" charset="0"/>
+                      </a:endParaRPr>
+                    </a:p>
+                  </a:txBody>
+                  <a:tcPr marL="3781" marR="3781" marT="3781" marB="0" anchor="ctr"/>
+                </a:tc>
+                <a:extLst>
+                  <a:ext uri="{0D108BD9-81ED-4DB2-BD59-A6C34878D82A}">
+                    <a16:rowId xmlns:a16="http://schemas.microsoft.com/office/drawing/2014/main" val="771760046"/>
+                  </a:ext>
+                </a:extLst>
+              </a:tr>
+              <a:tr h="680605">
+                <a:tc>
+                  <a:txBody>
+                    <a:bodyPr/>
+                    <a:lstStyle/>
+                    <a:p>
+                      <a:pPr algn="l" fontAlgn="ctr"/>
+                      <a:r>
+                        <a:rPr lang="en-US" sz="1400" u="none" strike="noStrike">
+                          <a:effectLst/>
+                        </a:rPr>
+                        <a:t>Online Storefront</a:t>
+                      </a:r>
+                      <a:endParaRPr lang="en-US" sz="1400" b="0" i="0" u="none" strike="noStrike">
+                        <a:solidFill>
+                          <a:srgbClr val="000000"/>
+                        </a:solidFill>
+                        <a:effectLst/>
+                        <a:latin typeface="Calibri" panose="020F0502020204030204" pitchFamily="34" charset="0"/>
+                      </a:endParaRPr>
+                    </a:p>
+                  </a:txBody>
+                  <a:tcPr marL="3781" marR="3781" marT="3781" marB="0" anchor="ctr"/>
+                </a:tc>
+                <a:tc>
+                  <a:txBody>
+                    <a:bodyPr/>
+                    <a:lstStyle/>
+                    <a:p>
+                      <a:pPr algn="l" fontAlgn="ctr"/>
+                      <a:r>
+                        <a:rPr lang="en-US" sz="1400" u="none" strike="noStrike">
+                          <a:effectLst/>
+                        </a:rPr>
+                        <a:t>orders</a:t>
+                      </a:r>
+                      <a:endParaRPr lang="en-US" sz="1400" b="0" i="0" u="none" strike="noStrike">
+                        <a:solidFill>
+                          <a:srgbClr val="000000"/>
+                        </a:solidFill>
+                        <a:effectLst/>
+                        <a:latin typeface="Arial Unicode MS"/>
+                      </a:endParaRPr>
+                    </a:p>
+                  </a:txBody>
+                  <a:tcPr marL="3781" marR="3781" marT="3781" marB="0" anchor="ctr"/>
+                </a:tc>
+                <a:tc>
+                  <a:txBody>
+                    <a:bodyPr/>
+                    <a:lstStyle/>
+                    <a:p>
+                      <a:pPr algn="l" fontAlgn="ctr"/>
+                      <a:r>
+                        <a:rPr lang="en-US" sz="1400" u="none" strike="noStrike">
+                          <a:effectLst/>
+                        </a:rPr>
+                        <a:t>Sends new customer orders with item details and total amount</a:t>
+                      </a:r>
+                      <a:endParaRPr lang="en-US" sz="1400" b="0" i="0" u="none" strike="noStrike">
+                        <a:solidFill>
+                          <a:srgbClr val="000000"/>
+                        </a:solidFill>
+                        <a:effectLst/>
+                        <a:latin typeface="Calibri" panose="020F0502020204030204" pitchFamily="34" charset="0"/>
+                      </a:endParaRPr>
+                    </a:p>
+                  </a:txBody>
+                  <a:tcPr marL="3781" marR="3781" marT="3781" marB="0" anchor="ctr"/>
+                </a:tc>
+                <a:tc>
+                  <a:txBody>
+                    <a:bodyPr/>
+                    <a:lstStyle/>
+                    <a:p>
+                      <a:pPr algn="l" fontAlgn="ctr"/>
+                      <a:r>
+                        <a:rPr lang="en-US" sz="1400" u="none" strike="noStrike">
+                          <a:effectLst/>
+                        </a:rPr>
+                        <a:t>Order Processing Service</a:t>
+                      </a:r>
+                      <a:endParaRPr lang="en-US" sz="1400" b="0" i="0" u="none" strike="noStrike">
+                        <a:solidFill>
+                          <a:srgbClr val="000000"/>
+                        </a:solidFill>
+                        <a:effectLst/>
+                        <a:latin typeface="Calibri" panose="020F0502020204030204" pitchFamily="34" charset="0"/>
+                      </a:endParaRPr>
+                    </a:p>
+                  </a:txBody>
+                  <a:tcPr marL="3781" marR="3781" marT="3781" marB="0" anchor="ctr"/>
+                </a:tc>
+                <a:tc>
+                  <a:txBody>
+                    <a:bodyPr/>
+                    <a:lstStyle/>
+                    <a:p>
+                      <a:pPr algn="l" fontAlgn="ctr"/>
+                      <a:r>
+                        <a:rPr lang="en-US" sz="1400" u="none" strike="noStrike">
+                          <a:effectLst/>
+                        </a:rPr>
+                        <a:t>Validates order, checks stock, and verifies payment</a:t>
+                      </a:r>
+                      <a:endParaRPr lang="en-US" sz="1400" b="0" i="0" u="none" strike="noStrike">
+                        <a:solidFill>
+                          <a:srgbClr val="000000"/>
+                        </a:solidFill>
+                        <a:effectLst/>
+                        <a:latin typeface="Calibri" panose="020F0502020204030204" pitchFamily="34" charset="0"/>
+                      </a:endParaRPr>
+                    </a:p>
+                  </a:txBody>
+                  <a:tcPr marL="3781" marR="3781" marT="3781" marB="0" anchor="ctr"/>
+                </a:tc>
+                <a:extLst>
+                  <a:ext uri="{0D108BD9-81ED-4DB2-BD59-A6C34878D82A}">
+                    <a16:rowId xmlns:a16="http://schemas.microsoft.com/office/drawing/2014/main" val="90184023"/>
+                  </a:ext>
+                </a:extLst>
+              </a:tr>
+              <a:tr h="604982">
+                <a:tc>
+                  <a:txBody>
+                    <a:bodyPr/>
+                    <a:lstStyle/>
+                    <a:p>
+                      <a:pPr algn="l" fontAlgn="ctr"/>
+                      <a:r>
+                        <a:rPr lang="en-US" sz="1400" u="none" strike="noStrike">
+                          <a:effectLst/>
+                        </a:rPr>
+                        <a:t>Order Processing Service</a:t>
+                      </a:r>
+                      <a:endParaRPr lang="en-US" sz="1400" b="0" i="0" u="none" strike="noStrike">
+                        <a:solidFill>
+                          <a:srgbClr val="000000"/>
+                        </a:solidFill>
+                        <a:effectLst/>
+                        <a:latin typeface="Calibri" panose="020F0502020204030204" pitchFamily="34" charset="0"/>
+                      </a:endParaRPr>
+                    </a:p>
+                  </a:txBody>
+                  <a:tcPr marL="3781" marR="3781" marT="3781" marB="0" anchor="ctr"/>
+                </a:tc>
+                <a:tc>
+                  <a:txBody>
+                    <a:bodyPr/>
+                    <a:lstStyle/>
+                    <a:p>
+                      <a:pPr algn="l" fontAlgn="ctr"/>
+                      <a:r>
+                        <a:rPr lang="en-US" sz="1400" u="none" strike="noStrike">
+                          <a:effectLst/>
+                        </a:rPr>
+                        <a:t>inventory</a:t>
+                      </a:r>
+                      <a:endParaRPr lang="en-US" sz="1400" b="0" i="0" u="none" strike="noStrike">
+                        <a:solidFill>
+                          <a:srgbClr val="000000"/>
+                        </a:solidFill>
+                        <a:effectLst/>
+                        <a:latin typeface="Arial Unicode MS"/>
+                      </a:endParaRPr>
+                    </a:p>
+                  </a:txBody>
+                  <a:tcPr marL="3781" marR="3781" marT="3781" marB="0" anchor="ctr"/>
+                </a:tc>
+                <a:tc>
+                  <a:txBody>
+                    <a:bodyPr/>
+                    <a:lstStyle/>
+                    <a:p>
+                      <a:pPr algn="l" fontAlgn="ctr"/>
+                      <a:r>
+                        <a:rPr lang="en-US" sz="1400" u="none" strike="noStrike">
+                          <a:effectLst/>
+                        </a:rPr>
+                        <a:t>Sends stock update requests after order validation</a:t>
+                      </a:r>
+                      <a:endParaRPr lang="en-US" sz="1400" b="0" i="0" u="none" strike="noStrike">
+                        <a:solidFill>
+                          <a:srgbClr val="000000"/>
+                        </a:solidFill>
+                        <a:effectLst/>
+                        <a:latin typeface="Calibri" panose="020F0502020204030204" pitchFamily="34" charset="0"/>
+                      </a:endParaRPr>
+                    </a:p>
+                  </a:txBody>
+                  <a:tcPr marL="3781" marR="3781" marT="3781" marB="0" anchor="ctr"/>
+                </a:tc>
+                <a:tc>
+                  <a:txBody>
+                    <a:bodyPr/>
+                    <a:lstStyle/>
+                    <a:p>
+                      <a:pPr algn="l" fontAlgn="ctr"/>
+                      <a:r>
+                        <a:rPr lang="en-US" sz="1400" u="none" strike="noStrike">
+                          <a:effectLst/>
+                        </a:rPr>
+                        <a:t>Inventory Management Service</a:t>
+                      </a:r>
+                      <a:endParaRPr lang="en-US" sz="1400" b="0" i="0" u="none" strike="noStrike">
+                        <a:solidFill>
+                          <a:srgbClr val="000000"/>
+                        </a:solidFill>
+                        <a:effectLst/>
+                        <a:latin typeface="Calibri" panose="020F0502020204030204" pitchFamily="34" charset="0"/>
+                      </a:endParaRPr>
+                    </a:p>
+                  </a:txBody>
+                  <a:tcPr marL="3781" marR="3781" marT="3781" marB="0" anchor="ctr"/>
+                </a:tc>
+                <a:tc>
+                  <a:txBody>
+                    <a:bodyPr/>
+                    <a:lstStyle/>
+                    <a:p>
+                      <a:pPr algn="l" fontAlgn="ctr"/>
+                      <a:r>
+                        <a:rPr lang="en-US" sz="1400" u="none" strike="noStrike">
+                          <a:effectLst/>
+                        </a:rPr>
+                        <a:t>Updates stock levels and confirms availability</a:t>
+                      </a:r>
+                      <a:endParaRPr lang="en-US" sz="1400" b="0" i="0" u="none" strike="noStrike">
+                        <a:solidFill>
+                          <a:srgbClr val="000000"/>
+                        </a:solidFill>
+                        <a:effectLst/>
+                        <a:latin typeface="Calibri" panose="020F0502020204030204" pitchFamily="34" charset="0"/>
+                      </a:endParaRPr>
+                    </a:p>
+                  </a:txBody>
+                  <a:tcPr marL="3781" marR="3781" marT="3781" marB="0" anchor="ctr"/>
+                </a:tc>
+                <a:extLst>
+                  <a:ext uri="{0D108BD9-81ED-4DB2-BD59-A6C34878D82A}">
+                    <a16:rowId xmlns:a16="http://schemas.microsoft.com/office/drawing/2014/main" val="2053896955"/>
+                  </a:ext>
+                </a:extLst>
+              </a:tr>
+              <a:tr h="907473">
+                <a:tc>
+                  <a:txBody>
+                    <a:bodyPr/>
+                    <a:lstStyle/>
+                    <a:p>
+                      <a:pPr algn="l" fontAlgn="ctr"/>
+                      <a:r>
+                        <a:rPr lang="en-US" sz="1400" u="none" strike="noStrike">
+                          <a:effectLst/>
+                        </a:rPr>
+                        <a:t>Warehouse System</a:t>
+                      </a:r>
+                      <a:endParaRPr lang="en-US" sz="1400" b="0" i="0" u="none" strike="noStrike">
+                        <a:solidFill>
+                          <a:srgbClr val="000000"/>
+                        </a:solidFill>
+                        <a:effectLst/>
+                        <a:latin typeface="Calibri" panose="020F0502020204030204" pitchFamily="34" charset="0"/>
+                      </a:endParaRPr>
+                    </a:p>
+                  </a:txBody>
+                  <a:tcPr marL="3781" marR="3781" marT="3781" marB="0" anchor="ctr"/>
+                </a:tc>
+                <a:tc>
+                  <a:txBody>
+                    <a:bodyPr/>
+                    <a:lstStyle/>
+                    <a:p>
+                      <a:pPr algn="l" fontAlgn="ctr"/>
+                      <a:r>
+                        <a:rPr lang="en-US" sz="1400" u="none" strike="noStrike">
+                          <a:effectLst/>
+                        </a:rPr>
+                        <a:t>inventory</a:t>
+                      </a:r>
+                      <a:endParaRPr lang="en-US" sz="1400" b="0" i="0" u="none" strike="noStrike">
+                        <a:solidFill>
+                          <a:srgbClr val="000000"/>
+                        </a:solidFill>
+                        <a:effectLst/>
+                        <a:latin typeface="Arial Unicode MS"/>
+                      </a:endParaRPr>
+                    </a:p>
+                  </a:txBody>
+                  <a:tcPr marL="3781" marR="3781" marT="3781" marB="0" anchor="ctr"/>
+                </a:tc>
+                <a:tc>
+                  <a:txBody>
+                    <a:bodyPr/>
+                    <a:lstStyle/>
+                    <a:p>
+                      <a:pPr algn="l" fontAlgn="ctr"/>
+                      <a:r>
+                        <a:rPr lang="en-US" sz="1400" u="none" strike="noStrike">
+                          <a:effectLst/>
+                        </a:rPr>
+                        <a:t>Sends real-time stock updates when items are received or dispatched</a:t>
+                      </a:r>
+                      <a:endParaRPr lang="en-US" sz="1400" b="0" i="0" u="none" strike="noStrike">
+                        <a:solidFill>
+                          <a:srgbClr val="000000"/>
+                        </a:solidFill>
+                        <a:effectLst/>
+                        <a:latin typeface="Calibri" panose="020F0502020204030204" pitchFamily="34" charset="0"/>
+                      </a:endParaRPr>
+                    </a:p>
+                  </a:txBody>
+                  <a:tcPr marL="3781" marR="3781" marT="3781" marB="0" anchor="ctr"/>
+                </a:tc>
+                <a:tc>
+                  <a:txBody>
+                    <a:bodyPr/>
+                    <a:lstStyle/>
+                    <a:p>
+                      <a:pPr algn="l" fontAlgn="ctr"/>
+                      <a:r>
+                        <a:rPr lang="en-US" sz="1400" u="none" strike="noStrike">
+                          <a:effectLst/>
+                        </a:rPr>
+                        <a:t>Order Processing Service</a:t>
+                      </a:r>
+                      <a:endParaRPr lang="en-US" sz="1400" b="0" i="0" u="none" strike="noStrike">
+                        <a:solidFill>
+                          <a:srgbClr val="000000"/>
+                        </a:solidFill>
+                        <a:effectLst/>
+                        <a:latin typeface="Calibri" panose="020F0502020204030204" pitchFamily="34" charset="0"/>
+                      </a:endParaRPr>
+                    </a:p>
+                  </a:txBody>
+                  <a:tcPr marL="3781" marR="3781" marT="3781" marB="0" anchor="ctr"/>
+                </a:tc>
+                <a:tc>
+                  <a:txBody>
+                    <a:bodyPr/>
+                    <a:lstStyle/>
+                    <a:p>
+                      <a:pPr algn="l" fontAlgn="ctr"/>
+                      <a:r>
+                        <a:rPr lang="en-US" sz="1400" u="none" strike="noStrike">
+                          <a:effectLst/>
+                        </a:rPr>
+                        <a:t>Adjusts order fulfillment based on inventory</a:t>
+                      </a:r>
+                      <a:endParaRPr lang="en-US" sz="1400" b="0" i="0" u="none" strike="noStrike">
+                        <a:solidFill>
+                          <a:srgbClr val="000000"/>
+                        </a:solidFill>
+                        <a:effectLst/>
+                        <a:latin typeface="Calibri" panose="020F0502020204030204" pitchFamily="34" charset="0"/>
+                      </a:endParaRPr>
+                    </a:p>
+                  </a:txBody>
+                  <a:tcPr marL="3781" marR="3781" marT="3781" marB="0" anchor="ctr"/>
+                </a:tc>
+                <a:extLst>
+                  <a:ext uri="{0D108BD9-81ED-4DB2-BD59-A6C34878D82A}">
+                    <a16:rowId xmlns:a16="http://schemas.microsoft.com/office/drawing/2014/main" val="2226323893"/>
+                  </a:ext>
+                </a:extLst>
+              </a:tr>
+              <a:tr h="453736">
+                <a:tc>
+                  <a:txBody>
+                    <a:bodyPr/>
+                    <a:lstStyle/>
+                    <a:p>
+                      <a:pPr algn="l" fontAlgn="ctr"/>
+                      <a:r>
+                        <a:rPr lang="en-US" sz="1400" u="none" strike="noStrike">
+                          <a:effectLst/>
+                        </a:rPr>
+                        <a:t>Payment Gateway</a:t>
+                      </a:r>
+                      <a:endParaRPr lang="en-US" sz="1400" b="0" i="0" u="none" strike="noStrike">
+                        <a:solidFill>
+                          <a:srgbClr val="000000"/>
+                        </a:solidFill>
+                        <a:effectLst/>
+                        <a:latin typeface="Calibri" panose="020F0502020204030204" pitchFamily="34" charset="0"/>
+                      </a:endParaRPr>
+                    </a:p>
+                  </a:txBody>
+                  <a:tcPr marL="3781" marR="3781" marT="3781" marB="0" anchor="ctr"/>
+                </a:tc>
+                <a:tc>
+                  <a:txBody>
+                    <a:bodyPr/>
+                    <a:lstStyle/>
+                    <a:p>
+                      <a:pPr algn="l" fontAlgn="ctr"/>
+                      <a:r>
+                        <a:rPr lang="en-US" sz="1400" u="none" strike="noStrike">
+                          <a:effectLst/>
+                        </a:rPr>
+                        <a:t>payments</a:t>
+                      </a:r>
+                      <a:endParaRPr lang="en-US" sz="1400" b="0" i="0" u="none" strike="noStrike">
+                        <a:solidFill>
+                          <a:srgbClr val="000000"/>
+                        </a:solidFill>
+                        <a:effectLst/>
+                        <a:latin typeface="Arial Unicode MS"/>
+                      </a:endParaRPr>
+                    </a:p>
+                  </a:txBody>
+                  <a:tcPr marL="3781" marR="3781" marT="3781" marB="0" anchor="ctr"/>
+                </a:tc>
+                <a:tc>
+                  <a:txBody>
+                    <a:bodyPr/>
+                    <a:lstStyle/>
+                    <a:p>
+                      <a:pPr algn="l" fontAlgn="ctr"/>
+                      <a:r>
+                        <a:rPr lang="en-US" sz="1400" u="none" strike="noStrike">
+                          <a:effectLst/>
+                        </a:rPr>
+                        <a:t>Sends payment confirmation or failure status</a:t>
+                      </a:r>
+                      <a:endParaRPr lang="en-US" sz="1400" b="0" i="0" u="none" strike="noStrike">
+                        <a:solidFill>
+                          <a:srgbClr val="000000"/>
+                        </a:solidFill>
+                        <a:effectLst/>
+                        <a:latin typeface="Calibri" panose="020F0502020204030204" pitchFamily="34" charset="0"/>
+                      </a:endParaRPr>
+                    </a:p>
+                  </a:txBody>
+                  <a:tcPr marL="3781" marR="3781" marT="3781" marB="0" anchor="ctr"/>
+                </a:tc>
+                <a:tc>
+                  <a:txBody>
+                    <a:bodyPr/>
+                    <a:lstStyle/>
+                    <a:p>
+                      <a:pPr algn="l" fontAlgn="ctr"/>
+                      <a:r>
+                        <a:rPr lang="en-US" sz="1400" u="none" strike="noStrike">
+                          <a:effectLst/>
+                        </a:rPr>
+                        <a:t>Order Processing Service</a:t>
+                      </a:r>
+                      <a:endParaRPr lang="en-US" sz="1400" b="0" i="0" u="none" strike="noStrike">
+                        <a:solidFill>
+                          <a:srgbClr val="000000"/>
+                        </a:solidFill>
+                        <a:effectLst/>
+                        <a:latin typeface="Calibri" panose="020F0502020204030204" pitchFamily="34" charset="0"/>
+                      </a:endParaRPr>
+                    </a:p>
+                  </a:txBody>
+                  <a:tcPr marL="3781" marR="3781" marT="3781" marB="0" anchor="ctr"/>
+                </a:tc>
+                <a:tc>
+                  <a:txBody>
+                    <a:bodyPr/>
+                    <a:lstStyle/>
+                    <a:p>
+                      <a:pPr algn="l" fontAlgn="ctr"/>
+                      <a:r>
+                        <a:rPr lang="en-US" sz="1400" u="none" strike="noStrike">
+                          <a:effectLst/>
+                        </a:rPr>
+                        <a:t>Marks order as paid or cancels if payment fails</a:t>
+                      </a:r>
+                      <a:endParaRPr lang="en-US" sz="1400" b="0" i="0" u="none" strike="noStrike">
+                        <a:solidFill>
+                          <a:srgbClr val="000000"/>
+                        </a:solidFill>
+                        <a:effectLst/>
+                        <a:latin typeface="Calibri" panose="020F0502020204030204" pitchFamily="34" charset="0"/>
+                      </a:endParaRPr>
+                    </a:p>
+                  </a:txBody>
+                  <a:tcPr marL="3781" marR="3781" marT="3781" marB="0" anchor="ctr"/>
+                </a:tc>
+                <a:extLst>
+                  <a:ext uri="{0D108BD9-81ED-4DB2-BD59-A6C34878D82A}">
+                    <a16:rowId xmlns:a16="http://schemas.microsoft.com/office/drawing/2014/main" val="3650993595"/>
+                  </a:ext>
+                </a:extLst>
+              </a:tr>
+              <a:tr h="453736">
+                <a:tc>
+                  <a:txBody>
+                    <a:bodyPr/>
+                    <a:lstStyle/>
+                    <a:p>
+                      <a:pPr algn="l" fontAlgn="ctr"/>
+                      <a:r>
+                        <a:rPr lang="en-US" sz="1400" u="none" strike="noStrike">
+                          <a:effectLst/>
+                        </a:rPr>
+                        <a:t>Order Processing Service</a:t>
+                      </a:r>
+                      <a:endParaRPr lang="en-US" sz="1400" b="0" i="0" u="none" strike="noStrike">
+                        <a:solidFill>
+                          <a:srgbClr val="000000"/>
+                        </a:solidFill>
+                        <a:effectLst/>
+                        <a:latin typeface="Calibri" panose="020F0502020204030204" pitchFamily="34" charset="0"/>
+                      </a:endParaRPr>
+                    </a:p>
+                  </a:txBody>
+                  <a:tcPr marL="3781" marR="3781" marT="3781" marB="0" anchor="ctr"/>
+                </a:tc>
+                <a:tc>
+                  <a:txBody>
+                    <a:bodyPr/>
+                    <a:lstStyle/>
+                    <a:p>
+                      <a:pPr algn="l" fontAlgn="ctr"/>
+                      <a:r>
+                        <a:rPr lang="en-US" sz="1400" u="none" strike="noStrike">
+                          <a:effectLst/>
+                        </a:rPr>
+                        <a:t>shipping</a:t>
+                      </a:r>
+                      <a:endParaRPr lang="en-US" sz="1400" b="0" i="0" u="none" strike="noStrike">
+                        <a:solidFill>
+                          <a:srgbClr val="000000"/>
+                        </a:solidFill>
+                        <a:effectLst/>
+                        <a:latin typeface="Arial Unicode MS"/>
+                      </a:endParaRPr>
+                    </a:p>
+                  </a:txBody>
+                  <a:tcPr marL="3781" marR="3781" marT="3781" marB="0" anchor="ctr"/>
+                </a:tc>
+                <a:tc>
+                  <a:txBody>
+                    <a:bodyPr/>
+                    <a:lstStyle/>
+                    <a:p>
+                      <a:pPr algn="l" fontAlgn="ctr"/>
+                      <a:r>
+                        <a:rPr lang="en-US" sz="1400" u="none" strike="noStrike">
+                          <a:effectLst/>
+                        </a:rPr>
+                        <a:t>Sends confirmed orders ready for shipping</a:t>
+                      </a:r>
+                      <a:endParaRPr lang="en-US" sz="1400" b="0" i="0" u="none" strike="noStrike">
+                        <a:solidFill>
+                          <a:srgbClr val="000000"/>
+                        </a:solidFill>
+                        <a:effectLst/>
+                        <a:latin typeface="Calibri" panose="020F0502020204030204" pitchFamily="34" charset="0"/>
+                      </a:endParaRPr>
+                    </a:p>
+                  </a:txBody>
+                  <a:tcPr marL="3781" marR="3781" marT="3781" marB="0" anchor="ctr"/>
+                </a:tc>
+                <a:tc>
+                  <a:txBody>
+                    <a:bodyPr/>
+                    <a:lstStyle/>
+                    <a:p>
+                      <a:pPr algn="l" fontAlgn="ctr"/>
+                      <a:r>
+                        <a:rPr lang="en-US" sz="1400" u="none" strike="noStrike">
+                          <a:effectLst/>
+                        </a:rPr>
+                        <a:t>Shipping Service</a:t>
+                      </a:r>
+                      <a:endParaRPr lang="en-US" sz="1400" b="0" i="0" u="none" strike="noStrike">
+                        <a:solidFill>
+                          <a:srgbClr val="000000"/>
+                        </a:solidFill>
+                        <a:effectLst/>
+                        <a:latin typeface="Calibri" panose="020F0502020204030204" pitchFamily="34" charset="0"/>
+                      </a:endParaRPr>
+                    </a:p>
+                  </a:txBody>
+                  <a:tcPr marL="3781" marR="3781" marT="3781" marB="0" anchor="ctr"/>
+                </a:tc>
+                <a:tc>
+                  <a:txBody>
+                    <a:bodyPr/>
+                    <a:lstStyle/>
+                    <a:p>
+                      <a:pPr algn="l" fontAlgn="ctr"/>
+                      <a:r>
+                        <a:rPr lang="en-US" sz="1400" u="none" strike="noStrike">
+                          <a:effectLst/>
+                        </a:rPr>
+                        <a:t>Creates a shipment and assigns a tracking number</a:t>
+                      </a:r>
+                      <a:endParaRPr lang="en-US" sz="1400" b="0" i="0" u="none" strike="noStrike">
+                        <a:solidFill>
+                          <a:srgbClr val="000000"/>
+                        </a:solidFill>
+                        <a:effectLst/>
+                        <a:latin typeface="Calibri" panose="020F0502020204030204" pitchFamily="34" charset="0"/>
+                      </a:endParaRPr>
+                    </a:p>
+                  </a:txBody>
+                  <a:tcPr marL="3781" marR="3781" marT="3781" marB="0" anchor="ctr"/>
+                </a:tc>
+                <a:extLst>
+                  <a:ext uri="{0D108BD9-81ED-4DB2-BD59-A6C34878D82A}">
+                    <a16:rowId xmlns:a16="http://schemas.microsoft.com/office/drawing/2014/main" val="2240391762"/>
+                  </a:ext>
+                </a:extLst>
+              </a:tr>
+              <a:tr h="756227">
+                <a:tc>
+                  <a:txBody>
+                    <a:bodyPr/>
+                    <a:lstStyle/>
+                    <a:p>
+                      <a:pPr algn="l" fontAlgn="ctr"/>
+                      <a:r>
+                        <a:rPr lang="en-US" sz="1400" u="none" strike="noStrike">
+                          <a:effectLst/>
+                        </a:rPr>
+                        <a:t>Shipping Provider</a:t>
+                      </a:r>
+                      <a:endParaRPr lang="en-US" sz="1400" b="0" i="0" u="none" strike="noStrike">
+                        <a:solidFill>
+                          <a:srgbClr val="000000"/>
+                        </a:solidFill>
+                        <a:effectLst/>
+                        <a:latin typeface="Calibri" panose="020F0502020204030204" pitchFamily="34" charset="0"/>
+                      </a:endParaRPr>
+                    </a:p>
+                  </a:txBody>
+                  <a:tcPr marL="3781" marR="3781" marT="3781" marB="0" anchor="ctr"/>
+                </a:tc>
+                <a:tc>
+                  <a:txBody>
+                    <a:bodyPr/>
+                    <a:lstStyle/>
+                    <a:p>
+                      <a:pPr algn="l" fontAlgn="ctr"/>
+                      <a:r>
+                        <a:rPr lang="en-US" sz="1400" u="none" strike="noStrike">
+                          <a:effectLst/>
+                        </a:rPr>
+                        <a:t>shipping</a:t>
+                      </a:r>
+                      <a:endParaRPr lang="en-US" sz="1400" b="0" i="0" u="none" strike="noStrike">
+                        <a:solidFill>
+                          <a:srgbClr val="000000"/>
+                        </a:solidFill>
+                        <a:effectLst/>
+                        <a:latin typeface="Arial Unicode MS"/>
+                      </a:endParaRPr>
+                    </a:p>
+                  </a:txBody>
+                  <a:tcPr marL="3781" marR="3781" marT="3781" marB="0" anchor="ctr"/>
+                </a:tc>
+                <a:tc>
+                  <a:txBody>
+                    <a:bodyPr/>
+                    <a:lstStyle/>
+                    <a:p>
+                      <a:pPr algn="l" fontAlgn="ctr"/>
+                      <a:r>
+                        <a:rPr lang="en-US" sz="1400" u="none" strike="noStrike">
+                          <a:effectLst/>
+                        </a:rPr>
+                        <a:t>Sends delivery updates such as shipment dispatched or delivered</a:t>
+                      </a:r>
+                      <a:endParaRPr lang="en-US" sz="1400" b="0" i="0" u="none" strike="noStrike">
+                        <a:solidFill>
+                          <a:srgbClr val="000000"/>
+                        </a:solidFill>
+                        <a:effectLst/>
+                        <a:latin typeface="Calibri" panose="020F0502020204030204" pitchFamily="34" charset="0"/>
+                      </a:endParaRPr>
+                    </a:p>
+                  </a:txBody>
+                  <a:tcPr marL="3781" marR="3781" marT="3781" marB="0" anchor="ctr"/>
+                </a:tc>
+                <a:tc>
+                  <a:txBody>
+                    <a:bodyPr/>
+                    <a:lstStyle/>
+                    <a:p>
+                      <a:pPr algn="l" fontAlgn="ctr"/>
+                      <a:r>
+                        <a:rPr lang="en-US" sz="1400" u="none" strike="noStrike">
+                          <a:effectLst/>
+                        </a:rPr>
+                        <a:t>Customer Notification Service</a:t>
+                      </a:r>
+                      <a:endParaRPr lang="en-US" sz="1400" b="0" i="0" u="none" strike="noStrike">
+                        <a:solidFill>
+                          <a:srgbClr val="000000"/>
+                        </a:solidFill>
+                        <a:effectLst/>
+                        <a:latin typeface="Calibri" panose="020F0502020204030204" pitchFamily="34" charset="0"/>
+                      </a:endParaRPr>
+                    </a:p>
+                  </a:txBody>
+                  <a:tcPr marL="3781" marR="3781" marT="3781" marB="0" anchor="ctr"/>
+                </a:tc>
+                <a:tc>
+                  <a:txBody>
+                    <a:bodyPr/>
+                    <a:lstStyle/>
+                    <a:p>
+                      <a:pPr algn="l" fontAlgn="ctr"/>
+                      <a:r>
+                        <a:rPr lang="en-US" sz="1400" u="none" strike="noStrike">
+                          <a:effectLst/>
+                        </a:rPr>
+                        <a:t>Notifies the customer about shipping progress</a:t>
+                      </a:r>
+                      <a:endParaRPr lang="en-US" sz="1400" b="0" i="0" u="none" strike="noStrike">
+                        <a:solidFill>
+                          <a:srgbClr val="000000"/>
+                        </a:solidFill>
+                        <a:effectLst/>
+                        <a:latin typeface="Calibri" panose="020F0502020204030204" pitchFamily="34" charset="0"/>
+                      </a:endParaRPr>
+                    </a:p>
+                  </a:txBody>
+                  <a:tcPr marL="3781" marR="3781" marT="3781" marB="0" anchor="ctr"/>
+                </a:tc>
+                <a:extLst>
+                  <a:ext uri="{0D108BD9-81ED-4DB2-BD59-A6C34878D82A}">
+                    <a16:rowId xmlns:a16="http://schemas.microsoft.com/office/drawing/2014/main" val="2335326239"/>
+                  </a:ext>
+                </a:extLst>
+              </a:tr>
+              <a:tr h="680605">
+                <a:tc>
+                  <a:txBody>
+                    <a:bodyPr/>
+                    <a:lstStyle/>
+                    <a:p>
+                      <a:pPr algn="l" fontAlgn="ctr"/>
+                      <a:r>
+                        <a:rPr lang="en-US" sz="1400" u="none" strike="noStrike">
+                          <a:effectLst/>
+                        </a:rPr>
+                        <a:t>Order Processing &amp; Shipping</a:t>
+                      </a:r>
+                      <a:endParaRPr lang="en-US" sz="1400" b="0" i="0" u="none" strike="noStrike">
+                        <a:solidFill>
+                          <a:srgbClr val="000000"/>
+                        </a:solidFill>
+                        <a:effectLst/>
+                        <a:latin typeface="Calibri" panose="020F0502020204030204" pitchFamily="34" charset="0"/>
+                      </a:endParaRPr>
+                    </a:p>
+                  </a:txBody>
+                  <a:tcPr marL="3781" marR="3781" marT="3781" marB="0" anchor="ctr"/>
+                </a:tc>
+                <a:tc>
+                  <a:txBody>
+                    <a:bodyPr/>
+                    <a:lstStyle/>
+                    <a:p>
+                      <a:pPr algn="l" fontAlgn="ctr"/>
+                      <a:r>
+                        <a:rPr lang="en-US" sz="1400" u="none" strike="noStrike">
+                          <a:effectLst/>
+                        </a:rPr>
+                        <a:t>notifications</a:t>
+                      </a:r>
+                      <a:endParaRPr lang="en-US" sz="1400" b="0" i="0" u="none" strike="noStrike">
+                        <a:solidFill>
+                          <a:srgbClr val="000000"/>
+                        </a:solidFill>
+                        <a:effectLst/>
+                        <a:latin typeface="Arial Unicode MS"/>
+                      </a:endParaRPr>
+                    </a:p>
+                  </a:txBody>
+                  <a:tcPr marL="3781" marR="3781" marT="3781" marB="0" anchor="ctr"/>
+                </a:tc>
+                <a:tc>
+                  <a:txBody>
+                    <a:bodyPr/>
+                    <a:lstStyle/>
+                    <a:p>
+                      <a:pPr algn="l" fontAlgn="ctr"/>
+                      <a:r>
+                        <a:rPr lang="en-US" sz="1400" u="none" strike="noStrike">
+                          <a:effectLst/>
+                        </a:rPr>
+                        <a:t>Sends status updates like "Order Shipped" or "Payment Failed"</a:t>
+                      </a:r>
+                      <a:endParaRPr lang="en-US" sz="1400" b="0" i="0" u="none" strike="noStrike">
+                        <a:solidFill>
+                          <a:srgbClr val="000000"/>
+                        </a:solidFill>
+                        <a:effectLst/>
+                        <a:latin typeface="Calibri" panose="020F0502020204030204" pitchFamily="34" charset="0"/>
+                      </a:endParaRPr>
+                    </a:p>
+                  </a:txBody>
+                  <a:tcPr marL="3781" marR="3781" marT="3781" marB="0" anchor="ctr"/>
+                </a:tc>
+                <a:tc>
+                  <a:txBody>
+                    <a:bodyPr/>
+                    <a:lstStyle/>
+                    <a:p>
+                      <a:pPr algn="l" fontAlgn="ctr"/>
+                      <a:r>
+                        <a:rPr lang="en-US" sz="1400" u="none" strike="noStrike">
+                          <a:effectLst/>
+                        </a:rPr>
+                        <a:t>Customer Notification Service</a:t>
+                      </a:r>
+                      <a:endParaRPr lang="en-US" sz="1400" b="0" i="0" u="none" strike="noStrike">
+                        <a:solidFill>
+                          <a:srgbClr val="000000"/>
+                        </a:solidFill>
+                        <a:effectLst/>
+                        <a:latin typeface="Calibri" panose="020F0502020204030204" pitchFamily="34" charset="0"/>
+                      </a:endParaRPr>
+                    </a:p>
+                  </a:txBody>
+                  <a:tcPr marL="3781" marR="3781" marT="3781" marB="0" anchor="ctr"/>
+                </a:tc>
+                <a:tc>
+                  <a:txBody>
+                    <a:bodyPr/>
+                    <a:lstStyle/>
+                    <a:p>
+                      <a:pPr algn="l" fontAlgn="ctr"/>
+                      <a:r>
+                        <a:rPr lang="en-US" sz="1400" u="none" strike="noStrike" dirty="0">
+                          <a:effectLst/>
+                        </a:rPr>
+                        <a:t>Triggers email/SMS notifications to customers</a:t>
+                      </a:r>
+                      <a:endParaRPr lang="en-US" sz="1400" b="0" i="0" u="none" strike="noStrike" dirty="0">
+                        <a:solidFill>
+                          <a:srgbClr val="000000"/>
+                        </a:solidFill>
+                        <a:effectLst/>
+                        <a:latin typeface="Calibri" panose="020F0502020204030204" pitchFamily="34" charset="0"/>
+                      </a:endParaRPr>
+                    </a:p>
+                  </a:txBody>
+                  <a:tcPr marL="3781" marR="3781" marT="3781" marB="0" anchor="ctr"/>
+                </a:tc>
+                <a:extLst>
+                  <a:ext uri="{0D108BD9-81ED-4DB2-BD59-A6C34878D82A}">
+                    <a16:rowId xmlns:a16="http://schemas.microsoft.com/office/drawing/2014/main" val="2274650407"/>
+                  </a:ext>
+                </a:extLst>
+              </a:tr>
+            </a:tbl>
+          </a:graphicData>
+        </a:graphic>
+      </p:graphicFrame>
     </p:spTree>
     <p:extLst>
       <p:ext uri="{BB962C8B-B14F-4D97-AF65-F5344CB8AC3E}">
-        <p14:creationId xmlns:p14="http://schemas.microsoft.com/office/powerpoint/2010/main" val="2164727706"/>
+        <p14:creationId xmlns:p14="http://schemas.microsoft.com/office/powerpoint/2010/main" val="1605944735"/>
       </p:ext>
     </p:extLst>
   </p:cSld>
@@ -21823,7 +22464,7 @@
           <p:cNvPr id="2" name="Title 1">
             <a:extLst>
               <a:ext uri="{FF2B5EF4-FFF2-40B4-BE49-F238E27FC236}">
-                <a16:creationId xmlns:a16="http://schemas.microsoft.com/office/drawing/2014/main" id="{94C8800D-C43B-4FD7-A318-67AEB8003E93}"/>
+                <a16:creationId xmlns:a16="http://schemas.microsoft.com/office/drawing/2014/main" id="{A2B633F3-47B3-426F-BE46-842E0F7F5E3A}"/>
               </a:ext>
             </a:extLst>
           </p:cNvPr>
@@ -21836,225 +22477,191 @@
         </p:nvSpPr>
         <p:spPr/>
         <p:txBody>
-          <a:bodyPr>
-            <a:normAutofit/>
+          <a:bodyPr/>
+          <a:lstStyle/>
+          <a:p>
+            <a:r>
+              <a:rPr lang="en-US" dirty="0"/>
+              <a:t>Kafka Message Example</a:t>
+            </a:r>
+          </a:p>
+        </p:txBody>
+      </p:sp>
+      <p:pic>
+        <p:nvPicPr>
+          <p:cNvPr id="5" name="Content Placeholder 4">
+            <a:extLst>
+              <a:ext uri="{FF2B5EF4-FFF2-40B4-BE49-F238E27FC236}">
+                <a16:creationId xmlns:a16="http://schemas.microsoft.com/office/drawing/2014/main" id="{C9570D6B-F492-4FA9-B1F1-9F5BA695E882}"/>
+              </a:ext>
+            </a:extLst>
+          </p:cNvPr>
+          <p:cNvPicPr>
+            <a:picLocks noGrp="1" noChangeAspect="1"/>
+          </p:cNvPicPr>
+          <p:nvPr>
+            <p:ph idx="1"/>
+          </p:nvPr>
+        </p:nvPicPr>
+        <p:blipFill>
+          <a:blip r:embed="rId2"/>
+          <a:stretch>
+            <a:fillRect/>
+          </a:stretch>
+        </p:blipFill>
+        <p:spPr>
+          <a:xfrm>
+            <a:off x="284085" y="2148821"/>
+            <a:ext cx="4097924" cy="3131234"/>
+          </a:xfrm>
+        </p:spPr>
+      </p:pic>
+      <p:sp>
+        <p:nvSpPr>
+          <p:cNvPr id="6" name="Rectangle 1">
+            <a:extLst>
+              <a:ext uri="{FF2B5EF4-FFF2-40B4-BE49-F238E27FC236}">
+                <a16:creationId xmlns:a16="http://schemas.microsoft.com/office/drawing/2014/main" id="{F7895303-AE5C-409C-83B7-CA9C3754FA14}"/>
+              </a:ext>
+            </a:extLst>
+          </p:cNvPr>
+          <p:cNvSpPr>
+            <a:spLocks noChangeArrowheads="1"/>
+          </p:cNvSpPr>
+          <p:nvPr/>
+        </p:nvSpPr>
+        <p:spPr bwMode="auto">
+          <a:xfrm>
+            <a:off x="284085" y="1797083"/>
+            <a:ext cx="6036033" cy="276999"/>
+          </a:xfrm>
+          <a:prstGeom prst="rect">
+            <a:avLst/>
+          </a:prstGeom>
+          <a:noFill/>
+          <a:ln>
+            <a:noFill/>
+          </a:ln>
+          <a:effectLst/>
+          <a:extLst>
+            <a:ext uri="{909E8E84-426E-40DD-AFC4-6F175D3DCCD1}">
+              <a14:hiddenFill xmlns:a14="http://schemas.microsoft.com/office/drawing/2010/main">
+                <a:solidFill>
+                  <a:schemeClr val="accent1"/>
+                </a:solidFill>
+              </a14:hiddenFill>
+            </a:ext>
+            <a:ext uri="{91240B29-F687-4F45-9708-019B960494DF}">
+              <a14:hiddenLine xmlns:a14="http://schemas.microsoft.com/office/drawing/2010/main" w="9525">
+                <a:solidFill>
+                  <a:schemeClr val="tx1"/>
+                </a:solidFill>
+                <a:miter lim="800000"/>
+                <a:headEnd/>
+                <a:tailEnd/>
+              </a14:hiddenLine>
+            </a:ext>
+            <a:ext uri="{AF507438-7753-43E0-B8FC-AC1667EBCBE1}">
+              <a14:hiddenEffects xmlns:a14="http://schemas.microsoft.com/office/drawing/2010/main">
+                <a:effectLst>
+                  <a:outerShdw dist="35921" dir="2700000" algn="ctr" rotWithShape="0">
+                    <a:schemeClr val="bg2"/>
+                  </a:outerShdw>
+                </a:effectLst>
+              </a14:hiddenEffects>
+            </a:ext>
+          </a:extLst>
+        </p:spPr>
+        <p:txBody>
+          <a:bodyPr vert="horz" wrap="square" lIns="91440" tIns="45720" rIns="91440" bIns="45720" numCol="1" anchor="ctr" anchorCtr="0" compatLnSpc="1">
+            <a:prstTxWarp prst="textNoShape">
+              <a:avLst/>
+            </a:prstTxWarp>
+            <a:spAutoFit/>
           </a:bodyPr>
           <a:lstStyle/>
           <a:p>
-            <a:r>
-              <a:rPr lang="en-US" sz="2800" dirty="0">
+            <a:pPr marL="0" marR="0" lvl="0" indent="0" algn="l" defTabSz="914400" rtl="0" eaLnBrk="0" fontAlgn="base" latinLnBrk="0" hangingPunct="0">
+              <a:lnSpc>
+                <a:spcPct val="100000"/>
+              </a:lnSpc>
+              <a:spcBef>
+                <a:spcPct val="0"/>
+              </a:spcBef>
+              <a:spcAft>
+                <a:spcPct val="0"/>
+              </a:spcAft>
+              <a:buClrTx/>
+              <a:buSzTx/>
+              <a:buFontTx/>
+              <a:buNone/>
+              <a:tabLst/>
+            </a:pPr>
+            <a:r>
+              <a:rPr kumimoji="0" lang="en-US" altLang="en-US" sz="1200" i="0" u="none" strike="noStrike" cap="none" normalizeH="0" baseline="0" dirty="0">
+                <a:ln>
+                  <a:noFill/>
+                </a:ln>
+                <a:solidFill>
+                  <a:schemeClr val="tx1"/>
+                </a:solidFill>
                 <a:effectLst/>
-                <a:latin typeface="Times New Roman" panose="02020603050405020304" pitchFamily="18" charset="0"/>
-                <a:ea typeface="Times New Roman" panose="02020603050405020304" pitchFamily="18" charset="0"/>
-                <a:cs typeface="Arial" panose="020B0604020202020204" pitchFamily="34" charset="0"/>
-              </a:rPr>
-              <a:t>Kafka Topics</a:t>
-            </a:r>
-            <a:endParaRPr lang="en-US" dirty="0"/>
+                <a:latin typeface="Calibri (Body)"/>
+              </a:rPr>
+              <a:t>Order Message Sent to Kafka (orders topic):</a:t>
+            </a:r>
+            <a:endParaRPr kumimoji="0" lang="en-US" altLang="en-US" sz="1000" i="0" u="none" strike="noStrike" cap="none" normalizeH="0" baseline="0" dirty="0">
+              <a:ln>
+                <a:noFill/>
+              </a:ln>
+              <a:solidFill>
+                <a:schemeClr val="tx1"/>
+              </a:solidFill>
+              <a:effectLst/>
+              <a:latin typeface="Calibri (Body)"/>
+            </a:endParaRPr>
           </a:p>
         </p:txBody>
       </p:sp>
       <p:sp>
         <p:nvSpPr>
-          <p:cNvPr id="3" name="Content Placeholder 2">
+          <p:cNvPr id="8" name="TextBox 7">
             <a:extLst>
               <a:ext uri="{FF2B5EF4-FFF2-40B4-BE49-F238E27FC236}">
-                <a16:creationId xmlns:a16="http://schemas.microsoft.com/office/drawing/2014/main" id="{0874E313-B8F4-4CC1-A604-3C82F5A688A3}"/>
+                <a16:creationId xmlns:a16="http://schemas.microsoft.com/office/drawing/2014/main" id="{6937C874-4F20-4FF7-8AA0-5588E59D195C}"/>
               </a:ext>
             </a:extLst>
           </p:cNvPr>
-          <p:cNvSpPr>
-            <a:spLocks noGrp="1"/>
-          </p:cNvSpPr>
-          <p:nvPr>
-            <p:ph idx="1"/>
-          </p:nvPr>
+          <p:cNvSpPr txBox="1"/>
+          <p:nvPr/>
         </p:nvSpPr>
-        <p:spPr/>
+        <p:spPr>
+          <a:xfrm>
+            <a:off x="573985" y="5737311"/>
+            <a:ext cx="10255379" cy="646331"/>
+          </a:xfrm>
+          <a:prstGeom prst="rect">
+            <a:avLst/>
+          </a:prstGeom>
+          <a:noFill/>
+        </p:spPr>
         <p:txBody>
-          <a:bodyPr/>
+          <a:bodyPr wrap="square">
+            <a:spAutoFit/>
+          </a:bodyPr>
           <a:lstStyle/>
           <a:p>
-            <a:pPr marL="342900" marR="0" lvl="0" indent="-342900">
-              <a:lnSpc>
-                <a:spcPct val="107000"/>
-              </a:lnSpc>
-              <a:spcBef>
-                <a:spcPts val="0"/>
-              </a:spcBef>
-              <a:spcAft>
-                <a:spcPts val="800"/>
-              </a:spcAft>
-              <a:buSzPts val="1000"/>
-              <a:buFont typeface="Symbol" panose="05050102010706020507" pitchFamily="18" charset="2"/>
-              <a:buChar char=""/>
-              <a:tabLst>
-                <a:tab pos="457200" algn="l"/>
-              </a:tabLst>
-            </a:pPr>
-            <a:r>
-              <a:rPr lang="en-US" sz="1800" b="1" dirty="0">
-                <a:effectLst/>
-                <a:latin typeface="Times New Roman" panose="02020603050405020304" pitchFamily="18" charset="0"/>
-                <a:ea typeface="Times New Roman" panose="02020603050405020304" pitchFamily="18" charset="0"/>
-                <a:cs typeface="Arial" panose="020B0604020202020204" pitchFamily="34" charset="0"/>
-              </a:rPr>
-              <a:t>orders</a:t>
-            </a:r>
-            <a:r>
-              <a:rPr lang="en-US" sz="1800" dirty="0">
-                <a:effectLst/>
-                <a:latin typeface="Times New Roman" panose="02020603050405020304" pitchFamily="18" charset="0"/>
-                <a:ea typeface="Times New Roman" panose="02020603050405020304" pitchFamily="18" charset="0"/>
-                <a:cs typeface="Arial" panose="020B0604020202020204" pitchFamily="34" charset="0"/>
-              </a:rPr>
-              <a:t>: Stores messages related to customer orders.</a:t>
-            </a:r>
-            <a:endParaRPr lang="en-US" sz="1800" dirty="0">
-              <a:effectLst/>
-              <a:latin typeface="Calibri" panose="020F0502020204030204" pitchFamily="34" charset="0"/>
-              <a:ea typeface="Calibri" panose="020F0502020204030204" pitchFamily="34" charset="0"/>
-              <a:cs typeface="Arial" panose="020B0604020202020204" pitchFamily="34" charset="0"/>
-            </a:endParaRPr>
-          </a:p>
-          <a:p>
-            <a:pPr marL="342900" marR="0" lvl="0" indent="-342900">
-              <a:lnSpc>
-                <a:spcPct val="107000"/>
-              </a:lnSpc>
-              <a:spcBef>
-                <a:spcPts val="0"/>
-              </a:spcBef>
-              <a:spcAft>
-                <a:spcPts val="800"/>
-              </a:spcAft>
-              <a:buSzPts val="1000"/>
-              <a:buFont typeface="Symbol" panose="05050102010706020507" pitchFamily="18" charset="2"/>
-              <a:buChar char=""/>
-              <a:tabLst>
-                <a:tab pos="457200" algn="l"/>
-              </a:tabLst>
-            </a:pPr>
-            <a:r>
-              <a:rPr lang="en-US" sz="1800" b="1" dirty="0">
-                <a:effectLst/>
-                <a:latin typeface="Times New Roman" panose="02020603050405020304" pitchFamily="18" charset="0"/>
-                <a:ea typeface="Times New Roman" panose="02020603050405020304" pitchFamily="18" charset="0"/>
-                <a:cs typeface="Arial" panose="020B0604020202020204" pitchFamily="34" charset="0"/>
-              </a:rPr>
-              <a:t>inventory</a:t>
-            </a:r>
-            <a:r>
-              <a:rPr lang="en-US" sz="1800" dirty="0">
-                <a:effectLst/>
-                <a:latin typeface="Times New Roman" panose="02020603050405020304" pitchFamily="18" charset="0"/>
-                <a:ea typeface="Times New Roman" panose="02020603050405020304" pitchFamily="18" charset="0"/>
-                <a:cs typeface="Arial" panose="020B0604020202020204" pitchFamily="34" charset="0"/>
-              </a:rPr>
-              <a:t>: Updates on product stock levels from the warehouse.</a:t>
-            </a:r>
-            <a:endParaRPr lang="en-US" sz="1800" dirty="0">
-              <a:effectLst/>
-              <a:latin typeface="Calibri" panose="020F0502020204030204" pitchFamily="34" charset="0"/>
-              <a:ea typeface="Calibri" panose="020F0502020204030204" pitchFamily="34" charset="0"/>
-              <a:cs typeface="Arial" panose="020B0604020202020204" pitchFamily="34" charset="0"/>
-            </a:endParaRPr>
-          </a:p>
-          <a:p>
-            <a:pPr marL="342900" marR="0" lvl="0" indent="-342900">
-              <a:lnSpc>
-                <a:spcPct val="107000"/>
-              </a:lnSpc>
-              <a:spcBef>
-                <a:spcPts val="0"/>
-              </a:spcBef>
-              <a:spcAft>
-                <a:spcPts val="800"/>
-              </a:spcAft>
-              <a:buSzPts val="1000"/>
-              <a:buFont typeface="Symbol" panose="05050102010706020507" pitchFamily="18" charset="2"/>
-              <a:buChar char=""/>
-              <a:tabLst>
-                <a:tab pos="457200" algn="l"/>
-              </a:tabLst>
-            </a:pPr>
-            <a:r>
-              <a:rPr lang="en-US" sz="1800" b="1" dirty="0">
-                <a:effectLst/>
-                <a:latin typeface="Times New Roman" panose="02020603050405020304" pitchFamily="18" charset="0"/>
-                <a:ea typeface="Times New Roman" panose="02020603050405020304" pitchFamily="18" charset="0"/>
-                <a:cs typeface="Arial" panose="020B0604020202020204" pitchFamily="34" charset="0"/>
-              </a:rPr>
-              <a:t>payments</a:t>
-            </a:r>
-            <a:r>
-              <a:rPr lang="en-US" sz="1800" dirty="0">
-                <a:effectLst/>
-                <a:latin typeface="Times New Roman" panose="02020603050405020304" pitchFamily="18" charset="0"/>
-                <a:ea typeface="Times New Roman" panose="02020603050405020304" pitchFamily="18" charset="0"/>
-                <a:cs typeface="Arial" panose="020B0604020202020204" pitchFamily="34" charset="0"/>
-              </a:rPr>
-              <a:t>: Transaction status updates from the payment gateway.</a:t>
-            </a:r>
-            <a:endParaRPr lang="en-US" sz="1800" dirty="0">
-              <a:effectLst/>
-              <a:latin typeface="Calibri" panose="020F0502020204030204" pitchFamily="34" charset="0"/>
-              <a:ea typeface="Calibri" panose="020F0502020204030204" pitchFamily="34" charset="0"/>
-              <a:cs typeface="Arial" panose="020B0604020202020204" pitchFamily="34" charset="0"/>
-            </a:endParaRPr>
-          </a:p>
-          <a:p>
-            <a:pPr marL="342900" marR="0" lvl="0" indent="-342900">
-              <a:lnSpc>
-                <a:spcPct val="107000"/>
-              </a:lnSpc>
-              <a:spcBef>
-                <a:spcPts val="0"/>
-              </a:spcBef>
-              <a:spcAft>
-                <a:spcPts val="800"/>
-              </a:spcAft>
-              <a:buSzPts val="1000"/>
-              <a:buFont typeface="Symbol" panose="05050102010706020507" pitchFamily="18" charset="2"/>
-              <a:buChar char=""/>
-              <a:tabLst>
-                <a:tab pos="457200" algn="l"/>
-              </a:tabLst>
-            </a:pPr>
-            <a:r>
-              <a:rPr lang="en-US" sz="1800" b="1" dirty="0">
-                <a:effectLst/>
-                <a:latin typeface="Times New Roman" panose="02020603050405020304" pitchFamily="18" charset="0"/>
-                <a:ea typeface="Times New Roman" panose="02020603050405020304" pitchFamily="18" charset="0"/>
-                <a:cs typeface="Arial" panose="020B0604020202020204" pitchFamily="34" charset="0"/>
-              </a:rPr>
-              <a:t>shipping</a:t>
-            </a:r>
-            <a:r>
-              <a:rPr lang="en-US" sz="1800" dirty="0">
-                <a:effectLst/>
-                <a:latin typeface="Times New Roman" panose="02020603050405020304" pitchFamily="18" charset="0"/>
-                <a:ea typeface="Times New Roman" panose="02020603050405020304" pitchFamily="18" charset="0"/>
-                <a:cs typeface="Arial" panose="020B0604020202020204" pitchFamily="34" charset="0"/>
-              </a:rPr>
-              <a:t>: Information about the status and tracking of the shipments.</a:t>
-            </a:r>
-            <a:endParaRPr lang="en-US" sz="1800" dirty="0">
-              <a:effectLst/>
-              <a:latin typeface="Calibri" panose="020F0502020204030204" pitchFamily="34" charset="0"/>
-              <a:ea typeface="Calibri" panose="020F0502020204030204" pitchFamily="34" charset="0"/>
-              <a:cs typeface="Arial" panose="020B0604020202020204" pitchFamily="34" charset="0"/>
-            </a:endParaRPr>
-          </a:p>
-          <a:p>
-            <a:endParaRPr lang="en-US" dirty="0"/>
+            <a:r>
+              <a:rPr lang="en-US" dirty="0"/>
+              <a:t>The Order Processing Service reads this message, checks stock levels, verifies payment, and updates Kafka with order status.</a:t>
+            </a:r>
           </a:p>
         </p:txBody>
       </p:sp>
     </p:spTree>
     <p:extLst>
       <p:ext uri="{BB962C8B-B14F-4D97-AF65-F5344CB8AC3E}">
-        <p14:creationId xmlns:p14="http://schemas.microsoft.com/office/powerpoint/2010/main" val="59626595"/>
+        <p14:creationId xmlns:p14="http://schemas.microsoft.com/office/powerpoint/2010/main" val="78335346"/>
       </p:ext>
     </p:extLst>
   </p:cSld>
@@ -22111,7 +22718,7 @@
                 <a:ea typeface="Times New Roman" panose="02020603050405020304" pitchFamily="18" charset="0"/>
                 <a:cs typeface="Arial" panose="020B0604020202020204" pitchFamily="34" charset="0"/>
               </a:rPr>
-              <a:t>Kafka Producers</a:t>
+              <a:t>Kafka Data Structure (Sample Message):</a:t>
             </a:r>
             <a:endParaRPr lang="en-US" dirty="0"/>
           </a:p>
@@ -22138,341 +22745,6 @@
           <a:bodyPr/>
           <a:lstStyle/>
           <a:p>
-            <a:pPr marL="342900" marR="0" lvl="0" indent="-342900">
-              <a:lnSpc>
-                <a:spcPct val="107000"/>
-              </a:lnSpc>
-              <a:spcBef>
-                <a:spcPts val="0"/>
-              </a:spcBef>
-              <a:spcAft>
-                <a:spcPts val="800"/>
-              </a:spcAft>
-              <a:buSzPts val="1000"/>
-              <a:buFont typeface="Symbol" panose="05050102010706020507" pitchFamily="18" charset="2"/>
-              <a:buChar char=""/>
-              <a:tabLst>
-                <a:tab pos="457200" algn="l"/>
-              </a:tabLst>
-            </a:pPr>
-            <a:r>
-              <a:rPr lang="en-US" sz="1800" b="1" dirty="0">
-                <a:effectLst/>
-                <a:latin typeface="Times New Roman" panose="02020603050405020304" pitchFamily="18" charset="0"/>
-                <a:ea typeface="Times New Roman" panose="02020603050405020304" pitchFamily="18" charset="0"/>
-                <a:cs typeface="Arial" panose="020B0604020202020204" pitchFamily="34" charset="0"/>
-              </a:rPr>
-              <a:t>Online Storefront</a:t>
-            </a:r>
-            <a:r>
-              <a:rPr lang="en-US" sz="1800" dirty="0">
-                <a:effectLst/>
-                <a:latin typeface="Times New Roman" panose="02020603050405020304" pitchFamily="18" charset="0"/>
-                <a:ea typeface="Times New Roman" panose="02020603050405020304" pitchFamily="18" charset="0"/>
-                <a:cs typeface="Arial" panose="020B0604020202020204" pitchFamily="34" charset="0"/>
-              </a:rPr>
-              <a:t>: When a customer places an order, the website or mobile app sends the order details to the </a:t>
-            </a:r>
-            <a:r>
-              <a:rPr lang="en-US" sz="1800" dirty="0">
-                <a:effectLst/>
-                <a:latin typeface="Courier New" panose="02070309020205020404" pitchFamily="49" charset="0"/>
-                <a:ea typeface="Times New Roman" panose="02020603050405020304" pitchFamily="18" charset="0"/>
-                <a:cs typeface="Arial" panose="020B0604020202020204" pitchFamily="34" charset="0"/>
-              </a:rPr>
-              <a:t>orders</a:t>
-            </a:r>
-            <a:r>
-              <a:rPr lang="en-US" sz="1800" dirty="0">
-                <a:effectLst/>
-                <a:latin typeface="Times New Roman" panose="02020603050405020304" pitchFamily="18" charset="0"/>
-                <a:ea typeface="Times New Roman" panose="02020603050405020304" pitchFamily="18" charset="0"/>
-                <a:cs typeface="Arial" panose="020B0604020202020204" pitchFamily="34" charset="0"/>
-              </a:rPr>
-              <a:t> topic.</a:t>
-            </a:r>
-            <a:endParaRPr lang="en-US" sz="1800" dirty="0">
-              <a:effectLst/>
-              <a:latin typeface="Calibri" panose="020F0502020204030204" pitchFamily="34" charset="0"/>
-              <a:ea typeface="Calibri" panose="020F0502020204030204" pitchFamily="34" charset="0"/>
-              <a:cs typeface="Arial" panose="020B0604020202020204" pitchFamily="34" charset="0"/>
-            </a:endParaRPr>
-          </a:p>
-          <a:p>
-            <a:pPr marL="342900" marR="0" lvl="0" indent="-342900">
-              <a:lnSpc>
-                <a:spcPct val="107000"/>
-              </a:lnSpc>
-              <a:spcBef>
-                <a:spcPts val="0"/>
-              </a:spcBef>
-              <a:spcAft>
-                <a:spcPts val="800"/>
-              </a:spcAft>
-              <a:buSzPts val="1000"/>
-              <a:buFont typeface="Symbol" panose="05050102010706020507" pitchFamily="18" charset="2"/>
-              <a:buChar char=""/>
-              <a:tabLst>
-                <a:tab pos="457200" algn="l"/>
-              </a:tabLst>
-            </a:pPr>
-            <a:r>
-              <a:rPr lang="en-US" sz="1800" b="1" dirty="0">
-                <a:effectLst/>
-                <a:latin typeface="Times New Roman" panose="02020603050405020304" pitchFamily="18" charset="0"/>
-                <a:ea typeface="Times New Roman" panose="02020603050405020304" pitchFamily="18" charset="0"/>
-                <a:cs typeface="Arial" panose="020B0604020202020204" pitchFamily="34" charset="0"/>
-              </a:rPr>
-              <a:t>Warehouse System</a:t>
-            </a:r>
-            <a:r>
-              <a:rPr lang="en-US" sz="1800" dirty="0">
-                <a:effectLst/>
-                <a:latin typeface="Times New Roman" panose="02020603050405020304" pitchFamily="18" charset="0"/>
-                <a:ea typeface="Times New Roman" panose="02020603050405020304" pitchFamily="18" charset="0"/>
-                <a:cs typeface="Arial" panose="020B0604020202020204" pitchFamily="34" charset="0"/>
-              </a:rPr>
-              <a:t>: The warehouse system continuously updates stock levels and product availability, sending this information to the </a:t>
-            </a:r>
-            <a:r>
-              <a:rPr lang="en-US" sz="1800" dirty="0">
-                <a:effectLst/>
-                <a:latin typeface="Courier New" panose="02070309020205020404" pitchFamily="49" charset="0"/>
-                <a:ea typeface="Times New Roman" panose="02020603050405020304" pitchFamily="18" charset="0"/>
-                <a:cs typeface="Arial" panose="020B0604020202020204" pitchFamily="34" charset="0"/>
-              </a:rPr>
-              <a:t>inventory</a:t>
-            </a:r>
-            <a:r>
-              <a:rPr lang="en-US" sz="1800" dirty="0">
-                <a:effectLst/>
-                <a:latin typeface="Times New Roman" panose="02020603050405020304" pitchFamily="18" charset="0"/>
-                <a:ea typeface="Times New Roman" panose="02020603050405020304" pitchFamily="18" charset="0"/>
-                <a:cs typeface="Arial" panose="020B0604020202020204" pitchFamily="34" charset="0"/>
-              </a:rPr>
-              <a:t> topic.</a:t>
-            </a:r>
-            <a:endParaRPr lang="en-US" sz="1800" dirty="0">
-              <a:effectLst/>
-              <a:latin typeface="Calibri" panose="020F0502020204030204" pitchFamily="34" charset="0"/>
-              <a:ea typeface="Calibri" panose="020F0502020204030204" pitchFamily="34" charset="0"/>
-              <a:cs typeface="Arial" panose="020B0604020202020204" pitchFamily="34" charset="0"/>
-            </a:endParaRPr>
-          </a:p>
-          <a:p>
-            <a:pPr marL="342900" marR="0" lvl="0" indent="-342900">
-              <a:lnSpc>
-                <a:spcPct val="107000"/>
-              </a:lnSpc>
-              <a:spcBef>
-                <a:spcPts val="0"/>
-              </a:spcBef>
-              <a:spcAft>
-                <a:spcPts val="800"/>
-              </a:spcAft>
-              <a:buSzPts val="1000"/>
-              <a:buFont typeface="Symbol" panose="05050102010706020507" pitchFamily="18" charset="2"/>
-              <a:buChar char=""/>
-              <a:tabLst>
-                <a:tab pos="457200" algn="l"/>
-              </a:tabLst>
-            </a:pPr>
-            <a:r>
-              <a:rPr lang="en-US" sz="1800" b="1" dirty="0">
-                <a:effectLst/>
-                <a:latin typeface="Times New Roman" panose="02020603050405020304" pitchFamily="18" charset="0"/>
-                <a:ea typeface="Times New Roman" panose="02020603050405020304" pitchFamily="18" charset="0"/>
-                <a:cs typeface="Arial" panose="020B0604020202020204" pitchFamily="34" charset="0"/>
-              </a:rPr>
-              <a:t>Payment Gateway</a:t>
-            </a:r>
-            <a:r>
-              <a:rPr lang="en-US" sz="1800" dirty="0">
-                <a:effectLst/>
-                <a:latin typeface="Times New Roman" panose="02020603050405020304" pitchFamily="18" charset="0"/>
-                <a:ea typeface="Times New Roman" panose="02020603050405020304" pitchFamily="18" charset="0"/>
-                <a:cs typeface="Arial" panose="020B0604020202020204" pitchFamily="34" charset="0"/>
-              </a:rPr>
-              <a:t>: After a payment is processed, the payment gateway sends the payment status (approved or failed) to the </a:t>
-            </a:r>
-            <a:r>
-              <a:rPr lang="en-US" sz="1800" dirty="0">
-                <a:effectLst/>
-                <a:latin typeface="Courier New" panose="02070309020205020404" pitchFamily="49" charset="0"/>
-                <a:ea typeface="Times New Roman" panose="02020603050405020304" pitchFamily="18" charset="0"/>
-                <a:cs typeface="Arial" panose="020B0604020202020204" pitchFamily="34" charset="0"/>
-              </a:rPr>
-              <a:t>payments</a:t>
-            </a:r>
-            <a:r>
-              <a:rPr lang="en-US" sz="1800" dirty="0">
-                <a:effectLst/>
-                <a:latin typeface="Times New Roman" panose="02020603050405020304" pitchFamily="18" charset="0"/>
-                <a:ea typeface="Times New Roman" panose="02020603050405020304" pitchFamily="18" charset="0"/>
-                <a:cs typeface="Arial" panose="020B0604020202020204" pitchFamily="34" charset="0"/>
-              </a:rPr>
-              <a:t> topic.</a:t>
-            </a:r>
-            <a:endParaRPr lang="en-US" sz="1800" dirty="0">
-              <a:effectLst/>
-              <a:latin typeface="Calibri" panose="020F0502020204030204" pitchFamily="34" charset="0"/>
-              <a:ea typeface="Calibri" panose="020F0502020204030204" pitchFamily="34" charset="0"/>
-              <a:cs typeface="Arial" panose="020B0604020202020204" pitchFamily="34" charset="0"/>
-            </a:endParaRPr>
-          </a:p>
-          <a:p>
-            <a:pPr marL="342900" marR="0" lvl="0" indent="-342900">
-              <a:lnSpc>
-                <a:spcPct val="107000"/>
-              </a:lnSpc>
-              <a:spcBef>
-                <a:spcPts val="0"/>
-              </a:spcBef>
-              <a:spcAft>
-                <a:spcPts val="800"/>
-              </a:spcAft>
-              <a:buSzPts val="1000"/>
-              <a:buFont typeface="Symbol" panose="05050102010706020507" pitchFamily="18" charset="2"/>
-              <a:buChar char=""/>
-              <a:tabLst>
-                <a:tab pos="457200" algn="l"/>
-              </a:tabLst>
-            </a:pPr>
-            <a:r>
-              <a:rPr lang="en-US" sz="1800" b="1" dirty="0">
-                <a:effectLst/>
-                <a:latin typeface="Times New Roman" panose="02020603050405020304" pitchFamily="18" charset="0"/>
-                <a:ea typeface="Times New Roman" panose="02020603050405020304" pitchFamily="18" charset="0"/>
-                <a:cs typeface="Arial" panose="020B0604020202020204" pitchFamily="34" charset="0"/>
-              </a:rPr>
-              <a:t>Shipping Providers</a:t>
-            </a:r>
-            <a:r>
-              <a:rPr lang="en-US" sz="1800" dirty="0">
-                <a:effectLst/>
-                <a:latin typeface="Times New Roman" panose="02020603050405020304" pitchFamily="18" charset="0"/>
-                <a:ea typeface="Times New Roman" panose="02020603050405020304" pitchFamily="18" charset="0"/>
-                <a:cs typeface="Arial" panose="020B0604020202020204" pitchFamily="34" charset="0"/>
-              </a:rPr>
-              <a:t>: As items are shipped and moved, the shipping providers send updates (tracking info, shipment status) to the </a:t>
-            </a:r>
-            <a:r>
-              <a:rPr lang="en-US" sz="1800" dirty="0">
-                <a:effectLst/>
-                <a:latin typeface="Courier New" panose="02070309020205020404" pitchFamily="49" charset="0"/>
-                <a:ea typeface="Times New Roman" panose="02020603050405020304" pitchFamily="18" charset="0"/>
-                <a:cs typeface="Arial" panose="020B0604020202020204" pitchFamily="34" charset="0"/>
-              </a:rPr>
-              <a:t>shipping</a:t>
-            </a:r>
-            <a:r>
-              <a:rPr lang="en-US" sz="1800" dirty="0">
-                <a:effectLst/>
-                <a:latin typeface="Times New Roman" panose="02020603050405020304" pitchFamily="18" charset="0"/>
-                <a:ea typeface="Times New Roman" panose="02020603050405020304" pitchFamily="18" charset="0"/>
-                <a:cs typeface="Arial" panose="020B0604020202020204" pitchFamily="34" charset="0"/>
-              </a:rPr>
-              <a:t> topic.</a:t>
-            </a:r>
-            <a:endParaRPr lang="en-US" sz="1800" dirty="0">
-              <a:effectLst/>
-              <a:latin typeface="Calibri" panose="020F0502020204030204" pitchFamily="34" charset="0"/>
-              <a:ea typeface="Calibri" panose="020F0502020204030204" pitchFamily="34" charset="0"/>
-              <a:cs typeface="Arial" panose="020B0604020202020204" pitchFamily="34" charset="0"/>
-            </a:endParaRPr>
-          </a:p>
-          <a:p>
-            <a:endParaRPr lang="en-US" dirty="0"/>
-          </a:p>
-        </p:txBody>
-      </p:sp>
-    </p:spTree>
-    <p:extLst>
-      <p:ext uri="{BB962C8B-B14F-4D97-AF65-F5344CB8AC3E}">
-        <p14:creationId xmlns:p14="http://schemas.microsoft.com/office/powerpoint/2010/main" val="4067745355"/>
-      </p:ext>
-    </p:extLst>
-  </p:cSld>
-  <p:clrMapOvr>
-    <a:masterClrMapping/>
-  </p:clrMapOvr>
-</p:sld>
-</file>
-
-<file path=ppt/slides/slide27.xml><?xml version="1.0" encoding="utf-8"?>
-<p:sld xmlns:a="http://schemas.openxmlformats.org/drawingml/2006/main" xmlns:r="http://schemas.openxmlformats.org/officeDocument/2006/relationships" xmlns:p="http://schemas.openxmlformats.org/presentationml/2006/main">
-  <p:cSld>
-    <p:spTree>
-      <p:nvGrpSpPr>
-        <p:cNvPr id="1" name=""/>
-        <p:cNvGrpSpPr/>
-        <p:nvPr/>
-      </p:nvGrpSpPr>
-      <p:grpSpPr>
-        <a:xfrm>
-          <a:off x="0" y="0"/>
-          <a:ext cx="0" cy="0"/>
-          <a:chOff x="0" y="0"/>
-          <a:chExt cx="0" cy="0"/>
-        </a:xfrm>
-      </p:grpSpPr>
-      <p:sp>
-        <p:nvSpPr>
-          <p:cNvPr id="2" name="Title 1">
-            <a:extLst>
-              <a:ext uri="{FF2B5EF4-FFF2-40B4-BE49-F238E27FC236}">
-                <a16:creationId xmlns:a16="http://schemas.microsoft.com/office/drawing/2014/main" id="{94C8800D-C43B-4FD7-A318-67AEB8003E93}"/>
-              </a:ext>
-            </a:extLst>
-          </p:cNvPr>
-          <p:cNvSpPr>
-            <a:spLocks noGrp="1"/>
-          </p:cNvSpPr>
-          <p:nvPr>
-            <p:ph type="title"/>
-          </p:nvPr>
-        </p:nvSpPr>
-        <p:spPr/>
-        <p:txBody>
-          <a:bodyPr>
-            <a:normAutofit/>
-          </a:bodyPr>
-          <a:lstStyle/>
-          <a:p>
-            <a:r>
-              <a:rPr lang="en-US" sz="2800" dirty="0">
-                <a:effectLst/>
-                <a:latin typeface="Times New Roman" panose="02020603050405020304" pitchFamily="18" charset="0"/>
-                <a:ea typeface="Times New Roman" panose="02020603050405020304" pitchFamily="18" charset="0"/>
-                <a:cs typeface="Arial" panose="020B0604020202020204" pitchFamily="34" charset="0"/>
-              </a:rPr>
-              <a:t>Kafka Streams / Consumers</a:t>
-            </a:r>
-            <a:endParaRPr lang="en-US" dirty="0"/>
-          </a:p>
-        </p:txBody>
-      </p:sp>
-      <p:sp>
-        <p:nvSpPr>
-          <p:cNvPr id="3" name="Content Placeholder 2">
-            <a:extLst>
-              <a:ext uri="{FF2B5EF4-FFF2-40B4-BE49-F238E27FC236}">
-                <a16:creationId xmlns:a16="http://schemas.microsoft.com/office/drawing/2014/main" id="{0874E313-B8F4-4CC1-A604-3C82F5A688A3}"/>
-              </a:ext>
-            </a:extLst>
-          </p:cNvPr>
-          <p:cNvSpPr>
-            <a:spLocks noGrp="1"/>
-          </p:cNvSpPr>
-          <p:nvPr>
-            <p:ph idx="1"/>
-          </p:nvPr>
-        </p:nvSpPr>
-        <p:spPr/>
-        <p:txBody>
-          <a:bodyPr/>
-          <a:lstStyle/>
-          <a:p>
             <a:pPr marL="0" marR="0" indent="0">
               <a:lnSpc>
                 <a:spcPct val="107000"/>
@@ -22487,161 +22759,20 @@
             </a:pPr>
             <a:r>
               <a:rPr lang="en-US" sz="1800" b="1" dirty="0">
+                <a:solidFill>
+                  <a:srgbClr val="00B050"/>
+                </a:solidFill>
                 <a:effectLst/>
                 <a:latin typeface="Times New Roman" panose="02020603050405020304" pitchFamily="18" charset="0"/>
                 <a:ea typeface="Times New Roman" panose="02020603050405020304" pitchFamily="18" charset="0"/>
                 <a:cs typeface="Arial" panose="020B0604020202020204" pitchFamily="34" charset="0"/>
               </a:rPr>
-              <a:t>Consumer 1: Order Processing Service</a:t>
+              <a:t>Order Message (from storefront):</a:t>
             </a:r>
             <a:endParaRPr lang="en-US" sz="1800" dirty="0">
-              <a:effectLst/>
-              <a:latin typeface="Calibri" panose="020F0502020204030204" pitchFamily="34" charset="0"/>
-              <a:ea typeface="Calibri" panose="020F0502020204030204" pitchFamily="34" charset="0"/>
-              <a:cs typeface="Arial" panose="020B0604020202020204" pitchFamily="34" charset="0"/>
-            </a:endParaRPr>
-          </a:p>
-          <a:p>
-            <a:pPr marL="342900" marR="0" lvl="0" indent="-342900">
-              <a:lnSpc>
-                <a:spcPct val="107000"/>
-              </a:lnSpc>
-              <a:spcBef>
-                <a:spcPts val="0"/>
-              </a:spcBef>
-              <a:spcAft>
-                <a:spcPts val="800"/>
-              </a:spcAft>
-              <a:buSzPts val="1000"/>
-              <a:buFont typeface="Symbol" panose="05050102010706020507" pitchFamily="18" charset="2"/>
-              <a:buChar char=""/>
-              <a:tabLst>
-                <a:tab pos="457200" algn="l"/>
-              </a:tabLst>
-            </a:pPr>
-            <a:r>
-              <a:rPr lang="en-US" sz="1800" b="1" dirty="0">
-                <a:effectLst/>
-                <a:latin typeface="Times New Roman" panose="02020603050405020304" pitchFamily="18" charset="0"/>
-                <a:ea typeface="Times New Roman" panose="02020603050405020304" pitchFamily="18" charset="0"/>
-                <a:cs typeface="Arial" panose="020B0604020202020204" pitchFamily="34" charset="0"/>
-              </a:rPr>
-              <a:t>Consumes</a:t>
-            </a:r>
-            <a:r>
-              <a:rPr lang="en-US" sz="1800" dirty="0">
-                <a:effectLst/>
-                <a:latin typeface="Times New Roman" panose="02020603050405020304" pitchFamily="18" charset="0"/>
-                <a:ea typeface="Times New Roman" panose="02020603050405020304" pitchFamily="18" charset="0"/>
-                <a:cs typeface="Arial" panose="020B0604020202020204" pitchFamily="34" charset="0"/>
-              </a:rPr>
-              <a:t>: Orders from the </a:t>
-            </a:r>
-            <a:r>
-              <a:rPr lang="en-US" sz="1800" dirty="0">
-                <a:effectLst/>
-                <a:latin typeface="Courier New" panose="02070309020205020404" pitchFamily="49" charset="0"/>
-                <a:ea typeface="Times New Roman" panose="02020603050405020304" pitchFamily="18" charset="0"/>
-                <a:cs typeface="Arial" panose="020B0604020202020204" pitchFamily="34" charset="0"/>
-              </a:rPr>
-              <a:t>orders</a:t>
-            </a:r>
-            <a:r>
-              <a:rPr lang="en-US" sz="1800" dirty="0">
-                <a:effectLst/>
-                <a:latin typeface="Times New Roman" panose="02020603050405020304" pitchFamily="18" charset="0"/>
-                <a:ea typeface="Times New Roman" panose="02020603050405020304" pitchFamily="18" charset="0"/>
-                <a:cs typeface="Arial" panose="020B0604020202020204" pitchFamily="34" charset="0"/>
-              </a:rPr>
-              <a:t> topic.</a:t>
-            </a:r>
-            <a:endParaRPr lang="en-US" sz="1800" dirty="0">
-              <a:effectLst/>
-              <a:latin typeface="Calibri" panose="020F0502020204030204" pitchFamily="34" charset="0"/>
-              <a:ea typeface="Calibri" panose="020F0502020204030204" pitchFamily="34" charset="0"/>
-              <a:cs typeface="Arial" panose="020B0604020202020204" pitchFamily="34" charset="0"/>
-            </a:endParaRPr>
-          </a:p>
-          <a:p>
-            <a:pPr marL="342900" marR="0" lvl="0" indent="-342900">
-              <a:lnSpc>
-                <a:spcPct val="107000"/>
-              </a:lnSpc>
-              <a:spcBef>
-                <a:spcPts val="0"/>
-              </a:spcBef>
-              <a:spcAft>
-                <a:spcPts val="800"/>
-              </a:spcAft>
-              <a:buSzPts val="1000"/>
-              <a:buFont typeface="Symbol" panose="05050102010706020507" pitchFamily="18" charset="2"/>
-              <a:buChar char=""/>
-              <a:tabLst>
-                <a:tab pos="457200" algn="l"/>
-              </a:tabLst>
-            </a:pPr>
-            <a:r>
-              <a:rPr lang="en-US" sz="1800" b="1" dirty="0">
-                <a:effectLst/>
-                <a:latin typeface="Times New Roman" panose="02020603050405020304" pitchFamily="18" charset="0"/>
-                <a:ea typeface="Times New Roman" panose="02020603050405020304" pitchFamily="18" charset="0"/>
-                <a:cs typeface="Arial" panose="020B0604020202020204" pitchFamily="34" charset="0"/>
-              </a:rPr>
-              <a:t>Processes</a:t>
-            </a:r>
-            <a:r>
-              <a:rPr lang="en-US" sz="1800" dirty="0">
-                <a:effectLst/>
-                <a:latin typeface="Times New Roman" panose="02020603050405020304" pitchFamily="18" charset="0"/>
-                <a:ea typeface="Times New Roman" panose="02020603050405020304" pitchFamily="18" charset="0"/>
-                <a:cs typeface="Arial" panose="020B0604020202020204" pitchFamily="34" charset="0"/>
-              </a:rPr>
-              <a:t>: Validates the order (checks if the payment is confirmed, verifies product availability).</a:t>
-            </a:r>
-            <a:endParaRPr lang="en-US" sz="1800" dirty="0">
-              <a:effectLst/>
-              <a:latin typeface="Calibri" panose="020F0502020204030204" pitchFamily="34" charset="0"/>
-              <a:ea typeface="Calibri" panose="020F0502020204030204" pitchFamily="34" charset="0"/>
-              <a:cs typeface="Arial" panose="020B0604020202020204" pitchFamily="34" charset="0"/>
-            </a:endParaRPr>
-          </a:p>
-          <a:p>
-            <a:pPr marL="342900" marR="0" lvl="0" indent="-342900">
-              <a:lnSpc>
-                <a:spcPct val="107000"/>
-              </a:lnSpc>
-              <a:spcBef>
-                <a:spcPts val="0"/>
-              </a:spcBef>
-              <a:spcAft>
-                <a:spcPts val="800"/>
-              </a:spcAft>
-              <a:buSzPts val="1000"/>
-              <a:buFont typeface="Symbol" panose="05050102010706020507" pitchFamily="18" charset="2"/>
-              <a:buChar char=""/>
-              <a:tabLst>
-                <a:tab pos="457200" algn="l"/>
-              </a:tabLst>
-            </a:pPr>
-            <a:r>
-              <a:rPr lang="en-US" sz="1800" b="1" dirty="0">
-                <a:effectLst/>
-                <a:latin typeface="Times New Roman" panose="02020603050405020304" pitchFamily="18" charset="0"/>
-                <a:ea typeface="Times New Roman" panose="02020603050405020304" pitchFamily="18" charset="0"/>
-                <a:cs typeface="Arial" panose="020B0604020202020204" pitchFamily="34" charset="0"/>
-              </a:rPr>
-              <a:t>Output</a:t>
-            </a:r>
-            <a:r>
-              <a:rPr lang="en-US" sz="1800" dirty="0">
-                <a:effectLst/>
-                <a:latin typeface="Times New Roman" panose="02020603050405020304" pitchFamily="18" charset="0"/>
-                <a:ea typeface="Times New Roman" panose="02020603050405020304" pitchFamily="18" charset="0"/>
-                <a:cs typeface="Arial" panose="020B0604020202020204" pitchFamily="34" charset="0"/>
-              </a:rPr>
-              <a:t>: Updates the order status (pending, confirmed, canceled) and sends the result to the next step (inventory or shipping system).</a:t>
-            </a:r>
-            <a:endParaRPr lang="en-US" sz="1800" dirty="0">
+              <a:solidFill>
+                <a:srgbClr val="00B050"/>
+              </a:solidFill>
               <a:effectLst/>
               <a:latin typeface="Calibri" panose="020F0502020204030204" pitchFamily="34" charset="0"/>
               <a:ea typeface="Calibri" panose="020F0502020204030204" pitchFamily="34" charset="0"/>
@@ -22657,20 +22788,44 @@
                 <a:spcPts val="0"/>
               </a:spcBef>
               <a:spcAft>
-                <a:spcPts val="800"/>
+                <a:spcPts val="0"/>
               </a:spcAft>
               <a:buNone/>
+              <a:tabLst>
+                <a:tab pos="581660" algn="l"/>
+                <a:tab pos="1163320" algn="l"/>
+                <a:tab pos="1744980" algn="l"/>
+                <a:tab pos="2326640" algn="l"/>
+                <a:tab pos="2908300" algn="l"/>
+                <a:tab pos="3489960" algn="l"/>
+                <a:tab pos="4071620" algn="l"/>
+                <a:tab pos="4653280" algn="l"/>
+                <a:tab pos="5234940" algn="l"/>
+                <a:tab pos="5816600" algn="l"/>
+                <a:tab pos="6398260" algn="l"/>
+                <a:tab pos="6979920" algn="l"/>
+                <a:tab pos="7561580" algn="l"/>
+                <a:tab pos="8143240" algn="l"/>
+                <a:tab pos="8724900" algn="l"/>
+                <a:tab pos="9306560" algn="l"/>
+              </a:tabLst>
             </a:pPr>
             <a:r>
-              <a:rPr lang="en-US" sz="1800" b="1" dirty="0">
+              <a:rPr lang="en-US" sz="1800" dirty="0">
+                <a:solidFill>
+                  <a:srgbClr val="00B050"/>
+                </a:solidFill>
                 <a:effectLst/>
-                <a:latin typeface="Times New Roman" panose="02020603050405020304" pitchFamily="18" charset="0"/>
+                <a:latin typeface="Courier New" panose="02070309020205020404" pitchFamily="49" charset="0"/>
                 <a:ea typeface="Times New Roman" panose="02020603050405020304" pitchFamily="18" charset="0"/>
                 <a:cs typeface="Arial" panose="020B0604020202020204" pitchFamily="34" charset="0"/>
               </a:rPr>
-              <a:t>Consumer 2: Inventory Management Service</a:t>
+              <a:t>{</a:t>
             </a:r>
             <a:endParaRPr lang="en-US" sz="1800" dirty="0">
+              <a:solidFill>
+                <a:srgbClr val="00B050"/>
+              </a:solidFill>
               <a:effectLst/>
               <a:latin typeface="Calibri" panose="020F0502020204030204" pitchFamily="34" charset="0"/>
               <a:ea typeface="Calibri" panose="020F0502020204030204" pitchFamily="34" charset="0"/>
@@ -22678,7 +22833,7 @@
             </a:endParaRPr>
           </a:p>
           <a:p>
-            <a:pPr marL="342900" marR="0" lvl="0" indent="-342900">
+            <a:pPr marL="0" marR="0" indent="0">
               <a:lnSpc>
                 <a:spcPct val="107000"/>
               </a:lnSpc>
@@ -22686,52 +22841,68 @@
                 <a:spcPts val="0"/>
               </a:spcBef>
               <a:spcAft>
-                <a:spcPts val="800"/>
+                <a:spcPts val="0"/>
               </a:spcAft>
-              <a:buSzPts val="1000"/>
-              <a:buFont typeface="Symbol" panose="05050102010706020507" pitchFamily="18" charset="2"/>
-              <a:buChar char=""/>
+              <a:buNone/>
               <a:tabLst>
-                <a:tab pos="457200" algn="l"/>
+                <a:tab pos="581660" algn="l"/>
+                <a:tab pos="1163320" algn="l"/>
+                <a:tab pos="1744980" algn="l"/>
+                <a:tab pos="2326640" algn="l"/>
+                <a:tab pos="2908300" algn="l"/>
+                <a:tab pos="3489960" algn="l"/>
+                <a:tab pos="4071620" algn="l"/>
+                <a:tab pos="4653280" algn="l"/>
+                <a:tab pos="5234940" algn="l"/>
+                <a:tab pos="5816600" algn="l"/>
+                <a:tab pos="6398260" algn="l"/>
+                <a:tab pos="6979920" algn="l"/>
+                <a:tab pos="7561580" algn="l"/>
+                <a:tab pos="8143240" algn="l"/>
+                <a:tab pos="8724900" algn="l"/>
+                <a:tab pos="9306560" algn="l"/>
               </a:tabLst>
             </a:pPr>
             <a:r>
-              <a:rPr lang="en-US" sz="1800" b="1" dirty="0">
-                <a:effectLst/>
-                <a:latin typeface="Times New Roman" panose="02020603050405020304" pitchFamily="18" charset="0"/>
-                <a:ea typeface="Times New Roman" panose="02020603050405020304" pitchFamily="18" charset="0"/>
-                <a:cs typeface="Arial" panose="020B0604020202020204" pitchFamily="34" charset="0"/>
-              </a:rPr>
-              <a:t>Consumes</a:t>
-            </a:r>
-            <a:r>
               <a:rPr lang="en-US" sz="1800" dirty="0">
-                <a:effectLst/>
-                <a:latin typeface="Times New Roman" panose="02020603050405020304" pitchFamily="18" charset="0"/>
-                <a:ea typeface="Times New Roman" panose="02020603050405020304" pitchFamily="18" charset="0"/>
-                <a:cs typeface="Arial" panose="020B0604020202020204" pitchFamily="34" charset="0"/>
-              </a:rPr>
-              <a:t>: Inventory updates from the </a:t>
-            </a:r>
-            <a:r>
-              <a:rPr lang="en-US" sz="1800" dirty="0">
+                <a:solidFill>
+                  <a:srgbClr val="00B050"/>
+                </a:solidFill>
                 <a:effectLst/>
                 <a:latin typeface="Courier New" panose="02070309020205020404" pitchFamily="49" charset="0"/>
                 <a:ea typeface="Times New Roman" panose="02020603050405020304" pitchFamily="18" charset="0"/>
                 <a:cs typeface="Arial" panose="020B0604020202020204" pitchFamily="34" charset="0"/>
               </a:rPr>
-              <a:t>inventory</a:t>
-            </a:r>
-            <a:r>
-              <a:rPr lang="en-US" sz="1800" dirty="0">
+              <a:t>  "</a:t>
+            </a:r>
+            <a:r>
+              <a:rPr lang="en-US" sz="1800" dirty="0" err="1">
+                <a:solidFill>
+                  <a:srgbClr val="00B050"/>
+                </a:solidFill>
                 <a:effectLst/>
-                <a:latin typeface="Times New Roman" panose="02020603050405020304" pitchFamily="18" charset="0"/>
+                <a:latin typeface="Courier New" panose="02070309020205020404" pitchFamily="49" charset="0"/>
                 <a:ea typeface="Times New Roman" panose="02020603050405020304" pitchFamily="18" charset="0"/>
                 <a:cs typeface="Arial" panose="020B0604020202020204" pitchFamily="34" charset="0"/>
               </a:rPr>
-              <a:t> topic.</a:t>
+              <a:t>order_id</a:t>
+            </a:r>
+            <a:r>
+              <a:rPr lang="en-US" sz="1800" dirty="0">
+                <a:solidFill>
+                  <a:srgbClr val="00B050"/>
+                </a:solidFill>
+                <a:effectLst/>
+                <a:latin typeface="Courier New" panose="02070309020205020404" pitchFamily="49" charset="0"/>
+                <a:ea typeface="Times New Roman" panose="02020603050405020304" pitchFamily="18" charset="0"/>
+                <a:cs typeface="Arial" panose="020B0604020202020204" pitchFamily="34" charset="0"/>
+              </a:rPr>
+              <a:t>": "ord12345",</a:t>
             </a:r>
             <a:endParaRPr lang="en-US" sz="1800" dirty="0">
+              <a:solidFill>
+                <a:srgbClr val="00B050"/>
+              </a:solidFill>
               <a:effectLst/>
               <a:latin typeface="Calibri" panose="020F0502020204030204" pitchFamily="34" charset="0"/>
               <a:ea typeface="Calibri" panose="020F0502020204030204" pitchFamily="34" charset="0"/>
@@ -22739,7 +22910,7 @@
             </a:endParaRPr>
           </a:p>
           <a:p>
-            <a:pPr marL="342900" marR="0" lvl="0" indent="-342900">
+            <a:pPr marL="0" marR="0" indent="0">
               <a:lnSpc>
                 <a:spcPct val="107000"/>
               </a:lnSpc>
@@ -22747,34 +22918,44 @@
                 <a:spcPts val="0"/>
               </a:spcBef>
               <a:spcAft>
-                <a:spcPts val="800"/>
+                <a:spcPts val="0"/>
               </a:spcAft>
-              <a:buSzPts val="1000"/>
-              <a:buFont typeface="Symbol" panose="05050102010706020507" pitchFamily="18" charset="2"/>
-              <a:buChar char=""/>
+              <a:buNone/>
               <a:tabLst>
-                <a:tab pos="457200" algn="l"/>
+                <a:tab pos="581660" algn="l"/>
+                <a:tab pos="1163320" algn="l"/>
+                <a:tab pos="1744980" algn="l"/>
+                <a:tab pos="2326640" algn="l"/>
+                <a:tab pos="2908300" algn="l"/>
+                <a:tab pos="3489960" algn="l"/>
+                <a:tab pos="4071620" algn="l"/>
+                <a:tab pos="4653280" algn="l"/>
+                <a:tab pos="5234940" algn="l"/>
+                <a:tab pos="5816600" algn="l"/>
+                <a:tab pos="6398260" algn="l"/>
+                <a:tab pos="6979920" algn="l"/>
+                <a:tab pos="7561580" algn="l"/>
+                <a:tab pos="8143240" algn="l"/>
+                <a:tab pos="8724900" algn="l"/>
+                <a:tab pos="9306560" algn="l"/>
               </a:tabLst>
             </a:pPr>
             <a:r>
-              <a:rPr lang="en-US" sz="1800" b="1" dirty="0">
+              <a:rPr lang="en-US" sz="1800" dirty="0">
+                <a:solidFill>
+                  <a:srgbClr val="00B050"/>
+                </a:solidFill>
                 <a:effectLst/>
-                <a:latin typeface="Times New Roman" panose="02020603050405020304" pitchFamily="18" charset="0"/>
+                <a:latin typeface="Courier New" panose="02070309020205020404" pitchFamily="49" charset="0"/>
                 <a:ea typeface="Times New Roman" panose="02020603050405020304" pitchFamily="18" charset="0"/>
                 <a:cs typeface="Arial" panose="020B0604020202020204" pitchFamily="34" charset="0"/>
               </a:rPr>
-              <a:t>Processes</a:t>
-            </a:r>
-            <a:r>
-              <a:rPr lang="en-US" sz="1800" dirty="0">
-                <a:effectLst/>
-                <a:latin typeface="Times New Roman" panose="02020603050405020304" pitchFamily="18" charset="0"/>
-                <a:ea typeface="Times New Roman" panose="02020603050405020304" pitchFamily="18" charset="0"/>
-                <a:cs typeface="Arial" panose="020B0604020202020204" pitchFamily="34" charset="0"/>
-              </a:rPr>
-              <a:t>: Compares inventory data with incoming orders. If an item is out of stock or the quantity exceeds available stock, the order is either placed on hold or canceled.</a:t>
+              <a:t>  "timestamp": "2025-03-25T10:10:30Z",</a:t>
             </a:r>
             <a:endParaRPr lang="en-US" sz="1800" dirty="0">
+              <a:solidFill>
+                <a:srgbClr val="00B050"/>
+              </a:solidFill>
               <a:effectLst/>
               <a:latin typeface="Calibri" panose="020F0502020204030204" pitchFamily="34" charset="0"/>
               <a:ea typeface="Calibri" panose="020F0502020204030204" pitchFamily="34" charset="0"/>
@@ -22782,7 +22963,7 @@
             </a:endParaRPr>
           </a:p>
           <a:p>
-            <a:pPr marL="342900" marR="0" lvl="0" indent="-342900">
+            <a:pPr marL="0" marR="0" indent="0">
               <a:lnSpc>
                 <a:spcPct val="107000"/>
               </a:lnSpc>
@@ -22790,34 +22971,68 @@
                 <a:spcPts val="0"/>
               </a:spcBef>
               <a:spcAft>
-                <a:spcPts val="800"/>
+                <a:spcPts val="0"/>
               </a:spcAft>
-              <a:buSzPts val="1000"/>
-              <a:buFont typeface="Symbol" panose="05050102010706020507" pitchFamily="18" charset="2"/>
-              <a:buChar char=""/>
+              <a:buNone/>
               <a:tabLst>
-                <a:tab pos="457200" algn="l"/>
+                <a:tab pos="581660" algn="l"/>
+                <a:tab pos="1163320" algn="l"/>
+                <a:tab pos="1744980" algn="l"/>
+                <a:tab pos="2326640" algn="l"/>
+                <a:tab pos="2908300" algn="l"/>
+                <a:tab pos="3489960" algn="l"/>
+                <a:tab pos="4071620" algn="l"/>
+                <a:tab pos="4653280" algn="l"/>
+                <a:tab pos="5234940" algn="l"/>
+                <a:tab pos="5816600" algn="l"/>
+                <a:tab pos="6398260" algn="l"/>
+                <a:tab pos="6979920" algn="l"/>
+                <a:tab pos="7561580" algn="l"/>
+                <a:tab pos="8143240" algn="l"/>
+                <a:tab pos="8724900" algn="l"/>
+                <a:tab pos="9306560" algn="l"/>
               </a:tabLst>
             </a:pPr>
             <a:r>
-              <a:rPr lang="en-US" sz="1800" b="1" dirty="0">
+              <a:rPr lang="en-US" sz="1800" dirty="0">
+                <a:solidFill>
+                  <a:srgbClr val="00B050"/>
+                </a:solidFill>
                 <a:effectLst/>
-                <a:latin typeface="Times New Roman" panose="02020603050405020304" pitchFamily="18" charset="0"/>
+                <a:latin typeface="Courier New" panose="02070309020205020404" pitchFamily="49" charset="0"/>
                 <a:ea typeface="Times New Roman" panose="02020603050405020304" pitchFamily="18" charset="0"/>
                 <a:cs typeface="Arial" panose="020B0604020202020204" pitchFamily="34" charset="0"/>
               </a:rPr>
-              <a:t>Output</a:t>
-            </a:r>
-            <a:r>
-              <a:rPr lang="en-US" sz="1800" dirty="0">
+              <a:t>  "</a:t>
+            </a:r>
+            <a:r>
+              <a:rPr lang="en-US" sz="1800" dirty="0" err="1">
+                <a:solidFill>
+                  <a:srgbClr val="00B050"/>
+                </a:solidFill>
                 <a:effectLst/>
-                <a:latin typeface="Times New Roman" panose="02020603050405020304" pitchFamily="18" charset="0"/>
+                <a:latin typeface="Courier New" panose="02070309020205020404" pitchFamily="49" charset="0"/>
                 <a:ea typeface="Times New Roman" panose="02020603050405020304" pitchFamily="18" charset="0"/>
                 <a:cs typeface="Arial" panose="020B0604020202020204" pitchFamily="34" charset="0"/>
               </a:rPr>
-              <a:t>: Sends updated inventory status (e.g., stock depletion or restocking) to the inventory management system and updates the order status.</a:t>
+              <a:t>customer_id</a:t>
+            </a:r>
+            <a:r>
+              <a:rPr lang="en-US" sz="1800" dirty="0">
+                <a:solidFill>
+                  <a:srgbClr val="00B050"/>
+                </a:solidFill>
+                <a:effectLst/>
+                <a:latin typeface="Courier New" panose="02070309020205020404" pitchFamily="49" charset="0"/>
+                <a:ea typeface="Times New Roman" panose="02020603050405020304" pitchFamily="18" charset="0"/>
+                <a:cs typeface="Arial" panose="020B0604020202020204" pitchFamily="34" charset="0"/>
+              </a:rPr>
+              <a:t>": "cust456",</a:t>
             </a:r>
             <a:endParaRPr lang="en-US" sz="1800" dirty="0">
+              <a:solidFill>
+                <a:srgbClr val="00B050"/>
+              </a:solidFill>
               <a:effectLst/>
               <a:latin typeface="Calibri" panose="020F0502020204030204" pitchFamily="34" charset="0"/>
               <a:ea typeface="Calibri" panose="020F0502020204030204" pitchFamily="34" charset="0"/>
@@ -22825,14 +23040,565 @@
             </a:endParaRPr>
           </a:p>
           <a:p>
-            <a:endParaRPr lang="en-US" dirty="0"/>
+            <a:pPr marL="0" marR="0" indent="0">
+              <a:lnSpc>
+                <a:spcPct val="107000"/>
+              </a:lnSpc>
+              <a:spcBef>
+                <a:spcPts val="0"/>
+              </a:spcBef>
+              <a:spcAft>
+                <a:spcPts val="0"/>
+              </a:spcAft>
+              <a:buNone/>
+              <a:tabLst>
+                <a:tab pos="581660" algn="l"/>
+                <a:tab pos="1163320" algn="l"/>
+                <a:tab pos="1744980" algn="l"/>
+                <a:tab pos="2326640" algn="l"/>
+                <a:tab pos="2908300" algn="l"/>
+                <a:tab pos="3489960" algn="l"/>
+                <a:tab pos="4071620" algn="l"/>
+                <a:tab pos="4653280" algn="l"/>
+                <a:tab pos="5234940" algn="l"/>
+                <a:tab pos="5816600" algn="l"/>
+                <a:tab pos="6398260" algn="l"/>
+                <a:tab pos="6979920" algn="l"/>
+                <a:tab pos="7561580" algn="l"/>
+                <a:tab pos="8143240" algn="l"/>
+                <a:tab pos="8724900" algn="l"/>
+                <a:tab pos="9306560" algn="l"/>
+              </a:tabLst>
+            </a:pPr>
+            <a:r>
+              <a:rPr lang="en-US" sz="1800" dirty="0">
+                <a:solidFill>
+                  <a:srgbClr val="00B050"/>
+                </a:solidFill>
+                <a:effectLst/>
+                <a:latin typeface="Courier New" panose="02070309020205020404" pitchFamily="49" charset="0"/>
+                <a:ea typeface="Times New Roman" panose="02020603050405020304" pitchFamily="18" charset="0"/>
+                <a:cs typeface="Arial" panose="020B0604020202020204" pitchFamily="34" charset="0"/>
+              </a:rPr>
+              <a:t>  "items": [</a:t>
+            </a:r>
+            <a:endParaRPr lang="en-US" sz="1800" dirty="0">
+              <a:solidFill>
+                <a:srgbClr val="00B050"/>
+              </a:solidFill>
+              <a:effectLst/>
+              <a:latin typeface="Calibri" panose="020F0502020204030204" pitchFamily="34" charset="0"/>
+              <a:ea typeface="Calibri" panose="020F0502020204030204" pitchFamily="34" charset="0"/>
+              <a:cs typeface="Arial" panose="020B0604020202020204" pitchFamily="34" charset="0"/>
+            </a:endParaRPr>
+          </a:p>
+          <a:p>
+            <a:pPr marL="0" marR="0" indent="0">
+              <a:lnSpc>
+                <a:spcPct val="107000"/>
+              </a:lnSpc>
+              <a:spcBef>
+                <a:spcPts val="0"/>
+              </a:spcBef>
+              <a:spcAft>
+                <a:spcPts val="0"/>
+              </a:spcAft>
+              <a:buNone/>
+              <a:tabLst>
+                <a:tab pos="581660" algn="l"/>
+                <a:tab pos="1163320" algn="l"/>
+                <a:tab pos="1744980" algn="l"/>
+                <a:tab pos="2326640" algn="l"/>
+                <a:tab pos="2908300" algn="l"/>
+                <a:tab pos="3489960" algn="l"/>
+                <a:tab pos="4071620" algn="l"/>
+                <a:tab pos="4653280" algn="l"/>
+                <a:tab pos="5234940" algn="l"/>
+                <a:tab pos="5816600" algn="l"/>
+                <a:tab pos="6398260" algn="l"/>
+                <a:tab pos="6979920" algn="l"/>
+                <a:tab pos="7561580" algn="l"/>
+                <a:tab pos="8143240" algn="l"/>
+                <a:tab pos="8724900" algn="l"/>
+                <a:tab pos="9306560" algn="l"/>
+              </a:tabLst>
+            </a:pPr>
+            <a:r>
+              <a:rPr lang="en-US" sz="1800" dirty="0">
+                <a:solidFill>
+                  <a:srgbClr val="00B050"/>
+                </a:solidFill>
+                <a:effectLst/>
+                <a:latin typeface="Courier New" panose="02070309020205020404" pitchFamily="49" charset="0"/>
+                <a:ea typeface="Times New Roman" panose="02020603050405020304" pitchFamily="18" charset="0"/>
+                <a:cs typeface="Arial" panose="020B0604020202020204" pitchFamily="34" charset="0"/>
+              </a:rPr>
+              <a:t>    {"</a:t>
+            </a:r>
+            <a:r>
+              <a:rPr lang="en-US" sz="1800" dirty="0" err="1">
+                <a:solidFill>
+                  <a:srgbClr val="00B050"/>
+                </a:solidFill>
+                <a:effectLst/>
+                <a:latin typeface="Courier New" panose="02070309020205020404" pitchFamily="49" charset="0"/>
+                <a:ea typeface="Times New Roman" panose="02020603050405020304" pitchFamily="18" charset="0"/>
+                <a:cs typeface="Arial" panose="020B0604020202020204" pitchFamily="34" charset="0"/>
+              </a:rPr>
+              <a:t>product_id</a:t>
+            </a:r>
+            <a:r>
+              <a:rPr lang="en-US" sz="1800" dirty="0">
+                <a:solidFill>
+                  <a:srgbClr val="00B050"/>
+                </a:solidFill>
+                <a:effectLst/>
+                <a:latin typeface="Courier New" panose="02070309020205020404" pitchFamily="49" charset="0"/>
+                <a:ea typeface="Times New Roman" panose="02020603050405020304" pitchFamily="18" charset="0"/>
+                <a:cs typeface="Arial" panose="020B0604020202020204" pitchFamily="34" charset="0"/>
+              </a:rPr>
+              <a:t>": "prod678", "quantity": 2},</a:t>
+            </a:r>
+            <a:endParaRPr lang="en-US" sz="1800" dirty="0">
+              <a:solidFill>
+                <a:srgbClr val="00B050"/>
+              </a:solidFill>
+              <a:effectLst/>
+              <a:latin typeface="Calibri" panose="020F0502020204030204" pitchFamily="34" charset="0"/>
+              <a:ea typeface="Calibri" panose="020F0502020204030204" pitchFamily="34" charset="0"/>
+              <a:cs typeface="Arial" panose="020B0604020202020204" pitchFamily="34" charset="0"/>
+            </a:endParaRPr>
+          </a:p>
+          <a:p>
+            <a:pPr marL="0" marR="0" indent="0">
+              <a:lnSpc>
+                <a:spcPct val="107000"/>
+              </a:lnSpc>
+              <a:spcBef>
+                <a:spcPts val="0"/>
+              </a:spcBef>
+              <a:spcAft>
+                <a:spcPts val="0"/>
+              </a:spcAft>
+              <a:buNone/>
+              <a:tabLst>
+                <a:tab pos="581660" algn="l"/>
+                <a:tab pos="1163320" algn="l"/>
+                <a:tab pos="1744980" algn="l"/>
+                <a:tab pos="2326640" algn="l"/>
+                <a:tab pos="2908300" algn="l"/>
+                <a:tab pos="3489960" algn="l"/>
+                <a:tab pos="4071620" algn="l"/>
+                <a:tab pos="4653280" algn="l"/>
+                <a:tab pos="5234940" algn="l"/>
+                <a:tab pos="5816600" algn="l"/>
+                <a:tab pos="6398260" algn="l"/>
+                <a:tab pos="6979920" algn="l"/>
+                <a:tab pos="7561580" algn="l"/>
+                <a:tab pos="8143240" algn="l"/>
+                <a:tab pos="8724900" algn="l"/>
+                <a:tab pos="9306560" algn="l"/>
+              </a:tabLst>
+            </a:pPr>
+            <a:r>
+              <a:rPr lang="en-US" sz="1800" dirty="0">
+                <a:solidFill>
+                  <a:srgbClr val="00B050"/>
+                </a:solidFill>
+                <a:effectLst/>
+                <a:latin typeface="Courier New" panose="02070309020205020404" pitchFamily="49" charset="0"/>
+                <a:ea typeface="Times New Roman" panose="02020603050405020304" pitchFamily="18" charset="0"/>
+                <a:cs typeface="Arial" panose="020B0604020202020204" pitchFamily="34" charset="0"/>
+              </a:rPr>
+              <a:t>    {"</a:t>
+            </a:r>
+            <a:r>
+              <a:rPr lang="en-US" sz="1800" dirty="0" err="1">
+                <a:solidFill>
+                  <a:srgbClr val="00B050"/>
+                </a:solidFill>
+                <a:effectLst/>
+                <a:latin typeface="Courier New" panose="02070309020205020404" pitchFamily="49" charset="0"/>
+                <a:ea typeface="Times New Roman" panose="02020603050405020304" pitchFamily="18" charset="0"/>
+                <a:cs typeface="Arial" panose="020B0604020202020204" pitchFamily="34" charset="0"/>
+              </a:rPr>
+              <a:t>product_id</a:t>
+            </a:r>
+            <a:r>
+              <a:rPr lang="en-US" sz="1800" dirty="0">
+                <a:solidFill>
+                  <a:srgbClr val="00B050"/>
+                </a:solidFill>
+                <a:effectLst/>
+                <a:latin typeface="Courier New" panose="02070309020205020404" pitchFamily="49" charset="0"/>
+                <a:ea typeface="Times New Roman" panose="02020603050405020304" pitchFamily="18" charset="0"/>
+                <a:cs typeface="Arial" panose="020B0604020202020204" pitchFamily="34" charset="0"/>
+              </a:rPr>
+              <a:t>": "prod789", "quantity": 1}</a:t>
+            </a:r>
+            <a:endParaRPr lang="en-US" sz="1800" dirty="0">
+              <a:solidFill>
+                <a:srgbClr val="00B050"/>
+              </a:solidFill>
+              <a:effectLst/>
+              <a:latin typeface="Calibri" panose="020F0502020204030204" pitchFamily="34" charset="0"/>
+              <a:ea typeface="Calibri" panose="020F0502020204030204" pitchFamily="34" charset="0"/>
+              <a:cs typeface="Arial" panose="020B0604020202020204" pitchFamily="34" charset="0"/>
+            </a:endParaRPr>
+          </a:p>
+          <a:p>
+            <a:pPr marL="0" marR="0" indent="0">
+              <a:lnSpc>
+                <a:spcPct val="107000"/>
+              </a:lnSpc>
+              <a:spcBef>
+                <a:spcPts val="0"/>
+              </a:spcBef>
+              <a:spcAft>
+                <a:spcPts val="0"/>
+              </a:spcAft>
+              <a:buNone/>
+              <a:tabLst>
+                <a:tab pos="581660" algn="l"/>
+                <a:tab pos="1163320" algn="l"/>
+                <a:tab pos="1744980" algn="l"/>
+                <a:tab pos="2326640" algn="l"/>
+                <a:tab pos="2908300" algn="l"/>
+                <a:tab pos="3489960" algn="l"/>
+                <a:tab pos="4071620" algn="l"/>
+                <a:tab pos="4653280" algn="l"/>
+                <a:tab pos="5234940" algn="l"/>
+                <a:tab pos="5816600" algn="l"/>
+                <a:tab pos="6398260" algn="l"/>
+                <a:tab pos="6979920" algn="l"/>
+                <a:tab pos="7561580" algn="l"/>
+                <a:tab pos="8143240" algn="l"/>
+                <a:tab pos="8724900" algn="l"/>
+                <a:tab pos="9306560" algn="l"/>
+              </a:tabLst>
+            </a:pPr>
+            <a:r>
+              <a:rPr lang="en-US" sz="1800" dirty="0">
+                <a:solidFill>
+                  <a:srgbClr val="00B050"/>
+                </a:solidFill>
+                <a:effectLst/>
+                <a:latin typeface="Courier New" panose="02070309020205020404" pitchFamily="49" charset="0"/>
+                <a:ea typeface="Times New Roman" panose="02020603050405020304" pitchFamily="18" charset="0"/>
+                <a:cs typeface="Arial" panose="020B0604020202020204" pitchFamily="34" charset="0"/>
+              </a:rPr>
+              <a:t>  ],</a:t>
+            </a:r>
+            <a:endParaRPr lang="en-US" sz="1800" dirty="0">
+              <a:solidFill>
+                <a:srgbClr val="00B050"/>
+              </a:solidFill>
+              <a:effectLst/>
+              <a:latin typeface="Calibri" panose="020F0502020204030204" pitchFamily="34" charset="0"/>
+              <a:ea typeface="Calibri" panose="020F0502020204030204" pitchFamily="34" charset="0"/>
+              <a:cs typeface="Arial" panose="020B0604020202020204" pitchFamily="34" charset="0"/>
+            </a:endParaRPr>
+          </a:p>
+          <a:p>
+            <a:pPr marL="0" marR="0" indent="0">
+              <a:lnSpc>
+                <a:spcPct val="107000"/>
+              </a:lnSpc>
+              <a:spcBef>
+                <a:spcPts val="0"/>
+              </a:spcBef>
+              <a:spcAft>
+                <a:spcPts val="0"/>
+              </a:spcAft>
+              <a:buNone/>
+              <a:tabLst>
+                <a:tab pos="581660" algn="l"/>
+                <a:tab pos="1163320" algn="l"/>
+                <a:tab pos="1744980" algn="l"/>
+                <a:tab pos="2326640" algn="l"/>
+                <a:tab pos="2908300" algn="l"/>
+                <a:tab pos="3489960" algn="l"/>
+                <a:tab pos="4071620" algn="l"/>
+                <a:tab pos="4653280" algn="l"/>
+                <a:tab pos="5234940" algn="l"/>
+                <a:tab pos="5816600" algn="l"/>
+                <a:tab pos="6398260" algn="l"/>
+                <a:tab pos="6979920" algn="l"/>
+                <a:tab pos="7561580" algn="l"/>
+                <a:tab pos="8143240" algn="l"/>
+                <a:tab pos="8724900" algn="l"/>
+                <a:tab pos="9306560" algn="l"/>
+              </a:tabLst>
+            </a:pPr>
+            <a:r>
+              <a:rPr lang="en-US" sz="1800" dirty="0">
+                <a:solidFill>
+                  <a:srgbClr val="00B050"/>
+                </a:solidFill>
+                <a:effectLst/>
+                <a:latin typeface="Courier New" panose="02070309020205020404" pitchFamily="49" charset="0"/>
+                <a:ea typeface="Times New Roman" panose="02020603050405020304" pitchFamily="18" charset="0"/>
+                <a:cs typeface="Arial" panose="020B0604020202020204" pitchFamily="34" charset="0"/>
+              </a:rPr>
+              <a:t>  "</a:t>
+            </a:r>
+            <a:r>
+              <a:rPr lang="en-US" sz="1800" dirty="0" err="1">
+                <a:solidFill>
+                  <a:srgbClr val="00B050"/>
+                </a:solidFill>
+                <a:effectLst/>
+                <a:latin typeface="Courier New" panose="02070309020205020404" pitchFamily="49" charset="0"/>
+                <a:ea typeface="Times New Roman" panose="02020603050405020304" pitchFamily="18" charset="0"/>
+                <a:cs typeface="Arial" panose="020B0604020202020204" pitchFamily="34" charset="0"/>
+              </a:rPr>
+              <a:t>total_amount</a:t>
+            </a:r>
+            <a:r>
+              <a:rPr lang="en-US" sz="1800" dirty="0">
+                <a:solidFill>
+                  <a:srgbClr val="00B050"/>
+                </a:solidFill>
+                <a:effectLst/>
+                <a:latin typeface="Courier New" panose="02070309020205020404" pitchFamily="49" charset="0"/>
+                <a:ea typeface="Times New Roman" panose="02020603050405020304" pitchFamily="18" charset="0"/>
+                <a:cs typeface="Arial" panose="020B0604020202020204" pitchFamily="34" charset="0"/>
+              </a:rPr>
+              <a:t>": 129.99,</a:t>
+            </a:r>
+            <a:endParaRPr lang="en-US" sz="1800" dirty="0">
+              <a:solidFill>
+                <a:srgbClr val="00B050"/>
+              </a:solidFill>
+              <a:effectLst/>
+              <a:latin typeface="Calibri" panose="020F0502020204030204" pitchFamily="34" charset="0"/>
+              <a:ea typeface="Calibri" panose="020F0502020204030204" pitchFamily="34" charset="0"/>
+              <a:cs typeface="Arial" panose="020B0604020202020204" pitchFamily="34" charset="0"/>
+            </a:endParaRPr>
+          </a:p>
+          <a:p>
+            <a:pPr marL="0" marR="0" indent="0">
+              <a:lnSpc>
+                <a:spcPct val="107000"/>
+              </a:lnSpc>
+              <a:spcBef>
+                <a:spcPts val="0"/>
+              </a:spcBef>
+              <a:spcAft>
+                <a:spcPts val="0"/>
+              </a:spcAft>
+              <a:buNone/>
+              <a:tabLst>
+                <a:tab pos="581660" algn="l"/>
+                <a:tab pos="1163320" algn="l"/>
+                <a:tab pos="1744980" algn="l"/>
+                <a:tab pos="2326640" algn="l"/>
+                <a:tab pos="2908300" algn="l"/>
+                <a:tab pos="3489960" algn="l"/>
+                <a:tab pos="4071620" algn="l"/>
+                <a:tab pos="4653280" algn="l"/>
+                <a:tab pos="5234940" algn="l"/>
+                <a:tab pos="5816600" algn="l"/>
+                <a:tab pos="6398260" algn="l"/>
+                <a:tab pos="6979920" algn="l"/>
+                <a:tab pos="7561580" algn="l"/>
+                <a:tab pos="8143240" algn="l"/>
+                <a:tab pos="8724900" algn="l"/>
+                <a:tab pos="9306560" algn="l"/>
+              </a:tabLst>
+            </a:pPr>
+            <a:r>
+              <a:rPr lang="en-US" sz="1800" dirty="0">
+                <a:solidFill>
+                  <a:srgbClr val="00B050"/>
+                </a:solidFill>
+                <a:effectLst/>
+                <a:latin typeface="Courier New" panose="02070309020205020404" pitchFamily="49" charset="0"/>
+                <a:ea typeface="Times New Roman" panose="02020603050405020304" pitchFamily="18" charset="0"/>
+                <a:cs typeface="Arial" panose="020B0604020202020204" pitchFamily="34" charset="0"/>
+              </a:rPr>
+              <a:t>  "</a:t>
+            </a:r>
+            <a:r>
+              <a:rPr lang="en-US" sz="1800" dirty="0" err="1">
+                <a:solidFill>
+                  <a:srgbClr val="00B050"/>
+                </a:solidFill>
+                <a:effectLst/>
+                <a:latin typeface="Courier New" panose="02070309020205020404" pitchFamily="49" charset="0"/>
+                <a:ea typeface="Times New Roman" panose="02020603050405020304" pitchFamily="18" charset="0"/>
+                <a:cs typeface="Arial" panose="020B0604020202020204" pitchFamily="34" charset="0"/>
+              </a:rPr>
+              <a:t>payment_status</a:t>
+            </a:r>
+            <a:r>
+              <a:rPr lang="en-US" sz="1800" dirty="0">
+                <a:solidFill>
+                  <a:srgbClr val="00B050"/>
+                </a:solidFill>
+                <a:effectLst/>
+                <a:latin typeface="Courier New" panose="02070309020205020404" pitchFamily="49" charset="0"/>
+                <a:ea typeface="Times New Roman" panose="02020603050405020304" pitchFamily="18" charset="0"/>
+                <a:cs typeface="Arial" panose="020B0604020202020204" pitchFamily="34" charset="0"/>
+              </a:rPr>
+              <a:t>": "paid",</a:t>
+            </a:r>
+            <a:endParaRPr lang="en-US" sz="1800" dirty="0">
+              <a:solidFill>
+                <a:srgbClr val="00B050"/>
+              </a:solidFill>
+              <a:effectLst/>
+              <a:latin typeface="Calibri" panose="020F0502020204030204" pitchFamily="34" charset="0"/>
+              <a:ea typeface="Calibri" panose="020F0502020204030204" pitchFamily="34" charset="0"/>
+              <a:cs typeface="Arial" panose="020B0604020202020204" pitchFamily="34" charset="0"/>
+            </a:endParaRPr>
+          </a:p>
+          <a:p>
+            <a:pPr marL="0" marR="0" indent="0">
+              <a:lnSpc>
+                <a:spcPct val="107000"/>
+              </a:lnSpc>
+              <a:spcBef>
+                <a:spcPts val="0"/>
+              </a:spcBef>
+              <a:spcAft>
+                <a:spcPts val="0"/>
+              </a:spcAft>
+              <a:buNone/>
+              <a:tabLst>
+                <a:tab pos="581660" algn="l"/>
+                <a:tab pos="1163320" algn="l"/>
+                <a:tab pos="1744980" algn="l"/>
+                <a:tab pos="2326640" algn="l"/>
+                <a:tab pos="2908300" algn="l"/>
+                <a:tab pos="3489960" algn="l"/>
+                <a:tab pos="4071620" algn="l"/>
+                <a:tab pos="4653280" algn="l"/>
+                <a:tab pos="5234940" algn="l"/>
+                <a:tab pos="5816600" algn="l"/>
+                <a:tab pos="6398260" algn="l"/>
+                <a:tab pos="6979920" algn="l"/>
+                <a:tab pos="7561580" algn="l"/>
+                <a:tab pos="8143240" algn="l"/>
+                <a:tab pos="8724900" algn="l"/>
+                <a:tab pos="9306560" algn="l"/>
+              </a:tabLst>
+            </a:pPr>
+            <a:r>
+              <a:rPr lang="en-US" sz="1800" dirty="0">
+                <a:solidFill>
+                  <a:srgbClr val="00B050"/>
+                </a:solidFill>
+                <a:effectLst/>
+                <a:latin typeface="Courier New" panose="02070309020205020404" pitchFamily="49" charset="0"/>
+                <a:ea typeface="Times New Roman" panose="02020603050405020304" pitchFamily="18" charset="0"/>
+                <a:cs typeface="Arial" panose="020B0604020202020204" pitchFamily="34" charset="0"/>
+              </a:rPr>
+              <a:t>  "</a:t>
+            </a:r>
+            <a:r>
+              <a:rPr lang="en-US" sz="1800" dirty="0" err="1">
+                <a:solidFill>
+                  <a:srgbClr val="00B050"/>
+                </a:solidFill>
+                <a:effectLst/>
+                <a:latin typeface="Courier New" panose="02070309020205020404" pitchFamily="49" charset="0"/>
+                <a:ea typeface="Times New Roman" panose="02020603050405020304" pitchFamily="18" charset="0"/>
+                <a:cs typeface="Arial" panose="020B0604020202020204" pitchFamily="34" charset="0"/>
+              </a:rPr>
+              <a:t>shipping_address</a:t>
+            </a:r>
+            <a:r>
+              <a:rPr lang="en-US" sz="1800" dirty="0">
+                <a:solidFill>
+                  <a:srgbClr val="00B050"/>
+                </a:solidFill>
+                <a:effectLst/>
+                <a:latin typeface="Courier New" panose="02070309020205020404" pitchFamily="49" charset="0"/>
+                <a:ea typeface="Times New Roman" panose="02020603050405020304" pitchFamily="18" charset="0"/>
+                <a:cs typeface="Arial" panose="020B0604020202020204" pitchFamily="34" charset="0"/>
+              </a:rPr>
+              <a:t>": "123 Main St, Anytown, USA"</a:t>
+            </a:r>
+            <a:endParaRPr lang="en-US" sz="1800" dirty="0">
+              <a:solidFill>
+                <a:srgbClr val="00B050"/>
+              </a:solidFill>
+              <a:effectLst/>
+              <a:latin typeface="Calibri" panose="020F0502020204030204" pitchFamily="34" charset="0"/>
+              <a:ea typeface="Calibri" panose="020F0502020204030204" pitchFamily="34" charset="0"/>
+              <a:cs typeface="Arial" panose="020B0604020202020204" pitchFamily="34" charset="0"/>
+            </a:endParaRPr>
+          </a:p>
+          <a:p>
+            <a:pPr marL="0" marR="0" indent="0">
+              <a:lnSpc>
+                <a:spcPct val="107000"/>
+              </a:lnSpc>
+              <a:spcBef>
+                <a:spcPts val="0"/>
+              </a:spcBef>
+              <a:spcAft>
+                <a:spcPts val="0"/>
+              </a:spcAft>
+              <a:buNone/>
+              <a:tabLst>
+                <a:tab pos="581660" algn="l"/>
+                <a:tab pos="1163320" algn="l"/>
+                <a:tab pos="1744980" algn="l"/>
+                <a:tab pos="2326640" algn="l"/>
+                <a:tab pos="2908300" algn="l"/>
+                <a:tab pos="3489960" algn="l"/>
+                <a:tab pos="4071620" algn="l"/>
+                <a:tab pos="4653280" algn="l"/>
+                <a:tab pos="5234940" algn="l"/>
+                <a:tab pos="5816600" algn="l"/>
+                <a:tab pos="6398260" algn="l"/>
+                <a:tab pos="6979920" algn="l"/>
+                <a:tab pos="7561580" algn="l"/>
+                <a:tab pos="8143240" algn="l"/>
+                <a:tab pos="8724900" algn="l"/>
+                <a:tab pos="9306560" algn="l"/>
+              </a:tabLst>
+            </a:pPr>
+            <a:r>
+              <a:rPr lang="en-US" sz="1800" dirty="0">
+                <a:solidFill>
+                  <a:srgbClr val="00B050"/>
+                </a:solidFill>
+                <a:effectLst/>
+                <a:latin typeface="Courier New" panose="02070309020205020404" pitchFamily="49" charset="0"/>
+                <a:ea typeface="Times New Roman" panose="02020603050405020304" pitchFamily="18" charset="0"/>
+                <a:cs typeface="Arial" panose="020B0604020202020204" pitchFamily="34" charset="0"/>
+              </a:rPr>
+              <a:t>}</a:t>
+            </a:r>
+            <a:endParaRPr lang="en-US" sz="1800" dirty="0">
+              <a:solidFill>
+                <a:srgbClr val="00B050"/>
+              </a:solidFill>
+              <a:effectLst/>
+              <a:latin typeface="Calibri" panose="020F0502020204030204" pitchFamily="34" charset="0"/>
+              <a:ea typeface="Calibri" panose="020F0502020204030204" pitchFamily="34" charset="0"/>
+              <a:cs typeface="Arial" panose="020B0604020202020204" pitchFamily="34" charset="0"/>
+            </a:endParaRPr>
+          </a:p>
+          <a:p>
+            <a:pPr marL="0" indent="0">
+              <a:buNone/>
+            </a:pPr>
+            <a:endParaRPr lang="en-US" dirty="0">
+              <a:solidFill>
+                <a:srgbClr val="00B050"/>
+              </a:solidFill>
+            </a:endParaRPr>
           </a:p>
         </p:txBody>
       </p:sp>
     </p:spTree>
     <p:extLst>
       <p:ext uri="{BB962C8B-B14F-4D97-AF65-F5344CB8AC3E}">
-        <p14:creationId xmlns:p14="http://schemas.microsoft.com/office/powerpoint/2010/main" val="2996144740"/>
+        <p14:creationId xmlns:p14="http://schemas.microsoft.com/office/powerpoint/2010/main" val="2164727706"/>
       </p:ext>
     </p:extLst>
   </p:cSld>
@@ -22842,798 +23608,7 @@
 </p:sld>
 </file>
 
-<file path=ppt/slides/slide28.xml><?xml version="1.0" encoding="utf-8"?>
-<p:sld xmlns:a="http://schemas.openxmlformats.org/drawingml/2006/main" xmlns:r="http://schemas.openxmlformats.org/officeDocument/2006/relationships" xmlns:p="http://schemas.openxmlformats.org/presentationml/2006/main">
-  <p:cSld>
-    <p:spTree>
-      <p:nvGrpSpPr>
-        <p:cNvPr id="1" name=""/>
-        <p:cNvGrpSpPr/>
-        <p:nvPr/>
-      </p:nvGrpSpPr>
-      <p:grpSpPr>
-        <a:xfrm>
-          <a:off x="0" y="0"/>
-          <a:ext cx="0" cy="0"/>
-          <a:chOff x="0" y="0"/>
-          <a:chExt cx="0" cy="0"/>
-        </a:xfrm>
-      </p:grpSpPr>
-      <p:sp>
-        <p:nvSpPr>
-          <p:cNvPr id="2" name="Title 1">
-            <a:extLst>
-              <a:ext uri="{FF2B5EF4-FFF2-40B4-BE49-F238E27FC236}">
-                <a16:creationId xmlns:a16="http://schemas.microsoft.com/office/drawing/2014/main" id="{94C8800D-C43B-4FD7-A318-67AEB8003E93}"/>
-              </a:ext>
-            </a:extLst>
-          </p:cNvPr>
-          <p:cNvSpPr>
-            <a:spLocks noGrp="1"/>
-          </p:cNvSpPr>
-          <p:nvPr>
-            <p:ph type="title"/>
-          </p:nvPr>
-        </p:nvSpPr>
-        <p:spPr/>
-        <p:txBody>
-          <a:bodyPr/>
-          <a:lstStyle/>
-          <a:p>
-            <a:r>
-              <a:rPr lang="en-US" sz="2800" dirty="0">
-                <a:effectLst/>
-                <a:latin typeface="Times New Roman" panose="02020603050405020304" pitchFamily="18" charset="0"/>
-                <a:ea typeface="Times New Roman" panose="02020603050405020304" pitchFamily="18" charset="0"/>
-                <a:cs typeface="Arial" panose="020B0604020202020204" pitchFamily="34" charset="0"/>
-              </a:rPr>
-              <a:t>Kafka Streams / Consumers</a:t>
-            </a:r>
-            <a:endParaRPr lang="en-US" dirty="0"/>
-          </a:p>
-        </p:txBody>
-      </p:sp>
-      <p:sp>
-        <p:nvSpPr>
-          <p:cNvPr id="3" name="Content Placeholder 2">
-            <a:extLst>
-              <a:ext uri="{FF2B5EF4-FFF2-40B4-BE49-F238E27FC236}">
-                <a16:creationId xmlns:a16="http://schemas.microsoft.com/office/drawing/2014/main" id="{0874E313-B8F4-4CC1-A604-3C82F5A688A3}"/>
-              </a:ext>
-            </a:extLst>
-          </p:cNvPr>
-          <p:cNvSpPr>
-            <a:spLocks noGrp="1"/>
-          </p:cNvSpPr>
-          <p:nvPr>
-            <p:ph idx="1"/>
-          </p:nvPr>
-        </p:nvSpPr>
-        <p:spPr/>
-        <p:txBody>
-          <a:bodyPr/>
-          <a:lstStyle/>
-          <a:p>
-            <a:pPr marL="0" marR="0" indent="0">
-              <a:lnSpc>
-                <a:spcPct val="107000"/>
-              </a:lnSpc>
-              <a:spcBef>
-                <a:spcPts val="0"/>
-              </a:spcBef>
-              <a:spcAft>
-                <a:spcPts val="800"/>
-              </a:spcAft>
-              <a:buNone/>
-            </a:pPr>
-            <a:r>
-              <a:rPr lang="en-US" sz="1800" b="1" dirty="0">
-                <a:effectLst/>
-                <a:latin typeface="Times New Roman" panose="02020603050405020304" pitchFamily="18" charset="0"/>
-                <a:ea typeface="Times New Roman" panose="02020603050405020304" pitchFamily="18" charset="0"/>
-                <a:cs typeface="Arial" panose="020B0604020202020204" pitchFamily="34" charset="0"/>
-              </a:rPr>
-              <a:t>Consumer 4: Shipping Service</a:t>
-            </a:r>
-            <a:endParaRPr lang="en-US" sz="1800" dirty="0">
-              <a:effectLst/>
-              <a:latin typeface="Calibri" panose="020F0502020204030204" pitchFamily="34" charset="0"/>
-              <a:ea typeface="Calibri" panose="020F0502020204030204" pitchFamily="34" charset="0"/>
-              <a:cs typeface="Arial" panose="020B0604020202020204" pitchFamily="34" charset="0"/>
-            </a:endParaRPr>
-          </a:p>
-          <a:p>
-            <a:pPr marL="342900" marR="0" lvl="0" indent="-342900">
-              <a:lnSpc>
-                <a:spcPct val="107000"/>
-              </a:lnSpc>
-              <a:spcBef>
-                <a:spcPts val="0"/>
-              </a:spcBef>
-              <a:spcAft>
-                <a:spcPts val="800"/>
-              </a:spcAft>
-              <a:buSzPts val="1000"/>
-              <a:buFont typeface="Symbol" panose="05050102010706020507" pitchFamily="18" charset="2"/>
-              <a:buChar char=""/>
-              <a:tabLst>
-                <a:tab pos="457200" algn="l"/>
-              </a:tabLst>
-            </a:pPr>
-            <a:r>
-              <a:rPr lang="en-US" sz="1800" b="1" dirty="0">
-                <a:effectLst/>
-                <a:latin typeface="Times New Roman" panose="02020603050405020304" pitchFamily="18" charset="0"/>
-                <a:ea typeface="Times New Roman" panose="02020603050405020304" pitchFamily="18" charset="0"/>
-                <a:cs typeface="Arial" panose="020B0604020202020204" pitchFamily="34" charset="0"/>
-              </a:rPr>
-              <a:t>Consumes</a:t>
-            </a:r>
-            <a:r>
-              <a:rPr lang="en-US" sz="1800" dirty="0">
-                <a:effectLst/>
-                <a:latin typeface="Times New Roman" panose="02020603050405020304" pitchFamily="18" charset="0"/>
-                <a:ea typeface="Times New Roman" panose="02020603050405020304" pitchFamily="18" charset="0"/>
-                <a:cs typeface="Arial" panose="020B0604020202020204" pitchFamily="34" charset="0"/>
-              </a:rPr>
-              <a:t>: Order data (if the order is confirmed) and shipping updates from the </a:t>
-            </a:r>
-            <a:r>
-              <a:rPr lang="en-US" sz="1800" dirty="0">
-                <a:effectLst/>
-                <a:latin typeface="Courier New" panose="02070309020205020404" pitchFamily="49" charset="0"/>
-                <a:ea typeface="Times New Roman" panose="02020603050405020304" pitchFamily="18" charset="0"/>
-                <a:cs typeface="Arial" panose="020B0604020202020204" pitchFamily="34" charset="0"/>
-              </a:rPr>
-              <a:t>shipping</a:t>
-            </a:r>
-            <a:r>
-              <a:rPr lang="en-US" sz="1800" dirty="0">
-                <a:effectLst/>
-                <a:latin typeface="Times New Roman" panose="02020603050405020304" pitchFamily="18" charset="0"/>
-                <a:ea typeface="Times New Roman" panose="02020603050405020304" pitchFamily="18" charset="0"/>
-                <a:cs typeface="Arial" panose="020B0604020202020204" pitchFamily="34" charset="0"/>
-              </a:rPr>
-              <a:t> topic.</a:t>
-            </a:r>
-            <a:endParaRPr lang="en-US" sz="1800" dirty="0">
-              <a:effectLst/>
-              <a:latin typeface="Calibri" panose="020F0502020204030204" pitchFamily="34" charset="0"/>
-              <a:ea typeface="Calibri" panose="020F0502020204030204" pitchFamily="34" charset="0"/>
-              <a:cs typeface="Arial" panose="020B0604020202020204" pitchFamily="34" charset="0"/>
-            </a:endParaRPr>
-          </a:p>
-          <a:p>
-            <a:pPr marL="342900" marR="0" lvl="0" indent="-342900">
-              <a:lnSpc>
-                <a:spcPct val="107000"/>
-              </a:lnSpc>
-              <a:spcBef>
-                <a:spcPts val="0"/>
-              </a:spcBef>
-              <a:spcAft>
-                <a:spcPts val="800"/>
-              </a:spcAft>
-              <a:buSzPts val="1000"/>
-              <a:buFont typeface="Symbol" panose="05050102010706020507" pitchFamily="18" charset="2"/>
-              <a:buChar char=""/>
-              <a:tabLst>
-                <a:tab pos="457200" algn="l"/>
-              </a:tabLst>
-            </a:pPr>
-            <a:r>
-              <a:rPr lang="en-US" sz="1800" b="1" dirty="0">
-                <a:effectLst/>
-                <a:latin typeface="Times New Roman" panose="02020603050405020304" pitchFamily="18" charset="0"/>
-                <a:ea typeface="Times New Roman" panose="02020603050405020304" pitchFamily="18" charset="0"/>
-                <a:cs typeface="Arial" panose="020B0604020202020204" pitchFamily="34" charset="0"/>
-              </a:rPr>
-              <a:t>Processes</a:t>
-            </a:r>
-            <a:r>
-              <a:rPr lang="en-US" sz="1800" dirty="0">
-                <a:effectLst/>
-                <a:latin typeface="Times New Roman" panose="02020603050405020304" pitchFamily="18" charset="0"/>
-                <a:ea typeface="Times New Roman" panose="02020603050405020304" pitchFamily="18" charset="0"/>
-                <a:cs typeface="Arial" panose="020B0604020202020204" pitchFamily="34" charset="0"/>
-              </a:rPr>
-              <a:t>: When an order is confirmed, the service generates a shipment and tracks the order's shipping status. It also manages the shipping progress.</a:t>
-            </a:r>
-            <a:endParaRPr lang="en-US" sz="1800" dirty="0">
-              <a:effectLst/>
-              <a:latin typeface="Calibri" panose="020F0502020204030204" pitchFamily="34" charset="0"/>
-              <a:ea typeface="Calibri" panose="020F0502020204030204" pitchFamily="34" charset="0"/>
-              <a:cs typeface="Arial" panose="020B0604020202020204" pitchFamily="34" charset="0"/>
-            </a:endParaRPr>
-          </a:p>
-          <a:p>
-            <a:pPr marL="342900" marR="0" lvl="0" indent="-342900">
-              <a:lnSpc>
-                <a:spcPct val="107000"/>
-              </a:lnSpc>
-              <a:spcBef>
-                <a:spcPts val="0"/>
-              </a:spcBef>
-              <a:spcAft>
-                <a:spcPts val="800"/>
-              </a:spcAft>
-              <a:buSzPts val="1000"/>
-              <a:buFont typeface="Symbol" panose="05050102010706020507" pitchFamily="18" charset="2"/>
-              <a:buChar char=""/>
-              <a:tabLst>
-                <a:tab pos="457200" algn="l"/>
-              </a:tabLst>
-            </a:pPr>
-            <a:r>
-              <a:rPr lang="en-US" sz="1800" b="1" dirty="0">
-                <a:effectLst/>
-                <a:latin typeface="Times New Roman" panose="02020603050405020304" pitchFamily="18" charset="0"/>
-                <a:ea typeface="Times New Roman" panose="02020603050405020304" pitchFamily="18" charset="0"/>
-                <a:cs typeface="Arial" panose="020B0604020202020204" pitchFamily="34" charset="0"/>
-              </a:rPr>
-              <a:t>Output</a:t>
-            </a:r>
-            <a:r>
-              <a:rPr lang="en-US" sz="1800" dirty="0">
-                <a:effectLst/>
-                <a:latin typeface="Times New Roman" panose="02020603050405020304" pitchFamily="18" charset="0"/>
-                <a:ea typeface="Times New Roman" panose="02020603050405020304" pitchFamily="18" charset="0"/>
-                <a:cs typeface="Arial" panose="020B0604020202020204" pitchFamily="34" charset="0"/>
-              </a:rPr>
-              <a:t>: Sends tracking information to customers and updates the order status (shipped, delivered).</a:t>
-            </a:r>
-            <a:endParaRPr lang="en-US" sz="1800" dirty="0">
-              <a:effectLst/>
-              <a:latin typeface="Calibri" panose="020F0502020204030204" pitchFamily="34" charset="0"/>
-              <a:ea typeface="Calibri" panose="020F0502020204030204" pitchFamily="34" charset="0"/>
-              <a:cs typeface="Arial" panose="020B0604020202020204" pitchFamily="34" charset="0"/>
-            </a:endParaRPr>
-          </a:p>
-          <a:p>
-            <a:pPr marL="0" marR="0" indent="0">
-              <a:lnSpc>
-                <a:spcPct val="107000"/>
-              </a:lnSpc>
-              <a:spcBef>
-                <a:spcPts val="0"/>
-              </a:spcBef>
-              <a:spcAft>
-                <a:spcPts val="800"/>
-              </a:spcAft>
-              <a:buNone/>
-            </a:pPr>
-            <a:r>
-              <a:rPr lang="en-US" sz="1800" b="1" dirty="0">
-                <a:effectLst/>
-                <a:latin typeface="Times New Roman" panose="02020603050405020304" pitchFamily="18" charset="0"/>
-                <a:ea typeface="Times New Roman" panose="02020603050405020304" pitchFamily="18" charset="0"/>
-                <a:cs typeface="Arial" panose="020B0604020202020204" pitchFamily="34" charset="0"/>
-              </a:rPr>
-              <a:t>Consumer 5: Customer Notification Service</a:t>
-            </a:r>
-            <a:endParaRPr lang="en-US" sz="1800" dirty="0">
-              <a:effectLst/>
-              <a:latin typeface="Calibri" panose="020F0502020204030204" pitchFamily="34" charset="0"/>
-              <a:ea typeface="Calibri" panose="020F0502020204030204" pitchFamily="34" charset="0"/>
-              <a:cs typeface="Arial" panose="020B0604020202020204" pitchFamily="34" charset="0"/>
-            </a:endParaRPr>
-          </a:p>
-          <a:p>
-            <a:pPr marL="342900" marR="0" lvl="0" indent="-342900">
-              <a:lnSpc>
-                <a:spcPct val="107000"/>
-              </a:lnSpc>
-              <a:spcBef>
-                <a:spcPts val="0"/>
-              </a:spcBef>
-              <a:spcAft>
-                <a:spcPts val="800"/>
-              </a:spcAft>
-              <a:buSzPts val="1000"/>
-              <a:buFont typeface="Symbol" panose="05050102010706020507" pitchFamily="18" charset="2"/>
-              <a:buChar char=""/>
-              <a:tabLst>
-                <a:tab pos="457200" algn="l"/>
-              </a:tabLst>
-            </a:pPr>
-            <a:r>
-              <a:rPr lang="en-US" sz="1800" b="1" dirty="0">
-                <a:effectLst/>
-                <a:latin typeface="Times New Roman" panose="02020603050405020304" pitchFamily="18" charset="0"/>
-                <a:ea typeface="Times New Roman" panose="02020603050405020304" pitchFamily="18" charset="0"/>
-                <a:cs typeface="Arial" panose="020B0604020202020204" pitchFamily="34" charset="0"/>
-              </a:rPr>
-              <a:t>Consumes</a:t>
-            </a:r>
-            <a:r>
-              <a:rPr lang="en-US" sz="1800" dirty="0">
-                <a:effectLst/>
-                <a:latin typeface="Times New Roman" panose="02020603050405020304" pitchFamily="18" charset="0"/>
-                <a:ea typeface="Times New Roman" panose="02020603050405020304" pitchFamily="18" charset="0"/>
-                <a:cs typeface="Arial" panose="020B0604020202020204" pitchFamily="34" charset="0"/>
-              </a:rPr>
-              <a:t>: Order status updates, shipping updates, and payment updates.</a:t>
-            </a:r>
-            <a:endParaRPr lang="en-US" sz="1800" dirty="0">
-              <a:effectLst/>
-              <a:latin typeface="Calibri" panose="020F0502020204030204" pitchFamily="34" charset="0"/>
-              <a:ea typeface="Calibri" panose="020F0502020204030204" pitchFamily="34" charset="0"/>
-              <a:cs typeface="Arial" panose="020B0604020202020204" pitchFamily="34" charset="0"/>
-            </a:endParaRPr>
-          </a:p>
-          <a:p>
-            <a:pPr marL="342900" marR="0" lvl="0" indent="-342900">
-              <a:lnSpc>
-                <a:spcPct val="107000"/>
-              </a:lnSpc>
-              <a:spcBef>
-                <a:spcPts val="0"/>
-              </a:spcBef>
-              <a:spcAft>
-                <a:spcPts val="800"/>
-              </a:spcAft>
-              <a:buSzPts val="1000"/>
-              <a:buFont typeface="Symbol" panose="05050102010706020507" pitchFamily="18" charset="2"/>
-              <a:buChar char=""/>
-              <a:tabLst>
-                <a:tab pos="457200" algn="l"/>
-              </a:tabLst>
-            </a:pPr>
-            <a:r>
-              <a:rPr lang="en-US" sz="1800" b="1" dirty="0">
-                <a:effectLst/>
-                <a:latin typeface="Times New Roman" panose="02020603050405020304" pitchFamily="18" charset="0"/>
-                <a:ea typeface="Times New Roman" panose="02020603050405020304" pitchFamily="18" charset="0"/>
-                <a:cs typeface="Arial" panose="020B0604020202020204" pitchFamily="34" charset="0"/>
-              </a:rPr>
-              <a:t>Processes</a:t>
-            </a:r>
-            <a:r>
-              <a:rPr lang="en-US" sz="1800" dirty="0">
-                <a:effectLst/>
-                <a:latin typeface="Times New Roman" panose="02020603050405020304" pitchFamily="18" charset="0"/>
-                <a:ea typeface="Times New Roman" panose="02020603050405020304" pitchFamily="18" charset="0"/>
-                <a:cs typeface="Arial" panose="020B0604020202020204" pitchFamily="34" charset="0"/>
-              </a:rPr>
-              <a:t>: Notifies customers about their order's progress (payment successful, order shipped, order delivered).</a:t>
-            </a:r>
-            <a:endParaRPr lang="en-US" sz="1800" dirty="0">
-              <a:effectLst/>
-              <a:latin typeface="Calibri" panose="020F0502020204030204" pitchFamily="34" charset="0"/>
-              <a:ea typeface="Calibri" panose="020F0502020204030204" pitchFamily="34" charset="0"/>
-              <a:cs typeface="Arial" panose="020B0604020202020204" pitchFamily="34" charset="0"/>
-            </a:endParaRPr>
-          </a:p>
-          <a:p>
-            <a:pPr marL="342900" marR="0" lvl="0" indent="-342900">
-              <a:lnSpc>
-                <a:spcPct val="107000"/>
-              </a:lnSpc>
-              <a:spcBef>
-                <a:spcPts val="0"/>
-              </a:spcBef>
-              <a:spcAft>
-                <a:spcPts val="800"/>
-              </a:spcAft>
-              <a:buSzPts val="1000"/>
-              <a:buFont typeface="Symbol" panose="05050102010706020507" pitchFamily="18" charset="2"/>
-              <a:buChar char=""/>
-              <a:tabLst>
-                <a:tab pos="457200" algn="l"/>
-              </a:tabLst>
-            </a:pPr>
-            <a:r>
-              <a:rPr lang="en-US" sz="1800" b="1" dirty="0">
-                <a:effectLst/>
-                <a:latin typeface="Times New Roman" panose="02020603050405020304" pitchFamily="18" charset="0"/>
-                <a:ea typeface="Times New Roman" panose="02020603050405020304" pitchFamily="18" charset="0"/>
-                <a:cs typeface="Arial" panose="020B0604020202020204" pitchFamily="34" charset="0"/>
-              </a:rPr>
-              <a:t>Output</a:t>
-            </a:r>
-            <a:r>
-              <a:rPr lang="en-US" sz="1800" dirty="0">
-                <a:effectLst/>
-                <a:latin typeface="Times New Roman" panose="02020603050405020304" pitchFamily="18" charset="0"/>
-                <a:ea typeface="Times New Roman" panose="02020603050405020304" pitchFamily="18" charset="0"/>
-                <a:cs typeface="Arial" panose="020B0604020202020204" pitchFamily="34" charset="0"/>
-              </a:rPr>
-              <a:t>: Sends push notifications, emails, or SMS to customers about the order’s status.</a:t>
-            </a:r>
-            <a:endParaRPr lang="en-US" sz="1800" dirty="0">
-              <a:effectLst/>
-              <a:latin typeface="Calibri" panose="020F0502020204030204" pitchFamily="34" charset="0"/>
-              <a:ea typeface="Calibri" panose="020F0502020204030204" pitchFamily="34" charset="0"/>
-              <a:cs typeface="Arial" panose="020B0604020202020204" pitchFamily="34" charset="0"/>
-            </a:endParaRPr>
-          </a:p>
-          <a:p>
-            <a:endParaRPr lang="en-US" dirty="0"/>
-          </a:p>
-        </p:txBody>
-      </p:sp>
-    </p:spTree>
-    <p:extLst>
-      <p:ext uri="{BB962C8B-B14F-4D97-AF65-F5344CB8AC3E}">
-        <p14:creationId xmlns:p14="http://schemas.microsoft.com/office/powerpoint/2010/main" val="1106511272"/>
-      </p:ext>
-    </p:extLst>
-  </p:cSld>
-  <p:clrMapOvr>
-    <a:masterClrMapping/>
-  </p:clrMapOvr>
-</p:sld>
-</file>
-
-<file path=ppt/slides/slide29.xml><?xml version="1.0" encoding="utf-8"?>
-<p:sld xmlns:a="http://schemas.openxmlformats.org/drawingml/2006/main" xmlns:r="http://schemas.openxmlformats.org/officeDocument/2006/relationships" xmlns:p="http://schemas.openxmlformats.org/presentationml/2006/main">
-  <p:cSld>
-    <p:spTree>
-      <p:nvGrpSpPr>
-        <p:cNvPr id="1" name=""/>
-        <p:cNvGrpSpPr/>
-        <p:nvPr/>
-      </p:nvGrpSpPr>
-      <p:grpSpPr>
-        <a:xfrm>
-          <a:off x="0" y="0"/>
-          <a:ext cx="0" cy="0"/>
-          <a:chOff x="0" y="0"/>
-          <a:chExt cx="0" cy="0"/>
-        </a:xfrm>
-      </p:grpSpPr>
-      <p:sp>
-        <p:nvSpPr>
-          <p:cNvPr id="2" name="Title 1">
-            <a:extLst>
-              <a:ext uri="{FF2B5EF4-FFF2-40B4-BE49-F238E27FC236}">
-                <a16:creationId xmlns:a16="http://schemas.microsoft.com/office/drawing/2014/main" id="{89AAB016-A5A0-4664-87E4-CD43227E5FDA}"/>
-              </a:ext>
-            </a:extLst>
-          </p:cNvPr>
-          <p:cNvSpPr>
-            <a:spLocks noGrp="1"/>
-          </p:cNvSpPr>
-          <p:nvPr>
-            <p:ph type="title"/>
-          </p:nvPr>
-        </p:nvSpPr>
-        <p:spPr/>
-        <p:txBody>
-          <a:bodyPr>
-            <a:normAutofit/>
-          </a:bodyPr>
-          <a:lstStyle/>
-          <a:p>
-            <a:r>
-              <a:rPr lang="en-US" sz="2800" b="1" dirty="0">
-                <a:effectLst/>
-                <a:latin typeface="Times New Roman" panose="02020603050405020304" pitchFamily="18" charset="0"/>
-                <a:ea typeface="Times New Roman" panose="02020603050405020304" pitchFamily="18" charset="0"/>
-                <a:cs typeface="Arial" panose="020B0604020202020204" pitchFamily="34" charset="0"/>
-              </a:rPr>
-              <a:t>Key </a:t>
-            </a:r>
-            <a:r>
-              <a:rPr lang="en-US" sz="2800" dirty="0">
-                <a:effectLst/>
-                <a:latin typeface="Times New Roman" panose="02020603050405020304" pitchFamily="18" charset="0"/>
-                <a:ea typeface="Times New Roman" panose="02020603050405020304" pitchFamily="18" charset="0"/>
-                <a:cs typeface="Arial" panose="020B0604020202020204" pitchFamily="34" charset="0"/>
-              </a:rPr>
-              <a:t>Advantages</a:t>
-            </a:r>
-            <a:r>
-              <a:rPr lang="en-US" sz="2800" b="1" dirty="0">
-                <a:effectLst/>
-                <a:latin typeface="Times New Roman" panose="02020603050405020304" pitchFamily="18" charset="0"/>
-                <a:ea typeface="Times New Roman" panose="02020603050405020304" pitchFamily="18" charset="0"/>
-                <a:cs typeface="Arial" panose="020B0604020202020204" pitchFamily="34" charset="0"/>
-              </a:rPr>
-              <a:t> of Kafka in This Scenario</a:t>
-            </a:r>
-            <a:endParaRPr lang="en-US" dirty="0"/>
-          </a:p>
-        </p:txBody>
-      </p:sp>
-      <p:sp>
-        <p:nvSpPr>
-          <p:cNvPr id="3" name="Content Placeholder 2">
-            <a:extLst>
-              <a:ext uri="{FF2B5EF4-FFF2-40B4-BE49-F238E27FC236}">
-                <a16:creationId xmlns:a16="http://schemas.microsoft.com/office/drawing/2014/main" id="{EF97ED4C-AFE0-4A6F-9D86-C36C1AF0CC9B}"/>
-              </a:ext>
-            </a:extLst>
-          </p:cNvPr>
-          <p:cNvSpPr>
-            <a:spLocks noGrp="1"/>
-          </p:cNvSpPr>
-          <p:nvPr>
-            <p:ph idx="1"/>
-          </p:nvPr>
-        </p:nvSpPr>
-        <p:spPr/>
-        <p:txBody>
-          <a:bodyPr/>
-          <a:lstStyle/>
-          <a:p>
-            <a:pPr marL="342900" marR="0" lvl="0" indent="-342900">
-              <a:lnSpc>
-                <a:spcPct val="107000"/>
-              </a:lnSpc>
-              <a:spcBef>
-                <a:spcPts val="0"/>
-              </a:spcBef>
-              <a:spcAft>
-                <a:spcPts val="800"/>
-              </a:spcAft>
-              <a:buSzPts val="1000"/>
-              <a:buFont typeface="Symbol" panose="05050102010706020507" pitchFamily="18" charset="2"/>
-              <a:buChar char=""/>
-              <a:tabLst>
-                <a:tab pos="457200" algn="l"/>
-              </a:tabLst>
-            </a:pPr>
-            <a:r>
-              <a:rPr lang="en-US" sz="1800" b="1" dirty="0">
-                <a:effectLst/>
-                <a:latin typeface="Times New Roman" panose="02020603050405020304" pitchFamily="18" charset="0"/>
-                <a:ea typeface="Times New Roman" panose="02020603050405020304" pitchFamily="18" charset="0"/>
-                <a:cs typeface="Arial" panose="020B0604020202020204" pitchFamily="34" charset="0"/>
-              </a:rPr>
-              <a:t>Real-Time Processing</a:t>
-            </a:r>
-            <a:r>
-              <a:rPr lang="en-US" sz="1800" dirty="0">
-                <a:effectLst/>
-                <a:latin typeface="Times New Roman" panose="02020603050405020304" pitchFamily="18" charset="0"/>
-                <a:ea typeface="Times New Roman" panose="02020603050405020304" pitchFamily="18" charset="0"/>
-                <a:cs typeface="Arial" panose="020B0604020202020204" pitchFamily="34" charset="0"/>
-              </a:rPr>
-              <a:t>: Kafka ensures that all systems (order processing, inventory management, payment verification, and shipping) communicate and update in real time.</a:t>
-            </a:r>
-            <a:endParaRPr lang="en-US" sz="1800" dirty="0">
-              <a:effectLst/>
-              <a:latin typeface="Calibri" panose="020F0502020204030204" pitchFamily="34" charset="0"/>
-              <a:ea typeface="Calibri" panose="020F0502020204030204" pitchFamily="34" charset="0"/>
-              <a:cs typeface="Arial" panose="020B0604020202020204" pitchFamily="34" charset="0"/>
-            </a:endParaRPr>
-          </a:p>
-          <a:p>
-            <a:pPr marL="342900" marR="0" lvl="0" indent="-342900">
-              <a:lnSpc>
-                <a:spcPct val="107000"/>
-              </a:lnSpc>
-              <a:spcBef>
-                <a:spcPts val="0"/>
-              </a:spcBef>
-              <a:spcAft>
-                <a:spcPts val="800"/>
-              </a:spcAft>
-              <a:buSzPts val="1000"/>
-              <a:buFont typeface="Symbol" panose="05050102010706020507" pitchFamily="18" charset="2"/>
-              <a:buChar char=""/>
-              <a:tabLst>
-                <a:tab pos="457200" algn="l"/>
-              </a:tabLst>
-            </a:pPr>
-            <a:r>
-              <a:rPr lang="en-US" sz="1800" b="1" dirty="0">
-                <a:effectLst/>
-                <a:latin typeface="Times New Roman" panose="02020603050405020304" pitchFamily="18" charset="0"/>
-                <a:ea typeface="Times New Roman" panose="02020603050405020304" pitchFamily="18" charset="0"/>
-                <a:cs typeface="Arial" panose="020B0604020202020204" pitchFamily="34" charset="0"/>
-              </a:rPr>
-              <a:t>Fault Tolerance</a:t>
-            </a:r>
-            <a:r>
-              <a:rPr lang="en-US" sz="1800" dirty="0">
-                <a:effectLst/>
-                <a:latin typeface="Times New Roman" panose="02020603050405020304" pitchFamily="18" charset="0"/>
-                <a:ea typeface="Times New Roman" panose="02020603050405020304" pitchFamily="18" charset="0"/>
-                <a:cs typeface="Arial" panose="020B0604020202020204" pitchFamily="34" charset="0"/>
-              </a:rPr>
-              <a:t>: Kafka’s distributed system ensures that data is not lost if a consumer or producer fails, and the system can continue functioning.</a:t>
-            </a:r>
-            <a:endParaRPr lang="en-US" sz="1800" dirty="0">
-              <a:effectLst/>
-              <a:latin typeface="Calibri" panose="020F0502020204030204" pitchFamily="34" charset="0"/>
-              <a:ea typeface="Calibri" panose="020F0502020204030204" pitchFamily="34" charset="0"/>
-              <a:cs typeface="Arial" panose="020B0604020202020204" pitchFamily="34" charset="0"/>
-            </a:endParaRPr>
-          </a:p>
-          <a:p>
-            <a:pPr marL="342900" marR="0" lvl="0" indent="-342900">
-              <a:lnSpc>
-                <a:spcPct val="107000"/>
-              </a:lnSpc>
-              <a:spcBef>
-                <a:spcPts val="0"/>
-              </a:spcBef>
-              <a:spcAft>
-                <a:spcPts val="800"/>
-              </a:spcAft>
-              <a:buSzPts val="1000"/>
-              <a:buFont typeface="Symbol" panose="05050102010706020507" pitchFamily="18" charset="2"/>
-              <a:buChar char=""/>
-              <a:tabLst>
-                <a:tab pos="457200" algn="l"/>
-              </a:tabLst>
-            </a:pPr>
-            <a:r>
-              <a:rPr lang="en-US" sz="1800" b="1" dirty="0">
-                <a:effectLst/>
-                <a:latin typeface="Times New Roman" panose="02020603050405020304" pitchFamily="18" charset="0"/>
-                <a:ea typeface="Times New Roman" panose="02020603050405020304" pitchFamily="18" charset="0"/>
-                <a:cs typeface="Arial" panose="020B0604020202020204" pitchFamily="34" charset="0"/>
-              </a:rPr>
-              <a:t>Scalability</a:t>
-            </a:r>
-            <a:r>
-              <a:rPr lang="en-US" sz="1800" dirty="0">
-                <a:effectLst/>
-                <a:latin typeface="Times New Roman" panose="02020603050405020304" pitchFamily="18" charset="0"/>
-                <a:ea typeface="Times New Roman" panose="02020603050405020304" pitchFamily="18" charset="0"/>
-                <a:cs typeface="Arial" panose="020B0604020202020204" pitchFamily="34" charset="0"/>
-              </a:rPr>
-              <a:t>: As the e-commerce platform grows, Kafka can scale to accommodate more products, orders, payments, and shipping updates.</a:t>
-            </a:r>
-            <a:endParaRPr lang="en-US" sz="1800" dirty="0">
-              <a:effectLst/>
-              <a:latin typeface="Calibri" panose="020F0502020204030204" pitchFamily="34" charset="0"/>
-              <a:ea typeface="Calibri" panose="020F0502020204030204" pitchFamily="34" charset="0"/>
-              <a:cs typeface="Arial" panose="020B0604020202020204" pitchFamily="34" charset="0"/>
-            </a:endParaRPr>
-          </a:p>
-          <a:p>
-            <a:pPr marL="342900" marR="0" lvl="0" indent="-342900">
-              <a:lnSpc>
-                <a:spcPct val="107000"/>
-              </a:lnSpc>
-              <a:spcBef>
-                <a:spcPts val="0"/>
-              </a:spcBef>
-              <a:spcAft>
-                <a:spcPts val="800"/>
-              </a:spcAft>
-              <a:buSzPts val="1000"/>
-              <a:buFont typeface="Symbol" panose="05050102010706020507" pitchFamily="18" charset="2"/>
-              <a:buChar char=""/>
-              <a:tabLst>
-                <a:tab pos="457200" algn="l"/>
-              </a:tabLst>
-            </a:pPr>
-            <a:r>
-              <a:rPr lang="en-US" sz="1800" b="1" dirty="0">
-                <a:effectLst/>
-                <a:latin typeface="Times New Roman" panose="02020603050405020304" pitchFamily="18" charset="0"/>
-                <a:ea typeface="Times New Roman" panose="02020603050405020304" pitchFamily="18" charset="0"/>
-                <a:cs typeface="Arial" panose="020B0604020202020204" pitchFamily="34" charset="0"/>
-              </a:rPr>
-              <a:t>Loose Coupling</a:t>
-            </a:r>
-            <a:r>
-              <a:rPr lang="en-US" sz="1800" dirty="0">
-                <a:effectLst/>
-                <a:latin typeface="Times New Roman" panose="02020603050405020304" pitchFamily="18" charset="0"/>
-                <a:ea typeface="Times New Roman" panose="02020603050405020304" pitchFamily="18" charset="0"/>
-                <a:cs typeface="Arial" panose="020B0604020202020204" pitchFamily="34" charset="0"/>
-              </a:rPr>
-              <a:t>: Kafka decouples producers (storefront, warehouse, payment gateway, etc.) and consumers (order processing, inventory, shipping) so that they can evolve independently.</a:t>
-            </a:r>
-            <a:endParaRPr lang="en-US" sz="1800" dirty="0">
-              <a:effectLst/>
-              <a:latin typeface="Calibri" panose="020F0502020204030204" pitchFamily="34" charset="0"/>
-              <a:ea typeface="Calibri" panose="020F0502020204030204" pitchFamily="34" charset="0"/>
-              <a:cs typeface="Arial" panose="020B0604020202020204" pitchFamily="34" charset="0"/>
-            </a:endParaRPr>
-          </a:p>
-          <a:p>
-            <a:endParaRPr lang="en-US" dirty="0"/>
-          </a:p>
-        </p:txBody>
-      </p:sp>
-    </p:spTree>
-    <p:extLst>
-      <p:ext uri="{BB962C8B-B14F-4D97-AF65-F5344CB8AC3E}">
-        <p14:creationId xmlns:p14="http://schemas.microsoft.com/office/powerpoint/2010/main" val="3443736079"/>
-      </p:ext>
-    </p:extLst>
-  </p:cSld>
-  <p:clrMapOvr>
-    <a:masterClrMapping/>
-  </p:clrMapOvr>
-</p:sld>
-</file>
-
-<file path=ppt/slides/slide3.xml><?xml version="1.0" encoding="utf-8"?>
-<p:sld xmlns:a="http://schemas.openxmlformats.org/drawingml/2006/main" xmlns:r="http://schemas.openxmlformats.org/officeDocument/2006/relationships" xmlns:p="http://schemas.openxmlformats.org/presentationml/2006/main">
-  <p:cSld>
-    <p:spTree>
-      <p:nvGrpSpPr>
-        <p:cNvPr id="1" name=""/>
-        <p:cNvGrpSpPr/>
-        <p:nvPr/>
-      </p:nvGrpSpPr>
-      <p:grpSpPr>
-        <a:xfrm>
-          <a:off x="0" y="0"/>
-          <a:ext cx="0" cy="0"/>
-          <a:chOff x="0" y="0"/>
-          <a:chExt cx="0" cy="0"/>
-        </a:xfrm>
-      </p:grpSpPr>
-      <p:sp>
-        <p:nvSpPr>
-          <p:cNvPr id="2" name="Title 1">
-            <a:extLst>
-              <a:ext uri="{FF2B5EF4-FFF2-40B4-BE49-F238E27FC236}">
-                <a16:creationId xmlns:a16="http://schemas.microsoft.com/office/drawing/2014/main" id="{28AF675C-3963-4D6A-1306-49A13120C036}"/>
-              </a:ext>
-            </a:extLst>
-          </p:cNvPr>
-          <p:cNvSpPr>
-            <a:spLocks noGrp="1"/>
-          </p:cNvSpPr>
-          <p:nvPr>
-            <p:ph type="title"/>
-          </p:nvPr>
-        </p:nvSpPr>
-        <p:spPr/>
-        <p:txBody>
-          <a:bodyPr/>
-          <a:lstStyle/>
-          <a:p>
-            <a:r>
-              <a:rPr lang="en-US"/>
-              <a:t>Speedup Concept</a:t>
-            </a:r>
-          </a:p>
-        </p:txBody>
-      </p:sp>
-      <p:pic>
-        <p:nvPicPr>
-          <p:cNvPr id="5" name="Content Placeholder 4">
-            <a:extLst>
-              <a:ext uri="{FF2B5EF4-FFF2-40B4-BE49-F238E27FC236}">
-                <a16:creationId xmlns:a16="http://schemas.microsoft.com/office/drawing/2014/main" id="{A95C5826-1816-6A55-9BE7-F70077964440}"/>
-              </a:ext>
-            </a:extLst>
-          </p:cNvPr>
-          <p:cNvPicPr>
-            <a:picLocks noGrp="1" noChangeAspect="1"/>
-          </p:cNvPicPr>
-          <p:nvPr>
-            <p:ph idx="1"/>
-          </p:nvPr>
-        </p:nvPicPr>
-        <p:blipFill>
-          <a:blip r:embed="rId2"/>
-          <a:stretch>
-            <a:fillRect/>
-          </a:stretch>
-        </p:blipFill>
-        <p:spPr>
-          <a:xfrm>
-            <a:off x="3015703" y="1706563"/>
-            <a:ext cx="5606556" cy="4991100"/>
-          </a:xfrm>
-        </p:spPr>
-      </p:pic>
-    </p:spTree>
-    <p:extLst>
-      <p:ext uri="{BB962C8B-B14F-4D97-AF65-F5344CB8AC3E}">
-        <p14:creationId xmlns:p14="http://schemas.microsoft.com/office/powerpoint/2010/main" val="3902878762"/>
-      </p:ext>
-    </p:extLst>
-  </p:cSld>
-  <p:clrMapOvr>
-    <a:masterClrMapping/>
-  </p:clrMapOvr>
-</p:sld>
-</file>
-
-<file path=ppt/slides/slide30.xml><?xml version="1.0" encoding="utf-8"?>
+<file path=ppt/slides/slide27.xml><?xml version="1.0" encoding="utf-8"?>
 <p:sld xmlns:a="http://schemas.openxmlformats.org/drawingml/2006/main" xmlns:r="http://schemas.openxmlformats.org/officeDocument/2006/relationships" xmlns:p="http://schemas.openxmlformats.org/presentationml/2006/main">
   <p:cSld>
     <p:spTree>
@@ -25661,7 +25636,7 @@
 </p:sld>
 </file>
 
-<file path=ppt/slides/slide31.xml><?xml version="1.0" encoding="utf-8"?>
+<file path=ppt/slides/slide28.xml><?xml version="1.0" encoding="utf-8"?>
 <p:sld xmlns:a="http://schemas.openxmlformats.org/drawingml/2006/main" xmlns:r="http://schemas.openxmlformats.org/officeDocument/2006/relationships" xmlns:p="http://schemas.openxmlformats.org/presentationml/2006/main">
   <p:cSld>
     <p:spTree>
@@ -27813,7 +27788,7 @@
 </p:sld>
 </file>
 
-<file path=ppt/slides/slide32.xml><?xml version="1.0" encoding="utf-8"?>
+<file path=ppt/slides/slide29.xml><?xml version="1.0" encoding="utf-8"?>
 <p:sld xmlns:a="http://schemas.openxmlformats.org/drawingml/2006/main" xmlns:r="http://schemas.openxmlformats.org/officeDocument/2006/relationships" xmlns:p="http://schemas.openxmlformats.org/presentationml/2006/main">
   <p:cSld>
     <p:spTree>
@@ -30658,7 +30633,94 @@
 </p:sld>
 </file>
 
-<file path=ppt/slides/slide33.xml><?xml version="1.0" encoding="utf-8"?>
+<file path=ppt/slides/slide3.xml><?xml version="1.0" encoding="utf-8"?>
+<p:sld xmlns:a="http://schemas.openxmlformats.org/drawingml/2006/main" xmlns:r="http://schemas.openxmlformats.org/officeDocument/2006/relationships" xmlns:p="http://schemas.openxmlformats.org/presentationml/2006/main">
+  <p:cSld>
+    <p:spTree>
+      <p:nvGrpSpPr>
+        <p:cNvPr id="1" name=""/>
+        <p:cNvGrpSpPr/>
+        <p:nvPr/>
+      </p:nvGrpSpPr>
+      <p:grpSpPr>
+        <a:xfrm>
+          <a:off x="0" y="0"/>
+          <a:ext cx="0" cy="0"/>
+          <a:chOff x="0" y="0"/>
+          <a:chExt cx="0" cy="0"/>
+        </a:xfrm>
+      </p:grpSpPr>
+      <p:sp>
+        <p:nvSpPr>
+          <p:cNvPr id="2" name="Title 1">
+            <a:extLst>
+              <a:ext uri="{FF2B5EF4-FFF2-40B4-BE49-F238E27FC236}">
+                <a16:creationId xmlns:a16="http://schemas.microsoft.com/office/drawing/2014/main" id="{28AF675C-3963-4D6A-1306-49A13120C036}"/>
+              </a:ext>
+            </a:extLst>
+          </p:cNvPr>
+          <p:cNvSpPr>
+            <a:spLocks noGrp="1"/>
+          </p:cNvSpPr>
+          <p:nvPr>
+            <p:ph type="title"/>
+          </p:nvPr>
+        </p:nvSpPr>
+        <p:spPr/>
+        <p:txBody>
+          <a:bodyPr/>
+          <a:lstStyle/>
+          <a:p>
+            <a:r>
+              <a:rPr lang="en-US"/>
+              <a:t>Speedup Concept</a:t>
+            </a:r>
+          </a:p>
+        </p:txBody>
+      </p:sp>
+      <p:pic>
+        <p:nvPicPr>
+          <p:cNvPr id="5" name="Content Placeholder 4">
+            <a:extLst>
+              <a:ext uri="{FF2B5EF4-FFF2-40B4-BE49-F238E27FC236}">
+                <a16:creationId xmlns:a16="http://schemas.microsoft.com/office/drawing/2014/main" id="{A95C5826-1816-6A55-9BE7-F70077964440}"/>
+              </a:ext>
+            </a:extLst>
+          </p:cNvPr>
+          <p:cNvPicPr>
+            <a:picLocks noGrp="1" noChangeAspect="1"/>
+          </p:cNvPicPr>
+          <p:nvPr>
+            <p:ph idx="1"/>
+          </p:nvPr>
+        </p:nvPicPr>
+        <p:blipFill>
+          <a:blip r:embed="rId2"/>
+          <a:stretch>
+            <a:fillRect/>
+          </a:stretch>
+        </p:blipFill>
+        <p:spPr>
+          <a:xfrm>
+            <a:off x="3015703" y="1706563"/>
+            <a:ext cx="5606556" cy="4991100"/>
+          </a:xfrm>
+        </p:spPr>
+      </p:pic>
+    </p:spTree>
+    <p:extLst>
+      <p:ext uri="{BB962C8B-B14F-4D97-AF65-F5344CB8AC3E}">
+        <p14:creationId xmlns:p14="http://schemas.microsoft.com/office/powerpoint/2010/main" val="3902878762"/>
+      </p:ext>
+    </p:extLst>
+  </p:cSld>
+  <p:clrMapOvr>
+    <a:masterClrMapping/>
+  </p:clrMapOvr>
+</p:sld>
+</file>
+
+<file path=ppt/slides/slide30.xml><?xml version="1.0" encoding="utf-8"?>
 <p:sld xmlns:a="http://schemas.openxmlformats.org/drawingml/2006/main" xmlns:r="http://schemas.openxmlformats.org/officeDocument/2006/relationships" xmlns:p="http://schemas.openxmlformats.org/presentationml/2006/main">
   <p:cSld>
     <p:spTree>
@@ -30745,7 +30807,7 @@
 </p:sld>
 </file>
 
-<file path=ppt/slides/slide34.xml><?xml version="1.0" encoding="utf-8"?>
+<file path=ppt/slides/slide31.xml><?xml version="1.0" encoding="utf-8"?>
 <p:sld xmlns:a="http://schemas.openxmlformats.org/drawingml/2006/main" xmlns:r="http://schemas.openxmlformats.org/officeDocument/2006/relationships" xmlns:p="http://schemas.openxmlformats.org/presentationml/2006/main">
   <p:cSld>
     <p:spTree>
@@ -31527,7 +31589,7 @@
 </p:sld>
 </file>
 
-<file path=ppt/slides/slide35.xml><?xml version="1.0" encoding="utf-8"?>
+<file path=ppt/slides/slide32.xml><?xml version="1.0" encoding="utf-8"?>
 <p:sld xmlns:a="http://schemas.openxmlformats.org/drawingml/2006/main" xmlns:r="http://schemas.openxmlformats.org/officeDocument/2006/relationships" xmlns:p="http://schemas.openxmlformats.org/presentationml/2006/main">
   <p:cSld>
     <p:spTree>
@@ -32365,7 +32427,7 @@
 </p:sld>
 </file>
 
-<file path=ppt/slides/slide36.xml><?xml version="1.0" encoding="utf-8"?>
+<file path=ppt/slides/slide33.xml><?xml version="1.0" encoding="utf-8"?>
 <p:sld xmlns:a="http://schemas.openxmlformats.org/drawingml/2006/main" xmlns:r="http://schemas.openxmlformats.org/officeDocument/2006/relationships" xmlns:p="http://schemas.openxmlformats.org/presentationml/2006/main">
   <p:cSld>
     <p:spTree>
@@ -32452,7 +32514,7 @@
 </p:sld>
 </file>
 
-<file path=ppt/slides/slide37.xml><?xml version="1.0" encoding="utf-8"?>
+<file path=ppt/slides/slide34.xml><?xml version="1.0" encoding="utf-8"?>
 <p:sld xmlns:a="http://schemas.openxmlformats.org/drawingml/2006/main" xmlns:r="http://schemas.openxmlformats.org/officeDocument/2006/relationships" xmlns:p="http://schemas.openxmlformats.org/presentationml/2006/main">
   <p:cSld>
     <p:spTree>
@@ -32761,7 +32823,7 @@
 </p:sld>
 </file>
 
-<file path=ppt/slides/slide38.xml><?xml version="1.0" encoding="utf-8"?>
+<file path=ppt/slides/slide35.xml><?xml version="1.0" encoding="utf-8"?>
 <p:sld xmlns:a="http://schemas.openxmlformats.org/drawingml/2006/main" xmlns:r="http://schemas.openxmlformats.org/officeDocument/2006/relationships" xmlns:p="http://schemas.openxmlformats.org/presentationml/2006/main">
   <p:cSld>
     <p:spTree>
